--- a/要件定義WBS案_20260806.pptx
+++ b/要件定義WBS案_20260806.pptx
@@ -9,6 +9,7 @@
     <p:sldId id="257" r:id="rId8"/>
     <p:sldId id="258" r:id="rId9"/>
     <p:sldId id="259" r:id="rId10"/>
+    <p:sldId id="260" r:id="rId11"/>
   </p:sldIdLst>
   <p:sldSz cx="9906000" cy="6858000" type="screen4x3"/>
   <p:notesSz cx="6858000" cy="9144000"/>
@@ -3485,7 +3486,7 @@
                 <a:latin typeface="メイリオ"/>
                 <a:ea typeface="メイリオ"/>
               </a:rPr>
-              <a:t>期間：2026/8/19（キックオフ）〜 2026/9末　｜　会議時間：各回 約2時間</a:t>
+              <a:t>期間：2026/8/19（キックオフ）〜 2026/9末　｜　全6回　｜　会議時間：各回 約2時間</a:t>
             </a:r>
           </a:p>
         </p:txBody>
@@ -3499,8 +3500,8 @@
           <p:nvPr/>
         </p:nvGraphicFramePr>
         <p:xfrm>
-          <a:off x="450000" y="1100000"/>
-          <a:ext cx="9000000" cy="4800000"/>
+          <a:off x="400000" y="1050000"/>
+          <a:ext cx="9100000" cy="4700000"/>
         </p:xfrm>
         <a:graphic>
           <a:graphicData uri="http://schemas.openxmlformats.org/drawingml/2006/table">
@@ -3509,13 +3510,13 @@
                 <a:tableStyleId>{5C22544A-7EE6-4342-B048-85BDC9FD1C3A}</a:tableStyleId>
               </a:tblPr>
               <a:tblGrid>
-                <a:gridCol w="900000"/>
+                <a:gridCol w="850000"/>
+                <a:gridCol w="1300000"/>
+                <a:gridCol w="4550000"/>
                 <a:gridCol w="1400000"/>
-                <a:gridCol w="4200000"/>
-                <a:gridCol w="1600000"/>
-                <a:gridCol w="900000"/>
+                <a:gridCol w="1000000"/>
               </a:tblGrid>
-              <a:tr h="533333">
+              <a:tr h="671428">
                 <a:tc>
                   <a:txBody>
                     <a:bodyPr wrap="square"/>
@@ -3757,7 +3758,7 @@
                   </a:tcPr>
                 </a:tc>
               </a:tr>
-              <a:tr h="533333">
+              <a:tr h="671428">
                 <a:tc>
                   <a:txBody>
                     <a:bodyPr wrap="square"/>
@@ -3861,14 +3862,27 @@
                     <a:p>
                       <a:pPr algn="l"/>
                       <a:r>
-                        <a:rPr sz="1100" b="0">
+                        <a:rPr sz="900" b="0">
                           <a:solidFill>
                             <a:srgbClr val="333333"/>
                           </a:solidFill>
                           <a:latin typeface="メイリオ"/>
                           <a:ea typeface="メイリオ"/>
                         </a:rPr>
-                        <a:t>キックオフ／要件定義の進め方について</a:t>
+                        <a:t>キックオフ／進め方・ご要件すり合わせ</a:t>
+                      </a:r>
+                    </a:p>
+                    <a:p>
+                      <a:pPr algn="l"/>
+                      <a:r>
+                        <a:rPr sz="900" b="0">
+                          <a:solidFill>
+                            <a:srgbClr val="333333"/>
+                          </a:solidFill>
+                          <a:latin typeface="メイリオ"/>
+                          <a:ea typeface="メイリオ"/>
+                        </a:rPr>
+                        <a:t>※既出のご要件を踏まえ、進め方と論点を合意</a:t>
                       </a:r>
                     </a:p>
                   </a:txBody>
@@ -3999,7 +4013,7 @@
                   </a:tcPr>
                 </a:tc>
               </a:tr>
-              <a:tr h="533333">
+              <a:tr h="671428">
                 <a:tc>
                   <a:txBody>
                     <a:bodyPr wrap="square"/>
@@ -4103,27 +4117,40 @@
                     <a:p>
                       <a:pPr algn="l"/>
                       <a:r>
-                        <a:rPr sz="1000" b="0">
+                        <a:rPr sz="900" b="0">
                           <a:solidFill>
                             <a:srgbClr val="333333"/>
                           </a:solidFill>
                           <a:latin typeface="メイリオ"/>
                           <a:ea typeface="メイリオ"/>
                         </a:rPr>
-                        <a:t>貴社ご要件の確認</a:t>
+                        <a:t>業務フロー検討</a:t>
                       </a:r>
                     </a:p>
                     <a:p>
                       <a:pPr algn="l"/>
                       <a:r>
-                        <a:rPr sz="1000" b="0">
+                        <a:rPr sz="900" b="0">
                           <a:solidFill>
                             <a:srgbClr val="333333"/>
                           </a:solidFill>
                           <a:latin typeface="メイリオ"/>
                           <a:ea typeface="メイリオ"/>
                         </a:rPr>
-                        <a:t>※貴社からご要件のご説明をお願いします</a:t>
+                        <a:t>サプライヤー管理／販売組織／在庫・引当／</a:t>
+                      </a:r>
+                    </a:p>
+                    <a:p>
+                      <a:pPr algn="l"/>
+                      <a:r>
+                        <a:rPr sz="900" b="0">
+                          <a:solidFill>
+                            <a:srgbClr val="333333"/>
+                          </a:solidFill>
+                          <a:latin typeface="メイリオ"/>
+                          <a:ea typeface="メイリオ"/>
+                        </a:rPr>
+                        <a:t>注文〜出荷・請求など具体業務の整理</a:t>
                       </a:r>
                     </a:p>
                   </a:txBody>
@@ -4164,27 +4191,14 @@
                     <a:p>
                       <a:pPr algn="ctr"/>
                       <a:r>
-                        <a:rPr sz="1000" b="1">
+                        <a:rPr sz="1100" b="0">
                           <a:solidFill>
-                            <a:srgbClr val="007A6E"/>
+                            <a:srgbClr val="333333"/>
                           </a:solidFill>
                           <a:latin typeface="メイリオ"/>
                           <a:ea typeface="メイリオ"/>
                         </a:rPr>
-                        <a:t>ローリングス</a:t>
-                      </a:r>
-                    </a:p>
-                    <a:p>
-                      <a:pPr algn="ctr"/>
-                      <a:r>
-                        <a:rPr sz="1000" b="1">
-                          <a:solidFill>
-                            <a:srgbClr val="007A6E"/>
-                          </a:solidFill>
-                          <a:latin typeface="メイリオ"/>
-                          <a:ea typeface="メイリオ"/>
-                        </a:rPr>
-                        <a:t>ジャパン様</a:t>
+                        <a:t>ECR</a:t>
                       </a:r>
                     </a:p>
                   </a:txBody>
@@ -4267,7 +4281,7 @@
                   </a:tcPr>
                 </a:tc>
               </a:tr>
-              <a:tr h="533333">
+              <a:tr h="671428">
                 <a:tc>
                   <a:txBody>
                     <a:bodyPr wrap="square"/>
@@ -4330,7 +4344,7 @@
                           <a:latin typeface="メイリオ"/>
                           <a:ea typeface="メイリオ"/>
                         </a:rPr>
-                        <a:t>9/2（水）</a:t>
+                        <a:t>9/9（水）</a:t>
                       </a:r>
                     </a:p>
                   </a:txBody>
@@ -4371,14 +4385,40 @@
                     <a:p>
                       <a:pPr algn="l"/>
                       <a:r>
-                        <a:rPr sz="1100" b="0">
+                        <a:rPr sz="900" b="0">
                           <a:solidFill>
                             <a:srgbClr val="333333"/>
                           </a:solidFill>
                           <a:latin typeface="メイリオ"/>
                           <a:ea typeface="メイリオ"/>
                         </a:rPr>
-                        <a:t>業務フロー検討</a:t>
+                        <a:t>機能詳細検討（Fit&amp;Gap）</a:t>
+                      </a:r>
+                    </a:p>
+                    <a:p>
+                      <a:pPr algn="l"/>
+                      <a:r>
+                        <a:rPr sz="900" b="0">
+                          <a:solidFill>
+                            <a:srgbClr val="333333"/>
+                          </a:solidFill>
+                          <a:latin typeface="メイリオ"/>
+                          <a:ea typeface="メイリオ"/>
+                        </a:rPr>
+                        <a:t>マルチサプライヤー・販売組織管理・基幹連携・</a:t>
+                      </a:r>
+                    </a:p>
+                    <a:p>
+                      <a:pPr algn="l"/>
+                      <a:r>
+                        <a:rPr sz="900" b="0">
+                          <a:solidFill>
+                            <a:srgbClr val="333333"/>
+                          </a:solidFill>
+                          <a:latin typeface="メイリオ"/>
+                          <a:ea typeface="メイリオ"/>
+                        </a:rPr>
+                        <a:t>フロント等、Primo標準との差分を具体化</a:t>
                       </a:r>
                     </a:p>
                   </a:txBody>
@@ -4509,7 +4549,7 @@
                   </a:tcPr>
                 </a:tc>
               </a:tr>
-              <a:tr h="533333">
+              <a:tr h="671428">
                 <a:tc>
                   <a:txBody>
                     <a:bodyPr wrap="square"/>
@@ -4572,7 +4612,7 @@
                           <a:latin typeface="メイリオ"/>
                           <a:ea typeface="メイリオ"/>
                         </a:rPr>
-                        <a:t>9/9（水）</a:t>
+                        <a:t>9/16（水）</a:t>
                       </a:r>
                     </a:p>
                   </a:txBody>
@@ -4613,14 +4653,27 @@
                     <a:p>
                       <a:pPr algn="l"/>
                       <a:r>
-                        <a:rPr sz="1100" b="0">
+                        <a:rPr sz="900" b="0">
                           <a:solidFill>
                             <a:srgbClr val="333333"/>
                           </a:solidFill>
                           <a:latin typeface="メイリオ"/>
                           <a:ea typeface="メイリオ"/>
                         </a:rPr>
-                        <a:t>機能詳細検討</a:t>
+                        <a:t>非機能要件検討</a:t>
+                      </a:r>
+                    </a:p>
+                    <a:p>
+                      <a:pPr algn="l"/>
+                      <a:r>
+                        <a:rPr sz="900" b="0">
+                          <a:solidFill>
+                            <a:srgbClr val="333333"/>
+                          </a:solidFill>
+                          <a:latin typeface="メイリオ"/>
+                          <a:ea typeface="メイリオ"/>
+                        </a:rPr>
+                        <a:t>性能・セキュリティ・運用・データ移行等</a:t>
                       </a:r>
                     </a:p>
                   </a:txBody>
@@ -4751,7 +4804,7 @@
                   </a:tcPr>
                 </a:tc>
               </a:tr>
-              <a:tr h="533333">
+              <a:tr h="671428">
                 <a:tc>
                   <a:txBody>
                     <a:bodyPr wrap="square"/>
@@ -4814,7 +4867,7 @@
                           <a:latin typeface="メイリオ"/>
                           <a:ea typeface="メイリオ"/>
                         </a:rPr>
-                        <a:t>9/16（水）</a:t>
+                        <a:t>9/24（木）</a:t>
                       </a:r>
                     </a:p>
                   </a:txBody>
@@ -4855,14 +4908,27 @@
                     <a:p>
                       <a:pPr algn="l"/>
                       <a:r>
-                        <a:rPr sz="1100" b="0">
+                        <a:rPr sz="900" b="0">
                           <a:solidFill>
                             <a:srgbClr val="333333"/>
                           </a:solidFill>
                           <a:latin typeface="メイリオ"/>
                           <a:ea typeface="メイリオ"/>
                         </a:rPr>
-                        <a:t>非機能要件検討</a:t>
+                        <a:t>要件定義まとめ</a:t>
+                      </a:r>
+                    </a:p>
+                    <a:p>
+                      <a:pPr algn="l"/>
+                      <a:r>
+                        <a:rPr sz="900" b="0">
+                          <a:solidFill>
+                            <a:srgbClr val="333333"/>
+                          </a:solidFill>
+                          <a:latin typeface="メイリオ"/>
+                          <a:ea typeface="メイリオ"/>
+                        </a:rPr>
+                        <a:t>要件定義書（案）レビュー</a:t>
                       </a:r>
                     </a:p>
                   </a:txBody>
@@ -4993,7 +5059,7 @@
                   </a:tcPr>
                 </a:tc>
               </a:tr>
-              <a:tr h="533333">
+              <a:tr h="671432">
                 <a:tc>
                   <a:txBody>
                     <a:bodyPr wrap="square"/>
@@ -5056,7 +5122,7 @@
                           <a:latin typeface="メイリオ"/>
                           <a:ea typeface="メイリオ"/>
                         </a:rPr>
-                        <a:t>9/24（木）</a:t>
+                        <a:t>9/29（火）</a:t>
                       </a:r>
                     </a:p>
                   </a:txBody>
@@ -5097,14 +5163,14 @@
                     <a:p>
                       <a:pPr algn="l"/>
                       <a:r>
-                        <a:rPr sz="1100" b="0">
+                        <a:rPr sz="1000" b="0">
                           <a:solidFill>
                             <a:srgbClr val="333333"/>
                           </a:solidFill>
                           <a:latin typeface="メイリオ"/>
                           <a:ea typeface="メイリオ"/>
                         </a:rPr>
-                        <a:t>要件定義まとめ</a:t>
+                        <a:t>納品・正式見積り提示／ご検収</a:t>
                       </a:r>
                     </a:p>
                   </a:txBody>
@@ -5235,490 +5301,6 @@
                   </a:tcPr>
                 </a:tc>
               </a:tr>
-              <a:tr h="533333">
-                <a:tc>
-                  <a:txBody>
-                    <a:bodyPr wrap="square"/>
-                    <a:lstStyle/>
-                    <a:p>
-                      <a:pPr algn="ctr"/>
-                      <a:r>
-                        <a:rPr sz="1100" b="1">
-                          <a:solidFill>
-                            <a:srgbClr val="333333"/>
-                          </a:solidFill>
-                          <a:latin typeface="メイリオ"/>
-                          <a:ea typeface="メイリオ"/>
-                        </a:rPr>
-                        <a:t>7回目</a:t>
-                      </a:r>
-                    </a:p>
-                  </a:txBody>
-                  <a:tcPr anchor="ctr">
-                    <a:solidFill>
-                      <a:srgbClr val="F0FAF8"/>
-                    </a:solidFill>
-                    <a:lnL w="6350" cap="flat" cmpd="sng" algn="ctr">
-                      <a:solidFill>
-                        <a:srgbClr val="CCCCCC"/>
-                      </a:solidFill>
-                      <a:prstDash val="solid"/>
-                    </a:lnL>
-                    <a:lnR w="6350" cap="flat" cmpd="sng" algn="ctr">
-                      <a:solidFill>
-                        <a:srgbClr val="CCCCCC"/>
-                      </a:solidFill>
-                      <a:prstDash val="solid"/>
-                    </a:lnR>
-                    <a:lnT w="6350" cap="flat" cmpd="sng" algn="ctr">
-                      <a:solidFill>
-                        <a:srgbClr val="CCCCCC"/>
-                      </a:solidFill>
-                      <a:prstDash val="solid"/>
-                    </a:lnT>
-                    <a:lnB w="6350" cap="flat" cmpd="sng" algn="ctr">
-                      <a:solidFill>
-                        <a:srgbClr val="CCCCCC"/>
-                      </a:solidFill>
-                      <a:prstDash val="solid"/>
-                    </a:lnB>
-                  </a:tcPr>
-                </a:tc>
-                <a:tc>
-                  <a:txBody>
-                    <a:bodyPr wrap="square"/>
-                    <a:lstStyle/>
-                    <a:p>
-                      <a:pPr algn="ctr"/>
-                      <a:r>
-                        <a:rPr sz="1100" b="0">
-                          <a:solidFill>
-                            <a:srgbClr val="333333"/>
-                          </a:solidFill>
-                          <a:latin typeface="メイリオ"/>
-                          <a:ea typeface="メイリオ"/>
-                        </a:rPr>
-                        <a:t>9/29（火）</a:t>
-                      </a:r>
-                    </a:p>
-                  </a:txBody>
-                  <a:tcPr anchor="ctr">
-                    <a:solidFill>
-                      <a:srgbClr val="F0FAF8"/>
-                    </a:solidFill>
-                    <a:lnL w="6350" cap="flat" cmpd="sng" algn="ctr">
-                      <a:solidFill>
-                        <a:srgbClr val="CCCCCC"/>
-                      </a:solidFill>
-                      <a:prstDash val="solid"/>
-                    </a:lnL>
-                    <a:lnR w="6350" cap="flat" cmpd="sng" algn="ctr">
-                      <a:solidFill>
-                        <a:srgbClr val="CCCCCC"/>
-                      </a:solidFill>
-                      <a:prstDash val="solid"/>
-                    </a:lnR>
-                    <a:lnT w="6350" cap="flat" cmpd="sng" algn="ctr">
-                      <a:solidFill>
-                        <a:srgbClr val="CCCCCC"/>
-                      </a:solidFill>
-                      <a:prstDash val="solid"/>
-                    </a:lnT>
-                    <a:lnB w="6350" cap="flat" cmpd="sng" algn="ctr">
-                      <a:solidFill>
-                        <a:srgbClr val="CCCCCC"/>
-                      </a:solidFill>
-                      <a:prstDash val="solid"/>
-                    </a:lnB>
-                  </a:tcPr>
-                </a:tc>
-                <a:tc>
-                  <a:txBody>
-                    <a:bodyPr wrap="square"/>
-                    <a:lstStyle/>
-                    <a:p>
-                      <a:pPr algn="l"/>
-                      <a:r>
-                        <a:rPr sz="1100" b="0">
-                          <a:solidFill>
-                            <a:srgbClr val="333333"/>
-                          </a:solidFill>
-                          <a:latin typeface="メイリオ"/>
-                          <a:ea typeface="メイリオ"/>
-                        </a:rPr>
-                        <a:t>納品・正式見積り提示</a:t>
-                      </a:r>
-                    </a:p>
-                  </a:txBody>
-                  <a:tcPr anchor="ctr">
-                    <a:solidFill>
-                      <a:srgbClr val="F0FAF8"/>
-                    </a:solidFill>
-                    <a:lnL w="6350" cap="flat" cmpd="sng" algn="ctr">
-                      <a:solidFill>
-                        <a:srgbClr val="CCCCCC"/>
-                      </a:solidFill>
-                      <a:prstDash val="solid"/>
-                    </a:lnL>
-                    <a:lnR w="6350" cap="flat" cmpd="sng" algn="ctr">
-                      <a:solidFill>
-                        <a:srgbClr val="CCCCCC"/>
-                      </a:solidFill>
-                      <a:prstDash val="solid"/>
-                    </a:lnR>
-                    <a:lnT w="6350" cap="flat" cmpd="sng" algn="ctr">
-                      <a:solidFill>
-                        <a:srgbClr val="CCCCCC"/>
-                      </a:solidFill>
-                      <a:prstDash val="solid"/>
-                    </a:lnT>
-                    <a:lnB w="6350" cap="flat" cmpd="sng" algn="ctr">
-                      <a:solidFill>
-                        <a:srgbClr val="CCCCCC"/>
-                      </a:solidFill>
-                      <a:prstDash val="solid"/>
-                    </a:lnB>
-                  </a:tcPr>
-                </a:tc>
-                <a:tc>
-                  <a:txBody>
-                    <a:bodyPr wrap="square"/>
-                    <a:lstStyle/>
-                    <a:p>
-                      <a:pPr algn="ctr"/>
-                      <a:r>
-                        <a:rPr sz="1100" b="0">
-                          <a:solidFill>
-                            <a:srgbClr val="333333"/>
-                          </a:solidFill>
-                          <a:latin typeface="メイリオ"/>
-                          <a:ea typeface="メイリオ"/>
-                        </a:rPr>
-                        <a:t>ECR</a:t>
-                      </a:r>
-                    </a:p>
-                  </a:txBody>
-                  <a:tcPr anchor="ctr">
-                    <a:solidFill>
-                      <a:srgbClr val="F0FAF8"/>
-                    </a:solidFill>
-                    <a:lnL w="6350" cap="flat" cmpd="sng" algn="ctr">
-                      <a:solidFill>
-                        <a:srgbClr val="CCCCCC"/>
-                      </a:solidFill>
-                      <a:prstDash val="solid"/>
-                    </a:lnL>
-                    <a:lnR w="6350" cap="flat" cmpd="sng" algn="ctr">
-                      <a:solidFill>
-                        <a:srgbClr val="CCCCCC"/>
-                      </a:solidFill>
-                      <a:prstDash val="solid"/>
-                    </a:lnR>
-                    <a:lnT w="6350" cap="flat" cmpd="sng" algn="ctr">
-                      <a:solidFill>
-                        <a:srgbClr val="CCCCCC"/>
-                      </a:solidFill>
-                      <a:prstDash val="solid"/>
-                    </a:lnT>
-                    <a:lnB w="6350" cap="flat" cmpd="sng" algn="ctr">
-                      <a:solidFill>
-                        <a:srgbClr val="CCCCCC"/>
-                      </a:solidFill>
-                      <a:prstDash val="solid"/>
-                    </a:lnB>
-                  </a:tcPr>
-                </a:tc>
-                <a:tc>
-                  <a:txBody>
-                    <a:bodyPr wrap="square"/>
-                    <a:lstStyle/>
-                    <a:p>
-                      <a:pPr algn="ctr"/>
-                      <a:r>
-                        <a:rPr sz="1100" b="0">
-                          <a:solidFill>
-                            <a:srgbClr val="333333"/>
-                          </a:solidFill>
-                          <a:latin typeface="メイリオ"/>
-                          <a:ea typeface="メイリオ"/>
-                        </a:rPr>
-                        <a:t>2h</a:t>
-                      </a:r>
-                    </a:p>
-                  </a:txBody>
-                  <a:tcPr anchor="ctr">
-                    <a:solidFill>
-                      <a:srgbClr val="F0FAF8"/>
-                    </a:solidFill>
-                    <a:lnL w="6350" cap="flat" cmpd="sng" algn="ctr">
-                      <a:solidFill>
-                        <a:srgbClr val="CCCCCC"/>
-                      </a:solidFill>
-                      <a:prstDash val="solid"/>
-                    </a:lnL>
-                    <a:lnR w="6350" cap="flat" cmpd="sng" algn="ctr">
-                      <a:solidFill>
-                        <a:srgbClr val="CCCCCC"/>
-                      </a:solidFill>
-                      <a:prstDash val="solid"/>
-                    </a:lnR>
-                    <a:lnT w="6350" cap="flat" cmpd="sng" algn="ctr">
-                      <a:solidFill>
-                        <a:srgbClr val="CCCCCC"/>
-                      </a:solidFill>
-                      <a:prstDash val="solid"/>
-                    </a:lnT>
-                    <a:lnB w="6350" cap="flat" cmpd="sng" algn="ctr">
-                      <a:solidFill>
-                        <a:srgbClr val="CCCCCC"/>
-                      </a:solidFill>
-                      <a:prstDash val="solid"/>
-                    </a:lnB>
-                  </a:tcPr>
-                </a:tc>
-              </a:tr>
-              <a:tr h="533336">
-                <a:tc>
-                  <a:txBody>
-                    <a:bodyPr wrap="square"/>
-                    <a:lstStyle/>
-                    <a:p>
-                      <a:pPr algn="ctr"/>
-                      <a:r>
-                        <a:rPr sz="1100" b="1">
-                          <a:solidFill>
-                            <a:srgbClr val="333333"/>
-                          </a:solidFill>
-                          <a:latin typeface="メイリオ"/>
-                          <a:ea typeface="メイリオ"/>
-                        </a:rPr>
-                        <a:t>8回目</a:t>
-                      </a:r>
-                    </a:p>
-                  </a:txBody>
-                  <a:tcPr anchor="ctr">
-                    <a:solidFill>
-                      <a:srgbClr val="FFFFFF"/>
-                    </a:solidFill>
-                    <a:lnL w="6350" cap="flat" cmpd="sng" algn="ctr">
-                      <a:solidFill>
-                        <a:srgbClr val="CCCCCC"/>
-                      </a:solidFill>
-                      <a:prstDash val="solid"/>
-                    </a:lnL>
-                    <a:lnR w="6350" cap="flat" cmpd="sng" algn="ctr">
-                      <a:solidFill>
-                        <a:srgbClr val="CCCCCC"/>
-                      </a:solidFill>
-                      <a:prstDash val="solid"/>
-                    </a:lnR>
-                    <a:lnT w="6350" cap="flat" cmpd="sng" algn="ctr">
-                      <a:solidFill>
-                        <a:srgbClr val="CCCCCC"/>
-                      </a:solidFill>
-                      <a:prstDash val="solid"/>
-                    </a:lnT>
-                    <a:lnB w="6350" cap="flat" cmpd="sng" algn="ctr">
-                      <a:solidFill>
-                        <a:srgbClr val="CCCCCC"/>
-                      </a:solidFill>
-                      <a:prstDash val="solid"/>
-                    </a:lnB>
-                  </a:tcPr>
-                </a:tc>
-                <a:tc>
-                  <a:txBody>
-                    <a:bodyPr wrap="square"/>
-                    <a:lstStyle/>
-                    <a:p>
-                      <a:pPr algn="ctr"/>
-                      <a:r>
-                        <a:rPr sz="1100" b="0">
-                          <a:solidFill>
-                            <a:srgbClr val="333333"/>
-                          </a:solidFill>
-                          <a:latin typeface="メイリオ"/>
-                          <a:ea typeface="メイリオ"/>
-                        </a:rPr>
-                        <a:t>9/30（水）</a:t>
-                      </a:r>
-                    </a:p>
-                  </a:txBody>
-                  <a:tcPr anchor="ctr">
-                    <a:solidFill>
-                      <a:srgbClr val="FFFFFF"/>
-                    </a:solidFill>
-                    <a:lnL w="6350" cap="flat" cmpd="sng" algn="ctr">
-                      <a:solidFill>
-                        <a:srgbClr val="CCCCCC"/>
-                      </a:solidFill>
-                      <a:prstDash val="solid"/>
-                    </a:lnL>
-                    <a:lnR w="6350" cap="flat" cmpd="sng" algn="ctr">
-                      <a:solidFill>
-                        <a:srgbClr val="CCCCCC"/>
-                      </a:solidFill>
-                      <a:prstDash val="solid"/>
-                    </a:lnR>
-                    <a:lnT w="6350" cap="flat" cmpd="sng" algn="ctr">
-                      <a:solidFill>
-                        <a:srgbClr val="CCCCCC"/>
-                      </a:solidFill>
-                      <a:prstDash val="solid"/>
-                    </a:lnT>
-                    <a:lnB w="6350" cap="flat" cmpd="sng" algn="ctr">
-                      <a:solidFill>
-                        <a:srgbClr val="CCCCCC"/>
-                      </a:solidFill>
-                      <a:prstDash val="solid"/>
-                    </a:lnB>
-                  </a:tcPr>
-                </a:tc>
-                <a:tc>
-                  <a:txBody>
-                    <a:bodyPr wrap="square"/>
-                    <a:lstStyle/>
-                    <a:p>
-                      <a:pPr algn="l"/>
-                      <a:r>
-                        <a:rPr sz="1100" b="0">
-                          <a:solidFill>
-                            <a:srgbClr val="333333"/>
-                          </a:solidFill>
-                          <a:latin typeface="メイリオ"/>
-                          <a:ea typeface="メイリオ"/>
-                        </a:rPr>
-                        <a:t>ご検収</a:t>
-                      </a:r>
-                    </a:p>
-                  </a:txBody>
-                  <a:tcPr anchor="ctr">
-                    <a:solidFill>
-                      <a:srgbClr val="FFFFFF"/>
-                    </a:solidFill>
-                    <a:lnL w="6350" cap="flat" cmpd="sng" algn="ctr">
-                      <a:solidFill>
-                        <a:srgbClr val="CCCCCC"/>
-                      </a:solidFill>
-                      <a:prstDash val="solid"/>
-                    </a:lnL>
-                    <a:lnR w="6350" cap="flat" cmpd="sng" algn="ctr">
-                      <a:solidFill>
-                        <a:srgbClr val="CCCCCC"/>
-                      </a:solidFill>
-                      <a:prstDash val="solid"/>
-                    </a:lnR>
-                    <a:lnT w="6350" cap="flat" cmpd="sng" algn="ctr">
-                      <a:solidFill>
-                        <a:srgbClr val="CCCCCC"/>
-                      </a:solidFill>
-                      <a:prstDash val="solid"/>
-                    </a:lnT>
-                    <a:lnB w="6350" cap="flat" cmpd="sng" algn="ctr">
-                      <a:solidFill>
-                        <a:srgbClr val="CCCCCC"/>
-                      </a:solidFill>
-                      <a:prstDash val="solid"/>
-                    </a:lnB>
-                  </a:tcPr>
-                </a:tc>
-                <a:tc>
-                  <a:txBody>
-                    <a:bodyPr wrap="square"/>
-                    <a:lstStyle/>
-                    <a:p>
-                      <a:pPr algn="ctr"/>
-                      <a:r>
-                        <a:rPr sz="1100" b="0">
-                          <a:solidFill>
-                            <a:srgbClr val="333333"/>
-                          </a:solidFill>
-                          <a:latin typeface="メイリオ"/>
-                          <a:ea typeface="メイリオ"/>
-                        </a:rPr>
-                        <a:t>ECR</a:t>
-                      </a:r>
-                    </a:p>
-                  </a:txBody>
-                  <a:tcPr anchor="ctr">
-                    <a:solidFill>
-                      <a:srgbClr val="FFFFFF"/>
-                    </a:solidFill>
-                    <a:lnL w="6350" cap="flat" cmpd="sng" algn="ctr">
-                      <a:solidFill>
-                        <a:srgbClr val="CCCCCC"/>
-                      </a:solidFill>
-                      <a:prstDash val="solid"/>
-                    </a:lnL>
-                    <a:lnR w="6350" cap="flat" cmpd="sng" algn="ctr">
-                      <a:solidFill>
-                        <a:srgbClr val="CCCCCC"/>
-                      </a:solidFill>
-                      <a:prstDash val="solid"/>
-                    </a:lnR>
-                    <a:lnT w="6350" cap="flat" cmpd="sng" algn="ctr">
-                      <a:solidFill>
-                        <a:srgbClr val="CCCCCC"/>
-                      </a:solidFill>
-                      <a:prstDash val="solid"/>
-                    </a:lnT>
-                    <a:lnB w="6350" cap="flat" cmpd="sng" algn="ctr">
-                      <a:solidFill>
-                        <a:srgbClr val="CCCCCC"/>
-                      </a:solidFill>
-                      <a:prstDash val="solid"/>
-                    </a:lnB>
-                  </a:tcPr>
-                </a:tc>
-                <a:tc>
-                  <a:txBody>
-                    <a:bodyPr wrap="square"/>
-                    <a:lstStyle/>
-                    <a:p>
-                      <a:pPr algn="ctr"/>
-                      <a:r>
-                        <a:rPr sz="1100" b="0">
-                          <a:solidFill>
-                            <a:srgbClr val="333333"/>
-                          </a:solidFill>
-                          <a:latin typeface="メイリオ"/>
-                          <a:ea typeface="メイリオ"/>
-                        </a:rPr>
-                        <a:t>2h</a:t>
-                      </a:r>
-                    </a:p>
-                  </a:txBody>
-                  <a:tcPr anchor="ctr">
-                    <a:solidFill>
-                      <a:srgbClr val="FFFFFF"/>
-                    </a:solidFill>
-                    <a:lnL w="6350" cap="flat" cmpd="sng" algn="ctr">
-                      <a:solidFill>
-                        <a:srgbClr val="CCCCCC"/>
-                      </a:solidFill>
-                      <a:prstDash val="solid"/>
-                    </a:lnL>
-                    <a:lnR w="6350" cap="flat" cmpd="sng" algn="ctr">
-                      <a:solidFill>
-                        <a:srgbClr val="CCCCCC"/>
-                      </a:solidFill>
-                      <a:prstDash val="solid"/>
-                    </a:lnR>
-                    <a:lnT w="6350" cap="flat" cmpd="sng" algn="ctr">
-                      <a:solidFill>
-                        <a:srgbClr val="CCCCCC"/>
-                      </a:solidFill>
-                      <a:prstDash val="solid"/>
-                    </a:lnT>
-                    <a:lnB w="6350" cap="flat" cmpd="sng" algn="ctr">
-                      <a:solidFill>
-                        <a:srgbClr val="CCCCCC"/>
-                      </a:solidFill>
-                      <a:prstDash val="solid"/>
-                    </a:lnB>
-                  </a:tcPr>
-                </a:tc>
-              </a:tr>
             </a:tbl>
           </a:graphicData>
         </a:graphic>
@@ -5731,8 +5313,8 @@
         </p:nvSpPr>
         <p:spPr>
           <a:xfrm>
-            <a:off x="450000" y="6000000"/>
-            <a:ext cx="9000000" cy="700000"/>
+            <a:off x="400000" y="5850000"/>
+            <a:ext cx="9100000" cy="800000"/>
           </a:xfrm>
           <a:prstGeom prst="rect">
             <a:avLst/>
@@ -5746,7 +5328,7 @@
           <a:lstStyle/>
           <a:p>
             <a:r>
-              <a:rPr sz="1000" b="0">
+              <a:rPr sz="900" b="0">
                 <a:solidFill>
                   <a:srgbClr val="666666"/>
                 </a:solidFill>
@@ -5758,14 +5340,26 @@
           </a:p>
           <a:p>
             <a:r>
-              <a:rPr sz="1000" b="0">
+              <a:rPr sz="900" b="0">
                 <a:solidFill>
                   <a:srgbClr val="666666"/>
                 </a:solidFill>
                 <a:latin typeface="メイリオ"/>
                 <a:ea typeface="メイリオ"/>
               </a:rPr>
-              <a:t>※2回目は貴社より現行業務・ご要件のご説明をいただく想定です。事前資料のご共有があるとスムーズです。</a:t>
+              <a:t>※ご要件の個別ヒアリング回は設けず、キックオフですり合わせたうえで、業務フロー／機能詳細で具体化します。</a:t>
+            </a:r>
+          </a:p>
+          <a:p>
+            <a:r>
+              <a:rPr sz="900" b="0">
+                <a:solidFill>
+                  <a:srgbClr val="666666"/>
+                </a:solidFill>
+                <a:latin typeface="メイリオ"/>
+                <a:ea typeface="メイリオ"/>
+              </a:rPr>
+              <a:t>※必要に応じ、業務フロー／機能詳細は論点量に応じて分割・追加開催も検討します。</a:t>
             </a:r>
           </a:p>
         </p:txBody>
@@ -5855,28 +5449,64 @@
           <a:p>
             <a:pPr algn="l"/>
             <a:r>
-              <a:rPr sz="2400" b="1">
+              <a:rPr sz="2200" b="1">
                 <a:solidFill>
                   <a:srgbClr val="3F3F3F"/>
                 </a:solidFill>
                 <a:latin typeface="メイリオ"/>
                 <a:ea typeface="メイリオ"/>
               </a:rPr>
-              <a:t>要件定義フェーズの進め方（概要）</a:t>
-            </a:r>
-          </a:p>
-        </p:txBody>
-      </p:sp>
-      <p:sp>
-        <p:nvSpPr>
-          <p:cNvPr id="4" name="Rounded Rectangle 3"/>
+              <a:t>業務フロー／機能詳細で扱う論点（例）</a:t>
+            </a:r>
+          </a:p>
+        </p:txBody>
+      </p:sp>
+      <p:sp>
+        <p:nvSpPr>
+          <p:cNvPr id="4" name="TextBox 3"/>
+          <p:cNvSpPr txBox="1"/>
+          <p:nvPr/>
+        </p:nvSpPr>
+        <p:spPr>
+          <a:xfrm>
+            <a:off x="480000" y="680000"/>
+            <a:ext cx="9000000" cy="300000"/>
+          </a:xfrm>
+          <a:prstGeom prst="rect">
+            <a:avLst/>
+          </a:prstGeom>
+          <a:noFill/>
+        </p:spPr>
+        <p:txBody>
+          <a:bodyPr wrap="square">
+            <a:spAutoFit/>
+          </a:bodyPr>
+          <a:lstStyle/>
+          <a:p>
+            <a:pPr algn="l"/>
+            <a:r>
+              <a:rPr sz="1100" b="0">
+                <a:solidFill>
+                  <a:srgbClr val="666666"/>
+                </a:solidFill>
+                <a:latin typeface="メイリオ"/>
+                <a:ea typeface="メイリオ"/>
+              </a:rPr>
+              <a:t>ご提示済みのご要件を、サプライヤー管理・販売組織などの機能粒度まで落として検討します</a:t>
+            </a:r>
+          </a:p>
+        </p:txBody>
+      </p:sp>
+      <p:sp>
+        <p:nvSpPr>
+          <p:cNvPr id="5" name="Rounded Rectangle 4"/>
           <p:cNvSpPr/>
           <p:nvPr/>
         </p:nvSpPr>
         <p:spPr>
           <a:xfrm>
-            <a:off x="400000" y="1000000"/>
-            <a:ext cx="1500000" cy="1500000"/>
+            <a:off x="400000" y="1100000"/>
+            <a:ext cx="4400000" cy="4800000"/>
           </a:xfrm>
           <a:prstGeom prst="roundRect">
             <a:avLst/>
@@ -5884,7 +5514,7 @@
           <a:solidFill>
             <a:srgbClr val="DEF3F1"/>
           </a:solidFill>
-          <a:ln w="19050">
+          <a:ln w="15875">
             <a:solidFill>
               <a:srgbClr val="00A693"/>
             </a:solidFill>
@@ -5905,99 +5535,6 @@
           </a:fontRef>
         </p:style>
         <p:txBody>
-          <a:bodyPr rtlCol="0" anchor="ctr" wrap="square"/>
-          <a:lstStyle/>
-          <a:p>
-            <a:pPr algn="ctr"/>
-            <a:r>
-              <a:rPr sz="1100" b="1">
-                <a:solidFill>
-                  <a:srgbClr val="007A6E"/>
-                </a:solidFill>
-                <a:latin typeface="メイリオ"/>
-                <a:ea typeface="メイリオ"/>
-              </a:rPr>
-              <a:t>1</a:t>
-            </a:r>
-          </a:p>
-          <a:p>
-            <a:pPr algn="ctr"/>
-            <a:r>
-              <a:rPr sz="1100" b="1">
-                <a:solidFill>
-                  <a:srgbClr val="007A6E"/>
-                </a:solidFill>
-                <a:latin typeface="メイリオ"/>
-                <a:ea typeface="メイリオ"/>
-              </a:rPr>
-              <a:t>キックオフ</a:t>
-            </a:r>
-          </a:p>
-          <a:p/>
-          <a:p>
-            <a:pPr algn="ctr"/>
-            <a:r>
-              <a:rPr sz="900" b="0">
-                <a:solidFill>
-                  <a:srgbClr val="333333"/>
-                </a:solidFill>
-                <a:latin typeface="メイリオ"/>
-                <a:ea typeface="メイリオ"/>
-              </a:rPr>
-              <a:t>進め方共有</a:t>
-            </a:r>
-          </a:p>
-          <a:p>
-            <a:pPr algn="ctr"/>
-            <a:r>
-              <a:rPr sz="900" b="0">
-                <a:solidFill>
-                  <a:srgbClr val="333333"/>
-                </a:solidFill>
-                <a:latin typeface="メイリオ"/>
-                <a:ea typeface="メイリオ"/>
-              </a:rPr>
-              <a:t>体制・進め方確認</a:t>
-            </a:r>
-          </a:p>
-        </p:txBody>
-      </p:sp>
-      <p:sp>
-        <p:nvSpPr>
-          <p:cNvPr id="5" name="Right Arrow 4"/>
-          <p:cNvSpPr/>
-          <p:nvPr/>
-        </p:nvSpPr>
-        <p:spPr>
-          <a:xfrm>
-            <a:off x="1930000" y="1550000"/>
-            <a:ext cx="160000" cy="200000"/>
-          </a:xfrm>
-          <a:prstGeom prst="rightArrow">
-            <a:avLst/>
-          </a:prstGeom>
-          <a:solidFill>
-            <a:srgbClr val="00A693"/>
-          </a:solidFill>
-          <a:ln>
-            <a:noFill/>
-          </a:ln>
-        </p:spPr>
-        <p:style>
-          <a:lnRef idx="1">
-            <a:schemeClr val="accent1"/>
-          </a:lnRef>
-          <a:fillRef idx="3">
-            <a:schemeClr val="accent1"/>
-          </a:fillRef>
-          <a:effectRef idx="2">
-            <a:schemeClr val="accent1"/>
-          </a:effectRef>
-          <a:fontRef idx="minor">
-            <a:schemeClr val="lt1"/>
-          </a:fontRef>
-        </p:style>
-        <p:txBody>
           <a:bodyPr rtlCol="0" anchor="ctr"/>
           <a:lstStyle/>
           <a:p>
@@ -6013,16 +5550,16 @@
         </p:nvSpPr>
         <p:spPr>
           <a:xfrm>
-            <a:off x="2260000" y="1000000"/>
-            <a:ext cx="1500000" cy="1500000"/>
+            <a:off x="5100000" y="1100000"/>
+            <a:ext cx="4400000" cy="4800000"/>
           </a:xfrm>
           <a:prstGeom prst="roundRect">
             <a:avLst/>
           </a:prstGeom>
           <a:solidFill>
-            <a:srgbClr val="DEF3F1"/>
+            <a:srgbClr val="FAFAFA"/>
           </a:solidFill>
-          <a:ln w="19050">
+          <a:ln w="15875">
             <a:solidFill>
               <a:srgbClr val="00A693"/>
             </a:solidFill>
@@ -6043,2287 +5580,251 @@
           </a:fontRef>
         </p:style>
         <p:txBody>
-          <a:bodyPr rtlCol="0" anchor="ctr" wrap="square"/>
+          <a:bodyPr rtlCol="0" anchor="ctr"/>
           <a:lstStyle/>
           <a:p>
             <a:pPr algn="ctr"/>
-            <a:r>
-              <a:rPr sz="1100" b="1">
+          </a:p>
+        </p:txBody>
+      </p:sp>
+      <p:sp>
+        <p:nvSpPr>
+          <p:cNvPr id="7" name="TextBox 6"/>
+          <p:cNvSpPr txBox="1"/>
+          <p:nvPr/>
+        </p:nvSpPr>
+        <p:spPr>
+          <a:xfrm>
+            <a:off x="550000" y="1250000"/>
+            <a:ext cx="4100000" cy="4500000"/>
+          </a:xfrm>
+          <a:prstGeom prst="rect">
+            <a:avLst/>
+          </a:prstGeom>
+          <a:noFill/>
+        </p:spPr>
+        <p:txBody>
+          <a:bodyPr wrap="square">
+            <a:spAutoFit/>
+          </a:bodyPr>
+          <a:lstStyle/>
+          <a:p>
+            <a:r>
+              <a:rPr sz="1400" b="1">
                 <a:solidFill>
                   <a:srgbClr val="007A6E"/>
                 </a:solidFill>
                 <a:latin typeface="メイリオ"/>
                 <a:ea typeface="メイリオ"/>
               </a:rPr>
-              <a:t>2</a:t>
-            </a:r>
-          </a:p>
-          <a:p>
-            <a:pPr algn="ctr"/>
-            <a:r>
-              <a:rPr sz="1100" b="1">
+              <a:t>2回目｜業務フロー検討</a:t>
+            </a:r>
+          </a:p>
+          <a:p>
+            <a:r>
+              <a:rPr sz="1100" b="0">
+                <a:solidFill>
+                  <a:srgbClr val="333333"/>
+                </a:solidFill>
+                <a:latin typeface="メイリオ"/>
+                <a:ea typeface="メイリオ"/>
+              </a:rPr>
+              <a:t>・商流・サプライヤー構成（自社／他社供給）</a:t>
+            </a:r>
+          </a:p>
+          <a:p>
+            <a:r>
+              <a:rPr sz="1100" b="0">
+                <a:solidFill>
+                  <a:srgbClr val="333333"/>
+                </a:solidFill>
+                <a:latin typeface="メイリオ"/>
+                <a:ea typeface="メイリオ"/>
+              </a:rPr>
+              <a:t>・販売組織・取引先階層（直販／代理店配下）</a:t>
+            </a:r>
+          </a:p>
+          <a:p>
+            <a:r>
+              <a:rPr sz="1100" b="0">
+                <a:solidFill>
+                  <a:srgbClr val="333333"/>
+                </a:solidFill>
+                <a:latin typeface="メイリオ"/>
+                <a:ea typeface="メイリオ"/>
+              </a:rPr>
+              <a:t>・在庫モデル（フリー在庫／取引先別在庫）</a:t>
+            </a:r>
+          </a:p>
+          <a:p>
+            <a:r>
+              <a:rPr sz="1100" b="0">
+                <a:solidFill>
+                  <a:srgbClr val="333333"/>
+                </a:solidFill>
+                <a:latin typeface="メイリオ"/>
+                <a:ea typeface="メイリオ"/>
+              </a:rPr>
+              <a:t>・引当ルール・入荷予定の扱い</a:t>
+            </a:r>
+          </a:p>
+          <a:p>
+            <a:r>
+              <a:rPr sz="1100" b="0">
+                <a:solidFill>
+                  <a:srgbClr val="333333"/>
+                </a:solidFill>
+                <a:latin typeface="メイリオ"/>
+                <a:ea typeface="メイリオ"/>
+              </a:rPr>
+              <a:t>・注文〜承認〜納期回答〜出荷の流れ</a:t>
+            </a:r>
+          </a:p>
+          <a:p>
+            <a:r>
+              <a:rPr sz="1100" b="0">
+                <a:solidFill>
+                  <a:srgbClr val="333333"/>
+                </a:solidFill>
+                <a:latin typeface="メイリオ"/>
+                <a:ea typeface="メイリオ"/>
+              </a:rPr>
+              <a:t>・売価・掛け率・送料・与信の業務ルール</a:t>
+            </a:r>
+          </a:p>
+          <a:p>
+            <a:r>
+              <a:rPr sz="1100" b="0">
+                <a:solidFill>
+                  <a:srgbClr val="333333"/>
+                </a:solidFill>
+                <a:latin typeface="メイリオ"/>
+                <a:ea typeface="メイリオ"/>
+              </a:rPr>
+              <a:t>・基幹との役割分担（どこまでをECで行うか）</a:t>
+            </a:r>
+          </a:p>
+        </p:txBody>
+      </p:sp>
+      <p:sp>
+        <p:nvSpPr>
+          <p:cNvPr id="8" name="TextBox 7"/>
+          <p:cNvSpPr txBox="1"/>
+          <p:nvPr/>
+        </p:nvSpPr>
+        <p:spPr>
+          <a:xfrm>
+            <a:off x="5250000" y="1250000"/>
+            <a:ext cx="4100000" cy="4500000"/>
+          </a:xfrm>
+          <a:prstGeom prst="rect">
+            <a:avLst/>
+          </a:prstGeom>
+          <a:noFill/>
+        </p:spPr>
+        <p:txBody>
+          <a:bodyPr wrap="square">
+            <a:spAutoFit/>
+          </a:bodyPr>
+          <a:lstStyle/>
+          <a:p>
+            <a:r>
+              <a:rPr sz="1400" b="1">
                 <a:solidFill>
                   <a:srgbClr val="007A6E"/>
                 </a:solidFill>
                 <a:latin typeface="メイリオ"/>
                 <a:ea typeface="メイリオ"/>
               </a:rPr>
-              <a:t>ご要件確認</a:t>
-            </a:r>
-          </a:p>
-          <a:p/>
-          <a:p>
-            <a:pPr algn="ctr"/>
-            <a:r>
-              <a:rPr sz="900" b="0">
+              <a:t>3回目｜機能詳細検討（Fit&amp;Gap）</a:t>
+            </a:r>
+          </a:p>
+          <a:p>
+            <a:r>
+              <a:rPr sz="1100" b="0">
                 <a:solidFill>
                   <a:srgbClr val="333333"/>
                 </a:solidFill>
                 <a:latin typeface="メイリオ"/>
                 <a:ea typeface="メイリオ"/>
               </a:rPr>
-              <a:t>貴社より</a:t>
-            </a:r>
-          </a:p>
-          <a:p>
-            <a:pPr algn="ctr"/>
-            <a:r>
-              <a:rPr sz="900" b="0">
+              <a:t>・マルチサプライヤー機能の適用方針</a:t>
+            </a:r>
+          </a:p>
+          <a:p>
+            <a:r>
+              <a:rPr sz="1100" b="0">
                 <a:solidFill>
                   <a:srgbClr val="333333"/>
                 </a:solidFill>
                 <a:latin typeface="メイリオ"/>
                 <a:ea typeface="メイリオ"/>
               </a:rPr>
-              <a:t>要件・現行業務説明</a:t>
-            </a:r>
-          </a:p>
-        </p:txBody>
-      </p:sp>
-      <p:sp>
-        <p:nvSpPr>
-          <p:cNvPr id="7" name="Right Arrow 6"/>
-          <p:cNvSpPr/>
-          <p:nvPr/>
-        </p:nvSpPr>
-        <p:spPr>
-          <a:xfrm>
-            <a:off x="3790000" y="1550000"/>
-            <a:ext cx="160000" cy="200000"/>
-          </a:xfrm>
-          <a:prstGeom prst="rightArrow">
-            <a:avLst/>
-          </a:prstGeom>
-          <a:solidFill>
-            <a:srgbClr val="00A693"/>
-          </a:solidFill>
-          <a:ln>
-            <a:noFill/>
-          </a:ln>
-        </p:spPr>
-        <p:style>
-          <a:lnRef idx="1">
-            <a:schemeClr val="accent1"/>
-          </a:lnRef>
-          <a:fillRef idx="3">
-            <a:schemeClr val="accent1"/>
-          </a:fillRef>
-          <a:effectRef idx="2">
-            <a:schemeClr val="accent1"/>
-          </a:effectRef>
-          <a:fontRef idx="minor">
-            <a:schemeClr val="lt1"/>
-          </a:fontRef>
-        </p:style>
-        <p:txBody>
-          <a:bodyPr rtlCol="0" anchor="ctr"/>
-          <a:lstStyle/>
-          <a:p>
-            <a:pPr algn="ctr"/>
-          </a:p>
-        </p:txBody>
-      </p:sp>
-      <p:sp>
-        <p:nvSpPr>
-          <p:cNvPr id="8" name="Rounded Rectangle 7"/>
-          <p:cNvSpPr/>
-          <p:nvPr/>
-        </p:nvSpPr>
-        <p:spPr>
-          <a:xfrm>
-            <a:off x="4120000" y="1000000"/>
-            <a:ext cx="1500000" cy="1500000"/>
-          </a:xfrm>
-          <a:prstGeom prst="roundRect">
-            <a:avLst/>
-          </a:prstGeom>
-          <a:solidFill>
-            <a:srgbClr val="DEF3F1"/>
-          </a:solidFill>
-          <a:ln w="19050">
-            <a:solidFill>
-              <a:srgbClr val="00A693"/>
-            </a:solidFill>
-          </a:ln>
-        </p:spPr>
-        <p:style>
-          <a:lnRef idx="1">
-            <a:schemeClr val="accent1"/>
-          </a:lnRef>
-          <a:fillRef idx="3">
-            <a:schemeClr val="accent1"/>
-          </a:fillRef>
-          <a:effectRef idx="2">
-            <a:schemeClr val="accent1"/>
-          </a:effectRef>
-          <a:fontRef idx="minor">
-            <a:schemeClr val="lt1"/>
-          </a:fontRef>
-        </p:style>
-        <p:txBody>
-          <a:bodyPr rtlCol="0" anchor="ctr" wrap="square"/>
-          <a:lstStyle/>
-          <a:p>
-            <a:pPr algn="ctr"/>
-            <a:r>
-              <a:rPr sz="1100" b="1">
-                <a:solidFill>
-                  <a:srgbClr val="007A6E"/>
-                </a:solidFill>
-                <a:latin typeface="メイリオ"/>
-                <a:ea typeface="メイリオ"/>
-              </a:rPr>
-              <a:t>3〜5</a:t>
-            </a:r>
-          </a:p>
-          <a:p>
-            <a:pPr algn="ctr"/>
-            <a:r>
-              <a:rPr sz="1100" b="1">
-                <a:solidFill>
-                  <a:srgbClr val="007A6E"/>
-                </a:solidFill>
-                <a:latin typeface="メイリオ"/>
-                <a:ea typeface="メイリオ"/>
-              </a:rPr>
-              <a:t>要件検討</a:t>
-            </a:r>
-          </a:p>
-          <a:p/>
-          <a:p>
-            <a:pPr algn="ctr"/>
-            <a:r>
-              <a:rPr sz="900" b="0">
+              <a:t>・販売組織管理・ランク／掛け率設定</a:t>
+            </a:r>
+          </a:p>
+          <a:p>
+            <a:r>
+              <a:rPr sz="1100" b="0">
                 <a:solidFill>
                   <a:srgbClr val="333333"/>
                 </a:solidFill>
                 <a:latin typeface="メイリオ"/>
                 <a:ea typeface="メイリオ"/>
               </a:rPr>
-              <a:t>業務／機能／</a:t>
-            </a:r>
-          </a:p>
-          <a:p>
-            <a:pPr algn="ctr"/>
-            <a:r>
-              <a:rPr sz="900" b="0">
+              <a:t>・注文ステータス・与信確認フロー</a:t>
+            </a:r>
+          </a:p>
+          <a:p>
+            <a:r>
+              <a:rPr sz="1100" b="0">
                 <a:solidFill>
                   <a:srgbClr val="333333"/>
                 </a:solidFill>
                 <a:latin typeface="メイリオ"/>
                 <a:ea typeface="メイリオ"/>
               </a:rPr>
-              <a:t>非機能のFit&amp;Gap</a:t>
-            </a:r>
-          </a:p>
-        </p:txBody>
-      </p:sp>
-      <p:sp>
-        <p:nvSpPr>
-          <p:cNvPr id="9" name="Right Arrow 8"/>
-          <p:cNvSpPr/>
-          <p:nvPr/>
-        </p:nvSpPr>
-        <p:spPr>
-          <a:xfrm>
-            <a:off x="5650000" y="1550000"/>
-            <a:ext cx="160000" cy="200000"/>
-          </a:xfrm>
-          <a:prstGeom prst="rightArrow">
-            <a:avLst/>
-          </a:prstGeom>
-          <a:solidFill>
-            <a:srgbClr val="00A693"/>
-          </a:solidFill>
-          <a:ln>
-            <a:noFill/>
-          </a:ln>
-        </p:spPr>
-        <p:style>
-          <a:lnRef idx="1">
-            <a:schemeClr val="accent1"/>
-          </a:lnRef>
-          <a:fillRef idx="3">
-            <a:schemeClr val="accent1"/>
-          </a:fillRef>
-          <a:effectRef idx="2">
-            <a:schemeClr val="accent1"/>
-          </a:effectRef>
-          <a:fontRef idx="minor">
-            <a:schemeClr val="lt1"/>
-          </a:fontRef>
-        </p:style>
-        <p:txBody>
-          <a:bodyPr rtlCol="0" anchor="ctr"/>
-          <a:lstStyle/>
-          <a:p>
-            <a:pPr algn="ctr"/>
-          </a:p>
-        </p:txBody>
-      </p:sp>
-      <p:sp>
-        <p:nvSpPr>
-          <p:cNvPr id="10" name="Rounded Rectangle 9"/>
-          <p:cNvSpPr/>
-          <p:nvPr/>
-        </p:nvSpPr>
-        <p:spPr>
-          <a:xfrm>
-            <a:off x="5980000" y="1000000"/>
-            <a:ext cx="1500000" cy="1500000"/>
-          </a:xfrm>
-          <a:prstGeom prst="roundRect">
-            <a:avLst/>
-          </a:prstGeom>
-          <a:solidFill>
-            <a:srgbClr val="DEF3F1"/>
-          </a:solidFill>
-          <a:ln w="19050">
-            <a:solidFill>
-              <a:srgbClr val="00A693"/>
-            </a:solidFill>
-          </a:ln>
-        </p:spPr>
-        <p:style>
-          <a:lnRef idx="1">
-            <a:schemeClr val="accent1"/>
-          </a:lnRef>
-          <a:fillRef idx="3">
-            <a:schemeClr val="accent1"/>
-          </a:fillRef>
-          <a:effectRef idx="2">
-            <a:schemeClr val="accent1"/>
-          </a:effectRef>
-          <a:fontRef idx="minor">
-            <a:schemeClr val="lt1"/>
-          </a:fontRef>
-        </p:style>
-        <p:txBody>
-          <a:bodyPr rtlCol="0" anchor="ctr" wrap="square"/>
-          <a:lstStyle/>
-          <a:p>
-            <a:pPr algn="ctr"/>
-            <a:r>
-              <a:rPr sz="1100" b="1">
-                <a:solidFill>
-                  <a:srgbClr val="007A6E"/>
-                </a:solidFill>
-                <a:latin typeface="メイリオ"/>
-                <a:ea typeface="メイリオ"/>
-              </a:rPr>
-              <a:t>6</a:t>
-            </a:r>
-          </a:p>
-          <a:p>
-            <a:pPr algn="ctr"/>
-            <a:r>
-              <a:rPr sz="1100" b="1">
-                <a:solidFill>
-                  <a:srgbClr val="007A6E"/>
-                </a:solidFill>
-                <a:latin typeface="メイリオ"/>
-                <a:ea typeface="メイリオ"/>
-              </a:rPr>
-              <a:t>まとめ</a:t>
-            </a:r>
-          </a:p>
-          <a:p/>
-          <a:p>
-            <a:pPr algn="ctr"/>
-            <a:r>
-              <a:rPr sz="900" b="0">
+              <a:t>・基幹連携（商品／在庫／受注／出荷）</a:t>
+            </a:r>
+          </a:p>
+          <a:p>
+            <a:r>
+              <a:rPr sz="1100" b="0">
                 <a:solidFill>
                   <a:srgbClr val="333333"/>
                 </a:solidFill>
                 <a:latin typeface="メイリオ"/>
                 <a:ea typeface="メイリオ"/>
               </a:rPr>
-              <a:t>要件定義書</a:t>
-            </a:r>
-          </a:p>
-          <a:p>
-            <a:pPr algn="ctr"/>
-            <a:r>
-              <a:rPr sz="900" b="0">
+              <a:t>・EDI・代理注文・キャンセル／返品</a:t>
+            </a:r>
+          </a:p>
+          <a:p>
+            <a:r>
+              <a:rPr sz="1100" b="0">
                 <a:solidFill>
                   <a:srgbClr val="333333"/>
                 </a:solidFill>
                 <a:latin typeface="メイリオ"/>
                 <a:ea typeface="メイリオ"/>
               </a:rPr>
-              <a:t>ドラフトレビュー</a:t>
-            </a:r>
-          </a:p>
-        </p:txBody>
-      </p:sp>
-      <p:sp>
-        <p:nvSpPr>
-          <p:cNvPr id="11" name="Right Arrow 10"/>
-          <p:cNvSpPr/>
-          <p:nvPr/>
-        </p:nvSpPr>
-        <p:spPr>
-          <a:xfrm>
-            <a:off x="7510000" y="1550000"/>
-            <a:ext cx="160000" cy="200000"/>
-          </a:xfrm>
-          <a:prstGeom prst="rightArrow">
-            <a:avLst/>
-          </a:prstGeom>
-          <a:solidFill>
-            <a:srgbClr val="00A693"/>
-          </a:solidFill>
-          <a:ln>
-            <a:noFill/>
-          </a:ln>
-        </p:spPr>
-        <p:style>
-          <a:lnRef idx="1">
-            <a:schemeClr val="accent1"/>
-          </a:lnRef>
-          <a:fillRef idx="3">
-            <a:schemeClr val="accent1"/>
-          </a:fillRef>
-          <a:effectRef idx="2">
-            <a:schemeClr val="accent1"/>
-          </a:effectRef>
-          <a:fontRef idx="minor">
-            <a:schemeClr val="lt1"/>
-          </a:fontRef>
-        </p:style>
-        <p:txBody>
-          <a:bodyPr rtlCol="0" anchor="ctr"/>
-          <a:lstStyle/>
-          <a:p>
-            <a:pPr algn="ctr"/>
-          </a:p>
-        </p:txBody>
-      </p:sp>
-      <p:sp>
-        <p:nvSpPr>
-          <p:cNvPr id="12" name="Rounded Rectangle 11"/>
-          <p:cNvSpPr/>
-          <p:nvPr/>
-        </p:nvSpPr>
-        <p:spPr>
-          <a:xfrm>
-            <a:off x="7840000" y="1000000"/>
-            <a:ext cx="1500000" cy="1500000"/>
-          </a:xfrm>
-          <a:prstGeom prst="roundRect">
-            <a:avLst/>
-          </a:prstGeom>
-          <a:solidFill>
-            <a:srgbClr val="DEF3F1"/>
-          </a:solidFill>
-          <a:ln w="19050">
-            <a:solidFill>
-              <a:srgbClr val="00A693"/>
-            </a:solidFill>
-          </a:ln>
-        </p:spPr>
-        <p:style>
-          <a:lnRef idx="1">
-            <a:schemeClr val="accent1"/>
-          </a:lnRef>
-          <a:fillRef idx="3">
-            <a:schemeClr val="accent1"/>
-          </a:fillRef>
-          <a:effectRef idx="2">
-            <a:schemeClr val="accent1"/>
-          </a:effectRef>
-          <a:fontRef idx="minor">
-            <a:schemeClr val="lt1"/>
-          </a:fontRef>
-        </p:style>
-        <p:txBody>
-          <a:bodyPr rtlCol="0" anchor="ctr" wrap="square"/>
-          <a:lstStyle/>
-          <a:p>
-            <a:pPr algn="ctr"/>
-            <a:r>
-              <a:rPr sz="1100" b="1">
-                <a:solidFill>
-                  <a:srgbClr val="007A6E"/>
-                </a:solidFill>
-                <a:latin typeface="メイリオ"/>
-                <a:ea typeface="メイリオ"/>
-              </a:rPr>
-              <a:t>7〜8</a:t>
-            </a:r>
-          </a:p>
-          <a:p>
-            <a:pPr algn="ctr"/>
-            <a:r>
-              <a:rPr sz="1100" b="1">
-                <a:solidFill>
-                  <a:srgbClr val="007A6E"/>
-                </a:solidFill>
-                <a:latin typeface="メイリオ"/>
-                <a:ea typeface="メイリオ"/>
-              </a:rPr>
-              <a:t>納品・検収</a:t>
-            </a:r>
-          </a:p>
-          <a:p/>
-          <a:p>
-            <a:pPr algn="ctr"/>
-            <a:r>
-              <a:rPr sz="900" b="0">
+              <a:t>・バリエーション一括注文・展示会注文</a:t>
+            </a:r>
+          </a:p>
+          <a:p>
+            <a:r>
+              <a:rPr sz="1100" b="0">
                 <a:solidFill>
                   <a:srgbClr val="333333"/>
                 </a:solidFill>
                 <a:latin typeface="メイリオ"/>
                 <a:ea typeface="メイリオ"/>
               </a:rPr>
-              <a:t>正式見積り提示</a:t>
-            </a:r>
-          </a:p>
-          <a:p>
-            <a:pPr algn="ctr"/>
-            <a:r>
-              <a:rPr sz="900" b="0">
-                <a:solidFill>
-                  <a:srgbClr val="333333"/>
-                </a:solidFill>
-                <a:latin typeface="メイリオ"/>
-                <a:ea typeface="メイリオ"/>
-              </a:rPr>
-              <a:t>・ご検収</a:t>
-            </a:r>
-          </a:p>
-        </p:txBody>
-      </p:sp>
-      <p:sp>
-        <p:nvSpPr>
-          <p:cNvPr id="13" name="TextBox 12"/>
-          <p:cNvSpPr txBox="1"/>
-          <p:nvPr/>
-        </p:nvSpPr>
-        <p:spPr>
-          <a:xfrm>
-            <a:off x="450000" y="2750000"/>
-            <a:ext cx="9000000" cy="350000"/>
-          </a:xfrm>
-          <a:prstGeom prst="rect">
-            <a:avLst/>
-          </a:prstGeom>
-          <a:noFill/>
-        </p:spPr>
-        <p:txBody>
-          <a:bodyPr wrap="square">
-            <a:spAutoFit/>
-          </a:bodyPr>
-          <a:lstStyle/>
-          <a:p>
-            <a:pPr algn="l"/>
-            <a:r>
-              <a:rPr sz="1400" b="1">
-                <a:solidFill>
-                  <a:srgbClr val="333333"/>
-                </a:solidFill>
-                <a:latin typeface="メイリオ"/>
-                <a:ea typeface="メイリオ"/>
-              </a:rPr>
-              <a:t>主な成果物・作業項目</a:t>
-            </a:r>
-          </a:p>
-        </p:txBody>
-      </p:sp>
-      <p:graphicFrame>
-        <p:nvGraphicFramePr>
-          <p:cNvPr id="14" name="Table 13"/>
-          <p:cNvGraphicFramePr>
-            <a:graphicFrameLocks noGrp="1"/>
-          </p:cNvGraphicFramePr>
-          <p:nvPr/>
-        </p:nvGraphicFramePr>
-        <p:xfrm>
-          <a:off x="450000" y="3150000"/>
-          <a:ext cx="9000000" cy="3300000"/>
-        </p:xfrm>
-        <a:graphic>
-          <a:graphicData uri="http://schemas.openxmlformats.org/drawingml/2006/table">
-            <a:tbl>
-              <a:tblPr firstRow="1" bandRow="1">
-                <a:tableStyleId>{5C22544A-7EE6-4342-B048-85BDC9FD1C3A}</a:tableStyleId>
-              </a:tblPr>
-              <a:tblGrid>
-                <a:gridCol w="700000"/>
-                <a:gridCol w="2400000"/>
-                <a:gridCol w="4200000"/>
-                <a:gridCol w="1700000"/>
-              </a:tblGrid>
-              <a:tr h="366666">
-                <a:tc>
-                  <a:txBody>
-                    <a:bodyPr wrap="square"/>
-                    <a:lstStyle/>
-                    <a:p>
-                      <a:pPr algn="ctr"/>
-                      <a:r>
-                        <a:rPr sz="1000" b="1">
-                          <a:solidFill>
-                            <a:srgbClr val="FFFFFF"/>
-                          </a:solidFill>
-                          <a:latin typeface="メイリオ"/>
-                          <a:ea typeface="メイリオ"/>
-                        </a:rPr>
-                        <a:t>No</a:t>
-                      </a:r>
-                    </a:p>
-                  </a:txBody>
-                  <a:tcPr anchor="ctr">
-                    <a:solidFill>
-                      <a:srgbClr val="00A693"/>
-                    </a:solidFill>
-                    <a:lnL w="9525" cap="flat" cmpd="sng" algn="ctr">
-                      <a:solidFill>
-                        <a:srgbClr val="007A6E"/>
-                      </a:solidFill>
-                      <a:prstDash val="solid"/>
-                    </a:lnL>
-                    <a:lnR w="9525" cap="flat" cmpd="sng" algn="ctr">
-                      <a:solidFill>
-                        <a:srgbClr val="007A6E"/>
-                      </a:solidFill>
-                      <a:prstDash val="solid"/>
-                    </a:lnR>
-                    <a:lnT w="9525" cap="flat" cmpd="sng" algn="ctr">
-                      <a:solidFill>
-                        <a:srgbClr val="007A6E"/>
-                      </a:solidFill>
-                      <a:prstDash val="solid"/>
-                    </a:lnT>
-                    <a:lnB w="9525" cap="flat" cmpd="sng" algn="ctr">
-                      <a:solidFill>
-                        <a:srgbClr val="007A6E"/>
-                      </a:solidFill>
-                      <a:prstDash val="solid"/>
-                    </a:lnB>
-                  </a:tcPr>
-                </a:tc>
-                <a:tc>
-                  <a:txBody>
-                    <a:bodyPr wrap="square"/>
-                    <a:lstStyle/>
-                    <a:p>
-                      <a:pPr algn="ctr"/>
-                      <a:r>
-                        <a:rPr sz="1000" b="1">
-                          <a:solidFill>
-                            <a:srgbClr val="FFFFFF"/>
-                          </a:solidFill>
-                          <a:latin typeface="メイリオ"/>
-                          <a:ea typeface="メイリオ"/>
-                        </a:rPr>
-                        <a:t>作業／成果物</a:t>
-                      </a:r>
-                    </a:p>
-                  </a:txBody>
-                  <a:tcPr anchor="ctr">
-                    <a:solidFill>
-                      <a:srgbClr val="00A693"/>
-                    </a:solidFill>
-                    <a:lnL w="9525" cap="flat" cmpd="sng" algn="ctr">
-                      <a:solidFill>
-                        <a:srgbClr val="007A6E"/>
-                      </a:solidFill>
-                      <a:prstDash val="solid"/>
-                    </a:lnL>
-                    <a:lnR w="9525" cap="flat" cmpd="sng" algn="ctr">
-                      <a:solidFill>
-                        <a:srgbClr val="007A6E"/>
-                      </a:solidFill>
-                      <a:prstDash val="solid"/>
-                    </a:lnR>
-                    <a:lnT w="9525" cap="flat" cmpd="sng" algn="ctr">
-                      <a:solidFill>
-                        <a:srgbClr val="007A6E"/>
-                      </a:solidFill>
-                      <a:prstDash val="solid"/>
-                    </a:lnT>
-                    <a:lnB w="9525" cap="flat" cmpd="sng" algn="ctr">
-                      <a:solidFill>
-                        <a:srgbClr val="007A6E"/>
-                      </a:solidFill>
-                      <a:prstDash val="solid"/>
-                    </a:lnB>
-                  </a:tcPr>
-                </a:tc>
-                <a:tc>
-                  <a:txBody>
-                    <a:bodyPr wrap="square"/>
-                    <a:lstStyle/>
-                    <a:p>
-                      <a:pPr algn="ctr"/>
-                      <a:r>
-                        <a:rPr sz="1000" b="1">
-                          <a:solidFill>
-                            <a:srgbClr val="FFFFFF"/>
-                          </a:solidFill>
-                          <a:latin typeface="メイリオ"/>
-                          <a:ea typeface="メイリオ"/>
-                        </a:rPr>
-                        <a:t>内容</a:t>
-                      </a:r>
-                    </a:p>
-                  </a:txBody>
-                  <a:tcPr anchor="ctr">
-                    <a:solidFill>
-                      <a:srgbClr val="00A693"/>
-                    </a:solidFill>
-                    <a:lnL w="9525" cap="flat" cmpd="sng" algn="ctr">
-                      <a:solidFill>
-                        <a:srgbClr val="007A6E"/>
-                      </a:solidFill>
-                      <a:prstDash val="solid"/>
-                    </a:lnL>
-                    <a:lnR w="9525" cap="flat" cmpd="sng" algn="ctr">
-                      <a:solidFill>
-                        <a:srgbClr val="007A6E"/>
-                      </a:solidFill>
-                      <a:prstDash val="solid"/>
-                    </a:lnR>
-                    <a:lnT w="9525" cap="flat" cmpd="sng" algn="ctr">
-                      <a:solidFill>
-                        <a:srgbClr val="007A6E"/>
-                      </a:solidFill>
-                      <a:prstDash val="solid"/>
-                    </a:lnT>
-                    <a:lnB w="9525" cap="flat" cmpd="sng" algn="ctr">
-                      <a:solidFill>
-                        <a:srgbClr val="007A6E"/>
-                      </a:solidFill>
-                      <a:prstDash val="solid"/>
-                    </a:lnB>
-                  </a:tcPr>
-                </a:tc>
-                <a:tc>
-                  <a:txBody>
-                    <a:bodyPr wrap="square"/>
-                    <a:lstStyle/>
-                    <a:p>
-                      <a:pPr algn="ctr"/>
-                      <a:r>
-                        <a:rPr sz="1000" b="1">
-                          <a:solidFill>
-                            <a:srgbClr val="FFFFFF"/>
-                          </a:solidFill>
-                          <a:latin typeface="メイリオ"/>
-                          <a:ea typeface="メイリオ"/>
-                        </a:rPr>
-                        <a:t>目安時期</a:t>
-                      </a:r>
-                    </a:p>
-                  </a:txBody>
-                  <a:tcPr anchor="ctr">
-                    <a:solidFill>
-                      <a:srgbClr val="00A693"/>
-                    </a:solidFill>
-                    <a:lnL w="9525" cap="flat" cmpd="sng" algn="ctr">
-                      <a:solidFill>
-                        <a:srgbClr val="007A6E"/>
-                      </a:solidFill>
-                      <a:prstDash val="solid"/>
-                    </a:lnL>
-                    <a:lnR w="9525" cap="flat" cmpd="sng" algn="ctr">
-                      <a:solidFill>
-                        <a:srgbClr val="007A6E"/>
-                      </a:solidFill>
-                      <a:prstDash val="solid"/>
-                    </a:lnR>
-                    <a:lnT w="9525" cap="flat" cmpd="sng" algn="ctr">
-                      <a:solidFill>
-                        <a:srgbClr val="007A6E"/>
-                      </a:solidFill>
-                      <a:prstDash val="solid"/>
-                    </a:lnT>
-                    <a:lnB w="9525" cap="flat" cmpd="sng" algn="ctr">
-                      <a:solidFill>
-                        <a:srgbClr val="007A6E"/>
-                      </a:solidFill>
-                      <a:prstDash val="solid"/>
-                    </a:lnB>
-                  </a:tcPr>
-                </a:tc>
-              </a:tr>
-              <a:tr h="366666">
-                <a:tc>
-                  <a:txBody>
-                    <a:bodyPr wrap="square"/>
-                    <a:lstStyle/>
-                    <a:p>
-                      <a:pPr algn="ctr"/>
-                      <a:r>
-                        <a:rPr sz="900" b="1">
-                          <a:solidFill>
-                            <a:srgbClr val="333333"/>
-                          </a:solidFill>
-                          <a:latin typeface="メイリオ"/>
-                          <a:ea typeface="メイリオ"/>
-                        </a:rPr>
-                        <a:t>1</a:t>
-                      </a:r>
-                    </a:p>
-                  </a:txBody>
-                  <a:tcPr anchor="ctr">
-                    <a:solidFill>
-                      <a:srgbClr val="F0FAF8"/>
-                    </a:solidFill>
-                    <a:lnL w="6350" cap="flat" cmpd="sng" algn="ctr">
-                      <a:solidFill>
-                        <a:srgbClr val="CCCCCC"/>
-                      </a:solidFill>
-                      <a:prstDash val="solid"/>
-                    </a:lnL>
-                    <a:lnR w="6350" cap="flat" cmpd="sng" algn="ctr">
-                      <a:solidFill>
-                        <a:srgbClr val="CCCCCC"/>
-                      </a:solidFill>
-                      <a:prstDash val="solid"/>
-                    </a:lnR>
-                    <a:lnT w="6350" cap="flat" cmpd="sng" algn="ctr">
-                      <a:solidFill>
-                        <a:srgbClr val="CCCCCC"/>
-                      </a:solidFill>
-                      <a:prstDash val="solid"/>
-                    </a:lnT>
-                    <a:lnB w="6350" cap="flat" cmpd="sng" algn="ctr">
-                      <a:solidFill>
-                        <a:srgbClr val="CCCCCC"/>
-                      </a:solidFill>
-                      <a:prstDash val="solid"/>
-                    </a:lnB>
-                  </a:tcPr>
-                </a:tc>
-                <a:tc>
-                  <a:txBody>
-                    <a:bodyPr wrap="square"/>
-                    <a:lstStyle/>
-                    <a:p>
-                      <a:pPr algn="l"/>
-                      <a:r>
-                        <a:rPr sz="900" b="0">
-                          <a:solidFill>
-                            <a:srgbClr val="333333"/>
-                          </a:solidFill>
-                          <a:latin typeface="メイリオ"/>
-                          <a:ea typeface="メイリオ"/>
-                        </a:rPr>
-                        <a:t>キックオフ資料・進め方説明</a:t>
-                      </a:r>
-                    </a:p>
-                  </a:txBody>
-                  <a:tcPr anchor="ctr">
-                    <a:solidFill>
-                      <a:srgbClr val="F0FAF8"/>
-                    </a:solidFill>
-                    <a:lnL w="6350" cap="flat" cmpd="sng" algn="ctr">
-                      <a:solidFill>
-                        <a:srgbClr val="CCCCCC"/>
-                      </a:solidFill>
-                      <a:prstDash val="solid"/>
-                    </a:lnL>
-                    <a:lnR w="6350" cap="flat" cmpd="sng" algn="ctr">
-                      <a:solidFill>
-                        <a:srgbClr val="CCCCCC"/>
-                      </a:solidFill>
-                      <a:prstDash val="solid"/>
-                    </a:lnR>
-                    <a:lnT w="6350" cap="flat" cmpd="sng" algn="ctr">
-                      <a:solidFill>
-                        <a:srgbClr val="CCCCCC"/>
-                      </a:solidFill>
-                      <a:prstDash val="solid"/>
-                    </a:lnT>
-                    <a:lnB w="6350" cap="flat" cmpd="sng" algn="ctr">
-                      <a:solidFill>
-                        <a:srgbClr val="CCCCCC"/>
-                      </a:solidFill>
-                      <a:prstDash val="solid"/>
-                    </a:lnB>
-                  </a:tcPr>
-                </a:tc>
-                <a:tc>
-                  <a:txBody>
-                    <a:bodyPr wrap="square"/>
-                    <a:lstStyle/>
-                    <a:p>
-                      <a:pPr algn="l"/>
-                      <a:r>
-                        <a:rPr sz="900" b="0">
-                          <a:solidFill>
-                            <a:srgbClr val="333333"/>
-                          </a:solidFill>
-                          <a:latin typeface="メイリオ"/>
-                          <a:ea typeface="メイリオ"/>
-                        </a:rPr>
-                        <a:t>要件定義の進め方、体制、スケジュール合意</a:t>
-                      </a:r>
-                    </a:p>
-                  </a:txBody>
-                  <a:tcPr anchor="ctr">
-                    <a:solidFill>
-                      <a:srgbClr val="F0FAF8"/>
-                    </a:solidFill>
-                    <a:lnL w="6350" cap="flat" cmpd="sng" algn="ctr">
-                      <a:solidFill>
-                        <a:srgbClr val="CCCCCC"/>
-                      </a:solidFill>
-                      <a:prstDash val="solid"/>
-                    </a:lnL>
-                    <a:lnR w="6350" cap="flat" cmpd="sng" algn="ctr">
-                      <a:solidFill>
-                        <a:srgbClr val="CCCCCC"/>
-                      </a:solidFill>
-                      <a:prstDash val="solid"/>
-                    </a:lnR>
-                    <a:lnT w="6350" cap="flat" cmpd="sng" algn="ctr">
-                      <a:solidFill>
-                        <a:srgbClr val="CCCCCC"/>
-                      </a:solidFill>
-                      <a:prstDash val="solid"/>
-                    </a:lnT>
-                    <a:lnB w="6350" cap="flat" cmpd="sng" algn="ctr">
-                      <a:solidFill>
-                        <a:srgbClr val="CCCCCC"/>
-                      </a:solidFill>
-                      <a:prstDash val="solid"/>
-                    </a:lnB>
-                  </a:tcPr>
-                </a:tc>
-                <a:tc>
-                  <a:txBody>
-                    <a:bodyPr wrap="square"/>
-                    <a:lstStyle/>
-                    <a:p>
-                      <a:pPr algn="ctr"/>
-                      <a:r>
-                        <a:rPr sz="900" b="0">
-                          <a:solidFill>
-                            <a:srgbClr val="333333"/>
-                          </a:solidFill>
-                          <a:latin typeface="メイリオ"/>
-                          <a:ea typeface="メイリオ"/>
-                        </a:rPr>
-                        <a:t>8/19</a:t>
-                      </a:r>
-                    </a:p>
-                  </a:txBody>
-                  <a:tcPr anchor="ctr">
-                    <a:solidFill>
-                      <a:srgbClr val="F0FAF8"/>
-                    </a:solidFill>
-                    <a:lnL w="6350" cap="flat" cmpd="sng" algn="ctr">
-                      <a:solidFill>
-                        <a:srgbClr val="CCCCCC"/>
-                      </a:solidFill>
-                      <a:prstDash val="solid"/>
-                    </a:lnL>
-                    <a:lnR w="6350" cap="flat" cmpd="sng" algn="ctr">
-                      <a:solidFill>
-                        <a:srgbClr val="CCCCCC"/>
-                      </a:solidFill>
-                      <a:prstDash val="solid"/>
-                    </a:lnR>
-                    <a:lnT w="6350" cap="flat" cmpd="sng" algn="ctr">
-                      <a:solidFill>
-                        <a:srgbClr val="CCCCCC"/>
-                      </a:solidFill>
-                      <a:prstDash val="solid"/>
-                    </a:lnT>
-                    <a:lnB w="6350" cap="flat" cmpd="sng" algn="ctr">
-                      <a:solidFill>
-                        <a:srgbClr val="CCCCCC"/>
-                      </a:solidFill>
-                      <a:prstDash val="solid"/>
-                    </a:lnB>
-                  </a:tcPr>
-                </a:tc>
-              </a:tr>
-              <a:tr h="366666">
-                <a:tc>
-                  <a:txBody>
-                    <a:bodyPr wrap="square"/>
-                    <a:lstStyle/>
-                    <a:p>
-                      <a:pPr algn="ctr"/>
-                      <a:r>
-                        <a:rPr sz="900" b="1">
-                          <a:solidFill>
-                            <a:srgbClr val="333333"/>
-                          </a:solidFill>
-                          <a:latin typeface="メイリオ"/>
-                          <a:ea typeface="メイリオ"/>
-                        </a:rPr>
-                        <a:t>2</a:t>
-                      </a:r>
-                    </a:p>
-                  </a:txBody>
-                  <a:tcPr anchor="ctr">
-                    <a:solidFill>
-                      <a:srgbClr val="FFFFFF"/>
-                    </a:solidFill>
-                    <a:lnL w="6350" cap="flat" cmpd="sng" algn="ctr">
-                      <a:solidFill>
-                        <a:srgbClr val="CCCCCC"/>
-                      </a:solidFill>
-                      <a:prstDash val="solid"/>
-                    </a:lnL>
-                    <a:lnR w="6350" cap="flat" cmpd="sng" algn="ctr">
-                      <a:solidFill>
-                        <a:srgbClr val="CCCCCC"/>
-                      </a:solidFill>
-                      <a:prstDash val="solid"/>
-                    </a:lnR>
-                    <a:lnT w="6350" cap="flat" cmpd="sng" algn="ctr">
-                      <a:solidFill>
-                        <a:srgbClr val="CCCCCC"/>
-                      </a:solidFill>
-                      <a:prstDash val="solid"/>
-                    </a:lnT>
-                    <a:lnB w="6350" cap="flat" cmpd="sng" algn="ctr">
-                      <a:solidFill>
-                        <a:srgbClr val="CCCCCC"/>
-                      </a:solidFill>
-                      <a:prstDash val="solid"/>
-                    </a:lnB>
-                  </a:tcPr>
-                </a:tc>
-                <a:tc>
-                  <a:txBody>
-                    <a:bodyPr wrap="square"/>
-                    <a:lstStyle/>
-                    <a:p>
-                      <a:pPr algn="l"/>
-                      <a:r>
-                        <a:rPr sz="900" b="0">
-                          <a:solidFill>
-                            <a:srgbClr val="333333"/>
-                          </a:solidFill>
-                          <a:latin typeface="メイリオ"/>
-                          <a:ea typeface="メイリオ"/>
-                        </a:rPr>
-                        <a:t>ご要件ヒアリング</a:t>
-                      </a:r>
-                    </a:p>
-                  </a:txBody>
-                  <a:tcPr anchor="ctr">
-                    <a:solidFill>
-                      <a:srgbClr val="FFFFFF"/>
-                    </a:solidFill>
-                    <a:lnL w="6350" cap="flat" cmpd="sng" algn="ctr">
-                      <a:solidFill>
-                        <a:srgbClr val="CCCCCC"/>
-                      </a:solidFill>
-                      <a:prstDash val="solid"/>
-                    </a:lnL>
-                    <a:lnR w="6350" cap="flat" cmpd="sng" algn="ctr">
-                      <a:solidFill>
-                        <a:srgbClr val="CCCCCC"/>
-                      </a:solidFill>
-                      <a:prstDash val="solid"/>
-                    </a:lnR>
-                    <a:lnT w="6350" cap="flat" cmpd="sng" algn="ctr">
-                      <a:solidFill>
-                        <a:srgbClr val="CCCCCC"/>
-                      </a:solidFill>
-                      <a:prstDash val="solid"/>
-                    </a:lnT>
-                    <a:lnB w="6350" cap="flat" cmpd="sng" algn="ctr">
-                      <a:solidFill>
-                        <a:srgbClr val="CCCCCC"/>
-                      </a:solidFill>
-                      <a:prstDash val="solid"/>
-                    </a:lnB>
-                  </a:tcPr>
-                </a:tc>
-                <a:tc>
-                  <a:txBody>
-                    <a:bodyPr wrap="square"/>
-                    <a:lstStyle/>
-                    <a:p>
-                      <a:pPr algn="l"/>
-                      <a:r>
-                        <a:rPr sz="900" b="0">
-                          <a:solidFill>
-                            <a:srgbClr val="333333"/>
-                          </a:solidFill>
-                          <a:latin typeface="メイリオ"/>
-                          <a:ea typeface="メイリオ"/>
-                        </a:rPr>
-                        <a:t>現行業務・ご要件の確認（貴社ご説明）</a:t>
-                      </a:r>
-                    </a:p>
-                  </a:txBody>
-                  <a:tcPr anchor="ctr">
-                    <a:solidFill>
-                      <a:srgbClr val="FFFFFF"/>
-                    </a:solidFill>
-                    <a:lnL w="6350" cap="flat" cmpd="sng" algn="ctr">
-                      <a:solidFill>
-                        <a:srgbClr val="CCCCCC"/>
-                      </a:solidFill>
-                      <a:prstDash val="solid"/>
-                    </a:lnL>
-                    <a:lnR w="6350" cap="flat" cmpd="sng" algn="ctr">
-                      <a:solidFill>
-                        <a:srgbClr val="CCCCCC"/>
-                      </a:solidFill>
-                      <a:prstDash val="solid"/>
-                    </a:lnR>
-                    <a:lnT w="6350" cap="flat" cmpd="sng" algn="ctr">
-                      <a:solidFill>
-                        <a:srgbClr val="CCCCCC"/>
-                      </a:solidFill>
-                      <a:prstDash val="solid"/>
-                    </a:lnT>
-                    <a:lnB w="6350" cap="flat" cmpd="sng" algn="ctr">
-                      <a:solidFill>
-                        <a:srgbClr val="CCCCCC"/>
-                      </a:solidFill>
-                      <a:prstDash val="solid"/>
-                    </a:lnB>
-                  </a:tcPr>
-                </a:tc>
-                <a:tc>
-                  <a:txBody>
-                    <a:bodyPr wrap="square"/>
-                    <a:lstStyle/>
-                    <a:p>
-                      <a:pPr algn="ctr"/>
-                      <a:r>
-                        <a:rPr sz="900" b="0">
-                          <a:solidFill>
-                            <a:srgbClr val="333333"/>
-                          </a:solidFill>
-                          <a:latin typeface="メイリオ"/>
-                          <a:ea typeface="メイリオ"/>
-                        </a:rPr>
-                        <a:t>8/26</a:t>
-                      </a:r>
-                    </a:p>
-                  </a:txBody>
-                  <a:tcPr anchor="ctr">
-                    <a:solidFill>
-                      <a:srgbClr val="FFFFFF"/>
-                    </a:solidFill>
-                    <a:lnL w="6350" cap="flat" cmpd="sng" algn="ctr">
-                      <a:solidFill>
-                        <a:srgbClr val="CCCCCC"/>
-                      </a:solidFill>
-                      <a:prstDash val="solid"/>
-                    </a:lnL>
-                    <a:lnR w="6350" cap="flat" cmpd="sng" algn="ctr">
-                      <a:solidFill>
-                        <a:srgbClr val="CCCCCC"/>
-                      </a:solidFill>
-                      <a:prstDash val="solid"/>
-                    </a:lnR>
-                    <a:lnT w="6350" cap="flat" cmpd="sng" algn="ctr">
-                      <a:solidFill>
-                        <a:srgbClr val="CCCCCC"/>
-                      </a:solidFill>
-                      <a:prstDash val="solid"/>
-                    </a:lnT>
-                    <a:lnB w="6350" cap="flat" cmpd="sng" algn="ctr">
-                      <a:solidFill>
-                        <a:srgbClr val="CCCCCC"/>
-                      </a:solidFill>
-                      <a:prstDash val="solid"/>
-                    </a:lnB>
-                  </a:tcPr>
-                </a:tc>
-              </a:tr>
-              <a:tr h="366666">
-                <a:tc>
-                  <a:txBody>
-                    <a:bodyPr wrap="square"/>
-                    <a:lstStyle/>
-                    <a:p>
-                      <a:pPr algn="ctr"/>
-                      <a:r>
-                        <a:rPr sz="900" b="1">
-                          <a:solidFill>
-                            <a:srgbClr val="333333"/>
-                          </a:solidFill>
-                          <a:latin typeface="メイリオ"/>
-                          <a:ea typeface="メイリオ"/>
-                        </a:rPr>
-                        <a:t>3</a:t>
-                      </a:r>
-                    </a:p>
-                  </a:txBody>
-                  <a:tcPr anchor="ctr">
-                    <a:solidFill>
-                      <a:srgbClr val="F0FAF8"/>
-                    </a:solidFill>
-                    <a:lnL w="6350" cap="flat" cmpd="sng" algn="ctr">
-                      <a:solidFill>
-                        <a:srgbClr val="CCCCCC"/>
-                      </a:solidFill>
-                      <a:prstDash val="solid"/>
-                    </a:lnL>
-                    <a:lnR w="6350" cap="flat" cmpd="sng" algn="ctr">
-                      <a:solidFill>
-                        <a:srgbClr val="CCCCCC"/>
-                      </a:solidFill>
-                      <a:prstDash val="solid"/>
-                    </a:lnR>
-                    <a:lnT w="6350" cap="flat" cmpd="sng" algn="ctr">
-                      <a:solidFill>
-                        <a:srgbClr val="CCCCCC"/>
-                      </a:solidFill>
-                      <a:prstDash val="solid"/>
-                    </a:lnT>
-                    <a:lnB w="6350" cap="flat" cmpd="sng" algn="ctr">
-                      <a:solidFill>
-                        <a:srgbClr val="CCCCCC"/>
-                      </a:solidFill>
-                      <a:prstDash val="solid"/>
-                    </a:lnB>
-                  </a:tcPr>
-                </a:tc>
-                <a:tc>
-                  <a:txBody>
-                    <a:bodyPr wrap="square"/>
-                    <a:lstStyle/>
-                    <a:p>
-                      <a:pPr algn="l"/>
-                      <a:r>
-                        <a:rPr sz="900" b="0">
-                          <a:solidFill>
-                            <a:srgbClr val="333333"/>
-                          </a:solidFill>
-                          <a:latin typeface="メイリオ"/>
-                          <a:ea typeface="メイリオ"/>
-                        </a:rPr>
-                        <a:t>業務フロー整理</a:t>
-                      </a:r>
-                    </a:p>
-                  </a:txBody>
-                  <a:tcPr anchor="ctr">
-                    <a:solidFill>
-                      <a:srgbClr val="F0FAF8"/>
-                    </a:solidFill>
-                    <a:lnL w="6350" cap="flat" cmpd="sng" algn="ctr">
-                      <a:solidFill>
-                        <a:srgbClr val="CCCCCC"/>
-                      </a:solidFill>
-                      <a:prstDash val="solid"/>
-                    </a:lnL>
-                    <a:lnR w="6350" cap="flat" cmpd="sng" algn="ctr">
-                      <a:solidFill>
-                        <a:srgbClr val="CCCCCC"/>
-                      </a:solidFill>
-                      <a:prstDash val="solid"/>
-                    </a:lnR>
-                    <a:lnT w="6350" cap="flat" cmpd="sng" algn="ctr">
-                      <a:solidFill>
-                        <a:srgbClr val="CCCCCC"/>
-                      </a:solidFill>
-                      <a:prstDash val="solid"/>
-                    </a:lnT>
-                    <a:lnB w="6350" cap="flat" cmpd="sng" algn="ctr">
-                      <a:solidFill>
-                        <a:srgbClr val="CCCCCC"/>
-                      </a:solidFill>
-                      <a:prstDash val="solid"/>
-                    </a:lnB>
-                  </a:tcPr>
-                </a:tc>
-                <a:tc>
-                  <a:txBody>
-                    <a:bodyPr wrap="square"/>
-                    <a:lstStyle/>
-                    <a:p>
-                      <a:pPr algn="l"/>
-                      <a:r>
-                        <a:rPr sz="900" b="0">
-                          <a:solidFill>
-                            <a:srgbClr val="333333"/>
-                          </a:solidFill>
-                          <a:latin typeface="メイリオ"/>
-                          <a:ea typeface="メイリオ"/>
-                        </a:rPr>
-                        <a:t>注文〜出荷・請求等の業務フロー検討</a:t>
-                      </a:r>
-                    </a:p>
-                  </a:txBody>
-                  <a:tcPr anchor="ctr">
-                    <a:solidFill>
-                      <a:srgbClr val="F0FAF8"/>
-                    </a:solidFill>
-                    <a:lnL w="6350" cap="flat" cmpd="sng" algn="ctr">
-                      <a:solidFill>
-                        <a:srgbClr val="CCCCCC"/>
-                      </a:solidFill>
-                      <a:prstDash val="solid"/>
-                    </a:lnL>
-                    <a:lnR w="6350" cap="flat" cmpd="sng" algn="ctr">
-                      <a:solidFill>
-                        <a:srgbClr val="CCCCCC"/>
-                      </a:solidFill>
-                      <a:prstDash val="solid"/>
-                    </a:lnR>
-                    <a:lnT w="6350" cap="flat" cmpd="sng" algn="ctr">
-                      <a:solidFill>
-                        <a:srgbClr val="CCCCCC"/>
-                      </a:solidFill>
-                      <a:prstDash val="solid"/>
-                    </a:lnT>
-                    <a:lnB w="6350" cap="flat" cmpd="sng" algn="ctr">
-                      <a:solidFill>
-                        <a:srgbClr val="CCCCCC"/>
-                      </a:solidFill>
-                      <a:prstDash val="solid"/>
-                    </a:lnB>
-                  </a:tcPr>
-                </a:tc>
-                <a:tc>
-                  <a:txBody>
-                    <a:bodyPr wrap="square"/>
-                    <a:lstStyle/>
-                    <a:p>
-                      <a:pPr algn="ctr"/>
-                      <a:r>
-                        <a:rPr sz="900" b="0">
-                          <a:solidFill>
-                            <a:srgbClr val="333333"/>
-                          </a:solidFill>
-                          <a:latin typeface="メイリオ"/>
-                          <a:ea typeface="メイリオ"/>
-                        </a:rPr>
-                        <a:t>9/2頃</a:t>
-                      </a:r>
-                    </a:p>
-                  </a:txBody>
-                  <a:tcPr anchor="ctr">
-                    <a:solidFill>
-                      <a:srgbClr val="F0FAF8"/>
-                    </a:solidFill>
-                    <a:lnL w="6350" cap="flat" cmpd="sng" algn="ctr">
-                      <a:solidFill>
-                        <a:srgbClr val="CCCCCC"/>
-                      </a:solidFill>
-                      <a:prstDash val="solid"/>
-                    </a:lnL>
-                    <a:lnR w="6350" cap="flat" cmpd="sng" algn="ctr">
-                      <a:solidFill>
-                        <a:srgbClr val="CCCCCC"/>
-                      </a:solidFill>
-                      <a:prstDash val="solid"/>
-                    </a:lnR>
-                    <a:lnT w="6350" cap="flat" cmpd="sng" algn="ctr">
-                      <a:solidFill>
-                        <a:srgbClr val="CCCCCC"/>
-                      </a:solidFill>
-                      <a:prstDash val="solid"/>
-                    </a:lnT>
-                    <a:lnB w="6350" cap="flat" cmpd="sng" algn="ctr">
-                      <a:solidFill>
-                        <a:srgbClr val="CCCCCC"/>
-                      </a:solidFill>
-                      <a:prstDash val="solid"/>
-                    </a:lnB>
-                  </a:tcPr>
-                </a:tc>
-              </a:tr>
-              <a:tr h="366666">
-                <a:tc>
-                  <a:txBody>
-                    <a:bodyPr wrap="square"/>
-                    <a:lstStyle/>
-                    <a:p>
-                      <a:pPr algn="ctr"/>
-                      <a:r>
-                        <a:rPr sz="900" b="1">
-                          <a:solidFill>
-                            <a:srgbClr val="333333"/>
-                          </a:solidFill>
-                          <a:latin typeface="メイリオ"/>
-                          <a:ea typeface="メイリオ"/>
-                        </a:rPr>
-                        <a:t>4</a:t>
-                      </a:r>
-                    </a:p>
-                  </a:txBody>
-                  <a:tcPr anchor="ctr">
-                    <a:solidFill>
-                      <a:srgbClr val="FFFFFF"/>
-                    </a:solidFill>
-                    <a:lnL w="6350" cap="flat" cmpd="sng" algn="ctr">
-                      <a:solidFill>
-                        <a:srgbClr val="CCCCCC"/>
-                      </a:solidFill>
-                      <a:prstDash val="solid"/>
-                    </a:lnL>
-                    <a:lnR w="6350" cap="flat" cmpd="sng" algn="ctr">
-                      <a:solidFill>
-                        <a:srgbClr val="CCCCCC"/>
-                      </a:solidFill>
-                      <a:prstDash val="solid"/>
-                    </a:lnR>
-                    <a:lnT w="6350" cap="flat" cmpd="sng" algn="ctr">
-                      <a:solidFill>
-                        <a:srgbClr val="CCCCCC"/>
-                      </a:solidFill>
-                      <a:prstDash val="solid"/>
-                    </a:lnT>
-                    <a:lnB w="6350" cap="flat" cmpd="sng" algn="ctr">
-                      <a:solidFill>
-                        <a:srgbClr val="CCCCCC"/>
-                      </a:solidFill>
-                      <a:prstDash val="solid"/>
-                    </a:lnB>
-                  </a:tcPr>
-                </a:tc>
-                <a:tc>
-                  <a:txBody>
-                    <a:bodyPr wrap="square"/>
-                    <a:lstStyle/>
-                    <a:p>
-                      <a:pPr algn="l"/>
-                      <a:r>
-                        <a:rPr sz="900" b="0">
-                          <a:solidFill>
-                            <a:srgbClr val="333333"/>
-                          </a:solidFill>
-                          <a:latin typeface="メイリオ"/>
-                          <a:ea typeface="メイリオ"/>
-                        </a:rPr>
-                        <a:t>機能要件 Fit&amp;Gap</a:t>
-                      </a:r>
-                    </a:p>
-                  </a:txBody>
-                  <a:tcPr anchor="ctr">
-                    <a:solidFill>
-                      <a:srgbClr val="FFFFFF"/>
-                    </a:solidFill>
-                    <a:lnL w="6350" cap="flat" cmpd="sng" algn="ctr">
-                      <a:solidFill>
-                        <a:srgbClr val="CCCCCC"/>
-                      </a:solidFill>
-                      <a:prstDash val="solid"/>
-                    </a:lnL>
-                    <a:lnR w="6350" cap="flat" cmpd="sng" algn="ctr">
-                      <a:solidFill>
-                        <a:srgbClr val="CCCCCC"/>
-                      </a:solidFill>
-                      <a:prstDash val="solid"/>
-                    </a:lnR>
-                    <a:lnT w="6350" cap="flat" cmpd="sng" algn="ctr">
-                      <a:solidFill>
-                        <a:srgbClr val="CCCCCC"/>
-                      </a:solidFill>
-                      <a:prstDash val="solid"/>
-                    </a:lnT>
-                    <a:lnB w="6350" cap="flat" cmpd="sng" algn="ctr">
-                      <a:solidFill>
-                        <a:srgbClr val="CCCCCC"/>
-                      </a:solidFill>
-                      <a:prstDash val="solid"/>
-                    </a:lnB>
-                  </a:tcPr>
-                </a:tc>
-                <a:tc>
-                  <a:txBody>
-                    <a:bodyPr wrap="square"/>
-                    <a:lstStyle/>
-                    <a:p>
-                      <a:pPr algn="l"/>
-                      <a:r>
-                        <a:rPr sz="900" b="0">
-                          <a:solidFill>
-                            <a:srgbClr val="333333"/>
-                          </a:solidFill>
-                          <a:latin typeface="メイリオ"/>
-                          <a:ea typeface="メイリオ"/>
-                        </a:rPr>
-                        <a:t>Primo標準機能とのFit&amp;Gap・機能詳細</a:t>
-                      </a:r>
-                    </a:p>
-                  </a:txBody>
-                  <a:tcPr anchor="ctr">
-                    <a:solidFill>
-                      <a:srgbClr val="FFFFFF"/>
-                    </a:solidFill>
-                    <a:lnL w="6350" cap="flat" cmpd="sng" algn="ctr">
-                      <a:solidFill>
-                        <a:srgbClr val="CCCCCC"/>
-                      </a:solidFill>
-                      <a:prstDash val="solid"/>
-                    </a:lnL>
-                    <a:lnR w="6350" cap="flat" cmpd="sng" algn="ctr">
-                      <a:solidFill>
-                        <a:srgbClr val="CCCCCC"/>
-                      </a:solidFill>
-                      <a:prstDash val="solid"/>
-                    </a:lnR>
-                    <a:lnT w="6350" cap="flat" cmpd="sng" algn="ctr">
-                      <a:solidFill>
-                        <a:srgbClr val="CCCCCC"/>
-                      </a:solidFill>
-                      <a:prstDash val="solid"/>
-                    </a:lnT>
-                    <a:lnB w="6350" cap="flat" cmpd="sng" algn="ctr">
-                      <a:solidFill>
-                        <a:srgbClr val="CCCCCC"/>
-                      </a:solidFill>
-                      <a:prstDash val="solid"/>
-                    </a:lnB>
-                  </a:tcPr>
-                </a:tc>
-                <a:tc>
-                  <a:txBody>
-                    <a:bodyPr wrap="square"/>
-                    <a:lstStyle/>
-                    <a:p>
-                      <a:pPr algn="ctr"/>
-                      <a:r>
-                        <a:rPr sz="900" b="0">
-                          <a:solidFill>
-                            <a:srgbClr val="333333"/>
-                          </a:solidFill>
-                          <a:latin typeface="メイリオ"/>
-                          <a:ea typeface="メイリオ"/>
-                        </a:rPr>
-                        <a:t>9/9頃</a:t>
-                      </a:r>
-                    </a:p>
-                  </a:txBody>
-                  <a:tcPr anchor="ctr">
-                    <a:solidFill>
-                      <a:srgbClr val="FFFFFF"/>
-                    </a:solidFill>
-                    <a:lnL w="6350" cap="flat" cmpd="sng" algn="ctr">
-                      <a:solidFill>
-                        <a:srgbClr val="CCCCCC"/>
-                      </a:solidFill>
-                      <a:prstDash val="solid"/>
-                    </a:lnL>
-                    <a:lnR w="6350" cap="flat" cmpd="sng" algn="ctr">
-                      <a:solidFill>
-                        <a:srgbClr val="CCCCCC"/>
-                      </a:solidFill>
-                      <a:prstDash val="solid"/>
-                    </a:lnR>
-                    <a:lnT w="6350" cap="flat" cmpd="sng" algn="ctr">
-                      <a:solidFill>
-                        <a:srgbClr val="CCCCCC"/>
-                      </a:solidFill>
-                      <a:prstDash val="solid"/>
-                    </a:lnT>
-                    <a:lnB w="6350" cap="flat" cmpd="sng" algn="ctr">
-                      <a:solidFill>
-                        <a:srgbClr val="CCCCCC"/>
-                      </a:solidFill>
-                      <a:prstDash val="solid"/>
-                    </a:lnB>
-                  </a:tcPr>
-                </a:tc>
-              </a:tr>
-              <a:tr h="366666">
-                <a:tc>
-                  <a:txBody>
-                    <a:bodyPr wrap="square"/>
-                    <a:lstStyle/>
-                    <a:p>
-                      <a:pPr algn="ctr"/>
-                      <a:r>
-                        <a:rPr sz="900" b="1">
-                          <a:solidFill>
-                            <a:srgbClr val="333333"/>
-                          </a:solidFill>
-                          <a:latin typeface="メイリオ"/>
-                          <a:ea typeface="メイリオ"/>
-                        </a:rPr>
-                        <a:t>5</a:t>
-                      </a:r>
-                    </a:p>
-                  </a:txBody>
-                  <a:tcPr anchor="ctr">
-                    <a:solidFill>
-                      <a:srgbClr val="F0FAF8"/>
-                    </a:solidFill>
-                    <a:lnL w="6350" cap="flat" cmpd="sng" algn="ctr">
-                      <a:solidFill>
-                        <a:srgbClr val="CCCCCC"/>
-                      </a:solidFill>
-                      <a:prstDash val="solid"/>
-                    </a:lnL>
-                    <a:lnR w="6350" cap="flat" cmpd="sng" algn="ctr">
-                      <a:solidFill>
-                        <a:srgbClr val="CCCCCC"/>
-                      </a:solidFill>
-                      <a:prstDash val="solid"/>
-                    </a:lnR>
-                    <a:lnT w="6350" cap="flat" cmpd="sng" algn="ctr">
-                      <a:solidFill>
-                        <a:srgbClr val="CCCCCC"/>
-                      </a:solidFill>
-                      <a:prstDash val="solid"/>
-                    </a:lnT>
-                    <a:lnB w="6350" cap="flat" cmpd="sng" algn="ctr">
-                      <a:solidFill>
-                        <a:srgbClr val="CCCCCC"/>
-                      </a:solidFill>
-                      <a:prstDash val="solid"/>
-                    </a:lnB>
-                  </a:tcPr>
-                </a:tc>
-                <a:tc>
-                  <a:txBody>
-                    <a:bodyPr wrap="square"/>
-                    <a:lstStyle/>
-                    <a:p>
-                      <a:pPr algn="l"/>
-                      <a:r>
-                        <a:rPr sz="900" b="0">
-                          <a:solidFill>
-                            <a:srgbClr val="333333"/>
-                          </a:solidFill>
-                          <a:latin typeface="メイリオ"/>
-                          <a:ea typeface="メイリオ"/>
-                        </a:rPr>
-                        <a:t>非機能要件定義</a:t>
-                      </a:r>
-                    </a:p>
-                  </a:txBody>
-                  <a:tcPr anchor="ctr">
-                    <a:solidFill>
-                      <a:srgbClr val="F0FAF8"/>
-                    </a:solidFill>
-                    <a:lnL w="6350" cap="flat" cmpd="sng" algn="ctr">
-                      <a:solidFill>
-                        <a:srgbClr val="CCCCCC"/>
-                      </a:solidFill>
-                      <a:prstDash val="solid"/>
-                    </a:lnL>
-                    <a:lnR w="6350" cap="flat" cmpd="sng" algn="ctr">
-                      <a:solidFill>
-                        <a:srgbClr val="CCCCCC"/>
-                      </a:solidFill>
-                      <a:prstDash val="solid"/>
-                    </a:lnR>
-                    <a:lnT w="6350" cap="flat" cmpd="sng" algn="ctr">
-                      <a:solidFill>
-                        <a:srgbClr val="CCCCCC"/>
-                      </a:solidFill>
-                      <a:prstDash val="solid"/>
-                    </a:lnT>
-                    <a:lnB w="6350" cap="flat" cmpd="sng" algn="ctr">
-                      <a:solidFill>
-                        <a:srgbClr val="CCCCCC"/>
-                      </a:solidFill>
-                      <a:prstDash val="solid"/>
-                    </a:lnB>
-                  </a:tcPr>
-                </a:tc>
-                <a:tc>
-                  <a:txBody>
-                    <a:bodyPr wrap="square"/>
-                    <a:lstStyle/>
-                    <a:p>
-                      <a:pPr algn="l"/>
-                      <a:r>
-                        <a:rPr sz="900" b="0">
-                          <a:solidFill>
-                            <a:srgbClr val="333333"/>
-                          </a:solidFill>
-                          <a:latin typeface="メイリオ"/>
-                          <a:ea typeface="メイリオ"/>
-                        </a:rPr>
-                        <a:t>性能・セキュリティ・運用等の非機能検討</a:t>
-                      </a:r>
-                    </a:p>
-                  </a:txBody>
-                  <a:tcPr anchor="ctr">
-                    <a:solidFill>
-                      <a:srgbClr val="F0FAF8"/>
-                    </a:solidFill>
-                    <a:lnL w="6350" cap="flat" cmpd="sng" algn="ctr">
-                      <a:solidFill>
-                        <a:srgbClr val="CCCCCC"/>
-                      </a:solidFill>
-                      <a:prstDash val="solid"/>
-                    </a:lnL>
-                    <a:lnR w="6350" cap="flat" cmpd="sng" algn="ctr">
-                      <a:solidFill>
-                        <a:srgbClr val="CCCCCC"/>
-                      </a:solidFill>
-                      <a:prstDash val="solid"/>
-                    </a:lnR>
-                    <a:lnT w="6350" cap="flat" cmpd="sng" algn="ctr">
-                      <a:solidFill>
-                        <a:srgbClr val="CCCCCC"/>
-                      </a:solidFill>
-                      <a:prstDash val="solid"/>
-                    </a:lnT>
-                    <a:lnB w="6350" cap="flat" cmpd="sng" algn="ctr">
-                      <a:solidFill>
-                        <a:srgbClr val="CCCCCC"/>
-                      </a:solidFill>
-                      <a:prstDash val="solid"/>
-                    </a:lnB>
-                  </a:tcPr>
-                </a:tc>
-                <a:tc>
-                  <a:txBody>
-                    <a:bodyPr wrap="square"/>
-                    <a:lstStyle/>
-                    <a:p>
-                      <a:pPr algn="ctr"/>
-                      <a:r>
-                        <a:rPr sz="900" b="0">
-                          <a:solidFill>
-                            <a:srgbClr val="333333"/>
-                          </a:solidFill>
-                          <a:latin typeface="メイリオ"/>
-                          <a:ea typeface="メイリオ"/>
-                        </a:rPr>
-                        <a:t>9/16頃</a:t>
-                      </a:r>
-                    </a:p>
-                  </a:txBody>
-                  <a:tcPr anchor="ctr">
-                    <a:solidFill>
-                      <a:srgbClr val="F0FAF8"/>
-                    </a:solidFill>
-                    <a:lnL w="6350" cap="flat" cmpd="sng" algn="ctr">
-                      <a:solidFill>
-                        <a:srgbClr val="CCCCCC"/>
-                      </a:solidFill>
-                      <a:prstDash val="solid"/>
-                    </a:lnL>
-                    <a:lnR w="6350" cap="flat" cmpd="sng" algn="ctr">
-                      <a:solidFill>
-                        <a:srgbClr val="CCCCCC"/>
-                      </a:solidFill>
-                      <a:prstDash val="solid"/>
-                    </a:lnR>
-                    <a:lnT w="6350" cap="flat" cmpd="sng" algn="ctr">
-                      <a:solidFill>
-                        <a:srgbClr val="CCCCCC"/>
-                      </a:solidFill>
-                      <a:prstDash val="solid"/>
-                    </a:lnT>
-                    <a:lnB w="6350" cap="flat" cmpd="sng" algn="ctr">
-                      <a:solidFill>
-                        <a:srgbClr val="CCCCCC"/>
-                      </a:solidFill>
-                      <a:prstDash val="solid"/>
-                    </a:lnB>
-                  </a:tcPr>
-                </a:tc>
-              </a:tr>
-              <a:tr h="366666">
-                <a:tc>
-                  <a:txBody>
-                    <a:bodyPr wrap="square"/>
-                    <a:lstStyle/>
-                    <a:p>
-                      <a:pPr algn="ctr"/>
-                      <a:r>
-                        <a:rPr sz="900" b="1">
-                          <a:solidFill>
-                            <a:srgbClr val="333333"/>
-                          </a:solidFill>
-                          <a:latin typeface="メイリオ"/>
-                          <a:ea typeface="メイリオ"/>
-                        </a:rPr>
-                        <a:t>6</a:t>
-                      </a:r>
-                    </a:p>
-                  </a:txBody>
-                  <a:tcPr anchor="ctr">
-                    <a:solidFill>
-                      <a:srgbClr val="FFFFFF"/>
-                    </a:solidFill>
-                    <a:lnL w="6350" cap="flat" cmpd="sng" algn="ctr">
-                      <a:solidFill>
-                        <a:srgbClr val="CCCCCC"/>
-                      </a:solidFill>
-                      <a:prstDash val="solid"/>
-                    </a:lnL>
-                    <a:lnR w="6350" cap="flat" cmpd="sng" algn="ctr">
-                      <a:solidFill>
-                        <a:srgbClr val="CCCCCC"/>
-                      </a:solidFill>
-                      <a:prstDash val="solid"/>
-                    </a:lnR>
-                    <a:lnT w="6350" cap="flat" cmpd="sng" algn="ctr">
-                      <a:solidFill>
-                        <a:srgbClr val="CCCCCC"/>
-                      </a:solidFill>
-                      <a:prstDash val="solid"/>
-                    </a:lnT>
-                    <a:lnB w="6350" cap="flat" cmpd="sng" algn="ctr">
-                      <a:solidFill>
-                        <a:srgbClr val="CCCCCC"/>
-                      </a:solidFill>
-                      <a:prstDash val="solid"/>
-                    </a:lnB>
-                  </a:tcPr>
-                </a:tc>
-                <a:tc>
-                  <a:txBody>
-                    <a:bodyPr wrap="square"/>
-                    <a:lstStyle/>
-                    <a:p>
-                      <a:pPr algn="l"/>
-                      <a:r>
-                        <a:rPr sz="900" b="0">
-                          <a:solidFill>
-                            <a:srgbClr val="333333"/>
-                          </a:solidFill>
-                          <a:latin typeface="メイリオ"/>
-                          <a:ea typeface="メイリオ"/>
-                        </a:rPr>
-                        <a:t>要件定義書（案）</a:t>
-                      </a:r>
-                    </a:p>
-                  </a:txBody>
-                  <a:tcPr anchor="ctr">
-                    <a:solidFill>
-                      <a:srgbClr val="FFFFFF"/>
-                    </a:solidFill>
-                    <a:lnL w="6350" cap="flat" cmpd="sng" algn="ctr">
-                      <a:solidFill>
-                        <a:srgbClr val="CCCCCC"/>
-                      </a:solidFill>
-                      <a:prstDash val="solid"/>
-                    </a:lnL>
-                    <a:lnR w="6350" cap="flat" cmpd="sng" algn="ctr">
-                      <a:solidFill>
-                        <a:srgbClr val="CCCCCC"/>
-                      </a:solidFill>
-                      <a:prstDash val="solid"/>
-                    </a:lnR>
-                    <a:lnT w="6350" cap="flat" cmpd="sng" algn="ctr">
-                      <a:solidFill>
-                        <a:srgbClr val="CCCCCC"/>
-                      </a:solidFill>
-                      <a:prstDash val="solid"/>
-                    </a:lnT>
-                    <a:lnB w="6350" cap="flat" cmpd="sng" algn="ctr">
-                      <a:solidFill>
-                        <a:srgbClr val="CCCCCC"/>
-                      </a:solidFill>
-                      <a:prstDash val="solid"/>
-                    </a:lnB>
-                  </a:tcPr>
-                </a:tc>
-                <a:tc>
-                  <a:txBody>
-                    <a:bodyPr wrap="square"/>
-                    <a:lstStyle/>
-                    <a:p>
-                      <a:pPr algn="l"/>
-                      <a:r>
-                        <a:rPr sz="900" b="0">
-                          <a:solidFill>
-                            <a:srgbClr val="333333"/>
-                          </a:solidFill>
-                          <a:latin typeface="メイリオ"/>
-                          <a:ea typeface="メイリオ"/>
-                        </a:rPr>
-                        <a:t>要件定義の取りまとめ・レビュー</a:t>
-                      </a:r>
-                    </a:p>
-                  </a:txBody>
-                  <a:tcPr anchor="ctr">
-                    <a:solidFill>
-                      <a:srgbClr val="FFFFFF"/>
-                    </a:solidFill>
-                    <a:lnL w="6350" cap="flat" cmpd="sng" algn="ctr">
-                      <a:solidFill>
-                        <a:srgbClr val="CCCCCC"/>
-                      </a:solidFill>
-                      <a:prstDash val="solid"/>
-                    </a:lnL>
-                    <a:lnR w="6350" cap="flat" cmpd="sng" algn="ctr">
-                      <a:solidFill>
-                        <a:srgbClr val="CCCCCC"/>
-                      </a:solidFill>
-                      <a:prstDash val="solid"/>
-                    </a:lnR>
-                    <a:lnT w="6350" cap="flat" cmpd="sng" algn="ctr">
-                      <a:solidFill>
-                        <a:srgbClr val="CCCCCC"/>
-                      </a:solidFill>
-                      <a:prstDash val="solid"/>
-                    </a:lnT>
-                    <a:lnB w="6350" cap="flat" cmpd="sng" algn="ctr">
-                      <a:solidFill>
-                        <a:srgbClr val="CCCCCC"/>
-                      </a:solidFill>
-                      <a:prstDash val="solid"/>
-                    </a:lnB>
-                  </a:tcPr>
-                </a:tc>
-                <a:tc>
-                  <a:txBody>
-                    <a:bodyPr wrap="square"/>
-                    <a:lstStyle/>
-                    <a:p>
-                      <a:pPr algn="ctr"/>
-                      <a:r>
-                        <a:rPr sz="900" b="0">
-                          <a:solidFill>
-                            <a:srgbClr val="333333"/>
-                          </a:solidFill>
-                          <a:latin typeface="メイリオ"/>
-                          <a:ea typeface="メイリオ"/>
-                        </a:rPr>
-                        <a:t>9/24頃</a:t>
-                      </a:r>
-                    </a:p>
-                  </a:txBody>
-                  <a:tcPr anchor="ctr">
-                    <a:solidFill>
-                      <a:srgbClr val="FFFFFF"/>
-                    </a:solidFill>
-                    <a:lnL w="6350" cap="flat" cmpd="sng" algn="ctr">
-                      <a:solidFill>
-                        <a:srgbClr val="CCCCCC"/>
-                      </a:solidFill>
-                      <a:prstDash val="solid"/>
-                    </a:lnL>
-                    <a:lnR w="6350" cap="flat" cmpd="sng" algn="ctr">
-                      <a:solidFill>
-                        <a:srgbClr val="CCCCCC"/>
-                      </a:solidFill>
-                      <a:prstDash val="solid"/>
-                    </a:lnR>
-                    <a:lnT w="6350" cap="flat" cmpd="sng" algn="ctr">
-                      <a:solidFill>
-                        <a:srgbClr val="CCCCCC"/>
-                      </a:solidFill>
-                      <a:prstDash val="solid"/>
-                    </a:lnT>
-                    <a:lnB w="6350" cap="flat" cmpd="sng" algn="ctr">
-                      <a:solidFill>
-                        <a:srgbClr val="CCCCCC"/>
-                      </a:solidFill>
-                      <a:prstDash val="solid"/>
-                    </a:lnB>
-                  </a:tcPr>
-                </a:tc>
-              </a:tr>
-              <a:tr h="366666">
-                <a:tc>
-                  <a:txBody>
-                    <a:bodyPr wrap="square"/>
-                    <a:lstStyle/>
-                    <a:p>
-                      <a:pPr algn="ctr"/>
-                      <a:r>
-                        <a:rPr sz="900" b="1">
-                          <a:solidFill>
-                            <a:srgbClr val="333333"/>
-                          </a:solidFill>
-                          <a:latin typeface="メイリオ"/>
-                          <a:ea typeface="メイリオ"/>
-                        </a:rPr>
-                        <a:t>7</a:t>
-                      </a:r>
-                    </a:p>
-                  </a:txBody>
-                  <a:tcPr anchor="ctr">
-                    <a:solidFill>
-                      <a:srgbClr val="F0FAF8"/>
-                    </a:solidFill>
-                    <a:lnL w="6350" cap="flat" cmpd="sng" algn="ctr">
-                      <a:solidFill>
-                        <a:srgbClr val="CCCCCC"/>
-                      </a:solidFill>
-                      <a:prstDash val="solid"/>
-                    </a:lnL>
-                    <a:lnR w="6350" cap="flat" cmpd="sng" algn="ctr">
-                      <a:solidFill>
-                        <a:srgbClr val="CCCCCC"/>
-                      </a:solidFill>
-                      <a:prstDash val="solid"/>
-                    </a:lnR>
-                    <a:lnT w="6350" cap="flat" cmpd="sng" algn="ctr">
-                      <a:solidFill>
-                        <a:srgbClr val="CCCCCC"/>
-                      </a:solidFill>
-                      <a:prstDash val="solid"/>
-                    </a:lnT>
-                    <a:lnB w="6350" cap="flat" cmpd="sng" algn="ctr">
-                      <a:solidFill>
-                        <a:srgbClr val="CCCCCC"/>
-                      </a:solidFill>
-                      <a:prstDash val="solid"/>
-                    </a:lnB>
-                  </a:tcPr>
-                </a:tc>
-                <a:tc>
-                  <a:txBody>
-                    <a:bodyPr wrap="square"/>
-                    <a:lstStyle/>
-                    <a:p>
-                      <a:pPr algn="l"/>
-                      <a:r>
-                        <a:rPr sz="900" b="0">
-                          <a:solidFill>
-                            <a:srgbClr val="333333"/>
-                          </a:solidFill>
-                          <a:latin typeface="メイリオ"/>
-                          <a:ea typeface="メイリオ"/>
-                        </a:rPr>
-                        <a:t>要件定義書／正式見積り</a:t>
-                      </a:r>
-                    </a:p>
-                  </a:txBody>
-                  <a:tcPr anchor="ctr">
-                    <a:solidFill>
-                      <a:srgbClr val="F0FAF8"/>
-                    </a:solidFill>
-                    <a:lnL w="6350" cap="flat" cmpd="sng" algn="ctr">
-                      <a:solidFill>
-                        <a:srgbClr val="CCCCCC"/>
-                      </a:solidFill>
-                      <a:prstDash val="solid"/>
-                    </a:lnL>
-                    <a:lnR w="6350" cap="flat" cmpd="sng" algn="ctr">
-                      <a:solidFill>
-                        <a:srgbClr val="CCCCCC"/>
-                      </a:solidFill>
-                      <a:prstDash val="solid"/>
-                    </a:lnR>
-                    <a:lnT w="6350" cap="flat" cmpd="sng" algn="ctr">
-                      <a:solidFill>
-                        <a:srgbClr val="CCCCCC"/>
-                      </a:solidFill>
-                      <a:prstDash val="solid"/>
-                    </a:lnT>
-                    <a:lnB w="6350" cap="flat" cmpd="sng" algn="ctr">
-                      <a:solidFill>
-                        <a:srgbClr val="CCCCCC"/>
-                      </a:solidFill>
-                      <a:prstDash val="solid"/>
-                    </a:lnB>
-                  </a:tcPr>
-                </a:tc>
-                <a:tc>
-                  <a:txBody>
-                    <a:bodyPr wrap="square"/>
-                    <a:lstStyle/>
-                    <a:p>
-                      <a:pPr algn="l"/>
-                      <a:r>
-                        <a:rPr sz="900" b="0">
-                          <a:solidFill>
-                            <a:srgbClr val="333333"/>
-                          </a:solidFill>
-                          <a:latin typeface="メイリオ"/>
-                          <a:ea typeface="メイリオ"/>
-                        </a:rPr>
-                        <a:t>納品および開発工程の正式見積り提示</a:t>
-                      </a:r>
-                    </a:p>
-                  </a:txBody>
-                  <a:tcPr anchor="ctr">
-                    <a:solidFill>
-                      <a:srgbClr val="F0FAF8"/>
-                    </a:solidFill>
-                    <a:lnL w="6350" cap="flat" cmpd="sng" algn="ctr">
-                      <a:solidFill>
-                        <a:srgbClr val="CCCCCC"/>
-                      </a:solidFill>
-                      <a:prstDash val="solid"/>
-                    </a:lnL>
-                    <a:lnR w="6350" cap="flat" cmpd="sng" algn="ctr">
-                      <a:solidFill>
-                        <a:srgbClr val="CCCCCC"/>
-                      </a:solidFill>
-                      <a:prstDash val="solid"/>
-                    </a:lnR>
-                    <a:lnT w="6350" cap="flat" cmpd="sng" algn="ctr">
-                      <a:solidFill>
-                        <a:srgbClr val="CCCCCC"/>
-                      </a:solidFill>
-                      <a:prstDash val="solid"/>
-                    </a:lnT>
-                    <a:lnB w="6350" cap="flat" cmpd="sng" algn="ctr">
-                      <a:solidFill>
-                        <a:srgbClr val="CCCCCC"/>
-                      </a:solidFill>
-                      <a:prstDash val="solid"/>
-                    </a:lnB>
-                  </a:tcPr>
-                </a:tc>
-                <a:tc>
-                  <a:txBody>
-                    <a:bodyPr wrap="square"/>
-                    <a:lstStyle/>
-                    <a:p>
-                      <a:pPr algn="ctr"/>
-                      <a:r>
-                        <a:rPr sz="900" b="0">
-                          <a:solidFill>
-                            <a:srgbClr val="333333"/>
-                          </a:solidFill>
-                          <a:latin typeface="メイリオ"/>
-                          <a:ea typeface="メイリオ"/>
-                        </a:rPr>
-                        <a:t>9/29</a:t>
-                      </a:r>
-                    </a:p>
-                  </a:txBody>
-                  <a:tcPr anchor="ctr">
-                    <a:solidFill>
-                      <a:srgbClr val="F0FAF8"/>
-                    </a:solidFill>
-                    <a:lnL w="6350" cap="flat" cmpd="sng" algn="ctr">
-                      <a:solidFill>
-                        <a:srgbClr val="CCCCCC"/>
-                      </a:solidFill>
-                      <a:prstDash val="solid"/>
-                    </a:lnL>
-                    <a:lnR w="6350" cap="flat" cmpd="sng" algn="ctr">
-                      <a:solidFill>
-                        <a:srgbClr val="CCCCCC"/>
-                      </a:solidFill>
-                      <a:prstDash val="solid"/>
-                    </a:lnR>
-                    <a:lnT w="6350" cap="flat" cmpd="sng" algn="ctr">
-                      <a:solidFill>
-                        <a:srgbClr val="CCCCCC"/>
-                      </a:solidFill>
-                      <a:prstDash val="solid"/>
-                    </a:lnT>
-                    <a:lnB w="6350" cap="flat" cmpd="sng" algn="ctr">
-                      <a:solidFill>
-                        <a:srgbClr val="CCCCCC"/>
-                      </a:solidFill>
-                      <a:prstDash val="solid"/>
-                    </a:lnB>
-                  </a:tcPr>
-                </a:tc>
-              </a:tr>
-              <a:tr h="366672">
-                <a:tc>
-                  <a:txBody>
-                    <a:bodyPr wrap="square"/>
-                    <a:lstStyle/>
-                    <a:p>
-                      <a:pPr algn="ctr"/>
-                      <a:r>
-                        <a:rPr sz="900" b="1">
-                          <a:solidFill>
-                            <a:srgbClr val="333333"/>
-                          </a:solidFill>
-                          <a:latin typeface="メイリオ"/>
-                          <a:ea typeface="メイリオ"/>
-                        </a:rPr>
-                        <a:t>8</a:t>
-                      </a:r>
-                    </a:p>
-                  </a:txBody>
-                  <a:tcPr anchor="ctr">
-                    <a:solidFill>
-                      <a:srgbClr val="FFFFFF"/>
-                    </a:solidFill>
-                    <a:lnL w="6350" cap="flat" cmpd="sng" algn="ctr">
-                      <a:solidFill>
-                        <a:srgbClr val="CCCCCC"/>
-                      </a:solidFill>
-                      <a:prstDash val="solid"/>
-                    </a:lnL>
-                    <a:lnR w="6350" cap="flat" cmpd="sng" algn="ctr">
-                      <a:solidFill>
-                        <a:srgbClr val="CCCCCC"/>
-                      </a:solidFill>
-                      <a:prstDash val="solid"/>
-                    </a:lnR>
-                    <a:lnT w="6350" cap="flat" cmpd="sng" algn="ctr">
-                      <a:solidFill>
-                        <a:srgbClr val="CCCCCC"/>
-                      </a:solidFill>
-                      <a:prstDash val="solid"/>
-                    </a:lnT>
-                    <a:lnB w="6350" cap="flat" cmpd="sng" algn="ctr">
-                      <a:solidFill>
-                        <a:srgbClr val="CCCCCC"/>
-                      </a:solidFill>
-                      <a:prstDash val="solid"/>
-                    </a:lnB>
-                  </a:tcPr>
-                </a:tc>
-                <a:tc>
-                  <a:txBody>
-                    <a:bodyPr wrap="square"/>
-                    <a:lstStyle/>
-                    <a:p>
-                      <a:pPr algn="l"/>
-                      <a:r>
-                        <a:rPr sz="900" b="0">
-                          <a:solidFill>
-                            <a:srgbClr val="333333"/>
-                          </a:solidFill>
-                          <a:latin typeface="メイリオ"/>
-                          <a:ea typeface="メイリオ"/>
-                        </a:rPr>
-                        <a:t>ご検収</a:t>
-                      </a:r>
-                    </a:p>
-                  </a:txBody>
-                  <a:tcPr anchor="ctr">
-                    <a:solidFill>
-                      <a:srgbClr val="FFFFFF"/>
-                    </a:solidFill>
-                    <a:lnL w="6350" cap="flat" cmpd="sng" algn="ctr">
-                      <a:solidFill>
-                        <a:srgbClr val="CCCCCC"/>
-                      </a:solidFill>
-                      <a:prstDash val="solid"/>
-                    </a:lnL>
-                    <a:lnR w="6350" cap="flat" cmpd="sng" algn="ctr">
-                      <a:solidFill>
-                        <a:srgbClr val="CCCCCC"/>
-                      </a:solidFill>
-                      <a:prstDash val="solid"/>
-                    </a:lnR>
-                    <a:lnT w="6350" cap="flat" cmpd="sng" algn="ctr">
-                      <a:solidFill>
-                        <a:srgbClr val="CCCCCC"/>
-                      </a:solidFill>
-                      <a:prstDash val="solid"/>
-                    </a:lnT>
-                    <a:lnB w="6350" cap="flat" cmpd="sng" algn="ctr">
-                      <a:solidFill>
-                        <a:srgbClr val="CCCCCC"/>
-                      </a:solidFill>
-                      <a:prstDash val="solid"/>
-                    </a:lnB>
-                  </a:tcPr>
-                </a:tc>
-                <a:tc>
-                  <a:txBody>
-                    <a:bodyPr wrap="square"/>
-                    <a:lstStyle/>
-                    <a:p>
-                      <a:pPr algn="l"/>
-                      <a:r>
-                        <a:rPr sz="900" b="0">
-                          <a:solidFill>
-                            <a:srgbClr val="333333"/>
-                          </a:solidFill>
-                          <a:latin typeface="メイリオ"/>
-                          <a:ea typeface="メイリオ"/>
-                        </a:rPr>
-                        <a:t>要件定義工程のご検収</a:t>
-                      </a:r>
-                    </a:p>
-                  </a:txBody>
-                  <a:tcPr anchor="ctr">
-                    <a:solidFill>
-                      <a:srgbClr val="FFFFFF"/>
-                    </a:solidFill>
-                    <a:lnL w="6350" cap="flat" cmpd="sng" algn="ctr">
-                      <a:solidFill>
-                        <a:srgbClr val="CCCCCC"/>
-                      </a:solidFill>
-                      <a:prstDash val="solid"/>
-                    </a:lnL>
-                    <a:lnR w="6350" cap="flat" cmpd="sng" algn="ctr">
-                      <a:solidFill>
-                        <a:srgbClr val="CCCCCC"/>
-                      </a:solidFill>
-                      <a:prstDash val="solid"/>
-                    </a:lnR>
-                    <a:lnT w="6350" cap="flat" cmpd="sng" algn="ctr">
-                      <a:solidFill>
-                        <a:srgbClr val="CCCCCC"/>
-                      </a:solidFill>
-                      <a:prstDash val="solid"/>
-                    </a:lnT>
-                    <a:lnB w="6350" cap="flat" cmpd="sng" algn="ctr">
-                      <a:solidFill>
-                        <a:srgbClr val="CCCCCC"/>
-                      </a:solidFill>
-                      <a:prstDash val="solid"/>
-                    </a:lnB>
-                  </a:tcPr>
-                </a:tc>
-                <a:tc>
-                  <a:txBody>
-                    <a:bodyPr wrap="square"/>
-                    <a:lstStyle/>
-                    <a:p>
-                      <a:pPr algn="ctr"/>
-                      <a:r>
-                        <a:rPr sz="900" b="0">
-                          <a:solidFill>
-                            <a:srgbClr val="333333"/>
-                          </a:solidFill>
-                          <a:latin typeface="メイリオ"/>
-                          <a:ea typeface="メイリオ"/>
-                        </a:rPr>
-                        <a:t>9/30</a:t>
-                      </a:r>
-                    </a:p>
-                  </a:txBody>
-                  <a:tcPr anchor="ctr">
-                    <a:solidFill>
-                      <a:srgbClr val="FFFFFF"/>
-                    </a:solidFill>
-                    <a:lnL w="6350" cap="flat" cmpd="sng" algn="ctr">
-                      <a:solidFill>
-                        <a:srgbClr val="CCCCCC"/>
-                      </a:solidFill>
-                      <a:prstDash val="solid"/>
-                    </a:lnL>
-                    <a:lnR w="6350" cap="flat" cmpd="sng" algn="ctr">
-                      <a:solidFill>
-                        <a:srgbClr val="CCCCCC"/>
-                      </a:solidFill>
-                      <a:prstDash val="solid"/>
-                    </a:lnR>
-                    <a:lnT w="6350" cap="flat" cmpd="sng" algn="ctr">
-                      <a:solidFill>
-                        <a:srgbClr val="CCCCCC"/>
-                      </a:solidFill>
-                      <a:prstDash val="solid"/>
-                    </a:lnT>
-                    <a:lnB w="6350" cap="flat" cmpd="sng" algn="ctr">
-                      <a:solidFill>
-                        <a:srgbClr val="CCCCCC"/>
-                      </a:solidFill>
-                      <a:prstDash val="solid"/>
-                    </a:lnB>
-                  </a:tcPr>
-                </a:tc>
-              </a:tr>
-            </a:tbl>
-          </a:graphicData>
-        </a:graphic>
-      </p:graphicFrame>
+              <a:t>・フロントデザイン／商品データDL等</a:t>
+            </a:r>
+          </a:p>
+        </p:txBody>
+      </p:sp>
     </p:spTree>
   </p:cSld>
   <p:clrMapOvr>
@@ -8416,6 +5917,2172 @@
                 <a:latin typeface="メイリオ"/>
                 <a:ea typeface="メイリオ"/>
               </a:rPr>
+              <a:t>要件定義フェーズの進め方（概要）</a:t>
+            </a:r>
+          </a:p>
+        </p:txBody>
+      </p:sp>
+      <p:sp>
+        <p:nvSpPr>
+          <p:cNvPr id="4" name="Rounded Rectangle 3"/>
+          <p:cNvSpPr/>
+          <p:nvPr/>
+        </p:nvSpPr>
+        <p:spPr>
+          <a:xfrm>
+            <a:off x="400000" y="900000"/>
+            <a:ext cx="1500000" cy="1350000"/>
+          </a:xfrm>
+          <a:prstGeom prst="roundRect">
+            <a:avLst/>
+          </a:prstGeom>
+          <a:solidFill>
+            <a:srgbClr val="DEF3F1"/>
+          </a:solidFill>
+          <a:ln w="19050">
+            <a:solidFill>
+              <a:srgbClr val="00A693"/>
+            </a:solidFill>
+          </a:ln>
+        </p:spPr>
+        <p:style>
+          <a:lnRef idx="1">
+            <a:schemeClr val="accent1"/>
+          </a:lnRef>
+          <a:fillRef idx="3">
+            <a:schemeClr val="accent1"/>
+          </a:fillRef>
+          <a:effectRef idx="2">
+            <a:schemeClr val="accent1"/>
+          </a:effectRef>
+          <a:fontRef idx="minor">
+            <a:schemeClr val="lt1"/>
+          </a:fontRef>
+        </p:style>
+        <p:txBody>
+          <a:bodyPr rtlCol="0" anchor="ctr" wrap="square"/>
+          <a:lstStyle/>
+          <a:p>
+            <a:pPr algn="ctr"/>
+            <a:r>
+              <a:rPr sz="1100" b="1">
+                <a:solidFill>
+                  <a:srgbClr val="007A6E"/>
+                </a:solidFill>
+                <a:latin typeface="メイリオ"/>
+                <a:ea typeface="メイリオ"/>
+              </a:rPr>
+              <a:t>1</a:t>
+            </a:r>
+          </a:p>
+          <a:p>
+            <a:pPr algn="ctr"/>
+            <a:r>
+              <a:rPr sz="1100" b="1">
+                <a:solidFill>
+                  <a:srgbClr val="007A6E"/>
+                </a:solidFill>
+                <a:latin typeface="メイリオ"/>
+                <a:ea typeface="メイリオ"/>
+              </a:rPr>
+              <a:t>キックオフ</a:t>
+            </a:r>
+          </a:p>
+          <a:p/>
+          <a:p>
+            <a:pPr algn="ctr"/>
+            <a:r>
+              <a:rPr sz="900" b="0">
+                <a:solidFill>
+                  <a:srgbClr val="333333"/>
+                </a:solidFill>
+                <a:latin typeface="メイリオ"/>
+                <a:ea typeface="メイリオ"/>
+              </a:rPr>
+              <a:t>進め方合意</a:t>
+            </a:r>
+          </a:p>
+          <a:p>
+            <a:pPr algn="ctr"/>
+            <a:r>
+              <a:rPr sz="900" b="0">
+                <a:solidFill>
+                  <a:srgbClr val="333333"/>
+                </a:solidFill>
+                <a:latin typeface="メイリオ"/>
+                <a:ea typeface="メイリオ"/>
+              </a:rPr>
+              <a:t>ご要件すり合わせ</a:t>
+            </a:r>
+          </a:p>
+        </p:txBody>
+      </p:sp>
+      <p:sp>
+        <p:nvSpPr>
+          <p:cNvPr id="5" name="Right Arrow 4"/>
+          <p:cNvSpPr/>
+          <p:nvPr/>
+        </p:nvSpPr>
+        <p:spPr>
+          <a:xfrm>
+            <a:off x="1930000" y="1400000"/>
+            <a:ext cx="160000" cy="180000"/>
+          </a:xfrm>
+          <a:prstGeom prst="rightArrow">
+            <a:avLst/>
+          </a:prstGeom>
+          <a:solidFill>
+            <a:srgbClr val="00A693"/>
+          </a:solidFill>
+          <a:ln>
+            <a:noFill/>
+          </a:ln>
+        </p:spPr>
+        <p:style>
+          <a:lnRef idx="1">
+            <a:schemeClr val="accent1"/>
+          </a:lnRef>
+          <a:fillRef idx="3">
+            <a:schemeClr val="accent1"/>
+          </a:fillRef>
+          <a:effectRef idx="2">
+            <a:schemeClr val="accent1"/>
+          </a:effectRef>
+          <a:fontRef idx="minor">
+            <a:schemeClr val="lt1"/>
+          </a:fontRef>
+        </p:style>
+        <p:txBody>
+          <a:bodyPr rtlCol="0" anchor="ctr"/>
+          <a:lstStyle/>
+          <a:p>
+            <a:pPr algn="ctr"/>
+          </a:p>
+        </p:txBody>
+      </p:sp>
+      <p:sp>
+        <p:nvSpPr>
+          <p:cNvPr id="6" name="Rounded Rectangle 5"/>
+          <p:cNvSpPr/>
+          <p:nvPr/>
+        </p:nvSpPr>
+        <p:spPr>
+          <a:xfrm>
+            <a:off x="2260000" y="900000"/>
+            <a:ext cx="1500000" cy="1350000"/>
+          </a:xfrm>
+          <a:prstGeom prst="roundRect">
+            <a:avLst/>
+          </a:prstGeom>
+          <a:solidFill>
+            <a:srgbClr val="DEF3F1"/>
+          </a:solidFill>
+          <a:ln w="19050">
+            <a:solidFill>
+              <a:srgbClr val="00A693"/>
+            </a:solidFill>
+          </a:ln>
+        </p:spPr>
+        <p:style>
+          <a:lnRef idx="1">
+            <a:schemeClr val="accent1"/>
+          </a:lnRef>
+          <a:fillRef idx="3">
+            <a:schemeClr val="accent1"/>
+          </a:fillRef>
+          <a:effectRef idx="2">
+            <a:schemeClr val="accent1"/>
+          </a:effectRef>
+          <a:fontRef idx="minor">
+            <a:schemeClr val="lt1"/>
+          </a:fontRef>
+        </p:style>
+        <p:txBody>
+          <a:bodyPr rtlCol="0" anchor="ctr" wrap="square"/>
+          <a:lstStyle/>
+          <a:p>
+            <a:pPr algn="ctr"/>
+            <a:r>
+              <a:rPr sz="1100" b="1">
+                <a:solidFill>
+                  <a:srgbClr val="007A6E"/>
+                </a:solidFill>
+                <a:latin typeface="メイリオ"/>
+                <a:ea typeface="メイリオ"/>
+              </a:rPr>
+              <a:t>2</a:t>
+            </a:r>
+          </a:p>
+          <a:p>
+            <a:pPr algn="ctr"/>
+            <a:r>
+              <a:rPr sz="1100" b="1">
+                <a:solidFill>
+                  <a:srgbClr val="007A6E"/>
+                </a:solidFill>
+                <a:latin typeface="メイリオ"/>
+                <a:ea typeface="メイリオ"/>
+              </a:rPr>
+              <a:t>業務フロー</a:t>
+            </a:r>
+          </a:p>
+          <a:p/>
+          <a:p>
+            <a:pPr algn="ctr"/>
+            <a:r>
+              <a:rPr sz="900" b="0">
+                <a:solidFill>
+                  <a:srgbClr val="333333"/>
+                </a:solidFill>
+                <a:latin typeface="メイリオ"/>
+                <a:ea typeface="メイリオ"/>
+              </a:rPr>
+              <a:t>商流・在庫・</a:t>
+            </a:r>
+          </a:p>
+          <a:p>
+            <a:pPr algn="ctr"/>
+            <a:r>
+              <a:rPr sz="900" b="0">
+                <a:solidFill>
+                  <a:srgbClr val="333333"/>
+                </a:solidFill>
+                <a:latin typeface="メイリオ"/>
+                <a:ea typeface="メイリオ"/>
+              </a:rPr>
+              <a:t>注文業務の具体化</a:t>
+            </a:r>
+          </a:p>
+        </p:txBody>
+      </p:sp>
+      <p:sp>
+        <p:nvSpPr>
+          <p:cNvPr id="7" name="Right Arrow 6"/>
+          <p:cNvSpPr/>
+          <p:nvPr/>
+        </p:nvSpPr>
+        <p:spPr>
+          <a:xfrm>
+            <a:off x="3790000" y="1400000"/>
+            <a:ext cx="160000" cy="180000"/>
+          </a:xfrm>
+          <a:prstGeom prst="rightArrow">
+            <a:avLst/>
+          </a:prstGeom>
+          <a:solidFill>
+            <a:srgbClr val="00A693"/>
+          </a:solidFill>
+          <a:ln>
+            <a:noFill/>
+          </a:ln>
+        </p:spPr>
+        <p:style>
+          <a:lnRef idx="1">
+            <a:schemeClr val="accent1"/>
+          </a:lnRef>
+          <a:fillRef idx="3">
+            <a:schemeClr val="accent1"/>
+          </a:fillRef>
+          <a:effectRef idx="2">
+            <a:schemeClr val="accent1"/>
+          </a:effectRef>
+          <a:fontRef idx="minor">
+            <a:schemeClr val="lt1"/>
+          </a:fontRef>
+        </p:style>
+        <p:txBody>
+          <a:bodyPr rtlCol="0" anchor="ctr"/>
+          <a:lstStyle/>
+          <a:p>
+            <a:pPr algn="ctr"/>
+          </a:p>
+        </p:txBody>
+      </p:sp>
+      <p:sp>
+        <p:nvSpPr>
+          <p:cNvPr id="8" name="Rounded Rectangle 7"/>
+          <p:cNvSpPr/>
+          <p:nvPr/>
+        </p:nvSpPr>
+        <p:spPr>
+          <a:xfrm>
+            <a:off x="4120000" y="900000"/>
+            <a:ext cx="1500000" cy="1350000"/>
+          </a:xfrm>
+          <a:prstGeom prst="roundRect">
+            <a:avLst/>
+          </a:prstGeom>
+          <a:solidFill>
+            <a:srgbClr val="DEF3F1"/>
+          </a:solidFill>
+          <a:ln w="19050">
+            <a:solidFill>
+              <a:srgbClr val="00A693"/>
+            </a:solidFill>
+          </a:ln>
+        </p:spPr>
+        <p:style>
+          <a:lnRef idx="1">
+            <a:schemeClr val="accent1"/>
+          </a:lnRef>
+          <a:fillRef idx="3">
+            <a:schemeClr val="accent1"/>
+          </a:fillRef>
+          <a:effectRef idx="2">
+            <a:schemeClr val="accent1"/>
+          </a:effectRef>
+          <a:fontRef idx="minor">
+            <a:schemeClr val="lt1"/>
+          </a:fontRef>
+        </p:style>
+        <p:txBody>
+          <a:bodyPr rtlCol="0" anchor="ctr" wrap="square"/>
+          <a:lstStyle/>
+          <a:p>
+            <a:pPr algn="ctr"/>
+            <a:r>
+              <a:rPr sz="1100" b="1">
+                <a:solidFill>
+                  <a:srgbClr val="007A6E"/>
+                </a:solidFill>
+                <a:latin typeface="メイリオ"/>
+                <a:ea typeface="メイリオ"/>
+              </a:rPr>
+              <a:t>3</a:t>
+            </a:r>
+          </a:p>
+          <a:p>
+            <a:pPr algn="ctr"/>
+            <a:r>
+              <a:rPr sz="1100" b="1">
+                <a:solidFill>
+                  <a:srgbClr val="007A6E"/>
+                </a:solidFill>
+                <a:latin typeface="メイリオ"/>
+                <a:ea typeface="メイリオ"/>
+              </a:rPr>
+              <a:t>機能詳細</a:t>
+            </a:r>
+          </a:p>
+          <a:p/>
+          <a:p>
+            <a:pPr algn="ctr"/>
+            <a:r>
+              <a:rPr sz="900" b="0">
+                <a:solidFill>
+                  <a:srgbClr val="333333"/>
+                </a:solidFill>
+                <a:latin typeface="メイリオ"/>
+                <a:ea typeface="メイリオ"/>
+              </a:rPr>
+              <a:t>Primo Fit&amp;Gap</a:t>
+            </a:r>
+          </a:p>
+          <a:p>
+            <a:pPr algn="ctr"/>
+            <a:r>
+              <a:rPr sz="900" b="0">
+                <a:solidFill>
+                  <a:srgbClr val="333333"/>
+                </a:solidFill>
+                <a:latin typeface="メイリオ"/>
+                <a:ea typeface="メイリオ"/>
+              </a:rPr>
+              <a:t>連携・カスタマイズ</a:t>
+            </a:r>
+          </a:p>
+        </p:txBody>
+      </p:sp>
+      <p:sp>
+        <p:nvSpPr>
+          <p:cNvPr id="9" name="Right Arrow 8"/>
+          <p:cNvSpPr/>
+          <p:nvPr/>
+        </p:nvSpPr>
+        <p:spPr>
+          <a:xfrm>
+            <a:off x="5650000" y="1400000"/>
+            <a:ext cx="160000" cy="180000"/>
+          </a:xfrm>
+          <a:prstGeom prst="rightArrow">
+            <a:avLst/>
+          </a:prstGeom>
+          <a:solidFill>
+            <a:srgbClr val="00A693"/>
+          </a:solidFill>
+          <a:ln>
+            <a:noFill/>
+          </a:ln>
+        </p:spPr>
+        <p:style>
+          <a:lnRef idx="1">
+            <a:schemeClr val="accent1"/>
+          </a:lnRef>
+          <a:fillRef idx="3">
+            <a:schemeClr val="accent1"/>
+          </a:fillRef>
+          <a:effectRef idx="2">
+            <a:schemeClr val="accent1"/>
+          </a:effectRef>
+          <a:fontRef idx="minor">
+            <a:schemeClr val="lt1"/>
+          </a:fontRef>
+        </p:style>
+        <p:txBody>
+          <a:bodyPr rtlCol="0" anchor="ctr"/>
+          <a:lstStyle/>
+          <a:p>
+            <a:pPr algn="ctr"/>
+          </a:p>
+        </p:txBody>
+      </p:sp>
+      <p:sp>
+        <p:nvSpPr>
+          <p:cNvPr id="10" name="Rounded Rectangle 9"/>
+          <p:cNvSpPr/>
+          <p:nvPr/>
+        </p:nvSpPr>
+        <p:spPr>
+          <a:xfrm>
+            <a:off x="5980000" y="900000"/>
+            <a:ext cx="1500000" cy="1350000"/>
+          </a:xfrm>
+          <a:prstGeom prst="roundRect">
+            <a:avLst/>
+          </a:prstGeom>
+          <a:solidFill>
+            <a:srgbClr val="DEF3F1"/>
+          </a:solidFill>
+          <a:ln w="19050">
+            <a:solidFill>
+              <a:srgbClr val="00A693"/>
+            </a:solidFill>
+          </a:ln>
+        </p:spPr>
+        <p:style>
+          <a:lnRef idx="1">
+            <a:schemeClr val="accent1"/>
+          </a:lnRef>
+          <a:fillRef idx="3">
+            <a:schemeClr val="accent1"/>
+          </a:fillRef>
+          <a:effectRef idx="2">
+            <a:schemeClr val="accent1"/>
+          </a:effectRef>
+          <a:fontRef idx="minor">
+            <a:schemeClr val="lt1"/>
+          </a:fontRef>
+        </p:style>
+        <p:txBody>
+          <a:bodyPr rtlCol="0" anchor="ctr" wrap="square"/>
+          <a:lstStyle/>
+          <a:p>
+            <a:pPr algn="ctr"/>
+            <a:r>
+              <a:rPr sz="1100" b="1">
+                <a:solidFill>
+                  <a:srgbClr val="007A6E"/>
+                </a:solidFill>
+                <a:latin typeface="メイリオ"/>
+                <a:ea typeface="メイリオ"/>
+              </a:rPr>
+              <a:t>4</a:t>
+            </a:r>
+          </a:p>
+          <a:p>
+            <a:pPr algn="ctr"/>
+            <a:r>
+              <a:rPr sz="1100" b="1">
+                <a:solidFill>
+                  <a:srgbClr val="007A6E"/>
+                </a:solidFill>
+                <a:latin typeface="メイリオ"/>
+                <a:ea typeface="メイリオ"/>
+              </a:rPr>
+              <a:t>非機能</a:t>
+            </a:r>
+          </a:p>
+          <a:p/>
+          <a:p>
+            <a:pPr algn="ctr"/>
+            <a:r>
+              <a:rPr sz="900" b="0">
+                <a:solidFill>
+                  <a:srgbClr val="333333"/>
+                </a:solidFill>
+                <a:latin typeface="メイリオ"/>
+                <a:ea typeface="メイリオ"/>
+              </a:rPr>
+              <a:t>性能・運用</a:t>
+            </a:r>
+          </a:p>
+          <a:p>
+            <a:pPr algn="ctr"/>
+            <a:r>
+              <a:rPr sz="900" b="0">
+                <a:solidFill>
+                  <a:srgbClr val="333333"/>
+                </a:solidFill>
+                <a:latin typeface="メイリオ"/>
+                <a:ea typeface="メイリオ"/>
+              </a:rPr>
+              <a:t>セキュリティ等</a:t>
+            </a:r>
+          </a:p>
+        </p:txBody>
+      </p:sp>
+      <p:sp>
+        <p:nvSpPr>
+          <p:cNvPr id="11" name="Right Arrow 10"/>
+          <p:cNvSpPr/>
+          <p:nvPr/>
+        </p:nvSpPr>
+        <p:spPr>
+          <a:xfrm>
+            <a:off x="7510000" y="1400000"/>
+            <a:ext cx="160000" cy="180000"/>
+          </a:xfrm>
+          <a:prstGeom prst="rightArrow">
+            <a:avLst/>
+          </a:prstGeom>
+          <a:solidFill>
+            <a:srgbClr val="00A693"/>
+          </a:solidFill>
+          <a:ln>
+            <a:noFill/>
+          </a:ln>
+        </p:spPr>
+        <p:style>
+          <a:lnRef idx="1">
+            <a:schemeClr val="accent1"/>
+          </a:lnRef>
+          <a:fillRef idx="3">
+            <a:schemeClr val="accent1"/>
+          </a:fillRef>
+          <a:effectRef idx="2">
+            <a:schemeClr val="accent1"/>
+          </a:effectRef>
+          <a:fontRef idx="minor">
+            <a:schemeClr val="lt1"/>
+          </a:fontRef>
+        </p:style>
+        <p:txBody>
+          <a:bodyPr rtlCol="0" anchor="ctr"/>
+          <a:lstStyle/>
+          <a:p>
+            <a:pPr algn="ctr"/>
+          </a:p>
+        </p:txBody>
+      </p:sp>
+      <p:sp>
+        <p:nvSpPr>
+          <p:cNvPr id="12" name="Rounded Rectangle 11"/>
+          <p:cNvSpPr/>
+          <p:nvPr/>
+        </p:nvSpPr>
+        <p:spPr>
+          <a:xfrm>
+            <a:off x="7840000" y="900000"/>
+            <a:ext cx="1500000" cy="1350000"/>
+          </a:xfrm>
+          <a:prstGeom prst="roundRect">
+            <a:avLst/>
+          </a:prstGeom>
+          <a:solidFill>
+            <a:srgbClr val="DEF3F1"/>
+          </a:solidFill>
+          <a:ln w="19050">
+            <a:solidFill>
+              <a:srgbClr val="00A693"/>
+            </a:solidFill>
+          </a:ln>
+        </p:spPr>
+        <p:style>
+          <a:lnRef idx="1">
+            <a:schemeClr val="accent1"/>
+          </a:lnRef>
+          <a:fillRef idx="3">
+            <a:schemeClr val="accent1"/>
+          </a:fillRef>
+          <a:effectRef idx="2">
+            <a:schemeClr val="accent1"/>
+          </a:effectRef>
+          <a:fontRef idx="minor">
+            <a:schemeClr val="lt1"/>
+          </a:fontRef>
+        </p:style>
+        <p:txBody>
+          <a:bodyPr rtlCol="0" anchor="ctr" wrap="square"/>
+          <a:lstStyle/>
+          <a:p>
+            <a:pPr algn="ctr"/>
+            <a:r>
+              <a:rPr sz="1100" b="1">
+                <a:solidFill>
+                  <a:srgbClr val="007A6E"/>
+                </a:solidFill>
+                <a:latin typeface="メイリオ"/>
+                <a:ea typeface="メイリオ"/>
+              </a:rPr>
+              <a:t>5〜6</a:t>
+            </a:r>
+          </a:p>
+          <a:p>
+            <a:pPr algn="ctr"/>
+            <a:r>
+              <a:rPr sz="1100" b="1">
+                <a:solidFill>
+                  <a:srgbClr val="007A6E"/>
+                </a:solidFill>
+                <a:latin typeface="メイリオ"/>
+                <a:ea typeface="メイリオ"/>
+              </a:rPr>
+              <a:t>まとめ・納品</a:t>
+            </a:r>
+          </a:p>
+          <a:p/>
+          <a:p>
+            <a:pPr algn="ctr"/>
+            <a:r>
+              <a:rPr sz="900" b="0">
+                <a:solidFill>
+                  <a:srgbClr val="333333"/>
+                </a:solidFill>
+                <a:latin typeface="メイリオ"/>
+                <a:ea typeface="メイリオ"/>
+              </a:rPr>
+              <a:t>要件定義書</a:t>
+            </a:r>
+          </a:p>
+          <a:p>
+            <a:pPr algn="ctr"/>
+            <a:r>
+              <a:rPr sz="900" b="0">
+                <a:solidFill>
+                  <a:srgbClr val="333333"/>
+                </a:solidFill>
+                <a:latin typeface="メイリオ"/>
+                <a:ea typeface="メイリオ"/>
+              </a:rPr>
+              <a:t>見積り／ご検収</a:t>
+            </a:r>
+          </a:p>
+        </p:txBody>
+      </p:sp>
+      <p:sp>
+        <p:nvSpPr>
+          <p:cNvPr id="13" name="TextBox 12"/>
+          <p:cNvSpPr txBox="1"/>
+          <p:nvPr/>
+        </p:nvSpPr>
+        <p:spPr>
+          <a:xfrm>
+            <a:off x="450000" y="2450000"/>
+            <a:ext cx="9000000" cy="300000"/>
+          </a:xfrm>
+          <a:prstGeom prst="rect">
+            <a:avLst/>
+          </a:prstGeom>
+          <a:noFill/>
+        </p:spPr>
+        <p:txBody>
+          <a:bodyPr wrap="square">
+            <a:spAutoFit/>
+          </a:bodyPr>
+          <a:lstStyle/>
+          <a:p>
+            <a:pPr algn="l"/>
+            <a:r>
+              <a:rPr sz="1400" b="1">
+                <a:solidFill>
+                  <a:srgbClr val="333333"/>
+                </a:solidFill>
+                <a:latin typeface="メイリオ"/>
+                <a:ea typeface="メイリオ"/>
+              </a:rPr>
+              <a:t>主な成果物・作業項目</a:t>
+            </a:r>
+          </a:p>
+        </p:txBody>
+      </p:sp>
+      <p:graphicFrame>
+        <p:nvGraphicFramePr>
+          <p:cNvPr id="14" name="Table 13"/>
+          <p:cNvGraphicFramePr>
+            <a:graphicFrameLocks noGrp="1"/>
+          </p:cNvGraphicFramePr>
+          <p:nvPr/>
+        </p:nvGraphicFramePr>
+        <p:xfrm>
+          <a:off x="450000" y="2850000"/>
+          <a:ext cx="9000000" cy="3400000"/>
+        </p:xfrm>
+        <a:graphic>
+          <a:graphicData uri="http://schemas.openxmlformats.org/drawingml/2006/table">
+            <a:tbl>
+              <a:tblPr firstRow="1" bandRow="1">
+                <a:tableStyleId>{5C22544A-7EE6-4342-B048-85BDC9FD1C3A}</a:tableStyleId>
+              </a:tblPr>
+              <a:tblGrid>
+                <a:gridCol w="700000"/>
+                <a:gridCol w="2600000"/>
+                <a:gridCol w="4000000"/>
+                <a:gridCol w="1700000"/>
+              </a:tblGrid>
+              <a:tr h="485714">
+                <a:tc>
+                  <a:txBody>
+                    <a:bodyPr wrap="square"/>
+                    <a:lstStyle/>
+                    <a:p>
+                      <a:pPr algn="ctr"/>
+                      <a:r>
+                        <a:rPr sz="1000" b="1">
+                          <a:solidFill>
+                            <a:srgbClr val="FFFFFF"/>
+                          </a:solidFill>
+                          <a:latin typeface="メイリオ"/>
+                          <a:ea typeface="メイリオ"/>
+                        </a:rPr>
+                        <a:t>No</a:t>
+                      </a:r>
+                    </a:p>
+                  </a:txBody>
+                  <a:tcPr anchor="ctr">
+                    <a:solidFill>
+                      <a:srgbClr val="00A693"/>
+                    </a:solidFill>
+                    <a:lnL w="9525" cap="flat" cmpd="sng" algn="ctr">
+                      <a:solidFill>
+                        <a:srgbClr val="007A6E"/>
+                      </a:solidFill>
+                      <a:prstDash val="solid"/>
+                    </a:lnL>
+                    <a:lnR w="9525" cap="flat" cmpd="sng" algn="ctr">
+                      <a:solidFill>
+                        <a:srgbClr val="007A6E"/>
+                      </a:solidFill>
+                      <a:prstDash val="solid"/>
+                    </a:lnR>
+                    <a:lnT w="9525" cap="flat" cmpd="sng" algn="ctr">
+                      <a:solidFill>
+                        <a:srgbClr val="007A6E"/>
+                      </a:solidFill>
+                      <a:prstDash val="solid"/>
+                    </a:lnT>
+                    <a:lnB w="9525" cap="flat" cmpd="sng" algn="ctr">
+                      <a:solidFill>
+                        <a:srgbClr val="007A6E"/>
+                      </a:solidFill>
+                      <a:prstDash val="solid"/>
+                    </a:lnB>
+                  </a:tcPr>
+                </a:tc>
+                <a:tc>
+                  <a:txBody>
+                    <a:bodyPr wrap="square"/>
+                    <a:lstStyle/>
+                    <a:p>
+                      <a:pPr algn="ctr"/>
+                      <a:r>
+                        <a:rPr sz="1000" b="1">
+                          <a:solidFill>
+                            <a:srgbClr val="FFFFFF"/>
+                          </a:solidFill>
+                          <a:latin typeface="メイリオ"/>
+                          <a:ea typeface="メイリオ"/>
+                        </a:rPr>
+                        <a:t>作業／成果物</a:t>
+                      </a:r>
+                    </a:p>
+                  </a:txBody>
+                  <a:tcPr anchor="ctr">
+                    <a:solidFill>
+                      <a:srgbClr val="00A693"/>
+                    </a:solidFill>
+                    <a:lnL w="9525" cap="flat" cmpd="sng" algn="ctr">
+                      <a:solidFill>
+                        <a:srgbClr val="007A6E"/>
+                      </a:solidFill>
+                      <a:prstDash val="solid"/>
+                    </a:lnL>
+                    <a:lnR w="9525" cap="flat" cmpd="sng" algn="ctr">
+                      <a:solidFill>
+                        <a:srgbClr val="007A6E"/>
+                      </a:solidFill>
+                      <a:prstDash val="solid"/>
+                    </a:lnR>
+                    <a:lnT w="9525" cap="flat" cmpd="sng" algn="ctr">
+                      <a:solidFill>
+                        <a:srgbClr val="007A6E"/>
+                      </a:solidFill>
+                      <a:prstDash val="solid"/>
+                    </a:lnT>
+                    <a:lnB w="9525" cap="flat" cmpd="sng" algn="ctr">
+                      <a:solidFill>
+                        <a:srgbClr val="007A6E"/>
+                      </a:solidFill>
+                      <a:prstDash val="solid"/>
+                    </a:lnB>
+                  </a:tcPr>
+                </a:tc>
+                <a:tc>
+                  <a:txBody>
+                    <a:bodyPr wrap="square"/>
+                    <a:lstStyle/>
+                    <a:p>
+                      <a:pPr algn="ctr"/>
+                      <a:r>
+                        <a:rPr sz="1000" b="1">
+                          <a:solidFill>
+                            <a:srgbClr val="FFFFFF"/>
+                          </a:solidFill>
+                          <a:latin typeface="メイリオ"/>
+                          <a:ea typeface="メイリオ"/>
+                        </a:rPr>
+                        <a:t>内容</a:t>
+                      </a:r>
+                    </a:p>
+                  </a:txBody>
+                  <a:tcPr anchor="ctr">
+                    <a:solidFill>
+                      <a:srgbClr val="00A693"/>
+                    </a:solidFill>
+                    <a:lnL w="9525" cap="flat" cmpd="sng" algn="ctr">
+                      <a:solidFill>
+                        <a:srgbClr val="007A6E"/>
+                      </a:solidFill>
+                      <a:prstDash val="solid"/>
+                    </a:lnL>
+                    <a:lnR w="9525" cap="flat" cmpd="sng" algn="ctr">
+                      <a:solidFill>
+                        <a:srgbClr val="007A6E"/>
+                      </a:solidFill>
+                      <a:prstDash val="solid"/>
+                    </a:lnR>
+                    <a:lnT w="9525" cap="flat" cmpd="sng" algn="ctr">
+                      <a:solidFill>
+                        <a:srgbClr val="007A6E"/>
+                      </a:solidFill>
+                      <a:prstDash val="solid"/>
+                    </a:lnT>
+                    <a:lnB w="9525" cap="flat" cmpd="sng" algn="ctr">
+                      <a:solidFill>
+                        <a:srgbClr val="007A6E"/>
+                      </a:solidFill>
+                      <a:prstDash val="solid"/>
+                    </a:lnB>
+                  </a:tcPr>
+                </a:tc>
+                <a:tc>
+                  <a:txBody>
+                    <a:bodyPr wrap="square"/>
+                    <a:lstStyle/>
+                    <a:p>
+                      <a:pPr algn="ctr"/>
+                      <a:r>
+                        <a:rPr sz="1000" b="1">
+                          <a:solidFill>
+                            <a:srgbClr val="FFFFFF"/>
+                          </a:solidFill>
+                          <a:latin typeface="メイリオ"/>
+                          <a:ea typeface="メイリオ"/>
+                        </a:rPr>
+                        <a:t>目安時期</a:t>
+                      </a:r>
+                    </a:p>
+                  </a:txBody>
+                  <a:tcPr anchor="ctr">
+                    <a:solidFill>
+                      <a:srgbClr val="00A693"/>
+                    </a:solidFill>
+                    <a:lnL w="9525" cap="flat" cmpd="sng" algn="ctr">
+                      <a:solidFill>
+                        <a:srgbClr val="007A6E"/>
+                      </a:solidFill>
+                      <a:prstDash val="solid"/>
+                    </a:lnL>
+                    <a:lnR w="9525" cap="flat" cmpd="sng" algn="ctr">
+                      <a:solidFill>
+                        <a:srgbClr val="007A6E"/>
+                      </a:solidFill>
+                      <a:prstDash val="solid"/>
+                    </a:lnR>
+                    <a:lnT w="9525" cap="flat" cmpd="sng" algn="ctr">
+                      <a:solidFill>
+                        <a:srgbClr val="007A6E"/>
+                      </a:solidFill>
+                      <a:prstDash val="solid"/>
+                    </a:lnT>
+                    <a:lnB w="9525" cap="flat" cmpd="sng" algn="ctr">
+                      <a:solidFill>
+                        <a:srgbClr val="007A6E"/>
+                      </a:solidFill>
+                      <a:prstDash val="solid"/>
+                    </a:lnB>
+                  </a:tcPr>
+                </a:tc>
+              </a:tr>
+              <a:tr h="485714">
+                <a:tc>
+                  <a:txBody>
+                    <a:bodyPr wrap="square"/>
+                    <a:lstStyle/>
+                    <a:p>
+                      <a:pPr algn="ctr"/>
+                      <a:r>
+                        <a:rPr sz="900" b="1">
+                          <a:solidFill>
+                            <a:srgbClr val="333333"/>
+                          </a:solidFill>
+                          <a:latin typeface="メイリオ"/>
+                          <a:ea typeface="メイリオ"/>
+                        </a:rPr>
+                        <a:t>1</a:t>
+                      </a:r>
+                    </a:p>
+                  </a:txBody>
+                  <a:tcPr anchor="ctr">
+                    <a:solidFill>
+                      <a:srgbClr val="F0FAF8"/>
+                    </a:solidFill>
+                    <a:lnL w="6350" cap="flat" cmpd="sng" algn="ctr">
+                      <a:solidFill>
+                        <a:srgbClr val="CCCCCC"/>
+                      </a:solidFill>
+                      <a:prstDash val="solid"/>
+                    </a:lnL>
+                    <a:lnR w="6350" cap="flat" cmpd="sng" algn="ctr">
+                      <a:solidFill>
+                        <a:srgbClr val="CCCCCC"/>
+                      </a:solidFill>
+                      <a:prstDash val="solid"/>
+                    </a:lnR>
+                    <a:lnT w="6350" cap="flat" cmpd="sng" algn="ctr">
+                      <a:solidFill>
+                        <a:srgbClr val="CCCCCC"/>
+                      </a:solidFill>
+                      <a:prstDash val="solid"/>
+                    </a:lnT>
+                    <a:lnB w="6350" cap="flat" cmpd="sng" algn="ctr">
+                      <a:solidFill>
+                        <a:srgbClr val="CCCCCC"/>
+                      </a:solidFill>
+                      <a:prstDash val="solid"/>
+                    </a:lnB>
+                  </a:tcPr>
+                </a:tc>
+                <a:tc>
+                  <a:txBody>
+                    <a:bodyPr wrap="square"/>
+                    <a:lstStyle/>
+                    <a:p>
+                      <a:pPr algn="l"/>
+                      <a:r>
+                        <a:rPr sz="900" b="0">
+                          <a:solidFill>
+                            <a:srgbClr val="333333"/>
+                          </a:solidFill>
+                          <a:latin typeface="メイリオ"/>
+                          <a:ea typeface="メイリオ"/>
+                        </a:rPr>
+                        <a:t>キックオフ／ご要件すり合わせ</a:t>
+                      </a:r>
+                    </a:p>
+                  </a:txBody>
+                  <a:tcPr anchor="ctr">
+                    <a:solidFill>
+                      <a:srgbClr val="F0FAF8"/>
+                    </a:solidFill>
+                    <a:lnL w="6350" cap="flat" cmpd="sng" algn="ctr">
+                      <a:solidFill>
+                        <a:srgbClr val="CCCCCC"/>
+                      </a:solidFill>
+                      <a:prstDash val="solid"/>
+                    </a:lnL>
+                    <a:lnR w="6350" cap="flat" cmpd="sng" algn="ctr">
+                      <a:solidFill>
+                        <a:srgbClr val="CCCCCC"/>
+                      </a:solidFill>
+                      <a:prstDash val="solid"/>
+                    </a:lnR>
+                    <a:lnT w="6350" cap="flat" cmpd="sng" algn="ctr">
+                      <a:solidFill>
+                        <a:srgbClr val="CCCCCC"/>
+                      </a:solidFill>
+                      <a:prstDash val="solid"/>
+                    </a:lnT>
+                    <a:lnB w="6350" cap="flat" cmpd="sng" algn="ctr">
+                      <a:solidFill>
+                        <a:srgbClr val="CCCCCC"/>
+                      </a:solidFill>
+                      <a:prstDash val="solid"/>
+                    </a:lnB>
+                  </a:tcPr>
+                </a:tc>
+                <a:tc>
+                  <a:txBody>
+                    <a:bodyPr wrap="square"/>
+                    <a:lstStyle/>
+                    <a:p>
+                      <a:pPr algn="l"/>
+                      <a:r>
+                        <a:rPr sz="900" b="0">
+                          <a:solidFill>
+                            <a:srgbClr val="333333"/>
+                          </a:solidFill>
+                          <a:latin typeface="メイリオ"/>
+                          <a:ea typeface="メイリオ"/>
+                        </a:rPr>
+                        <a:t>進め方・体制合意、既出要件の論点整理</a:t>
+                      </a:r>
+                    </a:p>
+                  </a:txBody>
+                  <a:tcPr anchor="ctr">
+                    <a:solidFill>
+                      <a:srgbClr val="F0FAF8"/>
+                    </a:solidFill>
+                    <a:lnL w="6350" cap="flat" cmpd="sng" algn="ctr">
+                      <a:solidFill>
+                        <a:srgbClr val="CCCCCC"/>
+                      </a:solidFill>
+                      <a:prstDash val="solid"/>
+                    </a:lnL>
+                    <a:lnR w="6350" cap="flat" cmpd="sng" algn="ctr">
+                      <a:solidFill>
+                        <a:srgbClr val="CCCCCC"/>
+                      </a:solidFill>
+                      <a:prstDash val="solid"/>
+                    </a:lnR>
+                    <a:lnT w="6350" cap="flat" cmpd="sng" algn="ctr">
+                      <a:solidFill>
+                        <a:srgbClr val="CCCCCC"/>
+                      </a:solidFill>
+                      <a:prstDash val="solid"/>
+                    </a:lnT>
+                    <a:lnB w="6350" cap="flat" cmpd="sng" algn="ctr">
+                      <a:solidFill>
+                        <a:srgbClr val="CCCCCC"/>
+                      </a:solidFill>
+                      <a:prstDash val="solid"/>
+                    </a:lnB>
+                  </a:tcPr>
+                </a:tc>
+                <a:tc>
+                  <a:txBody>
+                    <a:bodyPr wrap="square"/>
+                    <a:lstStyle/>
+                    <a:p>
+                      <a:pPr algn="ctr"/>
+                      <a:r>
+                        <a:rPr sz="900" b="0">
+                          <a:solidFill>
+                            <a:srgbClr val="333333"/>
+                          </a:solidFill>
+                          <a:latin typeface="メイリオ"/>
+                          <a:ea typeface="メイリオ"/>
+                        </a:rPr>
+                        <a:t>8/19</a:t>
+                      </a:r>
+                    </a:p>
+                  </a:txBody>
+                  <a:tcPr anchor="ctr">
+                    <a:solidFill>
+                      <a:srgbClr val="F0FAF8"/>
+                    </a:solidFill>
+                    <a:lnL w="6350" cap="flat" cmpd="sng" algn="ctr">
+                      <a:solidFill>
+                        <a:srgbClr val="CCCCCC"/>
+                      </a:solidFill>
+                      <a:prstDash val="solid"/>
+                    </a:lnL>
+                    <a:lnR w="6350" cap="flat" cmpd="sng" algn="ctr">
+                      <a:solidFill>
+                        <a:srgbClr val="CCCCCC"/>
+                      </a:solidFill>
+                      <a:prstDash val="solid"/>
+                    </a:lnR>
+                    <a:lnT w="6350" cap="flat" cmpd="sng" algn="ctr">
+                      <a:solidFill>
+                        <a:srgbClr val="CCCCCC"/>
+                      </a:solidFill>
+                      <a:prstDash val="solid"/>
+                    </a:lnT>
+                    <a:lnB w="6350" cap="flat" cmpd="sng" algn="ctr">
+                      <a:solidFill>
+                        <a:srgbClr val="CCCCCC"/>
+                      </a:solidFill>
+                      <a:prstDash val="solid"/>
+                    </a:lnB>
+                  </a:tcPr>
+                </a:tc>
+              </a:tr>
+              <a:tr h="485714">
+                <a:tc>
+                  <a:txBody>
+                    <a:bodyPr wrap="square"/>
+                    <a:lstStyle/>
+                    <a:p>
+                      <a:pPr algn="ctr"/>
+                      <a:r>
+                        <a:rPr sz="900" b="1">
+                          <a:solidFill>
+                            <a:srgbClr val="333333"/>
+                          </a:solidFill>
+                          <a:latin typeface="メイリオ"/>
+                          <a:ea typeface="メイリオ"/>
+                        </a:rPr>
+                        <a:t>2</a:t>
+                      </a:r>
+                    </a:p>
+                  </a:txBody>
+                  <a:tcPr anchor="ctr">
+                    <a:solidFill>
+                      <a:srgbClr val="FFFFFF"/>
+                    </a:solidFill>
+                    <a:lnL w="6350" cap="flat" cmpd="sng" algn="ctr">
+                      <a:solidFill>
+                        <a:srgbClr val="CCCCCC"/>
+                      </a:solidFill>
+                      <a:prstDash val="solid"/>
+                    </a:lnL>
+                    <a:lnR w="6350" cap="flat" cmpd="sng" algn="ctr">
+                      <a:solidFill>
+                        <a:srgbClr val="CCCCCC"/>
+                      </a:solidFill>
+                      <a:prstDash val="solid"/>
+                    </a:lnR>
+                    <a:lnT w="6350" cap="flat" cmpd="sng" algn="ctr">
+                      <a:solidFill>
+                        <a:srgbClr val="CCCCCC"/>
+                      </a:solidFill>
+                      <a:prstDash val="solid"/>
+                    </a:lnT>
+                    <a:lnB w="6350" cap="flat" cmpd="sng" algn="ctr">
+                      <a:solidFill>
+                        <a:srgbClr val="CCCCCC"/>
+                      </a:solidFill>
+                      <a:prstDash val="solid"/>
+                    </a:lnB>
+                  </a:tcPr>
+                </a:tc>
+                <a:tc>
+                  <a:txBody>
+                    <a:bodyPr wrap="square"/>
+                    <a:lstStyle/>
+                    <a:p>
+                      <a:pPr algn="l"/>
+                      <a:r>
+                        <a:rPr sz="900" b="0">
+                          <a:solidFill>
+                            <a:srgbClr val="333333"/>
+                          </a:solidFill>
+                          <a:latin typeface="メイリオ"/>
+                          <a:ea typeface="メイリオ"/>
+                        </a:rPr>
+                        <a:t>業務フロー整理</a:t>
+                      </a:r>
+                    </a:p>
+                  </a:txBody>
+                  <a:tcPr anchor="ctr">
+                    <a:solidFill>
+                      <a:srgbClr val="FFFFFF"/>
+                    </a:solidFill>
+                    <a:lnL w="6350" cap="flat" cmpd="sng" algn="ctr">
+                      <a:solidFill>
+                        <a:srgbClr val="CCCCCC"/>
+                      </a:solidFill>
+                      <a:prstDash val="solid"/>
+                    </a:lnL>
+                    <a:lnR w="6350" cap="flat" cmpd="sng" algn="ctr">
+                      <a:solidFill>
+                        <a:srgbClr val="CCCCCC"/>
+                      </a:solidFill>
+                      <a:prstDash val="solid"/>
+                    </a:lnR>
+                    <a:lnT w="6350" cap="flat" cmpd="sng" algn="ctr">
+                      <a:solidFill>
+                        <a:srgbClr val="CCCCCC"/>
+                      </a:solidFill>
+                      <a:prstDash val="solid"/>
+                    </a:lnT>
+                    <a:lnB w="6350" cap="flat" cmpd="sng" algn="ctr">
+                      <a:solidFill>
+                        <a:srgbClr val="CCCCCC"/>
+                      </a:solidFill>
+                      <a:prstDash val="solid"/>
+                    </a:lnB>
+                  </a:tcPr>
+                </a:tc>
+                <a:tc>
+                  <a:txBody>
+                    <a:bodyPr wrap="square"/>
+                    <a:lstStyle/>
+                    <a:p>
+                      <a:pPr algn="l"/>
+                      <a:r>
+                        <a:rPr sz="900" b="0">
+                          <a:solidFill>
+                            <a:srgbClr val="333333"/>
+                          </a:solidFill>
+                          <a:latin typeface="メイリオ"/>
+                          <a:ea typeface="メイリオ"/>
+                        </a:rPr>
+                        <a:t>サプライヤー／販売組織／在庫・引当／注文〜出荷</a:t>
+                      </a:r>
+                    </a:p>
+                  </a:txBody>
+                  <a:tcPr anchor="ctr">
+                    <a:solidFill>
+                      <a:srgbClr val="FFFFFF"/>
+                    </a:solidFill>
+                    <a:lnL w="6350" cap="flat" cmpd="sng" algn="ctr">
+                      <a:solidFill>
+                        <a:srgbClr val="CCCCCC"/>
+                      </a:solidFill>
+                      <a:prstDash val="solid"/>
+                    </a:lnL>
+                    <a:lnR w="6350" cap="flat" cmpd="sng" algn="ctr">
+                      <a:solidFill>
+                        <a:srgbClr val="CCCCCC"/>
+                      </a:solidFill>
+                      <a:prstDash val="solid"/>
+                    </a:lnR>
+                    <a:lnT w="6350" cap="flat" cmpd="sng" algn="ctr">
+                      <a:solidFill>
+                        <a:srgbClr val="CCCCCC"/>
+                      </a:solidFill>
+                      <a:prstDash val="solid"/>
+                    </a:lnT>
+                    <a:lnB w="6350" cap="flat" cmpd="sng" algn="ctr">
+                      <a:solidFill>
+                        <a:srgbClr val="CCCCCC"/>
+                      </a:solidFill>
+                      <a:prstDash val="solid"/>
+                    </a:lnB>
+                  </a:tcPr>
+                </a:tc>
+                <a:tc>
+                  <a:txBody>
+                    <a:bodyPr wrap="square"/>
+                    <a:lstStyle/>
+                    <a:p>
+                      <a:pPr algn="ctr"/>
+                      <a:r>
+                        <a:rPr sz="900" b="0">
+                          <a:solidFill>
+                            <a:srgbClr val="333333"/>
+                          </a:solidFill>
+                          <a:latin typeface="メイリオ"/>
+                          <a:ea typeface="メイリオ"/>
+                        </a:rPr>
+                        <a:t>8/26</a:t>
+                      </a:r>
+                    </a:p>
+                  </a:txBody>
+                  <a:tcPr anchor="ctr">
+                    <a:solidFill>
+                      <a:srgbClr val="FFFFFF"/>
+                    </a:solidFill>
+                    <a:lnL w="6350" cap="flat" cmpd="sng" algn="ctr">
+                      <a:solidFill>
+                        <a:srgbClr val="CCCCCC"/>
+                      </a:solidFill>
+                      <a:prstDash val="solid"/>
+                    </a:lnL>
+                    <a:lnR w="6350" cap="flat" cmpd="sng" algn="ctr">
+                      <a:solidFill>
+                        <a:srgbClr val="CCCCCC"/>
+                      </a:solidFill>
+                      <a:prstDash val="solid"/>
+                    </a:lnR>
+                    <a:lnT w="6350" cap="flat" cmpd="sng" algn="ctr">
+                      <a:solidFill>
+                        <a:srgbClr val="CCCCCC"/>
+                      </a:solidFill>
+                      <a:prstDash val="solid"/>
+                    </a:lnT>
+                    <a:lnB w="6350" cap="flat" cmpd="sng" algn="ctr">
+                      <a:solidFill>
+                        <a:srgbClr val="CCCCCC"/>
+                      </a:solidFill>
+                      <a:prstDash val="solid"/>
+                    </a:lnB>
+                  </a:tcPr>
+                </a:tc>
+              </a:tr>
+              <a:tr h="485714">
+                <a:tc>
+                  <a:txBody>
+                    <a:bodyPr wrap="square"/>
+                    <a:lstStyle/>
+                    <a:p>
+                      <a:pPr algn="ctr"/>
+                      <a:r>
+                        <a:rPr sz="900" b="1">
+                          <a:solidFill>
+                            <a:srgbClr val="333333"/>
+                          </a:solidFill>
+                          <a:latin typeface="メイリオ"/>
+                          <a:ea typeface="メイリオ"/>
+                        </a:rPr>
+                        <a:t>3</a:t>
+                      </a:r>
+                    </a:p>
+                  </a:txBody>
+                  <a:tcPr anchor="ctr">
+                    <a:solidFill>
+                      <a:srgbClr val="F0FAF8"/>
+                    </a:solidFill>
+                    <a:lnL w="6350" cap="flat" cmpd="sng" algn="ctr">
+                      <a:solidFill>
+                        <a:srgbClr val="CCCCCC"/>
+                      </a:solidFill>
+                      <a:prstDash val="solid"/>
+                    </a:lnL>
+                    <a:lnR w="6350" cap="flat" cmpd="sng" algn="ctr">
+                      <a:solidFill>
+                        <a:srgbClr val="CCCCCC"/>
+                      </a:solidFill>
+                      <a:prstDash val="solid"/>
+                    </a:lnR>
+                    <a:lnT w="6350" cap="flat" cmpd="sng" algn="ctr">
+                      <a:solidFill>
+                        <a:srgbClr val="CCCCCC"/>
+                      </a:solidFill>
+                      <a:prstDash val="solid"/>
+                    </a:lnT>
+                    <a:lnB w="6350" cap="flat" cmpd="sng" algn="ctr">
+                      <a:solidFill>
+                        <a:srgbClr val="CCCCCC"/>
+                      </a:solidFill>
+                      <a:prstDash val="solid"/>
+                    </a:lnB>
+                  </a:tcPr>
+                </a:tc>
+                <a:tc>
+                  <a:txBody>
+                    <a:bodyPr wrap="square"/>
+                    <a:lstStyle/>
+                    <a:p>
+                      <a:pPr algn="l"/>
+                      <a:r>
+                        <a:rPr sz="900" b="0">
+                          <a:solidFill>
+                            <a:srgbClr val="333333"/>
+                          </a:solidFill>
+                          <a:latin typeface="メイリオ"/>
+                          <a:ea typeface="メイリオ"/>
+                        </a:rPr>
+                        <a:t>機能詳細 Fit&amp;Gap</a:t>
+                      </a:r>
+                    </a:p>
+                  </a:txBody>
+                  <a:tcPr anchor="ctr">
+                    <a:solidFill>
+                      <a:srgbClr val="F0FAF8"/>
+                    </a:solidFill>
+                    <a:lnL w="6350" cap="flat" cmpd="sng" algn="ctr">
+                      <a:solidFill>
+                        <a:srgbClr val="CCCCCC"/>
+                      </a:solidFill>
+                      <a:prstDash val="solid"/>
+                    </a:lnL>
+                    <a:lnR w="6350" cap="flat" cmpd="sng" algn="ctr">
+                      <a:solidFill>
+                        <a:srgbClr val="CCCCCC"/>
+                      </a:solidFill>
+                      <a:prstDash val="solid"/>
+                    </a:lnR>
+                    <a:lnT w="6350" cap="flat" cmpd="sng" algn="ctr">
+                      <a:solidFill>
+                        <a:srgbClr val="CCCCCC"/>
+                      </a:solidFill>
+                      <a:prstDash val="solid"/>
+                    </a:lnT>
+                    <a:lnB w="6350" cap="flat" cmpd="sng" algn="ctr">
+                      <a:solidFill>
+                        <a:srgbClr val="CCCCCC"/>
+                      </a:solidFill>
+                      <a:prstDash val="solid"/>
+                    </a:lnB>
+                  </a:tcPr>
+                </a:tc>
+                <a:tc>
+                  <a:txBody>
+                    <a:bodyPr wrap="square"/>
+                    <a:lstStyle/>
+                    <a:p>
+                      <a:pPr algn="l"/>
+                      <a:r>
+                        <a:rPr sz="900" b="0">
+                          <a:solidFill>
+                            <a:srgbClr val="333333"/>
+                          </a:solidFill>
+                          <a:latin typeface="メイリオ"/>
+                          <a:ea typeface="メイリオ"/>
+                        </a:rPr>
+                        <a:t>Primo標準との差分・基幹連携・カスタマイズ論点</a:t>
+                      </a:r>
+                    </a:p>
+                  </a:txBody>
+                  <a:tcPr anchor="ctr">
+                    <a:solidFill>
+                      <a:srgbClr val="F0FAF8"/>
+                    </a:solidFill>
+                    <a:lnL w="6350" cap="flat" cmpd="sng" algn="ctr">
+                      <a:solidFill>
+                        <a:srgbClr val="CCCCCC"/>
+                      </a:solidFill>
+                      <a:prstDash val="solid"/>
+                    </a:lnL>
+                    <a:lnR w="6350" cap="flat" cmpd="sng" algn="ctr">
+                      <a:solidFill>
+                        <a:srgbClr val="CCCCCC"/>
+                      </a:solidFill>
+                      <a:prstDash val="solid"/>
+                    </a:lnR>
+                    <a:lnT w="6350" cap="flat" cmpd="sng" algn="ctr">
+                      <a:solidFill>
+                        <a:srgbClr val="CCCCCC"/>
+                      </a:solidFill>
+                      <a:prstDash val="solid"/>
+                    </a:lnT>
+                    <a:lnB w="6350" cap="flat" cmpd="sng" algn="ctr">
+                      <a:solidFill>
+                        <a:srgbClr val="CCCCCC"/>
+                      </a:solidFill>
+                      <a:prstDash val="solid"/>
+                    </a:lnB>
+                  </a:tcPr>
+                </a:tc>
+                <a:tc>
+                  <a:txBody>
+                    <a:bodyPr wrap="square"/>
+                    <a:lstStyle/>
+                    <a:p>
+                      <a:pPr algn="ctr"/>
+                      <a:r>
+                        <a:rPr sz="900" b="0">
+                          <a:solidFill>
+                            <a:srgbClr val="333333"/>
+                          </a:solidFill>
+                          <a:latin typeface="メイリオ"/>
+                          <a:ea typeface="メイリオ"/>
+                        </a:rPr>
+                        <a:t>9/9</a:t>
+                      </a:r>
+                    </a:p>
+                  </a:txBody>
+                  <a:tcPr anchor="ctr">
+                    <a:solidFill>
+                      <a:srgbClr val="F0FAF8"/>
+                    </a:solidFill>
+                    <a:lnL w="6350" cap="flat" cmpd="sng" algn="ctr">
+                      <a:solidFill>
+                        <a:srgbClr val="CCCCCC"/>
+                      </a:solidFill>
+                      <a:prstDash val="solid"/>
+                    </a:lnL>
+                    <a:lnR w="6350" cap="flat" cmpd="sng" algn="ctr">
+                      <a:solidFill>
+                        <a:srgbClr val="CCCCCC"/>
+                      </a:solidFill>
+                      <a:prstDash val="solid"/>
+                    </a:lnR>
+                    <a:lnT w="6350" cap="flat" cmpd="sng" algn="ctr">
+                      <a:solidFill>
+                        <a:srgbClr val="CCCCCC"/>
+                      </a:solidFill>
+                      <a:prstDash val="solid"/>
+                    </a:lnT>
+                    <a:lnB w="6350" cap="flat" cmpd="sng" algn="ctr">
+                      <a:solidFill>
+                        <a:srgbClr val="CCCCCC"/>
+                      </a:solidFill>
+                      <a:prstDash val="solid"/>
+                    </a:lnB>
+                  </a:tcPr>
+                </a:tc>
+              </a:tr>
+              <a:tr h="485714">
+                <a:tc>
+                  <a:txBody>
+                    <a:bodyPr wrap="square"/>
+                    <a:lstStyle/>
+                    <a:p>
+                      <a:pPr algn="ctr"/>
+                      <a:r>
+                        <a:rPr sz="900" b="1">
+                          <a:solidFill>
+                            <a:srgbClr val="333333"/>
+                          </a:solidFill>
+                          <a:latin typeface="メイリオ"/>
+                          <a:ea typeface="メイリオ"/>
+                        </a:rPr>
+                        <a:t>4</a:t>
+                      </a:r>
+                    </a:p>
+                  </a:txBody>
+                  <a:tcPr anchor="ctr">
+                    <a:solidFill>
+                      <a:srgbClr val="FFFFFF"/>
+                    </a:solidFill>
+                    <a:lnL w="6350" cap="flat" cmpd="sng" algn="ctr">
+                      <a:solidFill>
+                        <a:srgbClr val="CCCCCC"/>
+                      </a:solidFill>
+                      <a:prstDash val="solid"/>
+                    </a:lnL>
+                    <a:lnR w="6350" cap="flat" cmpd="sng" algn="ctr">
+                      <a:solidFill>
+                        <a:srgbClr val="CCCCCC"/>
+                      </a:solidFill>
+                      <a:prstDash val="solid"/>
+                    </a:lnR>
+                    <a:lnT w="6350" cap="flat" cmpd="sng" algn="ctr">
+                      <a:solidFill>
+                        <a:srgbClr val="CCCCCC"/>
+                      </a:solidFill>
+                      <a:prstDash val="solid"/>
+                    </a:lnT>
+                    <a:lnB w="6350" cap="flat" cmpd="sng" algn="ctr">
+                      <a:solidFill>
+                        <a:srgbClr val="CCCCCC"/>
+                      </a:solidFill>
+                      <a:prstDash val="solid"/>
+                    </a:lnB>
+                  </a:tcPr>
+                </a:tc>
+                <a:tc>
+                  <a:txBody>
+                    <a:bodyPr wrap="square"/>
+                    <a:lstStyle/>
+                    <a:p>
+                      <a:pPr algn="l"/>
+                      <a:r>
+                        <a:rPr sz="900" b="0">
+                          <a:solidFill>
+                            <a:srgbClr val="333333"/>
+                          </a:solidFill>
+                          <a:latin typeface="メイリオ"/>
+                          <a:ea typeface="メイリオ"/>
+                        </a:rPr>
+                        <a:t>非機能要件定義</a:t>
+                      </a:r>
+                    </a:p>
+                  </a:txBody>
+                  <a:tcPr anchor="ctr">
+                    <a:solidFill>
+                      <a:srgbClr val="FFFFFF"/>
+                    </a:solidFill>
+                    <a:lnL w="6350" cap="flat" cmpd="sng" algn="ctr">
+                      <a:solidFill>
+                        <a:srgbClr val="CCCCCC"/>
+                      </a:solidFill>
+                      <a:prstDash val="solid"/>
+                    </a:lnL>
+                    <a:lnR w="6350" cap="flat" cmpd="sng" algn="ctr">
+                      <a:solidFill>
+                        <a:srgbClr val="CCCCCC"/>
+                      </a:solidFill>
+                      <a:prstDash val="solid"/>
+                    </a:lnR>
+                    <a:lnT w="6350" cap="flat" cmpd="sng" algn="ctr">
+                      <a:solidFill>
+                        <a:srgbClr val="CCCCCC"/>
+                      </a:solidFill>
+                      <a:prstDash val="solid"/>
+                    </a:lnT>
+                    <a:lnB w="6350" cap="flat" cmpd="sng" algn="ctr">
+                      <a:solidFill>
+                        <a:srgbClr val="CCCCCC"/>
+                      </a:solidFill>
+                      <a:prstDash val="solid"/>
+                    </a:lnB>
+                  </a:tcPr>
+                </a:tc>
+                <a:tc>
+                  <a:txBody>
+                    <a:bodyPr wrap="square"/>
+                    <a:lstStyle/>
+                    <a:p>
+                      <a:pPr algn="l"/>
+                      <a:r>
+                        <a:rPr sz="900" b="0">
+                          <a:solidFill>
+                            <a:srgbClr val="333333"/>
+                          </a:solidFill>
+                          <a:latin typeface="メイリオ"/>
+                          <a:ea typeface="メイリオ"/>
+                        </a:rPr>
+                        <a:t>性能・セキュリティ・運用・移行等</a:t>
+                      </a:r>
+                    </a:p>
+                  </a:txBody>
+                  <a:tcPr anchor="ctr">
+                    <a:solidFill>
+                      <a:srgbClr val="FFFFFF"/>
+                    </a:solidFill>
+                    <a:lnL w="6350" cap="flat" cmpd="sng" algn="ctr">
+                      <a:solidFill>
+                        <a:srgbClr val="CCCCCC"/>
+                      </a:solidFill>
+                      <a:prstDash val="solid"/>
+                    </a:lnL>
+                    <a:lnR w="6350" cap="flat" cmpd="sng" algn="ctr">
+                      <a:solidFill>
+                        <a:srgbClr val="CCCCCC"/>
+                      </a:solidFill>
+                      <a:prstDash val="solid"/>
+                    </a:lnR>
+                    <a:lnT w="6350" cap="flat" cmpd="sng" algn="ctr">
+                      <a:solidFill>
+                        <a:srgbClr val="CCCCCC"/>
+                      </a:solidFill>
+                      <a:prstDash val="solid"/>
+                    </a:lnT>
+                    <a:lnB w="6350" cap="flat" cmpd="sng" algn="ctr">
+                      <a:solidFill>
+                        <a:srgbClr val="CCCCCC"/>
+                      </a:solidFill>
+                      <a:prstDash val="solid"/>
+                    </a:lnB>
+                  </a:tcPr>
+                </a:tc>
+                <a:tc>
+                  <a:txBody>
+                    <a:bodyPr wrap="square"/>
+                    <a:lstStyle/>
+                    <a:p>
+                      <a:pPr algn="ctr"/>
+                      <a:r>
+                        <a:rPr sz="900" b="0">
+                          <a:solidFill>
+                            <a:srgbClr val="333333"/>
+                          </a:solidFill>
+                          <a:latin typeface="メイリオ"/>
+                          <a:ea typeface="メイリオ"/>
+                        </a:rPr>
+                        <a:t>9/16</a:t>
+                      </a:r>
+                    </a:p>
+                  </a:txBody>
+                  <a:tcPr anchor="ctr">
+                    <a:solidFill>
+                      <a:srgbClr val="FFFFFF"/>
+                    </a:solidFill>
+                    <a:lnL w="6350" cap="flat" cmpd="sng" algn="ctr">
+                      <a:solidFill>
+                        <a:srgbClr val="CCCCCC"/>
+                      </a:solidFill>
+                      <a:prstDash val="solid"/>
+                    </a:lnL>
+                    <a:lnR w="6350" cap="flat" cmpd="sng" algn="ctr">
+                      <a:solidFill>
+                        <a:srgbClr val="CCCCCC"/>
+                      </a:solidFill>
+                      <a:prstDash val="solid"/>
+                    </a:lnR>
+                    <a:lnT w="6350" cap="flat" cmpd="sng" algn="ctr">
+                      <a:solidFill>
+                        <a:srgbClr val="CCCCCC"/>
+                      </a:solidFill>
+                      <a:prstDash val="solid"/>
+                    </a:lnT>
+                    <a:lnB w="6350" cap="flat" cmpd="sng" algn="ctr">
+                      <a:solidFill>
+                        <a:srgbClr val="CCCCCC"/>
+                      </a:solidFill>
+                      <a:prstDash val="solid"/>
+                    </a:lnB>
+                  </a:tcPr>
+                </a:tc>
+              </a:tr>
+              <a:tr h="485714">
+                <a:tc>
+                  <a:txBody>
+                    <a:bodyPr wrap="square"/>
+                    <a:lstStyle/>
+                    <a:p>
+                      <a:pPr algn="ctr"/>
+                      <a:r>
+                        <a:rPr sz="900" b="1">
+                          <a:solidFill>
+                            <a:srgbClr val="333333"/>
+                          </a:solidFill>
+                          <a:latin typeface="メイリオ"/>
+                          <a:ea typeface="メイリオ"/>
+                        </a:rPr>
+                        <a:t>5</a:t>
+                      </a:r>
+                    </a:p>
+                  </a:txBody>
+                  <a:tcPr anchor="ctr">
+                    <a:solidFill>
+                      <a:srgbClr val="F0FAF8"/>
+                    </a:solidFill>
+                    <a:lnL w="6350" cap="flat" cmpd="sng" algn="ctr">
+                      <a:solidFill>
+                        <a:srgbClr val="CCCCCC"/>
+                      </a:solidFill>
+                      <a:prstDash val="solid"/>
+                    </a:lnL>
+                    <a:lnR w="6350" cap="flat" cmpd="sng" algn="ctr">
+                      <a:solidFill>
+                        <a:srgbClr val="CCCCCC"/>
+                      </a:solidFill>
+                      <a:prstDash val="solid"/>
+                    </a:lnR>
+                    <a:lnT w="6350" cap="flat" cmpd="sng" algn="ctr">
+                      <a:solidFill>
+                        <a:srgbClr val="CCCCCC"/>
+                      </a:solidFill>
+                      <a:prstDash val="solid"/>
+                    </a:lnT>
+                    <a:lnB w="6350" cap="flat" cmpd="sng" algn="ctr">
+                      <a:solidFill>
+                        <a:srgbClr val="CCCCCC"/>
+                      </a:solidFill>
+                      <a:prstDash val="solid"/>
+                    </a:lnB>
+                  </a:tcPr>
+                </a:tc>
+                <a:tc>
+                  <a:txBody>
+                    <a:bodyPr wrap="square"/>
+                    <a:lstStyle/>
+                    <a:p>
+                      <a:pPr algn="l"/>
+                      <a:r>
+                        <a:rPr sz="900" b="0">
+                          <a:solidFill>
+                            <a:srgbClr val="333333"/>
+                          </a:solidFill>
+                          <a:latin typeface="メイリオ"/>
+                          <a:ea typeface="メイリオ"/>
+                        </a:rPr>
+                        <a:t>要件定義書（案）</a:t>
+                      </a:r>
+                    </a:p>
+                  </a:txBody>
+                  <a:tcPr anchor="ctr">
+                    <a:solidFill>
+                      <a:srgbClr val="F0FAF8"/>
+                    </a:solidFill>
+                    <a:lnL w="6350" cap="flat" cmpd="sng" algn="ctr">
+                      <a:solidFill>
+                        <a:srgbClr val="CCCCCC"/>
+                      </a:solidFill>
+                      <a:prstDash val="solid"/>
+                    </a:lnL>
+                    <a:lnR w="6350" cap="flat" cmpd="sng" algn="ctr">
+                      <a:solidFill>
+                        <a:srgbClr val="CCCCCC"/>
+                      </a:solidFill>
+                      <a:prstDash val="solid"/>
+                    </a:lnR>
+                    <a:lnT w="6350" cap="flat" cmpd="sng" algn="ctr">
+                      <a:solidFill>
+                        <a:srgbClr val="CCCCCC"/>
+                      </a:solidFill>
+                      <a:prstDash val="solid"/>
+                    </a:lnT>
+                    <a:lnB w="6350" cap="flat" cmpd="sng" algn="ctr">
+                      <a:solidFill>
+                        <a:srgbClr val="CCCCCC"/>
+                      </a:solidFill>
+                      <a:prstDash val="solid"/>
+                    </a:lnB>
+                  </a:tcPr>
+                </a:tc>
+                <a:tc>
+                  <a:txBody>
+                    <a:bodyPr wrap="square"/>
+                    <a:lstStyle/>
+                    <a:p>
+                      <a:pPr algn="l"/>
+                      <a:r>
+                        <a:rPr sz="900" b="0">
+                          <a:solidFill>
+                            <a:srgbClr val="333333"/>
+                          </a:solidFill>
+                          <a:latin typeface="メイリオ"/>
+                          <a:ea typeface="メイリオ"/>
+                        </a:rPr>
+                        <a:t>取りまとめ・レビュー</a:t>
+                      </a:r>
+                    </a:p>
+                  </a:txBody>
+                  <a:tcPr anchor="ctr">
+                    <a:solidFill>
+                      <a:srgbClr val="F0FAF8"/>
+                    </a:solidFill>
+                    <a:lnL w="6350" cap="flat" cmpd="sng" algn="ctr">
+                      <a:solidFill>
+                        <a:srgbClr val="CCCCCC"/>
+                      </a:solidFill>
+                      <a:prstDash val="solid"/>
+                    </a:lnL>
+                    <a:lnR w="6350" cap="flat" cmpd="sng" algn="ctr">
+                      <a:solidFill>
+                        <a:srgbClr val="CCCCCC"/>
+                      </a:solidFill>
+                      <a:prstDash val="solid"/>
+                    </a:lnR>
+                    <a:lnT w="6350" cap="flat" cmpd="sng" algn="ctr">
+                      <a:solidFill>
+                        <a:srgbClr val="CCCCCC"/>
+                      </a:solidFill>
+                      <a:prstDash val="solid"/>
+                    </a:lnT>
+                    <a:lnB w="6350" cap="flat" cmpd="sng" algn="ctr">
+                      <a:solidFill>
+                        <a:srgbClr val="CCCCCC"/>
+                      </a:solidFill>
+                      <a:prstDash val="solid"/>
+                    </a:lnB>
+                  </a:tcPr>
+                </a:tc>
+                <a:tc>
+                  <a:txBody>
+                    <a:bodyPr wrap="square"/>
+                    <a:lstStyle/>
+                    <a:p>
+                      <a:pPr algn="ctr"/>
+                      <a:r>
+                        <a:rPr sz="900" b="0">
+                          <a:solidFill>
+                            <a:srgbClr val="333333"/>
+                          </a:solidFill>
+                          <a:latin typeface="メイリオ"/>
+                          <a:ea typeface="メイリオ"/>
+                        </a:rPr>
+                        <a:t>9/24</a:t>
+                      </a:r>
+                    </a:p>
+                  </a:txBody>
+                  <a:tcPr anchor="ctr">
+                    <a:solidFill>
+                      <a:srgbClr val="F0FAF8"/>
+                    </a:solidFill>
+                    <a:lnL w="6350" cap="flat" cmpd="sng" algn="ctr">
+                      <a:solidFill>
+                        <a:srgbClr val="CCCCCC"/>
+                      </a:solidFill>
+                      <a:prstDash val="solid"/>
+                    </a:lnL>
+                    <a:lnR w="6350" cap="flat" cmpd="sng" algn="ctr">
+                      <a:solidFill>
+                        <a:srgbClr val="CCCCCC"/>
+                      </a:solidFill>
+                      <a:prstDash val="solid"/>
+                    </a:lnR>
+                    <a:lnT w="6350" cap="flat" cmpd="sng" algn="ctr">
+                      <a:solidFill>
+                        <a:srgbClr val="CCCCCC"/>
+                      </a:solidFill>
+                      <a:prstDash val="solid"/>
+                    </a:lnT>
+                    <a:lnB w="6350" cap="flat" cmpd="sng" algn="ctr">
+                      <a:solidFill>
+                        <a:srgbClr val="CCCCCC"/>
+                      </a:solidFill>
+                      <a:prstDash val="solid"/>
+                    </a:lnB>
+                  </a:tcPr>
+                </a:tc>
+              </a:tr>
+              <a:tr h="485716">
+                <a:tc>
+                  <a:txBody>
+                    <a:bodyPr wrap="square"/>
+                    <a:lstStyle/>
+                    <a:p>
+                      <a:pPr algn="ctr"/>
+                      <a:r>
+                        <a:rPr sz="900" b="1">
+                          <a:solidFill>
+                            <a:srgbClr val="333333"/>
+                          </a:solidFill>
+                          <a:latin typeface="メイリオ"/>
+                          <a:ea typeface="メイリオ"/>
+                        </a:rPr>
+                        <a:t>6</a:t>
+                      </a:r>
+                    </a:p>
+                  </a:txBody>
+                  <a:tcPr anchor="ctr">
+                    <a:solidFill>
+                      <a:srgbClr val="FFFFFF"/>
+                    </a:solidFill>
+                    <a:lnL w="6350" cap="flat" cmpd="sng" algn="ctr">
+                      <a:solidFill>
+                        <a:srgbClr val="CCCCCC"/>
+                      </a:solidFill>
+                      <a:prstDash val="solid"/>
+                    </a:lnL>
+                    <a:lnR w="6350" cap="flat" cmpd="sng" algn="ctr">
+                      <a:solidFill>
+                        <a:srgbClr val="CCCCCC"/>
+                      </a:solidFill>
+                      <a:prstDash val="solid"/>
+                    </a:lnR>
+                    <a:lnT w="6350" cap="flat" cmpd="sng" algn="ctr">
+                      <a:solidFill>
+                        <a:srgbClr val="CCCCCC"/>
+                      </a:solidFill>
+                      <a:prstDash val="solid"/>
+                    </a:lnT>
+                    <a:lnB w="6350" cap="flat" cmpd="sng" algn="ctr">
+                      <a:solidFill>
+                        <a:srgbClr val="CCCCCC"/>
+                      </a:solidFill>
+                      <a:prstDash val="solid"/>
+                    </a:lnB>
+                  </a:tcPr>
+                </a:tc>
+                <a:tc>
+                  <a:txBody>
+                    <a:bodyPr wrap="square"/>
+                    <a:lstStyle/>
+                    <a:p>
+                      <a:pPr algn="l"/>
+                      <a:r>
+                        <a:rPr sz="900" b="0">
+                          <a:solidFill>
+                            <a:srgbClr val="333333"/>
+                          </a:solidFill>
+                          <a:latin typeface="メイリオ"/>
+                          <a:ea typeface="メイリオ"/>
+                        </a:rPr>
+                        <a:t>納品／正式見積り／ご検収</a:t>
+                      </a:r>
+                    </a:p>
+                  </a:txBody>
+                  <a:tcPr anchor="ctr">
+                    <a:solidFill>
+                      <a:srgbClr val="FFFFFF"/>
+                    </a:solidFill>
+                    <a:lnL w="6350" cap="flat" cmpd="sng" algn="ctr">
+                      <a:solidFill>
+                        <a:srgbClr val="CCCCCC"/>
+                      </a:solidFill>
+                      <a:prstDash val="solid"/>
+                    </a:lnL>
+                    <a:lnR w="6350" cap="flat" cmpd="sng" algn="ctr">
+                      <a:solidFill>
+                        <a:srgbClr val="CCCCCC"/>
+                      </a:solidFill>
+                      <a:prstDash val="solid"/>
+                    </a:lnR>
+                    <a:lnT w="6350" cap="flat" cmpd="sng" algn="ctr">
+                      <a:solidFill>
+                        <a:srgbClr val="CCCCCC"/>
+                      </a:solidFill>
+                      <a:prstDash val="solid"/>
+                    </a:lnT>
+                    <a:lnB w="6350" cap="flat" cmpd="sng" algn="ctr">
+                      <a:solidFill>
+                        <a:srgbClr val="CCCCCC"/>
+                      </a:solidFill>
+                      <a:prstDash val="solid"/>
+                    </a:lnB>
+                  </a:tcPr>
+                </a:tc>
+                <a:tc>
+                  <a:txBody>
+                    <a:bodyPr wrap="square"/>
+                    <a:lstStyle/>
+                    <a:p>
+                      <a:pPr algn="l"/>
+                      <a:r>
+                        <a:rPr sz="900" b="0">
+                          <a:solidFill>
+                            <a:srgbClr val="333333"/>
+                          </a:solidFill>
+                          <a:latin typeface="メイリオ"/>
+                          <a:ea typeface="メイリオ"/>
+                        </a:rPr>
+                        <a:t>要件定義書納品、開発工程見積り、ご検収</a:t>
+                      </a:r>
+                    </a:p>
+                  </a:txBody>
+                  <a:tcPr anchor="ctr">
+                    <a:solidFill>
+                      <a:srgbClr val="FFFFFF"/>
+                    </a:solidFill>
+                    <a:lnL w="6350" cap="flat" cmpd="sng" algn="ctr">
+                      <a:solidFill>
+                        <a:srgbClr val="CCCCCC"/>
+                      </a:solidFill>
+                      <a:prstDash val="solid"/>
+                    </a:lnL>
+                    <a:lnR w="6350" cap="flat" cmpd="sng" algn="ctr">
+                      <a:solidFill>
+                        <a:srgbClr val="CCCCCC"/>
+                      </a:solidFill>
+                      <a:prstDash val="solid"/>
+                    </a:lnR>
+                    <a:lnT w="6350" cap="flat" cmpd="sng" algn="ctr">
+                      <a:solidFill>
+                        <a:srgbClr val="CCCCCC"/>
+                      </a:solidFill>
+                      <a:prstDash val="solid"/>
+                    </a:lnT>
+                    <a:lnB w="6350" cap="flat" cmpd="sng" algn="ctr">
+                      <a:solidFill>
+                        <a:srgbClr val="CCCCCC"/>
+                      </a:solidFill>
+                      <a:prstDash val="solid"/>
+                    </a:lnB>
+                  </a:tcPr>
+                </a:tc>
+                <a:tc>
+                  <a:txBody>
+                    <a:bodyPr wrap="square"/>
+                    <a:lstStyle/>
+                    <a:p>
+                      <a:pPr algn="ctr"/>
+                      <a:r>
+                        <a:rPr sz="900" b="0">
+                          <a:solidFill>
+                            <a:srgbClr val="333333"/>
+                          </a:solidFill>
+                          <a:latin typeface="メイリオ"/>
+                          <a:ea typeface="メイリオ"/>
+                        </a:rPr>
+                        <a:t>9/29</a:t>
+                      </a:r>
+                    </a:p>
+                  </a:txBody>
+                  <a:tcPr anchor="ctr">
+                    <a:solidFill>
+                      <a:srgbClr val="FFFFFF"/>
+                    </a:solidFill>
+                    <a:lnL w="6350" cap="flat" cmpd="sng" algn="ctr">
+                      <a:solidFill>
+                        <a:srgbClr val="CCCCCC"/>
+                      </a:solidFill>
+                      <a:prstDash val="solid"/>
+                    </a:lnL>
+                    <a:lnR w="6350" cap="flat" cmpd="sng" algn="ctr">
+                      <a:solidFill>
+                        <a:srgbClr val="CCCCCC"/>
+                      </a:solidFill>
+                      <a:prstDash val="solid"/>
+                    </a:lnR>
+                    <a:lnT w="6350" cap="flat" cmpd="sng" algn="ctr">
+                      <a:solidFill>
+                        <a:srgbClr val="CCCCCC"/>
+                      </a:solidFill>
+                      <a:prstDash val="solid"/>
+                    </a:lnT>
+                    <a:lnB w="6350" cap="flat" cmpd="sng" algn="ctr">
+                      <a:solidFill>
+                        <a:srgbClr val="CCCCCC"/>
+                      </a:solidFill>
+                      <a:prstDash val="solid"/>
+                    </a:lnB>
+                  </a:tcPr>
+                </a:tc>
+              </a:tr>
+            </a:tbl>
+          </a:graphicData>
+        </a:graphic>
+      </p:graphicFrame>
+    </p:spTree>
+  </p:cSld>
+  <p:clrMapOvr>
+    <a:masterClrMapping/>
+  </p:clrMapOvr>
+</p:sld>
+</file>
+
+<file path=ppt/slides/slide5.xml><?xml version="1.0" encoding="utf-8"?>
+<p:sld xmlns:a="http://schemas.openxmlformats.org/drawingml/2006/main" xmlns:p="http://schemas.openxmlformats.org/presentationml/2006/main" xmlns:r="http://schemas.openxmlformats.org/officeDocument/2006/relationships">
+  <p:cSld>
+    <p:spTree>
+      <p:nvGrpSpPr>
+        <p:cNvPr id="1" name=""/>
+        <p:cNvGrpSpPr/>
+        <p:nvPr/>
+      </p:nvGrpSpPr>
+      <p:grpSpPr/>
+      <p:sp>
+        <p:nvSpPr>
+          <p:cNvPr id="2" name="Rectangle 1"/>
+          <p:cNvSpPr/>
+          <p:nvPr/>
+        </p:nvSpPr>
+        <p:spPr>
+          <a:xfrm>
+            <a:off x="350000" y="220000"/>
+            <a:ext cx="80000" cy="420000"/>
+          </a:xfrm>
+          <a:prstGeom prst="rect">
+            <a:avLst/>
+          </a:prstGeom>
+          <a:solidFill>
+            <a:srgbClr val="00A693"/>
+          </a:solidFill>
+          <a:ln>
+            <a:noFill/>
+          </a:ln>
+        </p:spPr>
+        <p:style>
+          <a:lnRef idx="1">
+            <a:schemeClr val="accent1"/>
+          </a:lnRef>
+          <a:fillRef idx="3">
+            <a:schemeClr val="accent1"/>
+          </a:fillRef>
+          <a:effectRef idx="2">
+            <a:schemeClr val="accent1"/>
+          </a:effectRef>
+          <a:fontRef idx="minor">
+            <a:schemeClr val="lt1"/>
+          </a:fontRef>
+        </p:style>
+        <p:txBody>
+          <a:bodyPr rtlCol="0" anchor="ctr"/>
+          <a:lstStyle/>
+          <a:p>
+            <a:pPr algn="ctr"/>
+          </a:p>
+        </p:txBody>
+      </p:sp>
+      <p:sp>
+        <p:nvSpPr>
+          <p:cNvPr id="3" name="TextBox 2"/>
+          <p:cNvSpPr txBox="1"/>
+          <p:nvPr/>
+        </p:nvSpPr>
+        <p:spPr>
+          <a:xfrm>
+            <a:off x="480000" y="200000"/>
+            <a:ext cx="8500000" cy="450000"/>
+          </a:xfrm>
+          <a:prstGeom prst="rect">
+            <a:avLst/>
+          </a:prstGeom>
+          <a:noFill/>
+        </p:spPr>
+        <p:txBody>
+          <a:bodyPr wrap="square">
+            <a:spAutoFit/>
+          </a:bodyPr>
+          <a:lstStyle/>
+          <a:p>
+            <a:pPr algn="l"/>
+            <a:r>
+              <a:rPr sz="2400" b="1">
+                <a:solidFill>
+                  <a:srgbClr val="3F3F3F"/>
+                </a:solidFill>
+                <a:latin typeface="メイリオ"/>
+                <a:ea typeface="メイリオ"/>
+              </a:rPr>
               <a:t>前提・補足事項</a:t>
             </a:r>
           </a:p>
@@ -8594,7 +8261,7 @@
                 <a:latin typeface="メイリオ"/>
                 <a:ea typeface="メイリオ"/>
               </a:rPr>
-              <a:t>全8回、各回約2時間。原則オンライン／対面は別途調整</a:t>
+              <a:t>全6回に集約、各回約2時間。ご要件確認の独立回は設けない</a:t>
             </a:r>
           </a:p>
         </p:txBody>
@@ -8647,7 +8314,7 @@
                 <a:latin typeface="メイリオ"/>
                 <a:ea typeface="メイリオ"/>
               </a:rPr>
-              <a:t>開催間隔</a:t>
+              <a:t>すり合わせ</a:t>
             </a:r>
           </a:p>
         </p:txBody>
@@ -8683,7 +8350,7 @@
                 <a:latin typeface="メイリオ"/>
                 <a:ea typeface="メイリオ"/>
               </a:rPr>
-              <a:t>おおむね週1回。検討・資料作成のリードタイムを確保</a:t>
+              <a:t>キックオフで既出ご要件の論点を合意し、以降の検討に進む</a:t>
             </a:r>
           </a:p>
         </p:txBody>
@@ -8736,7 +8403,7 @@
                 <a:latin typeface="メイリオ"/>
                 <a:ea typeface="メイリオ"/>
               </a:rPr>
-              <a:t>貴社作業</a:t>
+              <a:t>検討粒度</a:t>
             </a:r>
           </a:p>
         </p:txBody>
@@ -8772,7 +8439,7 @@
                 <a:latin typeface="メイリオ"/>
                 <a:ea typeface="メイリオ"/>
               </a:rPr>
-              <a:t>2回目にて現行業務・ご要件のご説明をお願いします（資料事前共有推奨）</a:t>
+              <a:t>業務フロー／機能詳細はサプライヤー管理・販売組織等の機能単位まで具体化</a:t>
             </a:r>
           </a:p>
         </p:txBody>
@@ -8861,7 +8528,7 @@
                 <a:latin typeface="メイリオ"/>
                 <a:ea typeface="メイリオ"/>
               </a:rPr>
-              <a:t>各回のアジェンダ準備、議事録、Fit&amp;Gap整理、要件定義書作成</a:t>
+              <a:t>アジェンダ準備、議事録、Fit&amp;Gap整理、要件定義書作成</a:t>
             </a:r>
           </a:p>
         </p:txBody>
@@ -9039,7 +8706,7 @@
                 <a:latin typeface="メイリオ"/>
                 <a:ea typeface="メイリオ"/>
               </a:rPr>
-              <a:t>本表の日付は仮置き。貴社ご都合・祝日等を踏まえ確定します</a:t>
+              <a:t>本表の日付は仮置き。論点量に応じ業務／機能回の分割も可</a:t>
             </a:r>
           </a:p>
         </p:txBody>

--- a/要件定義WBS案_20260806.pptx
+++ b/要件定義WBS案_20260806.pptx
@@ -10,6 +10,7 @@
     <p:sldId id="258" r:id="rId9"/>
     <p:sldId id="259" r:id="rId10"/>
     <p:sldId id="260" r:id="rId11"/>
+    <p:sldId id="261" r:id="rId12"/>
   </p:sldIdLst>
   <p:sldSz cx="9906000" cy="6858000" type="screen4x3"/>
   <p:notesSz cx="6858000" cy="9144000"/>
@@ -3428,7 +3429,7 @@
         <p:spPr>
           <a:xfrm>
             <a:off x="480000" y="200000"/>
-            <a:ext cx="8500000" cy="450000"/>
+            <a:ext cx="9000000" cy="450000"/>
           </a:xfrm>
           <a:prstGeom prst="rect">
             <a:avLst/>
@@ -3443,7 +3444,7 @@
           <a:p>
             <a:pPr algn="l"/>
             <a:r>
-              <a:rPr sz="2400" b="1">
+              <a:rPr sz="2200" b="1">
                 <a:solidFill>
                   <a:srgbClr val="3F3F3F"/>
                 </a:solidFill>
@@ -3464,7 +3465,7 @@
         <p:spPr>
           <a:xfrm>
             <a:off x="480000" y="680000"/>
-            <a:ext cx="9000000" cy="350000"/>
+            <a:ext cx="9000000" cy="300000"/>
           </a:xfrm>
           <a:prstGeom prst="rect">
             <a:avLst/>
@@ -3486,7 +3487,7 @@
                 <a:latin typeface="メイリオ"/>
                 <a:ea typeface="メイリオ"/>
               </a:rPr>
-              <a:t>期間：2026/8/19（キックオフ）〜 2026/9末　｜　全6回　｜　会議時間：各回 約2時間</a:t>
+              <a:t>期間：2026/8/19（キックオフ）〜 2026/9末　｜　会議時間：各回 約2時間</a:t>
             </a:r>
           </a:p>
         </p:txBody>
@@ -3500,8 +3501,8 @@
           <p:nvPr/>
         </p:nvGraphicFramePr>
         <p:xfrm>
-          <a:off x="400000" y="1050000"/>
-          <a:ext cx="9100000" cy="4700000"/>
+          <a:off x="350000" y="1000000"/>
+          <a:ext cx="9200000" cy="5200000"/>
         </p:xfrm>
         <a:graphic>
           <a:graphicData uri="http://schemas.openxmlformats.org/drawingml/2006/table">
@@ -3510,13 +3511,13 @@
                 <a:tableStyleId>{5C22544A-7EE6-4342-B048-85BDC9FD1C3A}</a:tableStyleId>
               </a:tblPr>
               <a:tblGrid>
-                <a:gridCol w="850000"/>
+                <a:gridCol w="900000"/>
                 <a:gridCol w="1300000"/>
-                <a:gridCol w="4550000"/>
+                <a:gridCol w="4500000"/>
                 <a:gridCol w="1400000"/>
-                <a:gridCol w="1000000"/>
+                <a:gridCol w="1100000"/>
               </a:tblGrid>
-              <a:tr h="671428">
+              <a:tr h="346666">
                 <a:tc>
                   <a:txBody>
                     <a:bodyPr wrap="square"/>
@@ -3524,7 +3525,7 @@
                     <a:p>
                       <a:pPr algn="ctr"/>
                       <a:r>
-                        <a:rPr sz="1200" b="1">
+                        <a:rPr sz="1100" b="1">
                           <a:solidFill>
                             <a:srgbClr val="FFFFFF"/>
                           </a:solidFill>
@@ -3572,7 +3573,7 @@
                     <a:p>
                       <a:pPr algn="ctr"/>
                       <a:r>
-                        <a:rPr sz="1200" b="1">
+                        <a:rPr sz="1100" b="1">
                           <a:solidFill>
                             <a:srgbClr val="FFFFFF"/>
                           </a:solidFill>
@@ -3620,7 +3621,7 @@
                     <a:p>
                       <a:pPr algn="ctr"/>
                       <a:r>
-                        <a:rPr sz="1200" b="1">
+                        <a:rPr sz="1100" b="1">
                           <a:solidFill>
                             <a:srgbClr val="FFFFFF"/>
                           </a:solidFill>
@@ -3668,7 +3669,7 @@
                     <a:p>
                       <a:pPr algn="ctr"/>
                       <a:r>
-                        <a:rPr sz="1200" b="1">
+                        <a:rPr sz="1100" b="1">
                           <a:solidFill>
                             <a:srgbClr val="FFFFFF"/>
                           </a:solidFill>
@@ -3716,7 +3717,7 @@
                     <a:p>
                       <a:pPr algn="ctr"/>
                       <a:r>
-                        <a:rPr sz="1200" b="1">
+                        <a:rPr sz="1100" b="1">
                           <a:solidFill>
                             <a:srgbClr val="FFFFFF"/>
                           </a:solidFill>
@@ -3758,7 +3759,7 @@
                   </a:tcPr>
                 </a:tc>
               </a:tr>
-              <a:tr h="671428">
+              <a:tr h="346666">
                 <a:tc>
                   <a:txBody>
                     <a:bodyPr wrap="square"/>
@@ -3862,7 +3863,7 @@
                     <a:p>
                       <a:pPr algn="l"/>
                       <a:r>
-                        <a:rPr sz="900" b="0">
+                        <a:rPr sz="1100" b="0">
                           <a:solidFill>
                             <a:srgbClr val="333333"/>
                           </a:solidFill>
@@ -3870,19 +3871,6 @@
                           <a:ea typeface="メイリオ"/>
                         </a:rPr>
                         <a:t>キックオフ／進め方・ご要件すり合わせ</a:t>
-                      </a:r>
-                    </a:p>
-                    <a:p>
-                      <a:pPr algn="l"/>
-                      <a:r>
-                        <a:rPr sz="900" b="0">
-                          <a:solidFill>
-                            <a:srgbClr val="333333"/>
-                          </a:solidFill>
-                          <a:latin typeface="メイリオ"/>
-                          <a:ea typeface="メイリオ"/>
-                        </a:rPr>
-                        <a:t>※既出のご要件を踏まえ、進め方と論点を合意</a:t>
                       </a:r>
                     </a:p>
                   </a:txBody>
@@ -4013,7 +4001,7 @@
                   </a:tcPr>
                 </a:tc>
               </a:tr>
-              <a:tr h="671428">
+              <a:tr h="346666">
                 <a:tc>
                   <a:txBody>
                     <a:bodyPr wrap="square"/>
@@ -4076,7 +4064,7 @@
                           <a:latin typeface="メイリオ"/>
                           <a:ea typeface="メイリオ"/>
                         </a:rPr>
-                        <a:t>8/26（水）</a:t>
+                        <a:t>8/24（月）</a:t>
                       </a:r>
                     </a:p>
                   </a:txBody>
@@ -4117,40 +4105,14 @@
                     <a:p>
                       <a:pPr algn="l"/>
                       <a:r>
-                        <a:rPr sz="900" b="0">
+                        <a:rPr sz="1100" b="0">
                           <a:solidFill>
                             <a:srgbClr val="333333"/>
                           </a:solidFill>
                           <a:latin typeface="メイリオ"/>
                           <a:ea typeface="メイリオ"/>
                         </a:rPr>
-                        <a:t>業務フロー検討</a:t>
-                      </a:r>
-                    </a:p>
-                    <a:p>
-                      <a:pPr algn="l"/>
-                      <a:r>
-                        <a:rPr sz="900" b="0">
-                          <a:solidFill>
-                            <a:srgbClr val="333333"/>
-                          </a:solidFill>
-                          <a:latin typeface="メイリオ"/>
-                          <a:ea typeface="メイリオ"/>
-                        </a:rPr>
-                        <a:t>サプライヤー管理／販売組織／在庫・引当／</a:t>
-                      </a:r>
-                    </a:p>
-                    <a:p>
-                      <a:pPr algn="l"/>
-                      <a:r>
-                        <a:rPr sz="900" b="0">
-                          <a:solidFill>
-                            <a:srgbClr val="333333"/>
-                          </a:solidFill>
-                          <a:latin typeface="メイリオ"/>
-                          <a:ea typeface="メイリオ"/>
-                        </a:rPr>
-                        <a:t>注文〜出荷・請求など具体業務の整理</a:t>
+                        <a:t>業務フロー検討（1回目）</a:t>
                       </a:r>
                     </a:p>
                   </a:txBody>
@@ -4281,7 +4243,975 @@
                   </a:tcPr>
                 </a:tc>
               </a:tr>
-              <a:tr h="671428">
+              <a:tr h="346666">
+                <a:tc>
+                  <a:txBody>
+                    <a:bodyPr wrap="square"/>
+                    <a:lstStyle/>
+                    <a:p>
+                      <a:pPr algn="ctr"/>
+                      <a:r>
+                        <a:rPr sz="1000" b="0">
+                          <a:solidFill>
+                            <a:srgbClr val="007A6E"/>
+                          </a:solidFill>
+                          <a:latin typeface="メイリオ"/>
+                          <a:ea typeface="メイリオ"/>
+                        </a:rPr>
+                        <a:t/>
+                      </a:r>
+                    </a:p>
+                  </a:txBody>
+                  <a:tcPr anchor="ctr">
+                    <a:solidFill>
+                      <a:srgbClr val="E8F6F3"/>
+                    </a:solidFill>
+                    <a:lnL w="6350" cap="flat" cmpd="sng" algn="ctr">
+                      <a:solidFill>
+                        <a:srgbClr val="CCCCCC"/>
+                      </a:solidFill>
+                      <a:prstDash val="solid"/>
+                    </a:lnL>
+                    <a:lnR w="6350" cap="flat" cmpd="sng" algn="ctr">
+                      <a:solidFill>
+                        <a:srgbClr val="CCCCCC"/>
+                      </a:solidFill>
+                      <a:prstDash val="solid"/>
+                    </a:lnR>
+                    <a:lnT w="6350" cap="flat" cmpd="sng" algn="ctr">
+                      <a:solidFill>
+                        <a:srgbClr val="CCCCCC"/>
+                      </a:solidFill>
+                      <a:prstDash val="solid"/>
+                    </a:lnT>
+                    <a:lnB w="6350" cap="flat" cmpd="sng" algn="ctr">
+                      <a:solidFill>
+                        <a:srgbClr val="CCCCCC"/>
+                      </a:solidFill>
+                      <a:prstDash val="solid"/>
+                    </a:lnB>
+                  </a:tcPr>
+                </a:tc>
+                <a:tc>
+                  <a:txBody>
+                    <a:bodyPr wrap="square"/>
+                    <a:lstStyle/>
+                    <a:p>
+                      <a:pPr algn="ctr"/>
+                      <a:r>
+                        <a:rPr sz="1000" b="0">
+                          <a:solidFill>
+                            <a:srgbClr val="007A6E"/>
+                          </a:solidFill>
+                          <a:latin typeface="メイリオ"/>
+                          <a:ea typeface="メイリオ"/>
+                        </a:rPr>
+                        <a:t/>
+                      </a:r>
+                    </a:p>
+                  </a:txBody>
+                  <a:tcPr anchor="ctr">
+                    <a:solidFill>
+                      <a:srgbClr val="E8F6F3"/>
+                    </a:solidFill>
+                    <a:lnL w="6350" cap="flat" cmpd="sng" algn="ctr">
+                      <a:solidFill>
+                        <a:srgbClr val="CCCCCC"/>
+                      </a:solidFill>
+                      <a:prstDash val="solid"/>
+                    </a:lnL>
+                    <a:lnR w="6350" cap="flat" cmpd="sng" algn="ctr">
+                      <a:solidFill>
+                        <a:srgbClr val="CCCCCC"/>
+                      </a:solidFill>
+                      <a:prstDash val="solid"/>
+                    </a:lnR>
+                    <a:lnT w="6350" cap="flat" cmpd="sng" algn="ctr">
+                      <a:solidFill>
+                        <a:srgbClr val="CCCCCC"/>
+                      </a:solidFill>
+                      <a:prstDash val="solid"/>
+                    </a:lnT>
+                    <a:lnB w="6350" cap="flat" cmpd="sng" algn="ctr">
+                      <a:solidFill>
+                        <a:srgbClr val="CCCCCC"/>
+                      </a:solidFill>
+                      <a:prstDash val="solid"/>
+                    </a:lnB>
+                  </a:tcPr>
+                </a:tc>
+                <a:tc>
+                  <a:txBody>
+                    <a:bodyPr wrap="square"/>
+                    <a:lstStyle/>
+                    <a:p>
+                      <a:pPr algn="l"/>
+                      <a:r>
+                        <a:rPr sz="1000" b="0">
+                          <a:solidFill>
+                            <a:srgbClr val="007A6E"/>
+                          </a:solidFill>
+                          <a:latin typeface="メイリオ"/>
+                          <a:ea typeface="メイリオ"/>
+                        </a:rPr>
+                        <a:t>　・サプライヤー管理</a:t>
+                      </a:r>
+                    </a:p>
+                  </a:txBody>
+                  <a:tcPr anchor="ctr">
+                    <a:solidFill>
+                      <a:srgbClr val="E8F6F3"/>
+                    </a:solidFill>
+                    <a:lnL w="6350" cap="flat" cmpd="sng" algn="ctr">
+                      <a:solidFill>
+                        <a:srgbClr val="CCCCCC"/>
+                      </a:solidFill>
+                      <a:prstDash val="solid"/>
+                    </a:lnL>
+                    <a:lnR w="6350" cap="flat" cmpd="sng" algn="ctr">
+                      <a:solidFill>
+                        <a:srgbClr val="CCCCCC"/>
+                      </a:solidFill>
+                      <a:prstDash val="solid"/>
+                    </a:lnR>
+                    <a:lnT w="6350" cap="flat" cmpd="sng" algn="ctr">
+                      <a:solidFill>
+                        <a:srgbClr val="CCCCCC"/>
+                      </a:solidFill>
+                      <a:prstDash val="solid"/>
+                    </a:lnT>
+                    <a:lnB w="6350" cap="flat" cmpd="sng" algn="ctr">
+                      <a:solidFill>
+                        <a:srgbClr val="CCCCCC"/>
+                      </a:solidFill>
+                      <a:prstDash val="solid"/>
+                    </a:lnB>
+                  </a:tcPr>
+                </a:tc>
+                <a:tc>
+                  <a:txBody>
+                    <a:bodyPr wrap="square"/>
+                    <a:lstStyle/>
+                    <a:p>
+                      <a:pPr algn="ctr"/>
+                      <a:r>
+                        <a:rPr sz="1000" b="0">
+                          <a:solidFill>
+                            <a:srgbClr val="007A6E"/>
+                          </a:solidFill>
+                          <a:latin typeface="メイリオ"/>
+                          <a:ea typeface="メイリオ"/>
+                        </a:rPr>
+                        <a:t/>
+                      </a:r>
+                    </a:p>
+                  </a:txBody>
+                  <a:tcPr anchor="ctr">
+                    <a:solidFill>
+                      <a:srgbClr val="E8F6F3"/>
+                    </a:solidFill>
+                    <a:lnL w="6350" cap="flat" cmpd="sng" algn="ctr">
+                      <a:solidFill>
+                        <a:srgbClr val="CCCCCC"/>
+                      </a:solidFill>
+                      <a:prstDash val="solid"/>
+                    </a:lnL>
+                    <a:lnR w="6350" cap="flat" cmpd="sng" algn="ctr">
+                      <a:solidFill>
+                        <a:srgbClr val="CCCCCC"/>
+                      </a:solidFill>
+                      <a:prstDash val="solid"/>
+                    </a:lnR>
+                    <a:lnT w="6350" cap="flat" cmpd="sng" algn="ctr">
+                      <a:solidFill>
+                        <a:srgbClr val="CCCCCC"/>
+                      </a:solidFill>
+                      <a:prstDash val="solid"/>
+                    </a:lnT>
+                    <a:lnB w="6350" cap="flat" cmpd="sng" algn="ctr">
+                      <a:solidFill>
+                        <a:srgbClr val="CCCCCC"/>
+                      </a:solidFill>
+                      <a:prstDash val="solid"/>
+                    </a:lnB>
+                  </a:tcPr>
+                </a:tc>
+                <a:tc>
+                  <a:txBody>
+                    <a:bodyPr wrap="square"/>
+                    <a:lstStyle/>
+                    <a:p>
+                      <a:pPr algn="ctr"/>
+                      <a:r>
+                        <a:rPr sz="1000" b="0">
+                          <a:solidFill>
+                            <a:srgbClr val="007A6E"/>
+                          </a:solidFill>
+                          <a:latin typeface="メイリオ"/>
+                          <a:ea typeface="メイリオ"/>
+                        </a:rPr>
+                        <a:t/>
+                      </a:r>
+                    </a:p>
+                  </a:txBody>
+                  <a:tcPr anchor="ctr">
+                    <a:solidFill>
+                      <a:srgbClr val="E8F6F3"/>
+                    </a:solidFill>
+                    <a:lnL w="6350" cap="flat" cmpd="sng" algn="ctr">
+                      <a:solidFill>
+                        <a:srgbClr val="CCCCCC"/>
+                      </a:solidFill>
+                      <a:prstDash val="solid"/>
+                    </a:lnL>
+                    <a:lnR w="6350" cap="flat" cmpd="sng" algn="ctr">
+                      <a:solidFill>
+                        <a:srgbClr val="CCCCCC"/>
+                      </a:solidFill>
+                      <a:prstDash val="solid"/>
+                    </a:lnR>
+                    <a:lnT w="6350" cap="flat" cmpd="sng" algn="ctr">
+                      <a:solidFill>
+                        <a:srgbClr val="CCCCCC"/>
+                      </a:solidFill>
+                      <a:prstDash val="solid"/>
+                    </a:lnT>
+                    <a:lnB w="6350" cap="flat" cmpd="sng" algn="ctr">
+                      <a:solidFill>
+                        <a:srgbClr val="CCCCCC"/>
+                      </a:solidFill>
+                      <a:prstDash val="solid"/>
+                    </a:lnB>
+                  </a:tcPr>
+                </a:tc>
+              </a:tr>
+              <a:tr h="346666">
+                <a:tc>
+                  <a:txBody>
+                    <a:bodyPr wrap="square"/>
+                    <a:lstStyle/>
+                    <a:p>
+                      <a:pPr algn="ctr"/>
+                      <a:r>
+                        <a:rPr sz="1000" b="0">
+                          <a:solidFill>
+                            <a:srgbClr val="007A6E"/>
+                          </a:solidFill>
+                          <a:latin typeface="メイリオ"/>
+                          <a:ea typeface="メイリオ"/>
+                        </a:rPr>
+                        <a:t/>
+                      </a:r>
+                    </a:p>
+                  </a:txBody>
+                  <a:tcPr anchor="ctr">
+                    <a:solidFill>
+                      <a:srgbClr val="E8F6F3"/>
+                    </a:solidFill>
+                    <a:lnL w="6350" cap="flat" cmpd="sng" algn="ctr">
+                      <a:solidFill>
+                        <a:srgbClr val="CCCCCC"/>
+                      </a:solidFill>
+                      <a:prstDash val="solid"/>
+                    </a:lnL>
+                    <a:lnR w="6350" cap="flat" cmpd="sng" algn="ctr">
+                      <a:solidFill>
+                        <a:srgbClr val="CCCCCC"/>
+                      </a:solidFill>
+                      <a:prstDash val="solid"/>
+                    </a:lnR>
+                    <a:lnT w="6350" cap="flat" cmpd="sng" algn="ctr">
+                      <a:solidFill>
+                        <a:srgbClr val="CCCCCC"/>
+                      </a:solidFill>
+                      <a:prstDash val="solid"/>
+                    </a:lnT>
+                    <a:lnB w="6350" cap="flat" cmpd="sng" algn="ctr">
+                      <a:solidFill>
+                        <a:srgbClr val="CCCCCC"/>
+                      </a:solidFill>
+                      <a:prstDash val="solid"/>
+                    </a:lnB>
+                  </a:tcPr>
+                </a:tc>
+                <a:tc>
+                  <a:txBody>
+                    <a:bodyPr wrap="square"/>
+                    <a:lstStyle/>
+                    <a:p>
+                      <a:pPr algn="ctr"/>
+                      <a:r>
+                        <a:rPr sz="1000" b="0">
+                          <a:solidFill>
+                            <a:srgbClr val="007A6E"/>
+                          </a:solidFill>
+                          <a:latin typeface="メイリオ"/>
+                          <a:ea typeface="メイリオ"/>
+                        </a:rPr>
+                        <a:t/>
+                      </a:r>
+                    </a:p>
+                  </a:txBody>
+                  <a:tcPr anchor="ctr">
+                    <a:solidFill>
+                      <a:srgbClr val="E8F6F3"/>
+                    </a:solidFill>
+                    <a:lnL w="6350" cap="flat" cmpd="sng" algn="ctr">
+                      <a:solidFill>
+                        <a:srgbClr val="CCCCCC"/>
+                      </a:solidFill>
+                      <a:prstDash val="solid"/>
+                    </a:lnL>
+                    <a:lnR w="6350" cap="flat" cmpd="sng" algn="ctr">
+                      <a:solidFill>
+                        <a:srgbClr val="CCCCCC"/>
+                      </a:solidFill>
+                      <a:prstDash val="solid"/>
+                    </a:lnR>
+                    <a:lnT w="6350" cap="flat" cmpd="sng" algn="ctr">
+                      <a:solidFill>
+                        <a:srgbClr val="CCCCCC"/>
+                      </a:solidFill>
+                      <a:prstDash val="solid"/>
+                    </a:lnT>
+                    <a:lnB w="6350" cap="flat" cmpd="sng" algn="ctr">
+                      <a:solidFill>
+                        <a:srgbClr val="CCCCCC"/>
+                      </a:solidFill>
+                      <a:prstDash val="solid"/>
+                    </a:lnB>
+                  </a:tcPr>
+                </a:tc>
+                <a:tc>
+                  <a:txBody>
+                    <a:bodyPr wrap="square"/>
+                    <a:lstStyle/>
+                    <a:p>
+                      <a:pPr algn="l"/>
+                      <a:r>
+                        <a:rPr sz="1000" b="0">
+                          <a:solidFill>
+                            <a:srgbClr val="007A6E"/>
+                          </a:solidFill>
+                          <a:latin typeface="メイリオ"/>
+                          <a:ea typeface="メイリオ"/>
+                        </a:rPr>
+                        <a:t>　・商品管理</a:t>
+                      </a:r>
+                    </a:p>
+                  </a:txBody>
+                  <a:tcPr anchor="ctr">
+                    <a:solidFill>
+                      <a:srgbClr val="E8F6F3"/>
+                    </a:solidFill>
+                    <a:lnL w="6350" cap="flat" cmpd="sng" algn="ctr">
+                      <a:solidFill>
+                        <a:srgbClr val="CCCCCC"/>
+                      </a:solidFill>
+                      <a:prstDash val="solid"/>
+                    </a:lnL>
+                    <a:lnR w="6350" cap="flat" cmpd="sng" algn="ctr">
+                      <a:solidFill>
+                        <a:srgbClr val="CCCCCC"/>
+                      </a:solidFill>
+                      <a:prstDash val="solid"/>
+                    </a:lnR>
+                    <a:lnT w="6350" cap="flat" cmpd="sng" algn="ctr">
+                      <a:solidFill>
+                        <a:srgbClr val="CCCCCC"/>
+                      </a:solidFill>
+                      <a:prstDash val="solid"/>
+                    </a:lnT>
+                    <a:lnB w="6350" cap="flat" cmpd="sng" algn="ctr">
+                      <a:solidFill>
+                        <a:srgbClr val="CCCCCC"/>
+                      </a:solidFill>
+                      <a:prstDash val="solid"/>
+                    </a:lnB>
+                  </a:tcPr>
+                </a:tc>
+                <a:tc>
+                  <a:txBody>
+                    <a:bodyPr wrap="square"/>
+                    <a:lstStyle/>
+                    <a:p>
+                      <a:pPr algn="ctr"/>
+                      <a:r>
+                        <a:rPr sz="1000" b="0">
+                          <a:solidFill>
+                            <a:srgbClr val="007A6E"/>
+                          </a:solidFill>
+                          <a:latin typeface="メイリオ"/>
+                          <a:ea typeface="メイリオ"/>
+                        </a:rPr>
+                        <a:t/>
+                      </a:r>
+                    </a:p>
+                  </a:txBody>
+                  <a:tcPr anchor="ctr">
+                    <a:solidFill>
+                      <a:srgbClr val="E8F6F3"/>
+                    </a:solidFill>
+                    <a:lnL w="6350" cap="flat" cmpd="sng" algn="ctr">
+                      <a:solidFill>
+                        <a:srgbClr val="CCCCCC"/>
+                      </a:solidFill>
+                      <a:prstDash val="solid"/>
+                    </a:lnL>
+                    <a:lnR w="6350" cap="flat" cmpd="sng" algn="ctr">
+                      <a:solidFill>
+                        <a:srgbClr val="CCCCCC"/>
+                      </a:solidFill>
+                      <a:prstDash val="solid"/>
+                    </a:lnR>
+                    <a:lnT w="6350" cap="flat" cmpd="sng" algn="ctr">
+                      <a:solidFill>
+                        <a:srgbClr val="CCCCCC"/>
+                      </a:solidFill>
+                      <a:prstDash val="solid"/>
+                    </a:lnT>
+                    <a:lnB w="6350" cap="flat" cmpd="sng" algn="ctr">
+                      <a:solidFill>
+                        <a:srgbClr val="CCCCCC"/>
+                      </a:solidFill>
+                      <a:prstDash val="solid"/>
+                    </a:lnB>
+                  </a:tcPr>
+                </a:tc>
+                <a:tc>
+                  <a:txBody>
+                    <a:bodyPr wrap="square"/>
+                    <a:lstStyle/>
+                    <a:p>
+                      <a:pPr algn="ctr"/>
+                      <a:r>
+                        <a:rPr sz="1000" b="0">
+                          <a:solidFill>
+                            <a:srgbClr val="007A6E"/>
+                          </a:solidFill>
+                          <a:latin typeface="メイリオ"/>
+                          <a:ea typeface="メイリオ"/>
+                        </a:rPr>
+                        <a:t/>
+                      </a:r>
+                    </a:p>
+                  </a:txBody>
+                  <a:tcPr anchor="ctr">
+                    <a:solidFill>
+                      <a:srgbClr val="E8F6F3"/>
+                    </a:solidFill>
+                    <a:lnL w="6350" cap="flat" cmpd="sng" algn="ctr">
+                      <a:solidFill>
+                        <a:srgbClr val="CCCCCC"/>
+                      </a:solidFill>
+                      <a:prstDash val="solid"/>
+                    </a:lnL>
+                    <a:lnR w="6350" cap="flat" cmpd="sng" algn="ctr">
+                      <a:solidFill>
+                        <a:srgbClr val="CCCCCC"/>
+                      </a:solidFill>
+                      <a:prstDash val="solid"/>
+                    </a:lnR>
+                    <a:lnT w="6350" cap="flat" cmpd="sng" algn="ctr">
+                      <a:solidFill>
+                        <a:srgbClr val="CCCCCC"/>
+                      </a:solidFill>
+                      <a:prstDash val="solid"/>
+                    </a:lnT>
+                    <a:lnB w="6350" cap="flat" cmpd="sng" algn="ctr">
+                      <a:solidFill>
+                        <a:srgbClr val="CCCCCC"/>
+                      </a:solidFill>
+                      <a:prstDash val="solid"/>
+                    </a:lnB>
+                  </a:tcPr>
+                </a:tc>
+              </a:tr>
+              <a:tr h="346666">
+                <a:tc>
+                  <a:txBody>
+                    <a:bodyPr wrap="square"/>
+                    <a:lstStyle/>
+                    <a:p>
+                      <a:pPr algn="ctr"/>
+                      <a:r>
+                        <a:rPr sz="1000" b="0">
+                          <a:solidFill>
+                            <a:srgbClr val="007A6E"/>
+                          </a:solidFill>
+                          <a:latin typeface="メイリオ"/>
+                          <a:ea typeface="メイリオ"/>
+                        </a:rPr>
+                        <a:t/>
+                      </a:r>
+                    </a:p>
+                  </a:txBody>
+                  <a:tcPr anchor="ctr">
+                    <a:solidFill>
+                      <a:srgbClr val="E8F6F3"/>
+                    </a:solidFill>
+                    <a:lnL w="6350" cap="flat" cmpd="sng" algn="ctr">
+                      <a:solidFill>
+                        <a:srgbClr val="CCCCCC"/>
+                      </a:solidFill>
+                      <a:prstDash val="solid"/>
+                    </a:lnL>
+                    <a:lnR w="6350" cap="flat" cmpd="sng" algn="ctr">
+                      <a:solidFill>
+                        <a:srgbClr val="CCCCCC"/>
+                      </a:solidFill>
+                      <a:prstDash val="solid"/>
+                    </a:lnR>
+                    <a:lnT w="6350" cap="flat" cmpd="sng" algn="ctr">
+                      <a:solidFill>
+                        <a:srgbClr val="CCCCCC"/>
+                      </a:solidFill>
+                      <a:prstDash val="solid"/>
+                    </a:lnT>
+                    <a:lnB w="6350" cap="flat" cmpd="sng" algn="ctr">
+                      <a:solidFill>
+                        <a:srgbClr val="CCCCCC"/>
+                      </a:solidFill>
+                      <a:prstDash val="solid"/>
+                    </a:lnB>
+                  </a:tcPr>
+                </a:tc>
+                <a:tc>
+                  <a:txBody>
+                    <a:bodyPr wrap="square"/>
+                    <a:lstStyle/>
+                    <a:p>
+                      <a:pPr algn="ctr"/>
+                      <a:r>
+                        <a:rPr sz="1000" b="0">
+                          <a:solidFill>
+                            <a:srgbClr val="007A6E"/>
+                          </a:solidFill>
+                          <a:latin typeface="メイリオ"/>
+                          <a:ea typeface="メイリオ"/>
+                        </a:rPr>
+                        <a:t/>
+                      </a:r>
+                    </a:p>
+                  </a:txBody>
+                  <a:tcPr anchor="ctr">
+                    <a:solidFill>
+                      <a:srgbClr val="E8F6F3"/>
+                    </a:solidFill>
+                    <a:lnL w="6350" cap="flat" cmpd="sng" algn="ctr">
+                      <a:solidFill>
+                        <a:srgbClr val="CCCCCC"/>
+                      </a:solidFill>
+                      <a:prstDash val="solid"/>
+                    </a:lnL>
+                    <a:lnR w="6350" cap="flat" cmpd="sng" algn="ctr">
+                      <a:solidFill>
+                        <a:srgbClr val="CCCCCC"/>
+                      </a:solidFill>
+                      <a:prstDash val="solid"/>
+                    </a:lnR>
+                    <a:lnT w="6350" cap="flat" cmpd="sng" algn="ctr">
+                      <a:solidFill>
+                        <a:srgbClr val="CCCCCC"/>
+                      </a:solidFill>
+                      <a:prstDash val="solid"/>
+                    </a:lnT>
+                    <a:lnB w="6350" cap="flat" cmpd="sng" algn="ctr">
+                      <a:solidFill>
+                        <a:srgbClr val="CCCCCC"/>
+                      </a:solidFill>
+                      <a:prstDash val="solid"/>
+                    </a:lnB>
+                  </a:tcPr>
+                </a:tc>
+                <a:tc>
+                  <a:txBody>
+                    <a:bodyPr wrap="square"/>
+                    <a:lstStyle/>
+                    <a:p>
+                      <a:pPr algn="l"/>
+                      <a:r>
+                        <a:rPr sz="1000" b="0">
+                          <a:solidFill>
+                            <a:srgbClr val="007A6E"/>
+                          </a:solidFill>
+                          <a:latin typeface="メイリオ"/>
+                          <a:ea typeface="メイリオ"/>
+                        </a:rPr>
+                        <a:t>　・在庫管理</a:t>
+                      </a:r>
+                    </a:p>
+                  </a:txBody>
+                  <a:tcPr anchor="ctr">
+                    <a:solidFill>
+                      <a:srgbClr val="E8F6F3"/>
+                    </a:solidFill>
+                    <a:lnL w="6350" cap="flat" cmpd="sng" algn="ctr">
+                      <a:solidFill>
+                        <a:srgbClr val="CCCCCC"/>
+                      </a:solidFill>
+                      <a:prstDash val="solid"/>
+                    </a:lnL>
+                    <a:lnR w="6350" cap="flat" cmpd="sng" algn="ctr">
+                      <a:solidFill>
+                        <a:srgbClr val="CCCCCC"/>
+                      </a:solidFill>
+                      <a:prstDash val="solid"/>
+                    </a:lnR>
+                    <a:lnT w="6350" cap="flat" cmpd="sng" algn="ctr">
+                      <a:solidFill>
+                        <a:srgbClr val="CCCCCC"/>
+                      </a:solidFill>
+                      <a:prstDash val="solid"/>
+                    </a:lnT>
+                    <a:lnB w="6350" cap="flat" cmpd="sng" algn="ctr">
+                      <a:solidFill>
+                        <a:srgbClr val="CCCCCC"/>
+                      </a:solidFill>
+                      <a:prstDash val="solid"/>
+                    </a:lnB>
+                  </a:tcPr>
+                </a:tc>
+                <a:tc>
+                  <a:txBody>
+                    <a:bodyPr wrap="square"/>
+                    <a:lstStyle/>
+                    <a:p>
+                      <a:pPr algn="ctr"/>
+                      <a:r>
+                        <a:rPr sz="1000" b="0">
+                          <a:solidFill>
+                            <a:srgbClr val="007A6E"/>
+                          </a:solidFill>
+                          <a:latin typeface="メイリオ"/>
+                          <a:ea typeface="メイリオ"/>
+                        </a:rPr>
+                        <a:t/>
+                      </a:r>
+                    </a:p>
+                  </a:txBody>
+                  <a:tcPr anchor="ctr">
+                    <a:solidFill>
+                      <a:srgbClr val="E8F6F3"/>
+                    </a:solidFill>
+                    <a:lnL w="6350" cap="flat" cmpd="sng" algn="ctr">
+                      <a:solidFill>
+                        <a:srgbClr val="CCCCCC"/>
+                      </a:solidFill>
+                      <a:prstDash val="solid"/>
+                    </a:lnL>
+                    <a:lnR w="6350" cap="flat" cmpd="sng" algn="ctr">
+                      <a:solidFill>
+                        <a:srgbClr val="CCCCCC"/>
+                      </a:solidFill>
+                      <a:prstDash val="solid"/>
+                    </a:lnR>
+                    <a:lnT w="6350" cap="flat" cmpd="sng" algn="ctr">
+                      <a:solidFill>
+                        <a:srgbClr val="CCCCCC"/>
+                      </a:solidFill>
+                      <a:prstDash val="solid"/>
+                    </a:lnT>
+                    <a:lnB w="6350" cap="flat" cmpd="sng" algn="ctr">
+                      <a:solidFill>
+                        <a:srgbClr val="CCCCCC"/>
+                      </a:solidFill>
+                      <a:prstDash val="solid"/>
+                    </a:lnB>
+                  </a:tcPr>
+                </a:tc>
+                <a:tc>
+                  <a:txBody>
+                    <a:bodyPr wrap="square"/>
+                    <a:lstStyle/>
+                    <a:p>
+                      <a:pPr algn="ctr"/>
+                      <a:r>
+                        <a:rPr sz="1000" b="0">
+                          <a:solidFill>
+                            <a:srgbClr val="007A6E"/>
+                          </a:solidFill>
+                          <a:latin typeface="メイリオ"/>
+                          <a:ea typeface="メイリオ"/>
+                        </a:rPr>
+                        <a:t/>
+                      </a:r>
+                    </a:p>
+                  </a:txBody>
+                  <a:tcPr anchor="ctr">
+                    <a:solidFill>
+                      <a:srgbClr val="E8F6F3"/>
+                    </a:solidFill>
+                    <a:lnL w="6350" cap="flat" cmpd="sng" algn="ctr">
+                      <a:solidFill>
+                        <a:srgbClr val="CCCCCC"/>
+                      </a:solidFill>
+                      <a:prstDash val="solid"/>
+                    </a:lnL>
+                    <a:lnR w="6350" cap="flat" cmpd="sng" algn="ctr">
+                      <a:solidFill>
+                        <a:srgbClr val="CCCCCC"/>
+                      </a:solidFill>
+                      <a:prstDash val="solid"/>
+                    </a:lnR>
+                    <a:lnT w="6350" cap="flat" cmpd="sng" algn="ctr">
+                      <a:solidFill>
+                        <a:srgbClr val="CCCCCC"/>
+                      </a:solidFill>
+                      <a:prstDash val="solid"/>
+                    </a:lnT>
+                    <a:lnB w="6350" cap="flat" cmpd="sng" algn="ctr">
+                      <a:solidFill>
+                        <a:srgbClr val="CCCCCC"/>
+                      </a:solidFill>
+                      <a:prstDash val="solid"/>
+                    </a:lnB>
+                  </a:tcPr>
+                </a:tc>
+              </a:tr>
+              <a:tr h="346666">
+                <a:tc>
+                  <a:txBody>
+                    <a:bodyPr wrap="square"/>
+                    <a:lstStyle/>
+                    <a:p>
+                      <a:pPr algn="ctr"/>
+                      <a:r>
+                        <a:rPr sz="1000" b="0">
+                          <a:solidFill>
+                            <a:srgbClr val="007A6E"/>
+                          </a:solidFill>
+                          <a:latin typeface="メイリオ"/>
+                          <a:ea typeface="メイリオ"/>
+                        </a:rPr>
+                        <a:t/>
+                      </a:r>
+                    </a:p>
+                  </a:txBody>
+                  <a:tcPr anchor="ctr">
+                    <a:solidFill>
+                      <a:srgbClr val="E8F6F3"/>
+                    </a:solidFill>
+                    <a:lnL w="6350" cap="flat" cmpd="sng" algn="ctr">
+                      <a:solidFill>
+                        <a:srgbClr val="CCCCCC"/>
+                      </a:solidFill>
+                      <a:prstDash val="solid"/>
+                    </a:lnL>
+                    <a:lnR w="6350" cap="flat" cmpd="sng" algn="ctr">
+                      <a:solidFill>
+                        <a:srgbClr val="CCCCCC"/>
+                      </a:solidFill>
+                      <a:prstDash val="solid"/>
+                    </a:lnR>
+                    <a:lnT w="6350" cap="flat" cmpd="sng" algn="ctr">
+                      <a:solidFill>
+                        <a:srgbClr val="CCCCCC"/>
+                      </a:solidFill>
+                      <a:prstDash val="solid"/>
+                    </a:lnT>
+                    <a:lnB w="6350" cap="flat" cmpd="sng" algn="ctr">
+                      <a:solidFill>
+                        <a:srgbClr val="CCCCCC"/>
+                      </a:solidFill>
+                      <a:prstDash val="solid"/>
+                    </a:lnB>
+                  </a:tcPr>
+                </a:tc>
+                <a:tc>
+                  <a:txBody>
+                    <a:bodyPr wrap="square"/>
+                    <a:lstStyle/>
+                    <a:p>
+                      <a:pPr algn="ctr"/>
+                      <a:r>
+                        <a:rPr sz="1000" b="0">
+                          <a:solidFill>
+                            <a:srgbClr val="007A6E"/>
+                          </a:solidFill>
+                          <a:latin typeface="メイリオ"/>
+                          <a:ea typeface="メイリオ"/>
+                        </a:rPr>
+                        <a:t/>
+                      </a:r>
+                    </a:p>
+                  </a:txBody>
+                  <a:tcPr anchor="ctr">
+                    <a:solidFill>
+                      <a:srgbClr val="E8F6F3"/>
+                    </a:solidFill>
+                    <a:lnL w="6350" cap="flat" cmpd="sng" algn="ctr">
+                      <a:solidFill>
+                        <a:srgbClr val="CCCCCC"/>
+                      </a:solidFill>
+                      <a:prstDash val="solid"/>
+                    </a:lnL>
+                    <a:lnR w="6350" cap="flat" cmpd="sng" algn="ctr">
+                      <a:solidFill>
+                        <a:srgbClr val="CCCCCC"/>
+                      </a:solidFill>
+                      <a:prstDash val="solid"/>
+                    </a:lnR>
+                    <a:lnT w="6350" cap="flat" cmpd="sng" algn="ctr">
+                      <a:solidFill>
+                        <a:srgbClr val="CCCCCC"/>
+                      </a:solidFill>
+                      <a:prstDash val="solid"/>
+                    </a:lnT>
+                    <a:lnB w="6350" cap="flat" cmpd="sng" algn="ctr">
+                      <a:solidFill>
+                        <a:srgbClr val="CCCCCC"/>
+                      </a:solidFill>
+                      <a:prstDash val="solid"/>
+                    </a:lnB>
+                  </a:tcPr>
+                </a:tc>
+                <a:tc>
+                  <a:txBody>
+                    <a:bodyPr wrap="square"/>
+                    <a:lstStyle/>
+                    <a:p>
+                      <a:pPr algn="l"/>
+                      <a:r>
+                        <a:rPr sz="1000" b="0">
+                          <a:solidFill>
+                            <a:srgbClr val="007A6E"/>
+                          </a:solidFill>
+                          <a:latin typeface="メイリオ"/>
+                          <a:ea typeface="メイリオ"/>
+                        </a:rPr>
+                        <a:t>　・会員管理</a:t>
+                      </a:r>
+                    </a:p>
+                  </a:txBody>
+                  <a:tcPr anchor="ctr">
+                    <a:solidFill>
+                      <a:srgbClr val="E8F6F3"/>
+                    </a:solidFill>
+                    <a:lnL w="6350" cap="flat" cmpd="sng" algn="ctr">
+                      <a:solidFill>
+                        <a:srgbClr val="CCCCCC"/>
+                      </a:solidFill>
+                      <a:prstDash val="solid"/>
+                    </a:lnL>
+                    <a:lnR w="6350" cap="flat" cmpd="sng" algn="ctr">
+                      <a:solidFill>
+                        <a:srgbClr val="CCCCCC"/>
+                      </a:solidFill>
+                      <a:prstDash val="solid"/>
+                    </a:lnR>
+                    <a:lnT w="6350" cap="flat" cmpd="sng" algn="ctr">
+                      <a:solidFill>
+                        <a:srgbClr val="CCCCCC"/>
+                      </a:solidFill>
+                      <a:prstDash val="solid"/>
+                    </a:lnT>
+                    <a:lnB w="6350" cap="flat" cmpd="sng" algn="ctr">
+                      <a:solidFill>
+                        <a:srgbClr val="CCCCCC"/>
+                      </a:solidFill>
+                      <a:prstDash val="solid"/>
+                    </a:lnB>
+                  </a:tcPr>
+                </a:tc>
+                <a:tc>
+                  <a:txBody>
+                    <a:bodyPr wrap="square"/>
+                    <a:lstStyle/>
+                    <a:p>
+                      <a:pPr algn="ctr"/>
+                      <a:r>
+                        <a:rPr sz="1000" b="0">
+                          <a:solidFill>
+                            <a:srgbClr val="007A6E"/>
+                          </a:solidFill>
+                          <a:latin typeface="メイリオ"/>
+                          <a:ea typeface="メイリオ"/>
+                        </a:rPr>
+                        <a:t/>
+                      </a:r>
+                    </a:p>
+                  </a:txBody>
+                  <a:tcPr anchor="ctr">
+                    <a:solidFill>
+                      <a:srgbClr val="E8F6F3"/>
+                    </a:solidFill>
+                    <a:lnL w="6350" cap="flat" cmpd="sng" algn="ctr">
+                      <a:solidFill>
+                        <a:srgbClr val="CCCCCC"/>
+                      </a:solidFill>
+                      <a:prstDash val="solid"/>
+                    </a:lnL>
+                    <a:lnR w="6350" cap="flat" cmpd="sng" algn="ctr">
+                      <a:solidFill>
+                        <a:srgbClr val="CCCCCC"/>
+                      </a:solidFill>
+                      <a:prstDash val="solid"/>
+                    </a:lnR>
+                    <a:lnT w="6350" cap="flat" cmpd="sng" algn="ctr">
+                      <a:solidFill>
+                        <a:srgbClr val="CCCCCC"/>
+                      </a:solidFill>
+                      <a:prstDash val="solid"/>
+                    </a:lnT>
+                    <a:lnB w="6350" cap="flat" cmpd="sng" algn="ctr">
+                      <a:solidFill>
+                        <a:srgbClr val="CCCCCC"/>
+                      </a:solidFill>
+                      <a:prstDash val="solid"/>
+                    </a:lnB>
+                  </a:tcPr>
+                </a:tc>
+                <a:tc>
+                  <a:txBody>
+                    <a:bodyPr wrap="square"/>
+                    <a:lstStyle/>
+                    <a:p>
+                      <a:pPr algn="ctr"/>
+                      <a:r>
+                        <a:rPr sz="1000" b="0">
+                          <a:solidFill>
+                            <a:srgbClr val="007A6E"/>
+                          </a:solidFill>
+                          <a:latin typeface="メイリオ"/>
+                          <a:ea typeface="メイリオ"/>
+                        </a:rPr>
+                        <a:t/>
+                      </a:r>
+                    </a:p>
+                  </a:txBody>
+                  <a:tcPr anchor="ctr">
+                    <a:solidFill>
+                      <a:srgbClr val="E8F6F3"/>
+                    </a:solidFill>
+                    <a:lnL w="6350" cap="flat" cmpd="sng" algn="ctr">
+                      <a:solidFill>
+                        <a:srgbClr val="CCCCCC"/>
+                      </a:solidFill>
+                      <a:prstDash val="solid"/>
+                    </a:lnL>
+                    <a:lnR w="6350" cap="flat" cmpd="sng" algn="ctr">
+                      <a:solidFill>
+                        <a:srgbClr val="CCCCCC"/>
+                      </a:solidFill>
+                      <a:prstDash val="solid"/>
+                    </a:lnR>
+                    <a:lnT w="6350" cap="flat" cmpd="sng" algn="ctr">
+                      <a:solidFill>
+                        <a:srgbClr val="CCCCCC"/>
+                      </a:solidFill>
+                      <a:prstDash val="solid"/>
+                    </a:lnT>
+                    <a:lnB w="6350" cap="flat" cmpd="sng" algn="ctr">
+                      <a:solidFill>
+                        <a:srgbClr val="CCCCCC"/>
+                      </a:solidFill>
+                      <a:prstDash val="solid"/>
+                    </a:lnB>
+                  </a:tcPr>
+                </a:tc>
+              </a:tr>
+              <a:tr h="346666">
                 <a:tc>
                   <a:txBody>
                     <a:bodyPr wrap="square"/>
@@ -4344,13 +5274,981 @@
                           <a:latin typeface="メイリオ"/>
                           <a:ea typeface="メイリオ"/>
                         </a:rPr>
+                        <a:t>8/27（木）</a:t>
+                      </a:r>
+                    </a:p>
+                  </a:txBody>
+                  <a:tcPr anchor="ctr">
+                    <a:solidFill>
+                      <a:srgbClr val="F0FAF8"/>
+                    </a:solidFill>
+                    <a:lnL w="6350" cap="flat" cmpd="sng" algn="ctr">
+                      <a:solidFill>
+                        <a:srgbClr val="CCCCCC"/>
+                      </a:solidFill>
+                      <a:prstDash val="solid"/>
+                    </a:lnL>
+                    <a:lnR w="6350" cap="flat" cmpd="sng" algn="ctr">
+                      <a:solidFill>
+                        <a:srgbClr val="CCCCCC"/>
+                      </a:solidFill>
+                      <a:prstDash val="solid"/>
+                    </a:lnR>
+                    <a:lnT w="6350" cap="flat" cmpd="sng" algn="ctr">
+                      <a:solidFill>
+                        <a:srgbClr val="CCCCCC"/>
+                      </a:solidFill>
+                      <a:prstDash val="solid"/>
+                    </a:lnT>
+                    <a:lnB w="6350" cap="flat" cmpd="sng" algn="ctr">
+                      <a:solidFill>
+                        <a:srgbClr val="CCCCCC"/>
+                      </a:solidFill>
+                      <a:prstDash val="solid"/>
+                    </a:lnB>
+                  </a:tcPr>
+                </a:tc>
+                <a:tc>
+                  <a:txBody>
+                    <a:bodyPr wrap="square"/>
+                    <a:lstStyle/>
+                    <a:p>
+                      <a:pPr algn="l"/>
+                      <a:r>
+                        <a:rPr sz="1100" b="0">
+                          <a:solidFill>
+                            <a:srgbClr val="333333"/>
+                          </a:solidFill>
+                          <a:latin typeface="メイリオ"/>
+                          <a:ea typeface="メイリオ"/>
+                        </a:rPr>
+                        <a:t>業務フロー検討（2回目）</a:t>
+                      </a:r>
+                    </a:p>
+                  </a:txBody>
+                  <a:tcPr anchor="ctr">
+                    <a:solidFill>
+                      <a:srgbClr val="F0FAF8"/>
+                    </a:solidFill>
+                    <a:lnL w="6350" cap="flat" cmpd="sng" algn="ctr">
+                      <a:solidFill>
+                        <a:srgbClr val="CCCCCC"/>
+                      </a:solidFill>
+                      <a:prstDash val="solid"/>
+                    </a:lnL>
+                    <a:lnR w="6350" cap="flat" cmpd="sng" algn="ctr">
+                      <a:solidFill>
+                        <a:srgbClr val="CCCCCC"/>
+                      </a:solidFill>
+                      <a:prstDash val="solid"/>
+                    </a:lnR>
+                    <a:lnT w="6350" cap="flat" cmpd="sng" algn="ctr">
+                      <a:solidFill>
+                        <a:srgbClr val="CCCCCC"/>
+                      </a:solidFill>
+                      <a:prstDash val="solid"/>
+                    </a:lnT>
+                    <a:lnB w="6350" cap="flat" cmpd="sng" algn="ctr">
+                      <a:solidFill>
+                        <a:srgbClr val="CCCCCC"/>
+                      </a:solidFill>
+                      <a:prstDash val="solid"/>
+                    </a:lnB>
+                  </a:tcPr>
+                </a:tc>
+                <a:tc>
+                  <a:txBody>
+                    <a:bodyPr wrap="square"/>
+                    <a:lstStyle/>
+                    <a:p>
+                      <a:pPr algn="ctr"/>
+                      <a:r>
+                        <a:rPr sz="1100" b="0">
+                          <a:solidFill>
+                            <a:srgbClr val="333333"/>
+                          </a:solidFill>
+                          <a:latin typeface="メイリオ"/>
+                          <a:ea typeface="メイリオ"/>
+                        </a:rPr>
+                        <a:t>ECR</a:t>
+                      </a:r>
+                    </a:p>
+                  </a:txBody>
+                  <a:tcPr anchor="ctr">
+                    <a:solidFill>
+                      <a:srgbClr val="F0FAF8"/>
+                    </a:solidFill>
+                    <a:lnL w="6350" cap="flat" cmpd="sng" algn="ctr">
+                      <a:solidFill>
+                        <a:srgbClr val="CCCCCC"/>
+                      </a:solidFill>
+                      <a:prstDash val="solid"/>
+                    </a:lnL>
+                    <a:lnR w="6350" cap="flat" cmpd="sng" algn="ctr">
+                      <a:solidFill>
+                        <a:srgbClr val="CCCCCC"/>
+                      </a:solidFill>
+                      <a:prstDash val="solid"/>
+                    </a:lnR>
+                    <a:lnT w="6350" cap="flat" cmpd="sng" algn="ctr">
+                      <a:solidFill>
+                        <a:srgbClr val="CCCCCC"/>
+                      </a:solidFill>
+                      <a:prstDash val="solid"/>
+                    </a:lnT>
+                    <a:lnB w="6350" cap="flat" cmpd="sng" algn="ctr">
+                      <a:solidFill>
+                        <a:srgbClr val="CCCCCC"/>
+                      </a:solidFill>
+                      <a:prstDash val="solid"/>
+                    </a:lnB>
+                  </a:tcPr>
+                </a:tc>
+                <a:tc>
+                  <a:txBody>
+                    <a:bodyPr wrap="square"/>
+                    <a:lstStyle/>
+                    <a:p>
+                      <a:pPr algn="ctr"/>
+                      <a:r>
+                        <a:rPr sz="1100" b="0">
+                          <a:solidFill>
+                            <a:srgbClr val="333333"/>
+                          </a:solidFill>
+                          <a:latin typeface="メイリオ"/>
+                          <a:ea typeface="メイリオ"/>
+                        </a:rPr>
+                        <a:t>2h</a:t>
+                      </a:r>
+                    </a:p>
+                  </a:txBody>
+                  <a:tcPr anchor="ctr">
+                    <a:solidFill>
+                      <a:srgbClr val="F0FAF8"/>
+                    </a:solidFill>
+                    <a:lnL w="6350" cap="flat" cmpd="sng" algn="ctr">
+                      <a:solidFill>
+                        <a:srgbClr val="CCCCCC"/>
+                      </a:solidFill>
+                      <a:prstDash val="solid"/>
+                    </a:lnL>
+                    <a:lnR w="6350" cap="flat" cmpd="sng" algn="ctr">
+                      <a:solidFill>
+                        <a:srgbClr val="CCCCCC"/>
+                      </a:solidFill>
+                      <a:prstDash val="solid"/>
+                    </a:lnR>
+                    <a:lnT w="6350" cap="flat" cmpd="sng" algn="ctr">
+                      <a:solidFill>
+                        <a:srgbClr val="CCCCCC"/>
+                      </a:solidFill>
+                      <a:prstDash val="solid"/>
+                    </a:lnT>
+                    <a:lnB w="6350" cap="flat" cmpd="sng" algn="ctr">
+                      <a:solidFill>
+                        <a:srgbClr val="CCCCCC"/>
+                      </a:solidFill>
+                      <a:prstDash val="solid"/>
+                    </a:lnB>
+                  </a:tcPr>
+                </a:tc>
+              </a:tr>
+              <a:tr h="346666">
+                <a:tc>
+                  <a:txBody>
+                    <a:bodyPr wrap="square"/>
+                    <a:lstStyle/>
+                    <a:p>
+                      <a:pPr algn="ctr"/>
+                      <a:r>
+                        <a:rPr sz="1000" b="0">
+                          <a:solidFill>
+                            <a:srgbClr val="007A6E"/>
+                          </a:solidFill>
+                          <a:latin typeface="メイリオ"/>
+                          <a:ea typeface="メイリオ"/>
+                        </a:rPr>
+                        <a:t/>
+                      </a:r>
+                    </a:p>
+                  </a:txBody>
+                  <a:tcPr anchor="ctr">
+                    <a:solidFill>
+                      <a:srgbClr val="E8F6F3"/>
+                    </a:solidFill>
+                    <a:lnL w="6350" cap="flat" cmpd="sng" algn="ctr">
+                      <a:solidFill>
+                        <a:srgbClr val="CCCCCC"/>
+                      </a:solidFill>
+                      <a:prstDash val="solid"/>
+                    </a:lnL>
+                    <a:lnR w="6350" cap="flat" cmpd="sng" algn="ctr">
+                      <a:solidFill>
+                        <a:srgbClr val="CCCCCC"/>
+                      </a:solidFill>
+                      <a:prstDash val="solid"/>
+                    </a:lnR>
+                    <a:lnT w="6350" cap="flat" cmpd="sng" algn="ctr">
+                      <a:solidFill>
+                        <a:srgbClr val="CCCCCC"/>
+                      </a:solidFill>
+                      <a:prstDash val="solid"/>
+                    </a:lnT>
+                    <a:lnB w="6350" cap="flat" cmpd="sng" algn="ctr">
+                      <a:solidFill>
+                        <a:srgbClr val="CCCCCC"/>
+                      </a:solidFill>
+                      <a:prstDash val="solid"/>
+                    </a:lnB>
+                  </a:tcPr>
+                </a:tc>
+                <a:tc>
+                  <a:txBody>
+                    <a:bodyPr wrap="square"/>
+                    <a:lstStyle/>
+                    <a:p>
+                      <a:pPr algn="ctr"/>
+                      <a:r>
+                        <a:rPr sz="1000" b="0">
+                          <a:solidFill>
+                            <a:srgbClr val="007A6E"/>
+                          </a:solidFill>
+                          <a:latin typeface="メイリオ"/>
+                          <a:ea typeface="メイリオ"/>
+                        </a:rPr>
+                        <a:t/>
+                      </a:r>
+                    </a:p>
+                  </a:txBody>
+                  <a:tcPr anchor="ctr">
+                    <a:solidFill>
+                      <a:srgbClr val="E8F6F3"/>
+                    </a:solidFill>
+                    <a:lnL w="6350" cap="flat" cmpd="sng" algn="ctr">
+                      <a:solidFill>
+                        <a:srgbClr val="CCCCCC"/>
+                      </a:solidFill>
+                      <a:prstDash val="solid"/>
+                    </a:lnL>
+                    <a:lnR w="6350" cap="flat" cmpd="sng" algn="ctr">
+                      <a:solidFill>
+                        <a:srgbClr val="CCCCCC"/>
+                      </a:solidFill>
+                      <a:prstDash val="solid"/>
+                    </a:lnR>
+                    <a:lnT w="6350" cap="flat" cmpd="sng" algn="ctr">
+                      <a:solidFill>
+                        <a:srgbClr val="CCCCCC"/>
+                      </a:solidFill>
+                      <a:prstDash val="solid"/>
+                    </a:lnT>
+                    <a:lnB w="6350" cap="flat" cmpd="sng" algn="ctr">
+                      <a:solidFill>
+                        <a:srgbClr val="CCCCCC"/>
+                      </a:solidFill>
+                      <a:prstDash val="solid"/>
+                    </a:lnB>
+                  </a:tcPr>
+                </a:tc>
+                <a:tc>
+                  <a:txBody>
+                    <a:bodyPr wrap="square"/>
+                    <a:lstStyle/>
+                    <a:p>
+                      <a:pPr algn="l"/>
+                      <a:r>
+                        <a:rPr sz="1000" b="0">
+                          <a:solidFill>
+                            <a:srgbClr val="007A6E"/>
+                          </a:solidFill>
+                          <a:latin typeface="メイリオ"/>
+                          <a:ea typeface="メイリオ"/>
+                        </a:rPr>
+                        <a:t>　・受注管理</a:t>
+                      </a:r>
+                    </a:p>
+                  </a:txBody>
+                  <a:tcPr anchor="ctr">
+                    <a:solidFill>
+                      <a:srgbClr val="E8F6F3"/>
+                    </a:solidFill>
+                    <a:lnL w="6350" cap="flat" cmpd="sng" algn="ctr">
+                      <a:solidFill>
+                        <a:srgbClr val="CCCCCC"/>
+                      </a:solidFill>
+                      <a:prstDash val="solid"/>
+                    </a:lnL>
+                    <a:lnR w="6350" cap="flat" cmpd="sng" algn="ctr">
+                      <a:solidFill>
+                        <a:srgbClr val="CCCCCC"/>
+                      </a:solidFill>
+                      <a:prstDash val="solid"/>
+                    </a:lnR>
+                    <a:lnT w="6350" cap="flat" cmpd="sng" algn="ctr">
+                      <a:solidFill>
+                        <a:srgbClr val="CCCCCC"/>
+                      </a:solidFill>
+                      <a:prstDash val="solid"/>
+                    </a:lnT>
+                    <a:lnB w="6350" cap="flat" cmpd="sng" algn="ctr">
+                      <a:solidFill>
+                        <a:srgbClr val="CCCCCC"/>
+                      </a:solidFill>
+                      <a:prstDash val="solid"/>
+                    </a:lnB>
+                  </a:tcPr>
+                </a:tc>
+                <a:tc>
+                  <a:txBody>
+                    <a:bodyPr wrap="square"/>
+                    <a:lstStyle/>
+                    <a:p>
+                      <a:pPr algn="ctr"/>
+                      <a:r>
+                        <a:rPr sz="1000" b="0">
+                          <a:solidFill>
+                            <a:srgbClr val="007A6E"/>
+                          </a:solidFill>
+                          <a:latin typeface="メイリオ"/>
+                          <a:ea typeface="メイリオ"/>
+                        </a:rPr>
+                        <a:t/>
+                      </a:r>
+                    </a:p>
+                  </a:txBody>
+                  <a:tcPr anchor="ctr">
+                    <a:solidFill>
+                      <a:srgbClr val="E8F6F3"/>
+                    </a:solidFill>
+                    <a:lnL w="6350" cap="flat" cmpd="sng" algn="ctr">
+                      <a:solidFill>
+                        <a:srgbClr val="CCCCCC"/>
+                      </a:solidFill>
+                      <a:prstDash val="solid"/>
+                    </a:lnL>
+                    <a:lnR w="6350" cap="flat" cmpd="sng" algn="ctr">
+                      <a:solidFill>
+                        <a:srgbClr val="CCCCCC"/>
+                      </a:solidFill>
+                      <a:prstDash val="solid"/>
+                    </a:lnR>
+                    <a:lnT w="6350" cap="flat" cmpd="sng" algn="ctr">
+                      <a:solidFill>
+                        <a:srgbClr val="CCCCCC"/>
+                      </a:solidFill>
+                      <a:prstDash val="solid"/>
+                    </a:lnT>
+                    <a:lnB w="6350" cap="flat" cmpd="sng" algn="ctr">
+                      <a:solidFill>
+                        <a:srgbClr val="CCCCCC"/>
+                      </a:solidFill>
+                      <a:prstDash val="solid"/>
+                    </a:lnB>
+                  </a:tcPr>
+                </a:tc>
+                <a:tc>
+                  <a:txBody>
+                    <a:bodyPr wrap="square"/>
+                    <a:lstStyle/>
+                    <a:p>
+                      <a:pPr algn="ctr"/>
+                      <a:r>
+                        <a:rPr sz="1000" b="0">
+                          <a:solidFill>
+                            <a:srgbClr val="007A6E"/>
+                          </a:solidFill>
+                          <a:latin typeface="メイリオ"/>
+                          <a:ea typeface="メイリオ"/>
+                        </a:rPr>
+                        <a:t/>
+                      </a:r>
+                    </a:p>
+                  </a:txBody>
+                  <a:tcPr anchor="ctr">
+                    <a:solidFill>
+                      <a:srgbClr val="E8F6F3"/>
+                    </a:solidFill>
+                    <a:lnL w="6350" cap="flat" cmpd="sng" algn="ctr">
+                      <a:solidFill>
+                        <a:srgbClr val="CCCCCC"/>
+                      </a:solidFill>
+                      <a:prstDash val="solid"/>
+                    </a:lnL>
+                    <a:lnR w="6350" cap="flat" cmpd="sng" algn="ctr">
+                      <a:solidFill>
+                        <a:srgbClr val="CCCCCC"/>
+                      </a:solidFill>
+                      <a:prstDash val="solid"/>
+                    </a:lnR>
+                    <a:lnT w="6350" cap="flat" cmpd="sng" algn="ctr">
+                      <a:solidFill>
+                        <a:srgbClr val="CCCCCC"/>
+                      </a:solidFill>
+                      <a:prstDash val="solid"/>
+                    </a:lnT>
+                    <a:lnB w="6350" cap="flat" cmpd="sng" algn="ctr">
+                      <a:solidFill>
+                        <a:srgbClr val="CCCCCC"/>
+                      </a:solidFill>
+                      <a:prstDash val="solid"/>
+                    </a:lnB>
+                  </a:tcPr>
+                </a:tc>
+              </a:tr>
+              <a:tr h="346666">
+                <a:tc>
+                  <a:txBody>
+                    <a:bodyPr wrap="square"/>
+                    <a:lstStyle/>
+                    <a:p>
+                      <a:pPr algn="ctr"/>
+                      <a:r>
+                        <a:rPr sz="1000" b="0">
+                          <a:solidFill>
+                            <a:srgbClr val="007A6E"/>
+                          </a:solidFill>
+                          <a:latin typeface="メイリオ"/>
+                          <a:ea typeface="メイリオ"/>
+                        </a:rPr>
+                        <a:t/>
+                      </a:r>
+                    </a:p>
+                  </a:txBody>
+                  <a:tcPr anchor="ctr">
+                    <a:solidFill>
+                      <a:srgbClr val="E8F6F3"/>
+                    </a:solidFill>
+                    <a:lnL w="6350" cap="flat" cmpd="sng" algn="ctr">
+                      <a:solidFill>
+                        <a:srgbClr val="CCCCCC"/>
+                      </a:solidFill>
+                      <a:prstDash val="solid"/>
+                    </a:lnL>
+                    <a:lnR w="6350" cap="flat" cmpd="sng" algn="ctr">
+                      <a:solidFill>
+                        <a:srgbClr val="CCCCCC"/>
+                      </a:solidFill>
+                      <a:prstDash val="solid"/>
+                    </a:lnR>
+                    <a:lnT w="6350" cap="flat" cmpd="sng" algn="ctr">
+                      <a:solidFill>
+                        <a:srgbClr val="CCCCCC"/>
+                      </a:solidFill>
+                      <a:prstDash val="solid"/>
+                    </a:lnT>
+                    <a:lnB w="6350" cap="flat" cmpd="sng" algn="ctr">
+                      <a:solidFill>
+                        <a:srgbClr val="CCCCCC"/>
+                      </a:solidFill>
+                      <a:prstDash val="solid"/>
+                    </a:lnB>
+                  </a:tcPr>
+                </a:tc>
+                <a:tc>
+                  <a:txBody>
+                    <a:bodyPr wrap="square"/>
+                    <a:lstStyle/>
+                    <a:p>
+                      <a:pPr algn="ctr"/>
+                      <a:r>
+                        <a:rPr sz="1000" b="0">
+                          <a:solidFill>
+                            <a:srgbClr val="007A6E"/>
+                          </a:solidFill>
+                          <a:latin typeface="メイリオ"/>
+                          <a:ea typeface="メイリオ"/>
+                        </a:rPr>
+                        <a:t/>
+                      </a:r>
+                    </a:p>
+                  </a:txBody>
+                  <a:tcPr anchor="ctr">
+                    <a:solidFill>
+                      <a:srgbClr val="E8F6F3"/>
+                    </a:solidFill>
+                    <a:lnL w="6350" cap="flat" cmpd="sng" algn="ctr">
+                      <a:solidFill>
+                        <a:srgbClr val="CCCCCC"/>
+                      </a:solidFill>
+                      <a:prstDash val="solid"/>
+                    </a:lnL>
+                    <a:lnR w="6350" cap="flat" cmpd="sng" algn="ctr">
+                      <a:solidFill>
+                        <a:srgbClr val="CCCCCC"/>
+                      </a:solidFill>
+                      <a:prstDash val="solid"/>
+                    </a:lnR>
+                    <a:lnT w="6350" cap="flat" cmpd="sng" algn="ctr">
+                      <a:solidFill>
+                        <a:srgbClr val="CCCCCC"/>
+                      </a:solidFill>
+                      <a:prstDash val="solid"/>
+                    </a:lnT>
+                    <a:lnB w="6350" cap="flat" cmpd="sng" algn="ctr">
+                      <a:solidFill>
+                        <a:srgbClr val="CCCCCC"/>
+                      </a:solidFill>
+                      <a:prstDash val="solid"/>
+                    </a:lnB>
+                  </a:tcPr>
+                </a:tc>
+                <a:tc>
+                  <a:txBody>
+                    <a:bodyPr wrap="square"/>
+                    <a:lstStyle/>
+                    <a:p>
+                      <a:pPr algn="l"/>
+                      <a:r>
+                        <a:rPr sz="1000" b="0">
+                          <a:solidFill>
+                            <a:srgbClr val="007A6E"/>
+                          </a:solidFill>
+                          <a:latin typeface="メイリオ"/>
+                          <a:ea typeface="メイリオ"/>
+                        </a:rPr>
+                        <a:t>　・見積管理</a:t>
+                      </a:r>
+                    </a:p>
+                  </a:txBody>
+                  <a:tcPr anchor="ctr">
+                    <a:solidFill>
+                      <a:srgbClr val="E8F6F3"/>
+                    </a:solidFill>
+                    <a:lnL w="6350" cap="flat" cmpd="sng" algn="ctr">
+                      <a:solidFill>
+                        <a:srgbClr val="CCCCCC"/>
+                      </a:solidFill>
+                      <a:prstDash val="solid"/>
+                    </a:lnL>
+                    <a:lnR w="6350" cap="flat" cmpd="sng" algn="ctr">
+                      <a:solidFill>
+                        <a:srgbClr val="CCCCCC"/>
+                      </a:solidFill>
+                      <a:prstDash val="solid"/>
+                    </a:lnR>
+                    <a:lnT w="6350" cap="flat" cmpd="sng" algn="ctr">
+                      <a:solidFill>
+                        <a:srgbClr val="CCCCCC"/>
+                      </a:solidFill>
+                      <a:prstDash val="solid"/>
+                    </a:lnT>
+                    <a:lnB w="6350" cap="flat" cmpd="sng" algn="ctr">
+                      <a:solidFill>
+                        <a:srgbClr val="CCCCCC"/>
+                      </a:solidFill>
+                      <a:prstDash val="solid"/>
+                    </a:lnB>
+                  </a:tcPr>
+                </a:tc>
+                <a:tc>
+                  <a:txBody>
+                    <a:bodyPr wrap="square"/>
+                    <a:lstStyle/>
+                    <a:p>
+                      <a:pPr algn="ctr"/>
+                      <a:r>
+                        <a:rPr sz="1000" b="0">
+                          <a:solidFill>
+                            <a:srgbClr val="007A6E"/>
+                          </a:solidFill>
+                          <a:latin typeface="メイリオ"/>
+                          <a:ea typeface="メイリオ"/>
+                        </a:rPr>
+                        <a:t/>
+                      </a:r>
+                    </a:p>
+                  </a:txBody>
+                  <a:tcPr anchor="ctr">
+                    <a:solidFill>
+                      <a:srgbClr val="E8F6F3"/>
+                    </a:solidFill>
+                    <a:lnL w="6350" cap="flat" cmpd="sng" algn="ctr">
+                      <a:solidFill>
+                        <a:srgbClr val="CCCCCC"/>
+                      </a:solidFill>
+                      <a:prstDash val="solid"/>
+                    </a:lnL>
+                    <a:lnR w="6350" cap="flat" cmpd="sng" algn="ctr">
+                      <a:solidFill>
+                        <a:srgbClr val="CCCCCC"/>
+                      </a:solidFill>
+                      <a:prstDash val="solid"/>
+                    </a:lnR>
+                    <a:lnT w="6350" cap="flat" cmpd="sng" algn="ctr">
+                      <a:solidFill>
+                        <a:srgbClr val="CCCCCC"/>
+                      </a:solidFill>
+                      <a:prstDash val="solid"/>
+                    </a:lnT>
+                    <a:lnB w="6350" cap="flat" cmpd="sng" algn="ctr">
+                      <a:solidFill>
+                        <a:srgbClr val="CCCCCC"/>
+                      </a:solidFill>
+                      <a:prstDash val="solid"/>
+                    </a:lnB>
+                  </a:tcPr>
+                </a:tc>
+                <a:tc>
+                  <a:txBody>
+                    <a:bodyPr wrap="square"/>
+                    <a:lstStyle/>
+                    <a:p>
+                      <a:pPr algn="ctr"/>
+                      <a:r>
+                        <a:rPr sz="1000" b="0">
+                          <a:solidFill>
+                            <a:srgbClr val="007A6E"/>
+                          </a:solidFill>
+                          <a:latin typeface="メイリオ"/>
+                          <a:ea typeface="メイリオ"/>
+                        </a:rPr>
+                        <a:t/>
+                      </a:r>
+                    </a:p>
+                  </a:txBody>
+                  <a:tcPr anchor="ctr">
+                    <a:solidFill>
+                      <a:srgbClr val="E8F6F3"/>
+                    </a:solidFill>
+                    <a:lnL w="6350" cap="flat" cmpd="sng" algn="ctr">
+                      <a:solidFill>
+                        <a:srgbClr val="CCCCCC"/>
+                      </a:solidFill>
+                      <a:prstDash val="solid"/>
+                    </a:lnL>
+                    <a:lnR w="6350" cap="flat" cmpd="sng" algn="ctr">
+                      <a:solidFill>
+                        <a:srgbClr val="CCCCCC"/>
+                      </a:solidFill>
+                      <a:prstDash val="solid"/>
+                    </a:lnR>
+                    <a:lnT w="6350" cap="flat" cmpd="sng" algn="ctr">
+                      <a:solidFill>
+                        <a:srgbClr val="CCCCCC"/>
+                      </a:solidFill>
+                      <a:prstDash val="solid"/>
+                    </a:lnT>
+                    <a:lnB w="6350" cap="flat" cmpd="sng" algn="ctr">
+                      <a:solidFill>
+                        <a:srgbClr val="CCCCCC"/>
+                      </a:solidFill>
+                      <a:prstDash val="solid"/>
+                    </a:lnB>
+                  </a:tcPr>
+                </a:tc>
+              </a:tr>
+              <a:tr h="346666">
+                <a:tc>
+                  <a:txBody>
+                    <a:bodyPr wrap="square"/>
+                    <a:lstStyle/>
+                    <a:p>
+                      <a:pPr algn="ctr"/>
+                      <a:r>
+                        <a:rPr sz="1000" b="0">
+                          <a:solidFill>
+                            <a:srgbClr val="007A6E"/>
+                          </a:solidFill>
+                          <a:latin typeface="メイリオ"/>
+                          <a:ea typeface="メイリオ"/>
+                        </a:rPr>
+                        <a:t/>
+                      </a:r>
+                    </a:p>
+                  </a:txBody>
+                  <a:tcPr anchor="ctr">
+                    <a:solidFill>
+                      <a:srgbClr val="E8F6F3"/>
+                    </a:solidFill>
+                    <a:lnL w="6350" cap="flat" cmpd="sng" algn="ctr">
+                      <a:solidFill>
+                        <a:srgbClr val="CCCCCC"/>
+                      </a:solidFill>
+                      <a:prstDash val="solid"/>
+                    </a:lnL>
+                    <a:lnR w="6350" cap="flat" cmpd="sng" algn="ctr">
+                      <a:solidFill>
+                        <a:srgbClr val="CCCCCC"/>
+                      </a:solidFill>
+                      <a:prstDash val="solid"/>
+                    </a:lnR>
+                    <a:lnT w="6350" cap="flat" cmpd="sng" algn="ctr">
+                      <a:solidFill>
+                        <a:srgbClr val="CCCCCC"/>
+                      </a:solidFill>
+                      <a:prstDash val="solid"/>
+                    </a:lnT>
+                    <a:lnB w="6350" cap="flat" cmpd="sng" algn="ctr">
+                      <a:solidFill>
+                        <a:srgbClr val="CCCCCC"/>
+                      </a:solidFill>
+                      <a:prstDash val="solid"/>
+                    </a:lnB>
+                  </a:tcPr>
+                </a:tc>
+                <a:tc>
+                  <a:txBody>
+                    <a:bodyPr wrap="square"/>
+                    <a:lstStyle/>
+                    <a:p>
+                      <a:pPr algn="ctr"/>
+                      <a:r>
+                        <a:rPr sz="1000" b="0">
+                          <a:solidFill>
+                            <a:srgbClr val="007A6E"/>
+                          </a:solidFill>
+                          <a:latin typeface="メイリオ"/>
+                          <a:ea typeface="メイリオ"/>
+                        </a:rPr>
+                        <a:t/>
+                      </a:r>
+                    </a:p>
+                  </a:txBody>
+                  <a:tcPr anchor="ctr">
+                    <a:solidFill>
+                      <a:srgbClr val="E8F6F3"/>
+                    </a:solidFill>
+                    <a:lnL w="6350" cap="flat" cmpd="sng" algn="ctr">
+                      <a:solidFill>
+                        <a:srgbClr val="CCCCCC"/>
+                      </a:solidFill>
+                      <a:prstDash val="solid"/>
+                    </a:lnL>
+                    <a:lnR w="6350" cap="flat" cmpd="sng" algn="ctr">
+                      <a:solidFill>
+                        <a:srgbClr val="CCCCCC"/>
+                      </a:solidFill>
+                      <a:prstDash val="solid"/>
+                    </a:lnR>
+                    <a:lnT w="6350" cap="flat" cmpd="sng" algn="ctr">
+                      <a:solidFill>
+                        <a:srgbClr val="CCCCCC"/>
+                      </a:solidFill>
+                      <a:prstDash val="solid"/>
+                    </a:lnT>
+                    <a:lnB w="6350" cap="flat" cmpd="sng" algn="ctr">
+                      <a:solidFill>
+                        <a:srgbClr val="CCCCCC"/>
+                      </a:solidFill>
+                      <a:prstDash val="solid"/>
+                    </a:lnB>
+                  </a:tcPr>
+                </a:tc>
+                <a:tc>
+                  <a:txBody>
+                    <a:bodyPr wrap="square"/>
+                    <a:lstStyle/>
+                    <a:p>
+                      <a:pPr algn="l"/>
+                      <a:r>
+                        <a:rPr sz="1000" b="0">
+                          <a:solidFill>
+                            <a:srgbClr val="007A6E"/>
+                          </a:solidFill>
+                          <a:latin typeface="メイリオ"/>
+                          <a:ea typeface="メイリオ"/>
+                        </a:rPr>
+                        <a:t>　・マイページ、その他</a:t>
+                      </a:r>
+                    </a:p>
+                  </a:txBody>
+                  <a:tcPr anchor="ctr">
+                    <a:solidFill>
+                      <a:srgbClr val="E8F6F3"/>
+                    </a:solidFill>
+                    <a:lnL w="6350" cap="flat" cmpd="sng" algn="ctr">
+                      <a:solidFill>
+                        <a:srgbClr val="CCCCCC"/>
+                      </a:solidFill>
+                      <a:prstDash val="solid"/>
+                    </a:lnL>
+                    <a:lnR w="6350" cap="flat" cmpd="sng" algn="ctr">
+                      <a:solidFill>
+                        <a:srgbClr val="CCCCCC"/>
+                      </a:solidFill>
+                      <a:prstDash val="solid"/>
+                    </a:lnR>
+                    <a:lnT w="6350" cap="flat" cmpd="sng" algn="ctr">
+                      <a:solidFill>
+                        <a:srgbClr val="CCCCCC"/>
+                      </a:solidFill>
+                      <a:prstDash val="solid"/>
+                    </a:lnT>
+                    <a:lnB w="6350" cap="flat" cmpd="sng" algn="ctr">
+                      <a:solidFill>
+                        <a:srgbClr val="CCCCCC"/>
+                      </a:solidFill>
+                      <a:prstDash val="solid"/>
+                    </a:lnB>
+                  </a:tcPr>
+                </a:tc>
+                <a:tc>
+                  <a:txBody>
+                    <a:bodyPr wrap="square"/>
+                    <a:lstStyle/>
+                    <a:p>
+                      <a:pPr algn="ctr"/>
+                      <a:r>
+                        <a:rPr sz="1000" b="0">
+                          <a:solidFill>
+                            <a:srgbClr val="007A6E"/>
+                          </a:solidFill>
+                          <a:latin typeface="メイリオ"/>
+                          <a:ea typeface="メイリオ"/>
+                        </a:rPr>
+                        <a:t/>
+                      </a:r>
+                    </a:p>
+                  </a:txBody>
+                  <a:tcPr anchor="ctr">
+                    <a:solidFill>
+                      <a:srgbClr val="E8F6F3"/>
+                    </a:solidFill>
+                    <a:lnL w="6350" cap="flat" cmpd="sng" algn="ctr">
+                      <a:solidFill>
+                        <a:srgbClr val="CCCCCC"/>
+                      </a:solidFill>
+                      <a:prstDash val="solid"/>
+                    </a:lnL>
+                    <a:lnR w="6350" cap="flat" cmpd="sng" algn="ctr">
+                      <a:solidFill>
+                        <a:srgbClr val="CCCCCC"/>
+                      </a:solidFill>
+                      <a:prstDash val="solid"/>
+                    </a:lnR>
+                    <a:lnT w="6350" cap="flat" cmpd="sng" algn="ctr">
+                      <a:solidFill>
+                        <a:srgbClr val="CCCCCC"/>
+                      </a:solidFill>
+                      <a:prstDash val="solid"/>
+                    </a:lnT>
+                    <a:lnB w="6350" cap="flat" cmpd="sng" algn="ctr">
+                      <a:solidFill>
+                        <a:srgbClr val="CCCCCC"/>
+                      </a:solidFill>
+                      <a:prstDash val="solid"/>
+                    </a:lnB>
+                  </a:tcPr>
+                </a:tc>
+                <a:tc>
+                  <a:txBody>
+                    <a:bodyPr wrap="square"/>
+                    <a:lstStyle/>
+                    <a:p>
+                      <a:pPr algn="ctr"/>
+                      <a:r>
+                        <a:rPr sz="1000" b="0">
+                          <a:solidFill>
+                            <a:srgbClr val="007A6E"/>
+                          </a:solidFill>
+                          <a:latin typeface="メイリオ"/>
+                          <a:ea typeface="メイリオ"/>
+                        </a:rPr>
+                        <a:t/>
+                      </a:r>
+                    </a:p>
+                  </a:txBody>
+                  <a:tcPr anchor="ctr">
+                    <a:solidFill>
+                      <a:srgbClr val="E8F6F3"/>
+                    </a:solidFill>
+                    <a:lnL w="6350" cap="flat" cmpd="sng" algn="ctr">
+                      <a:solidFill>
+                        <a:srgbClr val="CCCCCC"/>
+                      </a:solidFill>
+                      <a:prstDash val="solid"/>
+                    </a:lnL>
+                    <a:lnR w="6350" cap="flat" cmpd="sng" algn="ctr">
+                      <a:solidFill>
+                        <a:srgbClr val="CCCCCC"/>
+                      </a:solidFill>
+                      <a:prstDash val="solid"/>
+                    </a:lnR>
+                    <a:lnT w="6350" cap="flat" cmpd="sng" algn="ctr">
+                      <a:solidFill>
+                        <a:srgbClr val="CCCCCC"/>
+                      </a:solidFill>
+                      <a:prstDash val="solid"/>
+                    </a:lnT>
+                    <a:lnB w="6350" cap="flat" cmpd="sng" algn="ctr">
+                      <a:solidFill>
+                        <a:srgbClr val="CCCCCC"/>
+                      </a:solidFill>
+                      <a:prstDash val="solid"/>
+                    </a:lnB>
+                  </a:tcPr>
+                </a:tc>
+              </a:tr>
+              <a:tr h="346666">
+                <a:tc>
+                  <a:txBody>
+                    <a:bodyPr wrap="square"/>
+                    <a:lstStyle/>
+                    <a:p>
+                      <a:pPr algn="ctr"/>
+                      <a:r>
+                        <a:rPr sz="1100" b="1">
+                          <a:solidFill>
+                            <a:srgbClr val="333333"/>
+                          </a:solidFill>
+                          <a:latin typeface="メイリオ"/>
+                          <a:ea typeface="メイリオ"/>
+                        </a:rPr>
+                        <a:t>4回目</a:t>
+                      </a:r>
+                    </a:p>
+                  </a:txBody>
+                  <a:tcPr anchor="ctr">
+                    <a:solidFill>
+                      <a:srgbClr val="FFFFFF"/>
+                    </a:solidFill>
+                    <a:lnL w="6350" cap="flat" cmpd="sng" algn="ctr">
+                      <a:solidFill>
+                        <a:srgbClr val="CCCCCC"/>
+                      </a:solidFill>
+                      <a:prstDash val="solid"/>
+                    </a:lnL>
+                    <a:lnR w="6350" cap="flat" cmpd="sng" algn="ctr">
+                      <a:solidFill>
+                        <a:srgbClr val="CCCCCC"/>
+                      </a:solidFill>
+                      <a:prstDash val="solid"/>
+                    </a:lnR>
+                    <a:lnT w="6350" cap="flat" cmpd="sng" algn="ctr">
+                      <a:solidFill>
+                        <a:srgbClr val="CCCCCC"/>
+                      </a:solidFill>
+                      <a:prstDash val="solid"/>
+                    </a:lnT>
+                    <a:lnB w="6350" cap="flat" cmpd="sng" algn="ctr">
+                      <a:solidFill>
+                        <a:srgbClr val="CCCCCC"/>
+                      </a:solidFill>
+                      <a:prstDash val="solid"/>
+                    </a:lnB>
+                  </a:tcPr>
+                </a:tc>
+                <a:tc>
+                  <a:txBody>
+                    <a:bodyPr wrap="square"/>
+                    <a:lstStyle/>
+                    <a:p>
+                      <a:pPr algn="ctr"/>
+                      <a:r>
+                        <a:rPr sz="1100" b="0">
+                          <a:solidFill>
+                            <a:srgbClr val="333333"/>
+                          </a:solidFill>
+                          <a:latin typeface="メイリオ"/>
+                          <a:ea typeface="メイリオ"/>
+                        </a:rPr>
                         <a:t>9/9（水）</a:t>
                       </a:r>
                     </a:p>
                   </a:txBody>
                   <a:tcPr anchor="ctr">
                     <a:solidFill>
-                      <a:srgbClr val="F0FAF8"/>
+                      <a:srgbClr val="FFFFFF"/>
                     </a:solidFill>
                     <a:lnL w="6350" cap="flat" cmpd="sng" algn="ctr">
                       <a:solidFill>
@@ -4405,20 +6303,249 @@
                           <a:latin typeface="メイリオ"/>
                           <a:ea typeface="メイリオ"/>
                         </a:rPr>
-                        <a:t>マルチサプライヤー・販売組織管理・基幹連携・</a:t>
+                        <a:t>※フロントサイト確認含む</a:t>
                       </a:r>
                     </a:p>
+                  </a:txBody>
+                  <a:tcPr anchor="ctr">
+                    <a:solidFill>
+                      <a:srgbClr val="FFFFFF"/>
+                    </a:solidFill>
+                    <a:lnL w="6350" cap="flat" cmpd="sng" algn="ctr">
+                      <a:solidFill>
+                        <a:srgbClr val="CCCCCC"/>
+                      </a:solidFill>
+                      <a:prstDash val="solid"/>
+                    </a:lnL>
+                    <a:lnR w="6350" cap="flat" cmpd="sng" algn="ctr">
+                      <a:solidFill>
+                        <a:srgbClr val="CCCCCC"/>
+                      </a:solidFill>
+                      <a:prstDash val="solid"/>
+                    </a:lnR>
+                    <a:lnT w="6350" cap="flat" cmpd="sng" algn="ctr">
+                      <a:solidFill>
+                        <a:srgbClr val="CCCCCC"/>
+                      </a:solidFill>
+                      <a:prstDash val="solid"/>
+                    </a:lnT>
+                    <a:lnB w="6350" cap="flat" cmpd="sng" algn="ctr">
+                      <a:solidFill>
+                        <a:srgbClr val="CCCCCC"/>
+                      </a:solidFill>
+                      <a:prstDash val="solid"/>
+                    </a:lnB>
+                  </a:tcPr>
+                </a:tc>
+                <a:tc>
+                  <a:txBody>
+                    <a:bodyPr wrap="square"/>
+                    <a:lstStyle/>
                     <a:p>
-                      <a:pPr algn="l"/>
+                      <a:pPr algn="ctr"/>
                       <a:r>
-                        <a:rPr sz="900" b="0">
+                        <a:rPr sz="1100" b="0">
                           <a:solidFill>
                             <a:srgbClr val="333333"/>
                           </a:solidFill>
                           <a:latin typeface="メイリオ"/>
                           <a:ea typeface="メイリオ"/>
                         </a:rPr>
-                        <a:t>フロント等、Primo標準との差分を具体化</a:t>
+                        <a:t>ECR</a:t>
+                      </a:r>
+                    </a:p>
+                  </a:txBody>
+                  <a:tcPr anchor="ctr">
+                    <a:solidFill>
+                      <a:srgbClr val="FFFFFF"/>
+                    </a:solidFill>
+                    <a:lnL w="6350" cap="flat" cmpd="sng" algn="ctr">
+                      <a:solidFill>
+                        <a:srgbClr val="CCCCCC"/>
+                      </a:solidFill>
+                      <a:prstDash val="solid"/>
+                    </a:lnL>
+                    <a:lnR w="6350" cap="flat" cmpd="sng" algn="ctr">
+                      <a:solidFill>
+                        <a:srgbClr val="CCCCCC"/>
+                      </a:solidFill>
+                      <a:prstDash val="solid"/>
+                    </a:lnR>
+                    <a:lnT w="6350" cap="flat" cmpd="sng" algn="ctr">
+                      <a:solidFill>
+                        <a:srgbClr val="CCCCCC"/>
+                      </a:solidFill>
+                      <a:prstDash val="solid"/>
+                    </a:lnT>
+                    <a:lnB w="6350" cap="flat" cmpd="sng" algn="ctr">
+                      <a:solidFill>
+                        <a:srgbClr val="CCCCCC"/>
+                      </a:solidFill>
+                      <a:prstDash val="solid"/>
+                    </a:lnB>
+                  </a:tcPr>
+                </a:tc>
+                <a:tc>
+                  <a:txBody>
+                    <a:bodyPr wrap="square"/>
+                    <a:lstStyle/>
+                    <a:p>
+                      <a:pPr algn="ctr"/>
+                      <a:r>
+                        <a:rPr sz="1100" b="0">
+                          <a:solidFill>
+                            <a:srgbClr val="333333"/>
+                          </a:solidFill>
+                          <a:latin typeface="メイリオ"/>
+                          <a:ea typeface="メイリオ"/>
+                        </a:rPr>
+                        <a:t>2h</a:t>
+                      </a:r>
+                    </a:p>
+                  </a:txBody>
+                  <a:tcPr anchor="ctr">
+                    <a:solidFill>
+                      <a:srgbClr val="FFFFFF"/>
+                    </a:solidFill>
+                    <a:lnL w="6350" cap="flat" cmpd="sng" algn="ctr">
+                      <a:solidFill>
+                        <a:srgbClr val="CCCCCC"/>
+                      </a:solidFill>
+                      <a:prstDash val="solid"/>
+                    </a:lnL>
+                    <a:lnR w="6350" cap="flat" cmpd="sng" algn="ctr">
+                      <a:solidFill>
+                        <a:srgbClr val="CCCCCC"/>
+                      </a:solidFill>
+                      <a:prstDash val="solid"/>
+                    </a:lnR>
+                    <a:lnT w="6350" cap="flat" cmpd="sng" algn="ctr">
+                      <a:solidFill>
+                        <a:srgbClr val="CCCCCC"/>
+                      </a:solidFill>
+                      <a:prstDash val="solid"/>
+                    </a:lnT>
+                    <a:lnB w="6350" cap="flat" cmpd="sng" algn="ctr">
+                      <a:solidFill>
+                        <a:srgbClr val="CCCCCC"/>
+                      </a:solidFill>
+                      <a:prstDash val="solid"/>
+                    </a:lnB>
+                  </a:tcPr>
+                </a:tc>
+              </a:tr>
+              <a:tr h="346666">
+                <a:tc>
+                  <a:txBody>
+                    <a:bodyPr wrap="square"/>
+                    <a:lstStyle/>
+                    <a:p>
+                      <a:pPr algn="ctr"/>
+                      <a:r>
+                        <a:rPr sz="1100" b="1">
+                          <a:solidFill>
+                            <a:srgbClr val="333333"/>
+                          </a:solidFill>
+                          <a:latin typeface="メイリオ"/>
+                          <a:ea typeface="メイリオ"/>
+                        </a:rPr>
+                        <a:t>5回目</a:t>
+                      </a:r>
+                    </a:p>
+                  </a:txBody>
+                  <a:tcPr anchor="ctr">
+                    <a:solidFill>
+                      <a:srgbClr val="F0FAF8"/>
+                    </a:solidFill>
+                    <a:lnL w="6350" cap="flat" cmpd="sng" algn="ctr">
+                      <a:solidFill>
+                        <a:srgbClr val="CCCCCC"/>
+                      </a:solidFill>
+                      <a:prstDash val="solid"/>
+                    </a:lnL>
+                    <a:lnR w="6350" cap="flat" cmpd="sng" algn="ctr">
+                      <a:solidFill>
+                        <a:srgbClr val="CCCCCC"/>
+                      </a:solidFill>
+                      <a:prstDash val="solid"/>
+                    </a:lnR>
+                    <a:lnT w="6350" cap="flat" cmpd="sng" algn="ctr">
+                      <a:solidFill>
+                        <a:srgbClr val="CCCCCC"/>
+                      </a:solidFill>
+                      <a:prstDash val="solid"/>
+                    </a:lnT>
+                    <a:lnB w="6350" cap="flat" cmpd="sng" algn="ctr">
+                      <a:solidFill>
+                        <a:srgbClr val="CCCCCC"/>
+                      </a:solidFill>
+                      <a:prstDash val="solid"/>
+                    </a:lnB>
+                  </a:tcPr>
+                </a:tc>
+                <a:tc>
+                  <a:txBody>
+                    <a:bodyPr wrap="square"/>
+                    <a:lstStyle/>
+                    <a:p>
+                      <a:pPr algn="ctr"/>
+                      <a:r>
+                        <a:rPr sz="1100" b="0">
+                          <a:solidFill>
+                            <a:srgbClr val="333333"/>
+                          </a:solidFill>
+                          <a:latin typeface="メイリオ"/>
+                          <a:ea typeface="メイリオ"/>
+                        </a:rPr>
+                        <a:t>9/16（水）</a:t>
+                      </a:r>
+                    </a:p>
+                  </a:txBody>
+                  <a:tcPr anchor="ctr">
+                    <a:solidFill>
+                      <a:srgbClr val="F0FAF8"/>
+                    </a:solidFill>
+                    <a:lnL w="6350" cap="flat" cmpd="sng" algn="ctr">
+                      <a:solidFill>
+                        <a:srgbClr val="CCCCCC"/>
+                      </a:solidFill>
+                      <a:prstDash val="solid"/>
+                    </a:lnL>
+                    <a:lnR w="6350" cap="flat" cmpd="sng" algn="ctr">
+                      <a:solidFill>
+                        <a:srgbClr val="CCCCCC"/>
+                      </a:solidFill>
+                      <a:prstDash val="solid"/>
+                    </a:lnR>
+                    <a:lnT w="6350" cap="flat" cmpd="sng" algn="ctr">
+                      <a:solidFill>
+                        <a:srgbClr val="CCCCCC"/>
+                      </a:solidFill>
+                      <a:prstDash val="solid"/>
+                    </a:lnT>
+                    <a:lnB w="6350" cap="flat" cmpd="sng" algn="ctr">
+                      <a:solidFill>
+                        <a:srgbClr val="CCCCCC"/>
+                      </a:solidFill>
+                      <a:prstDash val="solid"/>
+                    </a:lnB>
+                  </a:tcPr>
+                </a:tc>
+                <a:tc>
+                  <a:txBody>
+                    <a:bodyPr wrap="square"/>
+                    <a:lstStyle/>
+                    <a:p>
+                      <a:pPr algn="l"/>
+                      <a:r>
+                        <a:rPr sz="1100" b="0">
+                          <a:solidFill>
+                            <a:srgbClr val="333333"/>
+                          </a:solidFill>
+                          <a:latin typeface="メイリオ"/>
+                          <a:ea typeface="メイリオ"/>
+                        </a:rPr>
+                        <a:t>非機能要件検討</a:t>
                       </a:r>
                     </a:p>
                   </a:txBody>
@@ -4549,7 +6676,7 @@
                   </a:tcPr>
                 </a:tc>
               </a:tr>
-              <a:tr h="671428">
+              <a:tr h="346666">
                 <a:tc>
                   <a:txBody>
                     <a:bodyPr wrap="square"/>
@@ -4564,7 +6691,7 @@
                           <a:latin typeface="メイリオ"/>
                           <a:ea typeface="メイリオ"/>
                         </a:rPr>
-                        <a:t>4回目</a:t>
+                        <a:t>6回目</a:t>
                       </a:r>
                     </a:p>
                   </a:txBody>
@@ -4612,7 +6739,7 @@
                           <a:latin typeface="メイリオ"/>
                           <a:ea typeface="メイリオ"/>
                         </a:rPr>
-                        <a:t>9/16（水）</a:t>
+                        <a:t>9/24（木）</a:t>
                       </a:r>
                     </a:p>
                   </a:txBody>
@@ -4653,27 +6780,14 @@
                     <a:p>
                       <a:pPr algn="l"/>
                       <a:r>
-                        <a:rPr sz="900" b="0">
+                        <a:rPr sz="1100" b="0">
                           <a:solidFill>
                             <a:srgbClr val="333333"/>
                           </a:solidFill>
                           <a:latin typeface="メイリオ"/>
                           <a:ea typeface="メイリオ"/>
                         </a:rPr>
-                        <a:t>非機能要件検討</a:t>
-                      </a:r>
-                    </a:p>
-                    <a:p>
-                      <a:pPr algn="l"/>
-                      <a:r>
-                        <a:rPr sz="900" b="0">
-                          <a:solidFill>
-                            <a:srgbClr val="333333"/>
-                          </a:solidFill>
-                          <a:latin typeface="メイリオ"/>
-                          <a:ea typeface="メイリオ"/>
-                        </a:rPr>
-                        <a:t>性能・セキュリティ・運用・データ移行等</a:t>
+                        <a:t>要件定義まとめ</a:t>
                       </a:r>
                     </a:p>
                   </a:txBody>
@@ -4804,7 +6918,7 @@
                   </a:tcPr>
                 </a:tc>
               </a:tr>
-              <a:tr h="671428">
+              <a:tr h="346676">
                 <a:tc>
                   <a:txBody>
                     <a:bodyPr wrap="square"/>
@@ -4819,7 +6933,7 @@
                           <a:latin typeface="メイリオ"/>
                           <a:ea typeface="メイリオ"/>
                         </a:rPr>
-                        <a:t>5回目</a:t>
+                        <a:t>7回目</a:t>
                       </a:r>
                     </a:p>
                   </a:txBody>
@@ -4867,7 +6981,7 @@
                           <a:latin typeface="メイリオ"/>
                           <a:ea typeface="メイリオ"/>
                         </a:rPr>
-                        <a:t>9/24（木）</a:t>
+                        <a:t>9/29（火）</a:t>
                       </a:r>
                     </a:p>
                   </a:txBody>
@@ -4908,27 +7022,14 @@
                     <a:p>
                       <a:pPr algn="l"/>
                       <a:r>
-                        <a:rPr sz="900" b="0">
+                        <a:rPr sz="1100" b="0">
                           <a:solidFill>
                             <a:srgbClr val="333333"/>
                           </a:solidFill>
                           <a:latin typeface="メイリオ"/>
                           <a:ea typeface="メイリオ"/>
                         </a:rPr>
-                        <a:t>要件定義まとめ</a:t>
-                      </a:r>
-                    </a:p>
-                    <a:p>
-                      <a:pPr algn="l"/>
-                      <a:r>
-                        <a:rPr sz="900" b="0">
-                          <a:solidFill>
-                            <a:srgbClr val="333333"/>
-                          </a:solidFill>
-                          <a:latin typeface="メイリオ"/>
-                          <a:ea typeface="メイリオ"/>
-                        </a:rPr>
-                        <a:t>要件定義書（案）レビュー</a:t>
+                        <a:t>納品・正式見積り提示／ご検収</a:t>
                       </a:r>
                     </a:p>
                   </a:txBody>
@@ -5059,248 +7160,6 @@
                   </a:tcPr>
                 </a:tc>
               </a:tr>
-              <a:tr h="671432">
-                <a:tc>
-                  <a:txBody>
-                    <a:bodyPr wrap="square"/>
-                    <a:lstStyle/>
-                    <a:p>
-                      <a:pPr algn="ctr"/>
-                      <a:r>
-                        <a:rPr sz="1100" b="1">
-                          <a:solidFill>
-                            <a:srgbClr val="333333"/>
-                          </a:solidFill>
-                          <a:latin typeface="メイリオ"/>
-                          <a:ea typeface="メイリオ"/>
-                        </a:rPr>
-                        <a:t>6回目</a:t>
-                      </a:r>
-                    </a:p>
-                  </a:txBody>
-                  <a:tcPr anchor="ctr">
-                    <a:solidFill>
-                      <a:srgbClr val="FFFFFF"/>
-                    </a:solidFill>
-                    <a:lnL w="6350" cap="flat" cmpd="sng" algn="ctr">
-                      <a:solidFill>
-                        <a:srgbClr val="CCCCCC"/>
-                      </a:solidFill>
-                      <a:prstDash val="solid"/>
-                    </a:lnL>
-                    <a:lnR w="6350" cap="flat" cmpd="sng" algn="ctr">
-                      <a:solidFill>
-                        <a:srgbClr val="CCCCCC"/>
-                      </a:solidFill>
-                      <a:prstDash val="solid"/>
-                    </a:lnR>
-                    <a:lnT w="6350" cap="flat" cmpd="sng" algn="ctr">
-                      <a:solidFill>
-                        <a:srgbClr val="CCCCCC"/>
-                      </a:solidFill>
-                      <a:prstDash val="solid"/>
-                    </a:lnT>
-                    <a:lnB w="6350" cap="flat" cmpd="sng" algn="ctr">
-                      <a:solidFill>
-                        <a:srgbClr val="CCCCCC"/>
-                      </a:solidFill>
-                      <a:prstDash val="solid"/>
-                    </a:lnB>
-                  </a:tcPr>
-                </a:tc>
-                <a:tc>
-                  <a:txBody>
-                    <a:bodyPr wrap="square"/>
-                    <a:lstStyle/>
-                    <a:p>
-                      <a:pPr algn="ctr"/>
-                      <a:r>
-                        <a:rPr sz="1100" b="0">
-                          <a:solidFill>
-                            <a:srgbClr val="333333"/>
-                          </a:solidFill>
-                          <a:latin typeface="メイリオ"/>
-                          <a:ea typeface="メイリオ"/>
-                        </a:rPr>
-                        <a:t>9/29（火）</a:t>
-                      </a:r>
-                    </a:p>
-                  </a:txBody>
-                  <a:tcPr anchor="ctr">
-                    <a:solidFill>
-                      <a:srgbClr val="FFFFFF"/>
-                    </a:solidFill>
-                    <a:lnL w="6350" cap="flat" cmpd="sng" algn="ctr">
-                      <a:solidFill>
-                        <a:srgbClr val="CCCCCC"/>
-                      </a:solidFill>
-                      <a:prstDash val="solid"/>
-                    </a:lnL>
-                    <a:lnR w="6350" cap="flat" cmpd="sng" algn="ctr">
-                      <a:solidFill>
-                        <a:srgbClr val="CCCCCC"/>
-                      </a:solidFill>
-                      <a:prstDash val="solid"/>
-                    </a:lnR>
-                    <a:lnT w="6350" cap="flat" cmpd="sng" algn="ctr">
-                      <a:solidFill>
-                        <a:srgbClr val="CCCCCC"/>
-                      </a:solidFill>
-                      <a:prstDash val="solid"/>
-                    </a:lnT>
-                    <a:lnB w="6350" cap="flat" cmpd="sng" algn="ctr">
-                      <a:solidFill>
-                        <a:srgbClr val="CCCCCC"/>
-                      </a:solidFill>
-                      <a:prstDash val="solid"/>
-                    </a:lnB>
-                  </a:tcPr>
-                </a:tc>
-                <a:tc>
-                  <a:txBody>
-                    <a:bodyPr wrap="square"/>
-                    <a:lstStyle/>
-                    <a:p>
-                      <a:pPr algn="l"/>
-                      <a:r>
-                        <a:rPr sz="1000" b="0">
-                          <a:solidFill>
-                            <a:srgbClr val="333333"/>
-                          </a:solidFill>
-                          <a:latin typeface="メイリオ"/>
-                          <a:ea typeface="メイリオ"/>
-                        </a:rPr>
-                        <a:t>納品・正式見積り提示／ご検収</a:t>
-                      </a:r>
-                    </a:p>
-                  </a:txBody>
-                  <a:tcPr anchor="ctr">
-                    <a:solidFill>
-                      <a:srgbClr val="FFFFFF"/>
-                    </a:solidFill>
-                    <a:lnL w="6350" cap="flat" cmpd="sng" algn="ctr">
-                      <a:solidFill>
-                        <a:srgbClr val="CCCCCC"/>
-                      </a:solidFill>
-                      <a:prstDash val="solid"/>
-                    </a:lnL>
-                    <a:lnR w="6350" cap="flat" cmpd="sng" algn="ctr">
-                      <a:solidFill>
-                        <a:srgbClr val="CCCCCC"/>
-                      </a:solidFill>
-                      <a:prstDash val="solid"/>
-                    </a:lnR>
-                    <a:lnT w="6350" cap="flat" cmpd="sng" algn="ctr">
-                      <a:solidFill>
-                        <a:srgbClr val="CCCCCC"/>
-                      </a:solidFill>
-                      <a:prstDash val="solid"/>
-                    </a:lnT>
-                    <a:lnB w="6350" cap="flat" cmpd="sng" algn="ctr">
-                      <a:solidFill>
-                        <a:srgbClr val="CCCCCC"/>
-                      </a:solidFill>
-                      <a:prstDash val="solid"/>
-                    </a:lnB>
-                  </a:tcPr>
-                </a:tc>
-                <a:tc>
-                  <a:txBody>
-                    <a:bodyPr wrap="square"/>
-                    <a:lstStyle/>
-                    <a:p>
-                      <a:pPr algn="ctr"/>
-                      <a:r>
-                        <a:rPr sz="1100" b="0">
-                          <a:solidFill>
-                            <a:srgbClr val="333333"/>
-                          </a:solidFill>
-                          <a:latin typeface="メイリオ"/>
-                          <a:ea typeface="メイリオ"/>
-                        </a:rPr>
-                        <a:t>ECR</a:t>
-                      </a:r>
-                    </a:p>
-                  </a:txBody>
-                  <a:tcPr anchor="ctr">
-                    <a:solidFill>
-                      <a:srgbClr val="FFFFFF"/>
-                    </a:solidFill>
-                    <a:lnL w="6350" cap="flat" cmpd="sng" algn="ctr">
-                      <a:solidFill>
-                        <a:srgbClr val="CCCCCC"/>
-                      </a:solidFill>
-                      <a:prstDash val="solid"/>
-                    </a:lnL>
-                    <a:lnR w="6350" cap="flat" cmpd="sng" algn="ctr">
-                      <a:solidFill>
-                        <a:srgbClr val="CCCCCC"/>
-                      </a:solidFill>
-                      <a:prstDash val="solid"/>
-                    </a:lnR>
-                    <a:lnT w="6350" cap="flat" cmpd="sng" algn="ctr">
-                      <a:solidFill>
-                        <a:srgbClr val="CCCCCC"/>
-                      </a:solidFill>
-                      <a:prstDash val="solid"/>
-                    </a:lnT>
-                    <a:lnB w="6350" cap="flat" cmpd="sng" algn="ctr">
-                      <a:solidFill>
-                        <a:srgbClr val="CCCCCC"/>
-                      </a:solidFill>
-                      <a:prstDash val="solid"/>
-                    </a:lnB>
-                  </a:tcPr>
-                </a:tc>
-                <a:tc>
-                  <a:txBody>
-                    <a:bodyPr wrap="square"/>
-                    <a:lstStyle/>
-                    <a:p>
-                      <a:pPr algn="ctr"/>
-                      <a:r>
-                        <a:rPr sz="1100" b="0">
-                          <a:solidFill>
-                            <a:srgbClr val="333333"/>
-                          </a:solidFill>
-                          <a:latin typeface="メイリオ"/>
-                          <a:ea typeface="メイリオ"/>
-                        </a:rPr>
-                        <a:t>2h</a:t>
-                      </a:r>
-                    </a:p>
-                  </a:txBody>
-                  <a:tcPr anchor="ctr">
-                    <a:solidFill>
-                      <a:srgbClr val="FFFFFF"/>
-                    </a:solidFill>
-                    <a:lnL w="6350" cap="flat" cmpd="sng" algn="ctr">
-                      <a:solidFill>
-                        <a:srgbClr val="CCCCCC"/>
-                      </a:solidFill>
-                      <a:prstDash val="solid"/>
-                    </a:lnL>
-                    <a:lnR w="6350" cap="flat" cmpd="sng" algn="ctr">
-                      <a:solidFill>
-                        <a:srgbClr val="CCCCCC"/>
-                      </a:solidFill>
-                      <a:prstDash val="solid"/>
-                    </a:lnR>
-                    <a:lnT w="6350" cap="flat" cmpd="sng" algn="ctr">
-                      <a:solidFill>
-                        <a:srgbClr val="CCCCCC"/>
-                      </a:solidFill>
-                      <a:prstDash val="solid"/>
-                    </a:lnT>
-                    <a:lnB w="6350" cap="flat" cmpd="sng" algn="ctr">
-                      <a:solidFill>
-                        <a:srgbClr val="CCCCCC"/>
-                      </a:solidFill>
-                      <a:prstDash val="solid"/>
-                    </a:lnB>
-                  </a:tcPr>
-                </a:tc>
-              </a:tr>
             </a:tbl>
           </a:graphicData>
         </a:graphic>
@@ -5313,8 +7172,8 @@
         </p:nvSpPr>
         <p:spPr>
           <a:xfrm>
-            <a:off x="400000" y="5850000"/>
-            <a:ext cx="9100000" cy="800000"/>
+            <a:off x="350000" y="6300000"/>
+            <a:ext cx="9200000" cy="400000"/>
           </a:xfrm>
           <a:prstGeom prst="rect">
             <a:avLst/>
@@ -5327,6 +7186,7 @@
           </a:bodyPr>
           <a:lstStyle/>
           <a:p>
+            <a:pPr algn="l"/>
             <a:r>
               <a:rPr sz="900" b="0">
                 <a:solidFill>
@@ -5336,30 +7196,6 @@
                 <a:ea typeface="メイリオ"/>
               </a:rPr>
               <a:t>※開催日は仮置きです。貴社ご都合に合わせて調整いたします。</a:t>
-            </a:r>
-          </a:p>
-          <a:p>
-            <a:r>
-              <a:rPr sz="900" b="0">
-                <a:solidFill>
-                  <a:srgbClr val="666666"/>
-                </a:solidFill>
-                <a:latin typeface="メイリオ"/>
-                <a:ea typeface="メイリオ"/>
-              </a:rPr>
-              <a:t>※ご要件の個別ヒアリング回は設けず、キックオフですり合わせたうえで、業務フロー／機能詳細で具体化します。</a:t>
-            </a:r>
-          </a:p>
-          <a:p>
-            <a:r>
-              <a:rPr sz="900" b="0">
-                <a:solidFill>
-                  <a:srgbClr val="666666"/>
-                </a:solidFill>
-                <a:latin typeface="メイリオ"/>
-                <a:ea typeface="メイリオ"/>
-              </a:rPr>
-              <a:t>※必要に応じ、業務フロー／機能詳細は論点量に応じて分割・追加開催も検討します。</a:t>
             </a:r>
           </a:p>
         </p:txBody>
@@ -5434,7 +7270,7 @@
         <p:spPr>
           <a:xfrm>
             <a:off x="480000" y="200000"/>
-            <a:ext cx="8500000" cy="450000"/>
+            <a:ext cx="9000000" cy="450000"/>
           </a:xfrm>
           <a:prstGeom prst="rect">
             <a:avLst/>
@@ -5456,7 +7292,7 @@
                 <a:latin typeface="メイリオ"/>
                 <a:ea typeface="メイリオ"/>
               </a:rPr>
-              <a:t>業務フロー／機能詳細で扱う論点（例）</a:t>
+              <a:t>業務フロー検討｜アジェンダ詳細</a:t>
             </a:r>
           </a:p>
         </p:txBody>
@@ -5470,7 +7306,7 @@
         <p:spPr>
           <a:xfrm>
             <a:off x="480000" y="680000"/>
-            <a:ext cx="9000000" cy="300000"/>
+            <a:ext cx="9000000" cy="280000"/>
           </a:xfrm>
           <a:prstGeom prst="rect">
             <a:avLst/>
@@ -5492,7 +7328,7 @@
                 <a:latin typeface="メイリオ"/>
                 <a:ea typeface="メイリオ"/>
               </a:rPr>
-              <a:t>ご提示済みのご要件を、サプライヤー管理・販売組織などの機能粒度まで落として検討します</a:t>
+              <a:t>管理機能単位で現行業務〜あるべき姿を整理し、後続のFit&amp;Gapにつなげます</a:t>
             </a:r>
           </a:p>
         </p:txBody>
@@ -5505,8 +7341,8 @@
         </p:nvSpPr>
         <p:spPr>
           <a:xfrm>
-            <a:off x="400000" y="1100000"/>
-            <a:ext cx="4400000" cy="4800000"/>
+            <a:off x="350000" y="1050000"/>
+            <a:ext cx="4500000" cy="5200000"/>
           </a:xfrm>
           <a:prstGeom prst="roundRect">
             <a:avLst/>
@@ -5544,14 +7380,205 @@
       </p:sp>
       <p:sp>
         <p:nvSpPr>
-          <p:cNvPr id="6" name="Rounded Rectangle 5"/>
+          <p:cNvPr id="6" name="TextBox 5"/>
+          <p:cNvSpPr txBox="1"/>
+          <p:nvPr/>
+        </p:nvSpPr>
+        <p:spPr>
+          <a:xfrm>
+            <a:off x="500000" y="1180000"/>
+            <a:ext cx="4200000" cy="4900000"/>
+          </a:xfrm>
+          <a:prstGeom prst="rect">
+            <a:avLst/>
+          </a:prstGeom>
+          <a:noFill/>
+        </p:spPr>
+        <p:txBody>
+          <a:bodyPr wrap="square">
+            <a:spAutoFit/>
+          </a:bodyPr>
+          <a:lstStyle/>
+          <a:p>
+            <a:r>
+              <a:rPr sz="1400" b="1">
+                <a:solidFill>
+                  <a:srgbClr val="007A6E"/>
+                </a:solidFill>
+                <a:latin typeface="メイリオ"/>
+                <a:ea typeface="メイリオ"/>
+              </a:rPr>
+              <a:t>2回目｜8/24（月）　約2h</a:t>
+            </a:r>
+          </a:p>
+          <a:p>
+            <a:r>
+              <a:rPr sz="1300" b="1">
+                <a:solidFill>
+                  <a:srgbClr val="333333"/>
+                </a:solidFill>
+                <a:latin typeface="メイリオ"/>
+                <a:ea typeface="メイリオ"/>
+              </a:rPr>
+              <a:t>業務フロー検討（1回目）</a:t>
+            </a:r>
+          </a:p>
+          <a:p>
+            <a:r>
+              <a:rPr sz="600" b="0">
+                <a:solidFill>
+                  <a:srgbClr val="333333"/>
+                </a:solidFill>
+                <a:latin typeface="メイリオ"/>
+                <a:ea typeface="メイリオ"/>
+              </a:rPr>
+              <a:t/>
+            </a:r>
+          </a:p>
+          <a:p>
+            <a:r>
+              <a:rPr sz="1200" b="1">
+                <a:solidFill>
+                  <a:srgbClr val="007A6E"/>
+                </a:solidFill>
+                <a:latin typeface="メイリオ"/>
+                <a:ea typeface="メイリオ"/>
+              </a:rPr>
+              <a:t>■ サプライヤー管理</a:t>
+            </a:r>
+          </a:p>
+          <a:p>
+            <a:r>
+              <a:rPr sz="1000" b="0">
+                <a:solidFill>
+                  <a:srgbClr val="333333"/>
+                </a:solidFill>
+                <a:latin typeface="メイリオ"/>
+                <a:ea typeface="メイリオ"/>
+              </a:rPr>
+              <a:t>　商流構成、自社／他社供給、供給元と販売の関係</a:t>
+            </a:r>
+          </a:p>
+          <a:p>
+            <a:r>
+              <a:rPr sz="600" b="0">
+                <a:solidFill>
+                  <a:srgbClr val="333333"/>
+                </a:solidFill>
+                <a:latin typeface="メイリオ"/>
+                <a:ea typeface="メイリオ"/>
+              </a:rPr>
+              <a:t/>
+            </a:r>
+          </a:p>
+          <a:p>
+            <a:r>
+              <a:rPr sz="1200" b="1">
+                <a:solidFill>
+                  <a:srgbClr val="007A6E"/>
+                </a:solidFill>
+                <a:latin typeface="メイリオ"/>
+                <a:ea typeface="メイリオ"/>
+              </a:rPr>
+              <a:t>■ 商品管理</a:t>
+            </a:r>
+          </a:p>
+          <a:p>
+            <a:r>
+              <a:rPr sz="1000" b="0">
+                <a:solidFill>
+                  <a:srgbClr val="333333"/>
+                </a:solidFill>
+                <a:latin typeface="メイリオ"/>
+                <a:ea typeface="メイリオ"/>
+              </a:rPr>
+              <a:t>　商品マスタ、バリエーション、展示会商品、基幹からの商品登録</a:t>
+            </a:r>
+          </a:p>
+          <a:p>
+            <a:r>
+              <a:rPr sz="600" b="0">
+                <a:solidFill>
+                  <a:srgbClr val="333333"/>
+                </a:solidFill>
+                <a:latin typeface="メイリオ"/>
+                <a:ea typeface="メイリオ"/>
+              </a:rPr>
+              <a:t/>
+            </a:r>
+          </a:p>
+          <a:p>
+            <a:r>
+              <a:rPr sz="1200" b="1">
+                <a:solidFill>
+                  <a:srgbClr val="007A6E"/>
+                </a:solidFill>
+                <a:latin typeface="メイリオ"/>
+                <a:ea typeface="メイリオ"/>
+              </a:rPr>
+              <a:t>■ 在庫管理</a:t>
+            </a:r>
+          </a:p>
+          <a:p>
+            <a:r>
+              <a:rPr sz="1000" b="0">
+                <a:solidFill>
+                  <a:srgbClr val="333333"/>
+                </a:solidFill>
+                <a:latin typeface="メイリオ"/>
+                <a:ea typeface="メイリオ"/>
+              </a:rPr>
+              <a:t>　フリー在庫／取引先別在庫、入荷予定、引当ルール</a:t>
+            </a:r>
+          </a:p>
+          <a:p>
+            <a:r>
+              <a:rPr sz="600" b="0">
+                <a:solidFill>
+                  <a:srgbClr val="333333"/>
+                </a:solidFill>
+                <a:latin typeface="メイリオ"/>
+                <a:ea typeface="メイリオ"/>
+              </a:rPr>
+              <a:t/>
+            </a:r>
+          </a:p>
+          <a:p>
+            <a:r>
+              <a:rPr sz="1200" b="1">
+                <a:solidFill>
+                  <a:srgbClr val="007A6E"/>
+                </a:solidFill>
+                <a:latin typeface="メイリオ"/>
+                <a:ea typeface="メイリオ"/>
+              </a:rPr>
+              <a:t>■ 会員管理</a:t>
+            </a:r>
+          </a:p>
+          <a:p>
+            <a:r>
+              <a:rPr sz="1000" b="0">
+                <a:solidFill>
+                  <a:srgbClr val="333333"/>
+                </a:solidFill>
+                <a:latin typeface="メイリオ"/>
+                <a:ea typeface="メイリオ"/>
+              </a:rPr>
+              <a:t>　取引先・販売組織階層、直販／代理店配下、権限</a:t>
+            </a:r>
+          </a:p>
+        </p:txBody>
+      </p:sp>
+      <p:sp>
+        <p:nvSpPr>
+          <p:cNvPr id="7" name="Rounded Rectangle 6"/>
           <p:cNvSpPr/>
           <p:nvPr/>
         </p:nvSpPr>
         <p:spPr>
           <a:xfrm>
-            <a:off x="5100000" y="1100000"/>
-            <a:ext cx="4400000" cy="4800000"/>
+            <a:off x="5050000" y="1050000"/>
+            <a:ext cx="4500000" cy="5200000"/>
           </a:xfrm>
           <a:prstGeom prst="roundRect">
             <a:avLst/>
@@ -5589,14 +7616,14 @@
       </p:sp>
       <p:sp>
         <p:nvSpPr>
-          <p:cNvPr id="7" name="TextBox 6"/>
+          <p:cNvPr id="8" name="TextBox 7"/>
           <p:cNvSpPr txBox="1"/>
           <p:nvPr/>
         </p:nvSpPr>
         <p:spPr>
           <a:xfrm>
-            <a:off x="550000" y="1250000"/>
-            <a:ext cx="4100000" cy="4500000"/>
+            <a:off x="5200000" y="1180000"/>
+            <a:ext cx="4200000" cy="4900000"/>
           </a:xfrm>
           <a:prstGeom prst="rect">
             <a:avLst/>
@@ -5617,210 +7644,127 @@
                 <a:latin typeface="メイリオ"/>
                 <a:ea typeface="メイリオ"/>
               </a:rPr>
-              <a:t>2回目｜業務フロー検討</a:t>
-            </a:r>
-          </a:p>
-          <a:p>
-            <a:r>
-              <a:rPr sz="1100" b="0">
+              <a:t>3回目｜8/27（木）　約2h</a:t>
+            </a:r>
+          </a:p>
+          <a:p>
+            <a:r>
+              <a:rPr sz="1300" b="1">
                 <a:solidFill>
                   <a:srgbClr val="333333"/>
                 </a:solidFill>
                 <a:latin typeface="メイリオ"/>
                 <a:ea typeface="メイリオ"/>
               </a:rPr>
-              <a:t>・商流・サプライヤー構成（自社／他社供給）</a:t>
-            </a:r>
-          </a:p>
-          <a:p>
-            <a:r>
-              <a:rPr sz="1100" b="0">
+              <a:t>業務フロー検討（2回目）</a:t>
+            </a:r>
+          </a:p>
+          <a:p>
+            <a:r>
+              <a:rPr sz="600" b="0">
                 <a:solidFill>
                   <a:srgbClr val="333333"/>
                 </a:solidFill>
                 <a:latin typeface="メイリオ"/>
                 <a:ea typeface="メイリオ"/>
               </a:rPr>
-              <a:t>・販売組織・取引先階層（直販／代理店配下）</a:t>
-            </a:r>
-          </a:p>
-          <a:p>
-            <a:r>
-              <a:rPr sz="1100" b="0">
+              <a:t/>
+            </a:r>
+          </a:p>
+          <a:p>
+            <a:r>
+              <a:rPr sz="1200" b="1">
+                <a:solidFill>
+                  <a:srgbClr val="007A6E"/>
+                </a:solidFill>
+                <a:latin typeface="メイリオ"/>
+                <a:ea typeface="メイリオ"/>
+              </a:rPr>
+              <a:t>■ 受注管理</a:t>
+            </a:r>
+          </a:p>
+          <a:p>
+            <a:r>
+              <a:rPr sz="1000" b="0">
                 <a:solidFill>
                   <a:srgbClr val="333333"/>
                 </a:solidFill>
                 <a:latin typeface="メイリオ"/>
                 <a:ea typeface="メイリオ"/>
               </a:rPr>
-              <a:t>・在庫モデル（フリー在庫／取引先別在庫）</a:t>
-            </a:r>
-          </a:p>
-          <a:p>
-            <a:r>
-              <a:rPr sz="1100" b="0">
+              <a:t>　注文〜承認〜納期回答〜出荷、与信確認、キャンセル／返品</a:t>
+            </a:r>
+          </a:p>
+          <a:p>
+            <a:r>
+              <a:rPr sz="600" b="0">
                 <a:solidFill>
                   <a:srgbClr val="333333"/>
                 </a:solidFill>
                 <a:latin typeface="メイリオ"/>
                 <a:ea typeface="メイリオ"/>
               </a:rPr>
-              <a:t>・引当ルール・入荷予定の扱い</a:t>
-            </a:r>
-          </a:p>
-          <a:p>
-            <a:r>
-              <a:rPr sz="1100" b="0">
+              <a:t/>
+            </a:r>
+          </a:p>
+          <a:p>
+            <a:r>
+              <a:rPr sz="1200" b="1">
+                <a:solidFill>
+                  <a:srgbClr val="007A6E"/>
+                </a:solidFill>
+                <a:latin typeface="メイリオ"/>
+                <a:ea typeface="メイリオ"/>
+              </a:rPr>
+              <a:t>■ 見積管理</a:t>
+            </a:r>
+          </a:p>
+          <a:p>
+            <a:r>
+              <a:rPr sz="1000" b="0">
                 <a:solidFill>
                   <a:srgbClr val="333333"/>
                 </a:solidFill>
                 <a:latin typeface="メイリオ"/>
                 <a:ea typeface="メイリオ"/>
               </a:rPr>
-              <a:t>・注文〜承認〜納期回答〜出荷の流れ</a:t>
-            </a:r>
-          </a:p>
-          <a:p>
-            <a:r>
-              <a:rPr sz="1100" b="0">
+              <a:t>　見積作成〜受注化、売価・掛け率・送料の扱い</a:t>
+            </a:r>
+          </a:p>
+          <a:p>
+            <a:r>
+              <a:rPr sz="600" b="0">
                 <a:solidFill>
                   <a:srgbClr val="333333"/>
                 </a:solidFill>
                 <a:latin typeface="メイリオ"/>
                 <a:ea typeface="メイリオ"/>
               </a:rPr>
-              <a:t>・売価・掛け率・送料・与信の業務ルール</a:t>
-            </a:r>
-          </a:p>
-          <a:p>
-            <a:r>
-              <a:rPr sz="1100" b="0">
+              <a:t/>
+            </a:r>
+          </a:p>
+          <a:p>
+            <a:r>
+              <a:rPr sz="1200" b="1">
+                <a:solidFill>
+                  <a:srgbClr val="007A6E"/>
+                </a:solidFill>
+                <a:latin typeface="メイリオ"/>
+                <a:ea typeface="メイリオ"/>
+              </a:rPr>
+              <a:t>■ マイページ、その他</a:t>
+            </a:r>
+          </a:p>
+          <a:p>
+            <a:r>
+              <a:rPr sz="1000" b="0">
                 <a:solidFill>
                   <a:srgbClr val="333333"/>
                 </a:solidFill>
                 <a:latin typeface="メイリオ"/>
                 <a:ea typeface="メイリオ"/>
               </a:rPr>
-              <a:t>・基幹との役割分担（どこまでをECで行うか）</a:t>
-            </a:r>
-          </a:p>
-        </p:txBody>
-      </p:sp>
-      <p:sp>
-        <p:nvSpPr>
-          <p:cNvPr id="8" name="TextBox 7"/>
-          <p:cNvSpPr txBox="1"/>
-          <p:nvPr/>
-        </p:nvSpPr>
-        <p:spPr>
-          <a:xfrm>
-            <a:off x="5250000" y="1250000"/>
-            <a:ext cx="4100000" cy="4500000"/>
-          </a:xfrm>
-          <a:prstGeom prst="rect">
-            <a:avLst/>
-          </a:prstGeom>
-          <a:noFill/>
-        </p:spPr>
-        <p:txBody>
-          <a:bodyPr wrap="square">
-            <a:spAutoFit/>
-          </a:bodyPr>
-          <a:lstStyle/>
-          <a:p>
-            <a:r>
-              <a:rPr sz="1400" b="1">
-                <a:solidFill>
-                  <a:srgbClr val="007A6E"/>
-                </a:solidFill>
-                <a:latin typeface="メイリオ"/>
-                <a:ea typeface="メイリオ"/>
-              </a:rPr>
-              <a:t>3回目｜機能詳細検討（Fit&amp;Gap）</a:t>
-            </a:r>
-          </a:p>
-          <a:p>
-            <a:r>
-              <a:rPr sz="1100" b="0">
-                <a:solidFill>
-                  <a:srgbClr val="333333"/>
-                </a:solidFill>
-                <a:latin typeface="メイリオ"/>
-                <a:ea typeface="メイリオ"/>
-              </a:rPr>
-              <a:t>・マルチサプライヤー機能の適用方針</a:t>
-            </a:r>
-          </a:p>
-          <a:p>
-            <a:r>
-              <a:rPr sz="1100" b="0">
-                <a:solidFill>
-                  <a:srgbClr val="333333"/>
-                </a:solidFill>
-                <a:latin typeface="メイリオ"/>
-                <a:ea typeface="メイリオ"/>
-              </a:rPr>
-              <a:t>・販売組織管理・ランク／掛け率設定</a:t>
-            </a:r>
-          </a:p>
-          <a:p>
-            <a:r>
-              <a:rPr sz="1100" b="0">
-                <a:solidFill>
-                  <a:srgbClr val="333333"/>
-                </a:solidFill>
-                <a:latin typeface="メイリオ"/>
-                <a:ea typeface="メイリオ"/>
-              </a:rPr>
-              <a:t>・注文ステータス・与信確認フロー</a:t>
-            </a:r>
-          </a:p>
-          <a:p>
-            <a:r>
-              <a:rPr sz="1100" b="0">
-                <a:solidFill>
-                  <a:srgbClr val="333333"/>
-                </a:solidFill>
-                <a:latin typeface="メイリオ"/>
-                <a:ea typeface="メイリオ"/>
-              </a:rPr>
-              <a:t>・基幹連携（商品／在庫／受注／出荷）</a:t>
-            </a:r>
-          </a:p>
-          <a:p>
-            <a:r>
-              <a:rPr sz="1100" b="0">
-                <a:solidFill>
-                  <a:srgbClr val="333333"/>
-                </a:solidFill>
-                <a:latin typeface="メイリオ"/>
-                <a:ea typeface="メイリオ"/>
-              </a:rPr>
-              <a:t>・EDI・代理注文・キャンセル／返品</a:t>
-            </a:r>
-          </a:p>
-          <a:p>
-            <a:r>
-              <a:rPr sz="1100" b="0">
-                <a:solidFill>
-                  <a:srgbClr val="333333"/>
-                </a:solidFill>
-                <a:latin typeface="メイリオ"/>
-                <a:ea typeface="メイリオ"/>
-              </a:rPr>
-              <a:t>・バリエーション一括注文・展示会注文</a:t>
-            </a:r>
-          </a:p>
-          <a:p>
-            <a:r>
-              <a:rPr sz="1100" b="0">
-                <a:solidFill>
-                  <a:srgbClr val="333333"/>
-                </a:solidFill>
-                <a:latin typeface="メイリオ"/>
-                <a:ea typeface="メイリオ"/>
-              </a:rPr>
-              <a:t>・フロントデザイン／商品データDL等</a:t>
+              <a:t>　注文履歴、進捗確認、帳票、通知、運用まわり</a:t>
             </a:r>
           </a:p>
         </p:txBody>
@@ -5895,7 +7839,7 @@
         <p:spPr>
           <a:xfrm>
             <a:off x="480000" y="200000"/>
-            <a:ext cx="8500000" cy="450000"/>
+            <a:ext cx="9000000" cy="450000"/>
           </a:xfrm>
           <a:prstGeom prst="rect">
             <a:avLst/>
@@ -5910,28 +7854,678 @@
           <a:p>
             <a:pPr algn="l"/>
             <a:r>
-              <a:rPr sz="2400" b="1">
+              <a:rPr sz="2200" b="1">
                 <a:solidFill>
                   <a:srgbClr val="3F3F3F"/>
                 </a:solidFill>
                 <a:latin typeface="メイリオ"/>
                 <a:ea typeface="メイリオ"/>
               </a:rPr>
-              <a:t>要件定義フェーズの進め方（概要）</a:t>
+              <a:t>機能詳細検討｜Fit&amp;Gap（フロントサイト確認含む）</a:t>
             </a:r>
           </a:p>
         </p:txBody>
       </p:sp>
       <p:sp>
         <p:nvSpPr>
-          <p:cNvPr id="4" name="Rounded Rectangle 3"/>
+          <p:cNvPr id="4" name="TextBox 3"/>
+          <p:cNvSpPr txBox="1"/>
+          <p:nvPr/>
+        </p:nvSpPr>
+        <p:spPr>
+          <a:xfrm>
+            <a:off x="480000" y="680000"/>
+            <a:ext cx="9000000" cy="280000"/>
+          </a:xfrm>
+          <a:prstGeom prst="rect">
+            <a:avLst/>
+          </a:prstGeom>
+          <a:noFill/>
+        </p:spPr>
+        <p:txBody>
+          <a:bodyPr wrap="square">
+            <a:spAutoFit/>
+          </a:bodyPr>
+          <a:lstStyle/>
+          <a:p>
+            <a:pPr algn="l"/>
+            <a:r>
+              <a:rPr sz="1100" b="0">
+                <a:solidFill>
+                  <a:srgbClr val="666666"/>
+                </a:solidFill>
+                <a:latin typeface="メイリオ"/>
+                <a:ea typeface="メイリオ"/>
+              </a:rPr>
+              <a:t>4回目｜9/9（水）頃　約2h　｜　業務フローで整理した内容をPrimo標準／カスタマイズに落とし込みます</a:t>
+            </a:r>
+          </a:p>
+        </p:txBody>
+      </p:sp>
+      <p:graphicFrame>
+        <p:nvGraphicFramePr>
+          <p:cNvPr id="5" name="Table 4"/>
+          <p:cNvGraphicFramePr>
+            <a:graphicFrameLocks noGrp="1"/>
+          </p:cNvGraphicFramePr>
+          <p:nvPr/>
+        </p:nvGraphicFramePr>
+        <p:xfrm>
+          <a:off x="500000" y="1100000"/>
+          <a:ext cx="8900000" cy="3200000"/>
+        </p:xfrm>
+        <a:graphic>
+          <a:graphicData uri="http://schemas.openxmlformats.org/drawingml/2006/table">
+            <a:tbl>
+              <a:tblPr firstRow="1" bandRow="1">
+                <a:tableStyleId>{5C22544A-7EE6-4342-B048-85BDC9FD1C3A}</a:tableStyleId>
+              </a:tblPr>
+              <a:tblGrid>
+                <a:gridCol w="2200000"/>
+                <a:gridCol w="6700000"/>
+              </a:tblGrid>
+              <a:tr h="533333">
+                <a:tc>
+                  <a:txBody>
+                    <a:bodyPr wrap="square"/>
+                    <a:lstStyle/>
+                    <a:p>
+                      <a:pPr algn="ctr"/>
+                      <a:r>
+                        <a:rPr sz="1200" b="1">
+                          <a:solidFill>
+                            <a:srgbClr val="FFFFFF"/>
+                          </a:solidFill>
+                          <a:latin typeface="メイリオ"/>
+                          <a:ea typeface="メイリオ"/>
+                        </a:rPr>
+                        <a:t>領域</a:t>
+                      </a:r>
+                    </a:p>
+                  </a:txBody>
+                  <a:tcPr anchor="ctr">
+                    <a:solidFill>
+                      <a:srgbClr val="00A693"/>
+                    </a:solidFill>
+                    <a:lnL w="9525" cap="flat" cmpd="sng" algn="ctr">
+                      <a:solidFill>
+                        <a:srgbClr val="007A6E"/>
+                      </a:solidFill>
+                      <a:prstDash val="solid"/>
+                    </a:lnL>
+                    <a:lnR w="9525" cap="flat" cmpd="sng" algn="ctr">
+                      <a:solidFill>
+                        <a:srgbClr val="007A6E"/>
+                      </a:solidFill>
+                      <a:prstDash val="solid"/>
+                    </a:lnR>
+                    <a:lnT w="9525" cap="flat" cmpd="sng" algn="ctr">
+                      <a:solidFill>
+                        <a:srgbClr val="007A6E"/>
+                      </a:solidFill>
+                      <a:prstDash val="solid"/>
+                    </a:lnT>
+                    <a:lnB w="9525" cap="flat" cmpd="sng" algn="ctr">
+                      <a:solidFill>
+                        <a:srgbClr val="007A6E"/>
+                      </a:solidFill>
+                      <a:prstDash val="solid"/>
+                    </a:lnB>
+                  </a:tcPr>
+                </a:tc>
+                <a:tc>
+                  <a:txBody>
+                    <a:bodyPr wrap="square"/>
+                    <a:lstStyle/>
+                    <a:p>
+                      <a:pPr algn="ctr"/>
+                      <a:r>
+                        <a:rPr sz="1200" b="1">
+                          <a:solidFill>
+                            <a:srgbClr val="FFFFFF"/>
+                          </a:solidFill>
+                          <a:latin typeface="メイリオ"/>
+                          <a:ea typeface="メイリオ"/>
+                        </a:rPr>
+                        <a:t>検討内容（例）</a:t>
+                      </a:r>
+                    </a:p>
+                  </a:txBody>
+                  <a:tcPr anchor="ctr">
+                    <a:solidFill>
+                      <a:srgbClr val="00A693"/>
+                    </a:solidFill>
+                    <a:lnL w="9525" cap="flat" cmpd="sng" algn="ctr">
+                      <a:solidFill>
+                        <a:srgbClr val="007A6E"/>
+                      </a:solidFill>
+                      <a:prstDash val="solid"/>
+                    </a:lnL>
+                    <a:lnR w="9525" cap="flat" cmpd="sng" algn="ctr">
+                      <a:solidFill>
+                        <a:srgbClr val="007A6E"/>
+                      </a:solidFill>
+                      <a:prstDash val="solid"/>
+                    </a:lnR>
+                    <a:lnT w="9525" cap="flat" cmpd="sng" algn="ctr">
+                      <a:solidFill>
+                        <a:srgbClr val="007A6E"/>
+                      </a:solidFill>
+                      <a:prstDash val="solid"/>
+                    </a:lnT>
+                    <a:lnB w="9525" cap="flat" cmpd="sng" algn="ctr">
+                      <a:solidFill>
+                        <a:srgbClr val="007A6E"/>
+                      </a:solidFill>
+                      <a:prstDash val="solid"/>
+                    </a:lnB>
+                  </a:tcPr>
+                </a:tc>
+              </a:tr>
+              <a:tr h="533333">
+                <a:tc>
+                  <a:txBody>
+                    <a:bodyPr wrap="square"/>
+                    <a:lstStyle/>
+                    <a:p>
+                      <a:pPr algn="ctr"/>
+                      <a:r>
+                        <a:rPr sz="1200" b="1">
+                          <a:solidFill>
+                            <a:srgbClr val="333333"/>
+                          </a:solidFill>
+                          <a:latin typeface="メイリオ"/>
+                          <a:ea typeface="メイリオ"/>
+                        </a:rPr>
+                        <a:t>管理機能</a:t>
+                      </a:r>
+                    </a:p>
+                  </a:txBody>
+                  <a:tcPr anchor="ctr">
+                    <a:solidFill>
+                      <a:srgbClr val="F0FAF8"/>
+                    </a:solidFill>
+                    <a:lnL w="6350" cap="flat" cmpd="sng" algn="ctr">
+                      <a:solidFill>
+                        <a:srgbClr val="CCCCCC"/>
+                      </a:solidFill>
+                      <a:prstDash val="solid"/>
+                    </a:lnL>
+                    <a:lnR w="6350" cap="flat" cmpd="sng" algn="ctr">
+                      <a:solidFill>
+                        <a:srgbClr val="CCCCCC"/>
+                      </a:solidFill>
+                      <a:prstDash val="solid"/>
+                    </a:lnR>
+                    <a:lnT w="6350" cap="flat" cmpd="sng" algn="ctr">
+                      <a:solidFill>
+                        <a:srgbClr val="CCCCCC"/>
+                      </a:solidFill>
+                      <a:prstDash val="solid"/>
+                    </a:lnT>
+                    <a:lnB w="6350" cap="flat" cmpd="sng" algn="ctr">
+                      <a:solidFill>
+                        <a:srgbClr val="CCCCCC"/>
+                      </a:solidFill>
+                      <a:prstDash val="solid"/>
+                    </a:lnB>
+                  </a:tcPr>
+                </a:tc>
+                <a:tc>
+                  <a:txBody>
+                    <a:bodyPr wrap="square"/>
+                    <a:lstStyle/>
+                    <a:p>
+                      <a:pPr algn="l"/>
+                      <a:r>
+                        <a:rPr sz="1200" b="0">
+                          <a:solidFill>
+                            <a:srgbClr val="333333"/>
+                          </a:solidFill>
+                          <a:latin typeface="メイリオ"/>
+                          <a:ea typeface="メイリオ"/>
+                        </a:rPr>
+                        <a:t>サプライヤー／商品／在庫／会員／受注／見積 のFit&amp;Gap</a:t>
+                      </a:r>
+                    </a:p>
+                  </a:txBody>
+                  <a:tcPr anchor="ctr">
+                    <a:solidFill>
+                      <a:srgbClr val="F0FAF8"/>
+                    </a:solidFill>
+                    <a:lnL w="6350" cap="flat" cmpd="sng" algn="ctr">
+                      <a:solidFill>
+                        <a:srgbClr val="CCCCCC"/>
+                      </a:solidFill>
+                      <a:prstDash val="solid"/>
+                    </a:lnL>
+                    <a:lnR w="6350" cap="flat" cmpd="sng" algn="ctr">
+                      <a:solidFill>
+                        <a:srgbClr val="CCCCCC"/>
+                      </a:solidFill>
+                      <a:prstDash val="solid"/>
+                    </a:lnR>
+                    <a:lnT w="6350" cap="flat" cmpd="sng" algn="ctr">
+                      <a:solidFill>
+                        <a:srgbClr val="CCCCCC"/>
+                      </a:solidFill>
+                      <a:prstDash val="solid"/>
+                    </a:lnT>
+                    <a:lnB w="6350" cap="flat" cmpd="sng" algn="ctr">
+                      <a:solidFill>
+                        <a:srgbClr val="CCCCCC"/>
+                      </a:solidFill>
+                      <a:prstDash val="solid"/>
+                    </a:lnB>
+                  </a:tcPr>
+                </a:tc>
+              </a:tr>
+              <a:tr h="533333">
+                <a:tc>
+                  <a:txBody>
+                    <a:bodyPr wrap="square"/>
+                    <a:lstStyle/>
+                    <a:p>
+                      <a:pPr algn="ctr"/>
+                      <a:r>
+                        <a:rPr sz="1200" b="1">
+                          <a:solidFill>
+                            <a:srgbClr val="333333"/>
+                          </a:solidFill>
+                          <a:latin typeface="メイリオ"/>
+                          <a:ea typeface="メイリオ"/>
+                        </a:rPr>
+                        <a:t>基幹連携</a:t>
+                      </a:r>
+                    </a:p>
+                  </a:txBody>
+                  <a:tcPr anchor="ctr">
+                    <a:solidFill>
+                      <a:srgbClr val="FFFFFF"/>
+                    </a:solidFill>
+                    <a:lnL w="6350" cap="flat" cmpd="sng" algn="ctr">
+                      <a:solidFill>
+                        <a:srgbClr val="CCCCCC"/>
+                      </a:solidFill>
+                      <a:prstDash val="solid"/>
+                    </a:lnL>
+                    <a:lnR w="6350" cap="flat" cmpd="sng" algn="ctr">
+                      <a:solidFill>
+                        <a:srgbClr val="CCCCCC"/>
+                      </a:solidFill>
+                      <a:prstDash val="solid"/>
+                    </a:lnR>
+                    <a:lnT w="6350" cap="flat" cmpd="sng" algn="ctr">
+                      <a:solidFill>
+                        <a:srgbClr val="CCCCCC"/>
+                      </a:solidFill>
+                      <a:prstDash val="solid"/>
+                    </a:lnT>
+                    <a:lnB w="6350" cap="flat" cmpd="sng" algn="ctr">
+                      <a:solidFill>
+                        <a:srgbClr val="CCCCCC"/>
+                      </a:solidFill>
+                      <a:prstDash val="solid"/>
+                    </a:lnB>
+                  </a:tcPr>
+                </a:tc>
+                <a:tc>
+                  <a:txBody>
+                    <a:bodyPr wrap="square"/>
+                    <a:lstStyle/>
+                    <a:p>
+                      <a:pPr algn="l"/>
+                      <a:r>
+                        <a:rPr sz="1200" b="0">
+                          <a:solidFill>
+                            <a:srgbClr val="333333"/>
+                          </a:solidFill>
+                          <a:latin typeface="メイリオ"/>
+                          <a:ea typeface="メイリオ"/>
+                        </a:rPr>
+                        <a:t>商品・在庫・受注・出荷の連携方式、自動化範囲</a:t>
+                      </a:r>
+                    </a:p>
+                  </a:txBody>
+                  <a:tcPr anchor="ctr">
+                    <a:solidFill>
+                      <a:srgbClr val="FFFFFF"/>
+                    </a:solidFill>
+                    <a:lnL w="6350" cap="flat" cmpd="sng" algn="ctr">
+                      <a:solidFill>
+                        <a:srgbClr val="CCCCCC"/>
+                      </a:solidFill>
+                      <a:prstDash val="solid"/>
+                    </a:lnL>
+                    <a:lnR w="6350" cap="flat" cmpd="sng" algn="ctr">
+                      <a:solidFill>
+                        <a:srgbClr val="CCCCCC"/>
+                      </a:solidFill>
+                      <a:prstDash val="solid"/>
+                    </a:lnR>
+                    <a:lnT w="6350" cap="flat" cmpd="sng" algn="ctr">
+                      <a:solidFill>
+                        <a:srgbClr val="CCCCCC"/>
+                      </a:solidFill>
+                      <a:prstDash val="solid"/>
+                    </a:lnT>
+                    <a:lnB w="6350" cap="flat" cmpd="sng" algn="ctr">
+                      <a:solidFill>
+                        <a:srgbClr val="CCCCCC"/>
+                      </a:solidFill>
+                      <a:prstDash val="solid"/>
+                    </a:lnB>
+                  </a:tcPr>
+                </a:tc>
+              </a:tr>
+              <a:tr h="533333">
+                <a:tc>
+                  <a:txBody>
+                    <a:bodyPr wrap="square"/>
+                    <a:lstStyle/>
+                    <a:p>
+                      <a:pPr algn="ctr"/>
+                      <a:r>
+                        <a:rPr sz="1200" b="1">
+                          <a:solidFill>
+                            <a:srgbClr val="007A6E"/>
+                          </a:solidFill>
+                          <a:latin typeface="メイリオ"/>
+                          <a:ea typeface="メイリオ"/>
+                        </a:rPr>
+                        <a:t>フロントサイト</a:t>
+                      </a:r>
+                    </a:p>
+                  </a:txBody>
+                  <a:tcPr anchor="ctr">
+                    <a:solidFill>
+                      <a:srgbClr val="E8F6F3"/>
+                    </a:solidFill>
+                    <a:lnL w="6350" cap="flat" cmpd="sng" algn="ctr">
+                      <a:solidFill>
+                        <a:srgbClr val="CCCCCC"/>
+                      </a:solidFill>
+                      <a:prstDash val="solid"/>
+                    </a:lnL>
+                    <a:lnR w="6350" cap="flat" cmpd="sng" algn="ctr">
+                      <a:solidFill>
+                        <a:srgbClr val="CCCCCC"/>
+                      </a:solidFill>
+                      <a:prstDash val="solid"/>
+                    </a:lnR>
+                    <a:lnT w="6350" cap="flat" cmpd="sng" algn="ctr">
+                      <a:solidFill>
+                        <a:srgbClr val="CCCCCC"/>
+                      </a:solidFill>
+                      <a:prstDash val="solid"/>
+                    </a:lnT>
+                    <a:lnB w="6350" cap="flat" cmpd="sng" algn="ctr">
+                      <a:solidFill>
+                        <a:srgbClr val="CCCCCC"/>
+                      </a:solidFill>
+                      <a:prstDash val="solid"/>
+                    </a:lnB>
+                  </a:tcPr>
+                </a:tc>
+                <a:tc>
+                  <a:txBody>
+                    <a:bodyPr wrap="square"/>
+                    <a:lstStyle/>
+                    <a:p>
+                      <a:pPr algn="l"/>
+                      <a:r>
+                        <a:rPr sz="1200" b="0">
+                          <a:solidFill>
+                            <a:srgbClr val="333333"/>
+                          </a:solidFill>
+                          <a:latin typeface="メイリオ"/>
+                          <a:ea typeface="メイリオ"/>
+                        </a:rPr>
+                        <a:t>画面構成・導線・デザイン方針、注文UI（バリエーション一括等）</a:t>
+                      </a:r>
+                    </a:p>
+                  </a:txBody>
+                  <a:tcPr anchor="ctr">
+                    <a:solidFill>
+                      <a:srgbClr val="E8F6F3"/>
+                    </a:solidFill>
+                    <a:lnL w="6350" cap="flat" cmpd="sng" algn="ctr">
+                      <a:solidFill>
+                        <a:srgbClr val="CCCCCC"/>
+                      </a:solidFill>
+                      <a:prstDash val="solid"/>
+                    </a:lnL>
+                    <a:lnR w="6350" cap="flat" cmpd="sng" algn="ctr">
+                      <a:solidFill>
+                        <a:srgbClr val="CCCCCC"/>
+                      </a:solidFill>
+                      <a:prstDash val="solid"/>
+                    </a:lnR>
+                    <a:lnT w="6350" cap="flat" cmpd="sng" algn="ctr">
+                      <a:solidFill>
+                        <a:srgbClr val="CCCCCC"/>
+                      </a:solidFill>
+                      <a:prstDash val="solid"/>
+                    </a:lnT>
+                    <a:lnB w="6350" cap="flat" cmpd="sng" algn="ctr">
+                      <a:solidFill>
+                        <a:srgbClr val="CCCCCC"/>
+                      </a:solidFill>
+                      <a:prstDash val="solid"/>
+                    </a:lnB>
+                  </a:tcPr>
+                </a:tc>
+              </a:tr>
+              <a:tr h="533333">
+                <a:tc>
+                  <a:txBody>
+                    <a:bodyPr wrap="square"/>
+                    <a:lstStyle/>
+                    <a:p>
+                      <a:pPr algn="ctr"/>
+                      <a:r>
+                        <a:rPr sz="1200" b="1">
+                          <a:solidFill>
+                            <a:srgbClr val="007A6E"/>
+                          </a:solidFill>
+                          <a:latin typeface="メイリオ"/>
+                          <a:ea typeface="メイリオ"/>
+                        </a:rPr>
+                        <a:t>フロント確認</a:t>
+                      </a:r>
+                    </a:p>
+                  </a:txBody>
+                  <a:tcPr anchor="ctr">
+                    <a:solidFill>
+                      <a:srgbClr val="E8F6F3"/>
+                    </a:solidFill>
+                    <a:lnL w="6350" cap="flat" cmpd="sng" algn="ctr">
+                      <a:solidFill>
+                        <a:srgbClr val="CCCCCC"/>
+                      </a:solidFill>
+                      <a:prstDash val="solid"/>
+                    </a:lnL>
+                    <a:lnR w="6350" cap="flat" cmpd="sng" algn="ctr">
+                      <a:solidFill>
+                        <a:srgbClr val="CCCCCC"/>
+                      </a:solidFill>
+                      <a:prstDash val="solid"/>
+                    </a:lnR>
+                    <a:lnT w="6350" cap="flat" cmpd="sng" algn="ctr">
+                      <a:solidFill>
+                        <a:srgbClr val="CCCCCC"/>
+                      </a:solidFill>
+                      <a:prstDash val="solid"/>
+                    </a:lnT>
+                    <a:lnB w="6350" cap="flat" cmpd="sng" algn="ctr">
+                      <a:solidFill>
+                        <a:srgbClr val="CCCCCC"/>
+                      </a:solidFill>
+                      <a:prstDash val="solid"/>
+                    </a:lnB>
+                  </a:tcPr>
+                </a:tc>
+                <a:tc>
+                  <a:txBody>
+                    <a:bodyPr wrap="square"/>
+                    <a:lstStyle/>
+                    <a:p>
+                      <a:pPr algn="l"/>
+                      <a:r>
+                        <a:rPr sz="1200" b="0">
+                          <a:solidFill>
+                            <a:srgbClr val="333333"/>
+                          </a:solidFill>
+                          <a:latin typeface="メイリオ"/>
+                          <a:ea typeface="メイリオ"/>
+                        </a:rPr>
+                        <a:t>商品閲覧〜カート〜注文〜履歴／マイページの画面確認</a:t>
+                      </a:r>
+                    </a:p>
+                  </a:txBody>
+                  <a:tcPr anchor="ctr">
+                    <a:solidFill>
+                      <a:srgbClr val="E8F6F3"/>
+                    </a:solidFill>
+                    <a:lnL w="6350" cap="flat" cmpd="sng" algn="ctr">
+                      <a:solidFill>
+                        <a:srgbClr val="CCCCCC"/>
+                      </a:solidFill>
+                      <a:prstDash val="solid"/>
+                    </a:lnL>
+                    <a:lnR w="6350" cap="flat" cmpd="sng" algn="ctr">
+                      <a:solidFill>
+                        <a:srgbClr val="CCCCCC"/>
+                      </a:solidFill>
+                      <a:prstDash val="solid"/>
+                    </a:lnR>
+                    <a:lnT w="6350" cap="flat" cmpd="sng" algn="ctr">
+                      <a:solidFill>
+                        <a:srgbClr val="CCCCCC"/>
+                      </a:solidFill>
+                      <a:prstDash val="solid"/>
+                    </a:lnT>
+                    <a:lnB w="6350" cap="flat" cmpd="sng" algn="ctr">
+                      <a:solidFill>
+                        <a:srgbClr val="CCCCCC"/>
+                      </a:solidFill>
+                      <a:prstDash val="solid"/>
+                    </a:lnB>
+                  </a:tcPr>
+                </a:tc>
+              </a:tr>
+              <a:tr h="533335">
+                <a:tc>
+                  <a:txBody>
+                    <a:bodyPr wrap="square"/>
+                    <a:lstStyle/>
+                    <a:p>
+                      <a:pPr algn="ctr"/>
+                      <a:r>
+                        <a:rPr sz="1200" b="1">
+                          <a:solidFill>
+                            <a:srgbClr val="333333"/>
+                          </a:solidFill>
+                          <a:latin typeface="メイリオ"/>
+                          <a:ea typeface="メイリオ"/>
+                        </a:rPr>
+                        <a:t>その他</a:t>
+                      </a:r>
+                    </a:p>
+                  </a:txBody>
+                  <a:tcPr anchor="ctr">
+                    <a:solidFill>
+                      <a:srgbClr val="F0FAF8"/>
+                    </a:solidFill>
+                    <a:lnL w="6350" cap="flat" cmpd="sng" algn="ctr">
+                      <a:solidFill>
+                        <a:srgbClr val="CCCCCC"/>
+                      </a:solidFill>
+                      <a:prstDash val="solid"/>
+                    </a:lnL>
+                    <a:lnR w="6350" cap="flat" cmpd="sng" algn="ctr">
+                      <a:solidFill>
+                        <a:srgbClr val="CCCCCC"/>
+                      </a:solidFill>
+                      <a:prstDash val="solid"/>
+                    </a:lnR>
+                    <a:lnT w="6350" cap="flat" cmpd="sng" algn="ctr">
+                      <a:solidFill>
+                        <a:srgbClr val="CCCCCC"/>
+                      </a:solidFill>
+                      <a:prstDash val="solid"/>
+                    </a:lnT>
+                    <a:lnB w="6350" cap="flat" cmpd="sng" algn="ctr">
+                      <a:solidFill>
+                        <a:srgbClr val="CCCCCC"/>
+                      </a:solidFill>
+                      <a:prstDash val="solid"/>
+                    </a:lnB>
+                  </a:tcPr>
+                </a:tc>
+                <a:tc>
+                  <a:txBody>
+                    <a:bodyPr wrap="square"/>
+                    <a:lstStyle/>
+                    <a:p>
+                      <a:pPr algn="l"/>
+                      <a:r>
+                        <a:rPr sz="1200" b="0">
+                          <a:solidFill>
+                            <a:srgbClr val="333333"/>
+                          </a:solidFill>
+                          <a:latin typeface="メイリオ"/>
+                          <a:ea typeface="メイリオ"/>
+                        </a:rPr>
+                        <a:t>EDI・代理注文、展示会注文、商品データ／画像DL 等</a:t>
+                      </a:r>
+                    </a:p>
+                  </a:txBody>
+                  <a:tcPr anchor="ctr">
+                    <a:solidFill>
+                      <a:srgbClr val="F0FAF8"/>
+                    </a:solidFill>
+                    <a:lnL w="6350" cap="flat" cmpd="sng" algn="ctr">
+                      <a:solidFill>
+                        <a:srgbClr val="CCCCCC"/>
+                      </a:solidFill>
+                      <a:prstDash val="solid"/>
+                    </a:lnL>
+                    <a:lnR w="6350" cap="flat" cmpd="sng" algn="ctr">
+                      <a:solidFill>
+                        <a:srgbClr val="CCCCCC"/>
+                      </a:solidFill>
+                      <a:prstDash val="solid"/>
+                    </a:lnR>
+                    <a:lnT w="6350" cap="flat" cmpd="sng" algn="ctr">
+                      <a:solidFill>
+                        <a:srgbClr val="CCCCCC"/>
+                      </a:solidFill>
+                      <a:prstDash val="solid"/>
+                    </a:lnT>
+                    <a:lnB w="6350" cap="flat" cmpd="sng" algn="ctr">
+                      <a:solidFill>
+                        <a:srgbClr val="CCCCCC"/>
+                      </a:solidFill>
+                      <a:prstDash val="solid"/>
+                    </a:lnB>
+                  </a:tcPr>
+                </a:tc>
+              </a:tr>
+            </a:tbl>
+          </a:graphicData>
+        </a:graphic>
+      </p:graphicFrame>
+      <p:sp>
+        <p:nvSpPr>
+          <p:cNvPr id="6" name="Rounded Rectangle 5"/>
           <p:cNvSpPr/>
           <p:nvPr/>
         </p:nvSpPr>
         <p:spPr>
           <a:xfrm>
-            <a:off x="400000" y="900000"/>
-            <a:ext cx="1500000" cy="1350000"/>
+            <a:off x="500000" y="4600000"/>
+            <a:ext cx="8900000" cy="1600000"/>
           </a:xfrm>
           <a:prstGeom prst="roundRect">
             <a:avLst/>
@@ -5939,7 +8533,7 @@
           <a:solidFill>
             <a:srgbClr val="DEF3F1"/>
           </a:solidFill>
-          <a:ln w="19050">
+          <a:ln>
             <a:solidFill>
               <a:srgbClr val="00A693"/>
             </a:solidFill>
@@ -5960,625 +8554,23 @@
           </a:fontRef>
         </p:style>
         <p:txBody>
-          <a:bodyPr rtlCol="0" anchor="ctr" wrap="square"/>
+          <a:bodyPr rtlCol="0" anchor="ctr"/>
           <a:lstStyle/>
           <a:p>
             <a:pPr algn="ctr"/>
-            <a:r>
-              <a:rPr sz="1100" b="1">
-                <a:solidFill>
-                  <a:srgbClr val="007A6E"/>
-                </a:solidFill>
-                <a:latin typeface="メイリオ"/>
-                <a:ea typeface="メイリオ"/>
-              </a:rPr>
-              <a:t>1</a:t>
-            </a:r>
-          </a:p>
-          <a:p>
-            <a:pPr algn="ctr"/>
-            <a:r>
-              <a:rPr sz="1100" b="1">
-                <a:solidFill>
-                  <a:srgbClr val="007A6E"/>
-                </a:solidFill>
-                <a:latin typeface="メイリオ"/>
-                <a:ea typeface="メイリオ"/>
-              </a:rPr>
-              <a:t>キックオフ</a:t>
-            </a:r>
-          </a:p>
-          <a:p/>
-          <a:p>
-            <a:pPr algn="ctr"/>
-            <a:r>
-              <a:rPr sz="900" b="0">
-                <a:solidFill>
-                  <a:srgbClr val="333333"/>
-                </a:solidFill>
-                <a:latin typeface="メイリオ"/>
-                <a:ea typeface="メイリオ"/>
-              </a:rPr>
-              <a:t>進め方合意</a:t>
-            </a:r>
-          </a:p>
-          <a:p>
-            <a:pPr algn="ctr"/>
-            <a:r>
-              <a:rPr sz="900" b="0">
-                <a:solidFill>
-                  <a:srgbClr val="333333"/>
-                </a:solidFill>
-                <a:latin typeface="メイリオ"/>
-                <a:ea typeface="メイリオ"/>
-              </a:rPr>
-              <a:t>ご要件すり合わせ</a:t>
-            </a:r>
           </a:p>
         </p:txBody>
       </p:sp>
       <p:sp>
         <p:nvSpPr>
-          <p:cNvPr id="5" name="Right Arrow 4"/>
-          <p:cNvSpPr/>
-          <p:nvPr/>
-        </p:nvSpPr>
-        <p:spPr>
-          <a:xfrm>
-            <a:off x="1930000" y="1400000"/>
-            <a:ext cx="160000" cy="180000"/>
-          </a:xfrm>
-          <a:prstGeom prst="rightArrow">
-            <a:avLst/>
-          </a:prstGeom>
-          <a:solidFill>
-            <a:srgbClr val="00A693"/>
-          </a:solidFill>
-          <a:ln>
-            <a:noFill/>
-          </a:ln>
-        </p:spPr>
-        <p:style>
-          <a:lnRef idx="1">
-            <a:schemeClr val="accent1"/>
-          </a:lnRef>
-          <a:fillRef idx="3">
-            <a:schemeClr val="accent1"/>
-          </a:fillRef>
-          <a:effectRef idx="2">
-            <a:schemeClr val="accent1"/>
-          </a:effectRef>
-          <a:fontRef idx="minor">
-            <a:schemeClr val="lt1"/>
-          </a:fontRef>
-        </p:style>
-        <p:txBody>
-          <a:bodyPr rtlCol="0" anchor="ctr"/>
-          <a:lstStyle/>
-          <a:p>
-            <a:pPr algn="ctr"/>
-          </a:p>
-        </p:txBody>
-      </p:sp>
-      <p:sp>
-        <p:nvSpPr>
-          <p:cNvPr id="6" name="Rounded Rectangle 5"/>
-          <p:cNvSpPr/>
-          <p:nvPr/>
-        </p:nvSpPr>
-        <p:spPr>
-          <a:xfrm>
-            <a:off x="2260000" y="900000"/>
-            <a:ext cx="1500000" cy="1350000"/>
-          </a:xfrm>
-          <a:prstGeom prst="roundRect">
-            <a:avLst/>
-          </a:prstGeom>
-          <a:solidFill>
-            <a:srgbClr val="DEF3F1"/>
-          </a:solidFill>
-          <a:ln w="19050">
-            <a:solidFill>
-              <a:srgbClr val="00A693"/>
-            </a:solidFill>
-          </a:ln>
-        </p:spPr>
-        <p:style>
-          <a:lnRef idx="1">
-            <a:schemeClr val="accent1"/>
-          </a:lnRef>
-          <a:fillRef idx="3">
-            <a:schemeClr val="accent1"/>
-          </a:fillRef>
-          <a:effectRef idx="2">
-            <a:schemeClr val="accent1"/>
-          </a:effectRef>
-          <a:fontRef idx="minor">
-            <a:schemeClr val="lt1"/>
-          </a:fontRef>
-        </p:style>
-        <p:txBody>
-          <a:bodyPr rtlCol="0" anchor="ctr" wrap="square"/>
-          <a:lstStyle/>
-          <a:p>
-            <a:pPr algn="ctr"/>
-            <a:r>
-              <a:rPr sz="1100" b="1">
-                <a:solidFill>
-                  <a:srgbClr val="007A6E"/>
-                </a:solidFill>
-                <a:latin typeface="メイリオ"/>
-                <a:ea typeface="メイリオ"/>
-              </a:rPr>
-              <a:t>2</a:t>
-            </a:r>
-          </a:p>
-          <a:p>
-            <a:pPr algn="ctr"/>
-            <a:r>
-              <a:rPr sz="1100" b="1">
-                <a:solidFill>
-                  <a:srgbClr val="007A6E"/>
-                </a:solidFill>
-                <a:latin typeface="メイリオ"/>
-                <a:ea typeface="メイリオ"/>
-              </a:rPr>
-              <a:t>業務フロー</a:t>
-            </a:r>
-          </a:p>
-          <a:p/>
-          <a:p>
-            <a:pPr algn="ctr"/>
-            <a:r>
-              <a:rPr sz="900" b="0">
-                <a:solidFill>
-                  <a:srgbClr val="333333"/>
-                </a:solidFill>
-                <a:latin typeface="メイリオ"/>
-                <a:ea typeface="メイリオ"/>
-              </a:rPr>
-              <a:t>商流・在庫・</a:t>
-            </a:r>
-          </a:p>
-          <a:p>
-            <a:pPr algn="ctr"/>
-            <a:r>
-              <a:rPr sz="900" b="0">
-                <a:solidFill>
-                  <a:srgbClr val="333333"/>
-                </a:solidFill>
-                <a:latin typeface="メイリオ"/>
-                <a:ea typeface="メイリオ"/>
-              </a:rPr>
-              <a:t>注文業務の具体化</a:t>
-            </a:r>
-          </a:p>
-        </p:txBody>
-      </p:sp>
-      <p:sp>
-        <p:nvSpPr>
-          <p:cNvPr id="7" name="Right Arrow 6"/>
-          <p:cNvSpPr/>
-          <p:nvPr/>
-        </p:nvSpPr>
-        <p:spPr>
-          <a:xfrm>
-            <a:off x="3790000" y="1400000"/>
-            <a:ext cx="160000" cy="180000"/>
-          </a:xfrm>
-          <a:prstGeom prst="rightArrow">
-            <a:avLst/>
-          </a:prstGeom>
-          <a:solidFill>
-            <a:srgbClr val="00A693"/>
-          </a:solidFill>
-          <a:ln>
-            <a:noFill/>
-          </a:ln>
-        </p:spPr>
-        <p:style>
-          <a:lnRef idx="1">
-            <a:schemeClr val="accent1"/>
-          </a:lnRef>
-          <a:fillRef idx="3">
-            <a:schemeClr val="accent1"/>
-          </a:fillRef>
-          <a:effectRef idx="2">
-            <a:schemeClr val="accent1"/>
-          </a:effectRef>
-          <a:fontRef idx="minor">
-            <a:schemeClr val="lt1"/>
-          </a:fontRef>
-        </p:style>
-        <p:txBody>
-          <a:bodyPr rtlCol="0" anchor="ctr"/>
-          <a:lstStyle/>
-          <a:p>
-            <a:pPr algn="ctr"/>
-          </a:p>
-        </p:txBody>
-      </p:sp>
-      <p:sp>
-        <p:nvSpPr>
-          <p:cNvPr id="8" name="Rounded Rectangle 7"/>
-          <p:cNvSpPr/>
-          <p:nvPr/>
-        </p:nvSpPr>
-        <p:spPr>
-          <a:xfrm>
-            <a:off x="4120000" y="900000"/>
-            <a:ext cx="1500000" cy="1350000"/>
-          </a:xfrm>
-          <a:prstGeom prst="roundRect">
-            <a:avLst/>
-          </a:prstGeom>
-          <a:solidFill>
-            <a:srgbClr val="DEF3F1"/>
-          </a:solidFill>
-          <a:ln w="19050">
-            <a:solidFill>
-              <a:srgbClr val="00A693"/>
-            </a:solidFill>
-          </a:ln>
-        </p:spPr>
-        <p:style>
-          <a:lnRef idx="1">
-            <a:schemeClr val="accent1"/>
-          </a:lnRef>
-          <a:fillRef idx="3">
-            <a:schemeClr val="accent1"/>
-          </a:fillRef>
-          <a:effectRef idx="2">
-            <a:schemeClr val="accent1"/>
-          </a:effectRef>
-          <a:fontRef idx="minor">
-            <a:schemeClr val="lt1"/>
-          </a:fontRef>
-        </p:style>
-        <p:txBody>
-          <a:bodyPr rtlCol="0" anchor="ctr" wrap="square"/>
-          <a:lstStyle/>
-          <a:p>
-            <a:pPr algn="ctr"/>
-            <a:r>
-              <a:rPr sz="1100" b="1">
-                <a:solidFill>
-                  <a:srgbClr val="007A6E"/>
-                </a:solidFill>
-                <a:latin typeface="メイリオ"/>
-                <a:ea typeface="メイリオ"/>
-              </a:rPr>
-              <a:t>3</a:t>
-            </a:r>
-          </a:p>
-          <a:p>
-            <a:pPr algn="ctr"/>
-            <a:r>
-              <a:rPr sz="1100" b="1">
-                <a:solidFill>
-                  <a:srgbClr val="007A6E"/>
-                </a:solidFill>
-                <a:latin typeface="メイリオ"/>
-                <a:ea typeface="メイリオ"/>
-              </a:rPr>
-              <a:t>機能詳細</a:t>
-            </a:r>
-          </a:p>
-          <a:p/>
-          <a:p>
-            <a:pPr algn="ctr"/>
-            <a:r>
-              <a:rPr sz="900" b="0">
-                <a:solidFill>
-                  <a:srgbClr val="333333"/>
-                </a:solidFill>
-                <a:latin typeface="メイリオ"/>
-                <a:ea typeface="メイリオ"/>
-              </a:rPr>
-              <a:t>Primo Fit&amp;Gap</a:t>
-            </a:r>
-          </a:p>
-          <a:p>
-            <a:pPr algn="ctr"/>
-            <a:r>
-              <a:rPr sz="900" b="0">
-                <a:solidFill>
-                  <a:srgbClr val="333333"/>
-                </a:solidFill>
-                <a:latin typeface="メイリオ"/>
-                <a:ea typeface="メイリオ"/>
-              </a:rPr>
-              <a:t>連携・カスタマイズ</a:t>
-            </a:r>
-          </a:p>
-        </p:txBody>
-      </p:sp>
-      <p:sp>
-        <p:nvSpPr>
-          <p:cNvPr id="9" name="Right Arrow 8"/>
-          <p:cNvSpPr/>
-          <p:nvPr/>
-        </p:nvSpPr>
-        <p:spPr>
-          <a:xfrm>
-            <a:off x="5650000" y="1400000"/>
-            <a:ext cx="160000" cy="180000"/>
-          </a:xfrm>
-          <a:prstGeom prst="rightArrow">
-            <a:avLst/>
-          </a:prstGeom>
-          <a:solidFill>
-            <a:srgbClr val="00A693"/>
-          </a:solidFill>
-          <a:ln>
-            <a:noFill/>
-          </a:ln>
-        </p:spPr>
-        <p:style>
-          <a:lnRef idx="1">
-            <a:schemeClr val="accent1"/>
-          </a:lnRef>
-          <a:fillRef idx="3">
-            <a:schemeClr val="accent1"/>
-          </a:fillRef>
-          <a:effectRef idx="2">
-            <a:schemeClr val="accent1"/>
-          </a:effectRef>
-          <a:fontRef idx="minor">
-            <a:schemeClr val="lt1"/>
-          </a:fontRef>
-        </p:style>
-        <p:txBody>
-          <a:bodyPr rtlCol="0" anchor="ctr"/>
-          <a:lstStyle/>
-          <a:p>
-            <a:pPr algn="ctr"/>
-          </a:p>
-        </p:txBody>
-      </p:sp>
-      <p:sp>
-        <p:nvSpPr>
-          <p:cNvPr id="10" name="Rounded Rectangle 9"/>
-          <p:cNvSpPr/>
-          <p:nvPr/>
-        </p:nvSpPr>
-        <p:spPr>
-          <a:xfrm>
-            <a:off x="5980000" y="900000"/>
-            <a:ext cx="1500000" cy="1350000"/>
-          </a:xfrm>
-          <a:prstGeom prst="roundRect">
-            <a:avLst/>
-          </a:prstGeom>
-          <a:solidFill>
-            <a:srgbClr val="DEF3F1"/>
-          </a:solidFill>
-          <a:ln w="19050">
-            <a:solidFill>
-              <a:srgbClr val="00A693"/>
-            </a:solidFill>
-          </a:ln>
-        </p:spPr>
-        <p:style>
-          <a:lnRef idx="1">
-            <a:schemeClr val="accent1"/>
-          </a:lnRef>
-          <a:fillRef idx="3">
-            <a:schemeClr val="accent1"/>
-          </a:fillRef>
-          <a:effectRef idx="2">
-            <a:schemeClr val="accent1"/>
-          </a:effectRef>
-          <a:fontRef idx="minor">
-            <a:schemeClr val="lt1"/>
-          </a:fontRef>
-        </p:style>
-        <p:txBody>
-          <a:bodyPr rtlCol="0" anchor="ctr" wrap="square"/>
-          <a:lstStyle/>
-          <a:p>
-            <a:pPr algn="ctr"/>
-            <a:r>
-              <a:rPr sz="1100" b="1">
-                <a:solidFill>
-                  <a:srgbClr val="007A6E"/>
-                </a:solidFill>
-                <a:latin typeface="メイリオ"/>
-                <a:ea typeface="メイリオ"/>
-              </a:rPr>
-              <a:t>4</a:t>
-            </a:r>
-          </a:p>
-          <a:p>
-            <a:pPr algn="ctr"/>
-            <a:r>
-              <a:rPr sz="1100" b="1">
-                <a:solidFill>
-                  <a:srgbClr val="007A6E"/>
-                </a:solidFill>
-                <a:latin typeface="メイリオ"/>
-                <a:ea typeface="メイリオ"/>
-              </a:rPr>
-              <a:t>非機能</a:t>
-            </a:r>
-          </a:p>
-          <a:p/>
-          <a:p>
-            <a:pPr algn="ctr"/>
-            <a:r>
-              <a:rPr sz="900" b="0">
-                <a:solidFill>
-                  <a:srgbClr val="333333"/>
-                </a:solidFill>
-                <a:latin typeface="メイリオ"/>
-                <a:ea typeface="メイリオ"/>
-              </a:rPr>
-              <a:t>性能・運用</a:t>
-            </a:r>
-          </a:p>
-          <a:p>
-            <a:pPr algn="ctr"/>
-            <a:r>
-              <a:rPr sz="900" b="0">
-                <a:solidFill>
-                  <a:srgbClr val="333333"/>
-                </a:solidFill>
-                <a:latin typeface="メイリオ"/>
-                <a:ea typeface="メイリオ"/>
-              </a:rPr>
-              <a:t>セキュリティ等</a:t>
-            </a:r>
-          </a:p>
-        </p:txBody>
-      </p:sp>
-      <p:sp>
-        <p:nvSpPr>
-          <p:cNvPr id="11" name="Right Arrow 10"/>
-          <p:cNvSpPr/>
-          <p:nvPr/>
-        </p:nvSpPr>
-        <p:spPr>
-          <a:xfrm>
-            <a:off x="7510000" y="1400000"/>
-            <a:ext cx="160000" cy="180000"/>
-          </a:xfrm>
-          <a:prstGeom prst="rightArrow">
-            <a:avLst/>
-          </a:prstGeom>
-          <a:solidFill>
-            <a:srgbClr val="00A693"/>
-          </a:solidFill>
-          <a:ln>
-            <a:noFill/>
-          </a:ln>
-        </p:spPr>
-        <p:style>
-          <a:lnRef idx="1">
-            <a:schemeClr val="accent1"/>
-          </a:lnRef>
-          <a:fillRef idx="3">
-            <a:schemeClr val="accent1"/>
-          </a:fillRef>
-          <a:effectRef idx="2">
-            <a:schemeClr val="accent1"/>
-          </a:effectRef>
-          <a:fontRef idx="minor">
-            <a:schemeClr val="lt1"/>
-          </a:fontRef>
-        </p:style>
-        <p:txBody>
-          <a:bodyPr rtlCol="0" anchor="ctr"/>
-          <a:lstStyle/>
-          <a:p>
-            <a:pPr algn="ctr"/>
-          </a:p>
-        </p:txBody>
-      </p:sp>
-      <p:sp>
-        <p:nvSpPr>
-          <p:cNvPr id="12" name="Rounded Rectangle 11"/>
-          <p:cNvSpPr/>
-          <p:nvPr/>
-        </p:nvSpPr>
-        <p:spPr>
-          <a:xfrm>
-            <a:off x="7840000" y="900000"/>
-            <a:ext cx="1500000" cy="1350000"/>
-          </a:xfrm>
-          <a:prstGeom prst="roundRect">
-            <a:avLst/>
-          </a:prstGeom>
-          <a:solidFill>
-            <a:srgbClr val="DEF3F1"/>
-          </a:solidFill>
-          <a:ln w="19050">
-            <a:solidFill>
-              <a:srgbClr val="00A693"/>
-            </a:solidFill>
-          </a:ln>
-        </p:spPr>
-        <p:style>
-          <a:lnRef idx="1">
-            <a:schemeClr val="accent1"/>
-          </a:lnRef>
-          <a:fillRef idx="3">
-            <a:schemeClr val="accent1"/>
-          </a:fillRef>
-          <a:effectRef idx="2">
-            <a:schemeClr val="accent1"/>
-          </a:effectRef>
-          <a:fontRef idx="minor">
-            <a:schemeClr val="lt1"/>
-          </a:fontRef>
-        </p:style>
-        <p:txBody>
-          <a:bodyPr rtlCol="0" anchor="ctr" wrap="square"/>
-          <a:lstStyle/>
-          <a:p>
-            <a:pPr algn="ctr"/>
-            <a:r>
-              <a:rPr sz="1100" b="1">
-                <a:solidFill>
-                  <a:srgbClr val="007A6E"/>
-                </a:solidFill>
-                <a:latin typeface="メイリオ"/>
-                <a:ea typeface="メイリオ"/>
-              </a:rPr>
-              <a:t>5〜6</a:t>
-            </a:r>
-          </a:p>
-          <a:p>
-            <a:pPr algn="ctr"/>
-            <a:r>
-              <a:rPr sz="1100" b="1">
-                <a:solidFill>
-                  <a:srgbClr val="007A6E"/>
-                </a:solidFill>
-                <a:latin typeface="メイリオ"/>
-                <a:ea typeface="メイリオ"/>
-              </a:rPr>
-              <a:t>まとめ・納品</a:t>
-            </a:r>
-          </a:p>
-          <a:p/>
-          <a:p>
-            <a:pPr algn="ctr"/>
-            <a:r>
-              <a:rPr sz="900" b="0">
-                <a:solidFill>
-                  <a:srgbClr val="333333"/>
-                </a:solidFill>
-                <a:latin typeface="メイリオ"/>
-                <a:ea typeface="メイリオ"/>
-              </a:rPr>
-              <a:t>要件定義書</a:t>
-            </a:r>
-          </a:p>
-          <a:p>
-            <a:pPr algn="ctr"/>
-            <a:r>
-              <a:rPr sz="900" b="0">
-                <a:solidFill>
-                  <a:srgbClr val="333333"/>
-                </a:solidFill>
-                <a:latin typeface="メイリオ"/>
-                <a:ea typeface="メイリオ"/>
-              </a:rPr>
-              <a:t>見積り／ご検収</a:t>
-            </a:r>
-          </a:p>
-        </p:txBody>
-      </p:sp>
-      <p:sp>
-        <p:nvSpPr>
-          <p:cNvPr id="13" name="TextBox 12"/>
+          <p:cNvPr id="7" name="TextBox 6"/>
           <p:cNvSpPr txBox="1"/>
           <p:nvPr/>
         </p:nvSpPr>
         <p:spPr>
           <a:xfrm>
-            <a:off x="450000" y="2450000"/>
-            <a:ext cx="9000000" cy="300000"/>
+            <a:off x="700000" y="4800000"/>
+            <a:ext cx="8500000" cy="1300000"/>
           </a:xfrm>
           <a:prstGeom prst="rect">
             <a:avLst/>
@@ -6591,1406 +8583,67 @@
           </a:bodyPr>
           <a:lstStyle/>
           <a:p>
-            <a:pPr algn="l"/>
-            <a:r>
-              <a:rPr sz="1400" b="1">
+            <a:r>
+              <a:rPr sz="1300" b="1">
+                <a:solidFill>
+                  <a:srgbClr val="007A6E"/>
+                </a:solidFill>
+                <a:latin typeface="メイリオ"/>
+                <a:ea typeface="メイリオ"/>
+              </a:rPr>
+              <a:t>フロントサイト確認で見るポイント</a:t>
+            </a:r>
+          </a:p>
+          <a:p>
+            <a:r>
+              <a:rPr sz="1100" b="0">
                 <a:solidFill>
                   <a:srgbClr val="333333"/>
                 </a:solidFill>
                 <a:latin typeface="メイリオ"/>
                 <a:ea typeface="メイリオ"/>
               </a:rPr>
-              <a:t>主な成果物・作業項目</a:t>
+              <a:t>・取引先向け画面の情報設計（商品一覧／詳細、在庫表示、売価表示）</a:t>
+            </a:r>
+          </a:p>
+          <a:p>
+            <a:r>
+              <a:rPr sz="1100" b="0">
+                <a:solidFill>
+                  <a:srgbClr val="333333"/>
+                </a:solidFill>
+                <a:latin typeface="メイリオ"/>
+                <a:ea typeface="メイリオ"/>
+              </a:rPr>
+              <a:t>・注文体験（カート、バリエーション一括注文、納期指定、注文履歴）</a:t>
+            </a:r>
+          </a:p>
+          <a:p>
+            <a:r>
+              <a:rPr sz="1100" b="0">
+                <a:solidFill>
+                  <a:srgbClr val="333333"/>
+                </a:solidFill>
+                <a:latin typeface="メイリオ"/>
+                <a:ea typeface="メイリオ"/>
+              </a:rPr>
+              <a:t>・マイページ周りの導線（進捗確認、ダウンロード、問い合わせ等）</a:t>
+            </a:r>
+          </a:p>
+          <a:p>
+            <a:r>
+              <a:rPr sz="1100" b="0">
+                <a:solidFill>
+                  <a:srgbClr val="333333"/>
+                </a:solidFill>
+                <a:latin typeface="メイリオ"/>
+                <a:ea typeface="メイリオ"/>
+              </a:rPr>
+              <a:t>・デザイン方針（貴社ブランド反映の範囲）と標準／カスタマイズの境界</a:t>
             </a:r>
           </a:p>
         </p:txBody>
       </p:sp>
-      <p:graphicFrame>
-        <p:nvGraphicFramePr>
-          <p:cNvPr id="14" name="Table 13"/>
-          <p:cNvGraphicFramePr>
-            <a:graphicFrameLocks noGrp="1"/>
-          </p:cNvGraphicFramePr>
-          <p:nvPr/>
-        </p:nvGraphicFramePr>
-        <p:xfrm>
-          <a:off x="450000" y="2850000"/>
-          <a:ext cx="9000000" cy="3400000"/>
-        </p:xfrm>
-        <a:graphic>
-          <a:graphicData uri="http://schemas.openxmlformats.org/drawingml/2006/table">
-            <a:tbl>
-              <a:tblPr firstRow="1" bandRow="1">
-                <a:tableStyleId>{5C22544A-7EE6-4342-B048-85BDC9FD1C3A}</a:tableStyleId>
-              </a:tblPr>
-              <a:tblGrid>
-                <a:gridCol w="700000"/>
-                <a:gridCol w="2600000"/>
-                <a:gridCol w="4000000"/>
-                <a:gridCol w="1700000"/>
-              </a:tblGrid>
-              <a:tr h="485714">
-                <a:tc>
-                  <a:txBody>
-                    <a:bodyPr wrap="square"/>
-                    <a:lstStyle/>
-                    <a:p>
-                      <a:pPr algn="ctr"/>
-                      <a:r>
-                        <a:rPr sz="1000" b="1">
-                          <a:solidFill>
-                            <a:srgbClr val="FFFFFF"/>
-                          </a:solidFill>
-                          <a:latin typeface="メイリオ"/>
-                          <a:ea typeface="メイリオ"/>
-                        </a:rPr>
-                        <a:t>No</a:t>
-                      </a:r>
-                    </a:p>
-                  </a:txBody>
-                  <a:tcPr anchor="ctr">
-                    <a:solidFill>
-                      <a:srgbClr val="00A693"/>
-                    </a:solidFill>
-                    <a:lnL w="9525" cap="flat" cmpd="sng" algn="ctr">
-                      <a:solidFill>
-                        <a:srgbClr val="007A6E"/>
-                      </a:solidFill>
-                      <a:prstDash val="solid"/>
-                    </a:lnL>
-                    <a:lnR w="9525" cap="flat" cmpd="sng" algn="ctr">
-                      <a:solidFill>
-                        <a:srgbClr val="007A6E"/>
-                      </a:solidFill>
-                      <a:prstDash val="solid"/>
-                    </a:lnR>
-                    <a:lnT w="9525" cap="flat" cmpd="sng" algn="ctr">
-                      <a:solidFill>
-                        <a:srgbClr val="007A6E"/>
-                      </a:solidFill>
-                      <a:prstDash val="solid"/>
-                    </a:lnT>
-                    <a:lnB w="9525" cap="flat" cmpd="sng" algn="ctr">
-                      <a:solidFill>
-                        <a:srgbClr val="007A6E"/>
-                      </a:solidFill>
-                      <a:prstDash val="solid"/>
-                    </a:lnB>
-                  </a:tcPr>
-                </a:tc>
-                <a:tc>
-                  <a:txBody>
-                    <a:bodyPr wrap="square"/>
-                    <a:lstStyle/>
-                    <a:p>
-                      <a:pPr algn="ctr"/>
-                      <a:r>
-                        <a:rPr sz="1000" b="1">
-                          <a:solidFill>
-                            <a:srgbClr val="FFFFFF"/>
-                          </a:solidFill>
-                          <a:latin typeface="メイリオ"/>
-                          <a:ea typeface="メイリオ"/>
-                        </a:rPr>
-                        <a:t>作業／成果物</a:t>
-                      </a:r>
-                    </a:p>
-                  </a:txBody>
-                  <a:tcPr anchor="ctr">
-                    <a:solidFill>
-                      <a:srgbClr val="00A693"/>
-                    </a:solidFill>
-                    <a:lnL w="9525" cap="flat" cmpd="sng" algn="ctr">
-                      <a:solidFill>
-                        <a:srgbClr val="007A6E"/>
-                      </a:solidFill>
-                      <a:prstDash val="solid"/>
-                    </a:lnL>
-                    <a:lnR w="9525" cap="flat" cmpd="sng" algn="ctr">
-                      <a:solidFill>
-                        <a:srgbClr val="007A6E"/>
-                      </a:solidFill>
-                      <a:prstDash val="solid"/>
-                    </a:lnR>
-                    <a:lnT w="9525" cap="flat" cmpd="sng" algn="ctr">
-                      <a:solidFill>
-                        <a:srgbClr val="007A6E"/>
-                      </a:solidFill>
-                      <a:prstDash val="solid"/>
-                    </a:lnT>
-                    <a:lnB w="9525" cap="flat" cmpd="sng" algn="ctr">
-                      <a:solidFill>
-                        <a:srgbClr val="007A6E"/>
-                      </a:solidFill>
-                      <a:prstDash val="solid"/>
-                    </a:lnB>
-                  </a:tcPr>
-                </a:tc>
-                <a:tc>
-                  <a:txBody>
-                    <a:bodyPr wrap="square"/>
-                    <a:lstStyle/>
-                    <a:p>
-                      <a:pPr algn="ctr"/>
-                      <a:r>
-                        <a:rPr sz="1000" b="1">
-                          <a:solidFill>
-                            <a:srgbClr val="FFFFFF"/>
-                          </a:solidFill>
-                          <a:latin typeface="メイリオ"/>
-                          <a:ea typeface="メイリオ"/>
-                        </a:rPr>
-                        <a:t>内容</a:t>
-                      </a:r>
-                    </a:p>
-                  </a:txBody>
-                  <a:tcPr anchor="ctr">
-                    <a:solidFill>
-                      <a:srgbClr val="00A693"/>
-                    </a:solidFill>
-                    <a:lnL w="9525" cap="flat" cmpd="sng" algn="ctr">
-                      <a:solidFill>
-                        <a:srgbClr val="007A6E"/>
-                      </a:solidFill>
-                      <a:prstDash val="solid"/>
-                    </a:lnL>
-                    <a:lnR w="9525" cap="flat" cmpd="sng" algn="ctr">
-                      <a:solidFill>
-                        <a:srgbClr val="007A6E"/>
-                      </a:solidFill>
-                      <a:prstDash val="solid"/>
-                    </a:lnR>
-                    <a:lnT w="9525" cap="flat" cmpd="sng" algn="ctr">
-                      <a:solidFill>
-                        <a:srgbClr val="007A6E"/>
-                      </a:solidFill>
-                      <a:prstDash val="solid"/>
-                    </a:lnT>
-                    <a:lnB w="9525" cap="flat" cmpd="sng" algn="ctr">
-                      <a:solidFill>
-                        <a:srgbClr val="007A6E"/>
-                      </a:solidFill>
-                      <a:prstDash val="solid"/>
-                    </a:lnB>
-                  </a:tcPr>
-                </a:tc>
-                <a:tc>
-                  <a:txBody>
-                    <a:bodyPr wrap="square"/>
-                    <a:lstStyle/>
-                    <a:p>
-                      <a:pPr algn="ctr"/>
-                      <a:r>
-                        <a:rPr sz="1000" b="1">
-                          <a:solidFill>
-                            <a:srgbClr val="FFFFFF"/>
-                          </a:solidFill>
-                          <a:latin typeface="メイリオ"/>
-                          <a:ea typeface="メイリオ"/>
-                        </a:rPr>
-                        <a:t>目安時期</a:t>
-                      </a:r>
-                    </a:p>
-                  </a:txBody>
-                  <a:tcPr anchor="ctr">
-                    <a:solidFill>
-                      <a:srgbClr val="00A693"/>
-                    </a:solidFill>
-                    <a:lnL w="9525" cap="flat" cmpd="sng" algn="ctr">
-                      <a:solidFill>
-                        <a:srgbClr val="007A6E"/>
-                      </a:solidFill>
-                      <a:prstDash val="solid"/>
-                    </a:lnL>
-                    <a:lnR w="9525" cap="flat" cmpd="sng" algn="ctr">
-                      <a:solidFill>
-                        <a:srgbClr val="007A6E"/>
-                      </a:solidFill>
-                      <a:prstDash val="solid"/>
-                    </a:lnR>
-                    <a:lnT w="9525" cap="flat" cmpd="sng" algn="ctr">
-                      <a:solidFill>
-                        <a:srgbClr val="007A6E"/>
-                      </a:solidFill>
-                      <a:prstDash val="solid"/>
-                    </a:lnT>
-                    <a:lnB w="9525" cap="flat" cmpd="sng" algn="ctr">
-                      <a:solidFill>
-                        <a:srgbClr val="007A6E"/>
-                      </a:solidFill>
-                      <a:prstDash val="solid"/>
-                    </a:lnB>
-                  </a:tcPr>
-                </a:tc>
-              </a:tr>
-              <a:tr h="485714">
-                <a:tc>
-                  <a:txBody>
-                    <a:bodyPr wrap="square"/>
-                    <a:lstStyle/>
-                    <a:p>
-                      <a:pPr algn="ctr"/>
-                      <a:r>
-                        <a:rPr sz="900" b="1">
-                          <a:solidFill>
-                            <a:srgbClr val="333333"/>
-                          </a:solidFill>
-                          <a:latin typeface="メイリオ"/>
-                          <a:ea typeface="メイリオ"/>
-                        </a:rPr>
-                        <a:t>1</a:t>
-                      </a:r>
-                    </a:p>
-                  </a:txBody>
-                  <a:tcPr anchor="ctr">
-                    <a:solidFill>
-                      <a:srgbClr val="F0FAF8"/>
-                    </a:solidFill>
-                    <a:lnL w="6350" cap="flat" cmpd="sng" algn="ctr">
-                      <a:solidFill>
-                        <a:srgbClr val="CCCCCC"/>
-                      </a:solidFill>
-                      <a:prstDash val="solid"/>
-                    </a:lnL>
-                    <a:lnR w="6350" cap="flat" cmpd="sng" algn="ctr">
-                      <a:solidFill>
-                        <a:srgbClr val="CCCCCC"/>
-                      </a:solidFill>
-                      <a:prstDash val="solid"/>
-                    </a:lnR>
-                    <a:lnT w="6350" cap="flat" cmpd="sng" algn="ctr">
-                      <a:solidFill>
-                        <a:srgbClr val="CCCCCC"/>
-                      </a:solidFill>
-                      <a:prstDash val="solid"/>
-                    </a:lnT>
-                    <a:lnB w="6350" cap="flat" cmpd="sng" algn="ctr">
-                      <a:solidFill>
-                        <a:srgbClr val="CCCCCC"/>
-                      </a:solidFill>
-                      <a:prstDash val="solid"/>
-                    </a:lnB>
-                  </a:tcPr>
-                </a:tc>
-                <a:tc>
-                  <a:txBody>
-                    <a:bodyPr wrap="square"/>
-                    <a:lstStyle/>
-                    <a:p>
-                      <a:pPr algn="l"/>
-                      <a:r>
-                        <a:rPr sz="900" b="0">
-                          <a:solidFill>
-                            <a:srgbClr val="333333"/>
-                          </a:solidFill>
-                          <a:latin typeface="メイリオ"/>
-                          <a:ea typeface="メイリオ"/>
-                        </a:rPr>
-                        <a:t>キックオフ／ご要件すり合わせ</a:t>
-                      </a:r>
-                    </a:p>
-                  </a:txBody>
-                  <a:tcPr anchor="ctr">
-                    <a:solidFill>
-                      <a:srgbClr val="F0FAF8"/>
-                    </a:solidFill>
-                    <a:lnL w="6350" cap="flat" cmpd="sng" algn="ctr">
-                      <a:solidFill>
-                        <a:srgbClr val="CCCCCC"/>
-                      </a:solidFill>
-                      <a:prstDash val="solid"/>
-                    </a:lnL>
-                    <a:lnR w="6350" cap="flat" cmpd="sng" algn="ctr">
-                      <a:solidFill>
-                        <a:srgbClr val="CCCCCC"/>
-                      </a:solidFill>
-                      <a:prstDash val="solid"/>
-                    </a:lnR>
-                    <a:lnT w="6350" cap="flat" cmpd="sng" algn="ctr">
-                      <a:solidFill>
-                        <a:srgbClr val="CCCCCC"/>
-                      </a:solidFill>
-                      <a:prstDash val="solid"/>
-                    </a:lnT>
-                    <a:lnB w="6350" cap="flat" cmpd="sng" algn="ctr">
-                      <a:solidFill>
-                        <a:srgbClr val="CCCCCC"/>
-                      </a:solidFill>
-                      <a:prstDash val="solid"/>
-                    </a:lnB>
-                  </a:tcPr>
-                </a:tc>
-                <a:tc>
-                  <a:txBody>
-                    <a:bodyPr wrap="square"/>
-                    <a:lstStyle/>
-                    <a:p>
-                      <a:pPr algn="l"/>
-                      <a:r>
-                        <a:rPr sz="900" b="0">
-                          <a:solidFill>
-                            <a:srgbClr val="333333"/>
-                          </a:solidFill>
-                          <a:latin typeface="メイリオ"/>
-                          <a:ea typeface="メイリオ"/>
-                        </a:rPr>
-                        <a:t>進め方・体制合意、既出要件の論点整理</a:t>
-                      </a:r>
-                    </a:p>
-                  </a:txBody>
-                  <a:tcPr anchor="ctr">
-                    <a:solidFill>
-                      <a:srgbClr val="F0FAF8"/>
-                    </a:solidFill>
-                    <a:lnL w="6350" cap="flat" cmpd="sng" algn="ctr">
-                      <a:solidFill>
-                        <a:srgbClr val="CCCCCC"/>
-                      </a:solidFill>
-                      <a:prstDash val="solid"/>
-                    </a:lnL>
-                    <a:lnR w="6350" cap="flat" cmpd="sng" algn="ctr">
-                      <a:solidFill>
-                        <a:srgbClr val="CCCCCC"/>
-                      </a:solidFill>
-                      <a:prstDash val="solid"/>
-                    </a:lnR>
-                    <a:lnT w="6350" cap="flat" cmpd="sng" algn="ctr">
-                      <a:solidFill>
-                        <a:srgbClr val="CCCCCC"/>
-                      </a:solidFill>
-                      <a:prstDash val="solid"/>
-                    </a:lnT>
-                    <a:lnB w="6350" cap="flat" cmpd="sng" algn="ctr">
-                      <a:solidFill>
-                        <a:srgbClr val="CCCCCC"/>
-                      </a:solidFill>
-                      <a:prstDash val="solid"/>
-                    </a:lnB>
-                  </a:tcPr>
-                </a:tc>
-                <a:tc>
-                  <a:txBody>
-                    <a:bodyPr wrap="square"/>
-                    <a:lstStyle/>
-                    <a:p>
-                      <a:pPr algn="ctr"/>
-                      <a:r>
-                        <a:rPr sz="900" b="0">
-                          <a:solidFill>
-                            <a:srgbClr val="333333"/>
-                          </a:solidFill>
-                          <a:latin typeface="メイリオ"/>
-                          <a:ea typeface="メイリオ"/>
-                        </a:rPr>
-                        <a:t>8/19</a:t>
-                      </a:r>
-                    </a:p>
-                  </a:txBody>
-                  <a:tcPr anchor="ctr">
-                    <a:solidFill>
-                      <a:srgbClr val="F0FAF8"/>
-                    </a:solidFill>
-                    <a:lnL w="6350" cap="flat" cmpd="sng" algn="ctr">
-                      <a:solidFill>
-                        <a:srgbClr val="CCCCCC"/>
-                      </a:solidFill>
-                      <a:prstDash val="solid"/>
-                    </a:lnL>
-                    <a:lnR w="6350" cap="flat" cmpd="sng" algn="ctr">
-                      <a:solidFill>
-                        <a:srgbClr val="CCCCCC"/>
-                      </a:solidFill>
-                      <a:prstDash val="solid"/>
-                    </a:lnR>
-                    <a:lnT w="6350" cap="flat" cmpd="sng" algn="ctr">
-                      <a:solidFill>
-                        <a:srgbClr val="CCCCCC"/>
-                      </a:solidFill>
-                      <a:prstDash val="solid"/>
-                    </a:lnT>
-                    <a:lnB w="6350" cap="flat" cmpd="sng" algn="ctr">
-                      <a:solidFill>
-                        <a:srgbClr val="CCCCCC"/>
-                      </a:solidFill>
-                      <a:prstDash val="solid"/>
-                    </a:lnB>
-                  </a:tcPr>
-                </a:tc>
-              </a:tr>
-              <a:tr h="485714">
-                <a:tc>
-                  <a:txBody>
-                    <a:bodyPr wrap="square"/>
-                    <a:lstStyle/>
-                    <a:p>
-                      <a:pPr algn="ctr"/>
-                      <a:r>
-                        <a:rPr sz="900" b="1">
-                          <a:solidFill>
-                            <a:srgbClr val="333333"/>
-                          </a:solidFill>
-                          <a:latin typeface="メイリオ"/>
-                          <a:ea typeface="メイリオ"/>
-                        </a:rPr>
-                        <a:t>2</a:t>
-                      </a:r>
-                    </a:p>
-                  </a:txBody>
-                  <a:tcPr anchor="ctr">
-                    <a:solidFill>
-                      <a:srgbClr val="FFFFFF"/>
-                    </a:solidFill>
-                    <a:lnL w="6350" cap="flat" cmpd="sng" algn="ctr">
-                      <a:solidFill>
-                        <a:srgbClr val="CCCCCC"/>
-                      </a:solidFill>
-                      <a:prstDash val="solid"/>
-                    </a:lnL>
-                    <a:lnR w="6350" cap="flat" cmpd="sng" algn="ctr">
-                      <a:solidFill>
-                        <a:srgbClr val="CCCCCC"/>
-                      </a:solidFill>
-                      <a:prstDash val="solid"/>
-                    </a:lnR>
-                    <a:lnT w="6350" cap="flat" cmpd="sng" algn="ctr">
-                      <a:solidFill>
-                        <a:srgbClr val="CCCCCC"/>
-                      </a:solidFill>
-                      <a:prstDash val="solid"/>
-                    </a:lnT>
-                    <a:lnB w="6350" cap="flat" cmpd="sng" algn="ctr">
-                      <a:solidFill>
-                        <a:srgbClr val="CCCCCC"/>
-                      </a:solidFill>
-                      <a:prstDash val="solid"/>
-                    </a:lnB>
-                  </a:tcPr>
-                </a:tc>
-                <a:tc>
-                  <a:txBody>
-                    <a:bodyPr wrap="square"/>
-                    <a:lstStyle/>
-                    <a:p>
-                      <a:pPr algn="l"/>
-                      <a:r>
-                        <a:rPr sz="900" b="0">
-                          <a:solidFill>
-                            <a:srgbClr val="333333"/>
-                          </a:solidFill>
-                          <a:latin typeface="メイリオ"/>
-                          <a:ea typeface="メイリオ"/>
-                        </a:rPr>
-                        <a:t>業務フロー整理</a:t>
-                      </a:r>
-                    </a:p>
-                  </a:txBody>
-                  <a:tcPr anchor="ctr">
-                    <a:solidFill>
-                      <a:srgbClr val="FFFFFF"/>
-                    </a:solidFill>
-                    <a:lnL w="6350" cap="flat" cmpd="sng" algn="ctr">
-                      <a:solidFill>
-                        <a:srgbClr val="CCCCCC"/>
-                      </a:solidFill>
-                      <a:prstDash val="solid"/>
-                    </a:lnL>
-                    <a:lnR w="6350" cap="flat" cmpd="sng" algn="ctr">
-                      <a:solidFill>
-                        <a:srgbClr val="CCCCCC"/>
-                      </a:solidFill>
-                      <a:prstDash val="solid"/>
-                    </a:lnR>
-                    <a:lnT w="6350" cap="flat" cmpd="sng" algn="ctr">
-                      <a:solidFill>
-                        <a:srgbClr val="CCCCCC"/>
-                      </a:solidFill>
-                      <a:prstDash val="solid"/>
-                    </a:lnT>
-                    <a:lnB w="6350" cap="flat" cmpd="sng" algn="ctr">
-                      <a:solidFill>
-                        <a:srgbClr val="CCCCCC"/>
-                      </a:solidFill>
-                      <a:prstDash val="solid"/>
-                    </a:lnB>
-                  </a:tcPr>
-                </a:tc>
-                <a:tc>
-                  <a:txBody>
-                    <a:bodyPr wrap="square"/>
-                    <a:lstStyle/>
-                    <a:p>
-                      <a:pPr algn="l"/>
-                      <a:r>
-                        <a:rPr sz="900" b="0">
-                          <a:solidFill>
-                            <a:srgbClr val="333333"/>
-                          </a:solidFill>
-                          <a:latin typeface="メイリオ"/>
-                          <a:ea typeface="メイリオ"/>
-                        </a:rPr>
-                        <a:t>サプライヤー／販売組織／在庫・引当／注文〜出荷</a:t>
-                      </a:r>
-                    </a:p>
-                  </a:txBody>
-                  <a:tcPr anchor="ctr">
-                    <a:solidFill>
-                      <a:srgbClr val="FFFFFF"/>
-                    </a:solidFill>
-                    <a:lnL w="6350" cap="flat" cmpd="sng" algn="ctr">
-                      <a:solidFill>
-                        <a:srgbClr val="CCCCCC"/>
-                      </a:solidFill>
-                      <a:prstDash val="solid"/>
-                    </a:lnL>
-                    <a:lnR w="6350" cap="flat" cmpd="sng" algn="ctr">
-                      <a:solidFill>
-                        <a:srgbClr val="CCCCCC"/>
-                      </a:solidFill>
-                      <a:prstDash val="solid"/>
-                    </a:lnR>
-                    <a:lnT w="6350" cap="flat" cmpd="sng" algn="ctr">
-                      <a:solidFill>
-                        <a:srgbClr val="CCCCCC"/>
-                      </a:solidFill>
-                      <a:prstDash val="solid"/>
-                    </a:lnT>
-                    <a:lnB w="6350" cap="flat" cmpd="sng" algn="ctr">
-                      <a:solidFill>
-                        <a:srgbClr val="CCCCCC"/>
-                      </a:solidFill>
-                      <a:prstDash val="solid"/>
-                    </a:lnB>
-                  </a:tcPr>
-                </a:tc>
-                <a:tc>
-                  <a:txBody>
-                    <a:bodyPr wrap="square"/>
-                    <a:lstStyle/>
-                    <a:p>
-                      <a:pPr algn="ctr"/>
-                      <a:r>
-                        <a:rPr sz="900" b="0">
-                          <a:solidFill>
-                            <a:srgbClr val="333333"/>
-                          </a:solidFill>
-                          <a:latin typeface="メイリオ"/>
-                          <a:ea typeface="メイリオ"/>
-                        </a:rPr>
-                        <a:t>8/26</a:t>
-                      </a:r>
-                    </a:p>
-                  </a:txBody>
-                  <a:tcPr anchor="ctr">
-                    <a:solidFill>
-                      <a:srgbClr val="FFFFFF"/>
-                    </a:solidFill>
-                    <a:lnL w="6350" cap="flat" cmpd="sng" algn="ctr">
-                      <a:solidFill>
-                        <a:srgbClr val="CCCCCC"/>
-                      </a:solidFill>
-                      <a:prstDash val="solid"/>
-                    </a:lnL>
-                    <a:lnR w="6350" cap="flat" cmpd="sng" algn="ctr">
-                      <a:solidFill>
-                        <a:srgbClr val="CCCCCC"/>
-                      </a:solidFill>
-                      <a:prstDash val="solid"/>
-                    </a:lnR>
-                    <a:lnT w="6350" cap="flat" cmpd="sng" algn="ctr">
-                      <a:solidFill>
-                        <a:srgbClr val="CCCCCC"/>
-                      </a:solidFill>
-                      <a:prstDash val="solid"/>
-                    </a:lnT>
-                    <a:lnB w="6350" cap="flat" cmpd="sng" algn="ctr">
-                      <a:solidFill>
-                        <a:srgbClr val="CCCCCC"/>
-                      </a:solidFill>
-                      <a:prstDash val="solid"/>
-                    </a:lnB>
-                  </a:tcPr>
-                </a:tc>
-              </a:tr>
-              <a:tr h="485714">
-                <a:tc>
-                  <a:txBody>
-                    <a:bodyPr wrap="square"/>
-                    <a:lstStyle/>
-                    <a:p>
-                      <a:pPr algn="ctr"/>
-                      <a:r>
-                        <a:rPr sz="900" b="1">
-                          <a:solidFill>
-                            <a:srgbClr val="333333"/>
-                          </a:solidFill>
-                          <a:latin typeface="メイリオ"/>
-                          <a:ea typeface="メイリオ"/>
-                        </a:rPr>
-                        <a:t>3</a:t>
-                      </a:r>
-                    </a:p>
-                  </a:txBody>
-                  <a:tcPr anchor="ctr">
-                    <a:solidFill>
-                      <a:srgbClr val="F0FAF8"/>
-                    </a:solidFill>
-                    <a:lnL w="6350" cap="flat" cmpd="sng" algn="ctr">
-                      <a:solidFill>
-                        <a:srgbClr val="CCCCCC"/>
-                      </a:solidFill>
-                      <a:prstDash val="solid"/>
-                    </a:lnL>
-                    <a:lnR w="6350" cap="flat" cmpd="sng" algn="ctr">
-                      <a:solidFill>
-                        <a:srgbClr val="CCCCCC"/>
-                      </a:solidFill>
-                      <a:prstDash val="solid"/>
-                    </a:lnR>
-                    <a:lnT w="6350" cap="flat" cmpd="sng" algn="ctr">
-                      <a:solidFill>
-                        <a:srgbClr val="CCCCCC"/>
-                      </a:solidFill>
-                      <a:prstDash val="solid"/>
-                    </a:lnT>
-                    <a:lnB w="6350" cap="flat" cmpd="sng" algn="ctr">
-                      <a:solidFill>
-                        <a:srgbClr val="CCCCCC"/>
-                      </a:solidFill>
-                      <a:prstDash val="solid"/>
-                    </a:lnB>
-                  </a:tcPr>
-                </a:tc>
-                <a:tc>
-                  <a:txBody>
-                    <a:bodyPr wrap="square"/>
-                    <a:lstStyle/>
-                    <a:p>
-                      <a:pPr algn="l"/>
-                      <a:r>
-                        <a:rPr sz="900" b="0">
-                          <a:solidFill>
-                            <a:srgbClr val="333333"/>
-                          </a:solidFill>
-                          <a:latin typeface="メイリオ"/>
-                          <a:ea typeface="メイリオ"/>
-                        </a:rPr>
-                        <a:t>機能詳細 Fit&amp;Gap</a:t>
-                      </a:r>
-                    </a:p>
-                  </a:txBody>
-                  <a:tcPr anchor="ctr">
-                    <a:solidFill>
-                      <a:srgbClr val="F0FAF8"/>
-                    </a:solidFill>
-                    <a:lnL w="6350" cap="flat" cmpd="sng" algn="ctr">
-                      <a:solidFill>
-                        <a:srgbClr val="CCCCCC"/>
-                      </a:solidFill>
-                      <a:prstDash val="solid"/>
-                    </a:lnL>
-                    <a:lnR w="6350" cap="flat" cmpd="sng" algn="ctr">
-                      <a:solidFill>
-                        <a:srgbClr val="CCCCCC"/>
-                      </a:solidFill>
-                      <a:prstDash val="solid"/>
-                    </a:lnR>
-                    <a:lnT w="6350" cap="flat" cmpd="sng" algn="ctr">
-                      <a:solidFill>
-                        <a:srgbClr val="CCCCCC"/>
-                      </a:solidFill>
-                      <a:prstDash val="solid"/>
-                    </a:lnT>
-                    <a:lnB w="6350" cap="flat" cmpd="sng" algn="ctr">
-                      <a:solidFill>
-                        <a:srgbClr val="CCCCCC"/>
-                      </a:solidFill>
-                      <a:prstDash val="solid"/>
-                    </a:lnB>
-                  </a:tcPr>
-                </a:tc>
-                <a:tc>
-                  <a:txBody>
-                    <a:bodyPr wrap="square"/>
-                    <a:lstStyle/>
-                    <a:p>
-                      <a:pPr algn="l"/>
-                      <a:r>
-                        <a:rPr sz="900" b="0">
-                          <a:solidFill>
-                            <a:srgbClr val="333333"/>
-                          </a:solidFill>
-                          <a:latin typeface="メイリオ"/>
-                          <a:ea typeface="メイリオ"/>
-                        </a:rPr>
-                        <a:t>Primo標準との差分・基幹連携・カスタマイズ論点</a:t>
-                      </a:r>
-                    </a:p>
-                  </a:txBody>
-                  <a:tcPr anchor="ctr">
-                    <a:solidFill>
-                      <a:srgbClr val="F0FAF8"/>
-                    </a:solidFill>
-                    <a:lnL w="6350" cap="flat" cmpd="sng" algn="ctr">
-                      <a:solidFill>
-                        <a:srgbClr val="CCCCCC"/>
-                      </a:solidFill>
-                      <a:prstDash val="solid"/>
-                    </a:lnL>
-                    <a:lnR w="6350" cap="flat" cmpd="sng" algn="ctr">
-                      <a:solidFill>
-                        <a:srgbClr val="CCCCCC"/>
-                      </a:solidFill>
-                      <a:prstDash val="solid"/>
-                    </a:lnR>
-                    <a:lnT w="6350" cap="flat" cmpd="sng" algn="ctr">
-                      <a:solidFill>
-                        <a:srgbClr val="CCCCCC"/>
-                      </a:solidFill>
-                      <a:prstDash val="solid"/>
-                    </a:lnT>
-                    <a:lnB w="6350" cap="flat" cmpd="sng" algn="ctr">
-                      <a:solidFill>
-                        <a:srgbClr val="CCCCCC"/>
-                      </a:solidFill>
-                      <a:prstDash val="solid"/>
-                    </a:lnB>
-                  </a:tcPr>
-                </a:tc>
-                <a:tc>
-                  <a:txBody>
-                    <a:bodyPr wrap="square"/>
-                    <a:lstStyle/>
-                    <a:p>
-                      <a:pPr algn="ctr"/>
-                      <a:r>
-                        <a:rPr sz="900" b="0">
-                          <a:solidFill>
-                            <a:srgbClr val="333333"/>
-                          </a:solidFill>
-                          <a:latin typeface="メイリオ"/>
-                          <a:ea typeface="メイリオ"/>
-                        </a:rPr>
-                        <a:t>9/9</a:t>
-                      </a:r>
-                    </a:p>
-                  </a:txBody>
-                  <a:tcPr anchor="ctr">
-                    <a:solidFill>
-                      <a:srgbClr val="F0FAF8"/>
-                    </a:solidFill>
-                    <a:lnL w="6350" cap="flat" cmpd="sng" algn="ctr">
-                      <a:solidFill>
-                        <a:srgbClr val="CCCCCC"/>
-                      </a:solidFill>
-                      <a:prstDash val="solid"/>
-                    </a:lnL>
-                    <a:lnR w="6350" cap="flat" cmpd="sng" algn="ctr">
-                      <a:solidFill>
-                        <a:srgbClr val="CCCCCC"/>
-                      </a:solidFill>
-                      <a:prstDash val="solid"/>
-                    </a:lnR>
-                    <a:lnT w="6350" cap="flat" cmpd="sng" algn="ctr">
-                      <a:solidFill>
-                        <a:srgbClr val="CCCCCC"/>
-                      </a:solidFill>
-                      <a:prstDash val="solid"/>
-                    </a:lnT>
-                    <a:lnB w="6350" cap="flat" cmpd="sng" algn="ctr">
-                      <a:solidFill>
-                        <a:srgbClr val="CCCCCC"/>
-                      </a:solidFill>
-                      <a:prstDash val="solid"/>
-                    </a:lnB>
-                  </a:tcPr>
-                </a:tc>
-              </a:tr>
-              <a:tr h="485714">
-                <a:tc>
-                  <a:txBody>
-                    <a:bodyPr wrap="square"/>
-                    <a:lstStyle/>
-                    <a:p>
-                      <a:pPr algn="ctr"/>
-                      <a:r>
-                        <a:rPr sz="900" b="1">
-                          <a:solidFill>
-                            <a:srgbClr val="333333"/>
-                          </a:solidFill>
-                          <a:latin typeface="メイリオ"/>
-                          <a:ea typeface="メイリオ"/>
-                        </a:rPr>
-                        <a:t>4</a:t>
-                      </a:r>
-                    </a:p>
-                  </a:txBody>
-                  <a:tcPr anchor="ctr">
-                    <a:solidFill>
-                      <a:srgbClr val="FFFFFF"/>
-                    </a:solidFill>
-                    <a:lnL w="6350" cap="flat" cmpd="sng" algn="ctr">
-                      <a:solidFill>
-                        <a:srgbClr val="CCCCCC"/>
-                      </a:solidFill>
-                      <a:prstDash val="solid"/>
-                    </a:lnL>
-                    <a:lnR w="6350" cap="flat" cmpd="sng" algn="ctr">
-                      <a:solidFill>
-                        <a:srgbClr val="CCCCCC"/>
-                      </a:solidFill>
-                      <a:prstDash val="solid"/>
-                    </a:lnR>
-                    <a:lnT w="6350" cap="flat" cmpd="sng" algn="ctr">
-                      <a:solidFill>
-                        <a:srgbClr val="CCCCCC"/>
-                      </a:solidFill>
-                      <a:prstDash val="solid"/>
-                    </a:lnT>
-                    <a:lnB w="6350" cap="flat" cmpd="sng" algn="ctr">
-                      <a:solidFill>
-                        <a:srgbClr val="CCCCCC"/>
-                      </a:solidFill>
-                      <a:prstDash val="solid"/>
-                    </a:lnB>
-                  </a:tcPr>
-                </a:tc>
-                <a:tc>
-                  <a:txBody>
-                    <a:bodyPr wrap="square"/>
-                    <a:lstStyle/>
-                    <a:p>
-                      <a:pPr algn="l"/>
-                      <a:r>
-                        <a:rPr sz="900" b="0">
-                          <a:solidFill>
-                            <a:srgbClr val="333333"/>
-                          </a:solidFill>
-                          <a:latin typeface="メイリオ"/>
-                          <a:ea typeface="メイリオ"/>
-                        </a:rPr>
-                        <a:t>非機能要件定義</a:t>
-                      </a:r>
-                    </a:p>
-                  </a:txBody>
-                  <a:tcPr anchor="ctr">
-                    <a:solidFill>
-                      <a:srgbClr val="FFFFFF"/>
-                    </a:solidFill>
-                    <a:lnL w="6350" cap="flat" cmpd="sng" algn="ctr">
-                      <a:solidFill>
-                        <a:srgbClr val="CCCCCC"/>
-                      </a:solidFill>
-                      <a:prstDash val="solid"/>
-                    </a:lnL>
-                    <a:lnR w="6350" cap="flat" cmpd="sng" algn="ctr">
-                      <a:solidFill>
-                        <a:srgbClr val="CCCCCC"/>
-                      </a:solidFill>
-                      <a:prstDash val="solid"/>
-                    </a:lnR>
-                    <a:lnT w="6350" cap="flat" cmpd="sng" algn="ctr">
-                      <a:solidFill>
-                        <a:srgbClr val="CCCCCC"/>
-                      </a:solidFill>
-                      <a:prstDash val="solid"/>
-                    </a:lnT>
-                    <a:lnB w="6350" cap="flat" cmpd="sng" algn="ctr">
-                      <a:solidFill>
-                        <a:srgbClr val="CCCCCC"/>
-                      </a:solidFill>
-                      <a:prstDash val="solid"/>
-                    </a:lnB>
-                  </a:tcPr>
-                </a:tc>
-                <a:tc>
-                  <a:txBody>
-                    <a:bodyPr wrap="square"/>
-                    <a:lstStyle/>
-                    <a:p>
-                      <a:pPr algn="l"/>
-                      <a:r>
-                        <a:rPr sz="900" b="0">
-                          <a:solidFill>
-                            <a:srgbClr val="333333"/>
-                          </a:solidFill>
-                          <a:latin typeface="メイリオ"/>
-                          <a:ea typeface="メイリオ"/>
-                        </a:rPr>
-                        <a:t>性能・セキュリティ・運用・移行等</a:t>
-                      </a:r>
-                    </a:p>
-                  </a:txBody>
-                  <a:tcPr anchor="ctr">
-                    <a:solidFill>
-                      <a:srgbClr val="FFFFFF"/>
-                    </a:solidFill>
-                    <a:lnL w="6350" cap="flat" cmpd="sng" algn="ctr">
-                      <a:solidFill>
-                        <a:srgbClr val="CCCCCC"/>
-                      </a:solidFill>
-                      <a:prstDash val="solid"/>
-                    </a:lnL>
-                    <a:lnR w="6350" cap="flat" cmpd="sng" algn="ctr">
-                      <a:solidFill>
-                        <a:srgbClr val="CCCCCC"/>
-                      </a:solidFill>
-                      <a:prstDash val="solid"/>
-                    </a:lnR>
-                    <a:lnT w="6350" cap="flat" cmpd="sng" algn="ctr">
-                      <a:solidFill>
-                        <a:srgbClr val="CCCCCC"/>
-                      </a:solidFill>
-                      <a:prstDash val="solid"/>
-                    </a:lnT>
-                    <a:lnB w="6350" cap="flat" cmpd="sng" algn="ctr">
-                      <a:solidFill>
-                        <a:srgbClr val="CCCCCC"/>
-                      </a:solidFill>
-                      <a:prstDash val="solid"/>
-                    </a:lnB>
-                  </a:tcPr>
-                </a:tc>
-                <a:tc>
-                  <a:txBody>
-                    <a:bodyPr wrap="square"/>
-                    <a:lstStyle/>
-                    <a:p>
-                      <a:pPr algn="ctr"/>
-                      <a:r>
-                        <a:rPr sz="900" b="0">
-                          <a:solidFill>
-                            <a:srgbClr val="333333"/>
-                          </a:solidFill>
-                          <a:latin typeface="メイリオ"/>
-                          <a:ea typeface="メイリオ"/>
-                        </a:rPr>
-                        <a:t>9/16</a:t>
-                      </a:r>
-                    </a:p>
-                  </a:txBody>
-                  <a:tcPr anchor="ctr">
-                    <a:solidFill>
-                      <a:srgbClr val="FFFFFF"/>
-                    </a:solidFill>
-                    <a:lnL w="6350" cap="flat" cmpd="sng" algn="ctr">
-                      <a:solidFill>
-                        <a:srgbClr val="CCCCCC"/>
-                      </a:solidFill>
-                      <a:prstDash val="solid"/>
-                    </a:lnL>
-                    <a:lnR w="6350" cap="flat" cmpd="sng" algn="ctr">
-                      <a:solidFill>
-                        <a:srgbClr val="CCCCCC"/>
-                      </a:solidFill>
-                      <a:prstDash val="solid"/>
-                    </a:lnR>
-                    <a:lnT w="6350" cap="flat" cmpd="sng" algn="ctr">
-                      <a:solidFill>
-                        <a:srgbClr val="CCCCCC"/>
-                      </a:solidFill>
-                      <a:prstDash val="solid"/>
-                    </a:lnT>
-                    <a:lnB w="6350" cap="flat" cmpd="sng" algn="ctr">
-                      <a:solidFill>
-                        <a:srgbClr val="CCCCCC"/>
-                      </a:solidFill>
-                      <a:prstDash val="solid"/>
-                    </a:lnB>
-                  </a:tcPr>
-                </a:tc>
-              </a:tr>
-              <a:tr h="485714">
-                <a:tc>
-                  <a:txBody>
-                    <a:bodyPr wrap="square"/>
-                    <a:lstStyle/>
-                    <a:p>
-                      <a:pPr algn="ctr"/>
-                      <a:r>
-                        <a:rPr sz="900" b="1">
-                          <a:solidFill>
-                            <a:srgbClr val="333333"/>
-                          </a:solidFill>
-                          <a:latin typeface="メイリオ"/>
-                          <a:ea typeface="メイリオ"/>
-                        </a:rPr>
-                        <a:t>5</a:t>
-                      </a:r>
-                    </a:p>
-                  </a:txBody>
-                  <a:tcPr anchor="ctr">
-                    <a:solidFill>
-                      <a:srgbClr val="F0FAF8"/>
-                    </a:solidFill>
-                    <a:lnL w="6350" cap="flat" cmpd="sng" algn="ctr">
-                      <a:solidFill>
-                        <a:srgbClr val="CCCCCC"/>
-                      </a:solidFill>
-                      <a:prstDash val="solid"/>
-                    </a:lnL>
-                    <a:lnR w="6350" cap="flat" cmpd="sng" algn="ctr">
-                      <a:solidFill>
-                        <a:srgbClr val="CCCCCC"/>
-                      </a:solidFill>
-                      <a:prstDash val="solid"/>
-                    </a:lnR>
-                    <a:lnT w="6350" cap="flat" cmpd="sng" algn="ctr">
-                      <a:solidFill>
-                        <a:srgbClr val="CCCCCC"/>
-                      </a:solidFill>
-                      <a:prstDash val="solid"/>
-                    </a:lnT>
-                    <a:lnB w="6350" cap="flat" cmpd="sng" algn="ctr">
-                      <a:solidFill>
-                        <a:srgbClr val="CCCCCC"/>
-                      </a:solidFill>
-                      <a:prstDash val="solid"/>
-                    </a:lnB>
-                  </a:tcPr>
-                </a:tc>
-                <a:tc>
-                  <a:txBody>
-                    <a:bodyPr wrap="square"/>
-                    <a:lstStyle/>
-                    <a:p>
-                      <a:pPr algn="l"/>
-                      <a:r>
-                        <a:rPr sz="900" b="0">
-                          <a:solidFill>
-                            <a:srgbClr val="333333"/>
-                          </a:solidFill>
-                          <a:latin typeface="メイリオ"/>
-                          <a:ea typeface="メイリオ"/>
-                        </a:rPr>
-                        <a:t>要件定義書（案）</a:t>
-                      </a:r>
-                    </a:p>
-                  </a:txBody>
-                  <a:tcPr anchor="ctr">
-                    <a:solidFill>
-                      <a:srgbClr val="F0FAF8"/>
-                    </a:solidFill>
-                    <a:lnL w="6350" cap="flat" cmpd="sng" algn="ctr">
-                      <a:solidFill>
-                        <a:srgbClr val="CCCCCC"/>
-                      </a:solidFill>
-                      <a:prstDash val="solid"/>
-                    </a:lnL>
-                    <a:lnR w="6350" cap="flat" cmpd="sng" algn="ctr">
-                      <a:solidFill>
-                        <a:srgbClr val="CCCCCC"/>
-                      </a:solidFill>
-                      <a:prstDash val="solid"/>
-                    </a:lnR>
-                    <a:lnT w="6350" cap="flat" cmpd="sng" algn="ctr">
-                      <a:solidFill>
-                        <a:srgbClr val="CCCCCC"/>
-                      </a:solidFill>
-                      <a:prstDash val="solid"/>
-                    </a:lnT>
-                    <a:lnB w="6350" cap="flat" cmpd="sng" algn="ctr">
-                      <a:solidFill>
-                        <a:srgbClr val="CCCCCC"/>
-                      </a:solidFill>
-                      <a:prstDash val="solid"/>
-                    </a:lnB>
-                  </a:tcPr>
-                </a:tc>
-                <a:tc>
-                  <a:txBody>
-                    <a:bodyPr wrap="square"/>
-                    <a:lstStyle/>
-                    <a:p>
-                      <a:pPr algn="l"/>
-                      <a:r>
-                        <a:rPr sz="900" b="0">
-                          <a:solidFill>
-                            <a:srgbClr val="333333"/>
-                          </a:solidFill>
-                          <a:latin typeface="メイリオ"/>
-                          <a:ea typeface="メイリオ"/>
-                        </a:rPr>
-                        <a:t>取りまとめ・レビュー</a:t>
-                      </a:r>
-                    </a:p>
-                  </a:txBody>
-                  <a:tcPr anchor="ctr">
-                    <a:solidFill>
-                      <a:srgbClr val="F0FAF8"/>
-                    </a:solidFill>
-                    <a:lnL w="6350" cap="flat" cmpd="sng" algn="ctr">
-                      <a:solidFill>
-                        <a:srgbClr val="CCCCCC"/>
-                      </a:solidFill>
-                      <a:prstDash val="solid"/>
-                    </a:lnL>
-                    <a:lnR w="6350" cap="flat" cmpd="sng" algn="ctr">
-                      <a:solidFill>
-                        <a:srgbClr val="CCCCCC"/>
-                      </a:solidFill>
-                      <a:prstDash val="solid"/>
-                    </a:lnR>
-                    <a:lnT w="6350" cap="flat" cmpd="sng" algn="ctr">
-                      <a:solidFill>
-                        <a:srgbClr val="CCCCCC"/>
-                      </a:solidFill>
-                      <a:prstDash val="solid"/>
-                    </a:lnT>
-                    <a:lnB w="6350" cap="flat" cmpd="sng" algn="ctr">
-                      <a:solidFill>
-                        <a:srgbClr val="CCCCCC"/>
-                      </a:solidFill>
-                      <a:prstDash val="solid"/>
-                    </a:lnB>
-                  </a:tcPr>
-                </a:tc>
-                <a:tc>
-                  <a:txBody>
-                    <a:bodyPr wrap="square"/>
-                    <a:lstStyle/>
-                    <a:p>
-                      <a:pPr algn="ctr"/>
-                      <a:r>
-                        <a:rPr sz="900" b="0">
-                          <a:solidFill>
-                            <a:srgbClr val="333333"/>
-                          </a:solidFill>
-                          <a:latin typeface="メイリオ"/>
-                          <a:ea typeface="メイリオ"/>
-                        </a:rPr>
-                        <a:t>9/24</a:t>
-                      </a:r>
-                    </a:p>
-                  </a:txBody>
-                  <a:tcPr anchor="ctr">
-                    <a:solidFill>
-                      <a:srgbClr val="F0FAF8"/>
-                    </a:solidFill>
-                    <a:lnL w="6350" cap="flat" cmpd="sng" algn="ctr">
-                      <a:solidFill>
-                        <a:srgbClr val="CCCCCC"/>
-                      </a:solidFill>
-                      <a:prstDash val="solid"/>
-                    </a:lnL>
-                    <a:lnR w="6350" cap="flat" cmpd="sng" algn="ctr">
-                      <a:solidFill>
-                        <a:srgbClr val="CCCCCC"/>
-                      </a:solidFill>
-                      <a:prstDash val="solid"/>
-                    </a:lnR>
-                    <a:lnT w="6350" cap="flat" cmpd="sng" algn="ctr">
-                      <a:solidFill>
-                        <a:srgbClr val="CCCCCC"/>
-                      </a:solidFill>
-                      <a:prstDash val="solid"/>
-                    </a:lnT>
-                    <a:lnB w="6350" cap="flat" cmpd="sng" algn="ctr">
-                      <a:solidFill>
-                        <a:srgbClr val="CCCCCC"/>
-                      </a:solidFill>
-                      <a:prstDash val="solid"/>
-                    </a:lnB>
-                  </a:tcPr>
-                </a:tc>
-              </a:tr>
-              <a:tr h="485716">
-                <a:tc>
-                  <a:txBody>
-                    <a:bodyPr wrap="square"/>
-                    <a:lstStyle/>
-                    <a:p>
-                      <a:pPr algn="ctr"/>
-                      <a:r>
-                        <a:rPr sz="900" b="1">
-                          <a:solidFill>
-                            <a:srgbClr val="333333"/>
-                          </a:solidFill>
-                          <a:latin typeface="メイリオ"/>
-                          <a:ea typeface="メイリオ"/>
-                        </a:rPr>
-                        <a:t>6</a:t>
-                      </a:r>
-                    </a:p>
-                  </a:txBody>
-                  <a:tcPr anchor="ctr">
-                    <a:solidFill>
-                      <a:srgbClr val="FFFFFF"/>
-                    </a:solidFill>
-                    <a:lnL w="6350" cap="flat" cmpd="sng" algn="ctr">
-                      <a:solidFill>
-                        <a:srgbClr val="CCCCCC"/>
-                      </a:solidFill>
-                      <a:prstDash val="solid"/>
-                    </a:lnL>
-                    <a:lnR w="6350" cap="flat" cmpd="sng" algn="ctr">
-                      <a:solidFill>
-                        <a:srgbClr val="CCCCCC"/>
-                      </a:solidFill>
-                      <a:prstDash val="solid"/>
-                    </a:lnR>
-                    <a:lnT w="6350" cap="flat" cmpd="sng" algn="ctr">
-                      <a:solidFill>
-                        <a:srgbClr val="CCCCCC"/>
-                      </a:solidFill>
-                      <a:prstDash val="solid"/>
-                    </a:lnT>
-                    <a:lnB w="6350" cap="flat" cmpd="sng" algn="ctr">
-                      <a:solidFill>
-                        <a:srgbClr val="CCCCCC"/>
-                      </a:solidFill>
-                      <a:prstDash val="solid"/>
-                    </a:lnB>
-                  </a:tcPr>
-                </a:tc>
-                <a:tc>
-                  <a:txBody>
-                    <a:bodyPr wrap="square"/>
-                    <a:lstStyle/>
-                    <a:p>
-                      <a:pPr algn="l"/>
-                      <a:r>
-                        <a:rPr sz="900" b="0">
-                          <a:solidFill>
-                            <a:srgbClr val="333333"/>
-                          </a:solidFill>
-                          <a:latin typeface="メイリオ"/>
-                          <a:ea typeface="メイリオ"/>
-                        </a:rPr>
-                        <a:t>納品／正式見積り／ご検収</a:t>
-                      </a:r>
-                    </a:p>
-                  </a:txBody>
-                  <a:tcPr anchor="ctr">
-                    <a:solidFill>
-                      <a:srgbClr val="FFFFFF"/>
-                    </a:solidFill>
-                    <a:lnL w="6350" cap="flat" cmpd="sng" algn="ctr">
-                      <a:solidFill>
-                        <a:srgbClr val="CCCCCC"/>
-                      </a:solidFill>
-                      <a:prstDash val="solid"/>
-                    </a:lnL>
-                    <a:lnR w="6350" cap="flat" cmpd="sng" algn="ctr">
-                      <a:solidFill>
-                        <a:srgbClr val="CCCCCC"/>
-                      </a:solidFill>
-                      <a:prstDash val="solid"/>
-                    </a:lnR>
-                    <a:lnT w="6350" cap="flat" cmpd="sng" algn="ctr">
-                      <a:solidFill>
-                        <a:srgbClr val="CCCCCC"/>
-                      </a:solidFill>
-                      <a:prstDash val="solid"/>
-                    </a:lnT>
-                    <a:lnB w="6350" cap="flat" cmpd="sng" algn="ctr">
-                      <a:solidFill>
-                        <a:srgbClr val="CCCCCC"/>
-                      </a:solidFill>
-                      <a:prstDash val="solid"/>
-                    </a:lnB>
-                  </a:tcPr>
-                </a:tc>
-                <a:tc>
-                  <a:txBody>
-                    <a:bodyPr wrap="square"/>
-                    <a:lstStyle/>
-                    <a:p>
-                      <a:pPr algn="l"/>
-                      <a:r>
-                        <a:rPr sz="900" b="0">
-                          <a:solidFill>
-                            <a:srgbClr val="333333"/>
-                          </a:solidFill>
-                          <a:latin typeface="メイリオ"/>
-                          <a:ea typeface="メイリオ"/>
-                        </a:rPr>
-                        <a:t>要件定義書納品、開発工程見積り、ご検収</a:t>
-                      </a:r>
-                    </a:p>
-                  </a:txBody>
-                  <a:tcPr anchor="ctr">
-                    <a:solidFill>
-                      <a:srgbClr val="FFFFFF"/>
-                    </a:solidFill>
-                    <a:lnL w="6350" cap="flat" cmpd="sng" algn="ctr">
-                      <a:solidFill>
-                        <a:srgbClr val="CCCCCC"/>
-                      </a:solidFill>
-                      <a:prstDash val="solid"/>
-                    </a:lnL>
-                    <a:lnR w="6350" cap="flat" cmpd="sng" algn="ctr">
-                      <a:solidFill>
-                        <a:srgbClr val="CCCCCC"/>
-                      </a:solidFill>
-                      <a:prstDash val="solid"/>
-                    </a:lnR>
-                    <a:lnT w="6350" cap="flat" cmpd="sng" algn="ctr">
-                      <a:solidFill>
-                        <a:srgbClr val="CCCCCC"/>
-                      </a:solidFill>
-                      <a:prstDash val="solid"/>
-                    </a:lnT>
-                    <a:lnB w="6350" cap="flat" cmpd="sng" algn="ctr">
-                      <a:solidFill>
-                        <a:srgbClr val="CCCCCC"/>
-                      </a:solidFill>
-                      <a:prstDash val="solid"/>
-                    </a:lnB>
-                  </a:tcPr>
-                </a:tc>
-                <a:tc>
-                  <a:txBody>
-                    <a:bodyPr wrap="square"/>
-                    <a:lstStyle/>
-                    <a:p>
-                      <a:pPr algn="ctr"/>
-                      <a:r>
-                        <a:rPr sz="900" b="0">
-                          <a:solidFill>
-                            <a:srgbClr val="333333"/>
-                          </a:solidFill>
-                          <a:latin typeface="メイリオ"/>
-                          <a:ea typeface="メイリオ"/>
-                        </a:rPr>
-                        <a:t>9/29</a:t>
-                      </a:r>
-                    </a:p>
-                  </a:txBody>
-                  <a:tcPr anchor="ctr">
-                    <a:solidFill>
-                      <a:srgbClr val="FFFFFF"/>
-                    </a:solidFill>
-                    <a:lnL w="6350" cap="flat" cmpd="sng" algn="ctr">
-                      <a:solidFill>
-                        <a:srgbClr val="CCCCCC"/>
-                      </a:solidFill>
-                      <a:prstDash val="solid"/>
-                    </a:lnL>
-                    <a:lnR w="6350" cap="flat" cmpd="sng" algn="ctr">
-                      <a:solidFill>
-                        <a:srgbClr val="CCCCCC"/>
-                      </a:solidFill>
-                      <a:prstDash val="solid"/>
-                    </a:lnR>
-                    <a:lnT w="6350" cap="flat" cmpd="sng" algn="ctr">
-                      <a:solidFill>
-                        <a:srgbClr val="CCCCCC"/>
-                      </a:solidFill>
-                      <a:prstDash val="solid"/>
-                    </a:lnT>
-                    <a:lnB w="6350" cap="flat" cmpd="sng" algn="ctr">
-                      <a:solidFill>
-                        <a:srgbClr val="CCCCCC"/>
-                      </a:solidFill>
-                      <a:prstDash val="solid"/>
-                    </a:lnB>
-                  </a:tcPr>
-                </a:tc>
-              </a:tr>
-            </a:tbl>
-          </a:graphicData>
-        </a:graphic>
-      </p:graphicFrame>
     </p:spTree>
   </p:cSld>
   <p:clrMapOvr>
@@ -8061,7 +8714,7 @@
         <p:spPr>
           <a:xfrm>
             <a:off x="480000" y="200000"/>
-            <a:ext cx="8500000" cy="450000"/>
+            <a:ext cx="9000000" cy="450000"/>
           </a:xfrm>
           <a:prstGeom prst="rect">
             <a:avLst/>
@@ -8076,7 +8729,2380 @@
           <a:p>
             <a:pPr algn="l"/>
             <a:r>
-              <a:rPr sz="2400" b="1">
+              <a:rPr sz="2200" b="1">
+                <a:solidFill>
+                  <a:srgbClr val="3F3F3F"/>
+                </a:solidFill>
+                <a:latin typeface="メイリオ"/>
+                <a:ea typeface="メイリオ"/>
+              </a:rPr>
+              <a:t>要件定義フェーズの進め方（概要）</a:t>
+            </a:r>
+          </a:p>
+        </p:txBody>
+      </p:sp>
+      <p:sp>
+        <p:nvSpPr>
+          <p:cNvPr id="4" name="Rounded Rectangle 3"/>
+          <p:cNvSpPr/>
+          <p:nvPr/>
+        </p:nvSpPr>
+        <p:spPr>
+          <a:xfrm>
+            <a:off x="400000" y="850000"/>
+            <a:ext cx="1500000" cy="1450000"/>
+          </a:xfrm>
+          <a:prstGeom prst="roundRect">
+            <a:avLst/>
+          </a:prstGeom>
+          <a:solidFill>
+            <a:srgbClr val="DEF3F1"/>
+          </a:solidFill>
+          <a:ln w="19050">
+            <a:solidFill>
+              <a:srgbClr val="00A693"/>
+            </a:solidFill>
+          </a:ln>
+        </p:spPr>
+        <p:style>
+          <a:lnRef idx="1">
+            <a:schemeClr val="accent1"/>
+          </a:lnRef>
+          <a:fillRef idx="3">
+            <a:schemeClr val="accent1"/>
+          </a:fillRef>
+          <a:effectRef idx="2">
+            <a:schemeClr val="accent1"/>
+          </a:effectRef>
+          <a:fontRef idx="minor">
+            <a:schemeClr val="lt1"/>
+          </a:fontRef>
+        </p:style>
+        <p:txBody>
+          <a:bodyPr rtlCol="0" anchor="ctr" wrap="square"/>
+          <a:lstStyle/>
+          <a:p>
+            <a:pPr algn="ctr"/>
+            <a:r>
+              <a:rPr sz="1100" b="1">
+                <a:solidFill>
+                  <a:srgbClr val="007A6E"/>
+                </a:solidFill>
+                <a:latin typeface="メイリオ"/>
+                <a:ea typeface="メイリオ"/>
+              </a:rPr>
+              <a:t>1</a:t>
+            </a:r>
+          </a:p>
+          <a:p>
+            <a:pPr algn="ctr"/>
+            <a:r>
+              <a:rPr sz="1100" b="1">
+                <a:solidFill>
+                  <a:srgbClr val="007A6E"/>
+                </a:solidFill>
+                <a:latin typeface="メイリオ"/>
+                <a:ea typeface="メイリオ"/>
+              </a:rPr>
+              <a:t>キックオフ</a:t>
+            </a:r>
+          </a:p>
+          <a:p/>
+          <a:p>
+            <a:pPr algn="ctr"/>
+            <a:r>
+              <a:rPr sz="900" b="0">
+                <a:solidFill>
+                  <a:srgbClr val="333333"/>
+                </a:solidFill>
+                <a:latin typeface="メイリオ"/>
+                <a:ea typeface="メイリオ"/>
+              </a:rPr>
+              <a:t>8/19</a:t>
+            </a:r>
+          </a:p>
+          <a:p>
+            <a:pPr algn="ctr"/>
+            <a:r>
+              <a:rPr sz="900" b="0">
+                <a:solidFill>
+                  <a:srgbClr val="333333"/>
+                </a:solidFill>
+                <a:latin typeface="メイリオ"/>
+                <a:ea typeface="メイリオ"/>
+              </a:rPr>
+              <a:t>進め方・すり合わせ</a:t>
+            </a:r>
+          </a:p>
+        </p:txBody>
+      </p:sp>
+      <p:sp>
+        <p:nvSpPr>
+          <p:cNvPr id="5" name="Right Arrow 4"/>
+          <p:cNvSpPr/>
+          <p:nvPr/>
+        </p:nvSpPr>
+        <p:spPr>
+          <a:xfrm>
+            <a:off x="1930000" y="1400000"/>
+            <a:ext cx="160000" cy="180000"/>
+          </a:xfrm>
+          <a:prstGeom prst="rightArrow">
+            <a:avLst/>
+          </a:prstGeom>
+          <a:solidFill>
+            <a:srgbClr val="00A693"/>
+          </a:solidFill>
+          <a:ln>
+            <a:noFill/>
+          </a:ln>
+        </p:spPr>
+        <p:style>
+          <a:lnRef idx="1">
+            <a:schemeClr val="accent1"/>
+          </a:lnRef>
+          <a:fillRef idx="3">
+            <a:schemeClr val="accent1"/>
+          </a:fillRef>
+          <a:effectRef idx="2">
+            <a:schemeClr val="accent1"/>
+          </a:effectRef>
+          <a:fontRef idx="minor">
+            <a:schemeClr val="lt1"/>
+          </a:fontRef>
+        </p:style>
+        <p:txBody>
+          <a:bodyPr rtlCol="0" anchor="ctr"/>
+          <a:lstStyle/>
+          <a:p>
+            <a:pPr algn="ctr"/>
+          </a:p>
+        </p:txBody>
+      </p:sp>
+      <p:sp>
+        <p:nvSpPr>
+          <p:cNvPr id="6" name="Rounded Rectangle 5"/>
+          <p:cNvSpPr/>
+          <p:nvPr/>
+        </p:nvSpPr>
+        <p:spPr>
+          <a:xfrm>
+            <a:off x="2260000" y="850000"/>
+            <a:ext cx="1500000" cy="1450000"/>
+          </a:xfrm>
+          <a:prstGeom prst="roundRect">
+            <a:avLst/>
+          </a:prstGeom>
+          <a:solidFill>
+            <a:srgbClr val="DEF3F1"/>
+          </a:solidFill>
+          <a:ln w="19050">
+            <a:solidFill>
+              <a:srgbClr val="00A693"/>
+            </a:solidFill>
+          </a:ln>
+        </p:spPr>
+        <p:style>
+          <a:lnRef idx="1">
+            <a:schemeClr val="accent1"/>
+          </a:lnRef>
+          <a:fillRef idx="3">
+            <a:schemeClr val="accent1"/>
+          </a:fillRef>
+          <a:effectRef idx="2">
+            <a:schemeClr val="accent1"/>
+          </a:effectRef>
+          <a:fontRef idx="minor">
+            <a:schemeClr val="lt1"/>
+          </a:fontRef>
+        </p:style>
+        <p:txBody>
+          <a:bodyPr rtlCol="0" anchor="ctr" wrap="square"/>
+          <a:lstStyle/>
+          <a:p>
+            <a:pPr algn="ctr"/>
+            <a:r>
+              <a:rPr sz="1100" b="1">
+                <a:solidFill>
+                  <a:srgbClr val="007A6E"/>
+                </a:solidFill>
+                <a:latin typeface="メイリオ"/>
+                <a:ea typeface="メイリオ"/>
+              </a:rPr>
+              <a:t>2〜3</a:t>
+            </a:r>
+          </a:p>
+          <a:p>
+            <a:pPr algn="ctr"/>
+            <a:r>
+              <a:rPr sz="1100" b="1">
+                <a:solidFill>
+                  <a:srgbClr val="007A6E"/>
+                </a:solidFill>
+                <a:latin typeface="メイリオ"/>
+                <a:ea typeface="メイリオ"/>
+              </a:rPr>
+              <a:t>業務フロー</a:t>
+            </a:r>
+          </a:p>
+          <a:p/>
+          <a:p>
+            <a:pPr algn="ctr"/>
+            <a:r>
+              <a:rPr sz="900" b="0">
+                <a:solidFill>
+                  <a:srgbClr val="333333"/>
+                </a:solidFill>
+                <a:latin typeface="メイリオ"/>
+                <a:ea typeface="メイリオ"/>
+              </a:rPr>
+              <a:t>8/24・8/27</a:t>
+            </a:r>
+          </a:p>
+          <a:p>
+            <a:pPr algn="ctr"/>
+            <a:r>
+              <a:rPr sz="900" b="0">
+                <a:solidFill>
+                  <a:srgbClr val="333333"/>
+                </a:solidFill>
+                <a:latin typeface="メイリオ"/>
+                <a:ea typeface="メイリオ"/>
+              </a:rPr>
+              <a:t>管理機能単位で整理</a:t>
+            </a:r>
+          </a:p>
+        </p:txBody>
+      </p:sp>
+      <p:sp>
+        <p:nvSpPr>
+          <p:cNvPr id="7" name="Right Arrow 6"/>
+          <p:cNvSpPr/>
+          <p:nvPr/>
+        </p:nvSpPr>
+        <p:spPr>
+          <a:xfrm>
+            <a:off x="3790000" y="1400000"/>
+            <a:ext cx="160000" cy="180000"/>
+          </a:xfrm>
+          <a:prstGeom prst="rightArrow">
+            <a:avLst/>
+          </a:prstGeom>
+          <a:solidFill>
+            <a:srgbClr val="00A693"/>
+          </a:solidFill>
+          <a:ln>
+            <a:noFill/>
+          </a:ln>
+        </p:spPr>
+        <p:style>
+          <a:lnRef idx="1">
+            <a:schemeClr val="accent1"/>
+          </a:lnRef>
+          <a:fillRef idx="3">
+            <a:schemeClr val="accent1"/>
+          </a:fillRef>
+          <a:effectRef idx="2">
+            <a:schemeClr val="accent1"/>
+          </a:effectRef>
+          <a:fontRef idx="minor">
+            <a:schemeClr val="lt1"/>
+          </a:fontRef>
+        </p:style>
+        <p:txBody>
+          <a:bodyPr rtlCol="0" anchor="ctr"/>
+          <a:lstStyle/>
+          <a:p>
+            <a:pPr algn="ctr"/>
+          </a:p>
+        </p:txBody>
+      </p:sp>
+      <p:sp>
+        <p:nvSpPr>
+          <p:cNvPr id="8" name="Rounded Rectangle 7"/>
+          <p:cNvSpPr/>
+          <p:nvPr/>
+        </p:nvSpPr>
+        <p:spPr>
+          <a:xfrm>
+            <a:off x="4120000" y="850000"/>
+            <a:ext cx="1500000" cy="1450000"/>
+          </a:xfrm>
+          <a:prstGeom prst="roundRect">
+            <a:avLst/>
+          </a:prstGeom>
+          <a:solidFill>
+            <a:srgbClr val="DEF3F1"/>
+          </a:solidFill>
+          <a:ln w="19050">
+            <a:solidFill>
+              <a:srgbClr val="00A693"/>
+            </a:solidFill>
+          </a:ln>
+        </p:spPr>
+        <p:style>
+          <a:lnRef idx="1">
+            <a:schemeClr val="accent1"/>
+          </a:lnRef>
+          <a:fillRef idx="3">
+            <a:schemeClr val="accent1"/>
+          </a:fillRef>
+          <a:effectRef idx="2">
+            <a:schemeClr val="accent1"/>
+          </a:effectRef>
+          <a:fontRef idx="minor">
+            <a:schemeClr val="lt1"/>
+          </a:fontRef>
+        </p:style>
+        <p:txBody>
+          <a:bodyPr rtlCol="0" anchor="ctr" wrap="square"/>
+          <a:lstStyle/>
+          <a:p>
+            <a:pPr algn="ctr"/>
+            <a:r>
+              <a:rPr sz="1100" b="1">
+                <a:solidFill>
+                  <a:srgbClr val="007A6E"/>
+                </a:solidFill>
+                <a:latin typeface="メイリオ"/>
+                <a:ea typeface="メイリオ"/>
+              </a:rPr>
+              <a:t>4</a:t>
+            </a:r>
+          </a:p>
+          <a:p>
+            <a:pPr algn="ctr"/>
+            <a:r>
+              <a:rPr sz="1100" b="1">
+                <a:solidFill>
+                  <a:srgbClr val="007A6E"/>
+                </a:solidFill>
+                <a:latin typeface="メイリオ"/>
+                <a:ea typeface="メイリオ"/>
+              </a:rPr>
+              <a:t>機能詳細</a:t>
+            </a:r>
+          </a:p>
+          <a:p/>
+          <a:p>
+            <a:pPr algn="ctr"/>
+            <a:r>
+              <a:rPr sz="900" b="0">
+                <a:solidFill>
+                  <a:srgbClr val="333333"/>
+                </a:solidFill>
+                <a:latin typeface="メイリオ"/>
+                <a:ea typeface="メイリオ"/>
+              </a:rPr>
+              <a:t>9/9</a:t>
+            </a:r>
+          </a:p>
+          <a:p>
+            <a:pPr algn="ctr"/>
+            <a:r>
+              <a:rPr sz="900" b="0">
+                <a:solidFill>
+                  <a:srgbClr val="333333"/>
+                </a:solidFill>
+                <a:latin typeface="メイリオ"/>
+                <a:ea typeface="メイリオ"/>
+              </a:rPr>
+              <a:t>Fit&amp;Gap</a:t>
+            </a:r>
+          </a:p>
+          <a:p>
+            <a:pPr algn="ctr"/>
+            <a:r>
+              <a:rPr sz="900" b="0">
+                <a:solidFill>
+                  <a:srgbClr val="333333"/>
+                </a:solidFill>
+                <a:latin typeface="メイリオ"/>
+                <a:ea typeface="メイリオ"/>
+              </a:rPr>
+              <a:t>フロント確認</a:t>
+            </a:r>
+          </a:p>
+        </p:txBody>
+      </p:sp>
+      <p:sp>
+        <p:nvSpPr>
+          <p:cNvPr id="9" name="Right Arrow 8"/>
+          <p:cNvSpPr/>
+          <p:nvPr/>
+        </p:nvSpPr>
+        <p:spPr>
+          <a:xfrm>
+            <a:off x="5650000" y="1400000"/>
+            <a:ext cx="160000" cy="180000"/>
+          </a:xfrm>
+          <a:prstGeom prst="rightArrow">
+            <a:avLst/>
+          </a:prstGeom>
+          <a:solidFill>
+            <a:srgbClr val="00A693"/>
+          </a:solidFill>
+          <a:ln>
+            <a:noFill/>
+          </a:ln>
+        </p:spPr>
+        <p:style>
+          <a:lnRef idx="1">
+            <a:schemeClr val="accent1"/>
+          </a:lnRef>
+          <a:fillRef idx="3">
+            <a:schemeClr val="accent1"/>
+          </a:fillRef>
+          <a:effectRef idx="2">
+            <a:schemeClr val="accent1"/>
+          </a:effectRef>
+          <a:fontRef idx="minor">
+            <a:schemeClr val="lt1"/>
+          </a:fontRef>
+        </p:style>
+        <p:txBody>
+          <a:bodyPr rtlCol="0" anchor="ctr"/>
+          <a:lstStyle/>
+          <a:p>
+            <a:pPr algn="ctr"/>
+          </a:p>
+        </p:txBody>
+      </p:sp>
+      <p:sp>
+        <p:nvSpPr>
+          <p:cNvPr id="10" name="Rounded Rectangle 9"/>
+          <p:cNvSpPr/>
+          <p:nvPr/>
+        </p:nvSpPr>
+        <p:spPr>
+          <a:xfrm>
+            <a:off x="5980000" y="850000"/>
+            <a:ext cx="1500000" cy="1450000"/>
+          </a:xfrm>
+          <a:prstGeom prst="roundRect">
+            <a:avLst/>
+          </a:prstGeom>
+          <a:solidFill>
+            <a:srgbClr val="DEF3F1"/>
+          </a:solidFill>
+          <a:ln w="19050">
+            <a:solidFill>
+              <a:srgbClr val="00A693"/>
+            </a:solidFill>
+          </a:ln>
+        </p:spPr>
+        <p:style>
+          <a:lnRef idx="1">
+            <a:schemeClr val="accent1"/>
+          </a:lnRef>
+          <a:fillRef idx="3">
+            <a:schemeClr val="accent1"/>
+          </a:fillRef>
+          <a:effectRef idx="2">
+            <a:schemeClr val="accent1"/>
+          </a:effectRef>
+          <a:fontRef idx="minor">
+            <a:schemeClr val="lt1"/>
+          </a:fontRef>
+        </p:style>
+        <p:txBody>
+          <a:bodyPr rtlCol="0" anchor="ctr" wrap="square"/>
+          <a:lstStyle/>
+          <a:p>
+            <a:pPr algn="ctr"/>
+            <a:r>
+              <a:rPr sz="1100" b="1">
+                <a:solidFill>
+                  <a:srgbClr val="007A6E"/>
+                </a:solidFill>
+                <a:latin typeface="メイリオ"/>
+                <a:ea typeface="メイリオ"/>
+              </a:rPr>
+              <a:t>5</a:t>
+            </a:r>
+          </a:p>
+          <a:p>
+            <a:pPr algn="ctr"/>
+            <a:r>
+              <a:rPr sz="1100" b="1">
+                <a:solidFill>
+                  <a:srgbClr val="007A6E"/>
+                </a:solidFill>
+                <a:latin typeface="メイリオ"/>
+                <a:ea typeface="メイリオ"/>
+              </a:rPr>
+              <a:t>非機能</a:t>
+            </a:r>
+          </a:p>
+          <a:p/>
+          <a:p>
+            <a:pPr algn="ctr"/>
+            <a:r>
+              <a:rPr sz="900" b="0">
+                <a:solidFill>
+                  <a:srgbClr val="333333"/>
+                </a:solidFill>
+                <a:latin typeface="メイリオ"/>
+                <a:ea typeface="メイリオ"/>
+              </a:rPr>
+              <a:t>9/16</a:t>
+            </a:r>
+          </a:p>
+          <a:p>
+            <a:pPr algn="ctr"/>
+            <a:r>
+              <a:rPr sz="900" b="0">
+                <a:solidFill>
+                  <a:srgbClr val="333333"/>
+                </a:solidFill>
+                <a:latin typeface="メイリオ"/>
+                <a:ea typeface="メイリオ"/>
+              </a:rPr>
+              <a:t>性能・運用等</a:t>
+            </a:r>
+          </a:p>
+        </p:txBody>
+      </p:sp>
+      <p:sp>
+        <p:nvSpPr>
+          <p:cNvPr id="11" name="Right Arrow 10"/>
+          <p:cNvSpPr/>
+          <p:nvPr/>
+        </p:nvSpPr>
+        <p:spPr>
+          <a:xfrm>
+            <a:off x="7510000" y="1400000"/>
+            <a:ext cx="160000" cy="180000"/>
+          </a:xfrm>
+          <a:prstGeom prst="rightArrow">
+            <a:avLst/>
+          </a:prstGeom>
+          <a:solidFill>
+            <a:srgbClr val="00A693"/>
+          </a:solidFill>
+          <a:ln>
+            <a:noFill/>
+          </a:ln>
+        </p:spPr>
+        <p:style>
+          <a:lnRef idx="1">
+            <a:schemeClr val="accent1"/>
+          </a:lnRef>
+          <a:fillRef idx="3">
+            <a:schemeClr val="accent1"/>
+          </a:fillRef>
+          <a:effectRef idx="2">
+            <a:schemeClr val="accent1"/>
+          </a:effectRef>
+          <a:fontRef idx="minor">
+            <a:schemeClr val="lt1"/>
+          </a:fontRef>
+        </p:style>
+        <p:txBody>
+          <a:bodyPr rtlCol="0" anchor="ctr"/>
+          <a:lstStyle/>
+          <a:p>
+            <a:pPr algn="ctr"/>
+          </a:p>
+        </p:txBody>
+      </p:sp>
+      <p:sp>
+        <p:nvSpPr>
+          <p:cNvPr id="12" name="Rounded Rectangle 11"/>
+          <p:cNvSpPr/>
+          <p:nvPr/>
+        </p:nvSpPr>
+        <p:spPr>
+          <a:xfrm>
+            <a:off x="7840000" y="850000"/>
+            <a:ext cx="1500000" cy="1450000"/>
+          </a:xfrm>
+          <a:prstGeom prst="roundRect">
+            <a:avLst/>
+          </a:prstGeom>
+          <a:solidFill>
+            <a:srgbClr val="DEF3F1"/>
+          </a:solidFill>
+          <a:ln w="19050">
+            <a:solidFill>
+              <a:srgbClr val="00A693"/>
+            </a:solidFill>
+          </a:ln>
+        </p:spPr>
+        <p:style>
+          <a:lnRef idx="1">
+            <a:schemeClr val="accent1"/>
+          </a:lnRef>
+          <a:fillRef idx="3">
+            <a:schemeClr val="accent1"/>
+          </a:fillRef>
+          <a:effectRef idx="2">
+            <a:schemeClr val="accent1"/>
+          </a:effectRef>
+          <a:fontRef idx="minor">
+            <a:schemeClr val="lt1"/>
+          </a:fontRef>
+        </p:style>
+        <p:txBody>
+          <a:bodyPr rtlCol="0" anchor="ctr" wrap="square"/>
+          <a:lstStyle/>
+          <a:p>
+            <a:pPr algn="ctr"/>
+            <a:r>
+              <a:rPr sz="1100" b="1">
+                <a:solidFill>
+                  <a:srgbClr val="007A6E"/>
+                </a:solidFill>
+                <a:latin typeface="メイリオ"/>
+                <a:ea typeface="メイリオ"/>
+              </a:rPr>
+              <a:t>6〜7</a:t>
+            </a:r>
+          </a:p>
+          <a:p>
+            <a:pPr algn="ctr"/>
+            <a:r>
+              <a:rPr sz="1100" b="1">
+                <a:solidFill>
+                  <a:srgbClr val="007A6E"/>
+                </a:solidFill>
+                <a:latin typeface="メイリオ"/>
+                <a:ea typeface="メイリオ"/>
+              </a:rPr>
+              <a:t>まとめ・納品</a:t>
+            </a:r>
+          </a:p>
+          <a:p/>
+          <a:p>
+            <a:pPr algn="ctr"/>
+            <a:r>
+              <a:rPr sz="900" b="0">
+                <a:solidFill>
+                  <a:srgbClr val="333333"/>
+                </a:solidFill>
+                <a:latin typeface="メイリオ"/>
+                <a:ea typeface="メイリオ"/>
+              </a:rPr>
+              <a:t>9/24・9/29</a:t>
+            </a:r>
+          </a:p>
+          <a:p>
+            <a:pPr algn="ctr"/>
+            <a:r>
+              <a:rPr sz="900" b="0">
+                <a:solidFill>
+                  <a:srgbClr val="333333"/>
+                </a:solidFill>
+                <a:latin typeface="メイリオ"/>
+                <a:ea typeface="メイリオ"/>
+              </a:rPr>
+              <a:t>見積り／ご検収</a:t>
+            </a:r>
+          </a:p>
+        </p:txBody>
+      </p:sp>
+      <p:sp>
+        <p:nvSpPr>
+          <p:cNvPr id="13" name="TextBox 12"/>
+          <p:cNvSpPr txBox="1"/>
+          <p:nvPr/>
+        </p:nvSpPr>
+        <p:spPr>
+          <a:xfrm>
+            <a:off x="450000" y="2500000"/>
+            <a:ext cx="9000000" cy="280000"/>
+          </a:xfrm>
+          <a:prstGeom prst="rect">
+            <a:avLst/>
+          </a:prstGeom>
+          <a:noFill/>
+        </p:spPr>
+        <p:txBody>
+          <a:bodyPr wrap="square">
+            <a:spAutoFit/>
+          </a:bodyPr>
+          <a:lstStyle/>
+          <a:p>
+            <a:pPr algn="l"/>
+            <a:r>
+              <a:rPr sz="1400" b="1">
+                <a:solidFill>
+                  <a:srgbClr val="333333"/>
+                </a:solidFill>
+                <a:latin typeface="メイリオ"/>
+                <a:ea typeface="メイリオ"/>
+              </a:rPr>
+              <a:t>主な成果物・作業項目</a:t>
+            </a:r>
+          </a:p>
+        </p:txBody>
+      </p:sp>
+      <p:graphicFrame>
+        <p:nvGraphicFramePr>
+          <p:cNvPr id="14" name="Table 13"/>
+          <p:cNvGraphicFramePr>
+            <a:graphicFrameLocks noGrp="1"/>
+          </p:cNvGraphicFramePr>
+          <p:nvPr/>
+        </p:nvGraphicFramePr>
+        <p:xfrm>
+          <a:off x="450000" y="2850000"/>
+          <a:ext cx="9000000" cy="3600000"/>
+        </p:xfrm>
+        <a:graphic>
+          <a:graphicData uri="http://schemas.openxmlformats.org/drawingml/2006/table">
+            <a:tbl>
+              <a:tblPr firstRow="1" bandRow="1">
+                <a:tableStyleId>{5C22544A-7EE6-4342-B048-85BDC9FD1C3A}</a:tableStyleId>
+              </a:tblPr>
+              <a:tblGrid>
+                <a:gridCol w="700000"/>
+                <a:gridCol w="2600000"/>
+                <a:gridCol w="4000000"/>
+                <a:gridCol w="1700000"/>
+              </a:tblGrid>
+              <a:tr h="450000">
+                <a:tc>
+                  <a:txBody>
+                    <a:bodyPr wrap="square"/>
+                    <a:lstStyle/>
+                    <a:p>
+                      <a:pPr algn="ctr"/>
+                      <a:r>
+                        <a:rPr sz="1000" b="1">
+                          <a:solidFill>
+                            <a:srgbClr val="FFFFFF"/>
+                          </a:solidFill>
+                          <a:latin typeface="メイリオ"/>
+                          <a:ea typeface="メイリオ"/>
+                        </a:rPr>
+                        <a:t>No</a:t>
+                      </a:r>
+                    </a:p>
+                  </a:txBody>
+                  <a:tcPr anchor="ctr">
+                    <a:solidFill>
+                      <a:srgbClr val="00A693"/>
+                    </a:solidFill>
+                    <a:lnL w="9525" cap="flat" cmpd="sng" algn="ctr">
+                      <a:solidFill>
+                        <a:srgbClr val="007A6E"/>
+                      </a:solidFill>
+                      <a:prstDash val="solid"/>
+                    </a:lnL>
+                    <a:lnR w="9525" cap="flat" cmpd="sng" algn="ctr">
+                      <a:solidFill>
+                        <a:srgbClr val="007A6E"/>
+                      </a:solidFill>
+                      <a:prstDash val="solid"/>
+                    </a:lnR>
+                    <a:lnT w="9525" cap="flat" cmpd="sng" algn="ctr">
+                      <a:solidFill>
+                        <a:srgbClr val="007A6E"/>
+                      </a:solidFill>
+                      <a:prstDash val="solid"/>
+                    </a:lnT>
+                    <a:lnB w="9525" cap="flat" cmpd="sng" algn="ctr">
+                      <a:solidFill>
+                        <a:srgbClr val="007A6E"/>
+                      </a:solidFill>
+                      <a:prstDash val="solid"/>
+                    </a:lnB>
+                  </a:tcPr>
+                </a:tc>
+                <a:tc>
+                  <a:txBody>
+                    <a:bodyPr wrap="square"/>
+                    <a:lstStyle/>
+                    <a:p>
+                      <a:pPr algn="ctr"/>
+                      <a:r>
+                        <a:rPr sz="1000" b="1">
+                          <a:solidFill>
+                            <a:srgbClr val="FFFFFF"/>
+                          </a:solidFill>
+                          <a:latin typeface="メイリオ"/>
+                          <a:ea typeface="メイリオ"/>
+                        </a:rPr>
+                        <a:t>作業／成果物</a:t>
+                      </a:r>
+                    </a:p>
+                  </a:txBody>
+                  <a:tcPr anchor="ctr">
+                    <a:solidFill>
+                      <a:srgbClr val="00A693"/>
+                    </a:solidFill>
+                    <a:lnL w="9525" cap="flat" cmpd="sng" algn="ctr">
+                      <a:solidFill>
+                        <a:srgbClr val="007A6E"/>
+                      </a:solidFill>
+                      <a:prstDash val="solid"/>
+                    </a:lnL>
+                    <a:lnR w="9525" cap="flat" cmpd="sng" algn="ctr">
+                      <a:solidFill>
+                        <a:srgbClr val="007A6E"/>
+                      </a:solidFill>
+                      <a:prstDash val="solid"/>
+                    </a:lnR>
+                    <a:lnT w="9525" cap="flat" cmpd="sng" algn="ctr">
+                      <a:solidFill>
+                        <a:srgbClr val="007A6E"/>
+                      </a:solidFill>
+                      <a:prstDash val="solid"/>
+                    </a:lnT>
+                    <a:lnB w="9525" cap="flat" cmpd="sng" algn="ctr">
+                      <a:solidFill>
+                        <a:srgbClr val="007A6E"/>
+                      </a:solidFill>
+                      <a:prstDash val="solid"/>
+                    </a:lnB>
+                  </a:tcPr>
+                </a:tc>
+                <a:tc>
+                  <a:txBody>
+                    <a:bodyPr wrap="square"/>
+                    <a:lstStyle/>
+                    <a:p>
+                      <a:pPr algn="ctr"/>
+                      <a:r>
+                        <a:rPr sz="1000" b="1">
+                          <a:solidFill>
+                            <a:srgbClr val="FFFFFF"/>
+                          </a:solidFill>
+                          <a:latin typeface="メイリオ"/>
+                          <a:ea typeface="メイリオ"/>
+                        </a:rPr>
+                        <a:t>内容</a:t>
+                      </a:r>
+                    </a:p>
+                  </a:txBody>
+                  <a:tcPr anchor="ctr">
+                    <a:solidFill>
+                      <a:srgbClr val="00A693"/>
+                    </a:solidFill>
+                    <a:lnL w="9525" cap="flat" cmpd="sng" algn="ctr">
+                      <a:solidFill>
+                        <a:srgbClr val="007A6E"/>
+                      </a:solidFill>
+                      <a:prstDash val="solid"/>
+                    </a:lnL>
+                    <a:lnR w="9525" cap="flat" cmpd="sng" algn="ctr">
+                      <a:solidFill>
+                        <a:srgbClr val="007A6E"/>
+                      </a:solidFill>
+                      <a:prstDash val="solid"/>
+                    </a:lnR>
+                    <a:lnT w="9525" cap="flat" cmpd="sng" algn="ctr">
+                      <a:solidFill>
+                        <a:srgbClr val="007A6E"/>
+                      </a:solidFill>
+                      <a:prstDash val="solid"/>
+                    </a:lnT>
+                    <a:lnB w="9525" cap="flat" cmpd="sng" algn="ctr">
+                      <a:solidFill>
+                        <a:srgbClr val="007A6E"/>
+                      </a:solidFill>
+                      <a:prstDash val="solid"/>
+                    </a:lnB>
+                  </a:tcPr>
+                </a:tc>
+                <a:tc>
+                  <a:txBody>
+                    <a:bodyPr wrap="square"/>
+                    <a:lstStyle/>
+                    <a:p>
+                      <a:pPr algn="ctr"/>
+                      <a:r>
+                        <a:rPr sz="1000" b="1">
+                          <a:solidFill>
+                            <a:srgbClr val="FFFFFF"/>
+                          </a:solidFill>
+                          <a:latin typeface="メイリオ"/>
+                          <a:ea typeface="メイリオ"/>
+                        </a:rPr>
+                        <a:t>目安時期</a:t>
+                      </a:r>
+                    </a:p>
+                  </a:txBody>
+                  <a:tcPr anchor="ctr">
+                    <a:solidFill>
+                      <a:srgbClr val="00A693"/>
+                    </a:solidFill>
+                    <a:lnL w="9525" cap="flat" cmpd="sng" algn="ctr">
+                      <a:solidFill>
+                        <a:srgbClr val="007A6E"/>
+                      </a:solidFill>
+                      <a:prstDash val="solid"/>
+                    </a:lnL>
+                    <a:lnR w="9525" cap="flat" cmpd="sng" algn="ctr">
+                      <a:solidFill>
+                        <a:srgbClr val="007A6E"/>
+                      </a:solidFill>
+                      <a:prstDash val="solid"/>
+                    </a:lnR>
+                    <a:lnT w="9525" cap="flat" cmpd="sng" algn="ctr">
+                      <a:solidFill>
+                        <a:srgbClr val="007A6E"/>
+                      </a:solidFill>
+                      <a:prstDash val="solid"/>
+                    </a:lnT>
+                    <a:lnB w="9525" cap="flat" cmpd="sng" algn="ctr">
+                      <a:solidFill>
+                        <a:srgbClr val="007A6E"/>
+                      </a:solidFill>
+                      <a:prstDash val="solid"/>
+                    </a:lnB>
+                  </a:tcPr>
+                </a:tc>
+              </a:tr>
+              <a:tr h="450000">
+                <a:tc>
+                  <a:txBody>
+                    <a:bodyPr wrap="square"/>
+                    <a:lstStyle/>
+                    <a:p>
+                      <a:pPr algn="ctr"/>
+                      <a:r>
+                        <a:rPr sz="900" b="1">
+                          <a:solidFill>
+                            <a:srgbClr val="333333"/>
+                          </a:solidFill>
+                          <a:latin typeface="メイリオ"/>
+                          <a:ea typeface="メイリオ"/>
+                        </a:rPr>
+                        <a:t>1</a:t>
+                      </a:r>
+                    </a:p>
+                  </a:txBody>
+                  <a:tcPr anchor="ctr">
+                    <a:solidFill>
+                      <a:srgbClr val="F0FAF8"/>
+                    </a:solidFill>
+                    <a:lnL w="6350" cap="flat" cmpd="sng" algn="ctr">
+                      <a:solidFill>
+                        <a:srgbClr val="CCCCCC"/>
+                      </a:solidFill>
+                      <a:prstDash val="solid"/>
+                    </a:lnL>
+                    <a:lnR w="6350" cap="flat" cmpd="sng" algn="ctr">
+                      <a:solidFill>
+                        <a:srgbClr val="CCCCCC"/>
+                      </a:solidFill>
+                      <a:prstDash val="solid"/>
+                    </a:lnR>
+                    <a:lnT w="6350" cap="flat" cmpd="sng" algn="ctr">
+                      <a:solidFill>
+                        <a:srgbClr val="CCCCCC"/>
+                      </a:solidFill>
+                      <a:prstDash val="solid"/>
+                    </a:lnT>
+                    <a:lnB w="6350" cap="flat" cmpd="sng" algn="ctr">
+                      <a:solidFill>
+                        <a:srgbClr val="CCCCCC"/>
+                      </a:solidFill>
+                      <a:prstDash val="solid"/>
+                    </a:lnB>
+                  </a:tcPr>
+                </a:tc>
+                <a:tc>
+                  <a:txBody>
+                    <a:bodyPr wrap="square"/>
+                    <a:lstStyle/>
+                    <a:p>
+                      <a:pPr algn="l"/>
+                      <a:r>
+                        <a:rPr sz="900" b="0">
+                          <a:solidFill>
+                            <a:srgbClr val="333333"/>
+                          </a:solidFill>
+                          <a:latin typeface="メイリオ"/>
+                          <a:ea typeface="メイリオ"/>
+                        </a:rPr>
+                        <a:t>キックオフ／ご要件すり合わせ</a:t>
+                      </a:r>
+                    </a:p>
+                  </a:txBody>
+                  <a:tcPr anchor="ctr">
+                    <a:solidFill>
+                      <a:srgbClr val="F0FAF8"/>
+                    </a:solidFill>
+                    <a:lnL w="6350" cap="flat" cmpd="sng" algn="ctr">
+                      <a:solidFill>
+                        <a:srgbClr val="CCCCCC"/>
+                      </a:solidFill>
+                      <a:prstDash val="solid"/>
+                    </a:lnL>
+                    <a:lnR w="6350" cap="flat" cmpd="sng" algn="ctr">
+                      <a:solidFill>
+                        <a:srgbClr val="CCCCCC"/>
+                      </a:solidFill>
+                      <a:prstDash val="solid"/>
+                    </a:lnR>
+                    <a:lnT w="6350" cap="flat" cmpd="sng" algn="ctr">
+                      <a:solidFill>
+                        <a:srgbClr val="CCCCCC"/>
+                      </a:solidFill>
+                      <a:prstDash val="solid"/>
+                    </a:lnT>
+                    <a:lnB w="6350" cap="flat" cmpd="sng" algn="ctr">
+                      <a:solidFill>
+                        <a:srgbClr val="CCCCCC"/>
+                      </a:solidFill>
+                      <a:prstDash val="solid"/>
+                    </a:lnB>
+                  </a:tcPr>
+                </a:tc>
+                <a:tc>
+                  <a:txBody>
+                    <a:bodyPr wrap="square"/>
+                    <a:lstStyle/>
+                    <a:p>
+                      <a:pPr algn="l"/>
+                      <a:r>
+                        <a:rPr sz="900" b="0">
+                          <a:solidFill>
+                            <a:srgbClr val="333333"/>
+                          </a:solidFill>
+                          <a:latin typeface="メイリオ"/>
+                          <a:ea typeface="メイリオ"/>
+                        </a:rPr>
+                        <a:t>進め方・体制合意、既出要件の論点整理</a:t>
+                      </a:r>
+                    </a:p>
+                  </a:txBody>
+                  <a:tcPr anchor="ctr">
+                    <a:solidFill>
+                      <a:srgbClr val="F0FAF8"/>
+                    </a:solidFill>
+                    <a:lnL w="6350" cap="flat" cmpd="sng" algn="ctr">
+                      <a:solidFill>
+                        <a:srgbClr val="CCCCCC"/>
+                      </a:solidFill>
+                      <a:prstDash val="solid"/>
+                    </a:lnL>
+                    <a:lnR w="6350" cap="flat" cmpd="sng" algn="ctr">
+                      <a:solidFill>
+                        <a:srgbClr val="CCCCCC"/>
+                      </a:solidFill>
+                      <a:prstDash val="solid"/>
+                    </a:lnR>
+                    <a:lnT w="6350" cap="flat" cmpd="sng" algn="ctr">
+                      <a:solidFill>
+                        <a:srgbClr val="CCCCCC"/>
+                      </a:solidFill>
+                      <a:prstDash val="solid"/>
+                    </a:lnT>
+                    <a:lnB w="6350" cap="flat" cmpd="sng" algn="ctr">
+                      <a:solidFill>
+                        <a:srgbClr val="CCCCCC"/>
+                      </a:solidFill>
+                      <a:prstDash val="solid"/>
+                    </a:lnB>
+                  </a:tcPr>
+                </a:tc>
+                <a:tc>
+                  <a:txBody>
+                    <a:bodyPr wrap="square"/>
+                    <a:lstStyle/>
+                    <a:p>
+                      <a:pPr algn="ctr"/>
+                      <a:r>
+                        <a:rPr sz="900" b="0">
+                          <a:solidFill>
+                            <a:srgbClr val="333333"/>
+                          </a:solidFill>
+                          <a:latin typeface="メイリオ"/>
+                          <a:ea typeface="メイリオ"/>
+                        </a:rPr>
+                        <a:t>8/19</a:t>
+                      </a:r>
+                    </a:p>
+                  </a:txBody>
+                  <a:tcPr anchor="ctr">
+                    <a:solidFill>
+                      <a:srgbClr val="F0FAF8"/>
+                    </a:solidFill>
+                    <a:lnL w="6350" cap="flat" cmpd="sng" algn="ctr">
+                      <a:solidFill>
+                        <a:srgbClr val="CCCCCC"/>
+                      </a:solidFill>
+                      <a:prstDash val="solid"/>
+                    </a:lnL>
+                    <a:lnR w="6350" cap="flat" cmpd="sng" algn="ctr">
+                      <a:solidFill>
+                        <a:srgbClr val="CCCCCC"/>
+                      </a:solidFill>
+                      <a:prstDash val="solid"/>
+                    </a:lnR>
+                    <a:lnT w="6350" cap="flat" cmpd="sng" algn="ctr">
+                      <a:solidFill>
+                        <a:srgbClr val="CCCCCC"/>
+                      </a:solidFill>
+                      <a:prstDash val="solid"/>
+                    </a:lnT>
+                    <a:lnB w="6350" cap="flat" cmpd="sng" algn="ctr">
+                      <a:solidFill>
+                        <a:srgbClr val="CCCCCC"/>
+                      </a:solidFill>
+                      <a:prstDash val="solid"/>
+                    </a:lnB>
+                  </a:tcPr>
+                </a:tc>
+              </a:tr>
+              <a:tr h="450000">
+                <a:tc>
+                  <a:txBody>
+                    <a:bodyPr wrap="square"/>
+                    <a:lstStyle/>
+                    <a:p>
+                      <a:pPr algn="ctr"/>
+                      <a:r>
+                        <a:rPr sz="900" b="1">
+                          <a:solidFill>
+                            <a:srgbClr val="333333"/>
+                          </a:solidFill>
+                          <a:latin typeface="メイリオ"/>
+                          <a:ea typeface="メイリオ"/>
+                        </a:rPr>
+                        <a:t>2</a:t>
+                      </a:r>
+                    </a:p>
+                  </a:txBody>
+                  <a:tcPr anchor="ctr">
+                    <a:solidFill>
+                      <a:srgbClr val="FFFFFF"/>
+                    </a:solidFill>
+                    <a:lnL w="6350" cap="flat" cmpd="sng" algn="ctr">
+                      <a:solidFill>
+                        <a:srgbClr val="CCCCCC"/>
+                      </a:solidFill>
+                      <a:prstDash val="solid"/>
+                    </a:lnL>
+                    <a:lnR w="6350" cap="flat" cmpd="sng" algn="ctr">
+                      <a:solidFill>
+                        <a:srgbClr val="CCCCCC"/>
+                      </a:solidFill>
+                      <a:prstDash val="solid"/>
+                    </a:lnR>
+                    <a:lnT w="6350" cap="flat" cmpd="sng" algn="ctr">
+                      <a:solidFill>
+                        <a:srgbClr val="CCCCCC"/>
+                      </a:solidFill>
+                      <a:prstDash val="solid"/>
+                    </a:lnT>
+                    <a:lnB w="6350" cap="flat" cmpd="sng" algn="ctr">
+                      <a:solidFill>
+                        <a:srgbClr val="CCCCCC"/>
+                      </a:solidFill>
+                      <a:prstDash val="solid"/>
+                    </a:lnB>
+                  </a:tcPr>
+                </a:tc>
+                <a:tc>
+                  <a:txBody>
+                    <a:bodyPr wrap="square"/>
+                    <a:lstStyle/>
+                    <a:p>
+                      <a:pPr algn="l"/>
+                      <a:r>
+                        <a:rPr sz="900" b="0">
+                          <a:solidFill>
+                            <a:srgbClr val="333333"/>
+                          </a:solidFill>
+                          <a:latin typeface="メイリオ"/>
+                          <a:ea typeface="メイリオ"/>
+                        </a:rPr>
+                        <a:t>業務フロー（1）</a:t>
+                      </a:r>
+                    </a:p>
+                  </a:txBody>
+                  <a:tcPr anchor="ctr">
+                    <a:solidFill>
+                      <a:srgbClr val="FFFFFF"/>
+                    </a:solidFill>
+                    <a:lnL w="6350" cap="flat" cmpd="sng" algn="ctr">
+                      <a:solidFill>
+                        <a:srgbClr val="CCCCCC"/>
+                      </a:solidFill>
+                      <a:prstDash val="solid"/>
+                    </a:lnL>
+                    <a:lnR w="6350" cap="flat" cmpd="sng" algn="ctr">
+                      <a:solidFill>
+                        <a:srgbClr val="CCCCCC"/>
+                      </a:solidFill>
+                      <a:prstDash val="solid"/>
+                    </a:lnR>
+                    <a:lnT w="6350" cap="flat" cmpd="sng" algn="ctr">
+                      <a:solidFill>
+                        <a:srgbClr val="CCCCCC"/>
+                      </a:solidFill>
+                      <a:prstDash val="solid"/>
+                    </a:lnT>
+                    <a:lnB w="6350" cap="flat" cmpd="sng" algn="ctr">
+                      <a:solidFill>
+                        <a:srgbClr val="CCCCCC"/>
+                      </a:solidFill>
+                      <a:prstDash val="solid"/>
+                    </a:lnB>
+                  </a:tcPr>
+                </a:tc>
+                <a:tc>
+                  <a:txBody>
+                    <a:bodyPr wrap="square"/>
+                    <a:lstStyle/>
+                    <a:p>
+                      <a:pPr algn="l"/>
+                      <a:r>
+                        <a:rPr sz="900" b="0">
+                          <a:solidFill>
+                            <a:srgbClr val="333333"/>
+                          </a:solidFill>
+                          <a:latin typeface="メイリオ"/>
+                          <a:ea typeface="メイリオ"/>
+                        </a:rPr>
+                        <a:t>サプライヤー／商品／在庫／会員管理</a:t>
+                      </a:r>
+                    </a:p>
+                  </a:txBody>
+                  <a:tcPr anchor="ctr">
+                    <a:solidFill>
+                      <a:srgbClr val="FFFFFF"/>
+                    </a:solidFill>
+                    <a:lnL w="6350" cap="flat" cmpd="sng" algn="ctr">
+                      <a:solidFill>
+                        <a:srgbClr val="CCCCCC"/>
+                      </a:solidFill>
+                      <a:prstDash val="solid"/>
+                    </a:lnL>
+                    <a:lnR w="6350" cap="flat" cmpd="sng" algn="ctr">
+                      <a:solidFill>
+                        <a:srgbClr val="CCCCCC"/>
+                      </a:solidFill>
+                      <a:prstDash val="solid"/>
+                    </a:lnR>
+                    <a:lnT w="6350" cap="flat" cmpd="sng" algn="ctr">
+                      <a:solidFill>
+                        <a:srgbClr val="CCCCCC"/>
+                      </a:solidFill>
+                      <a:prstDash val="solid"/>
+                    </a:lnT>
+                    <a:lnB w="6350" cap="flat" cmpd="sng" algn="ctr">
+                      <a:solidFill>
+                        <a:srgbClr val="CCCCCC"/>
+                      </a:solidFill>
+                      <a:prstDash val="solid"/>
+                    </a:lnB>
+                  </a:tcPr>
+                </a:tc>
+                <a:tc>
+                  <a:txBody>
+                    <a:bodyPr wrap="square"/>
+                    <a:lstStyle/>
+                    <a:p>
+                      <a:pPr algn="ctr"/>
+                      <a:r>
+                        <a:rPr sz="900" b="0">
+                          <a:solidFill>
+                            <a:srgbClr val="333333"/>
+                          </a:solidFill>
+                          <a:latin typeface="メイリオ"/>
+                          <a:ea typeface="メイリオ"/>
+                        </a:rPr>
+                        <a:t>8/24</a:t>
+                      </a:r>
+                    </a:p>
+                  </a:txBody>
+                  <a:tcPr anchor="ctr">
+                    <a:solidFill>
+                      <a:srgbClr val="FFFFFF"/>
+                    </a:solidFill>
+                    <a:lnL w="6350" cap="flat" cmpd="sng" algn="ctr">
+                      <a:solidFill>
+                        <a:srgbClr val="CCCCCC"/>
+                      </a:solidFill>
+                      <a:prstDash val="solid"/>
+                    </a:lnL>
+                    <a:lnR w="6350" cap="flat" cmpd="sng" algn="ctr">
+                      <a:solidFill>
+                        <a:srgbClr val="CCCCCC"/>
+                      </a:solidFill>
+                      <a:prstDash val="solid"/>
+                    </a:lnR>
+                    <a:lnT w="6350" cap="flat" cmpd="sng" algn="ctr">
+                      <a:solidFill>
+                        <a:srgbClr val="CCCCCC"/>
+                      </a:solidFill>
+                      <a:prstDash val="solid"/>
+                    </a:lnT>
+                    <a:lnB w="6350" cap="flat" cmpd="sng" algn="ctr">
+                      <a:solidFill>
+                        <a:srgbClr val="CCCCCC"/>
+                      </a:solidFill>
+                      <a:prstDash val="solid"/>
+                    </a:lnB>
+                  </a:tcPr>
+                </a:tc>
+              </a:tr>
+              <a:tr h="450000">
+                <a:tc>
+                  <a:txBody>
+                    <a:bodyPr wrap="square"/>
+                    <a:lstStyle/>
+                    <a:p>
+                      <a:pPr algn="ctr"/>
+                      <a:r>
+                        <a:rPr sz="900" b="1">
+                          <a:solidFill>
+                            <a:srgbClr val="333333"/>
+                          </a:solidFill>
+                          <a:latin typeface="メイリオ"/>
+                          <a:ea typeface="メイリオ"/>
+                        </a:rPr>
+                        <a:t>3</a:t>
+                      </a:r>
+                    </a:p>
+                  </a:txBody>
+                  <a:tcPr anchor="ctr">
+                    <a:solidFill>
+                      <a:srgbClr val="F0FAF8"/>
+                    </a:solidFill>
+                    <a:lnL w="6350" cap="flat" cmpd="sng" algn="ctr">
+                      <a:solidFill>
+                        <a:srgbClr val="CCCCCC"/>
+                      </a:solidFill>
+                      <a:prstDash val="solid"/>
+                    </a:lnL>
+                    <a:lnR w="6350" cap="flat" cmpd="sng" algn="ctr">
+                      <a:solidFill>
+                        <a:srgbClr val="CCCCCC"/>
+                      </a:solidFill>
+                      <a:prstDash val="solid"/>
+                    </a:lnR>
+                    <a:lnT w="6350" cap="flat" cmpd="sng" algn="ctr">
+                      <a:solidFill>
+                        <a:srgbClr val="CCCCCC"/>
+                      </a:solidFill>
+                      <a:prstDash val="solid"/>
+                    </a:lnT>
+                    <a:lnB w="6350" cap="flat" cmpd="sng" algn="ctr">
+                      <a:solidFill>
+                        <a:srgbClr val="CCCCCC"/>
+                      </a:solidFill>
+                      <a:prstDash val="solid"/>
+                    </a:lnB>
+                  </a:tcPr>
+                </a:tc>
+                <a:tc>
+                  <a:txBody>
+                    <a:bodyPr wrap="square"/>
+                    <a:lstStyle/>
+                    <a:p>
+                      <a:pPr algn="l"/>
+                      <a:r>
+                        <a:rPr sz="900" b="0">
+                          <a:solidFill>
+                            <a:srgbClr val="333333"/>
+                          </a:solidFill>
+                          <a:latin typeface="メイリオ"/>
+                          <a:ea typeface="メイリオ"/>
+                        </a:rPr>
+                        <a:t>業務フロー（2）</a:t>
+                      </a:r>
+                    </a:p>
+                  </a:txBody>
+                  <a:tcPr anchor="ctr">
+                    <a:solidFill>
+                      <a:srgbClr val="F0FAF8"/>
+                    </a:solidFill>
+                    <a:lnL w="6350" cap="flat" cmpd="sng" algn="ctr">
+                      <a:solidFill>
+                        <a:srgbClr val="CCCCCC"/>
+                      </a:solidFill>
+                      <a:prstDash val="solid"/>
+                    </a:lnL>
+                    <a:lnR w="6350" cap="flat" cmpd="sng" algn="ctr">
+                      <a:solidFill>
+                        <a:srgbClr val="CCCCCC"/>
+                      </a:solidFill>
+                      <a:prstDash val="solid"/>
+                    </a:lnR>
+                    <a:lnT w="6350" cap="flat" cmpd="sng" algn="ctr">
+                      <a:solidFill>
+                        <a:srgbClr val="CCCCCC"/>
+                      </a:solidFill>
+                      <a:prstDash val="solid"/>
+                    </a:lnT>
+                    <a:lnB w="6350" cap="flat" cmpd="sng" algn="ctr">
+                      <a:solidFill>
+                        <a:srgbClr val="CCCCCC"/>
+                      </a:solidFill>
+                      <a:prstDash val="solid"/>
+                    </a:lnB>
+                  </a:tcPr>
+                </a:tc>
+                <a:tc>
+                  <a:txBody>
+                    <a:bodyPr wrap="square"/>
+                    <a:lstStyle/>
+                    <a:p>
+                      <a:pPr algn="l"/>
+                      <a:r>
+                        <a:rPr sz="900" b="0">
+                          <a:solidFill>
+                            <a:srgbClr val="333333"/>
+                          </a:solidFill>
+                          <a:latin typeface="メイリオ"/>
+                          <a:ea typeface="メイリオ"/>
+                        </a:rPr>
+                        <a:t>受注／見積／マイページ・その他</a:t>
+                      </a:r>
+                    </a:p>
+                  </a:txBody>
+                  <a:tcPr anchor="ctr">
+                    <a:solidFill>
+                      <a:srgbClr val="F0FAF8"/>
+                    </a:solidFill>
+                    <a:lnL w="6350" cap="flat" cmpd="sng" algn="ctr">
+                      <a:solidFill>
+                        <a:srgbClr val="CCCCCC"/>
+                      </a:solidFill>
+                      <a:prstDash val="solid"/>
+                    </a:lnL>
+                    <a:lnR w="6350" cap="flat" cmpd="sng" algn="ctr">
+                      <a:solidFill>
+                        <a:srgbClr val="CCCCCC"/>
+                      </a:solidFill>
+                      <a:prstDash val="solid"/>
+                    </a:lnR>
+                    <a:lnT w="6350" cap="flat" cmpd="sng" algn="ctr">
+                      <a:solidFill>
+                        <a:srgbClr val="CCCCCC"/>
+                      </a:solidFill>
+                      <a:prstDash val="solid"/>
+                    </a:lnT>
+                    <a:lnB w="6350" cap="flat" cmpd="sng" algn="ctr">
+                      <a:solidFill>
+                        <a:srgbClr val="CCCCCC"/>
+                      </a:solidFill>
+                      <a:prstDash val="solid"/>
+                    </a:lnB>
+                  </a:tcPr>
+                </a:tc>
+                <a:tc>
+                  <a:txBody>
+                    <a:bodyPr wrap="square"/>
+                    <a:lstStyle/>
+                    <a:p>
+                      <a:pPr algn="ctr"/>
+                      <a:r>
+                        <a:rPr sz="900" b="0">
+                          <a:solidFill>
+                            <a:srgbClr val="333333"/>
+                          </a:solidFill>
+                          <a:latin typeface="メイリオ"/>
+                          <a:ea typeface="メイリオ"/>
+                        </a:rPr>
+                        <a:t>8/27</a:t>
+                      </a:r>
+                    </a:p>
+                  </a:txBody>
+                  <a:tcPr anchor="ctr">
+                    <a:solidFill>
+                      <a:srgbClr val="F0FAF8"/>
+                    </a:solidFill>
+                    <a:lnL w="6350" cap="flat" cmpd="sng" algn="ctr">
+                      <a:solidFill>
+                        <a:srgbClr val="CCCCCC"/>
+                      </a:solidFill>
+                      <a:prstDash val="solid"/>
+                    </a:lnL>
+                    <a:lnR w="6350" cap="flat" cmpd="sng" algn="ctr">
+                      <a:solidFill>
+                        <a:srgbClr val="CCCCCC"/>
+                      </a:solidFill>
+                      <a:prstDash val="solid"/>
+                    </a:lnR>
+                    <a:lnT w="6350" cap="flat" cmpd="sng" algn="ctr">
+                      <a:solidFill>
+                        <a:srgbClr val="CCCCCC"/>
+                      </a:solidFill>
+                      <a:prstDash val="solid"/>
+                    </a:lnT>
+                    <a:lnB w="6350" cap="flat" cmpd="sng" algn="ctr">
+                      <a:solidFill>
+                        <a:srgbClr val="CCCCCC"/>
+                      </a:solidFill>
+                      <a:prstDash val="solid"/>
+                    </a:lnB>
+                  </a:tcPr>
+                </a:tc>
+              </a:tr>
+              <a:tr h="450000">
+                <a:tc>
+                  <a:txBody>
+                    <a:bodyPr wrap="square"/>
+                    <a:lstStyle/>
+                    <a:p>
+                      <a:pPr algn="ctr"/>
+                      <a:r>
+                        <a:rPr sz="900" b="1">
+                          <a:solidFill>
+                            <a:srgbClr val="333333"/>
+                          </a:solidFill>
+                          <a:latin typeface="メイリオ"/>
+                          <a:ea typeface="メイリオ"/>
+                        </a:rPr>
+                        <a:t>4</a:t>
+                      </a:r>
+                    </a:p>
+                  </a:txBody>
+                  <a:tcPr anchor="ctr">
+                    <a:solidFill>
+                      <a:srgbClr val="FFFFFF"/>
+                    </a:solidFill>
+                    <a:lnL w="6350" cap="flat" cmpd="sng" algn="ctr">
+                      <a:solidFill>
+                        <a:srgbClr val="CCCCCC"/>
+                      </a:solidFill>
+                      <a:prstDash val="solid"/>
+                    </a:lnL>
+                    <a:lnR w="6350" cap="flat" cmpd="sng" algn="ctr">
+                      <a:solidFill>
+                        <a:srgbClr val="CCCCCC"/>
+                      </a:solidFill>
+                      <a:prstDash val="solid"/>
+                    </a:lnR>
+                    <a:lnT w="6350" cap="flat" cmpd="sng" algn="ctr">
+                      <a:solidFill>
+                        <a:srgbClr val="CCCCCC"/>
+                      </a:solidFill>
+                      <a:prstDash val="solid"/>
+                    </a:lnT>
+                    <a:lnB w="6350" cap="flat" cmpd="sng" algn="ctr">
+                      <a:solidFill>
+                        <a:srgbClr val="CCCCCC"/>
+                      </a:solidFill>
+                      <a:prstDash val="solid"/>
+                    </a:lnB>
+                  </a:tcPr>
+                </a:tc>
+                <a:tc>
+                  <a:txBody>
+                    <a:bodyPr wrap="square"/>
+                    <a:lstStyle/>
+                    <a:p>
+                      <a:pPr algn="l"/>
+                      <a:r>
+                        <a:rPr sz="900" b="0">
+                          <a:solidFill>
+                            <a:srgbClr val="333333"/>
+                          </a:solidFill>
+                          <a:latin typeface="メイリオ"/>
+                          <a:ea typeface="メイリオ"/>
+                        </a:rPr>
+                        <a:t>機能詳細 Fit&amp;Gap</a:t>
+                      </a:r>
+                    </a:p>
+                  </a:txBody>
+                  <a:tcPr anchor="ctr">
+                    <a:solidFill>
+                      <a:srgbClr val="FFFFFF"/>
+                    </a:solidFill>
+                    <a:lnL w="6350" cap="flat" cmpd="sng" algn="ctr">
+                      <a:solidFill>
+                        <a:srgbClr val="CCCCCC"/>
+                      </a:solidFill>
+                      <a:prstDash val="solid"/>
+                    </a:lnL>
+                    <a:lnR w="6350" cap="flat" cmpd="sng" algn="ctr">
+                      <a:solidFill>
+                        <a:srgbClr val="CCCCCC"/>
+                      </a:solidFill>
+                      <a:prstDash val="solid"/>
+                    </a:lnR>
+                    <a:lnT w="6350" cap="flat" cmpd="sng" algn="ctr">
+                      <a:solidFill>
+                        <a:srgbClr val="CCCCCC"/>
+                      </a:solidFill>
+                      <a:prstDash val="solid"/>
+                    </a:lnT>
+                    <a:lnB w="6350" cap="flat" cmpd="sng" algn="ctr">
+                      <a:solidFill>
+                        <a:srgbClr val="CCCCCC"/>
+                      </a:solidFill>
+                      <a:prstDash val="solid"/>
+                    </a:lnB>
+                  </a:tcPr>
+                </a:tc>
+                <a:tc>
+                  <a:txBody>
+                    <a:bodyPr wrap="square"/>
+                    <a:lstStyle/>
+                    <a:p>
+                      <a:pPr algn="l"/>
+                      <a:r>
+                        <a:rPr sz="900" b="0">
+                          <a:solidFill>
+                            <a:srgbClr val="333333"/>
+                          </a:solidFill>
+                          <a:latin typeface="メイリオ"/>
+                          <a:ea typeface="メイリオ"/>
+                        </a:rPr>
+                        <a:t>管理機能差分＋フロントサイト確認</a:t>
+                      </a:r>
+                    </a:p>
+                  </a:txBody>
+                  <a:tcPr anchor="ctr">
+                    <a:solidFill>
+                      <a:srgbClr val="FFFFFF"/>
+                    </a:solidFill>
+                    <a:lnL w="6350" cap="flat" cmpd="sng" algn="ctr">
+                      <a:solidFill>
+                        <a:srgbClr val="CCCCCC"/>
+                      </a:solidFill>
+                      <a:prstDash val="solid"/>
+                    </a:lnL>
+                    <a:lnR w="6350" cap="flat" cmpd="sng" algn="ctr">
+                      <a:solidFill>
+                        <a:srgbClr val="CCCCCC"/>
+                      </a:solidFill>
+                      <a:prstDash val="solid"/>
+                    </a:lnR>
+                    <a:lnT w="6350" cap="flat" cmpd="sng" algn="ctr">
+                      <a:solidFill>
+                        <a:srgbClr val="CCCCCC"/>
+                      </a:solidFill>
+                      <a:prstDash val="solid"/>
+                    </a:lnT>
+                    <a:lnB w="6350" cap="flat" cmpd="sng" algn="ctr">
+                      <a:solidFill>
+                        <a:srgbClr val="CCCCCC"/>
+                      </a:solidFill>
+                      <a:prstDash val="solid"/>
+                    </a:lnB>
+                  </a:tcPr>
+                </a:tc>
+                <a:tc>
+                  <a:txBody>
+                    <a:bodyPr wrap="square"/>
+                    <a:lstStyle/>
+                    <a:p>
+                      <a:pPr algn="ctr"/>
+                      <a:r>
+                        <a:rPr sz="900" b="0">
+                          <a:solidFill>
+                            <a:srgbClr val="333333"/>
+                          </a:solidFill>
+                          <a:latin typeface="メイリオ"/>
+                          <a:ea typeface="メイリオ"/>
+                        </a:rPr>
+                        <a:t>9/9</a:t>
+                      </a:r>
+                    </a:p>
+                  </a:txBody>
+                  <a:tcPr anchor="ctr">
+                    <a:solidFill>
+                      <a:srgbClr val="FFFFFF"/>
+                    </a:solidFill>
+                    <a:lnL w="6350" cap="flat" cmpd="sng" algn="ctr">
+                      <a:solidFill>
+                        <a:srgbClr val="CCCCCC"/>
+                      </a:solidFill>
+                      <a:prstDash val="solid"/>
+                    </a:lnL>
+                    <a:lnR w="6350" cap="flat" cmpd="sng" algn="ctr">
+                      <a:solidFill>
+                        <a:srgbClr val="CCCCCC"/>
+                      </a:solidFill>
+                      <a:prstDash val="solid"/>
+                    </a:lnR>
+                    <a:lnT w="6350" cap="flat" cmpd="sng" algn="ctr">
+                      <a:solidFill>
+                        <a:srgbClr val="CCCCCC"/>
+                      </a:solidFill>
+                      <a:prstDash val="solid"/>
+                    </a:lnT>
+                    <a:lnB w="6350" cap="flat" cmpd="sng" algn="ctr">
+                      <a:solidFill>
+                        <a:srgbClr val="CCCCCC"/>
+                      </a:solidFill>
+                      <a:prstDash val="solid"/>
+                    </a:lnB>
+                  </a:tcPr>
+                </a:tc>
+              </a:tr>
+              <a:tr h="450000">
+                <a:tc>
+                  <a:txBody>
+                    <a:bodyPr wrap="square"/>
+                    <a:lstStyle/>
+                    <a:p>
+                      <a:pPr algn="ctr"/>
+                      <a:r>
+                        <a:rPr sz="900" b="1">
+                          <a:solidFill>
+                            <a:srgbClr val="333333"/>
+                          </a:solidFill>
+                          <a:latin typeface="メイリオ"/>
+                          <a:ea typeface="メイリオ"/>
+                        </a:rPr>
+                        <a:t>5</a:t>
+                      </a:r>
+                    </a:p>
+                  </a:txBody>
+                  <a:tcPr anchor="ctr">
+                    <a:solidFill>
+                      <a:srgbClr val="F0FAF8"/>
+                    </a:solidFill>
+                    <a:lnL w="6350" cap="flat" cmpd="sng" algn="ctr">
+                      <a:solidFill>
+                        <a:srgbClr val="CCCCCC"/>
+                      </a:solidFill>
+                      <a:prstDash val="solid"/>
+                    </a:lnL>
+                    <a:lnR w="6350" cap="flat" cmpd="sng" algn="ctr">
+                      <a:solidFill>
+                        <a:srgbClr val="CCCCCC"/>
+                      </a:solidFill>
+                      <a:prstDash val="solid"/>
+                    </a:lnR>
+                    <a:lnT w="6350" cap="flat" cmpd="sng" algn="ctr">
+                      <a:solidFill>
+                        <a:srgbClr val="CCCCCC"/>
+                      </a:solidFill>
+                      <a:prstDash val="solid"/>
+                    </a:lnT>
+                    <a:lnB w="6350" cap="flat" cmpd="sng" algn="ctr">
+                      <a:solidFill>
+                        <a:srgbClr val="CCCCCC"/>
+                      </a:solidFill>
+                      <a:prstDash val="solid"/>
+                    </a:lnB>
+                  </a:tcPr>
+                </a:tc>
+                <a:tc>
+                  <a:txBody>
+                    <a:bodyPr wrap="square"/>
+                    <a:lstStyle/>
+                    <a:p>
+                      <a:pPr algn="l"/>
+                      <a:r>
+                        <a:rPr sz="900" b="0">
+                          <a:solidFill>
+                            <a:srgbClr val="333333"/>
+                          </a:solidFill>
+                          <a:latin typeface="メイリオ"/>
+                          <a:ea typeface="メイリオ"/>
+                        </a:rPr>
+                        <a:t>非機能要件定義</a:t>
+                      </a:r>
+                    </a:p>
+                  </a:txBody>
+                  <a:tcPr anchor="ctr">
+                    <a:solidFill>
+                      <a:srgbClr val="F0FAF8"/>
+                    </a:solidFill>
+                    <a:lnL w="6350" cap="flat" cmpd="sng" algn="ctr">
+                      <a:solidFill>
+                        <a:srgbClr val="CCCCCC"/>
+                      </a:solidFill>
+                      <a:prstDash val="solid"/>
+                    </a:lnL>
+                    <a:lnR w="6350" cap="flat" cmpd="sng" algn="ctr">
+                      <a:solidFill>
+                        <a:srgbClr val="CCCCCC"/>
+                      </a:solidFill>
+                      <a:prstDash val="solid"/>
+                    </a:lnR>
+                    <a:lnT w="6350" cap="flat" cmpd="sng" algn="ctr">
+                      <a:solidFill>
+                        <a:srgbClr val="CCCCCC"/>
+                      </a:solidFill>
+                      <a:prstDash val="solid"/>
+                    </a:lnT>
+                    <a:lnB w="6350" cap="flat" cmpd="sng" algn="ctr">
+                      <a:solidFill>
+                        <a:srgbClr val="CCCCCC"/>
+                      </a:solidFill>
+                      <a:prstDash val="solid"/>
+                    </a:lnB>
+                  </a:tcPr>
+                </a:tc>
+                <a:tc>
+                  <a:txBody>
+                    <a:bodyPr wrap="square"/>
+                    <a:lstStyle/>
+                    <a:p>
+                      <a:pPr algn="l"/>
+                      <a:r>
+                        <a:rPr sz="900" b="0">
+                          <a:solidFill>
+                            <a:srgbClr val="333333"/>
+                          </a:solidFill>
+                          <a:latin typeface="メイリオ"/>
+                          <a:ea typeface="メイリオ"/>
+                        </a:rPr>
+                        <a:t>性能・セキュリティ・運用・移行等</a:t>
+                      </a:r>
+                    </a:p>
+                  </a:txBody>
+                  <a:tcPr anchor="ctr">
+                    <a:solidFill>
+                      <a:srgbClr val="F0FAF8"/>
+                    </a:solidFill>
+                    <a:lnL w="6350" cap="flat" cmpd="sng" algn="ctr">
+                      <a:solidFill>
+                        <a:srgbClr val="CCCCCC"/>
+                      </a:solidFill>
+                      <a:prstDash val="solid"/>
+                    </a:lnL>
+                    <a:lnR w="6350" cap="flat" cmpd="sng" algn="ctr">
+                      <a:solidFill>
+                        <a:srgbClr val="CCCCCC"/>
+                      </a:solidFill>
+                      <a:prstDash val="solid"/>
+                    </a:lnR>
+                    <a:lnT w="6350" cap="flat" cmpd="sng" algn="ctr">
+                      <a:solidFill>
+                        <a:srgbClr val="CCCCCC"/>
+                      </a:solidFill>
+                      <a:prstDash val="solid"/>
+                    </a:lnT>
+                    <a:lnB w="6350" cap="flat" cmpd="sng" algn="ctr">
+                      <a:solidFill>
+                        <a:srgbClr val="CCCCCC"/>
+                      </a:solidFill>
+                      <a:prstDash val="solid"/>
+                    </a:lnB>
+                  </a:tcPr>
+                </a:tc>
+                <a:tc>
+                  <a:txBody>
+                    <a:bodyPr wrap="square"/>
+                    <a:lstStyle/>
+                    <a:p>
+                      <a:pPr algn="ctr"/>
+                      <a:r>
+                        <a:rPr sz="900" b="0">
+                          <a:solidFill>
+                            <a:srgbClr val="333333"/>
+                          </a:solidFill>
+                          <a:latin typeface="メイリオ"/>
+                          <a:ea typeface="メイリオ"/>
+                        </a:rPr>
+                        <a:t>9/16</a:t>
+                      </a:r>
+                    </a:p>
+                  </a:txBody>
+                  <a:tcPr anchor="ctr">
+                    <a:solidFill>
+                      <a:srgbClr val="F0FAF8"/>
+                    </a:solidFill>
+                    <a:lnL w="6350" cap="flat" cmpd="sng" algn="ctr">
+                      <a:solidFill>
+                        <a:srgbClr val="CCCCCC"/>
+                      </a:solidFill>
+                      <a:prstDash val="solid"/>
+                    </a:lnL>
+                    <a:lnR w="6350" cap="flat" cmpd="sng" algn="ctr">
+                      <a:solidFill>
+                        <a:srgbClr val="CCCCCC"/>
+                      </a:solidFill>
+                      <a:prstDash val="solid"/>
+                    </a:lnR>
+                    <a:lnT w="6350" cap="flat" cmpd="sng" algn="ctr">
+                      <a:solidFill>
+                        <a:srgbClr val="CCCCCC"/>
+                      </a:solidFill>
+                      <a:prstDash val="solid"/>
+                    </a:lnT>
+                    <a:lnB w="6350" cap="flat" cmpd="sng" algn="ctr">
+                      <a:solidFill>
+                        <a:srgbClr val="CCCCCC"/>
+                      </a:solidFill>
+                      <a:prstDash val="solid"/>
+                    </a:lnB>
+                  </a:tcPr>
+                </a:tc>
+              </a:tr>
+              <a:tr h="450000">
+                <a:tc>
+                  <a:txBody>
+                    <a:bodyPr wrap="square"/>
+                    <a:lstStyle/>
+                    <a:p>
+                      <a:pPr algn="ctr"/>
+                      <a:r>
+                        <a:rPr sz="900" b="1">
+                          <a:solidFill>
+                            <a:srgbClr val="333333"/>
+                          </a:solidFill>
+                          <a:latin typeface="メイリオ"/>
+                          <a:ea typeface="メイリオ"/>
+                        </a:rPr>
+                        <a:t>6</a:t>
+                      </a:r>
+                    </a:p>
+                  </a:txBody>
+                  <a:tcPr anchor="ctr">
+                    <a:solidFill>
+                      <a:srgbClr val="FFFFFF"/>
+                    </a:solidFill>
+                    <a:lnL w="6350" cap="flat" cmpd="sng" algn="ctr">
+                      <a:solidFill>
+                        <a:srgbClr val="CCCCCC"/>
+                      </a:solidFill>
+                      <a:prstDash val="solid"/>
+                    </a:lnL>
+                    <a:lnR w="6350" cap="flat" cmpd="sng" algn="ctr">
+                      <a:solidFill>
+                        <a:srgbClr val="CCCCCC"/>
+                      </a:solidFill>
+                      <a:prstDash val="solid"/>
+                    </a:lnR>
+                    <a:lnT w="6350" cap="flat" cmpd="sng" algn="ctr">
+                      <a:solidFill>
+                        <a:srgbClr val="CCCCCC"/>
+                      </a:solidFill>
+                      <a:prstDash val="solid"/>
+                    </a:lnT>
+                    <a:lnB w="6350" cap="flat" cmpd="sng" algn="ctr">
+                      <a:solidFill>
+                        <a:srgbClr val="CCCCCC"/>
+                      </a:solidFill>
+                      <a:prstDash val="solid"/>
+                    </a:lnB>
+                  </a:tcPr>
+                </a:tc>
+                <a:tc>
+                  <a:txBody>
+                    <a:bodyPr wrap="square"/>
+                    <a:lstStyle/>
+                    <a:p>
+                      <a:pPr algn="l"/>
+                      <a:r>
+                        <a:rPr sz="900" b="0">
+                          <a:solidFill>
+                            <a:srgbClr val="333333"/>
+                          </a:solidFill>
+                          <a:latin typeface="メイリオ"/>
+                          <a:ea typeface="メイリオ"/>
+                        </a:rPr>
+                        <a:t>要件定義書（案）</a:t>
+                      </a:r>
+                    </a:p>
+                  </a:txBody>
+                  <a:tcPr anchor="ctr">
+                    <a:solidFill>
+                      <a:srgbClr val="FFFFFF"/>
+                    </a:solidFill>
+                    <a:lnL w="6350" cap="flat" cmpd="sng" algn="ctr">
+                      <a:solidFill>
+                        <a:srgbClr val="CCCCCC"/>
+                      </a:solidFill>
+                      <a:prstDash val="solid"/>
+                    </a:lnL>
+                    <a:lnR w="6350" cap="flat" cmpd="sng" algn="ctr">
+                      <a:solidFill>
+                        <a:srgbClr val="CCCCCC"/>
+                      </a:solidFill>
+                      <a:prstDash val="solid"/>
+                    </a:lnR>
+                    <a:lnT w="6350" cap="flat" cmpd="sng" algn="ctr">
+                      <a:solidFill>
+                        <a:srgbClr val="CCCCCC"/>
+                      </a:solidFill>
+                      <a:prstDash val="solid"/>
+                    </a:lnT>
+                    <a:lnB w="6350" cap="flat" cmpd="sng" algn="ctr">
+                      <a:solidFill>
+                        <a:srgbClr val="CCCCCC"/>
+                      </a:solidFill>
+                      <a:prstDash val="solid"/>
+                    </a:lnB>
+                  </a:tcPr>
+                </a:tc>
+                <a:tc>
+                  <a:txBody>
+                    <a:bodyPr wrap="square"/>
+                    <a:lstStyle/>
+                    <a:p>
+                      <a:pPr algn="l"/>
+                      <a:r>
+                        <a:rPr sz="900" b="0">
+                          <a:solidFill>
+                            <a:srgbClr val="333333"/>
+                          </a:solidFill>
+                          <a:latin typeface="メイリオ"/>
+                          <a:ea typeface="メイリオ"/>
+                        </a:rPr>
+                        <a:t>取りまとめ・レビュー</a:t>
+                      </a:r>
+                    </a:p>
+                  </a:txBody>
+                  <a:tcPr anchor="ctr">
+                    <a:solidFill>
+                      <a:srgbClr val="FFFFFF"/>
+                    </a:solidFill>
+                    <a:lnL w="6350" cap="flat" cmpd="sng" algn="ctr">
+                      <a:solidFill>
+                        <a:srgbClr val="CCCCCC"/>
+                      </a:solidFill>
+                      <a:prstDash val="solid"/>
+                    </a:lnL>
+                    <a:lnR w="6350" cap="flat" cmpd="sng" algn="ctr">
+                      <a:solidFill>
+                        <a:srgbClr val="CCCCCC"/>
+                      </a:solidFill>
+                      <a:prstDash val="solid"/>
+                    </a:lnR>
+                    <a:lnT w="6350" cap="flat" cmpd="sng" algn="ctr">
+                      <a:solidFill>
+                        <a:srgbClr val="CCCCCC"/>
+                      </a:solidFill>
+                      <a:prstDash val="solid"/>
+                    </a:lnT>
+                    <a:lnB w="6350" cap="flat" cmpd="sng" algn="ctr">
+                      <a:solidFill>
+                        <a:srgbClr val="CCCCCC"/>
+                      </a:solidFill>
+                      <a:prstDash val="solid"/>
+                    </a:lnB>
+                  </a:tcPr>
+                </a:tc>
+                <a:tc>
+                  <a:txBody>
+                    <a:bodyPr wrap="square"/>
+                    <a:lstStyle/>
+                    <a:p>
+                      <a:pPr algn="ctr"/>
+                      <a:r>
+                        <a:rPr sz="900" b="0">
+                          <a:solidFill>
+                            <a:srgbClr val="333333"/>
+                          </a:solidFill>
+                          <a:latin typeface="メイリオ"/>
+                          <a:ea typeface="メイリオ"/>
+                        </a:rPr>
+                        <a:t>9/24</a:t>
+                      </a:r>
+                    </a:p>
+                  </a:txBody>
+                  <a:tcPr anchor="ctr">
+                    <a:solidFill>
+                      <a:srgbClr val="FFFFFF"/>
+                    </a:solidFill>
+                    <a:lnL w="6350" cap="flat" cmpd="sng" algn="ctr">
+                      <a:solidFill>
+                        <a:srgbClr val="CCCCCC"/>
+                      </a:solidFill>
+                      <a:prstDash val="solid"/>
+                    </a:lnL>
+                    <a:lnR w="6350" cap="flat" cmpd="sng" algn="ctr">
+                      <a:solidFill>
+                        <a:srgbClr val="CCCCCC"/>
+                      </a:solidFill>
+                      <a:prstDash val="solid"/>
+                    </a:lnR>
+                    <a:lnT w="6350" cap="flat" cmpd="sng" algn="ctr">
+                      <a:solidFill>
+                        <a:srgbClr val="CCCCCC"/>
+                      </a:solidFill>
+                      <a:prstDash val="solid"/>
+                    </a:lnT>
+                    <a:lnB w="6350" cap="flat" cmpd="sng" algn="ctr">
+                      <a:solidFill>
+                        <a:srgbClr val="CCCCCC"/>
+                      </a:solidFill>
+                      <a:prstDash val="solid"/>
+                    </a:lnB>
+                  </a:tcPr>
+                </a:tc>
+              </a:tr>
+              <a:tr h="450000">
+                <a:tc>
+                  <a:txBody>
+                    <a:bodyPr wrap="square"/>
+                    <a:lstStyle/>
+                    <a:p>
+                      <a:pPr algn="ctr"/>
+                      <a:r>
+                        <a:rPr sz="900" b="1">
+                          <a:solidFill>
+                            <a:srgbClr val="333333"/>
+                          </a:solidFill>
+                          <a:latin typeface="メイリオ"/>
+                          <a:ea typeface="メイリオ"/>
+                        </a:rPr>
+                        <a:t>7</a:t>
+                      </a:r>
+                    </a:p>
+                  </a:txBody>
+                  <a:tcPr anchor="ctr">
+                    <a:solidFill>
+                      <a:srgbClr val="F0FAF8"/>
+                    </a:solidFill>
+                    <a:lnL w="6350" cap="flat" cmpd="sng" algn="ctr">
+                      <a:solidFill>
+                        <a:srgbClr val="CCCCCC"/>
+                      </a:solidFill>
+                      <a:prstDash val="solid"/>
+                    </a:lnL>
+                    <a:lnR w="6350" cap="flat" cmpd="sng" algn="ctr">
+                      <a:solidFill>
+                        <a:srgbClr val="CCCCCC"/>
+                      </a:solidFill>
+                      <a:prstDash val="solid"/>
+                    </a:lnR>
+                    <a:lnT w="6350" cap="flat" cmpd="sng" algn="ctr">
+                      <a:solidFill>
+                        <a:srgbClr val="CCCCCC"/>
+                      </a:solidFill>
+                      <a:prstDash val="solid"/>
+                    </a:lnT>
+                    <a:lnB w="6350" cap="flat" cmpd="sng" algn="ctr">
+                      <a:solidFill>
+                        <a:srgbClr val="CCCCCC"/>
+                      </a:solidFill>
+                      <a:prstDash val="solid"/>
+                    </a:lnB>
+                  </a:tcPr>
+                </a:tc>
+                <a:tc>
+                  <a:txBody>
+                    <a:bodyPr wrap="square"/>
+                    <a:lstStyle/>
+                    <a:p>
+                      <a:pPr algn="l"/>
+                      <a:r>
+                        <a:rPr sz="900" b="0">
+                          <a:solidFill>
+                            <a:srgbClr val="333333"/>
+                          </a:solidFill>
+                          <a:latin typeface="メイリオ"/>
+                          <a:ea typeface="メイリオ"/>
+                        </a:rPr>
+                        <a:t>納品／正式見積り／ご検収</a:t>
+                      </a:r>
+                    </a:p>
+                  </a:txBody>
+                  <a:tcPr anchor="ctr">
+                    <a:solidFill>
+                      <a:srgbClr val="F0FAF8"/>
+                    </a:solidFill>
+                    <a:lnL w="6350" cap="flat" cmpd="sng" algn="ctr">
+                      <a:solidFill>
+                        <a:srgbClr val="CCCCCC"/>
+                      </a:solidFill>
+                      <a:prstDash val="solid"/>
+                    </a:lnL>
+                    <a:lnR w="6350" cap="flat" cmpd="sng" algn="ctr">
+                      <a:solidFill>
+                        <a:srgbClr val="CCCCCC"/>
+                      </a:solidFill>
+                      <a:prstDash val="solid"/>
+                    </a:lnR>
+                    <a:lnT w="6350" cap="flat" cmpd="sng" algn="ctr">
+                      <a:solidFill>
+                        <a:srgbClr val="CCCCCC"/>
+                      </a:solidFill>
+                      <a:prstDash val="solid"/>
+                    </a:lnT>
+                    <a:lnB w="6350" cap="flat" cmpd="sng" algn="ctr">
+                      <a:solidFill>
+                        <a:srgbClr val="CCCCCC"/>
+                      </a:solidFill>
+                      <a:prstDash val="solid"/>
+                    </a:lnB>
+                  </a:tcPr>
+                </a:tc>
+                <a:tc>
+                  <a:txBody>
+                    <a:bodyPr wrap="square"/>
+                    <a:lstStyle/>
+                    <a:p>
+                      <a:pPr algn="l"/>
+                      <a:r>
+                        <a:rPr sz="900" b="0">
+                          <a:solidFill>
+                            <a:srgbClr val="333333"/>
+                          </a:solidFill>
+                          <a:latin typeface="メイリオ"/>
+                          <a:ea typeface="メイリオ"/>
+                        </a:rPr>
+                        <a:t>要件定義書納品、開発工程見積り、ご検収</a:t>
+                      </a:r>
+                    </a:p>
+                  </a:txBody>
+                  <a:tcPr anchor="ctr">
+                    <a:solidFill>
+                      <a:srgbClr val="F0FAF8"/>
+                    </a:solidFill>
+                    <a:lnL w="6350" cap="flat" cmpd="sng" algn="ctr">
+                      <a:solidFill>
+                        <a:srgbClr val="CCCCCC"/>
+                      </a:solidFill>
+                      <a:prstDash val="solid"/>
+                    </a:lnL>
+                    <a:lnR w="6350" cap="flat" cmpd="sng" algn="ctr">
+                      <a:solidFill>
+                        <a:srgbClr val="CCCCCC"/>
+                      </a:solidFill>
+                      <a:prstDash val="solid"/>
+                    </a:lnR>
+                    <a:lnT w="6350" cap="flat" cmpd="sng" algn="ctr">
+                      <a:solidFill>
+                        <a:srgbClr val="CCCCCC"/>
+                      </a:solidFill>
+                      <a:prstDash val="solid"/>
+                    </a:lnT>
+                    <a:lnB w="6350" cap="flat" cmpd="sng" algn="ctr">
+                      <a:solidFill>
+                        <a:srgbClr val="CCCCCC"/>
+                      </a:solidFill>
+                      <a:prstDash val="solid"/>
+                    </a:lnB>
+                  </a:tcPr>
+                </a:tc>
+                <a:tc>
+                  <a:txBody>
+                    <a:bodyPr wrap="square"/>
+                    <a:lstStyle/>
+                    <a:p>
+                      <a:pPr algn="ctr"/>
+                      <a:r>
+                        <a:rPr sz="900" b="0">
+                          <a:solidFill>
+                            <a:srgbClr val="333333"/>
+                          </a:solidFill>
+                          <a:latin typeface="メイリオ"/>
+                          <a:ea typeface="メイリオ"/>
+                        </a:rPr>
+                        <a:t>9/29</a:t>
+                      </a:r>
+                    </a:p>
+                  </a:txBody>
+                  <a:tcPr anchor="ctr">
+                    <a:solidFill>
+                      <a:srgbClr val="F0FAF8"/>
+                    </a:solidFill>
+                    <a:lnL w="6350" cap="flat" cmpd="sng" algn="ctr">
+                      <a:solidFill>
+                        <a:srgbClr val="CCCCCC"/>
+                      </a:solidFill>
+                      <a:prstDash val="solid"/>
+                    </a:lnL>
+                    <a:lnR w="6350" cap="flat" cmpd="sng" algn="ctr">
+                      <a:solidFill>
+                        <a:srgbClr val="CCCCCC"/>
+                      </a:solidFill>
+                      <a:prstDash val="solid"/>
+                    </a:lnR>
+                    <a:lnT w="6350" cap="flat" cmpd="sng" algn="ctr">
+                      <a:solidFill>
+                        <a:srgbClr val="CCCCCC"/>
+                      </a:solidFill>
+                      <a:prstDash val="solid"/>
+                    </a:lnT>
+                    <a:lnB w="6350" cap="flat" cmpd="sng" algn="ctr">
+                      <a:solidFill>
+                        <a:srgbClr val="CCCCCC"/>
+                      </a:solidFill>
+                      <a:prstDash val="solid"/>
+                    </a:lnB>
+                  </a:tcPr>
+                </a:tc>
+              </a:tr>
+            </a:tbl>
+          </a:graphicData>
+        </a:graphic>
+      </p:graphicFrame>
+    </p:spTree>
+  </p:cSld>
+  <p:clrMapOvr>
+    <a:masterClrMapping/>
+  </p:clrMapOvr>
+</p:sld>
+</file>
+
+<file path=ppt/slides/slide6.xml><?xml version="1.0" encoding="utf-8"?>
+<p:sld xmlns:a="http://schemas.openxmlformats.org/drawingml/2006/main" xmlns:p="http://schemas.openxmlformats.org/presentationml/2006/main" xmlns:r="http://schemas.openxmlformats.org/officeDocument/2006/relationships">
+  <p:cSld>
+    <p:spTree>
+      <p:nvGrpSpPr>
+        <p:cNvPr id="1" name=""/>
+        <p:cNvGrpSpPr/>
+        <p:nvPr/>
+      </p:nvGrpSpPr>
+      <p:grpSpPr/>
+      <p:sp>
+        <p:nvSpPr>
+          <p:cNvPr id="2" name="Rectangle 1"/>
+          <p:cNvSpPr/>
+          <p:nvPr/>
+        </p:nvSpPr>
+        <p:spPr>
+          <a:xfrm>
+            <a:off x="350000" y="220000"/>
+            <a:ext cx="80000" cy="420000"/>
+          </a:xfrm>
+          <a:prstGeom prst="rect">
+            <a:avLst/>
+          </a:prstGeom>
+          <a:solidFill>
+            <a:srgbClr val="00A693"/>
+          </a:solidFill>
+          <a:ln>
+            <a:noFill/>
+          </a:ln>
+        </p:spPr>
+        <p:style>
+          <a:lnRef idx="1">
+            <a:schemeClr val="accent1"/>
+          </a:lnRef>
+          <a:fillRef idx="3">
+            <a:schemeClr val="accent1"/>
+          </a:fillRef>
+          <a:effectRef idx="2">
+            <a:schemeClr val="accent1"/>
+          </a:effectRef>
+          <a:fontRef idx="minor">
+            <a:schemeClr val="lt1"/>
+          </a:fontRef>
+        </p:style>
+        <p:txBody>
+          <a:bodyPr rtlCol="0" anchor="ctr"/>
+          <a:lstStyle/>
+          <a:p>
+            <a:pPr algn="ctr"/>
+          </a:p>
+        </p:txBody>
+      </p:sp>
+      <p:sp>
+        <p:nvSpPr>
+          <p:cNvPr id="3" name="TextBox 2"/>
+          <p:cNvSpPr txBox="1"/>
+          <p:nvPr/>
+        </p:nvSpPr>
+        <p:spPr>
+          <a:xfrm>
+            <a:off x="480000" y="200000"/>
+            <a:ext cx="9000000" cy="450000"/>
+          </a:xfrm>
+          <a:prstGeom prst="rect">
+            <a:avLst/>
+          </a:prstGeom>
+          <a:noFill/>
+        </p:spPr>
+        <p:txBody>
+          <a:bodyPr wrap="square">
+            <a:spAutoFit/>
+          </a:bodyPr>
+          <a:lstStyle/>
+          <a:p>
+            <a:pPr algn="l"/>
+            <a:r>
+              <a:rPr sz="2200" b="1">
                 <a:solidFill>
                   <a:srgbClr val="3F3F3F"/>
                 </a:solidFill>
@@ -8261,7 +11287,7 @@
                 <a:latin typeface="メイリオ"/>
                 <a:ea typeface="メイリオ"/>
               </a:rPr>
-              <a:t>全6回に集約、各回約2時間。ご要件確認の独立回は設けない</a:t>
+              <a:t>全7回、各回約2時間。業務フローは2回に分割して管理機能単位で検討</a:t>
             </a:r>
           </a:p>
         </p:txBody>
@@ -8314,7 +11340,7 @@
                 <a:latin typeface="メイリオ"/>
                 <a:ea typeface="メイリオ"/>
               </a:rPr>
-              <a:t>すり合わせ</a:t>
+              <a:t>8/24論点</a:t>
             </a:r>
           </a:p>
         </p:txBody>
@@ -8350,7 +11376,7 @@
                 <a:latin typeface="メイリオ"/>
                 <a:ea typeface="メイリオ"/>
               </a:rPr>
-              <a:t>キックオフで既出ご要件の論点を合意し、以降の検討に進む</a:t>
+              <a:t>サプライヤー管理／商品管理／在庫管理／会員管理</a:t>
             </a:r>
           </a:p>
         </p:txBody>
@@ -8403,7 +11429,7 @@
                 <a:latin typeface="メイリオ"/>
                 <a:ea typeface="メイリオ"/>
               </a:rPr>
-              <a:t>検討粒度</a:t>
+              <a:t>8/27論点</a:t>
             </a:r>
           </a:p>
         </p:txBody>
@@ -8439,7 +11465,7 @@
                 <a:latin typeface="メイリオ"/>
                 <a:ea typeface="メイリオ"/>
               </a:rPr>
-              <a:t>業務フロー／機能詳細はサプライヤー管理・販売組織等の機能単位まで具体化</a:t>
+              <a:t>受注管理／見積管理／マイページ、その他</a:t>
             </a:r>
           </a:p>
         </p:txBody>
@@ -8492,7 +11518,7 @@
                 <a:latin typeface="メイリオ"/>
                 <a:ea typeface="メイリオ"/>
               </a:rPr>
-              <a:t>ECR作業</a:t>
+              <a:t>機能詳細</a:t>
             </a:r>
           </a:p>
         </p:txBody>
@@ -8528,7 +11554,7 @@
                 <a:latin typeface="メイリオ"/>
                 <a:ea typeface="メイリオ"/>
               </a:rPr>
-              <a:t>アジェンダ準備、議事録、Fit&amp;Gap整理、要件定義書作成</a:t>
+              <a:t>Fit&amp;Gapに加え、フロントサイト（画面・導線・デザイン）確認まで実施</a:t>
             </a:r>
           </a:p>
         </p:txBody>
@@ -8706,7 +11732,7 @@
                 <a:latin typeface="メイリオ"/>
                 <a:ea typeface="メイリオ"/>
               </a:rPr>
-              <a:t>本表の日付は仮置き。論点量に応じ業務／機能回の分割も可</a:t>
+              <a:t>本表の日付は仮置き。論点量に応じ回の分割・追加も可</a:t>
             </a:r>
           </a:p>
         </p:txBody>

--- a/要件定義WBS案_20260806.pptx
+++ b/要件定義WBS案_20260806.pptx
@@ -10,6 +10,7 @@
     <p:sldId id="258" r:id="rId9"/>
     <p:sldId id="259" r:id="rId10"/>
     <p:sldId id="260" r:id="rId11"/>
+    <p:sldId id="261" r:id="rId12"/>
   </p:sldIdLst>
   <p:sldSz cx="9906000" cy="6858000" type="screen4x3"/>
   <p:notesSz cx="6858000" cy="9144000"/>
@@ -3186,8 +3187,8 @@
         </p:nvSpPr>
         <p:spPr>
           <a:xfrm>
-            <a:off x="800000" y="1800000"/>
-            <a:ext cx="8300000" cy="500000"/>
+            <a:off x="800000" y="1700000"/>
+            <a:ext cx="8300000" cy="450000"/>
           </a:xfrm>
           <a:prstGeom prst="rect">
             <a:avLst/>
@@ -3222,8 +3223,8 @@
         </p:nvSpPr>
         <p:spPr>
           <a:xfrm>
-            <a:off x="600000" y="2500000"/>
-            <a:ext cx="8700000" cy="800000"/>
+            <a:off x="600000" y="2400000"/>
+            <a:ext cx="8700000" cy="700000"/>
           </a:xfrm>
           <a:prstGeom prst="rect">
             <a:avLst/>
@@ -3258,7 +3259,7 @@
         </p:nvSpPr>
         <p:spPr>
           <a:xfrm>
-            <a:off x="800000" y="3400000"/>
+            <a:off x="800000" y="3300000"/>
             <a:ext cx="8300000" cy="400000"/>
           </a:xfrm>
           <a:prstGeom prst="rect">
@@ -3274,14 +3275,14 @@
           <a:p>
             <a:pPr algn="ctr"/>
             <a:r>
-              <a:rPr sz="1600" b="0">
+              <a:rPr sz="1400" b="0">
                 <a:solidFill>
                   <a:srgbClr val="007A6E"/>
                 </a:solidFill>
                 <a:latin typeface="メイリオ"/>
                 <a:ea typeface="メイリオ"/>
               </a:rPr>
-              <a:t>BtoB ECサイト構築｜要件定義フェーズ</a:t>
+              <a:t>最終目標：システム化の範囲 ／ 業務上のルール ／ 外部仕様 を明確化</a:t>
             </a:r>
           </a:p>
         </p:txBody>
@@ -3294,8 +3295,8 @@
         </p:nvSpPr>
         <p:spPr>
           <a:xfrm>
-            <a:off x="800000" y="4200000"/>
-            <a:ext cx="8300000" cy="400000"/>
+            <a:off x="800000" y="4000000"/>
+            <a:ext cx="8300000" cy="350000"/>
           </a:xfrm>
           <a:prstGeom prst="rect">
             <a:avLst/>
@@ -3330,8 +3331,8 @@
         </p:nvSpPr>
         <p:spPr>
           <a:xfrm>
-            <a:off x="800000" y="4800000"/>
-            <a:ext cx="8300000" cy="400000"/>
+            <a:off x="800000" y="4600000"/>
+            <a:ext cx="8300000" cy="350000"/>
           </a:xfrm>
           <a:prstGeom prst="rect">
             <a:avLst/>
@@ -3384,8 +3385,8 @@
         </p:nvSpPr>
         <p:spPr>
           <a:xfrm>
-            <a:off x="300000" y="180000"/>
-            <a:ext cx="70000" cy="380000"/>
+            <a:off x="300000" y="160000"/>
+            <a:ext cx="70000" cy="360000"/>
           </a:xfrm>
           <a:prstGeom prst="rect">
             <a:avLst/>
@@ -3427,8 +3428,1494 @@
         </p:nvSpPr>
         <p:spPr>
           <a:xfrm>
-            <a:off x="420000" y="160000"/>
+            <a:off x="420000" y="140000"/>
+            <a:ext cx="9000000" cy="380000"/>
+          </a:xfrm>
+          <a:prstGeom prst="rect">
+            <a:avLst/>
+          </a:prstGeom>
+          <a:noFill/>
+        </p:spPr>
+        <p:txBody>
+          <a:bodyPr wrap="square">
+            <a:spAutoFit/>
+          </a:bodyPr>
+          <a:lstStyle/>
+          <a:p>
+            <a:pPr algn="l"/>
+            <a:r>
+              <a:rPr sz="2000" b="1">
+                <a:solidFill>
+                  <a:srgbClr val="3F3F3F"/>
+                </a:solidFill>
+                <a:latin typeface="メイリオ"/>
+                <a:ea typeface="メイリオ"/>
+              </a:rPr>
+              <a:t>要件定義のゴール・前提・進め方</a:t>
+            </a:r>
+          </a:p>
+        </p:txBody>
+      </p:sp>
+      <p:sp>
+        <p:nvSpPr>
+          <p:cNvPr id="4" name="Rounded Rectangle 3"/>
+          <p:cNvSpPr/>
+          <p:nvPr/>
+        </p:nvSpPr>
+        <p:spPr>
+          <a:xfrm>
+            <a:off x="400000" y="700000"/>
+            <a:ext cx="2900000" cy="1400000"/>
+          </a:xfrm>
+          <a:prstGeom prst="roundRect">
+            <a:avLst/>
+          </a:prstGeom>
+          <a:solidFill>
+            <a:srgbClr val="DEF3F1"/>
+          </a:solidFill>
+          <a:ln>
+            <a:solidFill>
+              <a:srgbClr val="00A693"/>
+            </a:solidFill>
+          </a:ln>
+        </p:spPr>
+        <p:style>
+          <a:lnRef idx="1">
+            <a:schemeClr val="accent1"/>
+          </a:lnRef>
+          <a:fillRef idx="3">
+            <a:schemeClr val="accent1"/>
+          </a:fillRef>
+          <a:effectRef idx="2">
+            <a:schemeClr val="accent1"/>
+          </a:effectRef>
+          <a:fontRef idx="minor">
+            <a:schemeClr val="lt1"/>
+          </a:fontRef>
+        </p:style>
+        <p:txBody>
+          <a:bodyPr rtlCol="0" anchor="ctr" wrap="square"/>
+          <a:lstStyle/>
+          <a:p>
+            <a:pPr algn="ctr"/>
+            <a:r>
+              <a:rPr sz="1400" b="1">
+                <a:solidFill>
+                  <a:srgbClr val="007A6E"/>
+                </a:solidFill>
+                <a:latin typeface="メイリオ"/>
+                <a:ea typeface="メイリオ"/>
+              </a:rPr>
+              <a:t>システム化の範囲</a:t>
+            </a:r>
+          </a:p>
+          <a:p>
+            <a:pPr algn="ctr"/>
+            <a:r>
+              <a:rPr sz="1100" b="0">
+                <a:solidFill>
+                  <a:srgbClr val="333333"/>
+                </a:solidFill>
+                <a:latin typeface="メイリオ"/>
+                <a:ea typeface="メイリオ"/>
+              </a:rPr>
+              <a:t>何をEC化し、何を基幹／現行運用に残すかを確定</a:t>
+            </a:r>
+          </a:p>
+        </p:txBody>
+      </p:sp>
+      <p:sp>
+        <p:nvSpPr>
+          <p:cNvPr id="5" name="Rounded Rectangle 4"/>
+          <p:cNvSpPr/>
+          <p:nvPr/>
+        </p:nvSpPr>
+        <p:spPr>
+          <a:xfrm>
+            <a:off x="3500000" y="700000"/>
+            <a:ext cx="2900000" cy="1400000"/>
+          </a:xfrm>
+          <a:prstGeom prst="roundRect">
+            <a:avLst/>
+          </a:prstGeom>
+          <a:solidFill>
+            <a:srgbClr val="DEF3F1"/>
+          </a:solidFill>
+          <a:ln>
+            <a:solidFill>
+              <a:srgbClr val="00A693"/>
+            </a:solidFill>
+          </a:ln>
+        </p:spPr>
+        <p:style>
+          <a:lnRef idx="1">
+            <a:schemeClr val="accent1"/>
+          </a:lnRef>
+          <a:fillRef idx="3">
+            <a:schemeClr val="accent1"/>
+          </a:fillRef>
+          <a:effectRef idx="2">
+            <a:schemeClr val="accent1"/>
+          </a:effectRef>
+          <a:fontRef idx="minor">
+            <a:schemeClr val="lt1"/>
+          </a:fontRef>
+        </p:style>
+        <p:txBody>
+          <a:bodyPr rtlCol="0" anchor="ctr" wrap="square"/>
+          <a:lstStyle/>
+          <a:p>
+            <a:pPr algn="ctr"/>
+            <a:r>
+              <a:rPr sz="1400" b="1">
+                <a:solidFill>
+                  <a:srgbClr val="007A6E"/>
+                </a:solidFill>
+                <a:latin typeface="メイリオ"/>
+                <a:ea typeface="メイリオ"/>
+              </a:rPr>
+              <a:t>業務上のルール</a:t>
+            </a:r>
+          </a:p>
+          <a:p>
+            <a:pPr algn="ctr"/>
+            <a:r>
+              <a:rPr sz="1100" b="0">
+                <a:solidFill>
+                  <a:srgbClr val="333333"/>
+                </a:solidFill>
+                <a:latin typeface="メイリオ"/>
+                <a:ea typeface="メイリオ"/>
+              </a:rPr>
+              <a:t>引当・与信・キャンセル等、業務判断の条件を明文化</a:t>
+            </a:r>
+          </a:p>
+        </p:txBody>
+      </p:sp>
+      <p:sp>
+        <p:nvSpPr>
+          <p:cNvPr id="6" name="Rounded Rectangle 5"/>
+          <p:cNvSpPr/>
+          <p:nvPr/>
+        </p:nvSpPr>
+        <p:spPr>
+          <a:xfrm>
+            <a:off x="6600000" y="700000"/>
+            <a:ext cx="2900000" cy="1400000"/>
+          </a:xfrm>
+          <a:prstGeom prst="roundRect">
+            <a:avLst/>
+          </a:prstGeom>
+          <a:solidFill>
+            <a:srgbClr val="DEF3F1"/>
+          </a:solidFill>
+          <a:ln>
+            <a:solidFill>
+              <a:srgbClr val="00A693"/>
+            </a:solidFill>
+          </a:ln>
+        </p:spPr>
+        <p:style>
+          <a:lnRef idx="1">
+            <a:schemeClr val="accent1"/>
+          </a:lnRef>
+          <a:fillRef idx="3">
+            <a:schemeClr val="accent1"/>
+          </a:fillRef>
+          <a:effectRef idx="2">
+            <a:schemeClr val="accent1"/>
+          </a:effectRef>
+          <a:fontRef idx="minor">
+            <a:schemeClr val="lt1"/>
+          </a:fontRef>
+        </p:style>
+        <p:txBody>
+          <a:bodyPr rtlCol="0" anchor="ctr" wrap="square"/>
+          <a:lstStyle/>
+          <a:p>
+            <a:pPr algn="ctr"/>
+            <a:r>
+              <a:rPr sz="1400" b="1">
+                <a:solidFill>
+                  <a:srgbClr val="007A6E"/>
+                </a:solidFill>
+                <a:latin typeface="メイリオ"/>
+                <a:ea typeface="メイリオ"/>
+              </a:rPr>
+              <a:t>外部仕様</a:t>
+            </a:r>
+          </a:p>
+          <a:p>
+            <a:pPr algn="ctr"/>
+            <a:r>
+              <a:rPr sz="1100" b="0">
+                <a:solidFill>
+                  <a:srgbClr val="333333"/>
+                </a:solidFill>
+                <a:latin typeface="メイリオ"/>
+                <a:ea typeface="メイリオ"/>
+              </a:rPr>
+              <a:t>画面・帳票・基幹I/Fとして外から見える入出力と振る舞いを定義</a:t>
+            </a:r>
+          </a:p>
+        </p:txBody>
+      </p:sp>
+      <p:sp>
+        <p:nvSpPr>
+          <p:cNvPr id="7" name="TextBox 6"/>
+          <p:cNvSpPr txBox="1"/>
+          <p:nvPr/>
+        </p:nvSpPr>
+        <p:spPr>
+          <a:xfrm>
+            <a:off x="400000" y="2300000"/>
+            <a:ext cx="9000000" cy="350000"/>
+          </a:xfrm>
+          <a:prstGeom prst="rect">
+            <a:avLst/>
+          </a:prstGeom>
+          <a:noFill/>
+        </p:spPr>
+        <p:txBody>
+          <a:bodyPr wrap="square">
+            <a:spAutoFit/>
+          </a:bodyPr>
+          <a:lstStyle/>
+          <a:p>
+            <a:pPr algn="l"/>
+            <a:r>
+              <a:rPr sz="1400" b="1">
+                <a:solidFill>
+                  <a:srgbClr val="333333"/>
+                </a:solidFill>
+                <a:latin typeface="メイリオ"/>
+                <a:ea typeface="メイリオ"/>
+              </a:rPr>
+              <a:t>前提条件</a:t>
+            </a:r>
+          </a:p>
+        </p:txBody>
+      </p:sp>
+      <p:sp>
+        <p:nvSpPr>
+          <p:cNvPr id="8" name="Rounded Rectangle 7"/>
+          <p:cNvSpPr/>
+          <p:nvPr/>
+        </p:nvSpPr>
+        <p:spPr>
+          <a:xfrm>
+            <a:off x="400000" y="2700000"/>
+            <a:ext cx="2900000" cy="700000"/>
+          </a:xfrm>
+          <a:prstGeom prst="roundRect">
+            <a:avLst/>
+          </a:prstGeom>
+          <a:solidFill>
+            <a:srgbClr val="FFFFFF"/>
+          </a:solidFill>
+          <a:ln>
+            <a:solidFill>
+              <a:srgbClr val="00A693"/>
+            </a:solidFill>
+          </a:ln>
+        </p:spPr>
+        <p:style>
+          <a:lnRef idx="1">
+            <a:schemeClr val="accent1"/>
+          </a:lnRef>
+          <a:fillRef idx="3">
+            <a:schemeClr val="accent1"/>
+          </a:fillRef>
+          <a:effectRef idx="2">
+            <a:schemeClr val="accent1"/>
+          </a:effectRef>
+          <a:fontRef idx="minor">
+            <a:schemeClr val="lt1"/>
+          </a:fontRef>
+        </p:style>
+        <p:txBody>
+          <a:bodyPr rtlCol="0" anchor="ctr" wrap="square"/>
+          <a:lstStyle/>
+          <a:p>
+            <a:pPr algn="ctr"/>
+            <a:r>
+              <a:rPr sz="1200" b="1">
+                <a:solidFill>
+                  <a:srgbClr val="333333"/>
+                </a:solidFill>
+                <a:latin typeface="メイリオ"/>
+                <a:ea typeface="メイリオ"/>
+              </a:rPr>
+              <a:t>基幹システムの運用は変えない</a:t>
+            </a:r>
+          </a:p>
+        </p:txBody>
+      </p:sp>
+      <p:sp>
+        <p:nvSpPr>
+          <p:cNvPr id="9" name="Rounded Rectangle 8"/>
+          <p:cNvSpPr/>
+          <p:nvPr/>
+        </p:nvSpPr>
+        <p:spPr>
+          <a:xfrm>
+            <a:off x="3500000" y="2700000"/>
+            <a:ext cx="2900000" cy="700000"/>
+          </a:xfrm>
+          <a:prstGeom prst="roundRect">
+            <a:avLst/>
+          </a:prstGeom>
+          <a:solidFill>
+            <a:srgbClr val="FFFFFF"/>
+          </a:solidFill>
+          <a:ln>
+            <a:solidFill>
+              <a:srgbClr val="00A693"/>
+            </a:solidFill>
+          </a:ln>
+        </p:spPr>
+        <p:style>
+          <a:lnRef idx="1">
+            <a:schemeClr val="accent1"/>
+          </a:lnRef>
+          <a:fillRef idx="3">
+            <a:schemeClr val="accent1"/>
+          </a:fillRef>
+          <a:effectRef idx="2">
+            <a:schemeClr val="accent1"/>
+          </a:effectRef>
+          <a:fontRef idx="minor">
+            <a:schemeClr val="lt1"/>
+          </a:fontRef>
+        </p:style>
+        <p:txBody>
+          <a:bodyPr rtlCol="0" anchor="ctr" wrap="square"/>
+          <a:lstStyle/>
+          <a:p>
+            <a:pPr algn="ctr"/>
+            <a:r>
+              <a:rPr sz="1200" b="1">
+                <a:solidFill>
+                  <a:srgbClr val="333333"/>
+                </a:solidFill>
+                <a:latin typeface="メイリオ"/>
+                <a:ea typeface="メイリオ"/>
+              </a:rPr>
+              <a:t>業務を効率化したい（手作業・Excel運用の削減）</a:t>
+            </a:r>
+          </a:p>
+        </p:txBody>
+      </p:sp>
+      <p:sp>
+        <p:nvSpPr>
+          <p:cNvPr id="10" name="Rounded Rectangle 9"/>
+          <p:cNvSpPr/>
+          <p:nvPr/>
+        </p:nvSpPr>
+        <p:spPr>
+          <a:xfrm>
+            <a:off x="6600000" y="2700000"/>
+            <a:ext cx="2900000" cy="700000"/>
+          </a:xfrm>
+          <a:prstGeom prst="roundRect">
+            <a:avLst/>
+          </a:prstGeom>
+          <a:solidFill>
+            <a:srgbClr val="FFFFFF"/>
+          </a:solidFill>
+          <a:ln>
+            <a:solidFill>
+              <a:srgbClr val="00A693"/>
+            </a:solidFill>
+          </a:ln>
+        </p:spPr>
+        <p:style>
+          <a:lnRef idx="1">
+            <a:schemeClr val="accent1"/>
+          </a:lnRef>
+          <a:fillRef idx="3">
+            <a:schemeClr val="accent1"/>
+          </a:fillRef>
+          <a:effectRef idx="2">
+            <a:schemeClr val="accent1"/>
+          </a:effectRef>
+          <a:fontRef idx="minor">
+            <a:schemeClr val="lt1"/>
+          </a:fontRef>
+        </p:style>
+        <p:txBody>
+          <a:bodyPr rtlCol="0" anchor="ctr" wrap="square"/>
+          <a:lstStyle/>
+          <a:p>
+            <a:pPr algn="ctr"/>
+            <a:r>
+              <a:rPr sz="1200" b="1">
+                <a:solidFill>
+                  <a:srgbClr val="333333"/>
+                </a:solidFill>
+                <a:latin typeface="メイリオ"/>
+                <a:ea typeface="メイリオ"/>
+              </a:rPr>
+              <a:t>取引先とのビジネスルールは変えない</a:t>
+            </a:r>
+          </a:p>
+        </p:txBody>
+      </p:sp>
+      <p:sp>
+        <p:nvSpPr>
+          <p:cNvPr id="11" name="TextBox 10"/>
+          <p:cNvSpPr txBox="1"/>
+          <p:nvPr/>
+        </p:nvSpPr>
+        <p:spPr>
+          <a:xfrm>
+            <a:off x="400000" y="3600000"/>
+            <a:ext cx="9000000" cy="350000"/>
+          </a:xfrm>
+          <a:prstGeom prst="rect">
+            <a:avLst/>
+          </a:prstGeom>
+          <a:noFill/>
+        </p:spPr>
+        <p:txBody>
+          <a:bodyPr wrap="square">
+            <a:spAutoFit/>
+          </a:bodyPr>
+          <a:lstStyle/>
+          <a:p>
+            <a:pPr algn="l"/>
+            <a:r>
+              <a:rPr sz="1400" b="1">
+                <a:solidFill>
+                  <a:srgbClr val="333333"/>
+                </a:solidFill>
+                <a:latin typeface="メイリオ"/>
+                <a:ea typeface="メイリオ"/>
+              </a:rPr>
+              <a:t>現状の不足（要件定義で埋めること）</a:t>
+            </a:r>
+          </a:p>
+        </p:txBody>
+      </p:sp>
+      <p:sp>
+        <p:nvSpPr>
+          <p:cNvPr id="12" name="TextBox 11"/>
+          <p:cNvSpPr txBox="1"/>
+          <p:nvPr/>
+        </p:nvSpPr>
+        <p:spPr>
+          <a:xfrm>
+            <a:off x="500000" y="4000000"/>
             <a:ext cx="9000000" cy="400000"/>
+          </a:xfrm>
+          <a:prstGeom prst="rect">
+            <a:avLst/>
+          </a:prstGeom>
+          <a:noFill/>
+        </p:spPr>
+        <p:txBody>
+          <a:bodyPr wrap="square">
+            <a:spAutoFit/>
+          </a:bodyPr>
+          <a:lstStyle/>
+          <a:p>
+            <a:pPr algn="l"/>
+            <a:r>
+              <a:rPr sz="1200" b="0">
+                <a:solidFill>
+                  <a:srgbClr val="333333"/>
+                </a:solidFill>
+                <a:latin typeface="メイリオ"/>
+                <a:ea typeface="メイリオ"/>
+              </a:rPr>
+              <a:t>・ざっくりした要望しか見えていない</a:t>
+            </a:r>
+          </a:p>
+        </p:txBody>
+      </p:sp>
+      <p:sp>
+        <p:nvSpPr>
+          <p:cNvPr id="13" name="TextBox 12"/>
+          <p:cNvSpPr txBox="1"/>
+          <p:nvPr/>
+        </p:nvSpPr>
+        <p:spPr>
+          <a:xfrm>
+            <a:off x="500000" y="4420000"/>
+            <a:ext cx="9000000" cy="400000"/>
+          </a:xfrm>
+          <a:prstGeom prst="rect">
+            <a:avLst/>
+          </a:prstGeom>
+          <a:noFill/>
+        </p:spPr>
+        <p:txBody>
+          <a:bodyPr wrap="square">
+            <a:spAutoFit/>
+          </a:bodyPr>
+          <a:lstStyle/>
+          <a:p>
+            <a:pPr algn="l"/>
+            <a:r>
+              <a:rPr sz="1200" b="0">
+                <a:solidFill>
+                  <a:srgbClr val="333333"/>
+                </a:solidFill>
+                <a:latin typeface="メイリオ"/>
+                <a:ea typeface="メイリオ"/>
+              </a:rPr>
+              <a:t>・正常系の業務しか見えていない（例外系未整理）</a:t>
+            </a:r>
+          </a:p>
+        </p:txBody>
+      </p:sp>
+      <p:sp>
+        <p:nvSpPr>
+          <p:cNvPr id="14" name="TextBox 13"/>
+          <p:cNvSpPr txBox="1"/>
+          <p:nvPr/>
+        </p:nvSpPr>
+        <p:spPr>
+          <a:xfrm>
+            <a:off x="500000" y="4840000"/>
+            <a:ext cx="9000000" cy="400000"/>
+          </a:xfrm>
+          <a:prstGeom prst="rect">
+            <a:avLst/>
+          </a:prstGeom>
+          <a:noFill/>
+        </p:spPr>
+        <p:txBody>
+          <a:bodyPr wrap="square">
+            <a:spAutoFit/>
+          </a:bodyPr>
+          <a:lstStyle/>
+          <a:p>
+            <a:pPr algn="l"/>
+            <a:r>
+              <a:rPr sz="1200" b="0">
+                <a:solidFill>
+                  <a:srgbClr val="333333"/>
+                </a:solidFill>
+                <a:latin typeface="メイリオ"/>
+                <a:ea typeface="メイリオ"/>
+              </a:rPr>
+              <a:t>・UIが決まっていない</a:t>
+            </a:r>
+          </a:p>
+        </p:txBody>
+      </p:sp>
+      <p:sp>
+        <p:nvSpPr>
+          <p:cNvPr id="15" name="TextBox 14"/>
+          <p:cNvSpPr txBox="1"/>
+          <p:nvPr/>
+        </p:nvSpPr>
+        <p:spPr>
+          <a:xfrm>
+            <a:off x="500000" y="5260000"/>
+            <a:ext cx="9000000" cy="400000"/>
+          </a:xfrm>
+          <a:prstGeom prst="rect">
+            <a:avLst/>
+          </a:prstGeom>
+          <a:noFill/>
+        </p:spPr>
+        <p:txBody>
+          <a:bodyPr wrap="square">
+            <a:spAutoFit/>
+          </a:bodyPr>
+          <a:lstStyle/>
+          <a:p>
+            <a:pPr algn="l"/>
+            <a:r>
+              <a:rPr sz="1200" b="0">
+                <a:solidFill>
+                  <a:srgbClr val="333333"/>
+                </a:solidFill>
+                <a:latin typeface="メイリオ"/>
+                <a:ea typeface="メイリオ"/>
+              </a:rPr>
+              <a:t>・基幹連携の方式・フォーマットが未確定</a:t>
+            </a:r>
+          </a:p>
+        </p:txBody>
+      </p:sp>
+      <p:sp>
+        <p:nvSpPr>
+          <p:cNvPr id="16" name="TextBox 15"/>
+          <p:cNvSpPr txBox="1"/>
+          <p:nvPr/>
+        </p:nvSpPr>
+        <p:spPr>
+          <a:xfrm>
+            <a:off x="500000" y="5680000"/>
+            <a:ext cx="9000000" cy="400000"/>
+          </a:xfrm>
+          <a:prstGeom prst="rect">
+            <a:avLst/>
+          </a:prstGeom>
+          <a:noFill/>
+        </p:spPr>
+        <p:txBody>
+          <a:bodyPr wrap="square">
+            <a:spAutoFit/>
+          </a:bodyPr>
+          <a:lstStyle/>
+          <a:p>
+            <a:pPr algn="l"/>
+            <a:r>
+              <a:rPr sz="1200" b="0">
+                <a:solidFill>
+                  <a:srgbClr val="333333"/>
+                </a:solidFill>
+                <a:latin typeface="メイリオ"/>
+                <a:ea typeface="メイリオ"/>
+              </a:rPr>
+              <a:t>・登場人物が見えていない</a:t>
+            </a:r>
+          </a:p>
+        </p:txBody>
+      </p:sp>
+    </p:spTree>
+  </p:cSld>
+  <p:clrMapOvr>
+    <a:masterClrMapping/>
+  </p:clrMapOvr>
+</p:sld>
+</file>
+
+<file path=ppt/slides/slide3.xml><?xml version="1.0" encoding="utf-8"?>
+<p:sld xmlns:a="http://schemas.openxmlformats.org/drawingml/2006/main" xmlns:p="http://schemas.openxmlformats.org/presentationml/2006/main" xmlns:r="http://schemas.openxmlformats.org/officeDocument/2006/relationships">
+  <p:cSld>
+    <p:spTree>
+      <p:nvGrpSpPr>
+        <p:cNvPr id="1" name=""/>
+        <p:cNvGrpSpPr/>
+        <p:nvPr/>
+      </p:nvGrpSpPr>
+      <p:grpSpPr/>
+      <p:sp>
+        <p:nvSpPr>
+          <p:cNvPr id="2" name="Rectangle 1"/>
+          <p:cNvSpPr/>
+          <p:nvPr/>
+        </p:nvSpPr>
+        <p:spPr>
+          <a:xfrm>
+            <a:off x="300000" y="160000"/>
+            <a:ext cx="70000" cy="360000"/>
+          </a:xfrm>
+          <a:prstGeom prst="rect">
+            <a:avLst/>
+          </a:prstGeom>
+          <a:solidFill>
+            <a:srgbClr val="00A693"/>
+          </a:solidFill>
+          <a:ln>
+            <a:noFill/>
+          </a:ln>
+        </p:spPr>
+        <p:style>
+          <a:lnRef idx="1">
+            <a:schemeClr val="accent1"/>
+          </a:lnRef>
+          <a:fillRef idx="3">
+            <a:schemeClr val="accent1"/>
+          </a:fillRef>
+          <a:effectRef idx="2">
+            <a:schemeClr val="accent1"/>
+          </a:effectRef>
+          <a:fontRef idx="minor">
+            <a:schemeClr val="lt1"/>
+          </a:fontRef>
+        </p:style>
+        <p:txBody>
+          <a:bodyPr rtlCol="0" anchor="ctr"/>
+          <a:lstStyle/>
+          <a:p>
+            <a:pPr algn="ctr"/>
+          </a:p>
+        </p:txBody>
+      </p:sp>
+      <p:sp>
+        <p:nvSpPr>
+          <p:cNvPr id="3" name="TextBox 2"/>
+          <p:cNvSpPr txBox="1"/>
+          <p:nvPr/>
+        </p:nvSpPr>
+        <p:spPr>
+          <a:xfrm>
+            <a:off x="420000" y="140000"/>
+            <a:ext cx="9000000" cy="380000"/>
+          </a:xfrm>
+          <a:prstGeom prst="rect">
+            <a:avLst/>
+          </a:prstGeom>
+          <a:noFill/>
+        </p:spPr>
+        <p:txBody>
+          <a:bodyPr wrap="square">
+            <a:spAutoFit/>
+          </a:bodyPr>
+          <a:lstStyle/>
+          <a:p>
+            <a:pPr algn="l"/>
+            <a:r>
+              <a:rPr sz="2000" b="1">
+                <a:solidFill>
+                  <a:srgbClr val="3F3F3F"/>
+                </a:solidFill>
+                <a:latin typeface="メイリオ"/>
+                <a:ea typeface="メイリオ"/>
+              </a:rPr>
+              <a:t>要件定義の手順（工程順）</a:t>
+            </a:r>
+          </a:p>
+        </p:txBody>
+      </p:sp>
+      <p:sp>
+        <p:nvSpPr>
+          <p:cNvPr id="4" name="Rounded Rectangle 3"/>
+          <p:cNvSpPr/>
+          <p:nvPr/>
+        </p:nvSpPr>
+        <p:spPr>
+          <a:xfrm>
+            <a:off x="500000" y="750000"/>
+            <a:ext cx="2900000" cy="2000000"/>
+          </a:xfrm>
+          <a:prstGeom prst="roundRect">
+            <a:avLst/>
+          </a:prstGeom>
+          <a:solidFill>
+            <a:srgbClr val="DEF3F1"/>
+          </a:solidFill>
+          <a:ln>
+            <a:solidFill>
+              <a:srgbClr val="00A693"/>
+            </a:solidFill>
+          </a:ln>
+        </p:spPr>
+        <p:style>
+          <a:lnRef idx="1">
+            <a:schemeClr val="accent1"/>
+          </a:lnRef>
+          <a:fillRef idx="3">
+            <a:schemeClr val="accent1"/>
+          </a:fillRef>
+          <a:effectRef idx="2">
+            <a:schemeClr val="accent1"/>
+          </a:effectRef>
+          <a:fontRef idx="minor">
+            <a:schemeClr val="lt1"/>
+          </a:fontRef>
+        </p:style>
+        <p:txBody>
+          <a:bodyPr rtlCol="0" anchor="ctr" wrap="square"/>
+          <a:lstStyle/>
+          <a:p>
+            <a:pPr algn="ctr"/>
+            <a:r>
+              <a:rPr sz="1200" b="1">
+                <a:solidFill>
+                  <a:srgbClr val="007A6E"/>
+                </a:solidFill>
+                <a:latin typeface="メイリオ"/>
+                <a:ea typeface="メイリオ"/>
+              </a:rPr>
+              <a:t>工程1</a:t>
+            </a:r>
+          </a:p>
+          <a:p>
+            <a:pPr algn="ctr"/>
+            <a:r>
+              <a:rPr sz="1400" b="1">
+                <a:solidFill>
+                  <a:srgbClr val="333333"/>
+                </a:solidFill>
+                <a:latin typeface="メイリオ"/>
+                <a:ea typeface="メイリオ"/>
+              </a:rPr>
+              <a:t>システム化する</a:t>
+            </a:r>
+          </a:p>
+          <a:p>
+            <a:pPr algn="ctr"/>
+            <a:r>
+              <a:rPr sz="1400" b="1">
+                <a:solidFill>
+                  <a:srgbClr val="333333"/>
+                </a:solidFill>
+                <a:latin typeface="メイリオ"/>
+                <a:ea typeface="メイリオ"/>
+              </a:rPr>
+              <a:t>業務の整理</a:t>
+            </a:r>
+          </a:p>
+          <a:p/>
+          <a:p>
+            <a:pPr algn="ctr"/>
+            <a:r>
+              <a:rPr sz="1100" b="0">
+                <a:solidFill>
+                  <a:srgbClr val="666666"/>
+                </a:solidFill>
+                <a:latin typeface="メイリオ"/>
+                <a:ea typeface="メイリオ"/>
+              </a:rPr>
+              <a:t>登場人物・正常／例外</a:t>
+            </a:r>
+          </a:p>
+          <a:p>
+            <a:pPr algn="ctr"/>
+            <a:r>
+              <a:rPr sz="1100" b="0">
+                <a:solidFill>
+                  <a:srgbClr val="666666"/>
+                </a:solidFill>
+                <a:latin typeface="メイリオ"/>
+                <a:ea typeface="メイリオ"/>
+              </a:rPr>
+              <a:t>やる／やらないを確定</a:t>
+            </a:r>
+          </a:p>
+        </p:txBody>
+      </p:sp>
+      <p:sp>
+        <p:nvSpPr>
+          <p:cNvPr id="5" name="Rounded Rectangle 4"/>
+          <p:cNvSpPr/>
+          <p:nvPr/>
+        </p:nvSpPr>
+        <p:spPr>
+          <a:xfrm>
+            <a:off x="3600000" y="750000"/>
+            <a:ext cx="2900000" cy="2000000"/>
+          </a:xfrm>
+          <a:prstGeom prst="roundRect">
+            <a:avLst/>
+          </a:prstGeom>
+          <a:solidFill>
+            <a:srgbClr val="DEF3F1"/>
+          </a:solidFill>
+          <a:ln>
+            <a:solidFill>
+              <a:srgbClr val="00A693"/>
+            </a:solidFill>
+          </a:ln>
+        </p:spPr>
+        <p:style>
+          <a:lnRef idx="1">
+            <a:schemeClr val="accent1"/>
+          </a:lnRef>
+          <a:fillRef idx="3">
+            <a:schemeClr val="accent1"/>
+          </a:fillRef>
+          <a:effectRef idx="2">
+            <a:schemeClr val="accent1"/>
+          </a:effectRef>
+          <a:fontRef idx="minor">
+            <a:schemeClr val="lt1"/>
+          </a:fontRef>
+        </p:style>
+        <p:txBody>
+          <a:bodyPr rtlCol="0" anchor="ctr" wrap="square"/>
+          <a:lstStyle/>
+          <a:p>
+            <a:pPr algn="ctr"/>
+            <a:r>
+              <a:rPr sz="1200" b="1">
+                <a:solidFill>
+                  <a:srgbClr val="007A6E"/>
+                </a:solidFill>
+                <a:latin typeface="メイリオ"/>
+                <a:ea typeface="メイリオ"/>
+              </a:rPr>
+              <a:t>工程2</a:t>
+            </a:r>
+          </a:p>
+          <a:p>
+            <a:pPr algn="ctr"/>
+            <a:r>
+              <a:rPr sz="1400" b="1">
+                <a:solidFill>
+                  <a:srgbClr val="333333"/>
+                </a:solidFill>
+                <a:latin typeface="メイリオ"/>
+                <a:ea typeface="メイリオ"/>
+              </a:rPr>
+              <a:t>基幹システムの</a:t>
+            </a:r>
+          </a:p>
+          <a:p>
+            <a:pPr algn="ctr"/>
+            <a:r>
+              <a:rPr sz="1400" b="1">
+                <a:solidFill>
+                  <a:srgbClr val="333333"/>
+                </a:solidFill>
+                <a:latin typeface="メイリオ"/>
+                <a:ea typeface="メイリオ"/>
+              </a:rPr>
+              <a:t>仕様整理</a:t>
+            </a:r>
+          </a:p>
+          <a:p/>
+          <a:p>
+            <a:pPr algn="ctr"/>
+            <a:r>
+              <a:rPr sz="1100" b="0">
+                <a:solidFill>
+                  <a:srgbClr val="666666"/>
+                </a:solidFill>
+                <a:latin typeface="メイリオ"/>
+                <a:ea typeface="メイリオ"/>
+              </a:rPr>
+              <a:t>変えない境界と</a:t>
+            </a:r>
+          </a:p>
+          <a:p>
+            <a:pPr algn="ctr"/>
+            <a:r>
+              <a:rPr sz="1100" b="0">
+                <a:solidFill>
+                  <a:srgbClr val="666666"/>
+                </a:solidFill>
+                <a:latin typeface="メイリオ"/>
+                <a:ea typeface="メイリオ"/>
+              </a:rPr>
+              <a:t>連携前提を確定</a:t>
+            </a:r>
+          </a:p>
+        </p:txBody>
+      </p:sp>
+      <p:sp>
+        <p:nvSpPr>
+          <p:cNvPr id="6" name="Rounded Rectangle 5"/>
+          <p:cNvSpPr/>
+          <p:nvPr/>
+        </p:nvSpPr>
+        <p:spPr>
+          <a:xfrm>
+            <a:off x="6700000" y="750000"/>
+            <a:ext cx="2900000" cy="2000000"/>
+          </a:xfrm>
+          <a:prstGeom prst="roundRect">
+            <a:avLst/>
+          </a:prstGeom>
+          <a:solidFill>
+            <a:srgbClr val="DEF3F1"/>
+          </a:solidFill>
+          <a:ln>
+            <a:solidFill>
+              <a:srgbClr val="00A693"/>
+            </a:solidFill>
+          </a:ln>
+        </p:spPr>
+        <p:style>
+          <a:lnRef idx="1">
+            <a:schemeClr val="accent1"/>
+          </a:lnRef>
+          <a:fillRef idx="3">
+            <a:schemeClr val="accent1"/>
+          </a:fillRef>
+          <a:effectRef idx="2">
+            <a:schemeClr val="accent1"/>
+          </a:effectRef>
+          <a:fontRef idx="minor">
+            <a:schemeClr val="lt1"/>
+          </a:fontRef>
+        </p:style>
+        <p:txBody>
+          <a:bodyPr rtlCol="0" anchor="ctr" wrap="square"/>
+          <a:lstStyle/>
+          <a:p>
+            <a:pPr algn="ctr"/>
+            <a:r>
+              <a:rPr sz="1200" b="1">
+                <a:solidFill>
+                  <a:srgbClr val="007A6E"/>
+                </a:solidFill>
+                <a:latin typeface="メイリオ"/>
+                <a:ea typeface="メイリオ"/>
+              </a:rPr>
+              <a:t>工程3</a:t>
+            </a:r>
+          </a:p>
+          <a:p>
+            <a:pPr algn="ctr"/>
+            <a:r>
+              <a:rPr sz="1400" b="1">
+                <a:solidFill>
+                  <a:srgbClr val="333333"/>
+                </a:solidFill>
+                <a:latin typeface="メイリオ"/>
+                <a:ea typeface="メイリオ"/>
+              </a:rPr>
+              <a:t>業務ルール</a:t>
+            </a:r>
+          </a:p>
+          <a:p>
+            <a:pPr algn="ctr"/>
+            <a:r>
+              <a:rPr sz="1400" b="1">
+                <a:solidFill>
+                  <a:srgbClr val="333333"/>
+                </a:solidFill>
+                <a:latin typeface="メイリオ"/>
+                <a:ea typeface="メイリオ"/>
+              </a:rPr>
+              <a:t>の定義</a:t>
+            </a:r>
+          </a:p>
+          <a:p/>
+          <a:p>
+            <a:pPr algn="ctr"/>
+            <a:r>
+              <a:rPr sz="1100" b="0">
+                <a:solidFill>
+                  <a:srgbClr val="666666"/>
+                </a:solidFill>
+                <a:latin typeface="メイリオ"/>
+                <a:ea typeface="メイリオ"/>
+              </a:rPr>
+              <a:t>引当・与信・取消等</a:t>
+            </a:r>
+          </a:p>
+          <a:p>
+            <a:pPr algn="ctr"/>
+            <a:r>
+              <a:rPr sz="1100" b="0">
+                <a:solidFill>
+                  <a:srgbClr val="666666"/>
+                </a:solidFill>
+                <a:latin typeface="メイリオ"/>
+                <a:ea typeface="メイリオ"/>
+              </a:rPr>
+              <a:t>判断条件を明文化</a:t>
+            </a:r>
+          </a:p>
+        </p:txBody>
+      </p:sp>
+      <p:sp>
+        <p:nvSpPr>
+          <p:cNvPr id="7" name="Rounded Rectangle 6"/>
+          <p:cNvSpPr/>
+          <p:nvPr/>
+        </p:nvSpPr>
+        <p:spPr>
+          <a:xfrm>
+            <a:off x="500000" y="3250000"/>
+            <a:ext cx="2900000" cy="2000000"/>
+          </a:xfrm>
+          <a:prstGeom prst="roundRect">
+            <a:avLst/>
+          </a:prstGeom>
+          <a:solidFill>
+            <a:srgbClr val="DEF3F1"/>
+          </a:solidFill>
+          <a:ln>
+            <a:solidFill>
+              <a:srgbClr val="00A693"/>
+            </a:solidFill>
+          </a:ln>
+        </p:spPr>
+        <p:style>
+          <a:lnRef idx="1">
+            <a:schemeClr val="accent1"/>
+          </a:lnRef>
+          <a:fillRef idx="3">
+            <a:schemeClr val="accent1"/>
+          </a:fillRef>
+          <a:effectRef idx="2">
+            <a:schemeClr val="accent1"/>
+          </a:effectRef>
+          <a:fontRef idx="minor">
+            <a:schemeClr val="lt1"/>
+          </a:fontRef>
+        </p:style>
+        <p:txBody>
+          <a:bodyPr rtlCol="0" anchor="ctr" wrap="square"/>
+          <a:lstStyle/>
+          <a:p>
+            <a:pPr algn="ctr"/>
+            <a:r>
+              <a:rPr sz="1200" b="1">
+                <a:solidFill>
+                  <a:srgbClr val="007A6E"/>
+                </a:solidFill>
+                <a:latin typeface="メイリオ"/>
+                <a:ea typeface="メイリオ"/>
+              </a:rPr>
+              <a:t>工程4</a:t>
+            </a:r>
+          </a:p>
+          <a:p>
+            <a:pPr algn="ctr"/>
+            <a:r>
+              <a:rPr sz="1400" b="1">
+                <a:solidFill>
+                  <a:srgbClr val="333333"/>
+                </a:solidFill>
+                <a:latin typeface="メイリオ"/>
+                <a:ea typeface="メイリオ"/>
+              </a:rPr>
+              <a:t>UI検討</a:t>
+            </a:r>
+          </a:p>
+          <a:p/>
+          <a:p>
+            <a:pPr algn="ctr"/>
+            <a:r>
+              <a:rPr sz="1100" b="0">
+                <a:solidFill>
+                  <a:srgbClr val="666666"/>
+                </a:solidFill>
+                <a:latin typeface="メイリオ"/>
+                <a:ea typeface="メイリオ"/>
+              </a:rPr>
+              <a:t>画面の入出力・導線</a:t>
+            </a:r>
+          </a:p>
+          <a:p>
+            <a:pPr algn="ctr"/>
+            <a:r>
+              <a:rPr sz="1100" b="0">
+                <a:solidFill>
+                  <a:srgbClr val="666666"/>
+                </a:solidFill>
+                <a:latin typeface="メイリオ"/>
+                <a:ea typeface="メイリオ"/>
+              </a:rPr>
+              <a:t>＝画面外部仕様</a:t>
+            </a:r>
+          </a:p>
+        </p:txBody>
+      </p:sp>
+      <p:sp>
+        <p:nvSpPr>
+          <p:cNvPr id="8" name="Rounded Rectangle 7"/>
+          <p:cNvSpPr/>
+          <p:nvPr/>
+        </p:nvSpPr>
+        <p:spPr>
+          <a:xfrm>
+            <a:off x="3600000" y="3250000"/>
+            <a:ext cx="2900000" cy="2000000"/>
+          </a:xfrm>
+          <a:prstGeom prst="roundRect">
+            <a:avLst/>
+          </a:prstGeom>
+          <a:solidFill>
+            <a:srgbClr val="DEF3F1"/>
+          </a:solidFill>
+          <a:ln>
+            <a:solidFill>
+              <a:srgbClr val="00A693"/>
+            </a:solidFill>
+          </a:ln>
+        </p:spPr>
+        <p:style>
+          <a:lnRef idx="1">
+            <a:schemeClr val="accent1"/>
+          </a:lnRef>
+          <a:fillRef idx="3">
+            <a:schemeClr val="accent1"/>
+          </a:fillRef>
+          <a:effectRef idx="2">
+            <a:schemeClr val="accent1"/>
+          </a:effectRef>
+          <a:fontRef idx="minor">
+            <a:schemeClr val="lt1"/>
+          </a:fontRef>
+        </p:style>
+        <p:txBody>
+          <a:bodyPr rtlCol="0" anchor="ctr" wrap="square"/>
+          <a:lstStyle/>
+          <a:p>
+            <a:pPr algn="ctr"/>
+            <a:r>
+              <a:rPr sz="1200" b="1">
+                <a:solidFill>
+                  <a:srgbClr val="007A6E"/>
+                </a:solidFill>
+                <a:latin typeface="メイリオ"/>
+                <a:ea typeface="メイリオ"/>
+              </a:rPr>
+              <a:t>工程5</a:t>
+            </a:r>
+          </a:p>
+          <a:p>
+            <a:pPr algn="ctr"/>
+            <a:r>
+              <a:rPr sz="1400" b="1">
+                <a:solidFill>
+                  <a:srgbClr val="333333"/>
+                </a:solidFill>
+                <a:latin typeface="メイリオ"/>
+                <a:ea typeface="メイリオ"/>
+              </a:rPr>
+              <a:t>連携外部仕様</a:t>
+            </a:r>
+          </a:p>
+          <a:p>
+            <a:pPr algn="ctr"/>
+            <a:r>
+              <a:rPr sz="1400" b="1">
+                <a:solidFill>
+                  <a:srgbClr val="333333"/>
+                </a:solidFill>
+                <a:latin typeface="メイリオ"/>
+                <a:ea typeface="メイリオ"/>
+              </a:rPr>
+              <a:t>＋非機能</a:t>
+            </a:r>
+          </a:p>
+          <a:p/>
+          <a:p>
+            <a:pPr algn="ctr"/>
+            <a:r>
+              <a:rPr sz="1100" b="0">
+                <a:solidFill>
+                  <a:srgbClr val="666666"/>
+                </a:solidFill>
+                <a:latin typeface="メイリオ"/>
+                <a:ea typeface="メイリオ"/>
+              </a:rPr>
+              <a:t>CSV等I/Fと</a:t>
+            </a:r>
+          </a:p>
+          <a:p>
+            <a:pPr algn="ctr"/>
+            <a:r>
+              <a:rPr sz="1100" b="0">
+                <a:solidFill>
+                  <a:srgbClr val="666666"/>
+                </a:solidFill>
+                <a:latin typeface="メイリオ"/>
+                <a:ea typeface="メイリオ"/>
+              </a:rPr>
+              <a:t>性能・運用条件</a:t>
+            </a:r>
+          </a:p>
+        </p:txBody>
+      </p:sp>
+      <p:sp>
+        <p:nvSpPr>
+          <p:cNvPr id="9" name="Rounded Rectangle 8"/>
+          <p:cNvSpPr/>
+          <p:nvPr/>
+        </p:nvSpPr>
+        <p:spPr>
+          <a:xfrm>
+            <a:off x="6700000" y="3250000"/>
+            <a:ext cx="2900000" cy="2000000"/>
+          </a:xfrm>
+          <a:prstGeom prst="roundRect">
+            <a:avLst/>
+          </a:prstGeom>
+          <a:solidFill>
+            <a:srgbClr val="DEF3F1"/>
+          </a:solidFill>
+          <a:ln>
+            <a:solidFill>
+              <a:srgbClr val="00A693"/>
+            </a:solidFill>
+          </a:ln>
+        </p:spPr>
+        <p:style>
+          <a:lnRef idx="1">
+            <a:schemeClr val="accent1"/>
+          </a:lnRef>
+          <a:fillRef idx="3">
+            <a:schemeClr val="accent1"/>
+          </a:fillRef>
+          <a:effectRef idx="2">
+            <a:schemeClr val="accent1"/>
+          </a:effectRef>
+          <a:fontRef idx="minor">
+            <a:schemeClr val="lt1"/>
+          </a:fontRef>
+        </p:style>
+        <p:txBody>
+          <a:bodyPr rtlCol="0" anchor="ctr" wrap="square"/>
+          <a:lstStyle/>
+          <a:p>
+            <a:pPr algn="ctr"/>
+            <a:r>
+              <a:rPr sz="1200" b="1">
+                <a:solidFill>
+                  <a:srgbClr val="007A6E"/>
+                </a:solidFill>
+                <a:latin typeface="メイリオ"/>
+                <a:ea typeface="メイリオ"/>
+              </a:rPr>
+              <a:t>工程6</a:t>
+            </a:r>
+          </a:p>
+          <a:p>
+            <a:pPr algn="ctr"/>
+            <a:r>
+              <a:rPr sz="1400" b="1">
+                <a:solidFill>
+                  <a:srgbClr val="333333"/>
+                </a:solidFill>
+                <a:latin typeface="メイリオ"/>
+                <a:ea typeface="メイリオ"/>
+              </a:rPr>
+              <a:t>開発工程</a:t>
+            </a:r>
+          </a:p>
+          <a:p>
+            <a:pPr algn="ctr"/>
+            <a:r>
+              <a:rPr sz="1400" b="1">
+                <a:solidFill>
+                  <a:srgbClr val="333333"/>
+                </a:solidFill>
+                <a:latin typeface="メイリオ"/>
+                <a:ea typeface="メイリオ"/>
+              </a:rPr>
+              <a:t>の提案</a:t>
+            </a:r>
+          </a:p>
+          <a:p/>
+          <a:p>
+            <a:pPr algn="ctr"/>
+            <a:r>
+              <a:rPr sz="1100" b="0">
+                <a:solidFill>
+                  <a:srgbClr val="666666"/>
+                </a:solidFill>
+                <a:latin typeface="メイリオ"/>
+                <a:ea typeface="メイリオ"/>
+              </a:rPr>
+              <a:t>カスタマイズ範囲</a:t>
+            </a:r>
+          </a:p>
+          <a:p>
+            <a:pPr algn="ctr"/>
+            <a:r>
+              <a:rPr sz="1100" b="0">
+                <a:solidFill>
+                  <a:srgbClr val="666666"/>
+                </a:solidFill>
+                <a:latin typeface="メイリオ"/>
+                <a:ea typeface="メイリオ"/>
+              </a:rPr>
+              <a:t>見積り・工程提示</a:t>
+            </a:r>
+          </a:p>
+        </p:txBody>
+      </p:sp>
+      <p:sp>
+        <p:nvSpPr>
+          <p:cNvPr id="10" name="TextBox 9"/>
+          <p:cNvSpPr txBox="1"/>
+          <p:nvPr/>
+        </p:nvSpPr>
+        <p:spPr>
+          <a:xfrm>
+            <a:off x="500000" y="5800000"/>
+            <a:ext cx="9000000" cy="700000"/>
+          </a:xfrm>
+          <a:prstGeom prst="rect">
+            <a:avLst/>
+          </a:prstGeom>
+          <a:noFill/>
+        </p:spPr>
+        <p:txBody>
+          <a:bodyPr wrap="square">
+            <a:spAutoFit/>
+          </a:bodyPr>
+          <a:lstStyle/>
+          <a:p>
+            <a:pPr algn="l"/>
+            <a:r>
+              <a:rPr sz="1100" b="0">
+                <a:solidFill>
+                  <a:srgbClr val="666666"/>
+                </a:solidFill>
+                <a:latin typeface="メイリオ"/>
+                <a:ea typeface="メイリオ"/>
+              </a:rPr>
+              <a:t>※Fit&amp;Gap／画面モックは工程3〜5の手段です。最終成果は「システム化の範囲」「業務上のルール」「外部仕様」です。</a:t>
+            </a:r>
+          </a:p>
+        </p:txBody>
+      </p:sp>
+    </p:spTree>
+  </p:cSld>
+  <p:clrMapOvr>
+    <a:masterClrMapping/>
+  </p:clrMapOvr>
+</p:sld>
+</file>
+
+<file path=ppt/slides/slide4.xml><?xml version="1.0" encoding="utf-8"?>
+<p:sld xmlns:a="http://schemas.openxmlformats.org/drawingml/2006/main" xmlns:p="http://schemas.openxmlformats.org/presentationml/2006/main" xmlns:r="http://schemas.openxmlformats.org/officeDocument/2006/relationships">
+  <p:cSld>
+    <p:spTree>
+      <p:nvGrpSpPr>
+        <p:cNvPr id="1" name=""/>
+        <p:cNvGrpSpPr/>
+        <p:nvPr/>
+      </p:nvGrpSpPr>
+      <p:grpSpPr/>
+      <p:sp>
+        <p:nvSpPr>
+          <p:cNvPr id="2" name="Rectangle 1"/>
+          <p:cNvSpPr/>
+          <p:nvPr/>
+        </p:nvSpPr>
+        <p:spPr>
+          <a:xfrm>
+            <a:off x="300000" y="160000"/>
+            <a:ext cx="70000" cy="360000"/>
+          </a:xfrm>
+          <a:prstGeom prst="rect">
+            <a:avLst/>
+          </a:prstGeom>
+          <a:solidFill>
+            <a:srgbClr val="00A693"/>
+          </a:solidFill>
+          <a:ln>
+            <a:noFill/>
+          </a:ln>
+        </p:spPr>
+        <p:style>
+          <a:lnRef idx="1">
+            <a:schemeClr val="accent1"/>
+          </a:lnRef>
+          <a:fillRef idx="3">
+            <a:schemeClr val="accent1"/>
+          </a:fillRef>
+          <a:effectRef idx="2">
+            <a:schemeClr val="accent1"/>
+          </a:effectRef>
+          <a:fontRef idx="minor">
+            <a:schemeClr val="lt1"/>
+          </a:fontRef>
+        </p:style>
+        <p:txBody>
+          <a:bodyPr rtlCol="0" anchor="ctr"/>
+          <a:lstStyle/>
+          <a:p>
+            <a:pPr algn="ctr"/>
+          </a:p>
+        </p:txBody>
+      </p:sp>
+      <p:sp>
+        <p:nvSpPr>
+          <p:cNvPr id="3" name="TextBox 2"/>
+          <p:cNvSpPr txBox="1"/>
+          <p:nvPr/>
+        </p:nvSpPr>
+        <p:spPr>
+          <a:xfrm>
+            <a:off x="420000" y="140000"/>
+            <a:ext cx="9000000" cy="380000"/>
           </a:xfrm>
           <a:prstGeom prst="rect">
             <a:avLst/>
@@ -3463,7 +4950,7 @@
         </p:nvSpPr>
         <p:spPr>
           <a:xfrm>
-            <a:off x="420000" y="580000"/>
+            <a:off x="420000" y="540000"/>
             <a:ext cx="9200000" cy="280000"/>
           </a:xfrm>
           <a:prstGeom prst="rect">
@@ -3486,7 +4973,7 @@
                 <a:latin typeface="メイリオ"/>
                 <a:ea typeface="メイリオ"/>
               </a:rPr>
-              <a:t>期間：2026/8/19（キックオフ）〜 2026/9末　｜　各回 約2時間</a:t>
+              <a:t>期間：2026/8/19（キックオフ）〜2026/9末　｜　各回 約2時間　｜　赤字＝貴社へのご提供／ご教示依頼</a:t>
             </a:r>
           </a:p>
         </p:txBody>
@@ -3500,8 +4987,8 @@
           <p:nvPr/>
         </p:nvGraphicFramePr>
         <p:xfrm>
-          <a:off x="280000" y="900000"/>
-          <a:ext cx="9350000" cy="5400000"/>
+          <a:off x="250000" y="900000"/>
+          <a:ext cx="9400000" cy="5200000"/>
         </p:xfrm>
         <a:graphic>
           <a:graphicData uri="http://schemas.openxmlformats.org/drawingml/2006/table">
@@ -3510,12 +4997,12 @@
                 <a:tableStyleId>{5C22544A-7EE6-4342-B048-85BDC9FD1C3A}</a:tableStyleId>
               </a:tblPr>
               <a:tblGrid>
-                <a:gridCol w="600000"/>
-                <a:gridCol w="1100000"/>
-                <a:gridCol w="2400000"/>
-                <a:gridCol w="5250000"/>
+                <a:gridCol w="550000"/>
+                <a:gridCol w="1000000"/>
+                <a:gridCol w="2500000"/>
+                <a:gridCol w="5350000"/>
               </a:tblGrid>
-              <a:tr h="540000">
+              <a:tr h="1040000">
                 <a:tc>
                   <a:txBody>
                     <a:bodyPr wrap="square"/>
@@ -3709,7 +5196,7 @@
                   </a:tcPr>
                 </a:tc>
               </a:tr>
-              <a:tr h="540000">
+              <a:tr h="1040000">
                 <a:tc>
                   <a:txBody>
                     <a:bodyPr wrap="square"/>
@@ -3813,7 +5300,7 @@
                     <a:p>
                       <a:pPr algn="l"/>
                       <a:r>
-                        <a:rPr sz="1000" b="1">
+                        <a:rPr sz="900" b="1">
                           <a:solidFill>
                             <a:srgbClr val="333333"/>
                           </a:solidFill>
@@ -3868,7 +5355,20 @@
                           <a:latin typeface="メイリオ"/>
                           <a:ea typeface="メイリオ"/>
                         </a:rPr>
-                        <a:t>プロジェクトの進め方（プロジェクト要件）の確認、要件定義工程の内容確認を行います。</a:t>
+                        <a:t>要件定義のゴール（システム化の範囲／業務ルール／外部仕様）と前提条件を合意します。</a:t>
+                      </a:r>
+                    </a:p>
+                    <a:p>
+                      <a:pPr algn="l"/>
+                      <a:r>
+                        <a:rPr sz="900" b="0">
+                          <a:solidFill>
+                            <a:srgbClr val="333333"/>
+                          </a:solidFill>
+                          <a:latin typeface="メイリオ"/>
+                          <a:ea typeface="メイリオ"/>
+                        </a:rPr>
+                        <a:t>進め方・体制・スケジュールを確認します。</a:t>
                       </a:r>
                     </a:p>
                   </a:txBody>
@@ -3903,7 +5403,7 @@
                   </a:tcPr>
                 </a:tc>
               </a:tr>
-              <a:tr h="540000">
+              <a:tr h="1040000">
                 <a:tc>
                   <a:txBody>
                     <a:bodyPr wrap="square"/>
@@ -3966,7 +5466,7 @@
                           <a:latin typeface="メイリオ"/>
                           <a:ea typeface="メイリオ"/>
                         </a:rPr>
-                        <a:t>8/24</a:t>
+                        <a:t>8/26</a:t>
                       </a:r>
                     </a:p>
                   </a:txBody>
@@ -4007,14 +5507,14 @@
                     <a:p>
                       <a:pPr algn="l"/>
                       <a:r>
-                        <a:rPr sz="1000" b="1">
+                        <a:rPr sz="900" b="1">
                           <a:solidFill>
                             <a:srgbClr val="333333"/>
                           </a:solidFill>
                           <a:latin typeface="メイリオ"/>
                           <a:ea typeface="メイリオ"/>
                         </a:rPr>
-                        <a:t>業務フロー検討（1回目）</a:t>
+                        <a:t>①システム化する業務の整理（1）</a:t>
                       </a:r>
                     </a:p>
                   </a:txBody>
@@ -4062,48 +5562,34 @@
                           <a:latin typeface="メイリオ"/>
                           <a:ea typeface="メイリオ"/>
                         </a:rPr>
-                        <a:t>弊社で作成した概略フローを用いて業務フローの確認を行います。登場人物、関連システムの整理は本工程にて実施いたします。</a:t>
+                        <a:t>現行業務（As-Is）を整理し、登場人物・関連システムを明確にします。</a:t>
                       </a:r>
                     </a:p>
-                  </a:txBody>
-                  <a:tcPr anchor="ctr">
-                    <a:solidFill>
-                      <a:srgbClr val="FFFFFF"/>
-                    </a:solidFill>
-                    <a:lnL w="6350" cap="flat" cmpd="sng" algn="ctr">
-                      <a:solidFill>
-                        <a:srgbClr val="CCCCCC"/>
-                      </a:solidFill>
-                      <a:prstDash val="solid"/>
-                    </a:lnL>
-                    <a:lnR w="6350" cap="flat" cmpd="sng" algn="ctr">
-                      <a:solidFill>
-                        <a:srgbClr val="CCCCCC"/>
-                      </a:solidFill>
-                      <a:prstDash val="solid"/>
-                    </a:lnR>
-                    <a:lnT w="6350" cap="flat" cmpd="sng" algn="ctr">
-                      <a:solidFill>
-                        <a:srgbClr val="CCCCCC"/>
-                      </a:solidFill>
-                      <a:prstDash val="solid"/>
-                    </a:lnT>
-                    <a:lnB w="6350" cap="flat" cmpd="sng" algn="ctr">
-                      <a:solidFill>
-                        <a:srgbClr val="CCCCCC"/>
-                      </a:solidFill>
-                      <a:prstDash val="solid"/>
-                    </a:lnB>
-                  </a:tcPr>
-                </a:tc>
-              </a:tr>
-              <a:tr h="540000">
-                <a:tc>
-                  <a:txBody>
-                    <a:bodyPr wrap="square"/>
-                    <a:lstStyle/>
                     <a:p>
-                      <a:pPr algn="ctr"/>
+                      <a:pPr algn="l"/>
+                      <a:r>
+                        <a:rPr sz="900" b="0">
+                          <a:solidFill>
+                            <a:srgbClr val="333333"/>
+                          </a:solidFill>
+                          <a:latin typeface="メイリオ"/>
+                          <a:ea typeface="メイリオ"/>
+                        </a:rPr>
+                        <a:t>正常系に加え、例外系（欠品、与信NG、キャンセル、返品等）も洗い出します。</a:t>
+                      </a:r>
+                    </a:p>
+                    <a:p>
+                      <a:pPr algn="l"/>
+                      <a:r>
+                        <a:rPr sz="900" b="0">
+                          <a:solidFill>
+                            <a:srgbClr val="333333"/>
+                          </a:solidFill>
+                          <a:latin typeface="メイリオ"/>
+                          <a:ea typeface="メイリオ"/>
+                        </a:rPr>
+                        <a:t>本工程で「システム化する／しない」の範囲案を作成します。</a:t>
+                      </a:r>
                       <a:r>
                         <a:rPr sz="900" b="0">
                           <a:solidFill>
@@ -4115,154 +5601,23 @@
                         <a:t/>
                       </a:r>
                     </a:p>
-                  </a:txBody>
-                  <a:tcPr anchor="ctr">
-                    <a:solidFill>
-                      <a:srgbClr val="E8F6F3"/>
-                    </a:solidFill>
-                    <a:lnL w="6350" cap="flat" cmpd="sng" algn="ctr">
-                      <a:solidFill>
-                        <a:srgbClr val="CCCCCC"/>
-                      </a:solidFill>
-                      <a:prstDash val="solid"/>
-                    </a:lnL>
-                    <a:lnR w="6350" cap="flat" cmpd="sng" algn="ctr">
-                      <a:solidFill>
-                        <a:srgbClr val="CCCCCC"/>
-                      </a:solidFill>
-                      <a:prstDash val="solid"/>
-                    </a:lnR>
-                    <a:lnT w="6350" cap="flat" cmpd="sng" algn="ctr">
-                      <a:solidFill>
-                        <a:srgbClr val="CCCCCC"/>
-                      </a:solidFill>
-                      <a:prstDash val="solid"/>
-                    </a:lnT>
-                    <a:lnB w="6350" cap="flat" cmpd="sng" algn="ctr">
-                      <a:solidFill>
-                        <a:srgbClr val="CCCCCC"/>
-                      </a:solidFill>
-                      <a:prstDash val="solid"/>
-                    </a:lnB>
-                  </a:tcPr>
-                </a:tc>
-                <a:tc>
-                  <a:txBody>
-                    <a:bodyPr wrap="square"/>
-                    <a:lstStyle/>
                     <a:p>
-                      <a:pPr algn="ctr"/>
+                      <a:pPr algn="l"/>
                       <a:r>
                         <a:rPr sz="900" b="0">
                           <a:solidFill>
-                            <a:srgbClr val="333333"/>
+                            <a:srgbClr val="C00000"/>
                           </a:solidFill>
                           <a:latin typeface="メイリオ"/>
                           <a:ea typeface="メイリオ"/>
                         </a:rPr>
-                        <a:t/>
+                        <a:t>※ご提供依頼：取引先マスタ・配送先マスタのサンプルデータ</a:t>
                       </a:r>
                     </a:p>
                   </a:txBody>
                   <a:tcPr anchor="ctr">
                     <a:solidFill>
-                      <a:srgbClr val="E8F6F3"/>
-                    </a:solidFill>
-                    <a:lnL w="6350" cap="flat" cmpd="sng" algn="ctr">
-                      <a:solidFill>
-                        <a:srgbClr val="CCCCCC"/>
-                      </a:solidFill>
-                      <a:prstDash val="solid"/>
-                    </a:lnL>
-                    <a:lnR w="6350" cap="flat" cmpd="sng" algn="ctr">
-                      <a:solidFill>
-                        <a:srgbClr val="CCCCCC"/>
-                      </a:solidFill>
-                      <a:prstDash val="solid"/>
-                    </a:lnR>
-                    <a:lnT w="6350" cap="flat" cmpd="sng" algn="ctr">
-                      <a:solidFill>
-                        <a:srgbClr val="CCCCCC"/>
-                      </a:solidFill>
-                      <a:prstDash val="solid"/>
-                    </a:lnT>
-                    <a:lnB w="6350" cap="flat" cmpd="sng" algn="ctr">
-                      <a:solidFill>
-                        <a:srgbClr val="CCCCCC"/>
-                      </a:solidFill>
-                      <a:prstDash val="solid"/>
-                    </a:lnB>
-                  </a:tcPr>
-                </a:tc>
-                <a:tc>
-                  <a:txBody>
-                    <a:bodyPr wrap="square"/>
-                    <a:lstStyle/>
-                    <a:p>
-                      <a:pPr algn="l"/>
-                      <a:r>
-                        <a:rPr sz="900" b="1">
-                          <a:solidFill>
-                            <a:srgbClr val="007A6E"/>
-                          </a:solidFill>
-                          <a:latin typeface="メイリオ"/>
-                          <a:ea typeface="メイリオ"/>
-                        </a:rPr>
-                        <a:t>　・サプライヤー管理</a:t>
-                      </a:r>
-                    </a:p>
-                  </a:txBody>
-                  <a:tcPr anchor="ctr">
-                    <a:solidFill>
-                      <a:srgbClr val="E8F6F3"/>
-                    </a:solidFill>
-                    <a:lnL w="6350" cap="flat" cmpd="sng" algn="ctr">
-                      <a:solidFill>
-                        <a:srgbClr val="CCCCCC"/>
-                      </a:solidFill>
-                      <a:prstDash val="solid"/>
-                    </a:lnL>
-                    <a:lnR w="6350" cap="flat" cmpd="sng" algn="ctr">
-                      <a:solidFill>
-                        <a:srgbClr val="CCCCCC"/>
-                      </a:solidFill>
-                      <a:prstDash val="solid"/>
-                    </a:lnR>
-                    <a:lnT w="6350" cap="flat" cmpd="sng" algn="ctr">
-                      <a:solidFill>
-                        <a:srgbClr val="CCCCCC"/>
-                      </a:solidFill>
-                      <a:prstDash val="solid"/>
-                    </a:lnT>
-                    <a:lnB w="6350" cap="flat" cmpd="sng" algn="ctr">
-                      <a:solidFill>
-                        <a:srgbClr val="CCCCCC"/>
-                      </a:solidFill>
-                      <a:prstDash val="solid"/>
-                    </a:lnB>
-                  </a:tcPr>
-                </a:tc>
-                <a:tc>
-                  <a:txBody>
-                    <a:bodyPr wrap="square"/>
-                    <a:lstStyle/>
-                    <a:p>
-                      <a:pPr algn="l"/>
-                      <a:r>
-                        <a:rPr sz="900" b="0">
-                          <a:solidFill>
-                            <a:srgbClr val="333333"/>
-                          </a:solidFill>
-                          <a:latin typeface="メイリオ"/>
-                          <a:ea typeface="メイリオ"/>
-                        </a:rPr>
-                        <a:t>商流構成（自社／他社供給）、供給元と販売の関係を整理します。</a:t>
-                      </a:r>
-                    </a:p>
-                  </a:txBody>
-                  <a:tcPr anchor="ctr">
-                    <a:solidFill>
-                      <a:srgbClr val="E8F6F3"/>
+                      <a:srgbClr val="FFFFFF"/>
                     </a:solidFill>
                     <a:lnL w="6350" cap="flat" cmpd="sng" algn="ctr">
                       <a:solidFill>
@@ -4291,589 +5646,7 @@
                   </a:tcPr>
                 </a:tc>
               </a:tr>
-              <a:tr h="540000">
-                <a:tc>
-                  <a:txBody>
-                    <a:bodyPr wrap="square"/>
-                    <a:lstStyle/>
-                    <a:p>
-                      <a:pPr algn="ctr"/>
-                      <a:r>
-                        <a:rPr sz="900" b="0">
-                          <a:solidFill>
-                            <a:srgbClr val="333333"/>
-                          </a:solidFill>
-                          <a:latin typeface="メイリオ"/>
-                          <a:ea typeface="メイリオ"/>
-                        </a:rPr>
-                        <a:t/>
-                      </a:r>
-                    </a:p>
-                  </a:txBody>
-                  <a:tcPr anchor="ctr">
-                    <a:solidFill>
-                      <a:srgbClr val="E8F6F3"/>
-                    </a:solidFill>
-                    <a:lnL w="6350" cap="flat" cmpd="sng" algn="ctr">
-                      <a:solidFill>
-                        <a:srgbClr val="CCCCCC"/>
-                      </a:solidFill>
-                      <a:prstDash val="solid"/>
-                    </a:lnL>
-                    <a:lnR w="6350" cap="flat" cmpd="sng" algn="ctr">
-                      <a:solidFill>
-                        <a:srgbClr val="CCCCCC"/>
-                      </a:solidFill>
-                      <a:prstDash val="solid"/>
-                    </a:lnR>
-                    <a:lnT w="6350" cap="flat" cmpd="sng" algn="ctr">
-                      <a:solidFill>
-                        <a:srgbClr val="CCCCCC"/>
-                      </a:solidFill>
-                      <a:prstDash val="solid"/>
-                    </a:lnT>
-                    <a:lnB w="6350" cap="flat" cmpd="sng" algn="ctr">
-                      <a:solidFill>
-                        <a:srgbClr val="CCCCCC"/>
-                      </a:solidFill>
-                      <a:prstDash val="solid"/>
-                    </a:lnB>
-                  </a:tcPr>
-                </a:tc>
-                <a:tc>
-                  <a:txBody>
-                    <a:bodyPr wrap="square"/>
-                    <a:lstStyle/>
-                    <a:p>
-                      <a:pPr algn="ctr"/>
-                      <a:r>
-                        <a:rPr sz="900" b="0">
-                          <a:solidFill>
-                            <a:srgbClr val="333333"/>
-                          </a:solidFill>
-                          <a:latin typeface="メイリオ"/>
-                          <a:ea typeface="メイリオ"/>
-                        </a:rPr>
-                        <a:t/>
-                      </a:r>
-                    </a:p>
-                  </a:txBody>
-                  <a:tcPr anchor="ctr">
-                    <a:solidFill>
-                      <a:srgbClr val="E8F6F3"/>
-                    </a:solidFill>
-                    <a:lnL w="6350" cap="flat" cmpd="sng" algn="ctr">
-                      <a:solidFill>
-                        <a:srgbClr val="CCCCCC"/>
-                      </a:solidFill>
-                      <a:prstDash val="solid"/>
-                    </a:lnL>
-                    <a:lnR w="6350" cap="flat" cmpd="sng" algn="ctr">
-                      <a:solidFill>
-                        <a:srgbClr val="CCCCCC"/>
-                      </a:solidFill>
-                      <a:prstDash val="solid"/>
-                    </a:lnR>
-                    <a:lnT w="6350" cap="flat" cmpd="sng" algn="ctr">
-                      <a:solidFill>
-                        <a:srgbClr val="CCCCCC"/>
-                      </a:solidFill>
-                      <a:prstDash val="solid"/>
-                    </a:lnT>
-                    <a:lnB w="6350" cap="flat" cmpd="sng" algn="ctr">
-                      <a:solidFill>
-                        <a:srgbClr val="CCCCCC"/>
-                      </a:solidFill>
-                      <a:prstDash val="solid"/>
-                    </a:lnB>
-                  </a:tcPr>
-                </a:tc>
-                <a:tc>
-                  <a:txBody>
-                    <a:bodyPr wrap="square"/>
-                    <a:lstStyle/>
-                    <a:p>
-                      <a:pPr algn="l"/>
-                      <a:r>
-                        <a:rPr sz="900" b="1">
-                          <a:solidFill>
-                            <a:srgbClr val="007A6E"/>
-                          </a:solidFill>
-                          <a:latin typeface="メイリオ"/>
-                          <a:ea typeface="メイリオ"/>
-                        </a:rPr>
-                        <a:t>　・商品管理</a:t>
-                      </a:r>
-                    </a:p>
-                  </a:txBody>
-                  <a:tcPr anchor="ctr">
-                    <a:solidFill>
-                      <a:srgbClr val="E8F6F3"/>
-                    </a:solidFill>
-                    <a:lnL w="6350" cap="flat" cmpd="sng" algn="ctr">
-                      <a:solidFill>
-                        <a:srgbClr val="CCCCCC"/>
-                      </a:solidFill>
-                      <a:prstDash val="solid"/>
-                    </a:lnL>
-                    <a:lnR w="6350" cap="flat" cmpd="sng" algn="ctr">
-                      <a:solidFill>
-                        <a:srgbClr val="CCCCCC"/>
-                      </a:solidFill>
-                      <a:prstDash val="solid"/>
-                    </a:lnR>
-                    <a:lnT w="6350" cap="flat" cmpd="sng" algn="ctr">
-                      <a:solidFill>
-                        <a:srgbClr val="CCCCCC"/>
-                      </a:solidFill>
-                      <a:prstDash val="solid"/>
-                    </a:lnT>
-                    <a:lnB w="6350" cap="flat" cmpd="sng" algn="ctr">
-                      <a:solidFill>
-                        <a:srgbClr val="CCCCCC"/>
-                      </a:solidFill>
-                      <a:prstDash val="solid"/>
-                    </a:lnB>
-                  </a:tcPr>
-                </a:tc>
-                <a:tc>
-                  <a:txBody>
-                    <a:bodyPr wrap="square"/>
-                    <a:lstStyle/>
-                    <a:p>
-                      <a:pPr algn="l"/>
-                      <a:r>
-                        <a:rPr sz="900" b="0">
-                          <a:solidFill>
-                            <a:srgbClr val="333333"/>
-                          </a:solidFill>
-                          <a:latin typeface="メイリオ"/>
-                          <a:ea typeface="メイリオ"/>
-                        </a:rPr>
-                        <a:t>商品マスタ、バリエーション、展示会商品、基幹からの商品登録方針を整理します。</a:t>
-                      </a:r>
-                    </a:p>
-                  </a:txBody>
-                  <a:tcPr anchor="ctr">
-                    <a:solidFill>
-                      <a:srgbClr val="E8F6F3"/>
-                    </a:solidFill>
-                    <a:lnL w="6350" cap="flat" cmpd="sng" algn="ctr">
-                      <a:solidFill>
-                        <a:srgbClr val="CCCCCC"/>
-                      </a:solidFill>
-                      <a:prstDash val="solid"/>
-                    </a:lnL>
-                    <a:lnR w="6350" cap="flat" cmpd="sng" algn="ctr">
-                      <a:solidFill>
-                        <a:srgbClr val="CCCCCC"/>
-                      </a:solidFill>
-                      <a:prstDash val="solid"/>
-                    </a:lnR>
-                    <a:lnT w="6350" cap="flat" cmpd="sng" algn="ctr">
-                      <a:solidFill>
-                        <a:srgbClr val="CCCCCC"/>
-                      </a:solidFill>
-                      <a:prstDash val="solid"/>
-                    </a:lnT>
-                    <a:lnB w="6350" cap="flat" cmpd="sng" algn="ctr">
-                      <a:solidFill>
-                        <a:srgbClr val="CCCCCC"/>
-                      </a:solidFill>
-                      <a:prstDash val="solid"/>
-                    </a:lnB>
-                  </a:tcPr>
-                </a:tc>
-              </a:tr>
-              <a:tr h="540000">
-                <a:tc>
-                  <a:txBody>
-                    <a:bodyPr wrap="square"/>
-                    <a:lstStyle/>
-                    <a:p>
-                      <a:pPr algn="ctr"/>
-                      <a:r>
-                        <a:rPr sz="900" b="0">
-                          <a:solidFill>
-                            <a:srgbClr val="333333"/>
-                          </a:solidFill>
-                          <a:latin typeface="メイリオ"/>
-                          <a:ea typeface="メイリオ"/>
-                        </a:rPr>
-                        <a:t/>
-                      </a:r>
-                    </a:p>
-                  </a:txBody>
-                  <a:tcPr anchor="ctr">
-                    <a:solidFill>
-                      <a:srgbClr val="E8F6F3"/>
-                    </a:solidFill>
-                    <a:lnL w="6350" cap="flat" cmpd="sng" algn="ctr">
-                      <a:solidFill>
-                        <a:srgbClr val="CCCCCC"/>
-                      </a:solidFill>
-                      <a:prstDash val="solid"/>
-                    </a:lnL>
-                    <a:lnR w="6350" cap="flat" cmpd="sng" algn="ctr">
-                      <a:solidFill>
-                        <a:srgbClr val="CCCCCC"/>
-                      </a:solidFill>
-                      <a:prstDash val="solid"/>
-                    </a:lnR>
-                    <a:lnT w="6350" cap="flat" cmpd="sng" algn="ctr">
-                      <a:solidFill>
-                        <a:srgbClr val="CCCCCC"/>
-                      </a:solidFill>
-                      <a:prstDash val="solid"/>
-                    </a:lnT>
-                    <a:lnB w="6350" cap="flat" cmpd="sng" algn="ctr">
-                      <a:solidFill>
-                        <a:srgbClr val="CCCCCC"/>
-                      </a:solidFill>
-                      <a:prstDash val="solid"/>
-                    </a:lnB>
-                  </a:tcPr>
-                </a:tc>
-                <a:tc>
-                  <a:txBody>
-                    <a:bodyPr wrap="square"/>
-                    <a:lstStyle/>
-                    <a:p>
-                      <a:pPr algn="ctr"/>
-                      <a:r>
-                        <a:rPr sz="900" b="0">
-                          <a:solidFill>
-                            <a:srgbClr val="333333"/>
-                          </a:solidFill>
-                          <a:latin typeface="メイリオ"/>
-                          <a:ea typeface="メイリオ"/>
-                        </a:rPr>
-                        <a:t/>
-                      </a:r>
-                    </a:p>
-                  </a:txBody>
-                  <a:tcPr anchor="ctr">
-                    <a:solidFill>
-                      <a:srgbClr val="E8F6F3"/>
-                    </a:solidFill>
-                    <a:lnL w="6350" cap="flat" cmpd="sng" algn="ctr">
-                      <a:solidFill>
-                        <a:srgbClr val="CCCCCC"/>
-                      </a:solidFill>
-                      <a:prstDash val="solid"/>
-                    </a:lnL>
-                    <a:lnR w="6350" cap="flat" cmpd="sng" algn="ctr">
-                      <a:solidFill>
-                        <a:srgbClr val="CCCCCC"/>
-                      </a:solidFill>
-                      <a:prstDash val="solid"/>
-                    </a:lnR>
-                    <a:lnT w="6350" cap="flat" cmpd="sng" algn="ctr">
-                      <a:solidFill>
-                        <a:srgbClr val="CCCCCC"/>
-                      </a:solidFill>
-                      <a:prstDash val="solid"/>
-                    </a:lnT>
-                    <a:lnB w="6350" cap="flat" cmpd="sng" algn="ctr">
-                      <a:solidFill>
-                        <a:srgbClr val="CCCCCC"/>
-                      </a:solidFill>
-                      <a:prstDash val="solid"/>
-                    </a:lnB>
-                  </a:tcPr>
-                </a:tc>
-                <a:tc>
-                  <a:txBody>
-                    <a:bodyPr wrap="square"/>
-                    <a:lstStyle/>
-                    <a:p>
-                      <a:pPr algn="l"/>
-                      <a:r>
-                        <a:rPr sz="900" b="1">
-                          <a:solidFill>
-                            <a:srgbClr val="007A6E"/>
-                          </a:solidFill>
-                          <a:latin typeface="メイリオ"/>
-                          <a:ea typeface="メイリオ"/>
-                        </a:rPr>
-                        <a:t>　・在庫管理</a:t>
-                      </a:r>
-                    </a:p>
-                  </a:txBody>
-                  <a:tcPr anchor="ctr">
-                    <a:solidFill>
-                      <a:srgbClr val="E8F6F3"/>
-                    </a:solidFill>
-                    <a:lnL w="6350" cap="flat" cmpd="sng" algn="ctr">
-                      <a:solidFill>
-                        <a:srgbClr val="CCCCCC"/>
-                      </a:solidFill>
-                      <a:prstDash val="solid"/>
-                    </a:lnL>
-                    <a:lnR w="6350" cap="flat" cmpd="sng" algn="ctr">
-                      <a:solidFill>
-                        <a:srgbClr val="CCCCCC"/>
-                      </a:solidFill>
-                      <a:prstDash val="solid"/>
-                    </a:lnR>
-                    <a:lnT w="6350" cap="flat" cmpd="sng" algn="ctr">
-                      <a:solidFill>
-                        <a:srgbClr val="CCCCCC"/>
-                      </a:solidFill>
-                      <a:prstDash val="solid"/>
-                    </a:lnT>
-                    <a:lnB w="6350" cap="flat" cmpd="sng" algn="ctr">
-                      <a:solidFill>
-                        <a:srgbClr val="CCCCCC"/>
-                      </a:solidFill>
-                      <a:prstDash val="solid"/>
-                    </a:lnB>
-                  </a:tcPr>
-                </a:tc>
-                <a:tc>
-                  <a:txBody>
-                    <a:bodyPr wrap="square"/>
-                    <a:lstStyle/>
-                    <a:p>
-                      <a:pPr algn="l"/>
-                      <a:r>
-                        <a:rPr sz="900" b="0">
-                          <a:solidFill>
-                            <a:srgbClr val="333333"/>
-                          </a:solidFill>
-                          <a:latin typeface="メイリオ"/>
-                          <a:ea typeface="メイリオ"/>
-                        </a:rPr>
-                        <a:t>フリー在庫／取引先別在庫、入荷予定、引当ルールを整理します。</a:t>
-                      </a:r>
-                    </a:p>
-                  </a:txBody>
-                  <a:tcPr anchor="ctr">
-                    <a:solidFill>
-                      <a:srgbClr val="E8F6F3"/>
-                    </a:solidFill>
-                    <a:lnL w="6350" cap="flat" cmpd="sng" algn="ctr">
-                      <a:solidFill>
-                        <a:srgbClr val="CCCCCC"/>
-                      </a:solidFill>
-                      <a:prstDash val="solid"/>
-                    </a:lnL>
-                    <a:lnR w="6350" cap="flat" cmpd="sng" algn="ctr">
-                      <a:solidFill>
-                        <a:srgbClr val="CCCCCC"/>
-                      </a:solidFill>
-                      <a:prstDash val="solid"/>
-                    </a:lnR>
-                    <a:lnT w="6350" cap="flat" cmpd="sng" algn="ctr">
-                      <a:solidFill>
-                        <a:srgbClr val="CCCCCC"/>
-                      </a:solidFill>
-                      <a:prstDash val="solid"/>
-                    </a:lnT>
-                    <a:lnB w="6350" cap="flat" cmpd="sng" algn="ctr">
-                      <a:solidFill>
-                        <a:srgbClr val="CCCCCC"/>
-                      </a:solidFill>
-                      <a:prstDash val="solid"/>
-                    </a:lnB>
-                  </a:tcPr>
-                </a:tc>
-              </a:tr>
-              <a:tr h="540000">
-                <a:tc>
-                  <a:txBody>
-                    <a:bodyPr wrap="square"/>
-                    <a:lstStyle/>
-                    <a:p>
-                      <a:pPr algn="ctr"/>
-                      <a:r>
-                        <a:rPr sz="900" b="0">
-                          <a:solidFill>
-                            <a:srgbClr val="333333"/>
-                          </a:solidFill>
-                          <a:latin typeface="メイリオ"/>
-                          <a:ea typeface="メイリオ"/>
-                        </a:rPr>
-                        <a:t/>
-                      </a:r>
-                    </a:p>
-                  </a:txBody>
-                  <a:tcPr anchor="ctr">
-                    <a:solidFill>
-                      <a:srgbClr val="E8F6F3"/>
-                    </a:solidFill>
-                    <a:lnL w="6350" cap="flat" cmpd="sng" algn="ctr">
-                      <a:solidFill>
-                        <a:srgbClr val="CCCCCC"/>
-                      </a:solidFill>
-                      <a:prstDash val="solid"/>
-                    </a:lnL>
-                    <a:lnR w="6350" cap="flat" cmpd="sng" algn="ctr">
-                      <a:solidFill>
-                        <a:srgbClr val="CCCCCC"/>
-                      </a:solidFill>
-                      <a:prstDash val="solid"/>
-                    </a:lnR>
-                    <a:lnT w="6350" cap="flat" cmpd="sng" algn="ctr">
-                      <a:solidFill>
-                        <a:srgbClr val="CCCCCC"/>
-                      </a:solidFill>
-                      <a:prstDash val="solid"/>
-                    </a:lnT>
-                    <a:lnB w="6350" cap="flat" cmpd="sng" algn="ctr">
-                      <a:solidFill>
-                        <a:srgbClr val="CCCCCC"/>
-                      </a:solidFill>
-                      <a:prstDash val="solid"/>
-                    </a:lnB>
-                  </a:tcPr>
-                </a:tc>
-                <a:tc>
-                  <a:txBody>
-                    <a:bodyPr wrap="square"/>
-                    <a:lstStyle/>
-                    <a:p>
-                      <a:pPr algn="ctr"/>
-                      <a:r>
-                        <a:rPr sz="900" b="0">
-                          <a:solidFill>
-                            <a:srgbClr val="333333"/>
-                          </a:solidFill>
-                          <a:latin typeface="メイリオ"/>
-                          <a:ea typeface="メイリオ"/>
-                        </a:rPr>
-                        <a:t/>
-                      </a:r>
-                    </a:p>
-                  </a:txBody>
-                  <a:tcPr anchor="ctr">
-                    <a:solidFill>
-                      <a:srgbClr val="E8F6F3"/>
-                    </a:solidFill>
-                    <a:lnL w="6350" cap="flat" cmpd="sng" algn="ctr">
-                      <a:solidFill>
-                        <a:srgbClr val="CCCCCC"/>
-                      </a:solidFill>
-                      <a:prstDash val="solid"/>
-                    </a:lnL>
-                    <a:lnR w="6350" cap="flat" cmpd="sng" algn="ctr">
-                      <a:solidFill>
-                        <a:srgbClr val="CCCCCC"/>
-                      </a:solidFill>
-                      <a:prstDash val="solid"/>
-                    </a:lnR>
-                    <a:lnT w="6350" cap="flat" cmpd="sng" algn="ctr">
-                      <a:solidFill>
-                        <a:srgbClr val="CCCCCC"/>
-                      </a:solidFill>
-                      <a:prstDash val="solid"/>
-                    </a:lnT>
-                    <a:lnB w="6350" cap="flat" cmpd="sng" algn="ctr">
-                      <a:solidFill>
-                        <a:srgbClr val="CCCCCC"/>
-                      </a:solidFill>
-                      <a:prstDash val="solid"/>
-                    </a:lnB>
-                  </a:tcPr>
-                </a:tc>
-                <a:tc>
-                  <a:txBody>
-                    <a:bodyPr wrap="square"/>
-                    <a:lstStyle/>
-                    <a:p>
-                      <a:pPr algn="l"/>
-                      <a:r>
-                        <a:rPr sz="900" b="1">
-                          <a:solidFill>
-                            <a:srgbClr val="007A6E"/>
-                          </a:solidFill>
-                          <a:latin typeface="メイリオ"/>
-                          <a:ea typeface="メイリオ"/>
-                        </a:rPr>
-                        <a:t>　・会員管理</a:t>
-                      </a:r>
-                    </a:p>
-                  </a:txBody>
-                  <a:tcPr anchor="ctr">
-                    <a:solidFill>
-                      <a:srgbClr val="E8F6F3"/>
-                    </a:solidFill>
-                    <a:lnL w="6350" cap="flat" cmpd="sng" algn="ctr">
-                      <a:solidFill>
-                        <a:srgbClr val="CCCCCC"/>
-                      </a:solidFill>
-                      <a:prstDash val="solid"/>
-                    </a:lnL>
-                    <a:lnR w="6350" cap="flat" cmpd="sng" algn="ctr">
-                      <a:solidFill>
-                        <a:srgbClr val="CCCCCC"/>
-                      </a:solidFill>
-                      <a:prstDash val="solid"/>
-                    </a:lnR>
-                    <a:lnT w="6350" cap="flat" cmpd="sng" algn="ctr">
-                      <a:solidFill>
-                        <a:srgbClr val="CCCCCC"/>
-                      </a:solidFill>
-                      <a:prstDash val="solid"/>
-                    </a:lnT>
-                    <a:lnB w="6350" cap="flat" cmpd="sng" algn="ctr">
-                      <a:solidFill>
-                        <a:srgbClr val="CCCCCC"/>
-                      </a:solidFill>
-                      <a:prstDash val="solid"/>
-                    </a:lnB>
-                  </a:tcPr>
-                </a:tc>
-                <a:tc>
-                  <a:txBody>
-                    <a:bodyPr wrap="square"/>
-                    <a:lstStyle/>
-                    <a:p>
-                      <a:pPr algn="l"/>
-                      <a:r>
-                        <a:rPr sz="900" b="0">
-                          <a:solidFill>
-                            <a:srgbClr val="333333"/>
-                          </a:solidFill>
-                          <a:latin typeface="メイリオ"/>
-                          <a:ea typeface="メイリオ"/>
-                        </a:rPr>
-                        <a:t>取引先・販売組織階層（直販／代理店配下）、権限を整理します。</a:t>
-                      </a:r>
-                    </a:p>
-                  </a:txBody>
-                  <a:tcPr anchor="ctr">
-                    <a:solidFill>
-                      <a:srgbClr val="E8F6F3"/>
-                    </a:solidFill>
-                    <a:lnL w="6350" cap="flat" cmpd="sng" algn="ctr">
-                      <a:solidFill>
-                        <a:srgbClr val="CCCCCC"/>
-                      </a:solidFill>
-                      <a:prstDash val="solid"/>
-                    </a:lnL>
-                    <a:lnR w="6350" cap="flat" cmpd="sng" algn="ctr">
-                      <a:solidFill>
-                        <a:srgbClr val="CCCCCC"/>
-                      </a:solidFill>
-                      <a:prstDash val="solid"/>
-                    </a:lnR>
-                    <a:lnT w="6350" cap="flat" cmpd="sng" algn="ctr">
-                      <a:solidFill>
-                        <a:srgbClr val="CCCCCC"/>
-                      </a:solidFill>
-                      <a:prstDash val="solid"/>
-                    </a:lnT>
-                    <a:lnB w="6350" cap="flat" cmpd="sng" algn="ctr">
-                      <a:solidFill>
-                        <a:srgbClr val="CCCCCC"/>
-                      </a:solidFill>
-                      <a:prstDash val="solid"/>
-                    </a:lnB>
-                  </a:tcPr>
-                </a:tc>
-              </a:tr>
-              <a:tr h="540000">
+              <a:tr h="1040000">
                 <a:tc>
                   <a:txBody>
                     <a:bodyPr wrap="square"/>
@@ -4936,7 +5709,7 @@
                           <a:latin typeface="メイリオ"/>
                           <a:ea typeface="メイリオ"/>
                         </a:rPr>
-                        <a:t>8/27</a:t>
+                        <a:t>8/31</a:t>
                       </a:r>
                     </a:p>
                   </a:txBody>
@@ -4977,14 +5750,27 @@
                     <a:p>
                       <a:pPr algn="l"/>
                       <a:r>
-                        <a:rPr sz="1000" b="1">
+                        <a:rPr sz="900" b="1">
                           <a:solidFill>
                             <a:srgbClr val="333333"/>
                           </a:solidFill>
                           <a:latin typeface="メイリオ"/>
                           <a:ea typeface="メイリオ"/>
                         </a:rPr>
-                        <a:t>業務フロー検討（2回目）</a:t>
+                        <a:t>①システム化する業務の整理（2）</a:t>
+                      </a:r>
+                    </a:p>
+                    <a:p>
+                      <a:pPr algn="l"/>
+                      <a:r>
+                        <a:rPr sz="900" b="1">
+                          <a:solidFill>
+                            <a:srgbClr val="333333"/>
+                          </a:solidFill>
+                          <a:latin typeface="メイリオ"/>
+                          <a:ea typeface="メイリオ"/>
+                        </a:rPr>
+                        <a:t>②基幹システムの仕様整理</a:t>
                       </a:r>
                     </a:p>
                   </a:txBody>
@@ -5032,48 +5818,21 @@
                           <a:latin typeface="メイリオ"/>
                           <a:ea typeface="メイリオ"/>
                         </a:rPr>
-                        <a:t>1回目に続き、受注以降の業務フローを概略フローで確認します。</a:t>
+                        <a:t>①の続きとして業務範囲を確定します。</a:t>
                       </a:r>
                     </a:p>
-                  </a:txBody>
-                  <a:tcPr anchor="ctr">
-                    <a:solidFill>
-                      <a:srgbClr val="F0FAF8"/>
-                    </a:solidFill>
-                    <a:lnL w="6350" cap="flat" cmpd="sng" algn="ctr">
-                      <a:solidFill>
-                        <a:srgbClr val="CCCCCC"/>
-                      </a:solidFill>
-                      <a:prstDash val="solid"/>
-                    </a:lnL>
-                    <a:lnR w="6350" cap="flat" cmpd="sng" algn="ctr">
-                      <a:solidFill>
-                        <a:srgbClr val="CCCCCC"/>
-                      </a:solidFill>
-                      <a:prstDash val="solid"/>
-                    </a:lnR>
-                    <a:lnT w="6350" cap="flat" cmpd="sng" algn="ctr">
-                      <a:solidFill>
-                        <a:srgbClr val="CCCCCC"/>
-                      </a:solidFill>
-                      <a:prstDash val="solid"/>
-                    </a:lnT>
-                    <a:lnB w="6350" cap="flat" cmpd="sng" algn="ctr">
-                      <a:solidFill>
-                        <a:srgbClr val="CCCCCC"/>
-                      </a:solidFill>
-                      <a:prstDash val="solid"/>
-                    </a:lnB>
-                  </a:tcPr>
-                </a:tc>
-              </a:tr>
-              <a:tr h="540000">
-                <a:tc>
-                  <a:txBody>
-                    <a:bodyPr wrap="square"/>
-                    <a:lstStyle/>
                     <a:p>
-                      <a:pPr algn="ctr"/>
+                      <a:pPr algn="l"/>
+                      <a:r>
+                        <a:rPr sz="900" b="0">
+                          <a:solidFill>
+                            <a:srgbClr val="333333"/>
+                          </a:solidFill>
+                          <a:latin typeface="メイリオ"/>
+                          <a:ea typeface="メイリオ"/>
+                        </a:rPr>
+                        <a:t>②基幹の役割（変えない運用）とECの役割分担を整理し、連携対象／非対象を決めます。</a:t>
+                      </a:r>
                       <a:r>
                         <a:rPr sz="900" b="0">
                           <a:solidFill>
@@ -5085,10 +5844,86 @@
                         <a:t/>
                       </a:r>
                     </a:p>
+                    <a:p>
+                      <a:pPr algn="l"/>
+                      <a:r>
+                        <a:rPr sz="900" b="0">
+                          <a:solidFill>
+                            <a:srgbClr val="C00000"/>
+                          </a:solidFill>
+                          <a:latin typeface="メイリオ"/>
+                          <a:ea typeface="メイリオ"/>
+                        </a:rPr>
+                        <a:t>※ご提供依頼：商品情報CSV・在庫情報CSVのフォーマット及び項目定義</a:t>
+                      </a:r>
+                    </a:p>
+                    <a:p>
+                      <a:pPr algn="l"/>
+                      <a:r>
+                        <a:rPr sz="900" b="0">
+                          <a:solidFill>
+                            <a:srgbClr val="C00000"/>
+                          </a:solidFill>
+                          <a:latin typeface="メイリオ"/>
+                          <a:ea typeface="メイリオ"/>
+                        </a:rPr>
+                        <a:t>※ご提供依頼：受注集計表（Excel）サンプル（取引先別確保在庫の把握用）</a:t>
+                      </a:r>
+                    </a:p>
                   </a:txBody>
                   <a:tcPr anchor="ctr">
                     <a:solidFill>
-                      <a:srgbClr val="E8F6F3"/>
+                      <a:srgbClr val="F0FAF8"/>
+                    </a:solidFill>
+                    <a:lnL w="6350" cap="flat" cmpd="sng" algn="ctr">
+                      <a:solidFill>
+                        <a:srgbClr val="CCCCCC"/>
+                      </a:solidFill>
+                      <a:prstDash val="solid"/>
+                    </a:lnL>
+                    <a:lnR w="6350" cap="flat" cmpd="sng" algn="ctr">
+                      <a:solidFill>
+                        <a:srgbClr val="CCCCCC"/>
+                      </a:solidFill>
+                      <a:prstDash val="solid"/>
+                    </a:lnR>
+                    <a:lnT w="6350" cap="flat" cmpd="sng" algn="ctr">
+                      <a:solidFill>
+                        <a:srgbClr val="CCCCCC"/>
+                      </a:solidFill>
+                      <a:prstDash val="solid"/>
+                    </a:lnT>
+                    <a:lnB w="6350" cap="flat" cmpd="sng" algn="ctr">
+                      <a:solidFill>
+                        <a:srgbClr val="CCCCCC"/>
+                      </a:solidFill>
+                      <a:prstDash val="solid"/>
+                    </a:lnB>
+                  </a:tcPr>
+                </a:tc>
+              </a:tr>
+              <a:tr h="1040000">
+                <a:tc>
+                  <a:txBody>
+                    <a:bodyPr wrap="square"/>
+                    <a:lstStyle/>
+                    <a:p>
+                      <a:pPr algn="ctr"/>
+                      <a:r>
+                        <a:rPr sz="1000" b="1">
+                          <a:solidFill>
+                            <a:srgbClr val="333333"/>
+                          </a:solidFill>
+                          <a:latin typeface="メイリオ"/>
+                          <a:ea typeface="メイリオ"/>
+                        </a:rPr>
+                        <a:t>4</a:t>
+                      </a:r>
+                    </a:p>
+                  </a:txBody>
+                  <a:tcPr anchor="ctr">
+                    <a:solidFill>
+                      <a:srgbClr val="FFFFFF"/>
                     </a:solidFill>
                     <a:lnL w="6350" cap="flat" cmpd="sng" algn="ctr">
                       <a:solidFill>
@@ -5123,20 +5958,20 @@
                     <a:p>
                       <a:pPr algn="ctr"/>
                       <a:r>
-                        <a:rPr sz="900" b="0">
+                        <a:rPr sz="1000" b="0">
                           <a:solidFill>
                             <a:srgbClr val="333333"/>
                           </a:solidFill>
                           <a:latin typeface="メイリオ"/>
                           <a:ea typeface="メイリオ"/>
                         </a:rPr>
-                        <a:t/>
+                        <a:t>9/3</a:t>
                       </a:r>
                     </a:p>
                   </a:txBody>
                   <a:tcPr anchor="ctr">
                     <a:solidFill>
-                      <a:srgbClr val="E8F6F3"/>
+                      <a:srgbClr val="FFFFFF"/>
                     </a:solidFill>
                     <a:lnL w="6350" cap="flat" cmpd="sng" algn="ctr">
                       <a:solidFill>
@@ -5173,18 +6008,18 @@
                       <a:r>
                         <a:rPr sz="900" b="1">
                           <a:solidFill>
-                            <a:srgbClr val="007A6E"/>
+                            <a:srgbClr val="333333"/>
                           </a:solidFill>
                           <a:latin typeface="メイリオ"/>
                           <a:ea typeface="メイリオ"/>
                         </a:rPr>
-                        <a:t>　・受注管理</a:t>
+                        <a:t>③業務上のルール定義</a:t>
                       </a:r>
                     </a:p>
                   </a:txBody>
                   <a:tcPr anchor="ctr">
                     <a:solidFill>
-                      <a:srgbClr val="E8F6F3"/>
+                      <a:srgbClr val="FFFFFF"/>
                     </a:solidFill>
                     <a:lnL w="6350" cap="flat" cmpd="sng" algn="ctr">
                       <a:solidFill>
@@ -5226,190 +6061,9 @@
                           <a:latin typeface="メイリオ"/>
                           <a:ea typeface="メイリオ"/>
                         </a:rPr>
-                        <a:t>注文〜承認〜納期回答〜出荷、与信確認、キャンセル／返品の流れを整理します。</a:t>
+                        <a:t>前提（基幹運用不変・取引先ルール不変）のもと、効率化後の業務ルールを定義します。</a:t>
                       </a:r>
                     </a:p>
-                  </a:txBody>
-                  <a:tcPr anchor="ctr">
-                    <a:solidFill>
-                      <a:srgbClr val="E8F6F3"/>
-                    </a:solidFill>
-                    <a:lnL w="6350" cap="flat" cmpd="sng" algn="ctr">
-                      <a:solidFill>
-                        <a:srgbClr val="CCCCCC"/>
-                      </a:solidFill>
-                      <a:prstDash val="solid"/>
-                    </a:lnL>
-                    <a:lnR w="6350" cap="flat" cmpd="sng" algn="ctr">
-                      <a:solidFill>
-                        <a:srgbClr val="CCCCCC"/>
-                      </a:solidFill>
-                      <a:prstDash val="solid"/>
-                    </a:lnR>
-                    <a:lnT w="6350" cap="flat" cmpd="sng" algn="ctr">
-                      <a:solidFill>
-                        <a:srgbClr val="CCCCCC"/>
-                      </a:solidFill>
-                      <a:prstDash val="solid"/>
-                    </a:lnT>
-                    <a:lnB w="6350" cap="flat" cmpd="sng" algn="ctr">
-                      <a:solidFill>
-                        <a:srgbClr val="CCCCCC"/>
-                      </a:solidFill>
-                      <a:prstDash val="solid"/>
-                    </a:lnB>
-                  </a:tcPr>
-                </a:tc>
-              </a:tr>
-              <a:tr h="540000">
-                <a:tc>
-                  <a:txBody>
-                    <a:bodyPr wrap="square"/>
-                    <a:lstStyle/>
-                    <a:p>
-                      <a:pPr algn="ctr"/>
-                      <a:r>
-                        <a:rPr sz="900" b="0">
-                          <a:solidFill>
-                            <a:srgbClr val="333333"/>
-                          </a:solidFill>
-                          <a:latin typeface="メイリオ"/>
-                          <a:ea typeface="メイリオ"/>
-                        </a:rPr>
-                        <a:t/>
-                      </a:r>
-                    </a:p>
-                  </a:txBody>
-                  <a:tcPr anchor="ctr">
-                    <a:solidFill>
-                      <a:srgbClr val="E8F6F3"/>
-                    </a:solidFill>
-                    <a:lnL w="6350" cap="flat" cmpd="sng" algn="ctr">
-                      <a:solidFill>
-                        <a:srgbClr val="CCCCCC"/>
-                      </a:solidFill>
-                      <a:prstDash val="solid"/>
-                    </a:lnL>
-                    <a:lnR w="6350" cap="flat" cmpd="sng" algn="ctr">
-                      <a:solidFill>
-                        <a:srgbClr val="CCCCCC"/>
-                      </a:solidFill>
-                      <a:prstDash val="solid"/>
-                    </a:lnR>
-                    <a:lnT w="6350" cap="flat" cmpd="sng" algn="ctr">
-                      <a:solidFill>
-                        <a:srgbClr val="CCCCCC"/>
-                      </a:solidFill>
-                      <a:prstDash val="solid"/>
-                    </a:lnT>
-                    <a:lnB w="6350" cap="flat" cmpd="sng" algn="ctr">
-                      <a:solidFill>
-                        <a:srgbClr val="CCCCCC"/>
-                      </a:solidFill>
-                      <a:prstDash val="solid"/>
-                    </a:lnB>
-                  </a:tcPr>
-                </a:tc>
-                <a:tc>
-                  <a:txBody>
-                    <a:bodyPr wrap="square"/>
-                    <a:lstStyle/>
-                    <a:p>
-                      <a:pPr algn="ctr"/>
-                      <a:r>
-                        <a:rPr sz="900" b="0">
-                          <a:solidFill>
-                            <a:srgbClr val="333333"/>
-                          </a:solidFill>
-                          <a:latin typeface="メイリオ"/>
-                          <a:ea typeface="メイリオ"/>
-                        </a:rPr>
-                        <a:t/>
-                      </a:r>
-                    </a:p>
-                  </a:txBody>
-                  <a:tcPr anchor="ctr">
-                    <a:solidFill>
-                      <a:srgbClr val="E8F6F3"/>
-                    </a:solidFill>
-                    <a:lnL w="6350" cap="flat" cmpd="sng" algn="ctr">
-                      <a:solidFill>
-                        <a:srgbClr val="CCCCCC"/>
-                      </a:solidFill>
-                      <a:prstDash val="solid"/>
-                    </a:lnL>
-                    <a:lnR w="6350" cap="flat" cmpd="sng" algn="ctr">
-                      <a:solidFill>
-                        <a:srgbClr val="CCCCCC"/>
-                      </a:solidFill>
-                      <a:prstDash val="solid"/>
-                    </a:lnR>
-                    <a:lnT w="6350" cap="flat" cmpd="sng" algn="ctr">
-                      <a:solidFill>
-                        <a:srgbClr val="CCCCCC"/>
-                      </a:solidFill>
-                      <a:prstDash val="solid"/>
-                    </a:lnT>
-                    <a:lnB w="6350" cap="flat" cmpd="sng" algn="ctr">
-                      <a:solidFill>
-                        <a:srgbClr val="CCCCCC"/>
-                      </a:solidFill>
-                      <a:prstDash val="solid"/>
-                    </a:lnB>
-                  </a:tcPr>
-                </a:tc>
-                <a:tc>
-                  <a:txBody>
-                    <a:bodyPr wrap="square"/>
-                    <a:lstStyle/>
-                    <a:p>
-                      <a:pPr algn="l"/>
-                      <a:r>
-                        <a:rPr sz="900" b="1">
-                          <a:solidFill>
-                            <a:srgbClr val="007A6E"/>
-                          </a:solidFill>
-                          <a:latin typeface="メイリオ"/>
-                          <a:ea typeface="メイリオ"/>
-                        </a:rPr>
-                        <a:t>　・マイページ、その他</a:t>
-                      </a:r>
-                    </a:p>
-                  </a:txBody>
-                  <a:tcPr anchor="ctr">
-                    <a:solidFill>
-                      <a:srgbClr val="E8F6F3"/>
-                    </a:solidFill>
-                    <a:lnL w="6350" cap="flat" cmpd="sng" algn="ctr">
-                      <a:solidFill>
-                        <a:srgbClr val="CCCCCC"/>
-                      </a:solidFill>
-                      <a:prstDash val="solid"/>
-                    </a:lnL>
-                    <a:lnR w="6350" cap="flat" cmpd="sng" algn="ctr">
-                      <a:solidFill>
-                        <a:srgbClr val="CCCCCC"/>
-                      </a:solidFill>
-                      <a:prstDash val="solid"/>
-                    </a:lnR>
-                    <a:lnT w="6350" cap="flat" cmpd="sng" algn="ctr">
-                      <a:solidFill>
-                        <a:srgbClr val="CCCCCC"/>
-                      </a:solidFill>
-                      <a:prstDash val="solid"/>
-                    </a:lnT>
-                    <a:lnB w="6350" cap="flat" cmpd="sng" algn="ctr">
-                      <a:solidFill>
-                        <a:srgbClr val="CCCCCC"/>
-                      </a:solidFill>
-                      <a:prstDash val="solid"/>
-                    </a:lnB>
-                  </a:tcPr>
-                </a:tc>
-                <a:tc>
-                  <a:txBody>
-                    <a:bodyPr wrap="square"/>
-                    <a:lstStyle/>
                     <a:p>
                       <a:pPr algn="l"/>
                       <a:r>
@@ -5420,13 +6074,13 @@
                           <a:latin typeface="メイリオ"/>
                           <a:ea typeface="メイリオ"/>
                         </a:rPr>
-                        <a:t>注文履歴・進捗確認、帳票、通知、運用まわりを整理します。</a:t>
+                        <a:t>対象例：サプライヤー／在庫・引当／会員・販路／受注・与信・出荷・キャンセル・返品 等。</a:t>
                       </a:r>
                     </a:p>
                   </a:txBody>
                   <a:tcPr anchor="ctr">
                     <a:solidFill>
-                      <a:srgbClr val="E8F6F3"/>
+                      <a:srgbClr val="FFFFFF"/>
                     </a:solidFill>
                     <a:lnL w="6350" cap="flat" cmpd="sng" algn="ctr">
                       <a:solidFill>
@@ -5467,8 +6121,8 @@
         </p:nvSpPr>
         <p:spPr>
           <a:xfrm>
-            <a:off x="280000" y="6400000"/>
-            <a:ext cx="9350000" cy="350000"/>
+            <a:off x="250000" y="6400000"/>
+            <a:ext cx="9400000" cy="300000"/>
           </a:xfrm>
           <a:prstGeom prst="rect">
             <a:avLst/>
@@ -5490,7 +6144,7 @@
                 <a:latin typeface="メイリオ"/>
                 <a:ea typeface="メイリオ"/>
               </a:rPr>
-              <a:t>※開催日は仮置きです。貴社ご都合に合わせて調整いたします。※見積管理は対象外です。</a:t>
+              <a:t>※開催日は仮置きです。貴社ご都合に合わせて調整いたします。</a:t>
             </a:r>
           </a:p>
         </p:txBody>
@@ -5503,7 +6157,7 @@
 </p:sld>
 </file>
 
-<file path=ppt/slides/slide3.xml><?xml version="1.0" encoding="utf-8"?>
+<file path=ppt/slides/slide5.xml><?xml version="1.0" encoding="utf-8"?>
 <p:sld xmlns:a="http://schemas.openxmlformats.org/drawingml/2006/main" xmlns:p="http://schemas.openxmlformats.org/presentationml/2006/main" xmlns:r="http://schemas.openxmlformats.org/officeDocument/2006/relationships">
   <p:cSld>
     <p:spTree>
@@ -5521,8 +6175,8 @@
         </p:nvSpPr>
         <p:spPr>
           <a:xfrm>
-            <a:off x="300000" y="180000"/>
-            <a:ext cx="70000" cy="380000"/>
+            <a:off x="300000" y="160000"/>
+            <a:ext cx="70000" cy="360000"/>
           </a:xfrm>
           <a:prstGeom prst="rect">
             <a:avLst/>
@@ -5564,8 +6218,8 @@
         </p:nvSpPr>
         <p:spPr>
           <a:xfrm>
-            <a:off x="420000" y="160000"/>
-            <a:ext cx="9000000" cy="400000"/>
+            <a:off x="420000" y="140000"/>
+            <a:ext cx="9000000" cy="380000"/>
           </a:xfrm>
           <a:prstGeom prst="rect">
             <a:avLst/>
@@ -5600,7 +6254,7 @@
         </p:nvSpPr>
         <p:spPr>
           <a:xfrm>
-            <a:off x="420000" y="580000"/>
+            <a:off x="420000" y="540000"/>
             <a:ext cx="9200000" cy="280000"/>
           </a:xfrm>
           <a:prstGeom prst="rect">
@@ -5623,7 +6277,7 @@
                 <a:latin typeface="メイリオ"/>
                 <a:ea typeface="メイリオ"/>
               </a:rPr>
-              <a:t>機能詳細では、画面機能設計書と機能詳細フローを用いてFit&amp;Gapを整理します</a:t>
+              <a:t>工程④UI → ⑤連携外部仕様／⑥非機能 → まとめ → ⑦開発工程提案</a:t>
             </a:r>
           </a:p>
         </p:txBody>
@@ -5637,8 +6291,8 @@
           <p:nvPr/>
         </p:nvGraphicFramePr>
         <p:xfrm>
-          <a:off x="280000" y="900000"/>
-          <a:ext cx="9350000" cy="5400000"/>
+          <a:off x="250000" y="900000"/>
+          <a:ext cx="9400000" cy="5200000"/>
         </p:xfrm>
         <a:graphic>
           <a:graphicData uri="http://schemas.openxmlformats.org/drawingml/2006/table">
@@ -5647,12 +6301,12 @@
                 <a:tableStyleId>{5C22544A-7EE6-4342-B048-85BDC9FD1C3A}</a:tableStyleId>
               </a:tblPr>
               <a:tblGrid>
-                <a:gridCol w="600000"/>
-                <a:gridCol w="1100000"/>
-                <a:gridCol w="2400000"/>
-                <a:gridCol w="5250000"/>
+                <a:gridCol w="550000"/>
+                <a:gridCol w="1000000"/>
+                <a:gridCol w="2500000"/>
+                <a:gridCol w="5350000"/>
               </a:tblGrid>
-              <a:tr h="415384">
+              <a:tr h="1040000">
                 <a:tc>
                   <a:txBody>
                     <a:bodyPr wrap="square"/>
@@ -5846,990 +6500,7 @@
                   </a:tcPr>
                 </a:tc>
               </a:tr>
-              <a:tr h="415384">
-                <a:tc>
-                  <a:txBody>
-                    <a:bodyPr wrap="square"/>
-                    <a:lstStyle/>
-                    <a:p>
-                      <a:pPr algn="ctr"/>
-                      <a:r>
-                        <a:rPr sz="1000" b="1">
-                          <a:solidFill>
-                            <a:srgbClr val="333333"/>
-                          </a:solidFill>
-                          <a:latin typeface="メイリオ"/>
-                          <a:ea typeface="メイリオ"/>
-                        </a:rPr>
-                        <a:t>4</a:t>
-                      </a:r>
-                    </a:p>
-                  </a:txBody>
-                  <a:tcPr anchor="ctr">
-                    <a:solidFill>
-                      <a:srgbClr val="F0FAF8"/>
-                    </a:solidFill>
-                    <a:lnL w="6350" cap="flat" cmpd="sng" algn="ctr">
-                      <a:solidFill>
-                        <a:srgbClr val="CCCCCC"/>
-                      </a:solidFill>
-                      <a:prstDash val="solid"/>
-                    </a:lnL>
-                    <a:lnR w="6350" cap="flat" cmpd="sng" algn="ctr">
-                      <a:solidFill>
-                        <a:srgbClr val="CCCCCC"/>
-                      </a:solidFill>
-                      <a:prstDash val="solid"/>
-                    </a:lnR>
-                    <a:lnT w="6350" cap="flat" cmpd="sng" algn="ctr">
-                      <a:solidFill>
-                        <a:srgbClr val="CCCCCC"/>
-                      </a:solidFill>
-                      <a:prstDash val="solid"/>
-                    </a:lnT>
-                    <a:lnB w="6350" cap="flat" cmpd="sng" algn="ctr">
-                      <a:solidFill>
-                        <a:srgbClr val="CCCCCC"/>
-                      </a:solidFill>
-                      <a:prstDash val="solid"/>
-                    </a:lnB>
-                  </a:tcPr>
-                </a:tc>
-                <a:tc>
-                  <a:txBody>
-                    <a:bodyPr wrap="square"/>
-                    <a:lstStyle/>
-                    <a:p>
-                      <a:pPr algn="ctr"/>
-                      <a:r>
-                        <a:rPr sz="1000" b="0">
-                          <a:solidFill>
-                            <a:srgbClr val="333333"/>
-                          </a:solidFill>
-                          <a:latin typeface="メイリオ"/>
-                          <a:ea typeface="メイリオ"/>
-                        </a:rPr>
-                        <a:t>9/3（仮）</a:t>
-                      </a:r>
-                    </a:p>
-                  </a:txBody>
-                  <a:tcPr anchor="ctr">
-                    <a:solidFill>
-                      <a:srgbClr val="F0FAF8"/>
-                    </a:solidFill>
-                    <a:lnL w="6350" cap="flat" cmpd="sng" algn="ctr">
-                      <a:solidFill>
-                        <a:srgbClr val="CCCCCC"/>
-                      </a:solidFill>
-                      <a:prstDash val="solid"/>
-                    </a:lnL>
-                    <a:lnR w="6350" cap="flat" cmpd="sng" algn="ctr">
-                      <a:solidFill>
-                        <a:srgbClr val="CCCCCC"/>
-                      </a:solidFill>
-                      <a:prstDash val="solid"/>
-                    </a:lnR>
-                    <a:lnT w="6350" cap="flat" cmpd="sng" algn="ctr">
-                      <a:solidFill>
-                        <a:srgbClr val="CCCCCC"/>
-                      </a:solidFill>
-                      <a:prstDash val="solid"/>
-                    </a:lnT>
-                    <a:lnB w="6350" cap="flat" cmpd="sng" algn="ctr">
-                      <a:solidFill>
-                        <a:srgbClr val="CCCCCC"/>
-                      </a:solidFill>
-                      <a:prstDash val="solid"/>
-                    </a:lnB>
-                  </a:tcPr>
-                </a:tc>
-                <a:tc>
-                  <a:txBody>
-                    <a:bodyPr wrap="square"/>
-                    <a:lstStyle/>
-                    <a:p>
-                      <a:pPr algn="l"/>
-                      <a:r>
-                        <a:rPr sz="1000" b="1">
-                          <a:solidFill>
-                            <a:srgbClr val="333333"/>
-                          </a:solidFill>
-                          <a:latin typeface="メイリオ"/>
-                          <a:ea typeface="メイリオ"/>
-                        </a:rPr>
-                        <a:t>機能詳細検討（1回目）</a:t>
-                      </a:r>
-                    </a:p>
-                  </a:txBody>
-                  <a:tcPr anchor="ctr">
-                    <a:solidFill>
-                      <a:srgbClr val="F0FAF8"/>
-                    </a:solidFill>
-                    <a:lnL w="6350" cap="flat" cmpd="sng" algn="ctr">
-                      <a:solidFill>
-                        <a:srgbClr val="CCCCCC"/>
-                      </a:solidFill>
-                      <a:prstDash val="solid"/>
-                    </a:lnL>
-                    <a:lnR w="6350" cap="flat" cmpd="sng" algn="ctr">
-                      <a:solidFill>
-                        <a:srgbClr val="CCCCCC"/>
-                      </a:solidFill>
-                      <a:prstDash val="solid"/>
-                    </a:lnR>
-                    <a:lnT w="6350" cap="flat" cmpd="sng" algn="ctr">
-                      <a:solidFill>
-                        <a:srgbClr val="CCCCCC"/>
-                      </a:solidFill>
-                      <a:prstDash val="solid"/>
-                    </a:lnT>
-                    <a:lnB w="6350" cap="flat" cmpd="sng" algn="ctr">
-                      <a:solidFill>
-                        <a:srgbClr val="CCCCCC"/>
-                      </a:solidFill>
-                      <a:prstDash val="solid"/>
-                    </a:lnB>
-                  </a:tcPr>
-                </a:tc>
-                <a:tc>
-                  <a:txBody>
-                    <a:bodyPr wrap="square"/>
-                    <a:lstStyle/>
-                    <a:p>
-                      <a:pPr algn="l"/>
-                      <a:r>
-                        <a:rPr sz="900" b="0">
-                          <a:solidFill>
-                            <a:srgbClr val="333333"/>
-                          </a:solidFill>
-                          <a:latin typeface="メイリオ"/>
-                          <a:ea typeface="メイリオ"/>
-                        </a:rPr>
-                        <a:t>画面機能設計書と機能詳細フローを用いて、Fit&amp;Gapを整理します。</a:t>
-                      </a:r>
-                    </a:p>
-                    <a:p>
-                      <a:pPr algn="l"/>
-                      <a:r>
-                        <a:rPr sz="900" b="0">
-                          <a:solidFill>
-                            <a:srgbClr val="333333"/>
-                          </a:solidFill>
-                          <a:latin typeface="メイリオ"/>
-                          <a:ea typeface="メイリオ"/>
-                        </a:rPr>
-                        <a:t>対象：サプライヤー／商品／在庫／会員管理</a:t>
-                      </a:r>
-                    </a:p>
-                  </a:txBody>
-                  <a:tcPr anchor="ctr">
-                    <a:solidFill>
-                      <a:srgbClr val="F0FAF8"/>
-                    </a:solidFill>
-                    <a:lnL w="6350" cap="flat" cmpd="sng" algn="ctr">
-                      <a:solidFill>
-                        <a:srgbClr val="CCCCCC"/>
-                      </a:solidFill>
-                      <a:prstDash val="solid"/>
-                    </a:lnL>
-                    <a:lnR w="6350" cap="flat" cmpd="sng" algn="ctr">
-                      <a:solidFill>
-                        <a:srgbClr val="CCCCCC"/>
-                      </a:solidFill>
-                      <a:prstDash val="solid"/>
-                    </a:lnR>
-                    <a:lnT w="6350" cap="flat" cmpd="sng" algn="ctr">
-                      <a:solidFill>
-                        <a:srgbClr val="CCCCCC"/>
-                      </a:solidFill>
-                      <a:prstDash val="solid"/>
-                    </a:lnT>
-                    <a:lnB w="6350" cap="flat" cmpd="sng" algn="ctr">
-                      <a:solidFill>
-                        <a:srgbClr val="CCCCCC"/>
-                      </a:solidFill>
-                      <a:prstDash val="solid"/>
-                    </a:lnB>
-                  </a:tcPr>
-                </a:tc>
-              </a:tr>
-              <a:tr h="415384">
-                <a:tc>
-                  <a:txBody>
-                    <a:bodyPr wrap="square"/>
-                    <a:lstStyle/>
-                    <a:p>
-                      <a:pPr algn="ctr"/>
-                      <a:r>
-                        <a:rPr sz="900" b="0">
-                          <a:solidFill>
-                            <a:srgbClr val="333333"/>
-                          </a:solidFill>
-                          <a:latin typeface="メイリオ"/>
-                          <a:ea typeface="メイリオ"/>
-                        </a:rPr>
-                        <a:t/>
-                      </a:r>
-                    </a:p>
-                  </a:txBody>
-                  <a:tcPr anchor="ctr">
-                    <a:solidFill>
-                      <a:srgbClr val="E8F6F3"/>
-                    </a:solidFill>
-                    <a:lnL w="6350" cap="flat" cmpd="sng" algn="ctr">
-                      <a:solidFill>
-                        <a:srgbClr val="CCCCCC"/>
-                      </a:solidFill>
-                      <a:prstDash val="solid"/>
-                    </a:lnL>
-                    <a:lnR w="6350" cap="flat" cmpd="sng" algn="ctr">
-                      <a:solidFill>
-                        <a:srgbClr val="CCCCCC"/>
-                      </a:solidFill>
-                      <a:prstDash val="solid"/>
-                    </a:lnR>
-                    <a:lnT w="6350" cap="flat" cmpd="sng" algn="ctr">
-                      <a:solidFill>
-                        <a:srgbClr val="CCCCCC"/>
-                      </a:solidFill>
-                      <a:prstDash val="solid"/>
-                    </a:lnT>
-                    <a:lnB w="6350" cap="flat" cmpd="sng" algn="ctr">
-                      <a:solidFill>
-                        <a:srgbClr val="CCCCCC"/>
-                      </a:solidFill>
-                      <a:prstDash val="solid"/>
-                    </a:lnB>
-                  </a:tcPr>
-                </a:tc>
-                <a:tc>
-                  <a:txBody>
-                    <a:bodyPr wrap="square"/>
-                    <a:lstStyle/>
-                    <a:p>
-                      <a:pPr algn="ctr"/>
-                      <a:r>
-                        <a:rPr sz="900" b="0">
-                          <a:solidFill>
-                            <a:srgbClr val="333333"/>
-                          </a:solidFill>
-                          <a:latin typeface="メイリオ"/>
-                          <a:ea typeface="メイリオ"/>
-                        </a:rPr>
-                        <a:t/>
-                      </a:r>
-                    </a:p>
-                  </a:txBody>
-                  <a:tcPr anchor="ctr">
-                    <a:solidFill>
-                      <a:srgbClr val="E8F6F3"/>
-                    </a:solidFill>
-                    <a:lnL w="6350" cap="flat" cmpd="sng" algn="ctr">
-                      <a:solidFill>
-                        <a:srgbClr val="CCCCCC"/>
-                      </a:solidFill>
-                      <a:prstDash val="solid"/>
-                    </a:lnL>
-                    <a:lnR w="6350" cap="flat" cmpd="sng" algn="ctr">
-                      <a:solidFill>
-                        <a:srgbClr val="CCCCCC"/>
-                      </a:solidFill>
-                      <a:prstDash val="solid"/>
-                    </a:lnR>
-                    <a:lnT w="6350" cap="flat" cmpd="sng" algn="ctr">
-                      <a:solidFill>
-                        <a:srgbClr val="CCCCCC"/>
-                      </a:solidFill>
-                      <a:prstDash val="solid"/>
-                    </a:lnT>
-                    <a:lnB w="6350" cap="flat" cmpd="sng" algn="ctr">
-                      <a:solidFill>
-                        <a:srgbClr val="CCCCCC"/>
-                      </a:solidFill>
-                      <a:prstDash val="solid"/>
-                    </a:lnB>
-                  </a:tcPr>
-                </a:tc>
-                <a:tc>
-                  <a:txBody>
-                    <a:bodyPr wrap="square"/>
-                    <a:lstStyle/>
-                    <a:p>
-                      <a:pPr algn="l"/>
-                      <a:r>
-                        <a:rPr sz="900" b="1">
-                          <a:solidFill>
-                            <a:srgbClr val="007A6E"/>
-                          </a:solidFill>
-                          <a:latin typeface="メイリオ"/>
-                          <a:ea typeface="メイリオ"/>
-                        </a:rPr>
-                        <a:t>　・サプライヤー管理</a:t>
-                      </a:r>
-                    </a:p>
-                  </a:txBody>
-                  <a:tcPr anchor="ctr">
-                    <a:solidFill>
-                      <a:srgbClr val="E8F6F3"/>
-                    </a:solidFill>
-                    <a:lnL w="6350" cap="flat" cmpd="sng" algn="ctr">
-                      <a:solidFill>
-                        <a:srgbClr val="CCCCCC"/>
-                      </a:solidFill>
-                      <a:prstDash val="solid"/>
-                    </a:lnL>
-                    <a:lnR w="6350" cap="flat" cmpd="sng" algn="ctr">
-                      <a:solidFill>
-                        <a:srgbClr val="CCCCCC"/>
-                      </a:solidFill>
-                      <a:prstDash val="solid"/>
-                    </a:lnR>
-                    <a:lnT w="6350" cap="flat" cmpd="sng" algn="ctr">
-                      <a:solidFill>
-                        <a:srgbClr val="CCCCCC"/>
-                      </a:solidFill>
-                      <a:prstDash val="solid"/>
-                    </a:lnT>
-                    <a:lnB w="6350" cap="flat" cmpd="sng" algn="ctr">
-                      <a:solidFill>
-                        <a:srgbClr val="CCCCCC"/>
-                      </a:solidFill>
-                      <a:prstDash val="solid"/>
-                    </a:lnB>
-                  </a:tcPr>
-                </a:tc>
-                <a:tc>
-                  <a:txBody>
-                    <a:bodyPr wrap="square"/>
-                    <a:lstStyle/>
-                    <a:p>
-                      <a:pPr algn="l"/>
-                      <a:r>
-                        <a:rPr sz="900" b="0">
-                          <a:solidFill>
-                            <a:srgbClr val="333333"/>
-                          </a:solidFill>
-                          <a:latin typeface="メイリオ"/>
-                          <a:ea typeface="メイリオ"/>
-                        </a:rPr>
-                        <a:t>マルチサプライヤー等の適用方針と差分を定義します。</a:t>
-                      </a:r>
-                    </a:p>
-                  </a:txBody>
-                  <a:tcPr anchor="ctr">
-                    <a:solidFill>
-                      <a:srgbClr val="E8F6F3"/>
-                    </a:solidFill>
-                    <a:lnL w="6350" cap="flat" cmpd="sng" algn="ctr">
-                      <a:solidFill>
-                        <a:srgbClr val="CCCCCC"/>
-                      </a:solidFill>
-                      <a:prstDash val="solid"/>
-                    </a:lnL>
-                    <a:lnR w="6350" cap="flat" cmpd="sng" algn="ctr">
-                      <a:solidFill>
-                        <a:srgbClr val="CCCCCC"/>
-                      </a:solidFill>
-                      <a:prstDash val="solid"/>
-                    </a:lnR>
-                    <a:lnT w="6350" cap="flat" cmpd="sng" algn="ctr">
-                      <a:solidFill>
-                        <a:srgbClr val="CCCCCC"/>
-                      </a:solidFill>
-                      <a:prstDash val="solid"/>
-                    </a:lnT>
-                    <a:lnB w="6350" cap="flat" cmpd="sng" algn="ctr">
-                      <a:solidFill>
-                        <a:srgbClr val="CCCCCC"/>
-                      </a:solidFill>
-                      <a:prstDash val="solid"/>
-                    </a:lnB>
-                  </a:tcPr>
-                </a:tc>
-              </a:tr>
-              <a:tr h="415384">
-                <a:tc>
-                  <a:txBody>
-                    <a:bodyPr wrap="square"/>
-                    <a:lstStyle/>
-                    <a:p>
-                      <a:pPr algn="ctr"/>
-                      <a:r>
-                        <a:rPr sz="900" b="0">
-                          <a:solidFill>
-                            <a:srgbClr val="333333"/>
-                          </a:solidFill>
-                          <a:latin typeface="メイリオ"/>
-                          <a:ea typeface="メイリオ"/>
-                        </a:rPr>
-                        <a:t/>
-                      </a:r>
-                    </a:p>
-                  </a:txBody>
-                  <a:tcPr anchor="ctr">
-                    <a:solidFill>
-                      <a:srgbClr val="E8F6F3"/>
-                    </a:solidFill>
-                    <a:lnL w="6350" cap="flat" cmpd="sng" algn="ctr">
-                      <a:solidFill>
-                        <a:srgbClr val="CCCCCC"/>
-                      </a:solidFill>
-                      <a:prstDash val="solid"/>
-                    </a:lnL>
-                    <a:lnR w="6350" cap="flat" cmpd="sng" algn="ctr">
-                      <a:solidFill>
-                        <a:srgbClr val="CCCCCC"/>
-                      </a:solidFill>
-                      <a:prstDash val="solid"/>
-                    </a:lnR>
-                    <a:lnT w="6350" cap="flat" cmpd="sng" algn="ctr">
-                      <a:solidFill>
-                        <a:srgbClr val="CCCCCC"/>
-                      </a:solidFill>
-                      <a:prstDash val="solid"/>
-                    </a:lnT>
-                    <a:lnB w="6350" cap="flat" cmpd="sng" algn="ctr">
-                      <a:solidFill>
-                        <a:srgbClr val="CCCCCC"/>
-                      </a:solidFill>
-                      <a:prstDash val="solid"/>
-                    </a:lnB>
-                  </a:tcPr>
-                </a:tc>
-                <a:tc>
-                  <a:txBody>
-                    <a:bodyPr wrap="square"/>
-                    <a:lstStyle/>
-                    <a:p>
-                      <a:pPr algn="ctr"/>
-                      <a:r>
-                        <a:rPr sz="900" b="0">
-                          <a:solidFill>
-                            <a:srgbClr val="333333"/>
-                          </a:solidFill>
-                          <a:latin typeface="メイリオ"/>
-                          <a:ea typeface="メイリオ"/>
-                        </a:rPr>
-                        <a:t/>
-                      </a:r>
-                    </a:p>
-                  </a:txBody>
-                  <a:tcPr anchor="ctr">
-                    <a:solidFill>
-                      <a:srgbClr val="E8F6F3"/>
-                    </a:solidFill>
-                    <a:lnL w="6350" cap="flat" cmpd="sng" algn="ctr">
-                      <a:solidFill>
-                        <a:srgbClr val="CCCCCC"/>
-                      </a:solidFill>
-                      <a:prstDash val="solid"/>
-                    </a:lnL>
-                    <a:lnR w="6350" cap="flat" cmpd="sng" algn="ctr">
-                      <a:solidFill>
-                        <a:srgbClr val="CCCCCC"/>
-                      </a:solidFill>
-                      <a:prstDash val="solid"/>
-                    </a:lnR>
-                    <a:lnT w="6350" cap="flat" cmpd="sng" algn="ctr">
-                      <a:solidFill>
-                        <a:srgbClr val="CCCCCC"/>
-                      </a:solidFill>
-                      <a:prstDash val="solid"/>
-                    </a:lnT>
-                    <a:lnB w="6350" cap="flat" cmpd="sng" algn="ctr">
-                      <a:solidFill>
-                        <a:srgbClr val="CCCCCC"/>
-                      </a:solidFill>
-                      <a:prstDash val="solid"/>
-                    </a:lnB>
-                  </a:tcPr>
-                </a:tc>
-                <a:tc>
-                  <a:txBody>
-                    <a:bodyPr wrap="square"/>
-                    <a:lstStyle/>
-                    <a:p>
-                      <a:pPr algn="l"/>
-                      <a:r>
-                        <a:rPr sz="900" b="1">
-                          <a:solidFill>
-                            <a:srgbClr val="007A6E"/>
-                          </a:solidFill>
-                          <a:latin typeface="メイリオ"/>
-                          <a:ea typeface="メイリオ"/>
-                        </a:rPr>
-                        <a:t>　・商品管理</a:t>
-                      </a:r>
-                    </a:p>
-                  </a:txBody>
-                  <a:tcPr anchor="ctr">
-                    <a:solidFill>
-                      <a:srgbClr val="E8F6F3"/>
-                    </a:solidFill>
-                    <a:lnL w="6350" cap="flat" cmpd="sng" algn="ctr">
-                      <a:solidFill>
-                        <a:srgbClr val="CCCCCC"/>
-                      </a:solidFill>
-                      <a:prstDash val="solid"/>
-                    </a:lnL>
-                    <a:lnR w="6350" cap="flat" cmpd="sng" algn="ctr">
-                      <a:solidFill>
-                        <a:srgbClr val="CCCCCC"/>
-                      </a:solidFill>
-                      <a:prstDash val="solid"/>
-                    </a:lnR>
-                    <a:lnT w="6350" cap="flat" cmpd="sng" algn="ctr">
-                      <a:solidFill>
-                        <a:srgbClr val="CCCCCC"/>
-                      </a:solidFill>
-                      <a:prstDash val="solid"/>
-                    </a:lnT>
-                    <a:lnB w="6350" cap="flat" cmpd="sng" algn="ctr">
-                      <a:solidFill>
-                        <a:srgbClr val="CCCCCC"/>
-                      </a:solidFill>
-                      <a:prstDash val="solid"/>
-                    </a:lnB>
-                  </a:tcPr>
-                </a:tc>
-                <a:tc>
-                  <a:txBody>
-                    <a:bodyPr wrap="square"/>
-                    <a:lstStyle/>
-                    <a:p>
-                      <a:pPr algn="l"/>
-                      <a:r>
-                        <a:rPr sz="900" b="0">
-                          <a:solidFill>
-                            <a:srgbClr val="333333"/>
-                          </a:solidFill>
-                          <a:latin typeface="メイリオ"/>
-                          <a:ea typeface="メイリオ"/>
-                        </a:rPr>
-                        <a:t>商品登録・公開制御・バリエーション等の差分を定義します。</a:t>
-                      </a:r>
-                    </a:p>
-                  </a:txBody>
-                  <a:tcPr anchor="ctr">
-                    <a:solidFill>
-                      <a:srgbClr val="E8F6F3"/>
-                    </a:solidFill>
-                    <a:lnL w="6350" cap="flat" cmpd="sng" algn="ctr">
-                      <a:solidFill>
-                        <a:srgbClr val="CCCCCC"/>
-                      </a:solidFill>
-                      <a:prstDash val="solid"/>
-                    </a:lnL>
-                    <a:lnR w="6350" cap="flat" cmpd="sng" algn="ctr">
-                      <a:solidFill>
-                        <a:srgbClr val="CCCCCC"/>
-                      </a:solidFill>
-                      <a:prstDash val="solid"/>
-                    </a:lnR>
-                    <a:lnT w="6350" cap="flat" cmpd="sng" algn="ctr">
-                      <a:solidFill>
-                        <a:srgbClr val="CCCCCC"/>
-                      </a:solidFill>
-                      <a:prstDash val="solid"/>
-                    </a:lnT>
-                    <a:lnB w="6350" cap="flat" cmpd="sng" algn="ctr">
-                      <a:solidFill>
-                        <a:srgbClr val="CCCCCC"/>
-                      </a:solidFill>
-                      <a:prstDash val="solid"/>
-                    </a:lnB>
-                  </a:tcPr>
-                </a:tc>
-              </a:tr>
-              <a:tr h="415384">
-                <a:tc>
-                  <a:txBody>
-                    <a:bodyPr wrap="square"/>
-                    <a:lstStyle/>
-                    <a:p>
-                      <a:pPr algn="ctr"/>
-                      <a:r>
-                        <a:rPr sz="900" b="0">
-                          <a:solidFill>
-                            <a:srgbClr val="333333"/>
-                          </a:solidFill>
-                          <a:latin typeface="メイリオ"/>
-                          <a:ea typeface="メイリオ"/>
-                        </a:rPr>
-                        <a:t/>
-                      </a:r>
-                    </a:p>
-                  </a:txBody>
-                  <a:tcPr anchor="ctr">
-                    <a:solidFill>
-                      <a:srgbClr val="E8F6F3"/>
-                    </a:solidFill>
-                    <a:lnL w="6350" cap="flat" cmpd="sng" algn="ctr">
-                      <a:solidFill>
-                        <a:srgbClr val="CCCCCC"/>
-                      </a:solidFill>
-                      <a:prstDash val="solid"/>
-                    </a:lnL>
-                    <a:lnR w="6350" cap="flat" cmpd="sng" algn="ctr">
-                      <a:solidFill>
-                        <a:srgbClr val="CCCCCC"/>
-                      </a:solidFill>
-                      <a:prstDash val="solid"/>
-                    </a:lnR>
-                    <a:lnT w="6350" cap="flat" cmpd="sng" algn="ctr">
-                      <a:solidFill>
-                        <a:srgbClr val="CCCCCC"/>
-                      </a:solidFill>
-                      <a:prstDash val="solid"/>
-                    </a:lnT>
-                    <a:lnB w="6350" cap="flat" cmpd="sng" algn="ctr">
-                      <a:solidFill>
-                        <a:srgbClr val="CCCCCC"/>
-                      </a:solidFill>
-                      <a:prstDash val="solid"/>
-                    </a:lnB>
-                  </a:tcPr>
-                </a:tc>
-                <a:tc>
-                  <a:txBody>
-                    <a:bodyPr wrap="square"/>
-                    <a:lstStyle/>
-                    <a:p>
-                      <a:pPr algn="ctr"/>
-                      <a:r>
-                        <a:rPr sz="900" b="0">
-                          <a:solidFill>
-                            <a:srgbClr val="333333"/>
-                          </a:solidFill>
-                          <a:latin typeface="メイリオ"/>
-                          <a:ea typeface="メイリオ"/>
-                        </a:rPr>
-                        <a:t/>
-                      </a:r>
-                    </a:p>
-                  </a:txBody>
-                  <a:tcPr anchor="ctr">
-                    <a:solidFill>
-                      <a:srgbClr val="E8F6F3"/>
-                    </a:solidFill>
-                    <a:lnL w="6350" cap="flat" cmpd="sng" algn="ctr">
-                      <a:solidFill>
-                        <a:srgbClr val="CCCCCC"/>
-                      </a:solidFill>
-                      <a:prstDash val="solid"/>
-                    </a:lnL>
-                    <a:lnR w="6350" cap="flat" cmpd="sng" algn="ctr">
-                      <a:solidFill>
-                        <a:srgbClr val="CCCCCC"/>
-                      </a:solidFill>
-                      <a:prstDash val="solid"/>
-                    </a:lnR>
-                    <a:lnT w="6350" cap="flat" cmpd="sng" algn="ctr">
-                      <a:solidFill>
-                        <a:srgbClr val="CCCCCC"/>
-                      </a:solidFill>
-                      <a:prstDash val="solid"/>
-                    </a:lnT>
-                    <a:lnB w="6350" cap="flat" cmpd="sng" algn="ctr">
-                      <a:solidFill>
-                        <a:srgbClr val="CCCCCC"/>
-                      </a:solidFill>
-                      <a:prstDash val="solid"/>
-                    </a:lnB>
-                  </a:tcPr>
-                </a:tc>
-                <a:tc>
-                  <a:txBody>
-                    <a:bodyPr wrap="square"/>
-                    <a:lstStyle/>
-                    <a:p>
-                      <a:pPr algn="l"/>
-                      <a:r>
-                        <a:rPr sz="900" b="1">
-                          <a:solidFill>
-                            <a:srgbClr val="007A6E"/>
-                          </a:solidFill>
-                          <a:latin typeface="メイリオ"/>
-                          <a:ea typeface="メイリオ"/>
-                        </a:rPr>
-                        <a:t>　・在庫管理</a:t>
-                      </a:r>
-                    </a:p>
-                  </a:txBody>
-                  <a:tcPr anchor="ctr">
-                    <a:solidFill>
-                      <a:srgbClr val="E8F6F3"/>
-                    </a:solidFill>
-                    <a:lnL w="6350" cap="flat" cmpd="sng" algn="ctr">
-                      <a:solidFill>
-                        <a:srgbClr val="CCCCCC"/>
-                      </a:solidFill>
-                      <a:prstDash val="solid"/>
-                    </a:lnL>
-                    <a:lnR w="6350" cap="flat" cmpd="sng" algn="ctr">
-                      <a:solidFill>
-                        <a:srgbClr val="CCCCCC"/>
-                      </a:solidFill>
-                      <a:prstDash val="solid"/>
-                    </a:lnR>
-                    <a:lnT w="6350" cap="flat" cmpd="sng" algn="ctr">
-                      <a:solidFill>
-                        <a:srgbClr val="CCCCCC"/>
-                      </a:solidFill>
-                      <a:prstDash val="solid"/>
-                    </a:lnT>
-                    <a:lnB w="6350" cap="flat" cmpd="sng" algn="ctr">
-                      <a:solidFill>
-                        <a:srgbClr val="CCCCCC"/>
-                      </a:solidFill>
-                      <a:prstDash val="solid"/>
-                    </a:lnB>
-                  </a:tcPr>
-                </a:tc>
-                <a:tc>
-                  <a:txBody>
-                    <a:bodyPr wrap="square"/>
-                    <a:lstStyle/>
-                    <a:p>
-                      <a:pPr algn="l"/>
-                      <a:r>
-                        <a:rPr sz="900" b="0">
-                          <a:solidFill>
-                            <a:srgbClr val="333333"/>
-                          </a:solidFill>
-                          <a:latin typeface="メイリオ"/>
-                          <a:ea typeface="メイリオ"/>
-                        </a:rPr>
-                        <a:t>在庫表示・引当・入荷予定連携等の差分を定義します。</a:t>
-                      </a:r>
-                    </a:p>
-                  </a:txBody>
-                  <a:tcPr anchor="ctr">
-                    <a:solidFill>
-                      <a:srgbClr val="E8F6F3"/>
-                    </a:solidFill>
-                    <a:lnL w="6350" cap="flat" cmpd="sng" algn="ctr">
-                      <a:solidFill>
-                        <a:srgbClr val="CCCCCC"/>
-                      </a:solidFill>
-                      <a:prstDash val="solid"/>
-                    </a:lnL>
-                    <a:lnR w="6350" cap="flat" cmpd="sng" algn="ctr">
-                      <a:solidFill>
-                        <a:srgbClr val="CCCCCC"/>
-                      </a:solidFill>
-                      <a:prstDash val="solid"/>
-                    </a:lnR>
-                    <a:lnT w="6350" cap="flat" cmpd="sng" algn="ctr">
-                      <a:solidFill>
-                        <a:srgbClr val="CCCCCC"/>
-                      </a:solidFill>
-                      <a:prstDash val="solid"/>
-                    </a:lnT>
-                    <a:lnB w="6350" cap="flat" cmpd="sng" algn="ctr">
-                      <a:solidFill>
-                        <a:srgbClr val="CCCCCC"/>
-                      </a:solidFill>
-                      <a:prstDash val="solid"/>
-                    </a:lnB>
-                  </a:tcPr>
-                </a:tc>
-              </a:tr>
-              <a:tr h="415384">
-                <a:tc>
-                  <a:txBody>
-                    <a:bodyPr wrap="square"/>
-                    <a:lstStyle/>
-                    <a:p>
-                      <a:pPr algn="ctr"/>
-                      <a:r>
-                        <a:rPr sz="900" b="0">
-                          <a:solidFill>
-                            <a:srgbClr val="333333"/>
-                          </a:solidFill>
-                          <a:latin typeface="メイリオ"/>
-                          <a:ea typeface="メイリオ"/>
-                        </a:rPr>
-                        <a:t/>
-                      </a:r>
-                    </a:p>
-                  </a:txBody>
-                  <a:tcPr anchor="ctr">
-                    <a:solidFill>
-                      <a:srgbClr val="E8F6F3"/>
-                    </a:solidFill>
-                    <a:lnL w="6350" cap="flat" cmpd="sng" algn="ctr">
-                      <a:solidFill>
-                        <a:srgbClr val="CCCCCC"/>
-                      </a:solidFill>
-                      <a:prstDash val="solid"/>
-                    </a:lnL>
-                    <a:lnR w="6350" cap="flat" cmpd="sng" algn="ctr">
-                      <a:solidFill>
-                        <a:srgbClr val="CCCCCC"/>
-                      </a:solidFill>
-                      <a:prstDash val="solid"/>
-                    </a:lnR>
-                    <a:lnT w="6350" cap="flat" cmpd="sng" algn="ctr">
-                      <a:solidFill>
-                        <a:srgbClr val="CCCCCC"/>
-                      </a:solidFill>
-                      <a:prstDash val="solid"/>
-                    </a:lnT>
-                    <a:lnB w="6350" cap="flat" cmpd="sng" algn="ctr">
-                      <a:solidFill>
-                        <a:srgbClr val="CCCCCC"/>
-                      </a:solidFill>
-                      <a:prstDash val="solid"/>
-                    </a:lnB>
-                  </a:tcPr>
-                </a:tc>
-                <a:tc>
-                  <a:txBody>
-                    <a:bodyPr wrap="square"/>
-                    <a:lstStyle/>
-                    <a:p>
-                      <a:pPr algn="ctr"/>
-                      <a:r>
-                        <a:rPr sz="900" b="0">
-                          <a:solidFill>
-                            <a:srgbClr val="333333"/>
-                          </a:solidFill>
-                          <a:latin typeface="メイリオ"/>
-                          <a:ea typeface="メイリオ"/>
-                        </a:rPr>
-                        <a:t/>
-                      </a:r>
-                    </a:p>
-                  </a:txBody>
-                  <a:tcPr anchor="ctr">
-                    <a:solidFill>
-                      <a:srgbClr val="E8F6F3"/>
-                    </a:solidFill>
-                    <a:lnL w="6350" cap="flat" cmpd="sng" algn="ctr">
-                      <a:solidFill>
-                        <a:srgbClr val="CCCCCC"/>
-                      </a:solidFill>
-                      <a:prstDash val="solid"/>
-                    </a:lnL>
-                    <a:lnR w="6350" cap="flat" cmpd="sng" algn="ctr">
-                      <a:solidFill>
-                        <a:srgbClr val="CCCCCC"/>
-                      </a:solidFill>
-                      <a:prstDash val="solid"/>
-                    </a:lnR>
-                    <a:lnT w="6350" cap="flat" cmpd="sng" algn="ctr">
-                      <a:solidFill>
-                        <a:srgbClr val="CCCCCC"/>
-                      </a:solidFill>
-                      <a:prstDash val="solid"/>
-                    </a:lnT>
-                    <a:lnB w="6350" cap="flat" cmpd="sng" algn="ctr">
-                      <a:solidFill>
-                        <a:srgbClr val="CCCCCC"/>
-                      </a:solidFill>
-                      <a:prstDash val="solid"/>
-                    </a:lnB>
-                  </a:tcPr>
-                </a:tc>
-                <a:tc>
-                  <a:txBody>
-                    <a:bodyPr wrap="square"/>
-                    <a:lstStyle/>
-                    <a:p>
-                      <a:pPr algn="l"/>
-                      <a:r>
-                        <a:rPr sz="900" b="1">
-                          <a:solidFill>
-                            <a:srgbClr val="007A6E"/>
-                          </a:solidFill>
-                          <a:latin typeface="メイリオ"/>
-                          <a:ea typeface="メイリオ"/>
-                        </a:rPr>
-                        <a:t>　・会員管理</a:t>
-                      </a:r>
-                    </a:p>
-                  </a:txBody>
-                  <a:tcPr anchor="ctr">
-                    <a:solidFill>
-                      <a:srgbClr val="E8F6F3"/>
-                    </a:solidFill>
-                    <a:lnL w="6350" cap="flat" cmpd="sng" algn="ctr">
-                      <a:solidFill>
-                        <a:srgbClr val="CCCCCC"/>
-                      </a:solidFill>
-                      <a:prstDash val="solid"/>
-                    </a:lnL>
-                    <a:lnR w="6350" cap="flat" cmpd="sng" algn="ctr">
-                      <a:solidFill>
-                        <a:srgbClr val="CCCCCC"/>
-                      </a:solidFill>
-                      <a:prstDash val="solid"/>
-                    </a:lnR>
-                    <a:lnT w="6350" cap="flat" cmpd="sng" algn="ctr">
-                      <a:solidFill>
-                        <a:srgbClr val="CCCCCC"/>
-                      </a:solidFill>
-                      <a:prstDash val="solid"/>
-                    </a:lnT>
-                    <a:lnB w="6350" cap="flat" cmpd="sng" algn="ctr">
-                      <a:solidFill>
-                        <a:srgbClr val="CCCCCC"/>
-                      </a:solidFill>
-                      <a:prstDash val="solid"/>
-                    </a:lnB>
-                  </a:tcPr>
-                </a:tc>
-                <a:tc>
-                  <a:txBody>
-                    <a:bodyPr wrap="square"/>
-                    <a:lstStyle/>
-                    <a:p>
-                      <a:pPr algn="l"/>
-                      <a:r>
-                        <a:rPr sz="900" b="0">
-                          <a:solidFill>
-                            <a:srgbClr val="333333"/>
-                          </a:solidFill>
-                          <a:latin typeface="メイリオ"/>
-                          <a:ea typeface="メイリオ"/>
-                        </a:rPr>
-                        <a:t>販売組織・掛け率・権限等の差分を定義します。</a:t>
-                      </a:r>
-                    </a:p>
-                  </a:txBody>
-                  <a:tcPr anchor="ctr">
-                    <a:solidFill>
-                      <a:srgbClr val="E8F6F3"/>
-                    </a:solidFill>
-                    <a:lnL w="6350" cap="flat" cmpd="sng" algn="ctr">
-                      <a:solidFill>
-                        <a:srgbClr val="CCCCCC"/>
-                      </a:solidFill>
-                      <a:prstDash val="solid"/>
-                    </a:lnL>
-                    <a:lnR w="6350" cap="flat" cmpd="sng" algn="ctr">
-                      <a:solidFill>
-                        <a:srgbClr val="CCCCCC"/>
-                      </a:solidFill>
-                      <a:prstDash val="solid"/>
-                    </a:lnR>
-                    <a:lnT w="6350" cap="flat" cmpd="sng" algn="ctr">
-                      <a:solidFill>
-                        <a:srgbClr val="CCCCCC"/>
-                      </a:solidFill>
-                      <a:prstDash val="solid"/>
-                    </a:lnT>
-                    <a:lnB w="6350" cap="flat" cmpd="sng" algn="ctr">
-                      <a:solidFill>
-                        <a:srgbClr val="CCCCCC"/>
-                      </a:solidFill>
-                      <a:prstDash val="solid"/>
-                    </a:lnB>
-                  </a:tcPr>
-                </a:tc>
-              </a:tr>
-              <a:tr h="415384">
+              <a:tr h="1040000">
                 <a:tc>
                   <a:txBody>
                     <a:bodyPr wrap="square"/>
@@ -6850,7 +6521,7 @@
                   </a:txBody>
                   <a:tcPr anchor="ctr">
                     <a:solidFill>
-                      <a:srgbClr val="FFFFFF"/>
+                      <a:srgbClr val="F0FAF8"/>
                     </a:solidFill>
                     <a:lnL w="6350" cap="flat" cmpd="sng" algn="ctr">
                       <a:solidFill>
@@ -6898,7 +6569,7 @@
                   </a:txBody>
                   <a:tcPr anchor="ctr">
                     <a:solidFill>
-                      <a:srgbClr val="FFFFFF"/>
+                      <a:srgbClr val="F0FAF8"/>
                     </a:solidFill>
                     <a:lnL w="6350" cap="flat" cmpd="sng" algn="ctr">
                       <a:solidFill>
@@ -6933,20 +6604,20 @@
                     <a:p>
                       <a:pPr algn="l"/>
                       <a:r>
-                        <a:rPr sz="1000" b="1">
+                        <a:rPr sz="900" b="1">
                           <a:solidFill>
                             <a:srgbClr val="333333"/>
                           </a:solidFill>
                           <a:latin typeface="メイリオ"/>
                           <a:ea typeface="メイリオ"/>
                         </a:rPr>
-                        <a:t>機能詳細検討（2回目）</a:t>
+                        <a:t>④UI検討（画面外部仕様）</a:t>
                       </a:r>
                     </a:p>
                   </a:txBody>
                   <a:tcPr anchor="ctr">
                     <a:solidFill>
-                      <a:srgbClr val="FFFFFF"/>
+                      <a:srgbClr val="F0FAF8"/>
                     </a:solidFill>
                     <a:lnL w="6350" cap="flat" cmpd="sng" algn="ctr">
                       <a:solidFill>
@@ -6988,7 +6659,7 @@
                           <a:latin typeface="メイリオ"/>
                           <a:ea typeface="メイリオ"/>
                         </a:rPr>
-                        <a:t>画面機能設計書と機能詳細フローを用いて、Fit&amp;Gapを整理します。</a:t>
+                        <a:t>画面モックを用い、画面の入出力・導線・表示項目を外部仕様として確定します。</a:t>
                       </a:r>
                     </a:p>
                     <a:p>
@@ -7001,13 +6672,13 @@
                           <a:latin typeface="メイリオ"/>
                           <a:ea typeface="メイリオ"/>
                         </a:rPr>
-                        <a:t>対象：受注管理／マイページ・その他／フロントサイト確認</a:t>
+                        <a:t>管理サイト／フロント（マイページ含む）の両方を対象とします。</a:t>
                       </a:r>
                     </a:p>
                   </a:txBody>
                   <a:tcPr anchor="ctr">
                     <a:solidFill>
-                      <a:srgbClr val="FFFFFF"/>
+                      <a:srgbClr val="F0FAF8"/>
                     </a:solidFill>
                     <a:lnL w="6350" cap="flat" cmpd="sng" algn="ctr">
                       <a:solidFill>
@@ -7036,589 +6707,7 @@
                   </a:tcPr>
                 </a:tc>
               </a:tr>
-              <a:tr h="415384">
-                <a:tc>
-                  <a:txBody>
-                    <a:bodyPr wrap="square"/>
-                    <a:lstStyle/>
-                    <a:p>
-                      <a:pPr algn="ctr"/>
-                      <a:r>
-                        <a:rPr sz="900" b="0">
-                          <a:solidFill>
-                            <a:srgbClr val="333333"/>
-                          </a:solidFill>
-                          <a:latin typeface="メイリオ"/>
-                          <a:ea typeface="メイリオ"/>
-                        </a:rPr>
-                        <a:t/>
-                      </a:r>
-                    </a:p>
-                  </a:txBody>
-                  <a:tcPr anchor="ctr">
-                    <a:solidFill>
-                      <a:srgbClr val="E8F6F3"/>
-                    </a:solidFill>
-                    <a:lnL w="6350" cap="flat" cmpd="sng" algn="ctr">
-                      <a:solidFill>
-                        <a:srgbClr val="CCCCCC"/>
-                      </a:solidFill>
-                      <a:prstDash val="solid"/>
-                    </a:lnL>
-                    <a:lnR w="6350" cap="flat" cmpd="sng" algn="ctr">
-                      <a:solidFill>
-                        <a:srgbClr val="CCCCCC"/>
-                      </a:solidFill>
-                      <a:prstDash val="solid"/>
-                    </a:lnR>
-                    <a:lnT w="6350" cap="flat" cmpd="sng" algn="ctr">
-                      <a:solidFill>
-                        <a:srgbClr val="CCCCCC"/>
-                      </a:solidFill>
-                      <a:prstDash val="solid"/>
-                    </a:lnT>
-                    <a:lnB w="6350" cap="flat" cmpd="sng" algn="ctr">
-                      <a:solidFill>
-                        <a:srgbClr val="CCCCCC"/>
-                      </a:solidFill>
-                      <a:prstDash val="solid"/>
-                    </a:lnB>
-                  </a:tcPr>
-                </a:tc>
-                <a:tc>
-                  <a:txBody>
-                    <a:bodyPr wrap="square"/>
-                    <a:lstStyle/>
-                    <a:p>
-                      <a:pPr algn="ctr"/>
-                      <a:r>
-                        <a:rPr sz="900" b="0">
-                          <a:solidFill>
-                            <a:srgbClr val="333333"/>
-                          </a:solidFill>
-                          <a:latin typeface="メイリオ"/>
-                          <a:ea typeface="メイリオ"/>
-                        </a:rPr>
-                        <a:t/>
-                      </a:r>
-                    </a:p>
-                  </a:txBody>
-                  <a:tcPr anchor="ctr">
-                    <a:solidFill>
-                      <a:srgbClr val="E8F6F3"/>
-                    </a:solidFill>
-                    <a:lnL w="6350" cap="flat" cmpd="sng" algn="ctr">
-                      <a:solidFill>
-                        <a:srgbClr val="CCCCCC"/>
-                      </a:solidFill>
-                      <a:prstDash val="solid"/>
-                    </a:lnL>
-                    <a:lnR w="6350" cap="flat" cmpd="sng" algn="ctr">
-                      <a:solidFill>
-                        <a:srgbClr val="CCCCCC"/>
-                      </a:solidFill>
-                      <a:prstDash val="solid"/>
-                    </a:lnR>
-                    <a:lnT w="6350" cap="flat" cmpd="sng" algn="ctr">
-                      <a:solidFill>
-                        <a:srgbClr val="CCCCCC"/>
-                      </a:solidFill>
-                      <a:prstDash val="solid"/>
-                    </a:lnT>
-                    <a:lnB w="6350" cap="flat" cmpd="sng" algn="ctr">
-                      <a:solidFill>
-                        <a:srgbClr val="CCCCCC"/>
-                      </a:solidFill>
-                      <a:prstDash val="solid"/>
-                    </a:lnB>
-                  </a:tcPr>
-                </a:tc>
-                <a:tc>
-                  <a:txBody>
-                    <a:bodyPr wrap="square"/>
-                    <a:lstStyle/>
-                    <a:p>
-                      <a:pPr algn="l"/>
-                      <a:r>
-                        <a:rPr sz="900" b="1">
-                          <a:solidFill>
-                            <a:srgbClr val="007A6E"/>
-                          </a:solidFill>
-                          <a:latin typeface="メイリオ"/>
-                          <a:ea typeface="メイリオ"/>
-                        </a:rPr>
-                        <a:t>　・受注管理</a:t>
-                      </a:r>
-                    </a:p>
-                  </a:txBody>
-                  <a:tcPr anchor="ctr">
-                    <a:solidFill>
-                      <a:srgbClr val="E8F6F3"/>
-                    </a:solidFill>
-                    <a:lnL w="6350" cap="flat" cmpd="sng" algn="ctr">
-                      <a:solidFill>
-                        <a:srgbClr val="CCCCCC"/>
-                      </a:solidFill>
-                      <a:prstDash val="solid"/>
-                    </a:lnL>
-                    <a:lnR w="6350" cap="flat" cmpd="sng" algn="ctr">
-                      <a:solidFill>
-                        <a:srgbClr val="CCCCCC"/>
-                      </a:solidFill>
-                      <a:prstDash val="solid"/>
-                    </a:lnR>
-                    <a:lnT w="6350" cap="flat" cmpd="sng" algn="ctr">
-                      <a:solidFill>
-                        <a:srgbClr val="CCCCCC"/>
-                      </a:solidFill>
-                      <a:prstDash val="solid"/>
-                    </a:lnT>
-                    <a:lnB w="6350" cap="flat" cmpd="sng" algn="ctr">
-                      <a:solidFill>
-                        <a:srgbClr val="CCCCCC"/>
-                      </a:solidFill>
-                      <a:prstDash val="solid"/>
-                    </a:lnB>
-                  </a:tcPr>
-                </a:tc>
-                <a:tc>
-                  <a:txBody>
-                    <a:bodyPr wrap="square"/>
-                    <a:lstStyle/>
-                    <a:p>
-                      <a:pPr algn="l"/>
-                      <a:r>
-                        <a:rPr sz="900" b="0">
-                          <a:solidFill>
-                            <a:srgbClr val="333333"/>
-                          </a:solidFill>
-                          <a:latin typeface="メイリオ"/>
-                          <a:ea typeface="メイリオ"/>
-                        </a:rPr>
-                        <a:t>注文ステータス、与信、基幹連携（受注／出荷）等の差分を定義します。</a:t>
-                      </a:r>
-                    </a:p>
-                  </a:txBody>
-                  <a:tcPr anchor="ctr">
-                    <a:solidFill>
-                      <a:srgbClr val="E8F6F3"/>
-                    </a:solidFill>
-                    <a:lnL w="6350" cap="flat" cmpd="sng" algn="ctr">
-                      <a:solidFill>
-                        <a:srgbClr val="CCCCCC"/>
-                      </a:solidFill>
-                      <a:prstDash val="solid"/>
-                    </a:lnL>
-                    <a:lnR w="6350" cap="flat" cmpd="sng" algn="ctr">
-                      <a:solidFill>
-                        <a:srgbClr val="CCCCCC"/>
-                      </a:solidFill>
-                      <a:prstDash val="solid"/>
-                    </a:lnR>
-                    <a:lnT w="6350" cap="flat" cmpd="sng" algn="ctr">
-                      <a:solidFill>
-                        <a:srgbClr val="CCCCCC"/>
-                      </a:solidFill>
-                      <a:prstDash val="solid"/>
-                    </a:lnT>
-                    <a:lnB w="6350" cap="flat" cmpd="sng" algn="ctr">
-                      <a:solidFill>
-                        <a:srgbClr val="CCCCCC"/>
-                      </a:solidFill>
-                      <a:prstDash val="solid"/>
-                    </a:lnB>
-                  </a:tcPr>
-                </a:tc>
-              </a:tr>
-              <a:tr h="415384">
-                <a:tc>
-                  <a:txBody>
-                    <a:bodyPr wrap="square"/>
-                    <a:lstStyle/>
-                    <a:p>
-                      <a:pPr algn="ctr"/>
-                      <a:r>
-                        <a:rPr sz="900" b="0">
-                          <a:solidFill>
-                            <a:srgbClr val="333333"/>
-                          </a:solidFill>
-                          <a:latin typeface="メイリオ"/>
-                          <a:ea typeface="メイリオ"/>
-                        </a:rPr>
-                        <a:t/>
-                      </a:r>
-                    </a:p>
-                  </a:txBody>
-                  <a:tcPr anchor="ctr">
-                    <a:solidFill>
-                      <a:srgbClr val="E8F6F3"/>
-                    </a:solidFill>
-                    <a:lnL w="6350" cap="flat" cmpd="sng" algn="ctr">
-                      <a:solidFill>
-                        <a:srgbClr val="CCCCCC"/>
-                      </a:solidFill>
-                      <a:prstDash val="solid"/>
-                    </a:lnL>
-                    <a:lnR w="6350" cap="flat" cmpd="sng" algn="ctr">
-                      <a:solidFill>
-                        <a:srgbClr val="CCCCCC"/>
-                      </a:solidFill>
-                      <a:prstDash val="solid"/>
-                    </a:lnR>
-                    <a:lnT w="6350" cap="flat" cmpd="sng" algn="ctr">
-                      <a:solidFill>
-                        <a:srgbClr val="CCCCCC"/>
-                      </a:solidFill>
-                      <a:prstDash val="solid"/>
-                    </a:lnT>
-                    <a:lnB w="6350" cap="flat" cmpd="sng" algn="ctr">
-                      <a:solidFill>
-                        <a:srgbClr val="CCCCCC"/>
-                      </a:solidFill>
-                      <a:prstDash val="solid"/>
-                    </a:lnB>
-                  </a:tcPr>
-                </a:tc>
-                <a:tc>
-                  <a:txBody>
-                    <a:bodyPr wrap="square"/>
-                    <a:lstStyle/>
-                    <a:p>
-                      <a:pPr algn="ctr"/>
-                      <a:r>
-                        <a:rPr sz="900" b="0">
-                          <a:solidFill>
-                            <a:srgbClr val="333333"/>
-                          </a:solidFill>
-                          <a:latin typeface="メイリオ"/>
-                          <a:ea typeface="メイリオ"/>
-                        </a:rPr>
-                        <a:t/>
-                      </a:r>
-                    </a:p>
-                  </a:txBody>
-                  <a:tcPr anchor="ctr">
-                    <a:solidFill>
-                      <a:srgbClr val="E8F6F3"/>
-                    </a:solidFill>
-                    <a:lnL w="6350" cap="flat" cmpd="sng" algn="ctr">
-                      <a:solidFill>
-                        <a:srgbClr val="CCCCCC"/>
-                      </a:solidFill>
-                      <a:prstDash val="solid"/>
-                    </a:lnL>
-                    <a:lnR w="6350" cap="flat" cmpd="sng" algn="ctr">
-                      <a:solidFill>
-                        <a:srgbClr val="CCCCCC"/>
-                      </a:solidFill>
-                      <a:prstDash val="solid"/>
-                    </a:lnR>
-                    <a:lnT w="6350" cap="flat" cmpd="sng" algn="ctr">
-                      <a:solidFill>
-                        <a:srgbClr val="CCCCCC"/>
-                      </a:solidFill>
-                      <a:prstDash val="solid"/>
-                    </a:lnT>
-                    <a:lnB w="6350" cap="flat" cmpd="sng" algn="ctr">
-                      <a:solidFill>
-                        <a:srgbClr val="CCCCCC"/>
-                      </a:solidFill>
-                      <a:prstDash val="solid"/>
-                    </a:lnB>
-                  </a:tcPr>
-                </a:tc>
-                <a:tc>
-                  <a:txBody>
-                    <a:bodyPr wrap="square"/>
-                    <a:lstStyle/>
-                    <a:p>
-                      <a:pPr algn="l"/>
-                      <a:r>
-                        <a:rPr sz="900" b="1">
-                          <a:solidFill>
-                            <a:srgbClr val="007A6E"/>
-                          </a:solidFill>
-                          <a:latin typeface="メイリオ"/>
-                          <a:ea typeface="メイリオ"/>
-                        </a:rPr>
-                        <a:t>　・マイページ、その他</a:t>
-                      </a:r>
-                    </a:p>
-                  </a:txBody>
-                  <a:tcPr anchor="ctr">
-                    <a:solidFill>
-                      <a:srgbClr val="E8F6F3"/>
-                    </a:solidFill>
-                    <a:lnL w="6350" cap="flat" cmpd="sng" algn="ctr">
-                      <a:solidFill>
-                        <a:srgbClr val="CCCCCC"/>
-                      </a:solidFill>
-                      <a:prstDash val="solid"/>
-                    </a:lnL>
-                    <a:lnR w="6350" cap="flat" cmpd="sng" algn="ctr">
-                      <a:solidFill>
-                        <a:srgbClr val="CCCCCC"/>
-                      </a:solidFill>
-                      <a:prstDash val="solid"/>
-                    </a:lnR>
-                    <a:lnT w="6350" cap="flat" cmpd="sng" algn="ctr">
-                      <a:solidFill>
-                        <a:srgbClr val="CCCCCC"/>
-                      </a:solidFill>
-                      <a:prstDash val="solid"/>
-                    </a:lnT>
-                    <a:lnB w="6350" cap="flat" cmpd="sng" algn="ctr">
-                      <a:solidFill>
-                        <a:srgbClr val="CCCCCC"/>
-                      </a:solidFill>
-                      <a:prstDash val="solid"/>
-                    </a:lnB>
-                  </a:tcPr>
-                </a:tc>
-                <a:tc>
-                  <a:txBody>
-                    <a:bodyPr wrap="square"/>
-                    <a:lstStyle/>
-                    <a:p>
-                      <a:pPr algn="l"/>
-                      <a:r>
-                        <a:rPr sz="900" b="0">
-                          <a:solidFill>
-                            <a:srgbClr val="333333"/>
-                          </a:solidFill>
-                          <a:latin typeface="メイリオ"/>
-                          <a:ea typeface="メイリオ"/>
-                        </a:rPr>
-                        <a:t>履歴・進捗・ダウンロード等の差分を定義します。</a:t>
-                      </a:r>
-                    </a:p>
-                  </a:txBody>
-                  <a:tcPr anchor="ctr">
-                    <a:solidFill>
-                      <a:srgbClr val="E8F6F3"/>
-                    </a:solidFill>
-                    <a:lnL w="6350" cap="flat" cmpd="sng" algn="ctr">
-                      <a:solidFill>
-                        <a:srgbClr val="CCCCCC"/>
-                      </a:solidFill>
-                      <a:prstDash val="solid"/>
-                    </a:lnL>
-                    <a:lnR w="6350" cap="flat" cmpd="sng" algn="ctr">
-                      <a:solidFill>
-                        <a:srgbClr val="CCCCCC"/>
-                      </a:solidFill>
-                      <a:prstDash val="solid"/>
-                    </a:lnR>
-                    <a:lnT w="6350" cap="flat" cmpd="sng" algn="ctr">
-                      <a:solidFill>
-                        <a:srgbClr val="CCCCCC"/>
-                      </a:solidFill>
-                      <a:prstDash val="solid"/>
-                    </a:lnT>
-                    <a:lnB w="6350" cap="flat" cmpd="sng" algn="ctr">
-                      <a:solidFill>
-                        <a:srgbClr val="CCCCCC"/>
-                      </a:solidFill>
-                      <a:prstDash val="solid"/>
-                    </a:lnB>
-                  </a:tcPr>
-                </a:tc>
-              </a:tr>
-              <a:tr h="415384">
-                <a:tc>
-                  <a:txBody>
-                    <a:bodyPr wrap="square"/>
-                    <a:lstStyle/>
-                    <a:p>
-                      <a:pPr algn="ctr"/>
-                      <a:r>
-                        <a:rPr sz="900" b="0">
-                          <a:solidFill>
-                            <a:srgbClr val="333333"/>
-                          </a:solidFill>
-                          <a:latin typeface="メイリオ"/>
-                          <a:ea typeface="メイリオ"/>
-                        </a:rPr>
-                        <a:t/>
-                      </a:r>
-                    </a:p>
-                  </a:txBody>
-                  <a:tcPr anchor="ctr">
-                    <a:solidFill>
-                      <a:srgbClr val="E8F6F3"/>
-                    </a:solidFill>
-                    <a:lnL w="6350" cap="flat" cmpd="sng" algn="ctr">
-                      <a:solidFill>
-                        <a:srgbClr val="CCCCCC"/>
-                      </a:solidFill>
-                      <a:prstDash val="solid"/>
-                    </a:lnL>
-                    <a:lnR w="6350" cap="flat" cmpd="sng" algn="ctr">
-                      <a:solidFill>
-                        <a:srgbClr val="CCCCCC"/>
-                      </a:solidFill>
-                      <a:prstDash val="solid"/>
-                    </a:lnR>
-                    <a:lnT w="6350" cap="flat" cmpd="sng" algn="ctr">
-                      <a:solidFill>
-                        <a:srgbClr val="CCCCCC"/>
-                      </a:solidFill>
-                      <a:prstDash val="solid"/>
-                    </a:lnT>
-                    <a:lnB w="6350" cap="flat" cmpd="sng" algn="ctr">
-                      <a:solidFill>
-                        <a:srgbClr val="CCCCCC"/>
-                      </a:solidFill>
-                      <a:prstDash val="solid"/>
-                    </a:lnB>
-                  </a:tcPr>
-                </a:tc>
-                <a:tc>
-                  <a:txBody>
-                    <a:bodyPr wrap="square"/>
-                    <a:lstStyle/>
-                    <a:p>
-                      <a:pPr algn="ctr"/>
-                      <a:r>
-                        <a:rPr sz="900" b="0">
-                          <a:solidFill>
-                            <a:srgbClr val="333333"/>
-                          </a:solidFill>
-                          <a:latin typeface="メイリオ"/>
-                          <a:ea typeface="メイリオ"/>
-                        </a:rPr>
-                        <a:t/>
-                      </a:r>
-                    </a:p>
-                  </a:txBody>
-                  <a:tcPr anchor="ctr">
-                    <a:solidFill>
-                      <a:srgbClr val="E8F6F3"/>
-                    </a:solidFill>
-                    <a:lnL w="6350" cap="flat" cmpd="sng" algn="ctr">
-                      <a:solidFill>
-                        <a:srgbClr val="CCCCCC"/>
-                      </a:solidFill>
-                      <a:prstDash val="solid"/>
-                    </a:lnL>
-                    <a:lnR w="6350" cap="flat" cmpd="sng" algn="ctr">
-                      <a:solidFill>
-                        <a:srgbClr val="CCCCCC"/>
-                      </a:solidFill>
-                      <a:prstDash val="solid"/>
-                    </a:lnR>
-                    <a:lnT w="6350" cap="flat" cmpd="sng" algn="ctr">
-                      <a:solidFill>
-                        <a:srgbClr val="CCCCCC"/>
-                      </a:solidFill>
-                      <a:prstDash val="solid"/>
-                    </a:lnT>
-                    <a:lnB w="6350" cap="flat" cmpd="sng" algn="ctr">
-                      <a:solidFill>
-                        <a:srgbClr val="CCCCCC"/>
-                      </a:solidFill>
-                      <a:prstDash val="solid"/>
-                    </a:lnB>
-                  </a:tcPr>
-                </a:tc>
-                <a:tc>
-                  <a:txBody>
-                    <a:bodyPr wrap="square"/>
-                    <a:lstStyle/>
-                    <a:p>
-                      <a:pPr algn="l"/>
-                      <a:r>
-                        <a:rPr sz="900" b="1">
-                          <a:solidFill>
-                            <a:srgbClr val="007A6E"/>
-                          </a:solidFill>
-                          <a:latin typeface="メイリオ"/>
-                          <a:ea typeface="メイリオ"/>
-                        </a:rPr>
-                        <a:t>　・フロントサイト確認</a:t>
-                      </a:r>
-                    </a:p>
-                  </a:txBody>
-                  <a:tcPr anchor="ctr">
-                    <a:solidFill>
-                      <a:srgbClr val="E8F6F3"/>
-                    </a:solidFill>
-                    <a:lnL w="6350" cap="flat" cmpd="sng" algn="ctr">
-                      <a:solidFill>
-                        <a:srgbClr val="CCCCCC"/>
-                      </a:solidFill>
-                      <a:prstDash val="solid"/>
-                    </a:lnL>
-                    <a:lnR w="6350" cap="flat" cmpd="sng" algn="ctr">
-                      <a:solidFill>
-                        <a:srgbClr val="CCCCCC"/>
-                      </a:solidFill>
-                      <a:prstDash val="solid"/>
-                    </a:lnR>
-                    <a:lnT w="6350" cap="flat" cmpd="sng" algn="ctr">
-                      <a:solidFill>
-                        <a:srgbClr val="CCCCCC"/>
-                      </a:solidFill>
-                      <a:prstDash val="solid"/>
-                    </a:lnT>
-                    <a:lnB w="6350" cap="flat" cmpd="sng" algn="ctr">
-                      <a:solidFill>
-                        <a:srgbClr val="CCCCCC"/>
-                      </a:solidFill>
-                      <a:prstDash val="solid"/>
-                    </a:lnB>
-                  </a:tcPr>
-                </a:tc>
-                <a:tc>
-                  <a:txBody>
-                    <a:bodyPr wrap="square"/>
-                    <a:lstStyle/>
-                    <a:p>
-                      <a:pPr algn="l"/>
-                      <a:r>
-                        <a:rPr sz="900" b="0">
-                          <a:solidFill>
-                            <a:srgbClr val="333333"/>
-                          </a:solidFill>
-                          <a:latin typeface="メイリオ"/>
-                          <a:ea typeface="メイリオ"/>
-                        </a:rPr>
-                        <a:t>商品閲覧〜カート〜注文〜履歴／マイページの画面・導線・デザイン方針を確認します。</a:t>
-                      </a:r>
-                    </a:p>
-                  </a:txBody>
-                  <a:tcPr anchor="ctr">
-                    <a:solidFill>
-                      <a:srgbClr val="E8F6F3"/>
-                    </a:solidFill>
-                    <a:lnL w="6350" cap="flat" cmpd="sng" algn="ctr">
-                      <a:solidFill>
-                        <a:srgbClr val="CCCCCC"/>
-                      </a:solidFill>
-                      <a:prstDash val="solid"/>
-                    </a:lnL>
-                    <a:lnR w="6350" cap="flat" cmpd="sng" algn="ctr">
-                      <a:solidFill>
-                        <a:srgbClr val="CCCCCC"/>
-                      </a:solidFill>
-                      <a:prstDash val="solid"/>
-                    </a:lnR>
-                    <a:lnT w="6350" cap="flat" cmpd="sng" algn="ctr">
-                      <a:solidFill>
-                        <a:srgbClr val="CCCCCC"/>
-                      </a:solidFill>
-                      <a:prstDash val="solid"/>
-                    </a:lnT>
-                    <a:lnB w="6350" cap="flat" cmpd="sng" algn="ctr">
-                      <a:solidFill>
-                        <a:srgbClr val="CCCCCC"/>
-                      </a:solidFill>
-                      <a:prstDash val="solid"/>
-                    </a:lnB>
-                  </a:tcPr>
-                </a:tc>
-              </a:tr>
-              <a:tr h="415384">
+              <a:tr h="1040000">
                 <a:tc>
                   <a:txBody>
                     <a:bodyPr wrap="square"/>
@@ -7639,7 +6728,7 @@
                   </a:txBody>
                   <a:tcPr anchor="ctr">
                     <a:solidFill>
-                      <a:srgbClr val="F0FAF8"/>
+                      <a:srgbClr val="FFFFFF"/>
                     </a:solidFill>
                     <a:lnL w="6350" cap="flat" cmpd="sng" algn="ctr">
                       <a:solidFill>
@@ -7687,7 +6776,7 @@
                   </a:txBody>
                   <a:tcPr anchor="ctr">
                     <a:solidFill>
-                      <a:srgbClr val="F0FAF8"/>
+                      <a:srgbClr val="FFFFFF"/>
                     </a:solidFill>
                     <a:lnL w="6350" cap="flat" cmpd="sng" algn="ctr">
                       <a:solidFill>
@@ -7722,20 +6811,33 @@
                     <a:p>
                       <a:pPr algn="l"/>
                       <a:r>
-                        <a:rPr sz="1000" b="1">
+                        <a:rPr sz="900" b="1">
                           <a:solidFill>
                             <a:srgbClr val="333333"/>
                           </a:solidFill>
                           <a:latin typeface="メイリオ"/>
                           <a:ea typeface="メイリオ"/>
                         </a:rPr>
-                        <a:t>非機能要件検討</a:t>
+                        <a:t>⑤連携外部仕様の定義</a:t>
+                      </a:r>
+                    </a:p>
+                    <a:p>
+                      <a:pPr algn="l"/>
+                      <a:r>
+                        <a:rPr sz="900" b="1">
+                          <a:solidFill>
+                            <a:srgbClr val="333333"/>
+                          </a:solidFill>
+                          <a:latin typeface="メイリオ"/>
+                          <a:ea typeface="メイリオ"/>
+                        </a:rPr>
+                        <a:t>⑥非機能要件の定義</a:t>
                       </a:r>
                     </a:p>
                   </a:txBody>
                   <a:tcPr anchor="ctr">
                     <a:solidFill>
-                      <a:srgbClr val="F0FAF8"/>
+                      <a:srgbClr val="FFFFFF"/>
                     </a:solidFill>
                     <a:lnL w="6350" cap="flat" cmpd="sng" algn="ctr">
                       <a:solidFill>
@@ -7777,13 +6879,49 @@
                           <a:latin typeface="メイリオ"/>
                           <a:ea typeface="メイリオ"/>
                         </a:rPr>
-                        <a:t>性能、セキュリティ、運用、データ移行等の非機能要件を定義します。</a:t>
+                        <a:t>⑤基幹連携の方式・タイミング・フォーマット・エラー時挙動を外部仕様として定義します。</a:t>
+                      </a:r>
+                    </a:p>
+                    <a:p>
+                      <a:pPr algn="l"/>
+                      <a:r>
+                        <a:rPr sz="900" b="0">
+                          <a:solidFill>
+                            <a:srgbClr val="333333"/>
+                          </a:solidFill>
+                          <a:latin typeface="メイリオ"/>
+                          <a:ea typeface="メイリオ"/>
+                        </a:rPr>
+                        <a:t>⑥性能・セキュリティ・運用・権限等の非機能要件を定義します。</a:t>
+                      </a:r>
+                      <a:r>
+                        <a:rPr sz="900" b="0">
+                          <a:solidFill>
+                            <a:srgbClr val="333333"/>
+                          </a:solidFill>
+                          <a:latin typeface="メイリオ"/>
+                          <a:ea typeface="メイリオ"/>
+                        </a:rPr>
+                        <a:t/>
+                      </a:r>
+                    </a:p>
+                    <a:p>
+                      <a:pPr algn="l"/>
+                      <a:r>
+                        <a:rPr sz="900" b="0">
+                          <a:solidFill>
+                            <a:srgbClr val="C00000"/>
+                          </a:solidFill>
+                          <a:latin typeface="メイリオ"/>
+                          <a:ea typeface="メイリオ"/>
+                        </a:rPr>
+                        <a:t>※ご教示依頼：年間注文数、ピーク注文時間帯、取引先数、商品SKU数、管理サイト利用者数</a:t>
                       </a:r>
                     </a:p>
                   </a:txBody>
                   <a:tcPr anchor="ctr">
                     <a:solidFill>
-                      <a:srgbClr val="F0FAF8"/>
+                      <a:srgbClr val="FFFFFF"/>
                     </a:solidFill>
                     <a:lnL w="6350" cap="flat" cmpd="sng" algn="ctr">
                       <a:solidFill>
@@ -7812,7 +6950,7 @@
                   </a:tcPr>
                 </a:tc>
               </a:tr>
-              <a:tr h="415384">
+              <a:tr h="1040000">
                 <a:tc>
                   <a:txBody>
                     <a:bodyPr wrap="square"/>
@@ -7833,7 +6971,7 @@
                   </a:txBody>
                   <a:tcPr anchor="ctr">
                     <a:solidFill>
-                      <a:srgbClr val="FFFFFF"/>
+                      <a:srgbClr val="F0FAF8"/>
                     </a:solidFill>
                     <a:lnL w="6350" cap="flat" cmpd="sng" algn="ctr">
                       <a:solidFill>
@@ -7881,7 +7019,7 @@
                   </a:txBody>
                   <a:tcPr anchor="ctr">
                     <a:solidFill>
-                      <a:srgbClr val="FFFFFF"/>
+                      <a:srgbClr val="F0FAF8"/>
                     </a:solidFill>
                     <a:lnL w="6350" cap="flat" cmpd="sng" algn="ctr">
                       <a:solidFill>
@@ -7916,7 +7054,7 @@
                     <a:p>
                       <a:pPr algn="l"/>
                       <a:r>
-                        <a:rPr sz="1000" b="1">
+                        <a:rPr sz="900" b="1">
                           <a:solidFill>
                             <a:srgbClr val="333333"/>
                           </a:solidFill>
@@ -7929,7 +7067,7 @@
                   </a:txBody>
                   <a:tcPr anchor="ctr">
                     <a:solidFill>
-                      <a:srgbClr val="FFFFFF"/>
+                      <a:srgbClr val="F0FAF8"/>
                     </a:solidFill>
                     <a:lnL w="6350" cap="flat" cmpd="sng" algn="ctr">
                       <a:solidFill>
@@ -7971,13 +7109,26 @@
                           <a:latin typeface="メイリオ"/>
                           <a:ea typeface="メイリオ"/>
                         </a:rPr>
-                        <a:t>要件定義書（案）の内容をレビューし、指摘事項を反映します。</a:t>
+                        <a:t>システム化の範囲／業務上のルール／外部仕様に抜け漏れがないことを確認します。</a:t>
+                      </a:r>
+                    </a:p>
+                    <a:p>
+                      <a:pPr algn="l"/>
+                      <a:r>
+                        <a:rPr sz="900" b="0">
+                          <a:solidFill>
+                            <a:srgbClr val="333333"/>
+                          </a:solidFill>
+                          <a:latin typeface="メイリオ"/>
+                          <a:ea typeface="メイリオ"/>
+                        </a:rPr>
+                        <a:t>指摘事項を反映し、要件定義書を確定します。</a:t>
                       </a:r>
                     </a:p>
                   </a:txBody>
                   <a:tcPr anchor="ctr">
                     <a:solidFill>
-                      <a:srgbClr val="FFFFFF"/>
+                      <a:srgbClr val="F0FAF8"/>
                     </a:solidFill>
                     <a:lnL w="6350" cap="flat" cmpd="sng" algn="ctr">
                       <a:solidFill>
@@ -8006,7 +7157,7 @@
                   </a:tcPr>
                 </a:tc>
               </a:tr>
-              <a:tr h="415392">
+              <a:tr h="1040000">
                 <a:tc>
                   <a:txBody>
                     <a:bodyPr wrap="square"/>
@@ -8027,7 +7178,7 @@
                   </a:txBody>
                   <a:tcPr anchor="ctr">
                     <a:solidFill>
-                      <a:srgbClr val="F0FAF8"/>
+                      <a:srgbClr val="FFFFFF"/>
                     </a:solidFill>
                     <a:lnL w="6350" cap="flat" cmpd="sng" algn="ctr">
                       <a:solidFill>
@@ -8075,7 +7226,7 @@
                   </a:txBody>
                   <a:tcPr anchor="ctr">
                     <a:solidFill>
-                      <a:srgbClr val="F0FAF8"/>
+                      <a:srgbClr val="FFFFFF"/>
                     </a:solidFill>
                     <a:lnL w="6350" cap="flat" cmpd="sng" algn="ctr">
                       <a:solidFill>
@@ -8110,20 +7261,33 @@
                     <a:p>
                       <a:pPr algn="l"/>
                       <a:r>
-                        <a:rPr sz="1000" b="1">
+                        <a:rPr sz="900" b="1">
                           <a:solidFill>
                             <a:srgbClr val="333333"/>
                           </a:solidFill>
                           <a:latin typeface="メイリオ"/>
                           <a:ea typeface="メイリオ"/>
                         </a:rPr>
-                        <a:t>納品・正式見積り提示／ご検収</a:t>
+                        <a:t>⑦開発工程の提案</a:t>
+                      </a:r>
+                    </a:p>
+                    <a:p>
+                      <a:pPr algn="l"/>
+                      <a:r>
+                        <a:rPr sz="900" b="1">
+                          <a:solidFill>
+                            <a:srgbClr val="333333"/>
+                          </a:solidFill>
+                          <a:latin typeface="メイリオ"/>
+                          <a:ea typeface="メイリオ"/>
+                        </a:rPr>
+                        <a:t>納品・正式見積り提示</a:t>
                       </a:r>
                     </a:p>
                   </a:txBody>
                   <a:tcPr anchor="ctr">
                     <a:solidFill>
-                      <a:srgbClr val="F0FAF8"/>
+                      <a:srgbClr val="FFFFFF"/>
                     </a:solidFill>
                     <a:lnL w="6350" cap="flat" cmpd="sng" algn="ctr">
                       <a:solidFill>
@@ -8165,13 +7329,26 @@
                           <a:latin typeface="メイリオ"/>
                           <a:ea typeface="メイリオ"/>
                         </a:rPr>
-                        <a:t>要件定義書を納品し、開発工程の正式見積りを提示、ご検収いただきます。</a:t>
+                        <a:t>確定した要件に基づき、カスタマイズ範囲・開発工程・正式見積りを提示します。</a:t>
+                      </a:r>
+                    </a:p>
+                    <a:p>
+                      <a:pPr algn="l"/>
+                      <a:r>
+                        <a:rPr sz="900" b="0">
+                          <a:solidFill>
+                            <a:srgbClr val="333333"/>
+                          </a:solidFill>
+                          <a:latin typeface="メイリオ"/>
+                          <a:ea typeface="メイリオ"/>
+                        </a:rPr>
+                        <a:t>要件定義書を納品します。（ご検収は10月末想定）</a:t>
                       </a:r>
                     </a:p>
                   </a:txBody>
                   <a:tcPr anchor="ctr">
                     <a:solidFill>
-                      <a:srgbClr val="F0FAF8"/>
+                      <a:srgbClr val="FFFFFF"/>
                     </a:solidFill>
                     <a:lnL w="6350" cap="flat" cmpd="sng" algn="ctr">
                       <a:solidFill>
@@ -8212,8 +7389,8 @@
         </p:nvSpPr>
         <p:spPr>
           <a:xfrm>
-            <a:off x="280000" y="6400000"/>
-            <a:ext cx="9350000" cy="350000"/>
+            <a:off x="250000" y="6400000"/>
+            <a:ext cx="9400000" cy="300000"/>
           </a:xfrm>
           <a:prstGeom prst="rect">
             <a:avLst/>
@@ -8235,7 +7412,7 @@
                 <a:latin typeface="メイリオ"/>
                 <a:ea typeface="メイリオ"/>
               </a:rPr>
-              <a:t>※開催日は仮置きです。貴社ご都合に合わせて調整いたします。※見積管理は対象外です。</a:t>
+              <a:t>※開催日は仮置きです。ご検収は10月末を想定しています。</a:t>
             </a:r>
           </a:p>
         </p:txBody>
@@ -8248,7 +7425,7 @@
 </p:sld>
 </file>
 
-<file path=ppt/slides/slide4.xml><?xml version="1.0" encoding="utf-8"?>
+<file path=ppt/slides/slide6.xml><?xml version="1.0" encoding="utf-8"?>
 <p:sld xmlns:a="http://schemas.openxmlformats.org/drawingml/2006/main" xmlns:p="http://schemas.openxmlformats.org/presentationml/2006/main" xmlns:r="http://schemas.openxmlformats.org/officeDocument/2006/relationships">
   <p:cSld>
     <p:spTree>
@@ -8266,8 +7443,8 @@
         </p:nvSpPr>
         <p:spPr>
           <a:xfrm>
-            <a:off x="300000" y="180000"/>
-            <a:ext cx="70000" cy="380000"/>
+            <a:off x="300000" y="160000"/>
+            <a:ext cx="70000" cy="360000"/>
           </a:xfrm>
           <a:prstGeom prst="rect">
             <a:avLst/>
@@ -8309,8 +7486,8 @@
         </p:nvSpPr>
         <p:spPr>
           <a:xfrm>
-            <a:off x="420000" y="160000"/>
-            <a:ext cx="9000000" cy="400000"/>
+            <a:off x="420000" y="140000"/>
+            <a:ext cx="9000000" cy="380000"/>
           </a:xfrm>
           <a:prstGeom prst="rect">
             <a:avLst/>
@@ -8332,734 +7509,21 @@
                 <a:latin typeface="メイリオ"/>
                 <a:ea typeface="メイリオ"/>
               </a:rPr>
-              <a:t>要件定義フェーズの進め方（概要）</a:t>
-            </a:r>
-          </a:p>
-        </p:txBody>
-      </p:sp>
-      <p:sp>
-        <p:nvSpPr>
-          <p:cNvPr id="4" name="Rounded Rectangle 3"/>
-          <p:cNvSpPr/>
+              <a:t>貴社へのご提供・ご教示依頼一覧</a:t>
+            </a:r>
+          </a:p>
+        </p:txBody>
+      </p:sp>
+      <p:sp>
+        <p:nvSpPr>
+          <p:cNvPr id="4" name="TextBox 3"/>
+          <p:cNvSpPr txBox="1"/>
           <p:nvPr/>
         </p:nvSpPr>
         <p:spPr>
           <a:xfrm>
-            <a:off x="400000" y="900000"/>
-            <a:ext cx="1500000" cy="1600000"/>
-          </a:xfrm>
-          <a:prstGeom prst="roundRect">
-            <a:avLst/>
-          </a:prstGeom>
-          <a:solidFill>
-            <a:srgbClr val="DEF3F1"/>
-          </a:solidFill>
-          <a:ln w="19050">
-            <a:solidFill>
-              <a:srgbClr val="00A693"/>
-            </a:solidFill>
-          </a:ln>
-        </p:spPr>
-        <p:style>
-          <a:lnRef idx="1">
-            <a:schemeClr val="accent1"/>
-          </a:lnRef>
-          <a:fillRef idx="3">
-            <a:schemeClr val="accent1"/>
-          </a:fillRef>
-          <a:effectRef idx="2">
-            <a:schemeClr val="accent1"/>
-          </a:effectRef>
-          <a:fontRef idx="minor">
-            <a:schemeClr val="lt1"/>
-          </a:fontRef>
-        </p:style>
-        <p:txBody>
-          <a:bodyPr rtlCol="0" anchor="ctr" wrap="square"/>
-          <a:lstStyle/>
-          <a:p>
-            <a:pPr algn="ctr"/>
-            <a:r>
-              <a:rPr sz="1100" b="1">
-                <a:solidFill>
-                  <a:srgbClr val="007A6E"/>
-                </a:solidFill>
-                <a:latin typeface="メイリオ"/>
-                <a:ea typeface="メイリオ"/>
-              </a:rPr>
-              <a:t>1</a:t>
-            </a:r>
-          </a:p>
-          <a:p>
-            <a:pPr algn="ctr"/>
-            <a:r>
-              <a:rPr sz="1100" b="1">
-                <a:solidFill>
-                  <a:srgbClr val="007A6E"/>
-                </a:solidFill>
-                <a:latin typeface="メイリオ"/>
-                <a:ea typeface="メイリオ"/>
-              </a:rPr>
-              <a:t>キックオフ</a:t>
-            </a:r>
-          </a:p>
-          <a:p/>
-          <a:p>
-            <a:pPr algn="ctr"/>
-            <a:r>
-              <a:rPr sz="900" b="0">
-                <a:solidFill>
-                  <a:srgbClr val="333333"/>
-                </a:solidFill>
-                <a:latin typeface="メイリオ"/>
-                <a:ea typeface="メイリオ"/>
-              </a:rPr>
-              <a:t>8/19</a:t>
-            </a:r>
-          </a:p>
-          <a:p>
-            <a:pPr algn="ctr"/>
-            <a:r>
-              <a:rPr sz="900" b="0">
-                <a:solidFill>
-                  <a:srgbClr val="333333"/>
-                </a:solidFill>
-                <a:latin typeface="メイリオ"/>
-                <a:ea typeface="メイリオ"/>
-              </a:rPr>
-              <a:t>進め方確認</a:t>
-            </a:r>
-          </a:p>
-        </p:txBody>
-      </p:sp>
-      <p:sp>
-        <p:nvSpPr>
-          <p:cNvPr id="5" name="Right Arrow 4"/>
-          <p:cNvSpPr/>
-          <p:nvPr/>
-        </p:nvSpPr>
-        <p:spPr>
-          <a:xfrm>
-            <a:off x="1930000" y="1500000"/>
-            <a:ext cx="160000" cy="180000"/>
-          </a:xfrm>
-          <a:prstGeom prst="rightArrow">
-            <a:avLst/>
-          </a:prstGeom>
-          <a:solidFill>
-            <a:srgbClr val="00A693"/>
-          </a:solidFill>
-          <a:ln>
-            <a:noFill/>
-          </a:ln>
-        </p:spPr>
-        <p:style>
-          <a:lnRef idx="1">
-            <a:schemeClr val="accent1"/>
-          </a:lnRef>
-          <a:fillRef idx="3">
-            <a:schemeClr val="accent1"/>
-          </a:fillRef>
-          <a:effectRef idx="2">
-            <a:schemeClr val="accent1"/>
-          </a:effectRef>
-          <a:fontRef idx="minor">
-            <a:schemeClr val="lt1"/>
-          </a:fontRef>
-        </p:style>
-        <p:txBody>
-          <a:bodyPr rtlCol="0" anchor="ctr"/>
-          <a:lstStyle/>
-          <a:p>
-            <a:pPr algn="ctr"/>
-          </a:p>
-        </p:txBody>
-      </p:sp>
-      <p:sp>
-        <p:nvSpPr>
-          <p:cNvPr id="6" name="Rounded Rectangle 5"/>
-          <p:cNvSpPr/>
-          <p:nvPr/>
-        </p:nvSpPr>
-        <p:spPr>
-          <a:xfrm>
-            <a:off x="2260000" y="900000"/>
-            <a:ext cx="1500000" cy="1600000"/>
-          </a:xfrm>
-          <a:prstGeom prst="roundRect">
-            <a:avLst/>
-          </a:prstGeom>
-          <a:solidFill>
-            <a:srgbClr val="DEF3F1"/>
-          </a:solidFill>
-          <a:ln w="19050">
-            <a:solidFill>
-              <a:srgbClr val="00A693"/>
-            </a:solidFill>
-          </a:ln>
-        </p:spPr>
-        <p:style>
-          <a:lnRef idx="1">
-            <a:schemeClr val="accent1"/>
-          </a:lnRef>
-          <a:fillRef idx="3">
-            <a:schemeClr val="accent1"/>
-          </a:fillRef>
-          <a:effectRef idx="2">
-            <a:schemeClr val="accent1"/>
-          </a:effectRef>
-          <a:fontRef idx="minor">
-            <a:schemeClr val="lt1"/>
-          </a:fontRef>
-        </p:style>
-        <p:txBody>
-          <a:bodyPr rtlCol="0" anchor="ctr" wrap="square"/>
-          <a:lstStyle/>
-          <a:p>
-            <a:pPr algn="ctr"/>
-            <a:r>
-              <a:rPr sz="1100" b="1">
-                <a:solidFill>
-                  <a:srgbClr val="007A6E"/>
-                </a:solidFill>
-                <a:latin typeface="メイリオ"/>
-                <a:ea typeface="メイリオ"/>
-              </a:rPr>
-              <a:t>2〜3</a:t>
-            </a:r>
-          </a:p>
-          <a:p>
-            <a:pPr algn="ctr"/>
-            <a:r>
-              <a:rPr sz="1100" b="1">
-                <a:solidFill>
-                  <a:srgbClr val="007A6E"/>
-                </a:solidFill>
-                <a:latin typeface="メイリオ"/>
-                <a:ea typeface="メイリオ"/>
-              </a:rPr>
-              <a:t>業務フロー</a:t>
-            </a:r>
-          </a:p>
-          <a:p/>
-          <a:p>
-            <a:pPr algn="ctr"/>
-            <a:r>
-              <a:rPr sz="900" b="0">
-                <a:solidFill>
-                  <a:srgbClr val="333333"/>
-                </a:solidFill>
-                <a:latin typeface="メイリオ"/>
-                <a:ea typeface="メイリオ"/>
-              </a:rPr>
-              <a:t>8/24・8/27</a:t>
-            </a:r>
-          </a:p>
-          <a:p>
-            <a:pPr algn="ctr"/>
-            <a:r>
-              <a:rPr sz="900" b="0">
-                <a:solidFill>
-                  <a:srgbClr val="333333"/>
-                </a:solidFill>
-                <a:latin typeface="メイリオ"/>
-                <a:ea typeface="メイリオ"/>
-              </a:rPr>
-              <a:t>管理機能単位</a:t>
-            </a:r>
-          </a:p>
-        </p:txBody>
-      </p:sp>
-      <p:sp>
-        <p:nvSpPr>
-          <p:cNvPr id="7" name="Right Arrow 6"/>
-          <p:cNvSpPr/>
-          <p:nvPr/>
-        </p:nvSpPr>
-        <p:spPr>
-          <a:xfrm>
-            <a:off x="3790000" y="1500000"/>
-            <a:ext cx="160000" cy="180000"/>
-          </a:xfrm>
-          <a:prstGeom prst="rightArrow">
-            <a:avLst/>
-          </a:prstGeom>
-          <a:solidFill>
-            <a:srgbClr val="00A693"/>
-          </a:solidFill>
-          <a:ln>
-            <a:noFill/>
-          </a:ln>
-        </p:spPr>
-        <p:style>
-          <a:lnRef idx="1">
-            <a:schemeClr val="accent1"/>
-          </a:lnRef>
-          <a:fillRef idx="3">
-            <a:schemeClr val="accent1"/>
-          </a:fillRef>
-          <a:effectRef idx="2">
-            <a:schemeClr val="accent1"/>
-          </a:effectRef>
-          <a:fontRef idx="minor">
-            <a:schemeClr val="lt1"/>
-          </a:fontRef>
-        </p:style>
-        <p:txBody>
-          <a:bodyPr rtlCol="0" anchor="ctr"/>
-          <a:lstStyle/>
-          <a:p>
-            <a:pPr algn="ctr"/>
-          </a:p>
-        </p:txBody>
-      </p:sp>
-      <p:sp>
-        <p:nvSpPr>
-          <p:cNvPr id="8" name="Rounded Rectangle 7"/>
-          <p:cNvSpPr/>
-          <p:nvPr/>
-        </p:nvSpPr>
-        <p:spPr>
-          <a:xfrm>
-            <a:off x="4120000" y="900000"/>
-            <a:ext cx="1500000" cy="1600000"/>
-          </a:xfrm>
-          <a:prstGeom prst="roundRect">
-            <a:avLst/>
-          </a:prstGeom>
-          <a:solidFill>
-            <a:srgbClr val="DEF3F1"/>
-          </a:solidFill>
-          <a:ln w="19050">
-            <a:solidFill>
-              <a:srgbClr val="00A693"/>
-            </a:solidFill>
-          </a:ln>
-        </p:spPr>
-        <p:style>
-          <a:lnRef idx="1">
-            <a:schemeClr val="accent1"/>
-          </a:lnRef>
-          <a:fillRef idx="3">
-            <a:schemeClr val="accent1"/>
-          </a:fillRef>
-          <a:effectRef idx="2">
-            <a:schemeClr val="accent1"/>
-          </a:effectRef>
-          <a:fontRef idx="minor">
-            <a:schemeClr val="lt1"/>
-          </a:fontRef>
-        </p:style>
-        <p:txBody>
-          <a:bodyPr rtlCol="0" anchor="ctr" wrap="square"/>
-          <a:lstStyle/>
-          <a:p>
-            <a:pPr algn="ctr"/>
-            <a:r>
-              <a:rPr sz="1100" b="1">
-                <a:solidFill>
-                  <a:srgbClr val="007A6E"/>
-                </a:solidFill>
-                <a:latin typeface="メイリオ"/>
-                <a:ea typeface="メイリオ"/>
-              </a:rPr>
-              <a:t>4〜5</a:t>
-            </a:r>
-          </a:p>
-          <a:p>
-            <a:pPr algn="ctr"/>
-            <a:r>
-              <a:rPr sz="1100" b="1">
-                <a:solidFill>
-                  <a:srgbClr val="007A6E"/>
-                </a:solidFill>
-                <a:latin typeface="メイリオ"/>
-                <a:ea typeface="メイリオ"/>
-              </a:rPr>
-              <a:t>機能詳細</a:t>
-            </a:r>
-          </a:p>
-          <a:p/>
-          <a:p>
-            <a:pPr algn="ctr"/>
-            <a:r>
-              <a:rPr sz="900" b="0">
-                <a:solidFill>
-                  <a:srgbClr val="333333"/>
-                </a:solidFill>
-                <a:latin typeface="メイリオ"/>
-                <a:ea typeface="メイリオ"/>
-              </a:rPr>
-              <a:t>9/3・9/9</a:t>
-            </a:r>
-          </a:p>
-          <a:p>
-            <a:pPr algn="ctr"/>
-            <a:r>
-              <a:rPr sz="900" b="0">
-                <a:solidFill>
-                  <a:srgbClr val="333333"/>
-                </a:solidFill>
-                <a:latin typeface="メイリオ"/>
-                <a:ea typeface="メイリオ"/>
-              </a:rPr>
-              <a:t>設計書・詳細フロー</a:t>
-            </a:r>
-          </a:p>
-          <a:p>
-            <a:pPr algn="ctr"/>
-            <a:r>
-              <a:rPr sz="900" b="0">
-                <a:solidFill>
-                  <a:srgbClr val="333333"/>
-                </a:solidFill>
-                <a:latin typeface="メイリオ"/>
-                <a:ea typeface="メイリオ"/>
-              </a:rPr>
-              <a:t>でFit&amp;Gap</a:t>
-            </a:r>
-          </a:p>
-        </p:txBody>
-      </p:sp>
-      <p:sp>
-        <p:nvSpPr>
-          <p:cNvPr id="9" name="Right Arrow 8"/>
-          <p:cNvSpPr/>
-          <p:nvPr/>
-        </p:nvSpPr>
-        <p:spPr>
-          <a:xfrm>
-            <a:off x="5650000" y="1500000"/>
-            <a:ext cx="160000" cy="180000"/>
-          </a:xfrm>
-          <a:prstGeom prst="rightArrow">
-            <a:avLst/>
-          </a:prstGeom>
-          <a:solidFill>
-            <a:srgbClr val="00A693"/>
-          </a:solidFill>
-          <a:ln>
-            <a:noFill/>
-          </a:ln>
-        </p:spPr>
-        <p:style>
-          <a:lnRef idx="1">
-            <a:schemeClr val="accent1"/>
-          </a:lnRef>
-          <a:fillRef idx="3">
-            <a:schemeClr val="accent1"/>
-          </a:fillRef>
-          <a:effectRef idx="2">
-            <a:schemeClr val="accent1"/>
-          </a:effectRef>
-          <a:fontRef idx="minor">
-            <a:schemeClr val="lt1"/>
-          </a:fontRef>
-        </p:style>
-        <p:txBody>
-          <a:bodyPr rtlCol="0" anchor="ctr"/>
-          <a:lstStyle/>
-          <a:p>
-            <a:pPr algn="ctr"/>
-          </a:p>
-        </p:txBody>
-      </p:sp>
-      <p:sp>
-        <p:nvSpPr>
-          <p:cNvPr id="10" name="Rounded Rectangle 9"/>
-          <p:cNvSpPr/>
-          <p:nvPr/>
-        </p:nvSpPr>
-        <p:spPr>
-          <a:xfrm>
-            <a:off x="5980000" y="900000"/>
-            <a:ext cx="1500000" cy="1600000"/>
-          </a:xfrm>
-          <a:prstGeom prst="roundRect">
-            <a:avLst/>
-          </a:prstGeom>
-          <a:solidFill>
-            <a:srgbClr val="DEF3F1"/>
-          </a:solidFill>
-          <a:ln w="19050">
-            <a:solidFill>
-              <a:srgbClr val="00A693"/>
-            </a:solidFill>
-          </a:ln>
-        </p:spPr>
-        <p:style>
-          <a:lnRef idx="1">
-            <a:schemeClr val="accent1"/>
-          </a:lnRef>
-          <a:fillRef idx="3">
-            <a:schemeClr val="accent1"/>
-          </a:fillRef>
-          <a:effectRef idx="2">
-            <a:schemeClr val="accent1"/>
-          </a:effectRef>
-          <a:fontRef idx="minor">
-            <a:schemeClr val="lt1"/>
-          </a:fontRef>
-        </p:style>
-        <p:txBody>
-          <a:bodyPr rtlCol="0" anchor="ctr" wrap="square"/>
-          <a:lstStyle/>
-          <a:p>
-            <a:pPr algn="ctr"/>
-            <a:r>
-              <a:rPr sz="1100" b="1">
-                <a:solidFill>
-                  <a:srgbClr val="007A6E"/>
-                </a:solidFill>
-                <a:latin typeface="メイリオ"/>
-                <a:ea typeface="メイリオ"/>
-              </a:rPr>
-              <a:t>6</a:t>
-            </a:r>
-          </a:p>
-          <a:p>
-            <a:pPr algn="ctr"/>
-            <a:r>
-              <a:rPr sz="1100" b="1">
-                <a:solidFill>
-                  <a:srgbClr val="007A6E"/>
-                </a:solidFill>
-                <a:latin typeface="メイリオ"/>
-                <a:ea typeface="メイリオ"/>
-              </a:rPr>
-              <a:t>非機能</a:t>
-            </a:r>
-          </a:p>
-          <a:p/>
-          <a:p>
-            <a:pPr algn="ctr"/>
-            <a:r>
-              <a:rPr sz="900" b="0">
-                <a:solidFill>
-                  <a:srgbClr val="333333"/>
-                </a:solidFill>
-                <a:latin typeface="メイリオ"/>
-                <a:ea typeface="メイリオ"/>
-              </a:rPr>
-              <a:t>9/16</a:t>
-            </a:r>
-          </a:p>
-          <a:p>
-            <a:pPr algn="ctr"/>
-            <a:r>
-              <a:rPr sz="900" b="0">
-                <a:solidFill>
-                  <a:srgbClr val="333333"/>
-                </a:solidFill>
-                <a:latin typeface="メイリオ"/>
-                <a:ea typeface="メイリオ"/>
-              </a:rPr>
-              <a:t>性能・運用等</a:t>
-            </a:r>
-          </a:p>
-        </p:txBody>
-      </p:sp>
-      <p:sp>
-        <p:nvSpPr>
-          <p:cNvPr id="11" name="Right Arrow 10"/>
-          <p:cNvSpPr/>
-          <p:nvPr/>
-        </p:nvSpPr>
-        <p:spPr>
-          <a:xfrm>
-            <a:off x="7510000" y="1500000"/>
-            <a:ext cx="160000" cy="180000"/>
-          </a:xfrm>
-          <a:prstGeom prst="rightArrow">
-            <a:avLst/>
-          </a:prstGeom>
-          <a:solidFill>
-            <a:srgbClr val="00A693"/>
-          </a:solidFill>
-          <a:ln>
-            <a:noFill/>
-          </a:ln>
-        </p:spPr>
-        <p:style>
-          <a:lnRef idx="1">
-            <a:schemeClr val="accent1"/>
-          </a:lnRef>
-          <a:fillRef idx="3">
-            <a:schemeClr val="accent1"/>
-          </a:fillRef>
-          <a:effectRef idx="2">
-            <a:schemeClr val="accent1"/>
-          </a:effectRef>
-          <a:fontRef idx="minor">
-            <a:schemeClr val="lt1"/>
-          </a:fontRef>
-        </p:style>
-        <p:txBody>
-          <a:bodyPr rtlCol="0" anchor="ctr"/>
-          <a:lstStyle/>
-          <a:p>
-            <a:pPr algn="ctr"/>
-          </a:p>
-        </p:txBody>
-      </p:sp>
-      <p:sp>
-        <p:nvSpPr>
-          <p:cNvPr id="12" name="Rounded Rectangle 11"/>
-          <p:cNvSpPr/>
-          <p:nvPr/>
-        </p:nvSpPr>
-        <p:spPr>
-          <a:xfrm>
-            <a:off x="7840000" y="900000"/>
-            <a:ext cx="1500000" cy="1600000"/>
-          </a:xfrm>
-          <a:prstGeom prst="roundRect">
-            <a:avLst/>
-          </a:prstGeom>
-          <a:solidFill>
-            <a:srgbClr val="DEF3F1"/>
-          </a:solidFill>
-          <a:ln w="19050">
-            <a:solidFill>
-              <a:srgbClr val="00A693"/>
-            </a:solidFill>
-          </a:ln>
-        </p:spPr>
-        <p:style>
-          <a:lnRef idx="1">
-            <a:schemeClr val="accent1"/>
-          </a:lnRef>
-          <a:fillRef idx="3">
-            <a:schemeClr val="accent1"/>
-          </a:fillRef>
-          <a:effectRef idx="2">
-            <a:schemeClr val="accent1"/>
-          </a:effectRef>
-          <a:fontRef idx="minor">
-            <a:schemeClr val="lt1"/>
-          </a:fontRef>
-        </p:style>
-        <p:txBody>
-          <a:bodyPr rtlCol="0" anchor="ctr" wrap="square"/>
-          <a:lstStyle/>
-          <a:p>
-            <a:pPr algn="ctr"/>
-            <a:r>
-              <a:rPr sz="1100" b="1">
-                <a:solidFill>
-                  <a:srgbClr val="007A6E"/>
-                </a:solidFill>
-                <a:latin typeface="メイリオ"/>
-                <a:ea typeface="メイリオ"/>
-              </a:rPr>
-              <a:t>7〜8</a:t>
-            </a:r>
-          </a:p>
-          <a:p>
-            <a:pPr algn="ctr"/>
-            <a:r>
-              <a:rPr sz="1100" b="1">
-                <a:solidFill>
-                  <a:srgbClr val="007A6E"/>
-                </a:solidFill>
-                <a:latin typeface="メイリオ"/>
-                <a:ea typeface="メイリオ"/>
-              </a:rPr>
-              <a:t>まとめ・納品</a:t>
-            </a:r>
-          </a:p>
-          <a:p/>
-          <a:p>
-            <a:pPr algn="ctr"/>
-            <a:r>
-              <a:rPr sz="900" b="0">
-                <a:solidFill>
-                  <a:srgbClr val="333333"/>
-                </a:solidFill>
-                <a:latin typeface="メイリオ"/>
-                <a:ea typeface="メイリオ"/>
-              </a:rPr>
-              <a:t>9/24・9/29</a:t>
-            </a:r>
-          </a:p>
-          <a:p>
-            <a:pPr algn="ctr"/>
-            <a:r>
-              <a:rPr sz="900" b="0">
-                <a:solidFill>
-                  <a:srgbClr val="333333"/>
-                </a:solidFill>
-                <a:latin typeface="メイリオ"/>
-                <a:ea typeface="メイリオ"/>
-              </a:rPr>
-              <a:t>見積り／ご検収</a:t>
-            </a:r>
-          </a:p>
-        </p:txBody>
-      </p:sp>
-      <p:sp>
-        <p:nvSpPr>
-          <p:cNvPr id="13" name="Rounded Rectangle 12"/>
-          <p:cNvSpPr/>
-          <p:nvPr/>
-        </p:nvSpPr>
-        <p:spPr>
-          <a:xfrm>
-            <a:off x="500000" y="2900000"/>
-            <a:ext cx="1800000" cy="550000"/>
-          </a:xfrm>
-          <a:prstGeom prst="roundRect">
-            <a:avLst/>
-          </a:prstGeom>
-          <a:solidFill>
-            <a:srgbClr val="00A693"/>
-          </a:solidFill>
-          <a:ln>
-            <a:noFill/>
-          </a:ln>
-        </p:spPr>
-        <p:style>
-          <a:lnRef idx="1">
-            <a:schemeClr val="accent1"/>
-          </a:lnRef>
-          <a:fillRef idx="3">
-            <a:schemeClr val="accent1"/>
-          </a:fillRef>
-          <a:effectRef idx="2">
-            <a:schemeClr val="accent1"/>
-          </a:effectRef>
-          <a:fontRef idx="minor">
-            <a:schemeClr val="lt1"/>
-          </a:fontRef>
-        </p:style>
-        <p:txBody>
-          <a:bodyPr rtlCol="0" anchor="ctr"/>
-          <a:lstStyle/>
-          <a:p>
-            <a:pPr algn="ctr"/>
-            <a:r>
-              <a:rPr sz="1200" b="1">
-                <a:solidFill>
-                  <a:srgbClr val="FFFFFF"/>
-                </a:solidFill>
-                <a:latin typeface="メイリオ"/>
-                <a:ea typeface="メイリオ"/>
-              </a:rPr>
-              <a:t>業務フロー</a:t>
-            </a:r>
-          </a:p>
-        </p:txBody>
-      </p:sp>
-      <p:sp>
-        <p:nvSpPr>
-          <p:cNvPr id="14" name="TextBox 13"/>
-          <p:cNvSpPr txBox="1"/>
-          <p:nvPr/>
-        </p:nvSpPr>
-        <p:spPr>
-          <a:xfrm>
-            <a:off x="2500000" y="3000000"/>
-            <a:ext cx="6800000" cy="450000"/>
+            <a:off x="420000" y="540000"/>
+            <a:ext cx="9200000" cy="280000"/>
           </a:xfrm>
           <a:prstGeom prst="rect">
             <a:avLst/>
@@ -9074,81 +7538,1246 @@
           <a:p>
             <a:pPr algn="l"/>
             <a:r>
-              <a:rPr sz="1300" b="0">
+              <a:rPr sz="1100" b="0">
                 <a:solidFill>
-                  <a:srgbClr val="333333"/>
+                  <a:srgbClr val="666666"/>
                 </a:solidFill>
                 <a:latin typeface="メイリオ"/>
                 <a:ea typeface="メイリオ"/>
               </a:rPr>
-              <a:t>概略フローを用いて確認。登場人物・関連システムも本工程で整理</a:t>
-            </a:r>
-          </a:p>
-        </p:txBody>
-      </p:sp>
-      <p:sp>
-        <p:nvSpPr>
-          <p:cNvPr id="15" name="Rounded Rectangle 14"/>
-          <p:cNvSpPr/>
+              <a:t>要件定義を進めるためのインプットです。サンプル／マスキング可のものがあればその旨ご相談ください。</a:t>
+            </a:r>
+          </a:p>
+        </p:txBody>
+      </p:sp>
+      <p:graphicFrame>
+        <p:nvGraphicFramePr>
+          <p:cNvPr id="5" name="Table 4"/>
+          <p:cNvGraphicFramePr>
+            <a:graphicFrameLocks noGrp="1"/>
+          </p:cNvGraphicFramePr>
+          <p:nvPr/>
+        </p:nvGraphicFramePr>
+        <p:xfrm>
+          <a:off x="300000" y="950000"/>
+          <a:ext cx="9300000" cy="3800000"/>
+        </p:xfrm>
+        <a:graphic>
+          <a:graphicData uri="http://schemas.openxmlformats.org/drawingml/2006/table">
+            <a:tbl>
+              <a:tblPr firstRow="1" bandRow="1">
+                <a:tableStyleId>{5C22544A-7EE6-4342-B048-85BDC9FD1C3A}</a:tableStyleId>
+              </a:tblPr>
+              <a:tblGrid>
+                <a:gridCol w="600000"/>
+                <a:gridCol w="1300000"/>
+                <a:gridCol w="4200000"/>
+                <a:gridCol w="3200000"/>
+              </a:tblGrid>
+              <a:tr h="633333">
+                <a:tc>
+                  <a:txBody>
+                    <a:bodyPr wrap="square"/>
+                    <a:lstStyle/>
+                    <a:p>
+                      <a:pPr algn="ctr"/>
+                      <a:r>
+                        <a:rPr sz="1100" b="1">
+                          <a:solidFill>
+                            <a:srgbClr val="FFFFFF"/>
+                          </a:solidFill>
+                          <a:latin typeface="メイリオ"/>
+                          <a:ea typeface="メイリオ"/>
+                        </a:rPr>
+                        <a:t>No</a:t>
+                      </a:r>
+                    </a:p>
+                  </a:txBody>
+                  <a:tcPr anchor="ctr">
+                    <a:solidFill>
+                      <a:srgbClr val="00A693"/>
+                    </a:solidFill>
+                    <a:lnL w="9525" cap="flat" cmpd="sng" algn="ctr">
+                      <a:solidFill>
+                        <a:srgbClr val="007A6E"/>
+                      </a:solidFill>
+                      <a:prstDash val="solid"/>
+                    </a:lnL>
+                    <a:lnR w="9525" cap="flat" cmpd="sng" algn="ctr">
+                      <a:solidFill>
+                        <a:srgbClr val="007A6E"/>
+                      </a:solidFill>
+                      <a:prstDash val="solid"/>
+                    </a:lnR>
+                    <a:lnT w="9525" cap="flat" cmpd="sng" algn="ctr">
+                      <a:solidFill>
+                        <a:srgbClr val="007A6E"/>
+                      </a:solidFill>
+                      <a:prstDash val="solid"/>
+                    </a:lnT>
+                    <a:lnB w="9525" cap="flat" cmpd="sng" algn="ctr">
+                      <a:solidFill>
+                        <a:srgbClr val="007A6E"/>
+                      </a:solidFill>
+                      <a:prstDash val="solid"/>
+                    </a:lnB>
+                  </a:tcPr>
+                </a:tc>
+                <a:tc>
+                  <a:txBody>
+                    <a:bodyPr wrap="square"/>
+                    <a:lstStyle/>
+                    <a:p>
+                      <a:pPr algn="ctr"/>
+                      <a:r>
+                        <a:rPr sz="1100" b="1">
+                          <a:solidFill>
+                            <a:srgbClr val="FFFFFF"/>
+                          </a:solidFill>
+                          <a:latin typeface="メイリオ"/>
+                          <a:ea typeface="メイリオ"/>
+                        </a:rPr>
+                        <a:t>必要時期</a:t>
+                      </a:r>
+                    </a:p>
+                  </a:txBody>
+                  <a:tcPr anchor="ctr">
+                    <a:solidFill>
+                      <a:srgbClr val="00A693"/>
+                    </a:solidFill>
+                    <a:lnL w="9525" cap="flat" cmpd="sng" algn="ctr">
+                      <a:solidFill>
+                        <a:srgbClr val="007A6E"/>
+                      </a:solidFill>
+                      <a:prstDash val="solid"/>
+                    </a:lnL>
+                    <a:lnR w="9525" cap="flat" cmpd="sng" algn="ctr">
+                      <a:solidFill>
+                        <a:srgbClr val="007A6E"/>
+                      </a:solidFill>
+                      <a:prstDash val="solid"/>
+                    </a:lnR>
+                    <a:lnT w="9525" cap="flat" cmpd="sng" algn="ctr">
+                      <a:solidFill>
+                        <a:srgbClr val="007A6E"/>
+                      </a:solidFill>
+                      <a:prstDash val="solid"/>
+                    </a:lnT>
+                    <a:lnB w="9525" cap="flat" cmpd="sng" algn="ctr">
+                      <a:solidFill>
+                        <a:srgbClr val="007A6E"/>
+                      </a:solidFill>
+                      <a:prstDash val="solid"/>
+                    </a:lnB>
+                  </a:tcPr>
+                </a:tc>
+                <a:tc>
+                  <a:txBody>
+                    <a:bodyPr wrap="square"/>
+                    <a:lstStyle/>
+                    <a:p>
+                      <a:pPr algn="ctr"/>
+                      <a:r>
+                        <a:rPr sz="1100" b="1">
+                          <a:solidFill>
+                            <a:srgbClr val="FFFFFF"/>
+                          </a:solidFill>
+                          <a:latin typeface="メイリオ"/>
+                          <a:ea typeface="メイリオ"/>
+                        </a:rPr>
+                        <a:t>ご依頼内容</a:t>
+                      </a:r>
+                    </a:p>
+                  </a:txBody>
+                  <a:tcPr anchor="ctr">
+                    <a:solidFill>
+                      <a:srgbClr val="00A693"/>
+                    </a:solidFill>
+                    <a:lnL w="9525" cap="flat" cmpd="sng" algn="ctr">
+                      <a:solidFill>
+                        <a:srgbClr val="007A6E"/>
+                      </a:solidFill>
+                      <a:prstDash val="solid"/>
+                    </a:lnL>
+                    <a:lnR w="9525" cap="flat" cmpd="sng" algn="ctr">
+                      <a:solidFill>
+                        <a:srgbClr val="007A6E"/>
+                      </a:solidFill>
+                      <a:prstDash val="solid"/>
+                    </a:lnR>
+                    <a:lnT w="9525" cap="flat" cmpd="sng" algn="ctr">
+                      <a:solidFill>
+                        <a:srgbClr val="007A6E"/>
+                      </a:solidFill>
+                      <a:prstDash val="solid"/>
+                    </a:lnT>
+                    <a:lnB w="9525" cap="flat" cmpd="sng" algn="ctr">
+                      <a:solidFill>
+                        <a:srgbClr val="007A6E"/>
+                      </a:solidFill>
+                      <a:prstDash val="solid"/>
+                    </a:lnB>
+                  </a:tcPr>
+                </a:tc>
+                <a:tc>
+                  <a:txBody>
+                    <a:bodyPr wrap="square"/>
+                    <a:lstStyle/>
+                    <a:p>
+                      <a:pPr algn="ctr"/>
+                      <a:r>
+                        <a:rPr sz="1100" b="1">
+                          <a:solidFill>
+                            <a:srgbClr val="FFFFFF"/>
+                          </a:solidFill>
+                          <a:latin typeface="メイリオ"/>
+                          <a:ea typeface="メイリオ"/>
+                        </a:rPr>
+                        <a:t>用途</a:t>
+                      </a:r>
+                    </a:p>
+                  </a:txBody>
+                  <a:tcPr anchor="ctr">
+                    <a:solidFill>
+                      <a:srgbClr val="00A693"/>
+                    </a:solidFill>
+                    <a:lnL w="9525" cap="flat" cmpd="sng" algn="ctr">
+                      <a:solidFill>
+                        <a:srgbClr val="007A6E"/>
+                      </a:solidFill>
+                      <a:prstDash val="solid"/>
+                    </a:lnL>
+                    <a:lnR w="9525" cap="flat" cmpd="sng" algn="ctr">
+                      <a:solidFill>
+                        <a:srgbClr val="007A6E"/>
+                      </a:solidFill>
+                      <a:prstDash val="solid"/>
+                    </a:lnR>
+                    <a:lnT w="9525" cap="flat" cmpd="sng" algn="ctr">
+                      <a:solidFill>
+                        <a:srgbClr val="007A6E"/>
+                      </a:solidFill>
+                      <a:prstDash val="solid"/>
+                    </a:lnT>
+                    <a:lnB w="9525" cap="flat" cmpd="sng" algn="ctr">
+                      <a:solidFill>
+                        <a:srgbClr val="007A6E"/>
+                      </a:solidFill>
+                      <a:prstDash val="solid"/>
+                    </a:lnB>
+                  </a:tcPr>
+                </a:tc>
+              </a:tr>
+              <a:tr h="633333">
+                <a:tc>
+                  <a:txBody>
+                    <a:bodyPr wrap="square"/>
+                    <a:lstStyle/>
+                    <a:p>
+                      <a:pPr algn="ctr"/>
+                      <a:r>
+                        <a:rPr sz="1000" b="0">
+                          <a:solidFill>
+                            <a:srgbClr val="333333"/>
+                          </a:solidFill>
+                          <a:latin typeface="メイリオ"/>
+                          <a:ea typeface="メイリオ"/>
+                        </a:rPr>
+                        <a:t>1</a:t>
+                      </a:r>
+                    </a:p>
+                  </a:txBody>
+                  <a:tcPr anchor="ctr">
+                    <a:solidFill>
+                      <a:srgbClr val="F0FAF8"/>
+                    </a:solidFill>
+                    <a:lnL w="6350" cap="flat" cmpd="sng" algn="ctr">
+                      <a:solidFill>
+                        <a:srgbClr val="CCCCCC"/>
+                      </a:solidFill>
+                      <a:prstDash val="solid"/>
+                    </a:lnL>
+                    <a:lnR w="6350" cap="flat" cmpd="sng" algn="ctr">
+                      <a:solidFill>
+                        <a:srgbClr val="CCCCCC"/>
+                      </a:solidFill>
+                      <a:prstDash val="solid"/>
+                    </a:lnR>
+                    <a:lnT w="6350" cap="flat" cmpd="sng" algn="ctr">
+                      <a:solidFill>
+                        <a:srgbClr val="CCCCCC"/>
+                      </a:solidFill>
+                      <a:prstDash val="solid"/>
+                    </a:lnT>
+                    <a:lnB w="6350" cap="flat" cmpd="sng" algn="ctr">
+                      <a:solidFill>
+                        <a:srgbClr val="CCCCCC"/>
+                      </a:solidFill>
+                      <a:prstDash val="solid"/>
+                    </a:lnB>
+                  </a:tcPr>
+                </a:tc>
+                <a:tc>
+                  <a:txBody>
+                    <a:bodyPr wrap="square"/>
+                    <a:lstStyle/>
+                    <a:p>
+                      <a:pPr algn="ctr"/>
+                      <a:r>
+                        <a:rPr sz="1000" b="0">
+                          <a:solidFill>
+                            <a:srgbClr val="333333"/>
+                          </a:solidFill>
+                          <a:latin typeface="メイリオ"/>
+                          <a:ea typeface="メイリオ"/>
+                        </a:rPr>
+                        <a:t>8/26まで</a:t>
+                      </a:r>
+                    </a:p>
+                  </a:txBody>
+                  <a:tcPr anchor="ctr">
+                    <a:solidFill>
+                      <a:srgbClr val="F0FAF8"/>
+                    </a:solidFill>
+                    <a:lnL w="6350" cap="flat" cmpd="sng" algn="ctr">
+                      <a:solidFill>
+                        <a:srgbClr val="CCCCCC"/>
+                      </a:solidFill>
+                      <a:prstDash val="solid"/>
+                    </a:lnL>
+                    <a:lnR w="6350" cap="flat" cmpd="sng" algn="ctr">
+                      <a:solidFill>
+                        <a:srgbClr val="CCCCCC"/>
+                      </a:solidFill>
+                      <a:prstDash val="solid"/>
+                    </a:lnR>
+                    <a:lnT w="6350" cap="flat" cmpd="sng" algn="ctr">
+                      <a:solidFill>
+                        <a:srgbClr val="CCCCCC"/>
+                      </a:solidFill>
+                      <a:prstDash val="solid"/>
+                    </a:lnT>
+                    <a:lnB w="6350" cap="flat" cmpd="sng" algn="ctr">
+                      <a:solidFill>
+                        <a:srgbClr val="CCCCCC"/>
+                      </a:solidFill>
+                      <a:prstDash val="solid"/>
+                    </a:lnB>
+                  </a:tcPr>
+                </a:tc>
+                <a:tc>
+                  <a:txBody>
+                    <a:bodyPr wrap="square"/>
+                    <a:lstStyle/>
+                    <a:p>
+                      <a:pPr algn="l"/>
+                      <a:r>
+                        <a:rPr sz="1000" b="1">
+                          <a:solidFill>
+                            <a:srgbClr val="C00000"/>
+                          </a:solidFill>
+                          <a:latin typeface="メイリオ"/>
+                          <a:ea typeface="メイリオ"/>
+                        </a:rPr>
+                        <a:t>取引先マスタ・配送先マスタのサンプルデータ</a:t>
+                      </a:r>
+                    </a:p>
+                  </a:txBody>
+                  <a:tcPr anchor="ctr">
+                    <a:solidFill>
+                      <a:srgbClr val="F0FAF8"/>
+                    </a:solidFill>
+                    <a:lnL w="6350" cap="flat" cmpd="sng" algn="ctr">
+                      <a:solidFill>
+                        <a:srgbClr val="CCCCCC"/>
+                      </a:solidFill>
+                      <a:prstDash val="solid"/>
+                    </a:lnL>
+                    <a:lnR w="6350" cap="flat" cmpd="sng" algn="ctr">
+                      <a:solidFill>
+                        <a:srgbClr val="CCCCCC"/>
+                      </a:solidFill>
+                      <a:prstDash val="solid"/>
+                    </a:lnR>
+                    <a:lnT w="6350" cap="flat" cmpd="sng" algn="ctr">
+                      <a:solidFill>
+                        <a:srgbClr val="CCCCCC"/>
+                      </a:solidFill>
+                      <a:prstDash val="solid"/>
+                    </a:lnT>
+                    <a:lnB w="6350" cap="flat" cmpd="sng" algn="ctr">
+                      <a:solidFill>
+                        <a:srgbClr val="CCCCCC"/>
+                      </a:solidFill>
+                      <a:prstDash val="solid"/>
+                    </a:lnB>
+                  </a:tcPr>
+                </a:tc>
+                <a:tc>
+                  <a:txBody>
+                    <a:bodyPr wrap="square"/>
+                    <a:lstStyle/>
+                    <a:p>
+                      <a:pPr algn="l"/>
+                      <a:r>
+                        <a:rPr sz="1000" b="0">
+                          <a:solidFill>
+                            <a:srgbClr val="333333"/>
+                          </a:solidFill>
+                          <a:latin typeface="メイリオ"/>
+                          <a:ea typeface="メイリオ"/>
+                        </a:rPr>
+                        <a:t>登場人物・会員／配送の業務整理</a:t>
+                      </a:r>
+                    </a:p>
+                  </a:txBody>
+                  <a:tcPr anchor="ctr">
+                    <a:solidFill>
+                      <a:srgbClr val="F0FAF8"/>
+                    </a:solidFill>
+                    <a:lnL w="6350" cap="flat" cmpd="sng" algn="ctr">
+                      <a:solidFill>
+                        <a:srgbClr val="CCCCCC"/>
+                      </a:solidFill>
+                      <a:prstDash val="solid"/>
+                    </a:lnL>
+                    <a:lnR w="6350" cap="flat" cmpd="sng" algn="ctr">
+                      <a:solidFill>
+                        <a:srgbClr val="CCCCCC"/>
+                      </a:solidFill>
+                      <a:prstDash val="solid"/>
+                    </a:lnR>
+                    <a:lnT w="6350" cap="flat" cmpd="sng" algn="ctr">
+                      <a:solidFill>
+                        <a:srgbClr val="CCCCCC"/>
+                      </a:solidFill>
+                      <a:prstDash val="solid"/>
+                    </a:lnT>
+                    <a:lnB w="6350" cap="flat" cmpd="sng" algn="ctr">
+                      <a:solidFill>
+                        <a:srgbClr val="CCCCCC"/>
+                      </a:solidFill>
+                      <a:prstDash val="solid"/>
+                    </a:lnB>
+                  </a:tcPr>
+                </a:tc>
+              </a:tr>
+              <a:tr h="633333">
+                <a:tc>
+                  <a:txBody>
+                    <a:bodyPr wrap="square"/>
+                    <a:lstStyle/>
+                    <a:p>
+                      <a:pPr algn="ctr"/>
+                      <a:r>
+                        <a:rPr sz="1000" b="0">
+                          <a:solidFill>
+                            <a:srgbClr val="333333"/>
+                          </a:solidFill>
+                          <a:latin typeface="メイリオ"/>
+                          <a:ea typeface="メイリオ"/>
+                        </a:rPr>
+                        <a:t>2</a:t>
+                      </a:r>
+                    </a:p>
+                  </a:txBody>
+                  <a:tcPr anchor="ctr">
+                    <a:solidFill>
+                      <a:srgbClr val="FFFFFF"/>
+                    </a:solidFill>
+                    <a:lnL w="6350" cap="flat" cmpd="sng" algn="ctr">
+                      <a:solidFill>
+                        <a:srgbClr val="CCCCCC"/>
+                      </a:solidFill>
+                      <a:prstDash val="solid"/>
+                    </a:lnL>
+                    <a:lnR w="6350" cap="flat" cmpd="sng" algn="ctr">
+                      <a:solidFill>
+                        <a:srgbClr val="CCCCCC"/>
+                      </a:solidFill>
+                      <a:prstDash val="solid"/>
+                    </a:lnR>
+                    <a:lnT w="6350" cap="flat" cmpd="sng" algn="ctr">
+                      <a:solidFill>
+                        <a:srgbClr val="CCCCCC"/>
+                      </a:solidFill>
+                      <a:prstDash val="solid"/>
+                    </a:lnT>
+                    <a:lnB w="6350" cap="flat" cmpd="sng" algn="ctr">
+                      <a:solidFill>
+                        <a:srgbClr val="CCCCCC"/>
+                      </a:solidFill>
+                      <a:prstDash val="solid"/>
+                    </a:lnB>
+                  </a:tcPr>
+                </a:tc>
+                <a:tc>
+                  <a:txBody>
+                    <a:bodyPr wrap="square"/>
+                    <a:lstStyle/>
+                    <a:p>
+                      <a:pPr algn="ctr"/>
+                      <a:r>
+                        <a:rPr sz="1000" b="0">
+                          <a:solidFill>
+                            <a:srgbClr val="333333"/>
+                          </a:solidFill>
+                          <a:latin typeface="メイリオ"/>
+                          <a:ea typeface="メイリオ"/>
+                        </a:rPr>
+                        <a:t>8/31まで</a:t>
+                      </a:r>
+                    </a:p>
+                  </a:txBody>
+                  <a:tcPr anchor="ctr">
+                    <a:solidFill>
+                      <a:srgbClr val="FFFFFF"/>
+                    </a:solidFill>
+                    <a:lnL w="6350" cap="flat" cmpd="sng" algn="ctr">
+                      <a:solidFill>
+                        <a:srgbClr val="CCCCCC"/>
+                      </a:solidFill>
+                      <a:prstDash val="solid"/>
+                    </a:lnL>
+                    <a:lnR w="6350" cap="flat" cmpd="sng" algn="ctr">
+                      <a:solidFill>
+                        <a:srgbClr val="CCCCCC"/>
+                      </a:solidFill>
+                      <a:prstDash val="solid"/>
+                    </a:lnR>
+                    <a:lnT w="6350" cap="flat" cmpd="sng" algn="ctr">
+                      <a:solidFill>
+                        <a:srgbClr val="CCCCCC"/>
+                      </a:solidFill>
+                      <a:prstDash val="solid"/>
+                    </a:lnT>
+                    <a:lnB w="6350" cap="flat" cmpd="sng" algn="ctr">
+                      <a:solidFill>
+                        <a:srgbClr val="CCCCCC"/>
+                      </a:solidFill>
+                      <a:prstDash val="solid"/>
+                    </a:lnB>
+                  </a:tcPr>
+                </a:tc>
+                <a:tc>
+                  <a:txBody>
+                    <a:bodyPr wrap="square"/>
+                    <a:lstStyle/>
+                    <a:p>
+                      <a:pPr algn="l"/>
+                      <a:r>
+                        <a:rPr sz="1000" b="1">
+                          <a:solidFill>
+                            <a:srgbClr val="C00000"/>
+                          </a:solidFill>
+                          <a:latin typeface="メイリオ"/>
+                          <a:ea typeface="メイリオ"/>
+                        </a:rPr>
+                        <a:t>商品情報CSVのフォーマット及び項目定義</a:t>
+                      </a:r>
+                    </a:p>
+                  </a:txBody>
+                  <a:tcPr anchor="ctr">
+                    <a:solidFill>
+                      <a:srgbClr val="FFFFFF"/>
+                    </a:solidFill>
+                    <a:lnL w="6350" cap="flat" cmpd="sng" algn="ctr">
+                      <a:solidFill>
+                        <a:srgbClr val="CCCCCC"/>
+                      </a:solidFill>
+                      <a:prstDash val="solid"/>
+                    </a:lnL>
+                    <a:lnR w="6350" cap="flat" cmpd="sng" algn="ctr">
+                      <a:solidFill>
+                        <a:srgbClr val="CCCCCC"/>
+                      </a:solidFill>
+                      <a:prstDash val="solid"/>
+                    </a:lnR>
+                    <a:lnT w="6350" cap="flat" cmpd="sng" algn="ctr">
+                      <a:solidFill>
+                        <a:srgbClr val="CCCCCC"/>
+                      </a:solidFill>
+                      <a:prstDash val="solid"/>
+                    </a:lnT>
+                    <a:lnB w="6350" cap="flat" cmpd="sng" algn="ctr">
+                      <a:solidFill>
+                        <a:srgbClr val="CCCCCC"/>
+                      </a:solidFill>
+                      <a:prstDash val="solid"/>
+                    </a:lnB>
+                  </a:tcPr>
+                </a:tc>
+                <a:tc>
+                  <a:txBody>
+                    <a:bodyPr wrap="square"/>
+                    <a:lstStyle/>
+                    <a:p>
+                      <a:pPr algn="l"/>
+                      <a:r>
+                        <a:rPr sz="1000" b="0">
+                          <a:solidFill>
+                            <a:srgbClr val="333333"/>
+                          </a:solidFill>
+                          <a:latin typeface="メイリオ"/>
+                          <a:ea typeface="メイリオ"/>
+                        </a:rPr>
+                        <a:t>基幹連携前提・商品外部仕様の整理</a:t>
+                      </a:r>
+                    </a:p>
+                  </a:txBody>
+                  <a:tcPr anchor="ctr">
+                    <a:solidFill>
+                      <a:srgbClr val="FFFFFF"/>
+                    </a:solidFill>
+                    <a:lnL w="6350" cap="flat" cmpd="sng" algn="ctr">
+                      <a:solidFill>
+                        <a:srgbClr val="CCCCCC"/>
+                      </a:solidFill>
+                      <a:prstDash val="solid"/>
+                    </a:lnL>
+                    <a:lnR w="6350" cap="flat" cmpd="sng" algn="ctr">
+                      <a:solidFill>
+                        <a:srgbClr val="CCCCCC"/>
+                      </a:solidFill>
+                      <a:prstDash val="solid"/>
+                    </a:lnR>
+                    <a:lnT w="6350" cap="flat" cmpd="sng" algn="ctr">
+                      <a:solidFill>
+                        <a:srgbClr val="CCCCCC"/>
+                      </a:solidFill>
+                      <a:prstDash val="solid"/>
+                    </a:lnT>
+                    <a:lnB w="6350" cap="flat" cmpd="sng" algn="ctr">
+                      <a:solidFill>
+                        <a:srgbClr val="CCCCCC"/>
+                      </a:solidFill>
+                      <a:prstDash val="solid"/>
+                    </a:lnB>
+                  </a:tcPr>
+                </a:tc>
+              </a:tr>
+              <a:tr h="633333">
+                <a:tc>
+                  <a:txBody>
+                    <a:bodyPr wrap="square"/>
+                    <a:lstStyle/>
+                    <a:p>
+                      <a:pPr algn="ctr"/>
+                      <a:r>
+                        <a:rPr sz="1000" b="0">
+                          <a:solidFill>
+                            <a:srgbClr val="333333"/>
+                          </a:solidFill>
+                          <a:latin typeface="メイリオ"/>
+                          <a:ea typeface="メイリオ"/>
+                        </a:rPr>
+                        <a:t>3</a:t>
+                      </a:r>
+                    </a:p>
+                  </a:txBody>
+                  <a:tcPr anchor="ctr">
+                    <a:solidFill>
+                      <a:srgbClr val="F0FAF8"/>
+                    </a:solidFill>
+                    <a:lnL w="6350" cap="flat" cmpd="sng" algn="ctr">
+                      <a:solidFill>
+                        <a:srgbClr val="CCCCCC"/>
+                      </a:solidFill>
+                      <a:prstDash val="solid"/>
+                    </a:lnL>
+                    <a:lnR w="6350" cap="flat" cmpd="sng" algn="ctr">
+                      <a:solidFill>
+                        <a:srgbClr val="CCCCCC"/>
+                      </a:solidFill>
+                      <a:prstDash val="solid"/>
+                    </a:lnR>
+                    <a:lnT w="6350" cap="flat" cmpd="sng" algn="ctr">
+                      <a:solidFill>
+                        <a:srgbClr val="CCCCCC"/>
+                      </a:solidFill>
+                      <a:prstDash val="solid"/>
+                    </a:lnT>
+                    <a:lnB w="6350" cap="flat" cmpd="sng" algn="ctr">
+                      <a:solidFill>
+                        <a:srgbClr val="CCCCCC"/>
+                      </a:solidFill>
+                      <a:prstDash val="solid"/>
+                    </a:lnB>
+                  </a:tcPr>
+                </a:tc>
+                <a:tc>
+                  <a:txBody>
+                    <a:bodyPr wrap="square"/>
+                    <a:lstStyle/>
+                    <a:p>
+                      <a:pPr algn="ctr"/>
+                      <a:r>
+                        <a:rPr sz="1000" b="0">
+                          <a:solidFill>
+                            <a:srgbClr val="333333"/>
+                          </a:solidFill>
+                          <a:latin typeface="メイリオ"/>
+                          <a:ea typeface="メイリオ"/>
+                        </a:rPr>
+                        <a:t>8/31まで</a:t>
+                      </a:r>
+                    </a:p>
+                  </a:txBody>
+                  <a:tcPr anchor="ctr">
+                    <a:solidFill>
+                      <a:srgbClr val="F0FAF8"/>
+                    </a:solidFill>
+                    <a:lnL w="6350" cap="flat" cmpd="sng" algn="ctr">
+                      <a:solidFill>
+                        <a:srgbClr val="CCCCCC"/>
+                      </a:solidFill>
+                      <a:prstDash val="solid"/>
+                    </a:lnL>
+                    <a:lnR w="6350" cap="flat" cmpd="sng" algn="ctr">
+                      <a:solidFill>
+                        <a:srgbClr val="CCCCCC"/>
+                      </a:solidFill>
+                      <a:prstDash val="solid"/>
+                    </a:lnR>
+                    <a:lnT w="6350" cap="flat" cmpd="sng" algn="ctr">
+                      <a:solidFill>
+                        <a:srgbClr val="CCCCCC"/>
+                      </a:solidFill>
+                      <a:prstDash val="solid"/>
+                    </a:lnT>
+                    <a:lnB w="6350" cap="flat" cmpd="sng" algn="ctr">
+                      <a:solidFill>
+                        <a:srgbClr val="CCCCCC"/>
+                      </a:solidFill>
+                      <a:prstDash val="solid"/>
+                    </a:lnB>
+                  </a:tcPr>
+                </a:tc>
+                <a:tc>
+                  <a:txBody>
+                    <a:bodyPr wrap="square"/>
+                    <a:lstStyle/>
+                    <a:p>
+                      <a:pPr algn="l"/>
+                      <a:r>
+                        <a:rPr sz="1000" b="1">
+                          <a:solidFill>
+                            <a:srgbClr val="C00000"/>
+                          </a:solidFill>
+                          <a:latin typeface="メイリオ"/>
+                          <a:ea typeface="メイリオ"/>
+                        </a:rPr>
+                        <a:t>在庫情報CSVのフォーマット及び項目定義</a:t>
+                      </a:r>
+                    </a:p>
+                  </a:txBody>
+                  <a:tcPr anchor="ctr">
+                    <a:solidFill>
+                      <a:srgbClr val="F0FAF8"/>
+                    </a:solidFill>
+                    <a:lnL w="6350" cap="flat" cmpd="sng" algn="ctr">
+                      <a:solidFill>
+                        <a:srgbClr val="CCCCCC"/>
+                      </a:solidFill>
+                      <a:prstDash val="solid"/>
+                    </a:lnL>
+                    <a:lnR w="6350" cap="flat" cmpd="sng" algn="ctr">
+                      <a:solidFill>
+                        <a:srgbClr val="CCCCCC"/>
+                      </a:solidFill>
+                      <a:prstDash val="solid"/>
+                    </a:lnR>
+                    <a:lnT w="6350" cap="flat" cmpd="sng" algn="ctr">
+                      <a:solidFill>
+                        <a:srgbClr val="CCCCCC"/>
+                      </a:solidFill>
+                      <a:prstDash val="solid"/>
+                    </a:lnT>
+                    <a:lnB w="6350" cap="flat" cmpd="sng" algn="ctr">
+                      <a:solidFill>
+                        <a:srgbClr val="CCCCCC"/>
+                      </a:solidFill>
+                      <a:prstDash val="solid"/>
+                    </a:lnB>
+                  </a:tcPr>
+                </a:tc>
+                <a:tc>
+                  <a:txBody>
+                    <a:bodyPr wrap="square"/>
+                    <a:lstStyle/>
+                    <a:p>
+                      <a:pPr algn="l"/>
+                      <a:r>
+                        <a:rPr sz="1000" b="0">
+                          <a:solidFill>
+                            <a:srgbClr val="333333"/>
+                          </a:solidFill>
+                          <a:latin typeface="メイリオ"/>
+                          <a:ea typeface="メイリオ"/>
+                        </a:rPr>
+                        <a:t>基幹連携前提・在庫／引当の整理</a:t>
+                      </a:r>
+                    </a:p>
+                  </a:txBody>
+                  <a:tcPr anchor="ctr">
+                    <a:solidFill>
+                      <a:srgbClr val="F0FAF8"/>
+                    </a:solidFill>
+                    <a:lnL w="6350" cap="flat" cmpd="sng" algn="ctr">
+                      <a:solidFill>
+                        <a:srgbClr val="CCCCCC"/>
+                      </a:solidFill>
+                      <a:prstDash val="solid"/>
+                    </a:lnL>
+                    <a:lnR w="6350" cap="flat" cmpd="sng" algn="ctr">
+                      <a:solidFill>
+                        <a:srgbClr val="CCCCCC"/>
+                      </a:solidFill>
+                      <a:prstDash val="solid"/>
+                    </a:lnR>
+                    <a:lnT w="6350" cap="flat" cmpd="sng" algn="ctr">
+                      <a:solidFill>
+                        <a:srgbClr val="CCCCCC"/>
+                      </a:solidFill>
+                      <a:prstDash val="solid"/>
+                    </a:lnT>
+                    <a:lnB w="6350" cap="flat" cmpd="sng" algn="ctr">
+                      <a:solidFill>
+                        <a:srgbClr val="CCCCCC"/>
+                      </a:solidFill>
+                      <a:prstDash val="solid"/>
+                    </a:lnB>
+                  </a:tcPr>
+                </a:tc>
+              </a:tr>
+              <a:tr h="633333">
+                <a:tc>
+                  <a:txBody>
+                    <a:bodyPr wrap="square"/>
+                    <a:lstStyle/>
+                    <a:p>
+                      <a:pPr algn="ctr"/>
+                      <a:r>
+                        <a:rPr sz="1000" b="0">
+                          <a:solidFill>
+                            <a:srgbClr val="333333"/>
+                          </a:solidFill>
+                          <a:latin typeface="メイリオ"/>
+                          <a:ea typeface="メイリオ"/>
+                        </a:rPr>
+                        <a:t>4</a:t>
+                      </a:r>
+                    </a:p>
+                  </a:txBody>
+                  <a:tcPr anchor="ctr">
+                    <a:solidFill>
+                      <a:srgbClr val="FFFFFF"/>
+                    </a:solidFill>
+                    <a:lnL w="6350" cap="flat" cmpd="sng" algn="ctr">
+                      <a:solidFill>
+                        <a:srgbClr val="CCCCCC"/>
+                      </a:solidFill>
+                      <a:prstDash val="solid"/>
+                    </a:lnL>
+                    <a:lnR w="6350" cap="flat" cmpd="sng" algn="ctr">
+                      <a:solidFill>
+                        <a:srgbClr val="CCCCCC"/>
+                      </a:solidFill>
+                      <a:prstDash val="solid"/>
+                    </a:lnR>
+                    <a:lnT w="6350" cap="flat" cmpd="sng" algn="ctr">
+                      <a:solidFill>
+                        <a:srgbClr val="CCCCCC"/>
+                      </a:solidFill>
+                      <a:prstDash val="solid"/>
+                    </a:lnT>
+                    <a:lnB w="6350" cap="flat" cmpd="sng" algn="ctr">
+                      <a:solidFill>
+                        <a:srgbClr val="CCCCCC"/>
+                      </a:solidFill>
+                      <a:prstDash val="solid"/>
+                    </a:lnB>
+                  </a:tcPr>
+                </a:tc>
+                <a:tc>
+                  <a:txBody>
+                    <a:bodyPr wrap="square"/>
+                    <a:lstStyle/>
+                    <a:p>
+                      <a:pPr algn="ctr"/>
+                      <a:r>
+                        <a:rPr sz="1000" b="0">
+                          <a:solidFill>
+                            <a:srgbClr val="333333"/>
+                          </a:solidFill>
+                          <a:latin typeface="メイリオ"/>
+                          <a:ea typeface="メイリオ"/>
+                        </a:rPr>
+                        <a:t>8/31まで</a:t>
+                      </a:r>
+                    </a:p>
+                  </a:txBody>
+                  <a:tcPr anchor="ctr">
+                    <a:solidFill>
+                      <a:srgbClr val="FFFFFF"/>
+                    </a:solidFill>
+                    <a:lnL w="6350" cap="flat" cmpd="sng" algn="ctr">
+                      <a:solidFill>
+                        <a:srgbClr val="CCCCCC"/>
+                      </a:solidFill>
+                      <a:prstDash val="solid"/>
+                    </a:lnL>
+                    <a:lnR w="6350" cap="flat" cmpd="sng" algn="ctr">
+                      <a:solidFill>
+                        <a:srgbClr val="CCCCCC"/>
+                      </a:solidFill>
+                      <a:prstDash val="solid"/>
+                    </a:lnR>
+                    <a:lnT w="6350" cap="flat" cmpd="sng" algn="ctr">
+                      <a:solidFill>
+                        <a:srgbClr val="CCCCCC"/>
+                      </a:solidFill>
+                      <a:prstDash val="solid"/>
+                    </a:lnT>
+                    <a:lnB w="6350" cap="flat" cmpd="sng" algn="ctr">
+                      <a:solidFill>
+                        <a:srgbClr val="CCCCCC"/>
+                      </a:solidFill>
+                      <a:prstDash val="solid"/>
+                    </a:lnB>
+                  </a:tcPr>
+                </a:tc>
+                <a:tc>
+                  <a:txBody>
+                    <a:bodyPr wrap="square"/>
+                    <a:lstStyle/>
+                    <a:p>
+                      <a:pPr algn="l"/>
+                      <a:r>
+                        <a:rPr sz="1000" b="1">
+                          <a:solidFill>
+                            <a:srgbClr val="C00000"/>
+                          </a:solidFill>
+                          <a:latin typeface="メイリオ"/>
+                          <a:ea typeface="メイリオ"/>
+                        </a:rPr>
+                        <a:t>受注集計表（Excel）サンプル</a:t>
+                      </a:r>
+                    </a:p>
+                    <a:p>
+                      <a:pPr algn="l"/>
+                      <a:r>
+                        <a:rPr sz="1000" b="1">
+                          <a:solidFill>
+                            <a:srgbClr val="C00000"/>
+                          </a:solidFill>
+                          <a:latin typeface="メイリオ"/>
+                          <a:ea typeface="メイリオ"/>
+                        </a:rPr>
+                        <a:t>（取引先別確保在庫の把握用）</a:t>
+                      </a:r>
+                    </a:p>
+                  </a:txBody>
+                  <a:tcPr anchor="ctr">
+                    <a:solidFill>
+                      <a:srgbClr val="FFFFFF"/>
+                    </a:solidFill>
+                    <a:lnL w="6350" cap="flat" cmpd="sng" algn="ctr">
+                      <a:solidFill>
+                        <a:srgbClr val="CCCCCC"/>
+                      </a:solidFill>
+                      <a:prstDash val="solid"/>
+                    </a:lnL>
+                    <a:lnR w="6350" cap="flat" cmpd="sng" algn="ctr">
+                      <a:solidFill>
+                        <a:srgbClr val="CCCCCC"/>
+                      </a:solidFill>
+                      <a:prstDash val="solid"/>
+                    </a:lnR>
+                    <a:lnT w="6350" cap="flat" cmpd="sng" algn="ctr">
+                      <a:solidFill>
+                        <a:srgbClr val="CCCCCC"/>
+                      </a:solidFill>
+                      <a:prstDash val="solid"/>
+                    </a:lnT>
+                    <a:lnB w="6350" cap="flat" cmpd="sng" algn="ctr">
+                      <a:solidFill>
+                        <a:srgbClr val="CCCCCC"/>
+                      </a:solidFill>
+                      <a:prstDash val="solid"/>
+                    </a:lnB>
+                  </a:tcPr>
+                </a:tc>
+                <a:tc>
+                  <a:txBody>
+                    <a:bodyPr wrap="square"/>
+                    <a:lstStyle/>
+                    <a:p>
+                      <a:pPr algn="l"/>
+                      <a:r>
+                        <a:rPr sz="1000" b="0">
+                          <a:solidFill>
+                            <a:srgbClr val="333333"/>
+                          </a:solidFill>
+                          <a:latin typeface="メイリオ"/>
+                          <a:ea typeface="メイリオ"/>
+                        </a:rPr>
+                        <a:t>確保在庫の持ち方・業務ルール整理</a:t>
+                      </a:r>
+                    </a:p>
+                  </a:txBody>
+                  <a:tcPr anchor="ctr">
+                    <a:solidFill>
+                      <a:srgbClr val="FFFFFF"/>
+                    </a:solidFill>
+                    <a:lnL w="6350" cap="flat" cmpd="sng" algn="ctr">
+                      <a:solidFill>
+                        <a:srgbClr val="CCCCCC"/>
+                      </a:solidFill>
+                      <a:prstDash val="solid"/>
+                    </a:lnL>
+                    <a:lnR w="6350" cap="flat" cmpd="sng" algn="ctr">
+                      <a:solidFill>
+                        <a:srgbClr val="CCCCCC"/>
+                      </a:solidFill>
+                      <a:prstDash val="solid"/>
+                    </a:lnR>
+                    <a:lnT w="6350" cap="flat" cmpd="sng" algn="ctr">
+                      <a:solidFill>
+                        <a:srgbClr val="CCCCCC"/>
+                      </a:solidFill>
+                      <a:prstDash val="solid"/>
+                    </a:lnT>
+                    <a:lnB w="6350" cap="flat" cmpd="sng" algn="ctr">
+                      <a:solidFill>
+                        <a:srgbClr val="CCCCCC"/>
+                      </a:solidFill>
+                      <a:prstDash val="solid"/>
+                    </a:lnB>
+                  </a:tcPr>
+                </a:tc>
+              </a:tr>
+              <a:tr h="633335">
+                <a:tc>
+                  <a:txBody>
+                    <a:bodyPr wrap="square"/>
+                    <a:lstStyle/>
+                    <a:p>
+                      <a:pPr algn="ctr"/>
+                      <a:r>
+                        <a:rPr sz="1000" b="0">
+                          <a:solidFill>
+                            <a:srgbClr val="333333"/>
+                          </a:solidFill>
+                          <a:latin typeface="メイリオ"/>
+                          <a:ea typeface="メイリオ"/>
+                        </a:rPr>
+                        <a:t>5</a:t>
+                      </a:r>
+                    </a:p>
+                  </a:txBody>
+                  <a:tcPr anchor="ctr">
+                    <a:solidFill>
+                      <a:srgbClr val="F0FAF8"/>
+                    </a:solidFill>
+                    <a:lnL w="6350" cap="flat" cmpd="sng" algn="ctr">
+                      <a:solidFill>
+                        <a:srgbClr val="CCCCCC"/>
+                      </a:solidFill>
+                      <a:prstDash val="solid"/>
+                    </a:lnL>
+                    <a:lnR w="6350" cap="flat" cmpd="sng" algn="ctr">
+                      <a:solidFill>
+                        <a:srgbClr val="CCCCCC"/>
+                      </a:solidFill>
+                      <a:prstDash val="solid"/>
+                    </a:lnR>
+                    <a:lnT w="6350" cap="flat" cmpd="sng" algn="ctr">
+                      <a:solidFill>
+                        <a:srgbClr val="CCCCCC"/>
+                      </a:solidFill>
+                      <a:prstDash val="solid"/>
+                    </a:lnT>
+                    <a:lnB w="6350" cap="flat" cmpd="sng" algn="ctr">
+                      <a:solidFill>
+                        <a:srgbClr val="CCCCCC"/>
+                      </a:solidFill>
+                      <a:prstDash val="solid"/>
+                    </a:lnB>
+                  </a:tcPr>
+                </a:tc>
+                <a:tc>
+                  <a:txBody>
+                    <a:bodyPr wrap="square"/>
+                    <a:lstStyle/>
+                    <a:p>
+                      <a:pPr algn="ctr"/>
+                      <a:r>
+                        <a:rPr sz="1000" b="0">
+                          <a:solidFill>
+                            <a:srgbClr val="333333"/>
+                          </a:solidFill>
+                          <a:latin typeface="メイリオ"/>
+                          <a:ea typeface="メイリオ"/>
+                        </a:rPr>
+                        <a:t>9/16まで</a:t>
+                      </a:r>
+                    </a:p>
+                  </a:txBody>
+                  <a:tcPr anchor="ctr">
+                    <a:solidFill>
+                      <a:srgbClr val="F0FAF8"/>
+                    </a:solidFill>
+                    <a:lnL w="6350" cap="flat" cmpd="sng" algn="ctr">
+                      <a:solidFill>
+                        <a:srgbClr val="CCCCCC"/>
+                      </a:solidFill>
+                      <a:prstDash val="solid"/>
+                    </a:lnL>
+                    <a:lnR w="6350" cap="flat" cmpd="sng" algn="ctr">
+                      <a:solidFill>
+                        <a:srgbClr val="CCCCCC"/>
+                      </a:solidFill>
+                      <a:prstDash val="solid"/>
+                    </a:lnR>
+                    <a:lnT w="6350" cap="flat" cmpd="sng" algn="ctr">
+                      <a:solidFill>
+                        <a:srgbClr val="CCCCCC"/>
+                      </a:solidFill>
+                      <a:prstDash val="solid"/>
+                    </a:lnT>
+                    <a:lnB w="6350" cap="flat" cmpd="sng" algn="ctr">
+                      <a:solidFill>
+                        <a:srgbClr val="CCCCCC"/>
+                      </a:solidFill>
+                      <a:prstDash val="solid"/>
+                    </a:lnB>
+                  </a:tcPr>
+                </a:tc>
+                <a:tc>
+                  <a:txBody>
+                    <a:bodyPr wrap="square"/>
+                    <a:lstStyle/>
+                    <a:p>
+                      <a:pPr algn="l"/>
+                      <a:r>
+                        <a:rPr sz="1000" b="1">
+                          <a:solidFill>
+                            <a:srgbClr val="C00000"/>
+                          </a:solidFill>
+                          <a:latin typeface="メイリオ"/>
+                          <a:ea typeface="メイリオ"/>
+                        </a:rPr>
+                        <a:t>年間注文数、ピーク注文時間帯、</a:t>
+                      </a:r>
+                    </a:p>
+                    <a:p>
+                      <a:pPr algn="l"/>
+                      <a:r>
+                        <a:rPr sz="1000" b="1">
+                          <a:solidFill>
+                            <a:srgbClr val="C00000"/>
+                          </a:solidFill>
+                          <a:latin typeface="メイリオ"/>
+                          <a:ea typeface="メイリオ"/>
+                        </a:rPr>
+                        <a:t>取引先数、商品SKU数、管理サイト利用者数</a:t>
+                      </a:r>
+                    </a:p>
+                  </a:txBody>
+                  <a:tcPr anchor="ctr">
+                    <a:solidFill>
+                      <a:srgbClr val="F0FAF8"/>
+                    </a:solidFill>
+                    <a:lnL w="6350" cap="flat" cmpd="sng" algn="ctr">
+                      <a:solidFill>
+                        <a:srgbClr val="CCCCCC"/>
+                      </a:solidFill>
+                      <a:prstDash val="solid"/>
+                    </a:lnL>
+                    <a:lnR w="6350" cap="flat" cmpd="sng" algn="ctr">
+                      <a:solidFill>
+                        <a:srgbClr val="CCCCCC"/>
+                      </a:solidFill>
+                      <a:prstDash val="solid"/>
+                    </a:lnR>
+                    <a:lnT w="6350" cap="flat" cmpd="sng" algn="ctr">
+                      <a:solidFill>
+                        <a:srgbClr val="CCCCCC"/>
+                      </a:solidFill>
+                      <a:prstDash val="solid"/>
+                    </a:lnT>
+                    <a:lnB w="6350" cap="flat" cmpd="sng" algn="ctr">
+                      <a:solidFill>
+                        <a:srgbClr val="CCCCCC"/>
+                      </a:solidFill>
+                      <a:prstDash val="solid"/>
+                    </a:lnB>
+                  </a:tcPr>
+                </a:tc>
+                <a:tc>
+                  <a:txBody>
+                    <a:bodyPr wrap="square"/>
+                    <a:lstStyle/>
+                    <a:p>
+                      <a:pPr algn="l"/>
+                      <a:r>
+                        <a:rPr sz="1000" b="0">
+                          <a:solidFill>
+                            <a:srgbClr val="333333"/>
+                          </a:solidFill>
+                          <a:latin typeface="メイリオ"/>
+                          <a:ea typeface="メイリオ"/>
+                        </a:rPr>
+                        <a:t>非機能（性能・運用）の定義</a:t>
+                      </a:r>
+                    </a:p>
+                  </a:txBody>
+                  <a:tcPr anchor="ctr">
+                    <a:solidFill>
+                      <a:srgbClr val="F0FAF8"/>
+                    </a:solidFill>
+                    <a:lnL w="6350" cap="flat" cmpd="sng" algn="ctr">
+                      <a:solidFill>
+                        <a:srgbClr val="CCCCCC"/>
+                      </a:solidFill>
+                      <a:prstDash val="solid"/>
+                    </a:lnL>
+                    <a:lnR w="6350" cap="flat" cmpd="sng" algn="ctr">
+                      <a:solidFill>
+                        <a:srgbClr val="CCCCCC"/>
+                      </a:solidFill>
+                      <a:prstDash val="solid"/>
+                    </a:lnR>
+                    <a:lnT w="6350" cap="flat" cmpd="sng" algn="ctr">
+                      <a:solidFill>
+                        <a:srgbClr val="CCCCCC"/>
+                      </a:solidFill>
+                      <a:prstDash val="solid"/>
+                    </a:lnT>
+                    <a:lnB w="6350" cap="flat" cmpd="sng" algn="ctr">
+                      <a:solidFill>
+                        <a:srgbClr val="CCCCCC"/>
+                      </a:solidFill>
+                      <a:prstDash val="solid"/>
+                    </a:lnB>
+                  </a:tcPr>
+                </a:tc>
+              </a:tr>
+            </a:tbl>
+          </a:graphicData>
+        </a:graphic>
+      </p:graphicFrame>
+      <p:sp>
+        <p:nvSpPr>
+          <p:cNvPr id="6" name="TextBox 5"/>
+          <p:cNvSpPr txBox="1"/>
           <p:nvPr/>
         </p:nvSpPr>
         <p:spPr>
           <a:xfrm>
-            <a:off x="500000" y="3750000"/>
-            <a:ext cx="1800000" cy="550000"/>
-          </a:xfrm>
-          <a:prstGeom prst="roundRect">
-            <a:avLst/>
-          </a:prstGeom>
-          <a:solidFill>
-            <a:srgbClr val="00A693"/>
-          </a:solidFill>
-          <a:ln>
-            <a:noFill/>
-          </a:ln>
-        </p:spPr>
-        <p:style>
-          <a:lnRef idx="1">
-            <a:schemeClr val="accent1"/>
-          </a:lnRef>
-          <a:fillRef idx="3">
-            <a:schemeClr val="accent1"/>
-          </a:fillRef>
-          <a:effectRef idx="2">
-            <a:schemeClr val="accent1"/>
-          </a:effectRef>
-          <a:fontRef idx="minor">
-            <a:schemeClr val="lt1"/>
-          </a:fontRef>
-        </p:style>
-        <p:txBody>
-          <a:bodyPr rtlCol="0" anchor="ctr"/>
-          <a:lstStyle/>
-          <a:p>
-            <a:pPr algn="ctr"/>
-            <a:r>
-              <a:rPr sz="1200" b="1">
-                <a:solidFill>
-                  <a:srgbClr val="FFFFFF"/>
-                </a:solidFill>
-                <a:latin typeface="メイリオ"/>
-                <a:ea typeface="メイリオ"/>
-              </a:rPr>
-              <a:t>機能詳細</a:t>
-            </a:r>
-          </a:p>
-        </p:txBody>
-      </p:sp>
-      <p:sp>
-        <p:nvSpPr>
-          <p:cNvPr id="16" name="TextBox 15"/>
-          <p:cNvSpPr txBox="1"/>
-          <p:nvPr/>
-        </p:nvSpPr>
-        <p:spPr>
-          <a:xfrm>
-            <a:off x="2500000" y="3850000"/>
-            <a:ext cx="6800000" cy="450000"/>
+            <a:off x="300000" y="5000000"/>
+            <a:ext cx="9300000" cy="420000"/>
           </a:xfrm>
           <a:prstGeom prst="rect">
             <a:avLst/>
@@ -9163,81 +8792,28 @@
           <a:p>
             <a:pPr algn="l"/>
             <a:r>
-              <a:rPr sz="1300" b="0">
+              <a:rPr sz="1100" b="0">
                 <a:solidFill>
-                  <a:srgbClr val="333333"/>
+                  <a:srgbClr val="666666"/>
                 </a:solidFill>
                 <a:latin typeface="メイリオ"/>
                 <a:ea typeface="メイリオ"/>
               </a:rPr>
-              <a:t>画面機能設計書と機能詳細フローを用いてFit&amp;Gapを整理</a:t>
-            </a:r>
-          </a:p>
-        </p:txBody>
-      </p:sp>
-      <p:sp>
-        <p:nvSpPr>
-          <p:cNvPr id="17" name="Rounded Rectangle 16"/>
-          <p:cNvSpPr/>
+              <a:t>・基幹ベンダー様との連携打合せは、仕様整理・外部仕様定義の過程で別途実施します。</a:t>
+            </a:r>
+          </a:p>
+        </p:txBody>
+      </p:sp>
+      <p:sp>
+        <p:nvSpPr>
+          <p:cNvPr id="7" name="TextBox 6"/>
+          <p:cNvSpPr txBox="1"/>
           <p:nvPr/>
         </p:nvSpPr>
         <p:spPr>
           <a:xfrm>
-            <a:off x="500000" y="4600000"/>
-            <a:ext cx="1800000" cy="550000"/>
-          </a:xfrm>
-          <a:prstGeom prst="roundRect">
-            <a:avLst/>
-          </a:prstGeom>
-          <a:solidFill>
-            <a:srgbClr val="00A693"/>
-          </a:solidFill>
-          <a:ln>
-            <a:noFill/>
-          </a:ln>
-        </p:spPr>
-        <p:style>
-          <a:lnRef idx="1">
-            <a:schemeClr val="accent1"/>
-          </a:lnRef>
-          <a:fillRef idx="3">
-            <a:schemeClr val="accent1"/>
-          </a:fillRef>
-          <a:effectRef idx="2">
-            <a:schemeClr val="accent1"/>
-          </a:effectRef>
-          <a:fontRef idx="minor">
-            <a:schemeClr val="lt1"/>
-          </a:fontRef>
-        </p:style>
-        <p:txBody>
-          <a:bodyPr rtlCol="0" anchor="ctr"/>
-          <a:lstStyle/>
-          <a:p>
-            <a:pPr algn="ctr"/>
-            <a:r>
-              <a:rPr sz="1200" b="1">
-                <a:solidFill>
-                  <a:srgbClr val="FFFFFF"/>
-                </a:solidFill>
-                <a:latin typeface="メイリオ"/>
-                <a:ea typeface="メイリオ"/>
-              </a:rPr>
-              <a:t>検討単位</a:t>
-            </a:r>
-          </a:p>
-        </p:txBody>
-      </p:sp>
-      <p:sp>
-        <p:nvSpPr>
-          <p:cNvPr id="18" name="TextBox 17"/>
-          <p:cNvSpPr txBox="1"/>
-          <p:nvPr/>
-        </p:nvSpPr>
-        <p:spPr>
-          <a:xfrm>
-            <a:off x="2500000" y="4700000"/>
-            <a:ext cx="6800000" cy="450000"/>
+            <a:off x="300000" y="5450000"/>
+            <a:ext cx="9300000" cy="420000"/>
           </a:xfrm>
           <a:prstGeom prst="rect">
             <a:avLst/>
@@ -9252,81 +8828,28 @@
           <a:p>
             <a:pPr algn="l"/>
             <a:r>
-              <a:rPr sz="1300" b="0">
+              <a:rPr sz="1100" b="0">
                 <a:solidFill>
-                  <a:srgbClr val="333333"/>
+                  <a:srgbClr val="666666"/>
                 </a:solidFill>
                 <a:latin typeface="メイリオ"/>
                 <a:ea typeface="メイリオ"/>
               </a:rPr>
-              <a:t>サプライヤー／商品／在庫／会員／受注／マイページ・その他（見積管理は対象外）</a:t>
-            </a:r>
-          </a:p>
-        </p:txBody>
-      </p:sp>
-      <p:sp>
-        <p:nvSpPr>
-          <p:cNvPr id="19" name="Rounded Rectangle 18"/>
-          <p:cNvSpPr/>
+              <a:t>・販売組織階層は現状概念がない想定のため、一覧依頼はせず、ECへの落とし込み案を弊社より提示します。</a:t>
+            </a:r>
+          </a:p>
+        </p:txBody>
+      </p:sp>
+      <p:sp>
+        <p:nvSpPr>
+          <p:cNvPr id="8" name="TextBox 7"/>
+          <p:cNvSpPr txBox="1"/>
           <p:nvPr/>
         </p:nvSpPr>
         <p:spPr>
           <a:xfrm>
-            <a:off x="500000" y="5450000"/>
-            <a:ext cx="1800000" cy="550000"/>
-          </a:xfrm>
-          <a:prstGeom prst="roundRect">
-            <a:avLst/>
-          </a:prstGeom>
-          <a:solidFill>
-            <a:srgbClr val="00A693"/>
-          </a:solidFill>
-          <a:ln>
-            <a:noFill/>
-          </a:ln>
-        </p:spPr>
-        <p:style>
-          <a:lnRef idx="1">
-            <a:schemeClr val="accent1"/>
-          </a:lnRef>
-          <a:fillRef idx="3">
-            <a:schemeClr val="accent1"/>
-          </a:fillRef>
-          <a:effectRef idx="2">
-            <a:schemeClr val="accent1"/>
-          </a:effectRef>
-          <a:fontRef idx="minor">
-            <a:schemeClr val="lt1"/>
-          </a:fontRef>
-        </p:style>
-        <p:txBody>
-          <a:bodyPr rtlCol="0" anchor="ctr"/>
-          <a:lstStyle/>
-          <a:p>
-            <a:pPr algn="ctr"/>
-            <a:r>
-              <a:rPr sz="1200" b="1">
-                <a:solidFill>
-                  <a:srgbClr val="FFFFFF"/>
-                </a:solidFill>
-                <a:latin typeface="メイリオ"/>
-                <a:ea typeface="メイリオ"/>
-              </a:rPr>
-              <a:t>フロント</a:t>
-            </a:r>
-          </a:p>
-        </p:txBody>
-      </p:sp>
-      <p:sp>
-        <p:nvSpPr>
-          <p:cNvPr id="20" name="TextBox 19"/>
-          <p:cNvSpPr txBox="1"/>
-          <p:nvPr/>
-        </p:nvSpPr>
-        <p:spPr>
-          <a:xfrm>
-            <a:off x="2500000" y="5550000"/>
-            <a:ext cx="6800000" cy="450000"/>
+            <a:off x="300000" y="5900000"/>
+            <a:ext cx="9300000" cy="420000"/>
           </a:xfrm>
           <a:prstGeom prst="rect">
             <a:avLst/>
@@ -9341,823 +8864,14 @@
           <a:p>
             <a:pPr algn="l"/>
             <a:r>
-              <a:rPr sz="1300" b="0">
+              <a:rPr sz="1100" b="0">
                 <a:solidFill>
-                  <a:srgbClr val="333333"/>
+                  <a:srgbClr val="666666"/>
                 </a:solidFill>
                 <a:latin typeface="メイリオ"/>
                 <a:ea typeface="メイリオ"/>
               </a:rPr>
-              <a:t>機能詳細（2回目）にてフロントサイト確認まで実施</a:t>
-            </a:r>
-          </a:p>
-        </p:txBody>
-      </p:sp>
-    </p:spTree>
-  </p:cSld>
-  <p:clrMapOvr>
-    <a:masterClrMapping/>
-  </p:clrMapOvr>
-</p:sld>
-</file>
-
-<file path=ppt/slides/slide5.xml><?xml version="1.0" encoding="utf-8"?>
-<p:sld xmlns:a="http://schemas.openxmlformats.org/drawingml/2006/main" xmlns:p="http://schemas.openxmlformats.org/presentationml/2006/main" xmlns:r="http://schemas.openxmlformats.org/officeDocument/2006/relationships">
-  <p:cSld>
-    <p:spTree>
-      <p:nvGrpSpPr>
-        <p:cNvPr id="1" name=""/>
-        <p:cNvGrpSpPr/>
-        <p:nvPr/>
-      </p:nvGrpSpPr>
-      <p:grpSpPr/>
-      <p:sp>
-        <p:nvSpPr>
-          <p:cNvPr id="2" name="Rectangle 1"/>
-          <p:cNvSpPr/>
-          <p:nvPr/>
-        </p:nvSpPr>
-        <p:spPr>
-          <a:xfrm>
-            <a:off x="300000" y="180000"/>
-            <a:ext cx="70000" cy="380000"/>
-          </a:xfrm>
-          <a:prstGeom prst="rect">
-            <a:avLst/>
-          </a:prstGeom>
-          <a:solidFill>
-            <a:srgbClr val="00A693"/>
-          </a:solidFill>
-          <a:ln>
-            <a:noFill/>
-          </a:ln>
-        </p:spPr>
-        <p:style>
-          <a:lnRef idx="1">
-            <a:schemeClr val="accent1"/>
-          </a:lnRef>
-          <a:fillRef idx="3">
-            <a:schemeClr val="accent1"/>
-          </a:fillRef>
-          <a:effectRef idx="2">
-            <a:schemeClr val="accent1"/>
-          </a:effectRef>
-          <a:fontRef idx="minor">
-            <a:schemeClr val="lt1"/>
-          </a:fontRef>
-        </p:style>
-        <p:txBody>
-          <a:bodyPr rtlCol="0" anchor="ctr"/>
-          <a:lstStyle/>
-          <a:p>
-            <a:pPr algn="ctr"/>
-          </a:p>
-        </p:txBody>
-      </p:sp>
-      <p:sp>
-        <p:nvSpPr>
-          <p:cNvPr id="3" name="TextBox 2"/>
-          <p:cNvSpPr txBox="1"/>
-          <p:nvPr/>
-        </p:nvSpPr>
-        <p:spPr>
-          <a:xfrm>
-            <a:off x="420000" y="160000"/>
-            <a:ext cx="9000000" cy="400000"/>
-          </a:xfrm>
-          <a:prstGeom prst="rect">
-            <a:avLst/>
-          </a:prstGeom>
-          <a:noFill/>
-        </p:spPr>
-        <p:txBody>
-          <a:bodyPr wrap="square">
-            <a:spAutoFit/>
-          </a:bodyPr>
-          <a:lstStyle/>
-          <a:p>
-            <a:pPr algn="l"/>
-            <a:r>
-              <a:rPr sz="2000" b="1">
-                <a:solidFill>
-                  <a:srgbClr val="3F3F3F"/>
-                </a:solidFill>
-                <a:latin typeface="メイリオ"/>
-                <a:ea typeface="メイリオ"/>
-              </a:rPr>
-              <a:t>前提・補足事項</a:t>
-            </a:r>
-          </a:p>
-        </p:txBody>
-      </p:sp>
-      <p:sp>
-        <p:nvSpPr>
-          <p:cNvPr id="4" name="Rounded Rectangle 3"/>
-          <p:cNvSpPr/>
-          <p:nvPr/>
-        </p:nvSpPr>
-        <p:spPr>
-          <a:xfrm>
-            <a:off x="450000" y="800000"/>
-            <a:ext cx="1500000" cy="450000"/>
-          </a:xfrm>
-          <a:prstGeom prst="roundRect">
-            <a:avLst/>
-          </a:prstGeom>
-          <a:solidFill>
-            <a:srgbClr val="00A693"/>
-          </a:solidFill>
-          <a:ln>
-            <a:noFill/>
-          </a:ln>
-        </p:spPr>
-        <p:style>
-          <a:lnRef idx="1">
-            <a:schemeClr val="accent1"/>
-          </a:lnRef>
-          <a:fillRef idx="3">
-            <a:schemeClr val="accent1"/>
-          </a:fillRef>
-          <a:effectRef idx="2">
-            <a:schemeClr val="accent1"/>
-          </a:effectRef>
-          <a:fontRef idx="minor">
-            <a:schemeClr val="lt1"/>
-          </a:fontRef>
-        </p:style>
-        <p:txBody>
-          <a:bodyPr rtlCol="0" anchor="ctr"/>
-          <a:lstStyle/>
-          <a:p>
-            <a:pPr algn="ctr"/>
-            <a:r>
-              <a:rPr sz="1100" b="1">
-                <a:solidFill>
-                  <a:srgbClr val="FFFFFF"/>
-                </a:solidFill>
-                <a:latin typeface="メイリオ"/>
-                <a:ea typeface="メイリオ"/>
-              </a:rPr>
-              <a:t>期間</a:t>
-            </a:r>
-          </a:p>
-        </p:txBody>
-      </p:sp>
-      <p:sp>
-        <p:nvSpPr>
-          <p:cNvPr id="5" name="TextBox 4"/>
-          <p:cNvSpPr txBox="1"/>
-          <p:nvPr/>
-        </p:nvSpPr>
-        <p:spPr>
-          <a:xfrm>
-            <a:off x="2150000" y="870000"/>
-            <a:ext cx="7200000" cy="400000"/>
-          </a:xfrm>
-          <a:prstGeom prst="rect">
-            <a:avLst/>
-          </a:prstGeom>
-          <a:noFill/>
-        </p:spPr>
-        <p:txBody>
-          <a:bodyPr wrap="square">
-            <a:spAutoFit/>
-          </a:bodyPr>
-          <a:lstStyle/>
-          <a:p>
-            <a:pPr algn="l"/>
-            <a:r>
-              <a:rPr sz="1200" b="0">
-                <a:solidFill>
-                  <a:srgbClr val="333333"/>
-                </a:solidFill>
-                <a:latin typeface="メイリオ"/>
-                <a:ea typeface="メイリオ"/>
-              </a:rPr>
-              <a:t>2026年8月19日キックオフ〜9月末納品・ご検収を想定（約1.5か月）</a:t>
-            </a:r>
-          </a:p>
-        </p:txBody>
-      </p:sp>
-      <p:sp>
-        <p:nvSpPr>
-          <p:cNvPr id="6" name="Rounded Rectangle 5"/>
-          <p:cNvSpPr/>
-          <p:nvPr/>
-        </p:nvSpPr>
-        <p:spPr>
-          <a:xfrm>
-            <a:off x="450000" y="1500000"/>
-            <a:ext cx="1500000" cy="450000"/>
-          </a:xfrm>
-          <a:prstGeom prst="roundRect">
-            <a:avLst/>
-          </a:prstGeom>
-          <a:solidFill>
-            <a:srgbClr val="00A693"/>
-          </a:solidFill>
-          <a:ln>
-            <a:noFill/>
-          </a:ln>
-        </p:spPr>
-        <p:style>
-          <a:lnRef idx="1">
-            <a:schemeClr val="accent1"/>
-          </a:lnRef>
-          <a:fillRef idx="3">
-            <a:schemeClr val="accent1"/>
-          </a:fillRef>
-          <a:effectRef idx="2">
-            <a:schemeClr val="accent1"/>
-          </a:effectRef>
-          <a:fontRef idx="minor">
-            <a:schemeClr val="lt1"/>
-          </a:fontRef>
-        </p:style>
-        <p:txBody>
-          <a:bodyPr rtlCol="0" anchor="ctr"/>
-          <a:lstStyle/>
-          <a:p>
-            <a:pPr algn="ctr"/>
-            <a:r>
-              <a:rPr sz="1100" b="1">
-                <a:solidFill>
-                  <a:srgbClr val="FFFFFF"/>
-                </a:solidFill>
-                <a:latin typeface="メイリオ"/>
-                <a:ea typeface="メイリオ"/>
-              </a:rPr>
-              <a:t>会議体</a:t>
-            </a:r>
-          </a:p>
-        </p:txBody>
-      </p:sp>
-      <p:sp>
-        <p:nvSpPr>
-          <p:cNvPr id="7" name="TextBox 6"/>
-          <p:cNvSpPr txBox="1"/>
-          <p:nvPr/>
-        </p:nvSpPr>
-        <p:spPr>
-          <a:xfrm>
-            <a:off x="2150000" y="1570000"/>
-            <a:ext cx="7200000" cy="400000"/>
-          </a:xfrm>
-          <a:prstGeom prst="rect">
-            <a:avLst/>
-          </a:prstGeom>
-          <a:noFill/>
-        </p:spPr>
-        <p:txBody>
-          <a:bodyPr wrap="square">
-            <a:spAutoFit/>
-          </a:bodyPr>
-          <a:lstStyle/>
-          <a:p>
-            <a:pPr algn="l"/>
-            <a:r>
-              <a:rPr sz="1200" b="0">
-                <a:solidFill>
-                  <a:srgbClr val="333333"/>
-                </a:solidFill>
-                <a:latin typeface="メイリオ"/>
-                <a:ea typeface="メイリオ"/>
-              </a:rPr>
-              <a:t>全8回、各回約2時間</a:t>
-            </a:r>
-          </a:p>
-        </p:txBody>
-      </p:sp>
-      <p:sp>
-        <p:nvSpPr>
-          <p:cNvPr id="8" name="Rounded Rectangle 7"/>
-          <p:cNvSpPr/>
-          <p:nvPr/>
-        </p:nvSpPr>
-        <p:spPr>
-          <a:xfrm>
-            <a:off x="450000" y="2200000"/>
-            <a:ext cx="1500000" cy="450000"/>
-          </a:xfrm>
-          <a:prstGeom prst="roundRect">
-            <a:avLst/>
-          </a:prstGeom>
-          <a:solidFill>
-            <a:srgbClr val="00A693"/>
-          </a:solidFill>
-          <a:ln>
-            <a:noFill/>
-          </a:ln>
-        </p:spPr>
-        <p:style>
-          <a:lnRef idx="1">
-            <a:schemeClr val="accent1"/>
-          </a:lnRef>
-          <a:fillRef idx="3">
-            <a:schemeClr val="accent1"/>
-          </a:fillRef>
-          <a:effectRef idx="2">
-            <a:schemeClr val="accent1"/>
-          </a:effectRef>
-          <a:fontRef idx="minor">
-            <a:schemeClr val="lt1"/>
-          </a:fontRef>
-        </p:style>
-        <p:txBody>
-          <a:bodyPr rtlCol="0" anchor="ctr"/>
-          <a:lstStyle/>
-          <a:p>
-            <a:pPr algn="ctr"/>
-            <a:r>
-              <a:rPr sz="1100" b="1">
-                <a:solidFill>
-                  <a:srgbClr val="FFFFFF"/>
-                </a:solidFill>
-                <a:latin typeface="メイリオ"/>
-                <a:ea typeface="メイリオ"/>
-              </a:rPr>
-              <a:t>業務フロー</a:t>
-            </a:r>
-          </a:p>
-        </p:txBody>
-      </p:sp>
-      <p:sp>
-        <p:nvSpPr>
-          <p:cNvPr id="9" name="TextBox 8"/>
-          <p:cNvSpPr txBox="1"/>
-          <p:nvPr/>
-        </p:nvSpPr>
-        <p:spPr>
-          <a:xfrm>
-            <a:off x="2150000" y="2270000"/>
-            <a:ext cx="7200000" cy="400000"/>
-          </a:xfrm>
-          <a:prstGeom prst="rect">
-            <a:avLst/>
-          </a:prstGeom>
-          <a:noFill/>
-        </p:spPr>
-        <p:txBody>
-          <a:bodyPr wrap="square">
-            <a:spAutoFit/>
-          </a:bodyPr>
-          <a:lstStyle/>
-          <a:p>
-            <a:pPr algn="l"/>
-            <a:r>
-              <a:rPr sz="1200" b="0">
-                <a:solidFill>
-                  <a:srgbClr val="333333"/>
-                </a:solidFill>
-                <a:latin typeface="メイリオ"/>
-                <a:ea typeface="メイリオ"/>
-              </a:rPr>
-              <a:t>8/24：サプライヤー／商品／在庫／会員　｜　8/27：受注／マイページ・その他</a:t>
-            </a:r>
-          </a:p>
-        </p:txBody>
-      </p:sp>
-      <p:sp>
-        <p:nvSpPr>
-          <p:cNvPr id="10" name="Rounded Rectangle 9"/>
-          <p:cNvSpPr/>
-          <p:nvPr/>
-        </p:nvSpPr>
-        <p:spPr>
-          <a:xfrm>
-            <a:off x="450000" y="2900000"/>
-            <a:ext cx="1500000" cy="450000"/>
-          </a:xfrm>
-          <a:prstGeom prst="roundRect">
-            <a:avLst/>
-          </a:prstGeom>
-          <a:solidFill>
-            <a:srgbClr val="00A693"/>
-          </a:solidFill>
-          <a:ln>
-            <a:noFill/>
-          </a:ln>
-        </p:spPr>
-        <p:style>
-          <a:lnRef idx="1">
-            <a:schemeClr val="accent1"/>
-          </a:lnRef>
-          <a:fillRef idx="3">
-            <a:schemeClr val="accent1"/>
-          </a:fillRef>
-          <a:effectRef idx="2">
-            <a:schemeClr val="accent1"/>
-          </a:effectRef>
-          <a:fontRef idx="minor">
-            <a:schemeClr val="lt1"/>
-          </a:fontRef>
-        </p:style>
-        <p:txBody>
-          <a:bodyPr rtlCol="0" anchor="ctr"/>
-          <a:lstStyle/>
-          <a:p>
-            <a:pPr algn="ctr"/>
-            <a:r>
-              <a:rPr sz="1100" b="1">
-                <a:solidFill>
-                  <a:srgbClr val="FFFFFF"/>
-                </a:solidFill>
-                <a:latin typeface="メイリオ"/>
-                <a:ea typeface="メイリオ"/>
-              </a:rPr>
-              <a:t>機能詳細</a:t>
-            </a:r>
-          </a:p>
-        </p:txBody>
-      </p:sp>
-      <p:sp>
-        <p:nvSpPr>
-          <p:cNvPr id="11" name="TextBox 10"/>
-          <p:cNvSpPr txBox="1"/>
-          <p:nvPr/>
-        </p:nvSpPr>
-        <p:spPr>
-          <a:xfrm>
-            <a:off x="2150000" y="2970000"/>
-            <a:ext cx="7200000" cy="400000"/>
-          </a:xfrm>
-          <a:prstGeom prst="rect">
-            <a:avLst/>
-          </a:prstGeom>
-          <a:noFill/>
-        </p:spPr>
-        <p:txBody>
-          <a:bodyPr wrap="square">
-            <a:spAutoFit/>
-          </a:bodyPr>
-          <a:lstStyle/>
-          <a:p>
-            <a:pPr algn="l"/>
-            <a:r>
-              <a:rPr sz="1200" b="0">
-                <a:solidFill>
-                  <a:srgbClr val="333333"/>
-                </a:solidFill>
-                <a:latin typeface="メイリオ"/>
-                <a:ea typeface="メイリオ"/>
-              </a:rPr>
-              <a:t>画面機能設計書と機能詳細フローを用いてFit&amp;Gap。フロントサイト確認は2回目で実施</a:t>
-            </a:r>
-          </a:p>
-        </p:txBody>
-      </p:sp>
-      <p:sp>
-        <p:nvSpPr>
-          <p:cNvPr id="12" name="Rounded Rectangle 11"/>
-          <p:cNvSpPr/>
-          <p:nvPr/>
-        </p:nvSpPr>
-        <p:spPr>
-          <a:xfrm>
-            <a:off x="450000" y="3600000"/>
-            <a:ext cx="1500000" cy="450000"/>
-          </a:xfrm>
-          <a:prstGeom prst="roundRect">
-            <a:avLst/>
-          </a:prstGeom>
-          <a:solidFill>
-            <a:srgbClr val="00A693"/>
-          </a:solidFill>
-          <a:ln>
-            <a:noFill/>
-          </a:ln>
-        </p:spPr>
-        <p:style>
-          <a:lnRef idx="1">
-            <a:schemeClr val="accent1"/>
-          </a:lnRef>
-          <a:fillRef idx="3">
-            <a:schemeClr val="accent1"/>
-          </a:fillRef>
-          <a:effectRef idx="2">
-            <a:schemeClr val="accent1"/>
-          </a:effectRef>
-          <a:fontRef idx="minor">
-            <a:schemeClr val="lt1"/>
-          </a:fontRef>
-        </p:style>
-        <p:txBody>
-          <a:bodyPr rtlCol="0" anchor="ctr"/>
-          <a:lstStyle/>
-          <a:p>
-            <a:pPr algn="ctr"/>
-            <a:r>
-              <a:rPr sz="1100" b="1">
-                <a:solidFill>
-                  <a:srgbClr val="FFFFFF"/>
-                </a:solidFill>
-                <a:latin typeface="メイリオ"/>
-                <a:ea typeface="メイリオ"/>
-              </a:rPr>
-              <a:t>対象外</a:t>
-            </a:r>
-          </a:p>
-        </p:txBody>
-      </p:sp>
-      <p:sp>
-        <p:nvSpPr>
-          <p:cNvPr id="13" name="TextBox 12"/>
-          <p:cNvSpPr txBox="1"/>
-          <p:nvPr/>
-        </p:nvSpPr>
-        <p:spPr>
-          <a:xfrm>
-            <a:off x="2150000" y="3670000"/>
-            <a:ext cx="7200000" cy="400000"/>
-          </a:xfrm>
-          <a:prstGeom prst="rect">
-            <a:avLst/>
-          </a:prstGeom>
-          <a:noFill/>
-        </p:spPr>
-        <p:txBody>
-          <a:bodyPr wrap="square">
-            <a:spAutoFit/>
-          </a:bodyPr>
-          <a:lstStyle/>
-          <a:p>
-            <a:pPr algn="l"/>
-            <a:r>
-              <a:rPr sz="1200" b="0">
-                <a:solidFill>
-                  <a:srgbClr val="333333"/>
-                </a:solidFill>
-                <a:latin typeface="メイリオ"/>
-                <a:ea typeface="メイリオ"/>
-              </a:rPr>
-              <a:t>見積管理は本案件では利用しないため対象外</a:t>
-            </a:r>
-          </a:p>
-        </p:txBody>
-      </p:sp>
-      <p:sp>
-        <p:nvSpPr>
-          <p:cNvPr id="14" name="Rounded Rectangle 13"/>
-          <p:cNvSpPr/>
-          <p:nvPr/>
-        </p:nvSpPr>
-        <p:spPr>
-          <a:xfrm>
-            <a:off x="450000" y="4300000"/>
-            <a:ext cx="1500000" cy="450000"/>
-          </a:xfrm>
-          <a:prstGeom prst="roundRect">
-            <a:avLst/>
-          </a:prstGeom>
-          <a:solidFill>
-            <a:srgbClr val="00A693"/>
-          </a:solidFill>
-          <a:ln>
-            <a:noFill/>
-          </a:ln>
-        </p:spPr>
-        <p:style>
-          <a:lnRef idx="1">
-            <a:schemeClr val="accent1"/>
-          </a:lnRef>
-          <a:fillRef idx="3">
-            <a:schemeClr val="accent1"/>
-          </a:fillRef>
-          <a:effectRef idx="2">
-            <a:schemeClr val="accent1"/>
-          </a:effectRef>
-          <a:fontRef idx="minor">
-            <a:schemeClr val="lt1"/>
-          </a:fontRef>
-        </p:style>
-        <p:txBody>
-          <a:bodyPr rtlCol="0" anchor="ctr"/>
-          <a:lstStyle/>
-          <a:p>
-            <a:pPr algn="ctr"/>
-            <a:r>
-              <a:rPr sz="1100" b="1">
-                <a:solidFill>
-                  <a:srgbClr val="FFFFFF"/>
-                </a:solidFill>
-                <a:latin typeface="メイリオ"/>
-                <a:ea typeface="メイリオ"/>
-              </a:rPr>
-              <a:t>成果物</a:t>
-            </a:r>
-          </a:p>
-        </p:txBody>
-      </p:sp>
-      <p:sp>
-        <p:nvSpPr>
-          <p:cNvPr id="15" name="TextBox 14"/>
-          <p:cNvSpPr txBox="1"/>
-          <p:nvPr/>
-        </p:nvSpPr>
-        <p:spPr>
-          <a:xfrm>
-            <a:off x="2150000" y="4370000"/>
-            <a:ext cx="7200000" cy="400000"/>
-          </a:xfrm>
-          <a:prstGeom prst="rect">
-            <a:avLst/>
-          </a:prstGeom>
-          <a:noFill/>
-        </p:spPr>
-        <p:txBody>
-          <a:bodyPr wrap="square">
-            <a:spAutoFit/>
-          </a:bodyPr>
-          <a:lstStyle/>
-          <a:p>
-            <a:pPr algn="l"/>
-            <a:r>
-              <a:rPr sz="1200" b="0">
-                <a:solidFill>
-                  <a:srgbClr val="333333"/>
-                </a:solidFill>
-                <a:latin typeface="メイリオ"/>
-                <a:ea typeface="メイリオ"/>
-              </a:rPr>
-              <a:t>要件定義書、議事録（お見積り書記載の成果物に準拠）</a:t>
-            </a:r>
-          </a:p>
-        </p:txBody>
-      </p:sp>
-      <p:sp>
-        <p:nvSpPr>
-          <p:cNvPr id="16" name="Rounded Rectangle 15"/>
-          <p:cNvSpPr/>
-          <p:nvPr/>
-        </p:nvSpPr>
-        <p:spPr>
-          <a:xfrm>
-            <a:off x="450000" y="5000000"/>
-            <a:ext cx="1500000" cy="450000"/>
-          </a:xfrm>
-          <a:prstGeom prst="roundRect">
-            <a:avLst/>
-          </a:prstGeom>
-          <a:solidFill>
-            <a:srgbClr val="00A693"/>
-          </a:solidFill>
-          <a:ln>
-            <a:noFill/>
-          </a:ln>
-        </p:spPr>
-        <p:style>
-          <a:lnRef idx="1">
-            <a:schemeClr val="accent1"/>
-          </a:lnRef>
-          <a:fillRef idx="3">
-            <a:schemeClr val="accent1"/>
-          </a:fillRef>
-          <a:effectRef idx="2">
-            <a:schemeClr val="accent1"/>
-          </a:effectRef>
-          <a:fontRef idx="minor">
-            <a:schemeClr val="lt1"/>
-          </a:fontRef>
-        </p:style>
-        <p:txBody>
-          <a:bodyPr rtlCol="0" anchor="ctr"/>
-          <a:lstStyle/>
-          <a:p>
-            <a:pPr algn="ctr"/>
-            <a:r>
-              <a:rPr sz="1100" b="1">
-                <a:solidFill>
-                  <a:srgbClr val="FFFFFF"/>
-                </a:solidFill>
-                <a:latin typeface="メイリオ"/>
-                <a:ea typeface="メイリオ"/>
-              </a:rPr>
-              <a:t>日程調整</a:t>
-            </a:r>
-          </a:p>
-        </p:txBody>
-      </p:sp>
-      <p:sp>
-        <p:nvSpPr>
-          <p:cNvPr id="17" name="TextBox 16"/>
-          <p:cNvSpPr txBox="1"/>
-          <p:nvPr/>
-        </p:nvSpPr>
-        <p:spPr>
-          <a:xfrm>
-            <a:off x="2150000" y="5070000"/>
-            <a:ext cx="7200000" cy="400000"/>
-          </a:xfrm>
-          <a:prstGeom prst="rect">
-            <a:avLst/>
-          </a:prstGeom>
-          <a:noFill/>
-        </p:spPr>
-        <p:txBody>
-          <a:bodyPr wrap="square">
-            <a:spAutoFit/>
-          </a:bodyPr>
-          <a:lstStyle/>
-          <a:p>
-            <a:pPr algn="l"/>
-            <a:r>
-              <a:rPr sz="1200" b="0">
-                <a:solidFill>
-                  <a:srgbClr val="333333"/>
-                </a:solidFill>
-                <a:latin typeface="メイリオ"/>
-                <a:ea typeface="メイリオ"/>
-              </a:rPr>
-              <a:t>本表の日付は仮置き（9/3含む）。貴社ご都合に合わせて調整</a:t>
-            </a:r>
-          </a:p>
-        </p:txBody>
-      </p:sp>
-      <p:sp>
-        <p:nvSpPr>
-          <p:cNvPr id="18" name="Rounded Rectangle 17"/>
-          <p:cNvSpPr/>
-          <p:nvPr/>
-        </p:nvSpPr>
-        <p:spPr>
-          <a:xfrm>
-            <a:off x="450000" y="5700000"/>
-            <a:ext cx="1500000" cy="450000"/>
-          </a:xfrm>
-          <a:prstGeom prst="roundRect">
-            <a:avLst/>
-          </a:prstGeom>
-          <a:solidFill>
-            <a:srgbClr val="00A693"/>
-          </a:solidFill>
-          <a:ln>
-            <a:noFill/>
-          </a:ln>
-        </p:spPr>
-        <p:style>
-          <a:lnRef idx="1">
-            <a:schemeClr val="accent1"/>
-          </a:lnRef>
-          <a:fillRef idx="3">
-            <a:schemeClr val="accent1"/>
-          </a:fillRef>
-          <a:effectRef idx="2">
-            <a:schemeClr val="accent1"/>
-          </a:effectRef>
-          <a:fontRef idx="minor">
-            <a:schemeClr val="lt1"/>
-          </a:fontRef>
-        </p:style>
-        <p:txBody>
-          <a:bodyPr rtlCol="0" anchor="ctr"/>
-          <a:lstStyle/>
-          <a:p>
-            <a:pPr algn="ctr"/>
-            <a:r>
-              <a:rPr sz="1100" b="1">
-                <a:solidFill>
-                  <a:srgbClr val="FFFFFF"/>
-                </a:solidFill>
-                <a:latin typeface="メイリオ"/>
-                <a:ea typeface="メイリオ"/>
-              </a:rPr>
-              <a:t>後続工程</a:t>
-            </a:r>
-          </a:p>
-        </p:txBody>
-      </p:sp>
-      <p:sp>
-        <p:nvSpPr>
-          <p:cNvPr id="19" name="TextBox 18"/>
-          <p:cNvSpPr txBox="1"/>
-          <p:nvPr/>
-        </p:nvSpPr>
-        <p:spPr>
-          <a:xfrm>
-            <a:off x="2150000" y="5770000"/>
-            <a:ext cx="7200000" cy="400000"/>
-          </a:xfrm>
-          <a:prstGeom prst="rect">
-            <a:avLst/>
-          </a:prstGeom>
-          <a:noFill/>
-        </p:spPr>
-        <p:txBody>
-          <a:bodyPr wrap="square">
-            <a:spAutoFit/>
-          </a:bodyPr>
-          <a:lstStyle/>
-          <a:p>
-            <a:pPr algn="l"/>
-            <a:r>
-              <a:rPr sz="1200" b="0">
-                <a:solidFill>
-                  <a:srgbClr val="333333"/>
-                </a:solidFill>
-                <a:latin typeface="メイリオ"/>
-                <a:ea typeface="メイリオ"/>
-              </a:rPr>
-              <a:t>要件定義完了後、開発工程の正式見積り提示・ご発注へ移行</a:t>
+              <a:t>・入荷予定はECへのCSV取込前提とし、現行入荷予定データのご提供は不要です。</a:t>
             </a:r>
           </a:p>
         </p:txBody>

--- a/要件定義WBS案_20260806.pptx
+++ b/要件定義WBS案_20260806.pptx
@@ -3187,7 +3187,7 @@
         </p:nvSpPr>
         <p:spPr>
           <a:xfrm>
-            <a:off x="800000" y="1700000"/>
+            <a:off x="800000" y="1800000"/>
             <a:ext cx="8300000" cy="450000"/>
           </a:xfrm>
           <a:prstGeom prst="rect">
@@ -3223,7 +3223,7 @@
         </p:nvSpPr>
         <p:spPr>
           <a:xfrm>
-            <a:off x="600000" y="2400000"/>
+            <a:off x="600000" y="2500000"/>
             <a:ext cx="8700000" cy="700000"/>
           </a:xfrm>
           <a:prstGeom prst="rect">
@@ -3259,7 +3259,7 @@
         </p:nvSpPr>
         <p:spPr>
           <a:xfrm>
-            <a:off x="800000" y="3300000"/>
+            <a:off x="800000" y="3400000"/>
             <a:ext cx="8300000" cy="400000"/>
           </a:xfrm>
           <a:prstGeom prst="rect">
@@ -3282,7 +3282,7 @@
                 <a:latin typeface="メイリオ"/>
                 <a:ea typeface="メイリオ"/>
               </a:rPr>
-              <a:t>最終目標：システム化の範囲 ／ 業務上のルール ／ 外部仕様 を明確化</a:t>
+              <a:t>最終目標：システム化の範囲 ／ 業務上のルール ／ 外部仕様</a:t>
             </a:r>
           </a:p>
         </p:txBody>
@@ -3295,7 +3295,7 @@
         </p:nvSpPr>
         <p:spPr>
           <a:xfrm>
-            <a:off x="800000" y="4000000"/>
+            <a:off x="800000" y="4100000"/>
             <a:ext cx="8300000" cy="350000"/>
           </a:xfrm>
           <a:prstGeom prst="rect">
@@ -3331,7 +3331,7 @@
         </p:nvSpPr>
         <p:spPr>
           <a:xfrm>
-            <a:off x="800000" y="4600000"/>
+            <a:off x="800000" y="4700000"/>
             <a:ext cx="8300000" cy="350000"/>
           </a:xfrm>
           <a:prstGeom prst="rect">
@@ -3385,8 +3385,8 @@
         </p:nvSpPr>
         <p:spPr>
           <a:xfrm>
-            <a:off x="300000" y="160000"/>
-            <a:ext cx="70000" cy="360000"/>
+            <a:off x="280000" y="140000"/>
+            <a:ext cx="70000" cy="340000"/>
           </a:xfrm>
           <a:prstGeom prst="rect">
             <a:avLst/>
@@ -3428,8 +3428,8 @@
         </p:nvSpPr>
         <p:spPr>
           <a:xfrm>
-            <a:off x="420000" y="140000"/>
-            <a:ext cx="9000000" cy="380000"/>
+            <a:off x="400000" y="120000"/>
+            <a:ext cx="9200000" cy="360000"/>
           </a:xfrm>
           <a:prstGeom prst="rect">
             <a:avLst/>
@@ -3451,21 +3451,194 @@
                 <a:latin typeface="メイリオ"/>
                 <a:ea typeface="メイリオ"/>
               </a:rPr>
-              <a:t>要件定義のゴール・前提・進め方</a:t>
-            </a:r>
-          </a:p>
-        </p:txBody>
-      </p:sp>
-      <p:sp>
-        <p:nvSpPr>
-          <p:cNvPr id="4" name="Rounded Rectangle 3"/>
+              <a:t>要件定義の進め方（Input → Process → Output）</a:t>
+            </a:r>
+          </a:p>
+        </p:txBody>
+      </p:sp>
+      <p:sp>
+        <p:nvSpPr>
+          <p:cNvPr id="4" name="TextBox 3"/>
+          <p:cNvSpPr txBox="1"/>
+          <p:nvPr/>
+        </p:nvSpPr>
+        <p:spPr>
+          <a:xfrm>
+            <a:off x="400000" y="500000"/>
+            <a:ext cx="9200000" cy="250000"/>
+          </a:xfrm>
+          <a:prstGeom prst="rect">
+            <a:avLst/>
+          </a:prstGeom>
+          <a:noFill/>
+        </p:spPr>
+        <p:txBody>
+          <a:bodyPr wrap="square">
+            <a:spAutoFit/>
+          </a:bodyPr>
+          <a:lstStyle/>
+          <a:p>
+            <a:pPr algn="l"/>
+            <a:r>
+              <a:rPr sz="1100" b="0">
+                <a:solidFill>
+                  <a:srgbClr val="666666"/>
+                </a:solidFill>
+                <a:latin typeface="メイリオ"/>
+                <a:ea typeface="メイリオ"/>
+              </a:rPr>
+              <a:t>前提：基幹運用は変えない ／ 業務を効率化したい ／ 取引先とのビジネスルールは変えない</a:t>
+            </a:r>
+          </a:p>
+        </p:txBody>
+      </p:sp>
+      <p:sp>
+        <p:nvSpPr>
+          <p:cNvPr id="5" name="Rounded Rectangle 4"/>
           <p:cNvSpPr/>
           <p:nvPr/>
         </p:nvSpPr>
         <p:spPr>
           <a:xfrm>
-            <a:off x="400000" y="700000"/>
-            <a:ext cx="2900000" cy="1400000"/>
+            <a:off x="350000" y="850000"/>
+            <a:ext cx="2600000" cy="1600000"/>
+          </a:xfrm>
+          <a:prstGeom prst="roundRect">
+            <a:avLst/>
+          </a:prstGeom>
+          <a:solidFill>
+            <a:srgbClr val="FFF3E8"/>
+          </a:solidFill>
+          <a:ln>
+            <a:solidFill>
+              <a:srgbClr val="E67E22"/>
+            </a:solidFill>
+          </a:ln>
+        </p:spPr>
+        <p:style>
+          <a:lnRef idx="1">
+            <a:schemeClr val="accent1"/>
+          </a:lnRef>
+          <a:fillRef idx="3">
+            <a:schemeClr val="accent1"/>
+          </a:fillRef>
+          <a:effectRef idx="2">
+            <a:schemeClr val="accent1"/>
+          </a:effectRef>
+          <a:fontRef idx="minor">
+            <a:schemeClr val="lt1"/>
+          </a:fontRef>
+        </p:style>
+        <p:txBody>
+          <a:bodyPr rtlCol="0" anchor="ctr"/>
+          <a:lstStyle/>
+          <a:p>
+            <a:pPr algn="l"/>
+            <a:r>
+              <a:rPr sz="900" b="1">
+                <a:solidFill>
+                  <a:srgbClr val="E67E22"/>
+                </a:solidFill>
+                <a:latin typeface="メイリオ"/>
+                <a:ea typeface="メイリオ"/>
+              </a:rPr>
+              <a:t>【Input】</a:t>
+            </a:r>
+          </a:p>
+          <a:p>
+            <a:pPr algn="l"/>
+            <a:r>
+              <a:rPr sz="900" b="0">
+                <a:solidFill>
+                  <a:srgbClr val="333333"/>
+                </a:solidFill>
+                <a:latin typeface="メイリオ"/>
+                <a:ea typeface="メイリオ"/>
+              </a:rPr>
+              <a:t>・現状の要望・ヒアリング内容</a:t>
+            </a:r>
+          </a:p>
+          <a:p>
+            <a:pPr algn="l"/>
+            <a:r>
+              <a:rPr sz="900" b="0">
+                <a:solidFill>
+                  <a:srgbClr val="333333"/>
+                </a:solidFill>
+                <a:latin typeface="メイリオ"/>
+                <a:ea typeface="メイリオ"/>
+              </a:rPr>
+              <a:t>・取引先／配送先マスタサンプル</a:t>
+            </a:r>
+          </a:p>
+          <a:p>
+            <a:pPr algn="l"/>
+            <a:r>
+              <a:rPr sz="900" b="0">
+                <a:solidFill>
+                  <a:srgbClr val="333333"/>
+                </a:solidFill>
+                <a:latin typeface="メイリオ"/>
+                <a:ea typeface="メイリオ"/>
+              </a:rPr>
+              <a:t>・受注集計表（Excel）サンプル</a:t>
+            </a:r>
+          </a:p>
+        </p:txBody>
+      </p:sp>
+      <p:sp>
+        <p:nvSpPr>
+          <p:cNvPr id="6" name="Right Arrow 5"/>
+          <p:cNvSpPr/>
+          <p:nvPr/>
+        </p:nvSpPr>
+        <p:spPr>
+          <a:xfrm>
+            <a:off x="2970000" y="1570000"/>
+            <a:ext cx="160000" cy="160000"/>
+          </a:xfrm>
+          <a:prstGeom prst="rightArrow">
+            <a:avLst/>
+          </a:prstGeom>
+          <a:solidFill>
+            <a:srgbClr val="00A693"/>
+          </a:solidFill>
+          <a:ln>
+            <a:noFill/>
+          </a:ln>
+        </p:spPr>
+        <p:style>
+          <a:lnRef idx="1">
+            <a:schemeClr val="accent1"/>
+          </a:lnRef>
+          <a:fillRef idx="3">
+            <a:schemeClr val="accent1"/>
+          </a:fillRef>
+          <a:effectRef idx="2">
+            <a:schemeClr val="accent1"/>
+          </a:effectRef>
+          <a:fontRef idx="minor">
+            <a:schemeClr val="lt1"/>
+          </a:fontRef>
+        </p:style>
+        <p:txBody>
+          <a:bodyPr rtlCol="0" anchor="ctr"/>
+          <a:lstStyle/>
+          <a:p>
+            <a:pPr algn="ctr"/>
+          </a:p>
+        </p:txBody>
+      </p:sp>
+      <p:sp>
+        <p:nvSpPr>
+          <p:cNvPr id="7" name="Rounded Rectangle 6"/>
+          <p:cNvSpPr/>
+          <p:nvPr/>
+        </p:nvSpPr>
+        <p:spPr>
+          <a:xfrm>
+            <a:off x="3150000" y="850000"/>
+            <a:ext cx="3000000" cy="1600000"/>
           </a:xfrm>
           <a:prstGeom prst="roundRect">
             <a:avLst/>
@@ -3473,7 +3646,7 @@
           <a:solidFill>
             <a:srgbClr val="DEF3F1"/>
           </a:solidFill>
-          <a:ln>
+          <a:ln w="19050">
             <a:solidFill>
               <a:srgbClr val="00A693"/>
             </a:solidFill>
@@ -3494,46 +3667,320 @@
           </a:fontRef>
         </p:style>
         <p:txBody>
-          <a:bodyPr rtlCol="0" anchor="ctr" wrap="square"/>
+          <a:bodyPr rtlCol="0" anchor="ctr"/>
           <a:lstStyle/>
           <a:p>
             <a:pPr algn="ctr"/>
             <a:r>
-              <a:rPr sz="1400" b="1">
+              <a:rPr sz="1300" b="1">
                 <a:solidFill>
                   <a:srgbClr val="007A6E"/>
                 </a:solidFill>
                 <a:latin typeface="メイリオ"/>
                 <a:ea typeface="メイリオ"/>
               </a:rPr>
-              <a:t>システム化の範囲</a:t>
-            </a:r>
-          </a:p>
+              <a:t>1. システム化する業務の整理</a:t>
+            </a:r>
+          </a:p>
+        </p:txBody>
+      </p:sp>
+      <p:sp>
+        <p:nvSpPr>
+          <p:cNvPr id="8" name="Right Arrow 7"/>
+          <p:cNvSpPr/>
+          <p:nvPr/>
+        </p:nvSpPr>
+        <p:spPr>
+          <a:xfrm>
+            <a:off x="6170000" y="1570000"/>
+            <a:ext cx="160000" cy="160000"/>
+          </a:xfrm>
+          <a:prstGeom prst="rightArrow">
+            <a:avLst/>
+          </a:prstGeom>
+          <a:solidFill>
+            <a:srgbClr val="00A693"/>
+          </a:solidFill>
+          <a:ln>
+            <a:noFill/>
+          </a:ln>
+        </p:spPr>
+        <p:style>
+          <a:lnRef idx="1">
+            <a:schemeClr val="accent1"/>
+          </a:lnRef>
+          <a:fillRef idx="3">
+            <a:schemeClr val="accent1"/>
+          </a:fillRef>
+          <a:effectRef idx="2">
+            <a:schemeClr val="accent1"/>
+          </a:effectRef>
+          <a:fontRef idx="minor">
+            <a:schemeClr val="lt1"/>
+          </a:fontRef>
+        </p:style>
+        <p:txBody>
+          <a:bodyPr rtlCol="0" anchor="ctr"/>
+          <a:lstStyle/>
           <a:p>
             <a:pPr algn="ctr"/>
-            <a:r>
-              <a:rPr sz="1100" b="0">
+          </a:p>
+        </p:txBody>
+      </p:sp>
+      <p:sp>
+        <p:nvSpPr>
+          <p:cNvPr id="9" name="Rounded Rectangle 8"/>
+          <p:cNvSpPr/>
+          <p:nvPr/>
+        </p:nvSpPr>
+        <p:spPr>
+          <a:xfrm>
+            <a:off x="6350000" y="850000"/>
+            <a:ext cx="2600000" cy="1600000"/>
+          </a:xfrm>
+          <a:prstGeom prst="roundRect">
+            <a:avLst/>
+          </a:prstGeom>
+          <a:solidFill>
+            <a:srgbClr val="E8F5E9"/>
+          </a:solidFill>
+          <a:ln>
+            <a:solidFill>
+              <a:srgbClr val="2E7D32"/>
+            </a:solidFill>
+          </a:ln>
+        </p:spPr>
+        <p:style>
+          <a:lnRef idx="1">
+            <a:schemeClr val="accent1"/>
+          </a:lnRef>
+          <a:fillRef idx="3">
+            <a:schemeClr val="accent1"/>
+          </a:fillRef>
+          <a:effectRef idx="2">
+            <a:schemeClr val="accent1"/>
+          </a:effectRef>
+          <a:fontRef idx="minor">
+            <a:schemeClr val="lt1"/>
+          </a:fontRef>
+        </p:style>
+        <p:txBody>
+          <a:bodyPr rtlCol="0" anchor="ctr"/>
+          <a:lstStyle/>
+          <a:p>
+            <a:pPr algn="l"/>
+            <a:r>
+              <a:rPr sz="900" b="1">
+                <a:solidFill>
+                  <a:srgbClr val="2E7D32"/>
+                </a:solidFill>
+                <a:latin typeface="メイリオ"/>
+                <a:ea typeface="メイリオ"/>
+              </a:rPr>
+              <a:t>【Output】</a:t>
+            </a:r>
+          </a:p>
+          <a:p>
+            <a:pPr algn="l"/>
+            <a:r>
+              <a:rPr sz="900" b="0">
                 <a:solidFill>
                   <a:srgbClr val="333333"/>
                 </a:solidFill>
                 <a:latin typeface="メイリオ"/>
                 <a:ea typeface="メイリオ"/>
               </a:rPr>
-              <a:t>何をEC化し、何を基幹／現行運用に残すかを確定</a:t>
-            </a:r>
-          </a:p>
-        </p:txBody>
-      </p:sp>
-      <p:sp>
-        <p:nvSpPr>
-          <p:cNvPr id="5" name="Rounded Rectangle 4"/>
+              <a:t>・登場人物・関連システム</a:t>
+            </a:r>
+          </a:p>
+          <a:p>
+            <a:pPr algn="l"/>
+            <a:r>
+              <a:rPr sz="900" b="0">
+                <a:solidFill>
+                  <a:srgbClr val="333333"/>
+                </a:solidFill>
+                <a:latin typeface="メイリオ"/>
+                <a:ea typeface="メイリオ"/>
+              </a:rPr>
+              <a:t>・業務一覧（正常系＋例外系）</a:t>
+            </a:r>
+          </a:p>
+          <a:p>
+            <a:pPr algn="l"/>
+            <a:r>
+              <a:rPr sz="900" b="0">
+                <a:solidFill>
+                  <a:srgbClr val="333333"/>
+                </a:solidFill>
+                <a:latin typeface="メイリオ"/>
+                <a:ea typeface="メイリオ"/>
+              </a:rPr>
+              <a:t>・システム化の範囲</a:t>
+            </a:r>
+          </a:p>
+          <a:p>
+            <a:pPr algn="l"/>
+            <a:r>
+              <a:rPr sz="900" b="0">
+                <a:solidFill>
+                  <a:srgbClr val="333333"/>
+                </a:solidFill>
+                <a:latin typeface="メイリオ"/>
+                <a:ea typeface="メイリオ"/>
+              </a:rPr>
+              <a:t>・業務上のルール</a:t>
+            </a:r>
+          </a:p>
+        </p:txBody>
+      </p:sp>
+      <p:sp>
+        <p:nvSpPr>
+          <p:cNvPr id="10" name="Rounded Rectangle 9"/>
           <p:cNvSpPr/>
           <p:nvPr/>
         </p:nvSpPr>
         <p:spPr>
           <a:xfrm>
-            <a:off x="3500000" y="700000"/>
-            <a:ext cx="2900000" cy="1400000"/>
+            <a:off x="350000" y="2650000"/>
+            <a:ext cx="2600000" cy="1600000"/>
+          </a:xfrm>
+          <a:prstGeom prst="roundRect">
+            <a:avLst/>
+          </a:prstGeom>
+          <a:solidFill>
+            <a:srgbClr val="FFF3E8"/>
+          </a:solidFill>
+          <a:ln>
+            <a:solidFill>
+              <a:srgbClr val="E67E22"/>
+            </a:solidFill>
+          </a:ln>
+        </p:spPr>
+        <p:style>
+          <a:lnRef idx="1">
+            <a:schemeClr val="accent1"/>
+          </a:lnRef>
+          <a:fillRef idx="3">
+            <a:schemeClr val="accent1"/>
+          </a:fillRef>
+          <a:effectRef idx="2">
+            <a:schemeClr val="accent1"/>
+          </a:effectRef>
+          <a:fontRef idx="minor">
+            <a:schemeClr val="lt1"/>
+          </a:fontRef>
+        </p:style>
+        <p:txBody>
+          <a:bodyPr rtlCol="0" anchor="ctr"/>
+          <a:lstStyle/>
+          <a:p>
+            <a:pPr algn="l"/>
+            <a:r>
+              <a:rPr sz="900" b="1">
+                <a:solidFill>
+                  <a:srgbClr val="E67E22"/>
+                </a:solidFill>
+                <a:latin typeface="メイリオ"/>
+                <a:ea typeface="メイリオ"/>
+              </a:rPr>
+              <a:t>【Input】</a:t>
+            </a:r>
+          </a:p>
+          <a:p>
+            <a:pPr algn="l"/>
+            <a:r>
+              <a:rPr sz="900" b="0">
+                <a:solidFill>
+                  <a:srgbClr val="333333"/>
+                </a:solidFill>
+                <a:latin typeface="メイリオ"/>
+                <a:ea typeface="メイリオ"/>
+              </a:rPr>
+              <a:t>・商品CSVフォーマット・項目定義</a:t>
+            </a:r>
+          </a:p>
+          <a:p>
+            <a:pPr algn="l"/>
+            <a:r>
+              <a:rPr sz="900" b="0">
+                <a:solidFill>
+                  <a:srgbClr val="333333"/>
+                </a:solidFill>
+                <a:latin typeface="メイリオ"/>
+                <a:ea typeface="メイリオ"/>
+              </a:rPr>
+              <a:t>・在庫CSVフォーマット・項目定義</a:t>
+            </a:r>
+          </a:p>
+          <a:p>
+            <a:pPr algn="l"/>
+            <a:r>
+              <a:rPr sz="900" b="0">
+                <a:solidFill>
+                  <a:srgbClr val="333333"/>
+                </a:solidFill>
+                <a:latin typeface="メイリオ"/>
+                <a:ea typeface="メイリオ"/>
+              </a:rPr>
+              <a:t>・基幹運用は変えない前提</a:t>
+            </a:r>
+          </a:p>
+        </p:txBody>
+      </p:sp>
+      <p:sp>
+        <p:nvSpPr>
+          <p:cNvPr id="11" name="Right Arrow 10"/>
+          <p:cNvSpPr/>
+          <p:nvPr/>
+        </p:nvSpPr>
+        <p:spPr>
+          <a:xfrm>
+            <a:off x="2970000" y="3370000"/>
+            <a:ext cx="160000" cy="160000"/>
+          </a:xfrm>
+          <a:prstGeom prst="rightArrow">
+            <a:avLst/>
+          </a:prstGeom>
+          <a:solidFill>
+            <a:srgbClr val="00A693"/>
+          </a:solidFill>
+          <a:ln>
+            <a:noFill/>
+          </a:ln>
+        </p:spPr>
+        <p:style>
+          <a:lnRef idx="1">
+            <a:schemeClr val="accent1"/>
+          </a:lnRef>
+          <a:fillRef idx="3">
+            <a:schemeClr val="accent1"/>
+          </a:fillRef>
+          <a:effectRef idx="2">
+            <a:schemeClr val="accent1"/>
+          </a:effectRef>
+          <a:fontRef idx="minor">
+            <a:schemeClr val="lt1"/>
+          </a:fontRef>
+        </p:style>
+        <p:txBody>
+          <a:bodyPr rtlCol="0" anchor="ctr"/>
+          <a:lstStyle/>
+          <a:p>
+            <a:pPr algn="ctr"/>
+          </a:p>
+        </p:txBody>
+      </p:sp>
+      <p:sp>
+        <p:nvSpPr>
+          <p:cNvPr id="12" name="Rounded Rectangle 11"/>
+          <p:cNvSpPr/>
+          <p:nvPr/>
+        </p:nvSpPr>
+        <p:spPr>
+          <a:xfrm>
+            <a:off x="3150000" y="2650000"/>
+            <a:ext cx="3000000" cy="1600000"/>
           </a:xfrm>
           <a:prstGeom prst="roundRect">
             <a:avLst/>
@@ -3541,7 +3988,7 @@
           <a:solidFill>
             <a:srgbClr val="DEF3F1"/>
           </a:solidFill>
-          <a:ln>
+          <a:ln w="19050">
             <a:solidFill>
               <a:srgbClr val="00A693"/>
             </a:solidFill>
@@ -3562,46 +4009,307 @@
           </a:fontRef>
         </p:style>
         <p:txBody>
-          <a:bodyPr rtlCol="0" anchor="ctr" wrap="square"/>
+          <a:bodyPr rtlCol="0" anchor="ctr"/>
           <a:lstStyle/>
           <a:p>
             <a:pPr algn="ctr"/>
             <a:r>
-              <a:rPr sz="1400" b="1">
+              <a:rPr sz="1300" b="1">
                 <a:solidFill>
                   <a:srgbClr val="007A6E"/>
                 </a:solidFill>
                 <a:latin typeface="メイリオ"/>
                 <a:ea typeface="メイリオ"/>
               </a:rPr>
-              <a:t>業務上のルール</a:t>
-            </a:r>
-          </a:p>
+              <a:t>2. 基幹システムの仕様の整理</a:t>
+            </a:r>
+          </a:p>
+        </p:txBody>
+      </p:sp>
+      <p:sp>
+        <p:nvSpPr>
+          <p:cNvPr id="13" name="Right Arrow 12"/>
+          <p:cNvSpPr/>
+          <p:nvPr/>
+        </p:nvSpPr>
+        <p:spPr>
+          <a:xfrm>
+            <a:off x="6170000" y="3370000"/>
+            <a:ext cx="160000" cy="160000"/>
+          </a:xfrm>
+          <a:prstGeom prst="rightArrow">
+            <a:avLst/>
+          </a:prstGeom>
+          <a:solidFill>
+            <a:srgbClr val="00A693"/>
+          </a:solidFill>
+          <a:ln>
+            <a:noFill/>
+          </a:ln>
+        </p:spPr>
+        <p:style>
+          <a:lnRef idx="1">
+            <a:schemeClr val="accent1"/>
+          </a:lnRef>
+          <a:fillRef idx="3">
+            <a:schemeClr val="accent1"/>
+          </a:fillRef>
+          <a:effectRef idx="2">
+            <a:schemeClr val="accent1"/>
+          </a:effectRef>
+          <a:fontRef idx="minor">
+            <a:schemeClr val="lt1"/>
+          </a:fontRef>
+        </p:style>
+        <p:txBody>
+          <a:bodyPr rtlCol="0" anchor="ctr"/>
+          <a:lstStyle/>
           <a:p>
             <a:pPr algn="ctr"/>
-            <a:r>
-              <a:rPr sz="1100" b="0">
+          </a:p>
+        </p:txBody>
+      </p:sp>
+      <p:sp>
+        <p:nvSpPr>
+          <p:cNvPr id="14" name="Rounded Rectangle 13"/>
+          <p:cNvSpPr/>
+          <p:nvPr/>
+        </p:nvSpPr>
+        <p:spPr>
+          <a:xfrm>
+            <a:off x="6350000" y="2650000"/>
+            <a:ext cx="2600000" cy="1600000"/>
+          </a:xfrm>
+          <a:prstGeom prst="roundRect">
+            <a:avLst/>
+          </a:prstGeom>
+          <a:solidFill>
+            <a:srgbClr val="E8F5E9"/>
+          </a:solidFill>
+          <a:ln>
+            <a:solidFill>
+              <a:srgbClr val="2E7D32"/>
+            </a:solidFill>
+          </a:ln>
+        </p:spPr>
+        <p:style>
+          <a:lnRef idx="1">
+            <a:schemeClr val="accent1"/>
+          </a:lnRef>
+          <a:fillRef idx="3">
+            <a:schemeClr val="accent1"/>
+          </a:fillRef>
+          <a:effectRef idx="2">
+            <a:schemeClr val="accent1"/>
+          </a:effectRef>
+          <a:fontRef idx="minor">
+            <a:schemeClr val="lt1"/>
+          </a:fontRef>
+        </p:style>
+        <p:txBody>
+          <a:bodyPr rtlCol="0" anchor="ctr"/>
+          <a:lstStyle/>
+          <a:p>
+            <a:pPr algn="l"/>
+            <a:r>
+              <a:rPr sz="900" b="1">
+                <a:solidFill>
+                  <a:srgbClr val="2E7D32"/>
+                </a:solidFill>
+                <a:latin typeface="メイリオ"/>
+                <a:ea typeface="メイリオ"/>
+              </a:rPr>
+              <a:t>【Output】</a:t>
+            </a:r>
+          </a:p>
+          <a:p>
+            <a:pPr algn="l"/>
+            <a:r>
+              <a:rPr sz="900" b="0">
                 <a:solidFill>
                   <a:srgbClr val="333333"/>
                 </a:solidFill>
                 <a:latin typeface="メイリオ"/>
                 <a:ea typeface="メイリオ"/>
               </a:rPr>
-              <a:t>引当・与信・キャンセル等、業務判断の条件を明文化</a:t>
-            </a:r>
-          </a:p>
-        </p:txBody>
-      </p:sp>
-      <p:sp>
-        <p:nvSpPr>
-          <p:cNvPr id="6" name="Rounded Rectangle 5"/>
+              <a:t>・基幹とECの役割分担</a:t>
+            </a:r>
+          </a:p>
+          <a:p>
+            <a:pPr algn="l"/>
+            <a:r>
+              <a:rPr sz="900" b="0">
+                <a:solidFill>
+                  <a:srgbClr val="333333"/>
+                </a:solidFill>
+                <a:latin typeface="メイリオ"/>
+                <a:ea typeface="メイリオ"/>
+              </a:rPr>
+              <a:t>・連携対象／非対象</a:t>
+            </a:r>
+          </a:p>
+          <a:p>
+            <a:pPr algn="l"/>
+            <a:r>
+              <a:rPr sz="900" b="0">
+                <a:solidFill>
+                  <a:srgbClr val="333333"/>
+                </a:solidFill>
+                <a:latin typeface="メイリオ"/>
+                <a:ea typeface="メイリオ"/>
+              </a:rPr>
+              <a:t>・連携外部仕様（方式・タイミング・フォーマット）</a:t>
+            </a:r>
+          </a:p>
+        </p:txBody>
+      </p:sp>
+      <p:sp>
+        <p:nvSpPr>
+          <p:cNvPr id="15" name="Rounded Rectangle 14"/>
           <p:cNvSpPr/>
           <p:nvPr/>
         </p:nvSpPr>
         <p:spPr>
           <a:xfrm>
-            <a:off x="6600000" y="700000"/>
-            <a:ext cx="2900000" cy="1400000"/>
+            <a:off x="350000" y="4450000"/>
+            <a:ext cx="2600000" cy="1600000"/>
+          </a:xfrm>
+          <a:prstGeom prst="roundRect">
+            <a:avLst/>
+          </a:prstGeom>
+          <a:solidFill>
+            <a:srgbClr val="FFF3E8"/>
+          </a:solidFill>
+          <a:ln>
+            <a:solidFill>
+              <a:srgbClr val="E67E22"/>
+            </a:solidFill>
+          </a:ln>
+        </p:spPr>
+        <p:style>
+          <a:lnRef idx="1">
+            <a:schemeClr val="accent1"/>
+          </a:lnRef>
+          <a:fillRef idx="3">
+            <a:schemeClr val="accent1"/>
+          </a:fillRef>
+          <a:effectRef idx="2">
+            <a:schemeClr val="accent1"/>
+          </a:effectRef>
+          <a:fontRef idx="minor">
+            <a:schemeClr val="lt1"/>
+          </a:fontRef>
+        </p:style>
+        <p:txBody>
+          <a:bodyPr rtlCol="0" anchor="ctr"/>
+          <a:lstStyle/>
+          <a:p>
+            <a:pPr algn="l"/>
+            <a:r>
+              <a:rPr sz="900" b="1">
+                <a:solidFill>
+                  <a:srgbClr val="E67E22"/>
+                </a:solidFill>
+                <a:latin typeface="メイリオ"/>
+                <a:ea typeface="メイリオ"/>
+              </a:rPr>
+              <a:t>【Input】</a:t>
+            </a:r>
+          </a:p>
+          <a:p>
+            <a:pPr algn="l"/>
+            <a:r>
+              <a:rPr sz="900" b="0">
+                <a:solidFill>
+                  <a:srgbClr val="333333"/>
+                </a:solidFill>
+                <a:latin typeface="メイリオ"/>
+                <a:ea typeface="メイリオ"/>
+              </a:rPr>
+              <a:t>・業務整理の成果</a:t>
+            </a:r>
+          </a:p>
+          <a:p>
+            <a:pPr algn="l"/>
+            <a:r>
+              <a:rPr sz="900" b="0">
+                <a:solidFill>
+                  <a:srgbClr val="333333"/>
+                </a:solidFill>
+                <a:latin typeface="メイリオ"/>
+                <a:ea typeface="メイリオ"/>
+              </a:rPr>
+              <a:t>・基幹仕様整理の成果</a:t>
+            </a:r>
+          </a:p>
+          <a:p>
+            <a:pPr algn="l"/>
+            <a:r>
+              <a:rPr sz="900" b="0">
+                <a:solidFill>
+                  <a:srgbClr val="333333"/>
+                </a:solidFill>
+                <a:latin typeface="メイリオ"/>
+                <a:ea typeface="メイリオ"/>
+              </a:rPr>
+              <a:t>・画面モック／画面機能設計書</a:t>
+            </a:r>
+          </a:p>
+        </p:txBody>
+      </p:sp>
+      <p:sp>
+        <p:nvSpPr>
+          <p:cNvPr id="16" name="Right Arrow 15"/>
+          <p:cNvSpPr/>
+          <p:nvPr/>
+        </p:nvSpPr>
+        <p:spPr>
+          <a:xfrm>
+            <a:off x="2970000" y="5170000"/>
+            <a:ext cx="160000" cy="160000"/>
+          </a:xfrm>
+          <a:prstGeom prst="rightArrow">
+            <a:avLst/>
+          </a:prstGeom>
+          <a:solidFill>
+            <a:srgbClr val="00A693"/>
+          </a:solidFill>
+          <a:ln>
+            <a:noFill/>
+          </a:ln>
+        </p:spPr>
+        <p:style>
+          <a:lnRef idx="1">
+            <a:schemeClr val="accent1"/>
+          </a:lnRef>
+          <a:fillRef idx="3">
+            <a:schemeClr val="accent1"/>
+          </a:fillRef>
+          <a:effectRef idx="2">
+            <a:schemeClr val="accent1"/>
+          </a:effectRef>
+          <a:fontRef idx="minor">
+            <a:schemeClr val="lt1"/>
+          </a:fontRef>
+        </p:style>
+        <p:txBody>
+          <a:bodyPr rtlCol="0" anchor="ctr"/>
+          <a:lstStyle/>
+          <a:p>
+            <a:pPr algn="ctr"/>
+          </a:p>
+        </p:txBody>
+      </p:sp>
+      <p:sp>
+        <p:nvSpPr>
+          <p:cNvPr id="17" name="Rounded Rectangle 16"/>
+          <p:cNvSpPr/>
+          <p:nvPr/>
+        </p:nvSpPr>
+        <p:spPr>
+          <a:xfrm>
+            <a:off x="3150000" y="4450000"/>
+            <a:ext cx="3000000" cy="1600000"/>
           </a:xfrm>
           <a:prstGeom prst="roundRect">
             <a:avLst/>
@@ -3609,7 +4317,7 @@
           <a:solidFill>
             <a:srgbClr val="DEF3F1"/>
           </a:solidFill>
-          <a:ln>
+          <a:ln w="19050">
             <a:solidFill>
               <a:srgbClr val="00A693"/>
             </a:solidFill>
@@ -3630,449 +4338,143 @@
           </a:fontRef>
         </p:style>
         <p:txBody>
-          <a:bodyPr rtlCol="0" anchor="ctr" wrap="square"/>
+          <a:bodyPr rtlCol="0" anchor="ctr"/>
           <a:lstStyle/>
           <a:p>
             <a:pPr algn="ctr"/>
             <a:r>
-              <a:rPr sz="1400" b="1">
+              <a:rPr sz="1300" b="1">
                 <a:solidFill>
                   <a:srgbClr val="007A6E"/>
                 </a:solidFill>
                 <a:latin typeface="メイリオ"/>
                 <a:ea typeface="メイリオ"/>
               </a:rPr>
-              <a:t>外部仕様</a:t>
-            </a:r>
-          </a:p>
+              <a:t>3. UIの検討</a:t>
+            </a:r>
+          </a:p>
+        </p:txBody>
+      </p:sp>
+      <p:sp>
+        <p:nvSpPr>
+          <p:cNvPr id="18" name="Right Arrow 17"/>
+          <p:cNvSpPr/>
+          <p:nvPr/>
+        </p:nvSpPr>
+        <p:spPr>
+          <a:xfrm>
+            <a:off x="6170000" y="5170000"/>
+            <a:ext cx="160000" cy="160000"/>
+          </a:xfrm>
+          <a:prstGeom prst="rightArrow">
+            <a:avLst/>
+          </a:prstGeom>
+          <a:solidFill>
+            <a:srgbClr val="00A693"/>
+          </a:solidFill>
+          <a:ln>
+            <a:noFill/>
+          </a:ln>
+        </p:spPr>
+        <p:style>
+          <a:lnRef idx="1">
+            <a:schemeClr val="accent1"/>
+          </a:lnRef>
+          <a:fillRef idx="3">
+            <a:schemeClr val="accent1"/>
+          </a:fillRef>
+          <a:effectRef idx="2">
+            <a:schemeClr val="accent1"/>
+          </a:effectRef>
+          <a:fontRef idx="minor">
+            <a:schemeClr val="lt1"/>
+          </a:fontRef>
+        </p:style>
+        <p:txBody>
+          <a:bodyPr rtlCol="0" anchor="ctr"/>
+          <a:lstStyle/>
           <a:p>
             <a:pPr algn="ctr"/>
-            <a:r>
-              <a:rPr sz="1100" b="0">
+          </a:p>
+        </p:txBody>
+      </p:sp>
+      <p:sp>
+        <p:nvSpPr>
+          <p:cNvPr id="19" name="Rounded Rectangle 18"/>
+          <p:cNvSpPr/>
+          <p:nvPr/>
+        </p:nvSpPr>
+        <p:spPr>
+          <a:xfrm>
+            <a:off x="6350000" y="4450000"/>
+            <a:ext cx="2600000" cy="1600000"/>
+          </a:xfrm>
+          <a:prstGeom prst="roundRect">
+            <a:avLst/>
+          </a:prstGeom>
+          <a:solidFill>
+            <a:srgbClr val="E8F5E9"/>
+          </a:solidFill>
+          <a:ln>
+            <a:solidFill>
+              <a:srgbClr val="2E7D32"/>
+            </a:solidFill>
+          </a:ln>
+        </p:spPr>
+        <p:style>
+          <a:lnRef idx="1">
+            <a:schemeClr val="accent1"/>
+          </a:lnRef>
+          <a:fillRef idx="3">
+            <a:schemeClr val="accent1"/>
+          </a:fillRef>
+          <a:effectRef idx="2">
+            <a:schemeClr val="accent1"/>
+          </a:effectRef>
+          <a:fontRef idx="minor">
+            <a:schemeClr val="lt1"/>
+          </a:fontRef>
+        </p:style>
+        <p:txBody>
+          <a:bodyPr rtlCol="0" anchor="ctr"/>
+          <a:lstStyle/>
+          <a:p>
+            <a:pPr algn="l"/>
+            <a:r>
+              <a:rPr sz="900" b="1">
+                <a:solidFill>
+                  <a:srgbClr val="2E7D32"/>
+                </a:solidFill>
+                <a:latin typeface="メイリオ"/>
+                <a:ea typeface="メイリオ"/>
+              </a:rPr>
+              <a:t>【Output】</a:t>
+            </a:r>
+          </a:p>
+          <a:p>
+            <a:pPr algn="l"/>
+            <a:r>
+              <a:rPr sz="900" b="0">
                 <a:solidFill>
                   <a:srgbClr val="333333"/>
                 </a:solidFill>
                 <a:latin typeface="メイリオ"/>
                 <a:ea typeface="メイリオ"/>
               </a:rPr>
-              <a:t>画面・帳票・基幹I/Fとして外から見える入出力と振る舞いを定義</a:t>
-            </a:r>
-          </a:p>
-        </p:txBody>
-      </p:sp>
-      <p:sp>
-        <p:nvSpPr>
-          <p:cNvPr id="7" name="TextBox 6"/>
-          <p:cNvSpPr txBox="1"/>
-          <p:nvPr/>
-        </p:nvSpPr>
-        <p:spPr>
-          <a:xfrm>
-            <a:off x="400000" y="2300000"/>
-            <a:ext cx="9000000" cy="350000"/>
-          </a:xfrm>
-          <a:prstGeom prst="rect">
-            <a:avLst/>
-          </a:prstGeom>
-          <a:noFill/>
-        </p:spPr>
-        <p:txBody>
-          <a:bodyPr wrap="square">
-            <a:spAutoFit/>
-          </a:bodyPr>
-          <a:lstStyle/>
+              <a:t>・画面外部仕様</a:t>
+            </a:r>
+          </a:p>
           <a:p>
             <a:pPr algn="l"/>
             <a:r>
-              <a:rPr sz="1400" b="1">
+              <a:rPr sz="900" b="0">
                 <a:solidFill>
                   <a:srgbClr val="333333"/>
                 </a:solidFill>
                 <a:latin typeface="メイリオ"/>
                 <a:ea typeface="メイリオ"/>
               </a:rPr>
-              <a:t>前提条件</a:t>
-            </a:r>
-          </a:p>
-        </p:txBody>
-      </p:sp>
-      <p:sp>
-        <p:nvSpPr>
-          <p:cNvPr id="8" name="Rounded Rectangle 7"/>
-          <p:cNvSpPr/>
-          <p:nvPr/>
-        </p:nvSpPr>
-        <p:spPr>
-          <a:xfrm>
-            <a:off x="400000" y="2700000"/>
-            <a:ext cx="2900000" cy="700000"/>
-          </a:xfrm>
-          <a:prstGeom prst="roundRect">
-            <a:avLst/>
-          </a:prstGeom>
-          <a:solidFill>
-            <a:srgbClr val="FFFFFF"/>
-          </a:solidFill>
-          <a:ln>
-            <a:solidFill>
-              <a:srgbClr val="00A693"/>
-            </a:solidFill>
-          </a:ln>
-        </p:spPr>
-        <p:style>
-          <a:lnRef idx="1">
-            <a:schemeClr val="accent1"/>
-          </a:lnRef>
-          <a:fillRef idx="3">
-            <a:schemeClr val="accent1"/>
-          </a:fillRef>
-          <a:effectRef idx="2">
-            <a:schemeClr val="accent1"/>
-          </a:effectRef>
-          <a:fontRef idx="minor">
-            <a:schemeClr val="lt1"/>
-          </a:fontRef>
-        </p:style>
-        <p:txBody>
-          <a:bodyPr rtlCol="0" anchor="ctr" wrap="square"/>
-          <a:lstStyle/>
-          <a:p>
-            <a:pPr algn="ctr"/>
-            <a:r>
-              <a:rPr sz="1200" b="1">
-                <a:solidFill>
-                  <a:srgbClr val="333333"/>
-                </a:solidFill>
-                <a:latin typeface="メイリオ"/>
-                <a:ea typeface="メイリオ"/>
-              </a:rPr>
-              <a:t>基幹システムの運用は変えない</a:t>
-            </a:r>
-          </a:p>
-        </p:txBody>
-      </p:sp>
-      <p:sp>
-        <p:nvSpPr>
-          <p:cNvPr id="9" name="Rounded Rectangle 8"/>
-          <p:cNvSpPr/>
-          <p:nvPr/>
-        </p:nvSpPr>
-        <p:spPr>
-          <a:xfrm>
-            <a:off x="3500000" y="2700000"/>
-            <a:ext cx="2900000" cy="700000"/>
-          </a:xfrm>
-          <a:prstGeom prst="roundRect">
-            <a:avLst/>
-          </a:prstGeom>
-          <a:solidFill>
-            <a:srgbClr val="FFFFFF"/>
-          </a:solidFill>
-          <a:ln>
-            <a:solidFill>
-              <a:srgbClr val="00A693"/>
-            </a:solidFill>
-          </a:ln>
-        </p:spPr>
-        <p:style>
-          <a:lnRef idx="1">
-            <a:schemeClr val="accent1"/>
-          </a:lnRef>
-          <a:fillRef idx="3">
-            <a:schemeClr val="accent1"/>
-          </a:fillRef>
-          <a:effectRef idx="2">
-            <a:schemeClr val="accent1"/>
-          </a:effectRef>
-          <a:fontRef idx="minor">
-            <a:schemeClr val="lt1"/>
-          </a:fontRef>
-        </p:style>
-        <p:txBody>
-          <a:bodyPr rtlCol="0" anchor="ctr" wrap="square"/>
-          <a:lstStyle/>
-          <a:p>
-            <a:pPr algn="ctr"/>
-            <a:r>
-              <a:rPr sz="1200" b="1">
-                <a:solidFill>
-                  <a:srgbClr val="333333"/>
-                </a:solidFill>
-                <a:latin typeface="メイリオ"/>
-                <a:ea typeface="メイリオ"/>
-              </a:rPr>
-              <a:t>業務を効率化したい（手作業・Excel運用の削減）</a:t>
-            </a:r>
-          </a:p>
-        </p:txBody>
-      </p:sp>
-      <p:sp>
-        <p:nvSpPr>
-          <p:cNvPr id="10" name="Rounded Rectangle 9"/>
-          <p:cNvSpPr/>
-          <p:nvPr/>
-        </p:nvSpPr>
-        <p:spPr>
-          <a:xfrm>
-            <a:off x="6600000" y="2700000"/>
-            <a:ext cx="2900000" cy="700000"/>
-          </a:xfrm>
-          <a:prstGeom prst="roundRect">
-            <a:avLst/>
-          </a:prstGeom>
-          <a:solidFill>
-            <a:srgbClr val="FFFFFF"/>
-          </a:solidFill>
-          <a:ln>
-            <a:solidFill>
-              <a:srgbClr val="00A693"/>
-            </a:solidFill>
-          </a:ln>
-        </p:spPr>
-        <p:style>
-          <a:lnRef idx="1">
-            <a:schemeClr val="accent1"/>
-          </a:lnRef>
-          <a:fillRef idx="3">
-            <a:schemeClr val="accent1"/>
-          </a:fillRef>
-          <a:effectRef idx="2">
-            <a:schemeClr val="accent1"/>
-          </a:effectRef>
-          <a:fontRef idx="minor">
-            <a:schemeClr val="lt1"/>
-          </a:fontRef>
-        </p:style>
-        <p:txBody>
-          <a:bodyPr rtlCol="0" anchor="ctr" wrap="square"/>
-          <a:lstStyle/>
-          <a:p>
-            <a:pPr algn="ctr"/>
-            <a:r>
-              <a:rPr sz="1200" b="1">
-                <a:solidFill>
-                  <a:srgbClr val="333333"/>
-                </a:solidFill>
-                <a:latin typeface="メイリオ"/>
-                <a:ea typeface="メイリオ"/>
-              </a:rPr>
-              <a:t>取引先とのビジネスルールは変えない</a:t>
-            </a:r>
-          </a:p>
-        </p:txBody>
-      </p:sp>
-      <p:sp>
-        <p:nvSpPr>
-          <p:cNvPr id="11" name="TextBox 10"/>
-          <p:cNvSpPr txBox="1"/>
-          <p:nvPr/>
-        </p:nvSpPr>
-        <p:spPr>
-          <a:xfrm>
-            <a:off x="400000" y="3600000"/>
-            <a:ext cx="9000000" cy="350000"/>
-          </a:xfrm>
-          <a:prstGeom prst="rect">
-            <a:avLst/>
-          </a:prstGeom>
-          <a:noFill/>
-        </p:spPr>
-        <p:txBody>
-          <a:bodyPr wrap="square">
-            <a:spAutoFit/>
-          </a:bodyPr>
-          <a:lstStyle/>
-          <a:p>
-            <a:pPr algn="l"/>
-            <a:r>
-              <a:rPr sz="1400" b="1">
-                <a:solidFill>
-                  <a:srgbClr val="333333"/>
-                </a:solidFill>
-                <a:latin typeface="メイリオ"/>
-                <a:ea typeface="メイリオ"/>
-              </a:rPr>
-              <a:t>現状の不足（要件定義で埋めること）</a:t>
-            </a:r>
-          </a:p>
-        </p:txBody>
-      </p:sp>
-      <p:sp>
-        <p:nvSpPr>
-          <p:cNvPr id="12" name="TextBox 11"/>
-          <p:cNvSpPr txBox="1"/>
-          <p:nvPr/>
-        </p:nvSpPr>
-        <p:spPr>
-          <a:xfrm>
-            <a:off x="500000" y="4000000"/>
-            <a:ext cx="9000000" cy="400000"/>
-          </a:xfrm>
-          <a:prstGeom prst="rect">
-            <a:avLst/>
-          </a:prstGeom>
-          <a:noFill/>
-        </p:spPr>
-        <p:txBody>
-          <a:bodyPr wrap="square">
-            <a:spAutoFit/>
-          </a:bodyPr>
-          <a:lstStyle/>
-          <a:p>
-            <a:pPr algn="l"/>
-            <a:r>
-              <a:rPr sz="1200" b="0">
-                <a:solidFill>
-                  <a:srgbClr val="333333"/>
-                </a:solidFill>
-                <a:latin typeface="メイリオ"/>
-                <a:ea typeface="メイリオ"/>
-              </a:rPr>
-              <a:t>・ざっくりした要望しか見えていない</a:t>
-            </a:r>
-          </a:p>
-        </p:txBody>
-      </p:sp>
-      <p:sp>
-        <p:nvSpPr>
-          <p:cNvPr id="13" name="TextBox 12"/>
-          <p:cNvSpPr txBox="1"/>
-          <p:nvPr/>
-        </p:nvSpPr>
-        <p:spPr>
-          <a:xfrm>
-            <a:off x="500000" y="4420000"/>
-            <a:ext cx="9000000" cy="400000"/>
-          </a:xfrm>
-          <a:prstGeom prst="rect">
-            <a:avLst/>
-          </a:prstGeom>
-          <a:noFill/>
-        </p:spPr>
-        <p:txBody>
-          <a:bodyPr wrap="square">
-            <a:spAutoFit/>
-          </a:bodyPr>
-          <a:lstStyle/>
-          <a:p>
-            <a:pPr algn="l"/>
-            <a:r>
-              <a:rPr sz="1200" b="0">
-                <a:solidFill>
-                  <a:srgbClr val="333333"/>
-                </a:solidFill>
-                <a:latin typeface="メイリオ"/>
-                <a:ea typeface="メイリオ"/>
-              </a:rPr>
-              <a:t>・正常系の業務しか見えていない（例外系未整理）</a:t>
-            </a:r>
-          </a:p>
-        </p:txBody>
-      </p:sp>
-      <p:sp>
-        <p:nvSpPr>
-          <p:cNvPr id="14" name="TextBox 13"/>
-          <p:cNvSpPr txBox="1"/>
-          <p:nvPr/>
-        </p:nvSpPr>
-        <p:spPr>
-          <a:xfrm>
-            <a:off x="500000" y="4840000"/>
-            <a:ext cx="9000000" cy="400000"/>
-          </a:xfrm>
-          <a:prstGeom prst="rect">
-            <a:avLst/>
-          </a:prstGeom>
-          <a:noFill/>
-        </p:spPr>
-        <p:txBody>
-          <a:bodyPr wrap="square">
-            <a:spAutoFit/>
-          </a:bodyPr>
-          <a:lstStyle/>
-          <a:p>
-            <a:pPr algn="l"/>
-            <a:r>
-              <a:rPr sz="1200" b="0">
-                <a:solidFill>
-                  <a:srgbClr val="333333"/>
-                </a:solidFill>
-                <a:latin typeface="メイリオ"/>
-                <a:ea typeface="メイリオ"/>
-              </a:rPr>
-              <a:t>・UIが決まっていない</a:t>
-            </a:r>
-          </a:p>
-        </p:txBody>
-      </p:sp>
-      <p:sp>
-        <p:nvSpPr>
-          <p:cNvPr id="15" name="TextBox 14"/>
-          <p:cNvSpPr txBox="1"/>
-          <p:nvPr/>
-        </p:nvSpPr>
-        <p:spPr>
-          <a:xfrm>
-            <a:off x="500000" y="5260000"/>
-            <a:ext cx="9000000" cy="400000"/>
-          </a:xfrm>
-          <a:prstGeom prst="rect">
-            <a:avLst/>
-          </a:prstGeom>
-          <a:noFill/>
-        </p:spPr>
-        <p:txBody>
-          <a:bodyPr wrap="square">
-            <a:spAutoFit/>
-          </a:bodyPr>
-          <a:lstStyle/>
-          <a:p>
-            <a:pPr algn="l"/>
-            <a:r>
-              <a:rPr sz="1200" b="0">
-                <a:solidFill>
-                  <a:srgbClr val="333333"/>
-                </a:solidFill>
-                <a:latin typeface="メイリオ"/>
-                <a:ea typeface="メイリオ"/>
-              </a:rPr>
-              <a:t>・基幹連携の方式・フォーマットが未確定</a:t>
-            </a:r>
-          </a:p>
-        </p:txBody>
-      </p:sp>
-      <p:sp>
-        <p:nvSpPr>
-          <p:cNvPr id="16" name="TextBox 15"/>
-          <p:cNvSpPr txBox="1"/>
-          <p:nvPr/>
-        </p:nvSpPr>
-        <p:spPr>
-          <a:xfrm>
-            <a:off x="500000" y="5680000"/>
-            <a:ext cx="9000000" cy="400000"/>
-          </a:xfrm>
-          <a:prstGeom prst="rect">
-            <a:avLst/>
-          </a:prstGeom>
-          <a:noFill/>
-        </p:spPr>
-        <p:txBody>
-          <a:bodyPr wrap="square">
-            <a:spAutoFit/>
-          </a:bodyPr>
-          <a:lstStyle/>
-          <a:p>
-            <a:pPr algn="l"/>
-            <a:r>
-              <a:rPr sz="1200" b="0">
-                <a:solidFill>
-                  <a:srgbClr val="333333"/>
-                </a:solidFill>
-                <a:latin typeface="メイリオ"/>
-                <a:ea typeface="メイリオ"/>
-              </a:rPr>
-              <a:t>・登場人物が見えていない</a:t>
+              <a:t>・（入出力・導線・表示項目）</a:t>
             </a:r>
           </a:p>
         </p:txBody>
@@ -4103,8 +4505,8 @@
         </p:nvSpPr>
         <p:spPr>
           <a:xfrm>
-            <a:off x="300000" y="160000"/>
-            <a:ext cx="70000" cy="360000"/>
+            <a:off x="280000" y="140000"/>
+            <a:ext cx="70000" cy="340000"/>
           </a:xfrm>
           <a:prstGeom prst="rect">
             <a:avLst/>
@@ -4146,8 +4548,8 @@
         </p:nvSpPr>
         <p:spPr>
           <a:xfrm>
-            <a:off x="420000" y="140000"/>
-            <a:ext cx="9000000" cy="380000"/>
+            <a:off x="400000" y="120000"/>
+            <a:ext cx="9200000" cy="360000"/>
           </a:xfrm>
           <a:prstGeom prst="rect">
             <a:avLst/>
@@ -4169,7 +4571,7 @@
                 <a:latin typeface="メイリオ"/>
                 <a:ea typeface="メイリオ"/>
               </a:rPr>
-              <a:t>要件定義の手順（工程順）</a:t>
+              <a:t>要件定義の進め方（Input → Process → Output）（続き）</a:t>
             </a:r>
           </a:p>
         </p:txBody>
@@ -4182,8 +4584,145 @@
         </p:nvSpPr>
         <p:spPr>
           <a:xfrm>
-            <a:off x="500000" y="750000"/>
-            <a:ext cx="2900000" cy="2000000"/>
+            <a:off x="350000" y="700000"/>
+            <a:ext cx="2600000" cy="1700000"/>
+          </a:xfrm>
+          <a:prstGeom prst="roundRect">
+            <a:avLst/>
+          </a:prstGeom>
+          <a:solidFill>
+            <a:srgbClr val="FFF3E8"/>
+          </a:solidFill>
+          <a:ln>
+            <a:solidFill>
+              <a:srgbClr val="E67E22"/>
+            </a:solidFill>
+          </a:ln>
+        </p:spPr>
+        <p:style>
+          <a:lnRef idx="1">
+            <a:schemeClr val="accent1"/>
+          </a:lnRef>
+          <a:fillRef idx="3">
+            <a:schemeClr val="accent1"/>
+          </a:fillRef>
+          <a:effectRef idx="2">
+            <a:schemeClr val="accent1"/>
+          </a:effectRef>
+          <a:fontRef idx="minor">
+            <a:schemeClr val="lt1"/>
+          </a:fontRef>
+        </p:style>
+        <p:txBody>
+          <a:bodyPr rtlCol="0" anchor="ctr"/>
+          <a:lstStyle/>
+          <a:p>
+            <a:pPr algn="l"/>
+            <a:r>
+              <a:rPr sz="900" b="1">
+                <a:solidFill>
+                  <a:srgbClr val="E67E22"/>
+                </a:solidFill>
+                <a:latin typeface="メイリオ"/>
+                <a:ea typeface="メイリオ"/>
+              </a:rPr>
+              <a:t>【Input】</a:t>
+            </a:r>
+          </a:p>
+          <a:p>
+            <a:pPr algn="l"/>
+            <a:r>
+              <a:rPr sz="900" b="0">
+                <a:solidFill>
+                  <a:srgbClr val="333333"/>
+                </a:solidFill>
+                <a:latin typeface="メイリオ"/>
+                <a:ea typeface="メイリオ"/>
+              </a:rPr>
+              <a:t>・年間注文数・ピーク時間帯</a:t>
+            </a:r>
+          </a:p>
+          <a:p>
+            <a:pPr algn="l"/>
+            <a:r>
+              <a:rPr sz="900" b="0">
+                <a:solidFill>
+                  <a:srgbClr val="333333"/>
+                </a:solidFill>
+                <a:latin typeface="メイリオ"/>
+                <a:ea typeface="メイリオ"/>
+              </a:rPr>
+              <a:t>・取引先数・商品SKU数</a:t>
+            </a:r>
+          </a:p>
+          <a:p>
+            <a:pPr algn="l"/>
+            <a:r>
+              <a:rPr sz="900" b="0">
+                <a:solidFill>
+                  <a:srgbClr val="333333"/>
+                </a:solidFill>
+                <a:latin typeface="メイリオ"/>
+                <a:ea typeface="メイリオ"/>
+              </a:rPr>
+              <a:t>・管理サイト利用者数</a:t>
+            </a:r>
+          </a:p>
+        </p:txBody>
+      </p:sp>
+      <p:sp>
+        <p:nvSpPr>
+          <p:cNvPr id="5" name="Right Arrow 4"/>
+          <p:cNvSpPr/>
+          <p:nvPr/>
+        </p:nvSpPr>
+        <p:spPr>
+          <a:xfrm>
+            <a:off x="2970000" y="1470000"/>
+            <a:ext cx="160000" cy="160000"/>
+          </a:xfrm>
+          <a:prstGeom prst="rightArrow">
+            <a:avLst/>
+          </a:prstGeom>
+          <a:solidFill>
+            <a:srgbClr val="00A693"/>
+          </a:solidFill>
+          <a:ln>
+            <a:noFill/>
+          </a:ln>
+        </p:spPr>
+        <p:style>
+          <a:lnRef idx="1">
+            <a:schemeClr val="accent1"/>
+          </a:lnRef>
+          <a:fillRef idx="3">
+            <a:schemeClr val="accent1"/>
+          </a:fillRef>
+          <a:effectRef idx="2">
+            <a:schemeClr val="accent1"/>
+          </a:effectRef>
+          <a:fontRef idx="minor">
+            <a:schemeClr val="lt1"/>
+          </a:fontRef>
+        </p:style>
+        <p:txBody>
+          <a:bodyPr rtlCol="0" anchor="ctr"/>
+          <a:lstStyle/>
+          <a:p>
+            <a:pPr algn="ctr"/>
+          </a:p>
+        </p:txBody>
+      </p:sp>
+      <p:sp>
+        <p:nvSpPr>
+          <p:cNvPr id="6" name="Rounded Rectangle 5"/>
+          <p:cNvSpPr/>
+          <p:nvPr/>
+        </p:nvSpPr>
+        <p:spPr>
+          <a:xfrm>
+            <a:off x="3150000" y="700000"/>
+            <a:ext cx="3000000" cy="1700000"/>
           </a:xfrm>
           <a:prstGeom prst="roundRect">
             <a:avLst/>
@@ -4191,7 +4730,7 @@
           <a:solidFill>
             <a:srgbClr val="DEF3F1"/>
           </a:solidFill>
-          <a:ln>
+          <a:ln w="19050">
             <a:solidFill>
               <a:srgbClr val="00A693"/>
             </a:solidFill>
@@ -4212,86 +4751,294 @@
           </a:fontRef>
         </p:style>
         <p:txBody>
-          <a:bodyPr rtlCol="0" anchor="ctr" wrap="square"/>
+          <a:bodyPr rtlCol="0" anchor="ctr"/>
           <a:lstStyle/>
           <a:p>
             <a:pPr algn="ctr"/>
             <a:r>
-              <a:rPr sz="1200" b="1">
+              <a:rPr sz="1300" b="1">
                 <a:solidFill>
                   <a:srgbClr val="007A6E"/>
                 </a:solidFill>
                 <a:latin typeface="メイリオ"/>
                 <a:ea typeface="メイリオ"/>
               </a:rPr>
-              <a:t>工程1</a:t>
-            </a:r>
-          </a:p>
+              <a:t>4. 非機能要件</a:t>
+            </a:r>
+          </a:p>
+        </p:txBody>
+      </p:sp>
+      <p:sp>
+        <p:nvSpPr>
+          <p:cNvPr id="7" name="Right Arrow 6"/>
+          <p:cNvSpPr/>
+          <p:nvPr/>
+        </p:nvSpPr>
+        <p:spPr>
+          <a:xfrm>
+            <a:off x="6170000" y="1470000"/>
+            <a:ext cx="160000" cy="160000"/>
+          </a:xfrm>
+          <a:prstGeom prst="rightArrow">
+            <a:avLst/>
+          </a:prstGeom>
+          <a:solidFill>
+            <a:srgbClr val="00A693"/>
+          </a:solidFill>
+          <a:ln>
+            <a:noFill/>
+          </a:ln>
+        </p:spPr>
+        <p:style>
+          <a:lnRef idx="1">
+            <a:schemeClr val="accent1"/>
+          </a:lnRef>
+          <a:fillRef idx="3">
+            <a:schemeClr val="accent1"/>
+          </a:fillRef>
+          <a:effectRef idx="2">
+            <a:schemeClr val="accent1"/>
+          </a:effectRef>
+          <a:fontRef idx="minor">
+            <a:schemeClr val="lt1"/>
+          </a:fontRef>
+        </p:style>
+        <p:txBody>
+          <a:bodyPr rtlCol="0" anchor="ctr"/>
+          <a:lstStyle/>
           <a:p>
             <a:pPr algn="ctr"/>
-            <a:r>
-              <a:rPr sz="1400" b="1">
+          </a:p>
+        </p:txBody>
+      </p:sp>
+      <p:sp>
+        <p:nvSpPr>
+          <p:cNvPr id="8" name="Rounded Rectangle 7"/>
+          <p:cNvSpPr/>
+          <p:nvPr/>
+        </p:nvSpPr>
+        <p:spPr>
+          <a:xfrm>
+            <a:off x="6350000" y="700000"/>
+            <a:ext cx="2600000" cy="1700000"/>
+          </a:xfrm>
+          <a:prstGeom prst="roundRect">
+            <a:avLst/>
+          </a:prstGeom>
+          <a:solidFill>
+            <a:srgbClr val="E8F5E9"/>
+          </a:solidFill>
+          <a:ln>
+            <a:solidFill>
+              <a:srgbClr val="2E7D32"/>
+            </a:solidFill>
+          </a:ln>
+        </p:spPr>
+        <p:style>
+          <a:lnRef idx="1">
+            <a:schemeClr val="accent1"/>
+          </a:lnRef>
+          <a:fillRef idx="3">
+            <a:schemeClr val="accent1"/>
+          </a:fillRef>
+          <a:effectRef idx="2">
+            <a:schemeClr val="accent1"/>
+          </a:effectRef>
+          <a:fontRef idx="minor">
+            <a:schemeClr val="lt1"/>
+          </a:fontRef>
+        </p:style>
+        <p:txBody>
+          <a:bodyPr rtlCol="0" anchor="ctr"/>
+          <a:lstStyle/>
+          <a:p>
+            <a:pPr algn="l"/>
+            <a:r>
+              <a:rPr sz="900" b="1">
+                <a:solidFill>
+                  <a:srgbClr val="2E7D32"/>
+                </a:solidFill>
+                <a:latin typeface="メイリオ"/>
+                <a:ea typeface="メイリオ"/>
+              </a:rPr>
+              <a:t>【Output】</a:t>
+            </a:r>
+          </a:p>
+          <a:p>
+            <a:pPr algn="l"/>
+            <a:r>
+              <a:rPr sz="900" b="0">
                 <a:solidFill>
                   <a:srgbClr val="333333"/>
                 </a:solidFill>
                 <a:latin typeface="メイリオ"/>
                 <a:ea typeface="メイリオ"/>
               </a:rPr>
-              <a:t>システム化する</a:t>
-            </a:r>
-          </a:p>
-          <a:p>
-            <a:pPr algn="ctr"/>
-            <a:r>
-              <a:rPr sz="1400" b="1">
+              <a:t>・非機能要件</a:t>
+            </a:r>
+          </a:p>
+          <a:p>
+            <a:pPr algn="l"/>
+            <a:r>
+              <a:rPr sz="900" b="0">
                 <a:solidFill>
                   <a:srgbClr val="333333"/>
                 </a:solidFill>
                 <a:latin typeface="メイリオ"/>
                 <a:ea typeface="メイリオ"/>
               </a:rPr>
-              <a:t>業務の整理</a:t>
-            </a:r>
-          </a:p>
-          <a:p/>
-          <a:p>
-            <a:pPr algn="ctr"/>
-            <a:r>
-              <a:rPr sz="1100" b="0">
+              <a:t>・（性能・セキュリティ・運用・権限）</a:t>
+            </a:r>
+          </a:p>
+        </p:txBody>
+      </p:sp>
+      <p:sp>
+        <p:nvSpPr>
+          <p:cNvPr id="9" name="Rounded Rectangle 8"/>
+          <p:cNvSpPr/>
+          <p:nvPr/>
+        </p:nvSpPr>
+        <p:spPr>
+          <a:xfrm>
+            <a:off x="350000" y="2700000"/>
+            <a:ext cx="2600000" cy="1700000"/>
+          </a:xfrm>
+          <a:prstGeom prst="roundRect">
+            <a:avLst/>
+          </a:prstGeom>
+          <a:solidFill>
+            <a:srgbClr val="FFF3E8"/>
+          </a:solidFill>
+          <a:ln>
+            <a:solidFill>
+              <a:srgbClr val="E67E22"/>
+            </a:solidFill>
+          </a:ln>
+        </p:spPr>
+        <p:style>
+          <a:lnRef idx="1">
+            <a:schemeClr val="accent1"/>
+          </a:lnRef>
+          <a:fillRef idx="3">
+            <a:schemeClr val="accent1"/>
+          </a:fillRef>
+          <a:effectRef idx="2">
+            <a:schemeClr val="accent1"/>
+          </a:effectRef>
+          <a:fontRef idx="minor">
+            <a:schemeClr val="lt1"/>
+          </a:fontRef>
+        </p:style>
+        <p:txBody>
+          <a:bodyPr rtlCol="0" anchor="ctr"/>
+          <a:lstStyle/>
+          <a:p>
+            <a:pPr algn="l"/>
+            <a:r>
+              <a:rPr sz="900" b="1">
                 <a:solidFill>
-                  <a:srgbClr val="666666"/>
+                  <a:srgbClr val="E67E22"/>
                 </a:solidFill>
                 <a:latin typeface="メイリオ"/>
                 <a:ea typeface="メイリオ"/>
               </a:rPr>
-              <a:t>登場人物・正常／例外</a:t>
-            </a:r>
-          </a:p>
-          <a:p>
-            <a:pPr algn="ctr"/>
-            <a:r>
-              <a:rPr sz="1100" b="0">
+              <a:t>【Input】</a:t>
+            </a:r>
+          </a:p>
+          <a:p>
+            <a:pPr algn="l"/>
+            <a:r>
+              <a:rPr sz="900" b="0">
                 <a:solidFill>
-                  <a:srgbClr val="666666"/>
+                  <a:srgbClr val="333333"/>
                 </a:solidFill>
                 <a:latin typeface="メイリオ"/>
                 <a:ea typeface="メイリオ"/>
               </a:rPr>
-              <a:t>やる／やらないを確定</a:t>
-            </a:r>
-          </a:p>
-        </p:txBody>
-      </p:sp>
-      <p:sp>
-        <p:nvSpPr>
-          <p:cNvPr id="5" name="Rounded Rectangle 4"/>
+              <a:t>・システム化の範囲</a:t>
+            </a:r>
+          </a:p>
+          <a:p>
+            <a:pPr algn="l"/>
+            <a:r>
+              <a:rPr sz="900" b="0">
+                <a:solidFill>
+                  <a:srgbClr val="333333"/>
+                </a:solidFill>
+                <a:latin typeface="メイリオ"/>
+                <a:ea typeface="メイリオ"/>
+              </a:rPr>
+              <a:t>・業務上のルール</a:t>
+            </a:r>
+          </a:p>
+          <a:p>
+            <a:pPr algn="l"/>
+            <a:r>
+              <a:rPr sz="900" b="0">
+                <a:solidFill>
+                  <a:srgbClr val="333333"/>
+                </a:solidFill>
+                <a:latin typeface="メイリオ"/>
+                <a:ea typeface="メイリオ"/>
+              </a:rPr>
+              <a:t>・外部仕様・非機能要件</a:t>
+            </a:r>
+          </a:p>
+        </p:txBody>
+      </p:sp>
+      <p:sp>
+        <p:nvSpPr>
+          <p:cNvPr id="10" name="Right Arrow 9"/>
           <p:cNvSpPr/>
           <p:nvPr/>
         </p:nvSpPr>
         <p:spPr>
           <a:xfrm>
-            <a:off x="3600000" y="750000"/>
-            <a:ext cx="2900000" cy="2000000"/>
+            <a:off x="2970000" y="3470000"/>
+            <a:ext cx="160000" cy="160000"/>
+          </a:xfrm>
+          <a:prstGeom prst="rightArrow">
+            <a:avLst/>
+          </a:prstGeom>
+          <a:solidFill>
+            <a:srgbClr val="00A693"/>
+          </a:solidFill>
+          <a:ln>
+            <a:noFill/>
+          </a:ln>
+        </p:spPr>
+        <p:style>
+          <a:lnRef idx="1">
+            <a:schemeClr val="accent1"/>
+          </a:lnRef>
+          <a:fillRef idx="3">
+            <a:schemeClr val="accent1"/>
+          </a:fillRef>
+          <a:effectRef idx="2">
+            <a:schemeClr val="accent1"/>
+          </a:effectRef>
+          <a:fontRef idx="minor">
+            <a:schemeClr val="lt1"/>
+          </a:fontRef>
+        </p:style>
+        <p:txBody>
+          <a:bodyPr rtlCol="0" anchor="ctr"/>
+          <a:lstStyle/>
+          <a:p>
+            <a:pPr algn="ctr"/>
+          </a:p>
+        </p:txBody>
+      </p:sp>
+      <p:sp>
+        <p:nvSpPr>
+          <p:cNvPr id="11" name="Rounded Rectangle 10"/>
+          <p:cNvSpPr/>
+          <p:nvPr/>
+        </p:nvSpPr>
+        <p:spPr>
+          <a:xfrm>
+            <a:off x="3150000" y="2700000"/>
+            <a:ext cx="3000000" cy="1700000"/>
           </a:xfrm>
           <a:prstGeom prst="roundRect">
             <a:avLst/>
@@ -4299,7 +5046,7 @@
           <a:solidFill>
             <a:srgbClr val="DEF3F1"/>
           </a:solidFill>
-          <a:ln>
+          <a:ln w="19050">
             <a:solidFill>
               <a:srgbClr val="00A693"/>
             </a:solidFill>
@@ -4320,527 +5067,193 @@
           </a:fontRef>
         </p:style>
         <p:txBody>
-          <a:bodyPr rtlCol="0" anchor="ctr" wrap="square"/>
+          <a:bodyPr rtlCol="0" anchor="ctr"/>
           <a:lstStyle/>
           <a:p>
             <a:pPr algn="ctr"/>
             <a:r>
-              <a:rPr sz="1200" b="1">
+              <a:rPr sz="1300" b="1">
                 <a:solidFill>
                   <a:srgbClr val="007A6E"/>
                 </a:solidFill>
                 <a:latin typeface="メイリオ"/>
                 <a:ea typeface="メイリオ"/>
               </a:rPr>
-              <a:t>工程2</a:t>
-            </a:r>
-          </a:p>
+              <a:t>5. 開発工程の提案</a:t>
+            </a:r>
+          </a:p>
+        </p:txBody>
+      </p:sp>
+      <p:sp>
+        <p:nvSpPr>
+          <p:cNvPr id="12" name="Right Arrow 11"/>
+          <p:cNvSpPr/>
+          <p:nvPr/>
+        </p:nvSpPr>
+        <p:spPr>
+          <a:xfrm>
+            <a:off x="6170000" y="3470000"/>
+            <a:ext cx="160000" cy="160000"/>
+          </a:xfrm>
+          <a:prstGeom prst="rightArrow">
+            <a:avLst/>
+          </a:prstGeom>
+          <a:solidFill>
+            <a:srgbClr val="00A693"/>
+          </a:solidFill>
+          <a:ln>
+            <a:noFill/>
+          </a:ln>
+        </p:spPr>
+        <p:style>
+          <a:lnRef idx="1">
+            <a:schemeClr val="accent1"/>
+          </a:lnRef>
+          <a:fillRef idx="3">
+            <a:schemeClr val="accent1"/>
+          </a:fillRef>
+          <a:effectRef idx="2">
+            <a:schemeClr val="accent1"/>
+          </a:effectRef>
+          <a:fontRef idx="minor">
+            <a:schemeClr val="lt1"/>
+          </a:fontRef>
+        </p:style>
+        <p:txBody>
+          <a:bodyPr rtlCol="0" anchor="ctr"/>
+          <a:lstStyle/>
           <a:p>
             <a:pPr algn="ctr"/>
-            <a:r>
-              <a:rPr sz="1400" b="1">
+          </a:p>
+        </p:txBody>
+      </p:sp>
+      <p:sp>
+        <p:nvSpPr>
+          <p:cNvPr id="13" name="Rounded Rectangle 12"/>
+          <p:cNvSpPr/>
+          <p:nvPr/>
+        </p:nvSpPr>
+        <p:spPr>
+          <a:xfrm>
+            <a:off x="6350000" y="2700000"/>
+            <a:ext cx="2600000" cy="1700000"/>
+          </a:xfrm>
+          <a:prstGeom prst="roundRect">
+            <a:avLst/>
+          </a:prstGeom>
+          <a:solidFill>
+            <a:srgbClr val="E8F5E9"/>
+          </a:solidFill>
+          <a:ln>
+            <a:solidFill>
+              <a:srgbClr val="2E7D32"/>
+            </a:solidFill>
+          </a:ln>
+        </p:spPr>
+        <p:style>
+          <a:lnRef idx="1">
+            <a:schemeClr val="accent1"/>
+          </a:lnRef>
+          <a:fillRef idx="3">
+            <a:schemeClr val="accent1"/>
+          </a:fillRef>
+          <a:effectRef idx="2">
+            <a:schemeClr val="accent1"/>
+          </a:effectRef>
+          <a:fontRef idx="minor">
+            <a:schemeClr val="lt1"/>
+          </a:fontRef>
+        </p:style>
+        <p:txBody>
+          <a:bodyPr rtlCol="0" anchor="ctr"/>
+          <a:lstStyle/>
+          <a:p>
+            <a:pPr algn="l"/>
+            <a:r>
+              <a:rPr sz="900" b="1">
+                <a:solidFill>
+                  <a:srgbClr val="2E7D32"/>
+                </a:solidFill>
+                <a:latin typeface="メイリオ"/>
+                <a:ea typeface="メイリオ"/>
+              </a:rPr>
+              <a:t>【Output】</a:t>
+            </a:r>
+          </a:p>
+          <a:p>
+            <a:pPr algn="l"/>
+            <a:r>
+              <a:rPr sz="900" b="0">
                 <a:solidFill>
                   <a:srgbClr val="333333"/>
                 </a:solidFill>
                 <a:latin typeface="メイリオ"/>
                 <a:ea typeface="メイリオ"/>
               </a:rPr>
-              <a:t>基幹システムの</a:t>
-            </a:r>
-          </a:p>
-          <a:p>
-            <a:pPr algn="ctr"/>
-            <a:r>
-              <a:rPr sz="1400" b="1">
+              <a:t>・カスタマイズ範囲</a:t>
+            </a:r>
+          </a:p>
+          <a:p>
+            <a:pPr algn="l"/>
+            <a:r>
+              <a:rPr sz="900" b="0">
                 <a:solidFill>
                   <a:srgbClr val="333333"/>
                 </a:solidFill>
                 <a:latin typeface="メイリオ"/>
                 <a:ea typeface="メイリオ"/>
               </a:rPr>
-              <a:t>仕様整理</a:t>
-            </a:r>
-          </a:p>
-          <a:p/>
-          <a:p>
-            <a:pPr algn="ctr"/>
-            <a:r>
-              <a:rPr sz="1100" b="0">
-                <a:solidFill>
-                  <a:srgbClr val="666666"/>
-                </a:solidFill>
-                <a:latin typeface="メイリオ"/>
-                <a:ea typeface="メイリオ"/>
-              </a:rPr>
-              <a:t>変えない境界と</a:t>
-            </a:r>
-          </a:p>
-          <a:p>
-            <a:pPr algn="ctr"/>
-            <a:r>
-              <a:rPr sz="1100" b="0">
-                <a:solidFill>
-                  <a:srgbClr val="666666"/>
-                </a:solidFill>
-                <a:latin typeface="メイリオ"/>
-                <a:ea typeface="メイリオ"/>
-              </a:rPr>
-              <a:t>連携前提を確定</a:t>
-            </a:r>
-          </a:p>
-        </p:txBody>
-      </p:sp>
-      <p:sp>
-        <p:nvSpPr>
-          <p:cNvPr id="6" name="Rounded Rectangle 5"/>
-          <p:cNvSpPr/>
-          <p:nvPr/>
-        </p:nvSpPr>
-        <p:spPr>
-          <a:xfrm>
-            <a:off x="6700000" y="750000"/>
-            <a:ext cx="2900000" cy="2000000"/>
-          </a:xfrm>
-          <a:prstGeom prst="roundRect">
-            <a:avLst/>
-          </a:prstGeom>
-          <a:solidFill>
-            <a:srgbClr val="DEF3F1"/>
-          </a:solidFill>
-          <a:ln>
-            <a:solidFill>
-              <a:srgbClr val="00A693"/>
-            </a:solidFill>
-          </a:ln>
-        </p:spPr>
-        <p:style>
-          <a:lnRef idx="1">
-            <a:schemeClr val="accent1"/>
-          </a:lnRef>
-          <a:fillRef idx="3">
-            <a:schemeClr val="accent1"/>
-          </a:fillRef>
-          <a:effectRef idx="2">
-            <a:schemeClr val="accent1"/>
-          </a:effectRef>
-          <a:fontRef idx="minor">
-            <a:schemeClr val="lt1"/>
-          </a:fontRef>
-        </p:style>
-        <p:txBody>
-          <a:bodyPr rtlCol="0" anchor="ctr" wrap="square"/>
-          <a:lstStyle/>
-          <a:p>
-            <a:pPr algn="ctr"/>
-            <a:r>
-              <a:rPr sz="1200" b="1">
-                <a:solidFill>
-                  <a:srgbClr val="007A6E"/>
-                </a:solidFill>
-                <a:latin typeface="メイリオ"/>
-                <a:ea typeface="メイリオ"/>
-              </a:rPr>
-              <a:t>工程3</a:t>
-            </a:r>
-          </a:p>
-          <a:p>
-            <a:pPr algn="ctr"/>
-            <a:r>
-              <a:rPr sz="1400" b="1">
+              <a:t>・開発工程</a:t>
+            </a:r>
+          </a:p>
+          <a:p>
+            <a:pPr algn="l"/>
+            <a:r>
+              <a:rPr sz="900" b="0">
                 <a:solidFill>
                   <a:srgbClr val="333333"/>
                 </a:solidFill>
                 <a:latin typeface="メイリオ"/>
                 <a:ea typeface="メイリオ"/>
               </a:rPr>
-              <a:t>業務ルール</a:t>
-            </a:r>
-          </a:p>
-          <a:p>
-            <a:pPr algn="ctr"/>
-            <a:r>
-              <a:rPr sz="1400" b="1">
+              <a:t>・正式見積り</a:t>
+            </a:r>
+          </a:p>
+        </p:txBody>
+      </p:sp>
+      <p:sp>
+        <p:nvSpPr>
+          <p:cNvPr id="14" name="TextBox 13"/>
+          <p:cNvSpPr txBox="1"/>
+          <p:nvPr/>
+        </p:nvSpPr>
+        <p:spPr>
+          <a:xfrm>
+            <a:off x="400000" y="5000000"/>
+            <a:ext cx="9200000" cy="1200000"/>
+          </a:xfrm>
+          <a:prstGeom prst="rect">
+            <a:avLst/>
+          </a:prstGeom>
+          <a:noFill/>
+        </p:spPr>
+        <p:txBody>
+          <a:bodyPr wrap="square">
+            <a:spAutoFit/>
+          </a:bodyPr>
+          <a:lstStyle/>
+          <a:p>
+            <a:pPr algn="l"/>
+            <a:r>
+              <a:rPr sz="1200" b="0">
                 <a:solidFill>
                   <a:srgbClr val="333333"/>
                 </a:solidFill>
                 <a:latin typeface="メイリオ"/>
                 <a:ea typeface="メイリオ"/>
               </a:rPr>
-              <a:t>の定義</a:t>
-            </a:r>
-          </a:p>
-          <a:p/>
-          <a:p>
-            <a:pPr algn="ctr"/>
-            <a:r>
-              <a:rPr sz="1100" b="0">
-                <a:solidFill>
-                  <a:srgbClr val="666666"/>
-                </a:solidFill>
-                <a:latin typeface="メイリオ"/>
-                <a:ea typeface="メイリオ"/>
-              </a:rPr>
-              <a:t>引当・与信・取消等</a:t>
-            </a:r>
-          </a:p>
-          <a:p>
-            <a:pPr algn="ctr"/>
-            <a:r>
-              <a:rPr sz="1100" b="0">
-                <a:solidFill>
-                  <a:srgbClr val="666666"/>
-                </a:solidFill>
-                <a:latin typeface="メイリオ"/>
-                <a:ea typeface="メイリオ"/>
-              </a:rPr>
-              <a:t>判断条件を明文化</a:t>
-            </a:r>
-          </a:p>
-        </p:txBody>
-      </p:sp>
-      <p:sp>
-        <p:nvSpPr>
-          <p:cNvPr id="7" name="Rounded Rectangle 6"/>
-          <p:cNvSpPr/>
-          <p:nvPr/>
-        </p:nvSpPr>
-        <p:spPr>
-          <a:xfrm>
-            <a:off x="500000" y="3250000"/>
-            <a:ext cx="2900000" cy="2000000"/>
-          </a:xfrm>
-          <a:prstGeom prst="roundRect">
-            <a:avLst/>
-          </a:prstGeom>
-          <a:solidFill>
-            <a:srgbClr val="DEF3F1"/>
-          </a:solidFill>
-          <a:ln>
-            <a:solidFill>
-              <a:srgbClr val="00A693"/>
-            </a:solidFill>
-          </a:ln>
-        </p:spPr>
-        <p:style>
-          <a:lnRef idx="1">
-            <a:schemeClr val="accent1"/>
-          </a:lnRef>
-          <a:fillRef idx="3">
-            <a:schemeClr val="accent1"/>
-          </a:fillRef>
-          <a:effectRef idx="2">
-            <a:schemeClr val="accent1"/>
-          </a:effectRef>
-          <a:fontRef idx="minor">
-            <a:schemeClr val="lt1"/>
-          </a:fontRef>
-        </p:style>
-        <p:txBody>
-          <a:bodyPr rtlCol="0" anchor="ctr" wrap="square"/>
-          <a:lstStyle/>
-          <a:p>
-            <a:pPr algn="ctr"/>
-            <a:r>
-              <a:rPr sz="1200" b="1">
-                <a:solidFill>
-                  <a:srgbClr val="007A6E"/>
-                </a:solidFill>
-                <a:latin typeface="メイリオ"/>
-                <a:ea typeface="メイリオ"/>
-              </a:rPr>
-              <a:t>工程4</a:t>
-            </a:r>
-          </a:p>
-          <a:p>
-            <a:pPr algn="ctr"/>
-            <a:r>
-              <a:rPr sz="1400" b="1">
-                <a:solidFill>
-                  <a:srgbClr val="333333"/>
-                </a:solidFill>
-                <a:latin typeface="メイリオ"/>
-                <a:ea typeface="メイリオ"/>
-              </a:rPr>
-              <a:t>UI検討</a:t>
-            </a:r>
-          </a:p>
-          <a:p/>
-          <a:p>
-            <a:pPr algn="ctr"/>
-            <a:r>
-              <a:rPr sz="1100" b="0">
-                <a:solidFill>
-                  <a:srgbClr val="666666"/>
-                </a:solidFill>
-                <a:latin typeface="メイリオ"/>
-                <a:ea typeface="メイリオ"/>
-              </a:rPr>
-              <a:t>画面の入出力・導線</a:t>
-            </a:r>
-          </a:p>
-          <a:p>
-            <a:pPr algn="ctr"/>
-            <a:r>
-              <a:rPr sz="1100" b="0">
-                <a:solidFill>
-                  <a:srgbClr val="666666"/>
-                </a:solidFill>
-                <a:latin typeface="メイリオ"/>
-                <a:ea typeface="メイリオ"/>
-              </a:rPr>
-              <a:t>＝画面外部仕様</a:t>
-            </a:r>
-          </a:p>
-        </p:txBody>
-      </p:sp>
-      <p:sp>
-        <p:nvSpPr>
-          <p:cNvPr id="8" name="Rounded Rectangle 7"/>
-          <p:cNvSpPr/>
-          <p:nvPr/>
-        </p:nvSpPr>
-        <p:spPr>
-          <a:xfrm>
-            <a:off x="3600000" y="3250000"/>
-            <a:ext cx="2900000" cy="2000000"/>
-          </a:xfrm>
-          <a:prstGeom prst="roundRect">
-            <a:avLst/>
-          </a:prstGeom>
-          <a:solidFill>
-            <a:srgbClr val="DEF3F1"/>
-          </a:solidFill>
-          <a:ln>
-            <a:solidFill>
-              <a:srgbClr val="00A693"/>
-            </a:solidFill>
-          </a:ln>
-        </p:spPr>
-        <p:style>
-          <a:lnRef idx="1">
-            <a:schemeClr val="accent1"/>
-          </a:lnRef>
-          <a:fillRef idx="3">
-            <a:schemeClr val="accent1"/>
-          </a:fillRef>
-          <a:effectRef idx="2">
-            <a:schemeClr val="accent1"/>
-          </a:effectRef>
-          <a:fontRef idx="minor">
-            <a:schemeClr val="lt1"/>
-          </a:fontRef>
-        </p:style>
-        <p:txBody>
-          <a:bodyPr rtlCol="0" anchor="ctr" wrap="square"/>
-          <a:lstStyle/>
-          <a:p>
-            <a:pPr algn="ctr"/>
-            <a:r>
-              <a:rPr sz="1200" b="1">
-                <a:solidFill>
-                  <a:srgbClr val="007A6E"/>
-                </a:solidFill>
-                <a:latin typeface="メイリオ"/>
-                <a:ea typeface="メイリオ"/>
-              </a:rPr>
-              <a:t>工程5</a:t>
-            </a:r>
-          </a:p>
-          <a:p>
-            <a:pPr algn="ctr"/>
-            <a:r>
-              <a:rPr sz="1400" b="1">
-                <a:solidFill>
-                  <a:srgbClr val="333333"/>
-                </a:solidFill>
-                <a:latin typeface="メイリオ"/>
-                <a:ea typeface="メイリオ"/>
-              </a:rPr>
-              <a:t>連携外部仕様</a:t>
-            </a:r>
-          </a:p>
-          <a:p>
-            <a:pPr algn="ctr"/>
-            <a:r>
-              <a:rPr sz="1400" b="1">
-                <a:solidFill>
-                  <a:srgbClr val="333333"/>
-                </a:solidFill>
-                <a:latin typeface="メイリオ"/>
-                <a:ea typeface="メイリオ"/>
-              </a:rPr>
-              <a:t>＋非機能</a:t>
-            </a:r>
-          </a:p>
-          <a:p/>
-          <a:p>
-            <a:pPr algn="ctr"/>
-            <a:r>
-              <a:rPr sz="1100" b="0">
-                <a:solidFill>
-                  <a:srgbClr val="666666"/>
-                </a:solidFill>
-                <a:latin typeface="メイリオ"/>
-                <a:ea typeface="メイリオ"/>
-              </a:rPr>
-              <a:t>CSV等I/Fと</a:t>
-            </a:r>
-          </a:p>
-          <a:p>
-            <a:pPr algn="ctr"/>
-            <a:r>
-              <a:rPr sz="1100" b="0">
-                <a:solidFill>
-                  <a:srgbClr val="666666"/>
-                </a:solidFill>
-                <a:latin typeface="メイリオ"/>
-                <a:ea typeface="メイリオ"/>
-              </a:rPr>
-              <a:t>性能・運用条件</a:t>
-            </a:r>
-          </a:p>
-        </p:txBody>
-      </p:sp>
-      <p:sp>
-        <p:nvSpPr>
-          <p:cNvPr id="9" name="Rounded Rectangle 8"/>
-          <p:cNvSpPr/>
-          <p:nvPr/>
-        </p:nvSpPr>
-        <p:spPr>
-          <a:xfrm>
-            <a:off x="6700000" y="3250000"/>
-            <a:ext cx="2900000" cy="2000000"/>
-          </a:xfrm>
-          <a:prstGeom prst="roundRect">
-            <a:avLst/>
-          </a:prstGeom>
-          <a:solidFill>
-            <a:srgbClr val="DEF3F1"/>
-          </a:solidFill>
-          <a:ln>
-            <a:solidFill>
-              <a:srgbClr val="00A693"/>
-            </a:solidFill>
-          </a:ln>
-        </p:spPr>
-        <p:style>
-          <a:lnRef idx="1">
-            <a:schemeClr val="accent1"/>
-          </a:lnRef>
-          <a:fillRef idx="3">
-            <a:schemeClr val="accent1"/>
-          </a:fillRef>
-          <a:effectRef idx="2">
-            <a:schemeClr val="accent1"/>
-          </a:effectRef>
-          <a:fontRef idx="minor">
-            <a:schemeClr val="lt1"/>
-          </a:fontRef>
-        </p:style>
-        <p:txBody>
-          <a:bodyPr rtlCol="0" anchor="ctr" wrap="square"/>
-          <a:lstStyle/>
-          <a:p>
-            <a:pPr algn="ctr"/>
-            <a:r>
-              <a:rPr sz="1200" b="1">
-                <a:solidFill>
-                  <a:srgbClr val="007A6E"/>
-                </a:solidFill>
-                <a:latin typeface="メイリオ"/>
-                <a:ea typeface="メイリオ"/>
-              </a:rPr>
-              <a:t>工程6</a:t>
-            </a:r>
-          </a:p>
-          <a:p>
-            <a:pPr algn="ctr"/>
-            <a:r>
-              <a:rPr sz="1400" b="1">
-                <a:solidFill>
-                  <a:srgbClr val="333333"/>
-                </a:solidFill>
-                <a:latin typeface="メイリオ"/>
-                <a:ea typeface="メイリオ"/>
-              </a:rPr>
-              <a:t>開発工程</a:t>
-            </a:r>
-          </a:p>
-          <a:p>
-            <a:pPr algn="ctr"/>
-            <a:r>
-              <a:rPr sz="1400" b="1">
-                <a:solidFill>
-                  <a:srgbClr val="333333"/>
-                </a:solidFill>
-                <a:latin typeface="メイリオ"/>
-                <a:ea typeface="メイリオ"/>
-              </a:rPr>
-              <a:t>の提案</a:t>
-            </a:r>
-          </a:p>
-          <a:p/>
-          <a:p>
-            <a:pPr algn="ctr"/>
-            <a:r>
-              <a:rPr sz="1100" b="0">
-                <a:solidFill>
-                  <a:srgbClr val="666666"/>
-                </a:solidFill>
-                <a:latin typeface="メイリオ"/>
-                <a:ea typeface="メイリオ"/>
-              </a:rPr>
-              <a:t>カスタマイズ範囲</a:t>
-            </a:r>
-          </a:p>
-          <a:p>
-            <a:pPr algn="ctr"/>
-            <a:r>
-              <a:rPr sz="1100" b="0">
-                <a:solidFill>
-                  <a:srgbClr val="666666"/>
-                </a:solidFill>
-                <a:latin typeface="メイリオ"/>
-                <a:ea typeface="メイリオ"/>
-              </a:rPr>
-              <a:t>見積り・工程提示</a:t>
-            </a:r>
-          </a:p>
-        </p:txBody>
-      </p:sp>
-      <p:sp>
-        <p:nvSpPr>
-          <p:cNvPr id="10" name="TextBox 9"/>
-          <p:cNvSpPr txBox="1"/>
-          <p:nvPr/>
-        </p:nvSpPr>
-        <p:spPr>
-          <a:xfrm>
-            <a:off x="500000" y="5800000"/>
-            <a:ext cx="9000000" cy="700000"/>
-          </a:xfrm>
-          <a:prstGeom prst="rect">
-            <a:avLst/>
-          </a:prstGeom>
-          <a:noFill/>
-        </p:spPr>
-        <p:txBody>
-          <a:bodyPr wrap="square">
-            <a:spAutoFit/>
-          </a:bodyPr>
-          <a:lstStyle/>
-          <a:p>
-            <a:pPr algn="l"/>
-            <a:r>
-              <a:rPr sz="1100" b="0">
-                <a:solidFill>
-                  <a:srgbClr val="666666"/>
-                </a:solidFill>
-                <a:latin typeface="メイリオ"/>
-                <a:ea typeface="メイリオ"/>
-              </a:rPr>
-              <a:t>※Fit&amp;Gap／画面モックは工程3〜5の手段です。最終成果は「システム化の範囲」「業務上のルール」「外部仕様」です。</a:t>
+              <a:t>最終成果物イメージ
+・システム化の範囲　・業務上のルール　・外部仕様（画面／基幹I/F）　・非機能要件　・開発工程・正式見積り</a:t>
             </a:r>
           </a:p>
         </p:txBody>
@@ -4871,8 +5284,8 @@
         </p:nvSpPr>
         <p:spPr>
           <a:xfrm>
-            <a:off x="300000" y="160000"/>
-            <a:ext cx="70000" cy="360000"/>
+            <a:off x="280000" y="140000"/>
+            <a:ext cx="70000" cy="340000"/>
           </a:xfrm>
           <a:prstGeom prst="rect">
             <a:avLst/>
@@ -4914,8 +5327,8 @@
         </p:nvSpPr>
         <p:spPr>
           <a:xfrm>
-            <a:off x="420000" y="140000"/>
-            <a:ext cx="9000000" cy="380000"/>
+            <a:off x="400000" y="120000"/>
+            <a:ext cx="9200000" cy="360000"/>
           </a:xfrm>
           <a:prstGeom prst="rect">
             <a:avLst/>
@@ -4950,8 +5363,8 @@
         </p:nvSpPr>
         <p:spPr>
           <a:xfrm>
-            <a:off x="420000" y="540000"/>
-            <a:ext cx="9200000" cy="280000"/>
+            <a:off x="400000" y="500000"/>
+            <a:ext cx="9200000" cy="250000"/>
           </a:xfrm>
           <a:prstGeom prst="rect">
             <a:avLst/>
@@ -4973,7 +5386,7 @@
                 <a:latin typeface="メイリオ"/>
                 <a:ea typeface="メイリオ"/>
               </a:rPr>
-              <a:t>期間：2026/8/19（キックオフ）〜2026/9末　｜　各回 約2時間　｜　赤字＝貴社へのご提供／ご教示依頼</a:t>
+              <a:t>期間：2026/8/19〜9末　｜　各回 約2時間　｜　赤字＝貴社へのご提供／ご教示依頼</a:t>
             </a:r>
           </a:p>
         </p:txBody>
@@ -4987,7 +5400,7 @@
           <p:nvPr/>
         </p:nvGraphicFramePr>
         <p:xfrm>
-          <a:off x="250000" y="900000"/>
+          <a:off x="250000" y="850000"/>
           <a:ext cx="9400000" cy="5200000"/>
         </p:xfrm>
         <a:graphic>
@@ -4999,8 +5412,8 @@
               <a:tblGrid>
                 <a:gridCol w="550000"/>
                 <a:gridCol w="1000000"/>
-                <a:gridCol w="2500000"/>
-                <a:gridCol w="5350000"/>
+                <a:gridCol w="2400000"/>
+                <a:gridCol w="5450000"/>
               </a:tblGrid>
               <a:tr h="1040000">
                 <a:tc>
@@ -5355,7 +5768,7 @@
                           <a:latin typeface="メイリオ"/>
                           <a:ea typeface="メイリオ"/>
                         </a:rPr>
-                        <a:t>要件定義のゴール（システム化の範囲／業務ルール／外部仕様）と前提条件を合意します。</a:t>
+                        <a:t>要件定義のゴール（システム化の範囲／業務上のルール／外部仕様）と前提を合意します。</a:t>
                       </a:r>
                     </a:p>
                     <a:p>
@@ -5514,7 +5927,7 @@
                           <a:latin typeface="メイリオ"/>
                           <a:ea typeface="メイリオ"/>
                         </a:rPr>
-                        <a:t>①システム化する業務の整理（1）</a:t>
+                        <a:t>システム化する業務の整理</a:t>
                       </a:r>
                     </a:p>
                   </a:txBody>
@@ -5562,7 +5975,7 @@
                           <a:latin typeface="メイリオ"/>
                           <a:ea typeface="メイリオ"/>
                         </a:rPr>
-                        <a:t>現行業務（As-Is）を整理し、登場人物・関連システムを明確にします。</a:t>
+                        <a:t>現行業務を整理し、登場人物・関連システムを明確にします。</a:t>
                       </a:r>
                     </a:p>
                     <a:p>
@@ -5575,20 +5988,7 @@
                           <a:latin typeface="メイリオ"/>
                           <a:ea typeface="メイリオ"/>
                         </a:rPr>
-                        <a:t>正常系に加え、例外系（欠品、与信NG、キャンセル、返品等）も洗い出します。</a:t>
-                      </a:r>
-                    </a:p>
-                    <a:p>
-                      <a:pPr algn="l"/>
-                      <a:r>
-                        <a:rPr sz="900" b="0">
-                          <a:solidFill>
-                            <a:srgbClr val="333333"/>
-                          </a:solidFill>
-                          <a:latin typeface="メイリオ"/>
-                          <a:ea typeface="メイリオ"/>
-                        </a:rPr>
-                        <a:t>本工程で「システム化する／しない」の範囲案を作成します。</a:t>
+                        <a:t>正常系に加え例外系（欠品・与信NG・キャンセル・返品等）を洗い出し、システム化の範囲と業務上のルールを定義します。</a:t>
                       </a:r>
                       <a:r>
                         <a:rPr sz="900" b="0">
@@ -5606,12 +6006,35 @@
                       <a:r>
                         <a:rPr sz="900" b="0">
                           <a:solidFill>
+                            <a:srgbClr val="333333"/>
+                          </a:solidFill>
+                          <a:latin typeface="メイリオ"/>
+                          <a:ea typeface="メイリオ"/>
+                        </a:rPr>
+                        <a:t/>
+                      </a:r>
+                      <a:r>
+                        <a:rPr sz="900" b="0">
+                          <a:solidFill>
                             <a:srgbClr val="C00000"/>
                           </a:solidFill>
                           <a:latin typeface="メイリオ"/>
                           <a:ea typeface="メイリオ"/>
                         </a:rPr>
                         <a:t>※ご提供依頼：取引先マスタ・配送先マスタのサンプルデータ</a:t>
+                      </a:r>
+                    </a:p>
+                    <a:p>
+                      <a:pPr algn="l"/>
+                      <a:r>
+                        <a:rPr sz="900" b="0">
+                          <a:solidFill>
+                            <a:srgbClr val="C00000"/>
+                          </a:solidFill>
+                          <a:latin typeface="メイリオ"/>
+                          <a:ea typeface="メイリオ"/>
+                        </a:rPr>
+                        <a:t>※ご提供依頼：受注集計表（Excel）サンプル（取引先別確保在庫）</a:t>
                       </a:r>
                     </a:p>
                   </a:txBody>
@@ -5757,20 +6180,7 @@
                           <a:latin typeface="メイリオ"/>
                           <a:ea typeface="メイリオ"/>
                         </a:rPr>
-                        <a:t>①システム化する業務の整理（2）</a:t>
-                      </a:r>
-                    </a:p>
-                    <a:p>
-                      <a:pPr algn="l"/>
-                      <a:r>
-                        <a:rPr sz="900" b="1">
-                          <a:solidFill>
-                            <a:srgbClr val="333333"/>
-                          </a:solidFill>
-                          <a:latin typeface="メイリオ"/>
-                          <a:ea typeface="メイリオ"/>
-                        </a:rPr>
-                        <a:t>②基幹システムの仕様整理</a:t>
+                        <a:t>基幹システムの仕様の整理</a:t>
                       </a:r>
                     </a:p>
                   </a:txBody>
@@ -5818,7 +6228,7 @@
                           <a:latin typeface="メイリオ"/>
                           <a:ea typeface="メイリオ"/>
                         </a:rPr>
-                        <a:t>①の続きとして業務範囲を確定します。</a:t>
+                        <a:t>基幹運用は変えない前提で、基幹とECの役割分担を整理します。</a:t>
                       </a:r>
                     </a:p>
                     <a:p>
@@ -5831,7 +6241,7 @@
                           <a:latin typeface="メイリオ"/>
                           <a:ea typeface="メイリオ"/>
                         </a:rPr>
-                        <a:t>②基幹の役割（変えない運用）とECの役割分担を整理し、連携対象／非対象を決めます。</a:t>
+                        <a:t>連携対象／非対象、連携方式・タイミング・フォーマットを外部仕様として定義します。</a:t>
                       </a:r>
                       <a:r>
                         <a:rPr sz="900" b="0">
@@ -5849,12 +6259,22 @@
                       <a:r>
                         <a:rPr sz="900" b="0">
                           <a:solidFill>
+                            <a:srgbClr val="333333"/>
+                          </a:solidFill>
+                          <a:latin typeface="メイリオ"/>
+                          <a:ea typeface="メイリオ"/>
+                        </a:rPr>
+                        <a:t/>
+                      </a:r>
+                      <a:r>
+                        <a:rPr sz="900" b="0">
+                          <a:solidFill>
                             <a:srgbClr val="C00000"/>
                           </a:solidFill>
                           <a:latin typeface="メイリオ"/>
                           <a:ea typeface="メイリオ"/>
                         </a:rPr>
-                        <a:t>※ご提供依頼：商品情報CSV・在庫情報CSVのフォーマット及び項目定義</a:t>
+                        <a:t>※ご提供依頼：商品情報CSVのフォーマット及び項目定義</a:t>
                       </a:r>
                     </a:p>
                     <a:p>
@@ -5867,7 +6287,7 @@
                           <a:latin typeface="メイリオ"/>
                           <a:ea typeface="メイリオ"/>
                         </a:rPr>
-                        <a:t>※ご提供依頼：受注集計表（Excel）サンプル（取引先別確保在庫の把握用）</a:t>
+                        <a:t>※ご提供依頼：在庫情報CSVのフォーマット及び項目定義</a:t>
                       </a:r>
                     </a:p>
                   </a:txBody>
@@ -5965,7 +6385,7 @@
                           <a:latin typeface="メイリオ"/>
                           <a:ea typeface="メイリオ"/>
                         </a:rPr>
-                        <a:t>9/3</a:t>
+                        <a:t>9/9</a:t>
                       </a:r>
                     </a:p>
                   </a:txBody>
@@ -6013,7 +6433,7 @@
                           <a:latin typeface="メイリオ"/>
                           <a:ea typeface="メイリオ"/>
                         </a:rPr>
-                        <a:t>③業務上のルール定義</a:t>
+                        <a:t>UIの検討</a:t>
                       </a:r>
                     </a:p>
                   </a:txBody>
@@ -6061,7 +6481,7 @@
                           <a:latin typeface="メイリオ"/>
                           <a:ea typeface="メイリオ"/>
                         </a:rPr>
-                        <a:t>前提（基幹運用不変・取引先ルール不変）のもと、効率化後の業務ルールを定義します。</a:t>
+                        <a:t>業務整理・基幹仕様整理の成果をもとに、画面モック／画面機能設計書でUIを検討します。</a:t>
                       </a:r>
                     </a:p>
                     <a:p>
@@ -6074,7 +6494,7 @@
                           <a:latin typeface="メイリオ"/>
                           <a:ea typeface="メイリオ"/>
                         </a:rPr>
-                        <a:t>対象例：サプライヤー／在庫・引当／会員・販路／受注・与信・出荷・キャンセル・返品 等。</a:t>
+                        <a:t>画面の入出力・導線・表示項目を外部仕様として確定します。</a:t>
                       </a:r>
                     </a:p>
                   </a:txBody>
@@ -6121,7 +6541,7 @@
         </p:nvSpPr>
         <p:spPr>
           <a:xfrm>
-            <a:off x="250000" y="6400000"/>
+            <a:off x="250000" y="6350000"/>
             <a:ext cx="9400000" cy="300000"/>
           </a:xfrm>
           <a:prstGeom prst="rect">
@@ -6175,8 +6595,8 @@
         </p:nvSpPr>
         <p:spPr>
           <a:xfrm>
-            <a:off x="300000" y="160000"/>
-            <a:ext cx="70000" cy="360000"/>
+            <a:off x="280000" y="140000"/>
+            <a:ext cx="70000" cy="340000"/>
           </a:xfrm>
           <a:prstGeom prst="rect">
             <a:avLst/>
@@ -6218,8 +6638,8 @@
         </p:nvSpPr>
         <p:spPr>
           <a:xfrm>
-            <a:off x="420000" y="140000"/>
-            <a:ext cx="9000000" cy="380000"/>
+            <a:off x="400000" y="120000"/>
+            <a:ext cx="9200000" cy="360000"/>
           </a:xfrm>
           <a:prstGeom prst="rect">
             <a:avLst/>
@@ -6254,8 +6674,8 @@
         </p:nvSpPr>
         <p:spPr>
           <a:xfrm>
-            <a:off x="420000" y="540000"/>
-            <a:ext cx="9200000" cy="280000"/>
+            <a:off x="400000" y="500000"/>
+            <a:ext cx="9200000" cy="250000"/>
           </a:xfrm>
           <a:prstGeom prst="rect">
             <a:avLst/>
@@ -6277,7 +6697,7 @@
                 <a:latin typeface="メイリオ"/>
                 <a:ea typeface="メイリオ"/>
               </a:rPr>
-              <a:t>工程④UI → ⑤連携外部仕様／⑥非機能 → まとめ → ⑦開発工程提案</a:t>
+              <a:t>UI検討 → 非機能要件 → まとめ → 開発工程の提案</a:t>
             </a:r>
           </a:p>
         </p:txBody>
@@ -6291,7 +6711,7 @@
           <p:nvPr/>
         </p:nvGraphicFramePr>
         <p:xfrm>
-          <a:off x="250000" y="900000"/>
+          <a:off x="250000" y="850000"/>
           <a:ext cx="9400000" cy="5200000"/>
         </p:xfrm>
         <a:graphic>
@@ -6303,10 +6723,10 @@
               <a:tblGrid>
                 <a:gridCol w="550000"/>
                 <a:gridCol w="1000000"/>
-                <a:gridCol w="2500000"/>
-                <a:gridCol w="5350000"/>
+                <a:gridCol w="2400000"/>
+                <a:gridCol w="5450000"/>
               </a:tblGrid>
-              <a:tr h="1040000">
+              <a:tr h="1300000">
                 <a:tc>
                   <a:txBody>
                     <a:bodyPr wrap="square"/>
@@ -6500,7 +6920,7 @@
                   </a:tcPr>
                 </a:tc>
               </a:tr>
-              <a:tr h="1040000">
+              <a:tr h="1300000">
                 <a:tc>
                   <a:txBody>
                     <a:bodyPr wrap="square"/>
@@ -6563,7 +6983,7 @@
                           <a:latin typeface="メイリオ"/>
                           <a:ea typeface="メイリオ"/>
                         </a:rPr>
-                        <a:t>9/9</a:t>
+                        <a:t>9/16</a:t>
                       </a:r>
                     </a:p>
                   </a:txBody>
@@ -6611,7 +7031,7 @@
                           <a:latin typeface="メイリオ"/>
                           <a:ea typeface="メイリオ"/>
                         </a:rPr>
-                        <a:t>④UI検討（画面外部仕様）</a:t>
+                        <a:t>非機能要件</a:t>
                       </a:r>
                     </a:p>
                   </a:txBody>
@@ -6659,7 +7079,17 @@
                           <a:latin typeface="メイリオ"/>
                           <a:ea typeface="メイリオ"/>
                         </a:rPr>
-                        <a:t>画面モックを用い、画面の入出力・導線・表示項目を外部仕様として確定します。</a:t>
+                        <a:t>性能・セキュリティ・運用・権限などの非機能要件を定義します。</a:t>
+                      </a:r>
+                      <a:r>
+                        <a:rPr sz="900" b="0">
+                          <a:solidFill>
+                            <a:srgbClr val="333333"/>
+                          </a:solidFill>
+                          <a:latin typeface="メイリオ"/>
+                          <a:ea typeface="メイリオ"/>
+                        </a:rPr>
+                        <a:t/>
                       </a:r>
                     </a:p>
                     <a:p>
@@ -6672,7 +7102,17 @@
                           <a:latin typeface="メイリオ"/>
                           <a:ea typeface="メイリオ"/>
                         </a:rPr>
-                        <a:t>管理サイト／フロント（マイページ含む）の両方を対象とします。</a:t>
+                        <a:t/>
+                      </a:r>
+                      <a:r>
+                        <a:rPr sz="900" b="0">
+                          <a:solidFill>
+                            <a:srgbClr val="C00000"/>
+                          </a:solidFill>
+                          <a:latin typeface="メイリオ"/>
+                          <a:ea typeface="メイリオ"/>
+                        </a:rPr>
+                        <a:t>※ご教示依頼：年間注文数、ピーク注文時間帯、取引先数、商品SKU数、管理サイト利用者数</a:t>
                       </a:r>
                     </a:p>
                   </a:txBody>
@@ -6707,7 +7147,7 @@
                   </a:tcPr>
                 </a:tc>
               </a:tr>
-              <a:tr h="1040000">
+              <a:tr h="1300000">
                 <a:tc>
                   <a:txBody>
                     <a:bodyPr wrap="square"/>
@@ -6770,7 +7210,7 @@
                           <a:latin typeface="メイリオ"/>
                           <a:ea typeface="メイリオ"/>
                         </a:rPr>
-                        <a:t>9/16</a:t>
+                        <a:t>9/24</a:t>
                       </a:r>
                     </a:p>
                   </a:txBody>
@@ -6818,20 +7258,7 @@
                           <a:latin typeface="メイリオ"/>
                           <a:ea typeface="メイリオ"/>
                         </a:rPr>
-                        <a:t>⑤連携外部仕様の定義</a:t>
-                      </a:r>
-                    </a:p>
-                    <a:p>
-                      <a:pPr algn="l"/>
-                      <a:r>
-                        <a:rPr sz="900" b="1">
-                          <a:solidFill>
-                            <a:srgbClr val="333333"/>
-                          </a:solidFill>
-                          <a:latin typeface="メイリオ"/>
-                          <a:ea typeface="メイリオ"/>
-                        </a:rPr>
-                        <a:t>⑥非機能要件の定義</a:t>
+                        <a:t>要件定義まとめ</a:t>
                       </a:r>
                     </a:p>
                   </a:txBody>
@@ -6879,43 +7306,7 @@
                           <a:latin typeface="メイリオ"/>
                           <a:ea typeface="メイリオ"/>
                         </a:rPr>
-                        <a:t>⑤基幹連携の方式・タイミング・フォーマット・エラー時挙動を外部仕様として定義します。</a:t>
-                      </a:r>
-                    </a:p>
-                    <a:p>
-                      <a:pPr algn="l"/>
-                      <a:r>
-                        <a:rPr sz="900" b="0">
-                          <a:solidFill>
-                            <a:srgbClr val="333333"/>
-                          </a:solidFill>
-                          <a:latin typeface="メイリオ"/>
-                          <a:ea typeface="メイリオ"/>
-                        </a:rPr>
-                        <a:t>⑥性能・セキュリティ・運用・権限等の非機能要件を定義します。</a:t>
-                      </a:r>
-                      <a:r>
-                        <a:rPr sz="900" b="0">
-                          <a:solidFill>
-                            <a:srgbClr val="333333"/>
-                          </a:solidFill>
-                          <a:latin typeface="メイリオ"/>
-                          <a:ea typeface="メイリオ"/>
-                        </a:rPr>
-                        <a:t/>
-                      </a:r>
-                    </a:p>
-                    <a:p>
-                      <a:pPr algn="l"/>
-                      <a:r>
-                        <a:rPr sz="900" b="0">
-                          <a:solidFill>
-                            <a:srgbClr val="C00000"/>
-                          </a:solidFill>
-                          <a:latin typeface="メイリオ"/>
-                          <a:ea typeface="メイリオ"/>
-                        </a:rPr>
-                        <a:t>※ご教示依頼：年間注文数、ピーク注文時間帯、取引先数、商品SKU数、管理サイト利用者数</a:t>
+                        <a:t>システム化の範囲／業務上のルール／外部仕様／非機能に抜け漏れがないことを確認します。</a:t>
                       </a:r>
                     </a:p>
                   </a:txBody>
@@ -6950,7 +7341,7 @@
                   </a:tcPr>
                 </a:tc>
               </a:tr>
-              <a:tr h="1040000">
+              <a:tr h="1300000">
                 <a:tc>
                   <a:txBody>
                     <a:bodyPr wrap="square"/>
@@ -7013,7 +7404,7 @@
                           <a:latin typeface="メイリオ"/>
                           <a:ea typeface="メイリオ"/>
                         </a:rPr>
-                        <a:t>9/24</a:t>
+                        <a:t>9/29</a:t>
                       </a:r>
                     </a:p>
                   </a:txBody>
@@ -7061,214 +7452,7 @@
                           <a:latin typeface="メイリオ"/>
                           <a:ea typeface="メイリオ"/>
                         </a:rPr>
-                        <a:t>要件定義まとめ</a:t>
-                      </a:r>
-                    </a:p>
-                  </a:txBody>
-                  <a:tcPr anchor="ctr">
-                    <a:solidFill>
-                      <a:srgbClr val="F0FAF8"/>
-                    </a:solidFill>
-                    <a:lnL w="6350" cap="flat" cmpd="sng" algn="ctr">
-                      <a:solidFill>
-                        <a:srgbClr val="CCCCCC"/>
-                      </a:solidFill>
-                      <a:prstDash val="solid"/>
-                    </a:lnL>
-                    <a:lnR w="6350" cap="flat" cmpd="sng" algn="ctr">
-                      <a:solidFill>
-                        <a:srgbClr val="CCCCCC"/>
-                      </a:solidFill>
-                      <a:prstDash val="solid"/>
-                    </a:lnR>
-                    <a:lnT w="6350" cap="flat" cmpd="sng" algn="ctr">
-                      <a:solidFill>
-                        <a:srgbClr val="CCCCCC"/>
-                      </a:solidFill>
-                      <a:prstDash val="solid"/>
-                    </a:lnT>
-                    <a:lnB w="6350" cap="flat" cmpd="sng" algn="ctr">
-                      <a:solidFill>
-                        <a:srgbClr val="CCCCCC"/>
-                      </a:solidFill>
-                      <a:prstDash val="solid"/>
-                    </a:lnB>
-                  </a:tcPr>
-                </a:tc>
-                <a:tc>
-                  <a:txBody>
-                    <a:bodyPr wrap="square"/>
-                    <a:lstStyle/>
-                    <a:p>
-                      <a:pPr algn="l"/>
-                      <a:r>
-                        <a:rPr sz="900" b="0">
-                          <a:solidFill>
-                            <a:srgbClr val="333333"/>
-                          </a:solidFill>
-                          <a:latin typeface="メイリオ"/>
-                          <a:ea typeface="メイリオ"/>
-                        </a:rPr>
-                        <a:t>システム化の範囲／業務上のルール／外部仕様に抜け漏れがないことを確認します。</a:t>
-                      </a:r>
-                    </a:p>
-                    <a:p>
-                      <a:pPr algn="l"/>
-                      <a:r>
-                        <a:rPr sz="900" b="0">
-                          <a:solidFill>
-                            <a:srgbClr val="333333"/>
-                          </a:solidFill>
-                          <a:latin typeface="メイリオ"/>
-                          <a:ea typeface="メイリオ"/>
-                        </a:rPr>
-                        <a:t>指摘事項を反映し、要件定義書を確定します。</a:t>
-                      </a:r>
-                    </a:p>
-                  </a:txBody>
-                  <a:tcPr anchor="ctr">
-                    <a:solidFill>
-                      <a:srgbClr val="F0FAF8"/>
-                    </a:solidFill>
-                    <a:lnL w="6350" cap="flat" cmpd="sng" algn="ctr">
-                      <a:solidFill>
-                        <a:srgbClr val="CCCCCC"/>
-                      </a:solidFill>
-                      <a:prstDash val="solid"/>
-                    </a:lnL>
-                    <a:lnR w="6350" cap="flat" cmpd="sng" algn="ctr">
-                      <a:solidFill>
-                        <a:srgbClr val="CCCCCC"/>
-                      </a:solidFill>
-                      <a:prstDash val="solid"/>
-                    </a:lnR>
-                    <a:lnT w="6350" cap="flat" cmpd="sng" algn="ctr">
-                      <a:solidFill>
-                        <a:srgbClr val="CCCCCC"/>
-                      </a:solidFill>
-                      <a:prstDash val="solid"/>
-                    </a:lnT>
-                    <a:lnB w="6350" cap="flat" cmpd="sng" algn="ctr">
-                      <a:solidFill>
-                        <a:srgbClr val="CCCCCC"/>
-                      </a:solidFill>
-                      <a:prstDash val="solid"/>
-                    </a:lnB>
-                  </a:tcPr>
-                </a:tc>
-              </a:tr>
-              <a:tr h="1040000">
-                <a:tc>
-                  <a:txBody>
-                    <a:bodyPr wrap="square"/>
-                    <a:lstStyle/>
-                    <a:p>
-                      <a:pPr algn="ctr"/>
-                      <a:r>
-                        <a:rPr sz="1000" b="1">
-                          <a:solidFill>
-                            <a:srgbClr val="333333"/>
-                          </a:solidFill>
-                          <a:latin typeface="メイリオ"/>
-                          <a:ea typeface="メイリオ"/>
-                        </a:rPr>
-                        <a:t>8</a:t>
-                      </a:r>
-                    </a:p>
-                  </a:txBody>
-                  <a:tcPr anchor="ctr">
-                    <a:solidFill>
-                      <a:srgbClr val="FFFFFF"/>
-                    </a:solidFill>
-                    <a:lnL w="6350" cap="flat" cmpd="sng" algn="ctr">
-                      <a:solidFill>
-                        <a:srgbClr val="CCCCCC"/>
-                      </a:solidFill>
-                      <a:prstDash val="solid"/>
-                    </a:lnL>
-                    <a:lnR w="6350" cap="flat" cmpd="sng" algn="ctr">
-                      <a:solidFill>
-                        <a:srgbClr val="CCCCCC"/>
-                      </a:solidFill>
-                      <a:prstDash val="solid"/>
-                    </a:lnR>
-                    <a:lnT w="6350" cap="flat" cmpd="sng" algn="ctr">
-                      <a:solidFill>
-                        <a:srgbClr val="CCCCCC"/>
-                      </a:solidFill>
-                      <a:prstDash val="solid"/>
-                    </a:lnT>
-                    <a:lnB w="6350" cap="flat" cmpd="sng" algn="ctr">
-                      <a:solidFill>
-                        <a:srgbClr val="CCCCCC"/>
-                      </a:solidFill>
-                      <a:prstDash val="solid"/>
-                    </a:lnB>
-                  </a:tcPr>
-                </a:tc>
-                <a:tc>
-                  <a:txBody>
-                    <a:bodyPr wrap="square"/>
-                    <a:lstStyle/>
-                    <a:p>
-                      <a:pPr algn="ctr"/>
-                      <a:r>
-                        <a:rPr sz="1000" b="0">
-                          <a:solidFill>
-                            <a:srgbClr val="333333"/>
-                          </a:solidFill>
-                          <a:latin typeface="メイリオ"/>
-                          <a:ea typeface="メイリオ"/>
-                        </a:rPr>
-                        <a:t>9/29</a:t>
-                      </a:r>
-                    </a:p>
-                  </a:txBody>
-                  <a:tcPr anchor="ctr">
-                    <a:solidFill>
-                      <a:srgbClr val="FFFFFF"/>
-                    </a:solidFill>
-                    <a:lnL w="6350" cap="flat" cmpd="sng" algn="ctr">
-                      <a:solidFill>
-                        <a:srgbClr val="CCCCCC"/>
-                      </a:solidFill>
-                      <a:prstDash val="solid"/>
-                    </a:lnL>
-                    <a:lnR w="6350" cap="flat" cmpd="sng" algn="ctr">
-                      <a:solidFill>
-                        <a:srgbClr val="CCCCCC"/>
-                      </a:solidFill>
-                      <a:prstDash val="solid"/>
-                    </a:lnR>
-                    <a:lnT w="6350" cap="flat" cmpd="sng" algn="ctr">
-                      <a:solidFill>
-                        <a:srgbClr val="CCCCCC"/>
-                      </a:solidFill>
-                      <a:prstDash val="solid"/>
-                    </a:lnT>
-                    <a:lnB w="6350" cap="flat" cmpd="sng" algn="ctr">
-                      <a:solidFill>
-                        <a:srgbClr val="CCCCCC"/>
-                      </a:solidFill>
-                      <a:prstDash val="solid"/>
-                    </a:lnB>
-                  </a:tcPr>
-                </a:tc>
-                <a:tc>
-                  <a:txBody>
-                    <a:bodyPr wrap="square"/>
-                    <a:lstStyle/>
-                    <a:p>
-                      <a:pPr algn="l"/>
-                      <a:r>
-                        <a:rPr sz="900" b="1">
-                          <a:solidFill>
-                            <a:srgbClr val="333333"/>
-                          </a:solidFill>
-                          <a:latin typeface="メイリオ"/>
-                          <a:ea typeface="メイリオ"/>
-                        </a:rPr>
-                        <a:t>⑦開発工程の提案</a:t>
+                        <a:t>開発工程の提案</a:t>
                       </a:r>
                     </a:p>
                     <a:p>
@@ -7287,7 +7471,7 @@
                   </a:txBody>
                   <a:tcPr anchor="ctr">
                     <a:solidFill>
-                      <a:srgbClr val="FFFFFF"/>
+                      <a:srgbClr val="F0FAF8"/>
                     </a:solidFill>
                     <a:lnL w="6350" cap="flat" cmpd="sng" algn="ctr">
                       <a:solidFill>
@@ -7329,7 +7513,7 @@
                           <a:latin typeface="メイリオ"/>
                           <a:ea typeface="メイリオ"/>
                         </a:rPr>
-                        <a:t>確定した要件に基づき、カスタマイズ範囲・開発工程・正式見積りを提示します。</a:t>
+                        <a:t>確定要件に基づき、カスタマイズ範囲・開発工程・正式見積りを提示し、要件定義書を納品します。</a:t>
                       </a:r>
                     </a:p>
                     <a:p>
@@ -7342,13 +7526,13 @@
                           <a:latin typeface="メイリオ"/>
                           <a:ea typeface="メイリオ"/>
                         </a:rPr>
-                        <a:t>要件定義書を納品します。（ご検収は10月末想定）</a:t>
+                        <a:t>（ご検収は10月末想定）</a:t>
                       </a:r>
                     </a:p>
                   </a:txBody>
                   <a:tcPr anchor="ctr">
                     <a:solidFill>
-                      <a:srgbClr val="FFFFFF"/>
+                      <a:srgbClr val="F0FAF8"/>
                     </a:solidFill>
                     <a:lnL w="6350" cap="flat" cmpd="sng" algn="ctr">
                       <a:solidFill>
@@ -7389,7 +7573,7 @@
         </p:nvSpPr>
         <p:spPr>
           <a:xfrm>
-            <a:off x="250000" y="6400000"/>
+            <a:off x="250000" y="6350000"/>
             <a:ext cx="9400000" cy="300000"/>
           </a:xfrm>
           <a:prstGeom prst="rect">
@@ -7443,8 +7627,8 @@
         </p:nvSpPr>
         <p:spPr>
           <a:xfrm>
-            <a:off x="300000" y="160000"/>
-            <a:ext cx="70000" cy="360000"/>
+            <a:off x="280000" y="140000"/>
+            <a:ext cx="70000" cy="340000"/>
           </a:xfrm>
           <a:prstGeom prst="rect">
             <a:avLst/>
@@ -7486,8 +7670,8 @@
         </p:nvSpPr>
         <p:spPr>
           <a:xfrm>
-            <a:off x="420000" y="140000"/>
-            <a:ext cx="9000000" cy="380000"/>
+            <a:off x="400000" y="120000"/>
+            <a:ext cx="9200000" cy="360000"/>
           </a:xfrm>
           <a:prstGeom prst="rect">
             <a:avLst/>
@@ -7522,8 +7706,8 @@
         </p:nvSpPr>
         <p:spPr>
           <a:xfrm>
-            <a:off x="420000" y="540000"/>
-            <a:ext cx="9200000" cy="280000"/>
+            <a:off x="400000" y="500000"/>
+            <a:ext cx="9200000" cy="250000"/>
           </a:xfrm>
           <a:prstGeom prst="rect">
             <a:avLst/>
@@ -7545,7 +7729,7 @@
                 <a:latin typeface="メイリオ"/>
                 <a:ea typeface="メイリオ"/>
               </a:rPr>
-              <a:t>要件定義を進めるためのインプットです。サンプル／マスキング可のものがあればその旨ご相談ください。</a:t>
+              <a:t>各工程のInputとして使用します。サンプル／マスキング可のものがあればご相談ください。</a:t>
             </a:r>
           </a:p>
         </p:txBody>
@@ -7559,8 +7743,8 @@
           <p:nvPr/>
         </p:nvGraphicFramePr>
         <p:xfrm>
-          <a:off x="300000" y="950000"/>
-          <a:ext cx="9300000" cy="3800000"/>
+          <a:off x="300000" y="900000"/>
+          <a:ext cx="9300000" cy="3600000"/>
         </p:xfrm>
         <a:graphic>
           <a:graphicData uri="http://schemas.openxmlformats.org/drawingml/2006/table">
@@ -7571,10 +7755,10 @@
               <a:tblGrid>
                 <a:gridCol w="600000"/>
                 <a:gridCol w="1300000"/>
-                <a:gridCol w="4200000"/>
-                <a:gridCol w="3200000"/>
+                <a:gridCol w="4300000"/>
+                <a:gridCol w="3100000"/>
               </a:tblGrid>
-              <a:tr h="633333">
+              <a:tr h="600000">
                 <a:tc>
                   <a:txBody>
                     <a:bodyPr wrap="square"/>
@@ -7733,7 +7917,7 @@
                           <a:latin typeface="メイリオ"/>
                           <a:ea typeface="メイリオ"/>
                         </a:rPr>
-                        <a:t>用途</a:t>
+                        <a:t>対応工程</a:t>
                       </a:r>
                     </a:p>
                   </a:txBody>
@@ -7768,7 +7952,7 @@
                   </a:tcPr>
                 </a:tc>
               </a:tr>
-              <a:tr h="633333">
+              <a:tr h="600000">
                 <a:tc>
                   <a:txBody>
                     <a:bodyPr wrap="square"/>
@@ -7927,7 +8111,7 @@
                           <a:latin typeface="メイリオ"/>
                           <a:ea typeface="メイリオ"/>
                         </a:rPr>
-                        <a:t>登場人物・会員／配送の業務整理</a:t>
+                        <a:t>システム化する業務の整理</a:t>
                       </a:r>
                     </a:p>
                   </a:txBody>
@@ -7962,7 +8146,7 @@
                   </a:tcPr>
                 </a:tc>
               </a:tr>
-              <a:tr h="633333">
+              <a:tr h="600000">
                 <a:tc>
                   <a:txBody>
                     <a:bodyPr wrap="square"/>
@@ -8025,395 +8209,7 @@
                           <a:latin typeface="メイリオ"/>
                           <a:ea typeface="メイリオ"/>
                         </a:rPr>
-                        <a:t>8/31まで</a:t>
-                      </a:r>
-                    </a:p>
-                  </a:txBody>
-                  <a:tcPr anchor="ctr">
-                    <a:solidFill>
-                      <a:srgbClr val="FFFFFF"/>
-                    </a:solidFill>
-                    <a:lnL w="6350" cap="flat" cmpd="sng" algn="ctr">
-                      <a:solidFill>
-                        <a:srgbClr val="CCCCCC"/>
-                      </a:solidFill>
-                      <a:prstDash val="solid"/>
-                    </a:lnL>
-                    <a:lnR w="6350" cap="flat" cmpd="sng" algn="ctr">
-                      <a:solidFill>
-                        <a:srgbClr val="CCCCCC"/>
-                      </a:solidFill>
-                      <a:prstDash val="solid"/>
-                    </a:lnR>
-                    <a:lnT w="6350" cap="flat" cmpd="sng" algn="ctr">
-                      <a:solidFill>
-                        <a:srgbClr val="CCCCCC"/>
-                      </a:solidFill>
-                      <a:prstDash val="solid"/>
-                    </a:lnT>
-                    <a:lnB w="6350" cap="flat" cmpd="sng" algn="ctr">
-                      <a:solidFill>
-                        <a:srgbClr val="CCCCCC"/>
-                      </a:solidFill>
-                      <a:prstDash val="solid"/>
-                    </a:lnB>
-                  </a:tcPr>
-                </a:tc>
-                <a:tc>
-                  <a:txBody>
-                    <a:bodyPr wrap="square"/>
-                    <a:lstStyle/>
-                    <a:p>
-                      <a:pPr algn="l"/>
-                      <a:r>
-                        <a:rPr sz="1000" b="1">
-                          <a:solidFill>
-                            <a:srgbClr val="C00000"/>
-                          </a:solidFill>
-                          <a:latin typeface="メイリオ"/>
-                          <a:ea typeface="メイリオ"/>
-                        </a:rPr>
-                        <a:t>商品情報CSVのフォーマット及び項目定義</a:t>
-                      </a:r>
-                    </a:p>
-                  </a:txBody>
-                  <a:tcPr anchor="ctr">
-                    <a:solidFill>
-                      <a:srgbClr val="FFFFFF"/>
-                    </a:solidFill>
-                    <a:lnL w="6350" cap="flat" cmpd="sng" algn="ctr">
-                      <a:solidFill>
-                        <a:srgbClr val="CCCCCC"/>
-                      </a:solidFill>
-                      <a:prstDash val="solid"/>
-                    </a:lnL>
-                    <a:lnR w="6350" cap="flat" cmpd="sng" algn="ctr">
-                      <a:solidFill>
-                        <a:srgbClr val="CCCCCC"/>
-                      </a:solidFill>
-                      <a:prstDash val="solid"/>
-                    </a:lnR>
-                    <a:lnT w="6350" cap="flat" cmpd="sng" algn="ctr">
-                      <a:solidFill>
-                        <a:srgbClr val="CCCCCC"/>
-                      </a:solidFill>
-                      <a:prstDash val="solid"/>
-                    </a:lnT>
-                    <a:lnB w="6350" cap="flat" cmpd="sng" algn="ctr">
-                      <a:solidFill>
-                        <a:srgbClr val="CCCCCC"/>
-                      </a:solidFill>
-                      <a:prstDash val="solid"/>
-                    </a:lnB>
-                  </a:tcPr>
-                </a:tc>
-                <a:tc>
-                  <a:txBody>
-                    <a:bodyPr wrap="square"/>
-                    <a:lstStyle/>
-                    <a:p>
-                      <a:pPr algn="l"/>
-                      <a:r>
-                        <a:rPr sz="1000" b="0">
-                          <a:solidFill>
-                            <a:srgbClr val="333333"/>
-                          </a:solidFill>
-                          <a:latin typeface="メイリオ"/>
-                          <a:ea typeface="メイリオ"/>
-                        </a:rPr>
-                        <a:t>基幹連携前提・商品外部仕様の整理</a:t>
-                      </a:r>
-                    </a:p>
-                  </a:txBody>
-                  <a:tcPr anchor="ctr">
-                    <a:solidFill>
-                      <a:srgbClr val="FFFFFF"/>
-                    </a:solidFill>
-                    <a:lnL w="6350" cap="flat" cmpd="sng" algn="ctr">
-                      <a:solidFill>
-                        <a:srgbClr val="CCCCCC"/>
-                      </a:solidFill>
-                      <a:prstDash val="solid"/>
-                    </a:lnL>
-                    <a:lnR w="6350" cap="flat" cmpd="sng" algn="ctr">
-                      <a:solidFill>
-                        <a:srgbClr val="CCCCCC"/>
-                      </a:solidFill>
-                      <a:prstDash val="solid"/>
-                    </a:lnR>
-                    <a:lnT w="6350" cap="flat" cmpd="sng" algn="ctr">
-                      <a:solidFill>
-                        <a:srgbClr val="CCCCCC"/>
-                      </a:solidFill>
-                      <a:prstDash val="solid"/>
-                    </a:lnT>
-                    <a:lnB w="6350" cap="flat" cmpd="sng" algn="ctr">
-                      <a:solidFill>
-                        <a:srgbClr val="CCCCCC"/>
-                      </a:solidFill>
-                      <a:prstDash val="solid"/>
-                    </a:lnB>
-                  </a:tcPr>
-                </a:tc>
-              </a:tr>
-              <a:tr h="633333">
-                <a:tc>
-                  <a:txBody>
-                    <a:bodyPr wrap="square"/>
-                    <a:lstStyle/>
-                    <a:p>
-                      <a:pPr algn="ctr"/>
-                      <a:r>
-                        <a:rPr sz="1000" b="0">
-                          <a:solidFill>
-                            <a:srgbClr val="333333"/>
-                          </a:solidFill>
-                          <a:latin typeface="メイリオ"/>
-                          <a:ea typeface="メイリオ"/>
-                        </a:rPr>
-                        <a:t>3</a:t>
-                      </a:r>
-                    </a:p>
-                  </a:txBody>
-                  <a:tcPr anchor="ctr">
-                    <a:solidFill>
-                      <a:srgbClr val="F0FAF8"/>
-                    </a:solidFill>
-                    <a:lnL w="6350" cap="flat" cmpd="sng" algn="ctr">
-                      <a:solidFill>
-                        <a:srgbClr val="CCCCCC"/>
-                      </a:solidFill>
-                      <a:prstDash val="solid"/>
-                    </a:lnL>
-                    <a:lnR w="6350" cap="flat" cmpd="sng" algn="ctr">
-                      <a:solidFill>
-                        <a:srgbClr val="CCCCCC"/>
-                      </a:solidFill>
-                      <a:prstDash val="solid"/>
-                    </a:lnR>
-                    <a:lnT w="6350" cap="flat" cmpd="sng" algn="ctr">
-                      <a:solidFill>
-                        <a:srgbClr val="CCCCCC"/>
-                      </a:solidFill>
-                      <a:prstDash val="solid"/>
-                    </a:lnT>
-                    <a:lnB w="6350" cap="flat" cmpd="sng" algn="ctr">
-                      <a:solidFill>
-                        <a:srgbClr val="CCCCCC"/>
-                      </a:solidFill>
-                      <a:prstDash val="solid"/>
-                    </a:lnB>
-                  </a:tcPr>
-                </a:tc>
-                <a:tc>
-                  <a:txBody>
-                    <a:bodyPr wrap="square"/>
-                    <a:lstStyle/>
-                    <a:p>
-                      <a:pPr algn="ctr"/>
-                      <a:r>
-                        <a:rPr sz="1000" b="0">
-                          <a:solidFill>
-                            <a:srgbClr val="333333"/>
-                          </a:solidFill>
-                          <a:latin typeface="メイリオ"/>
-                          <a:ea typeface="メイリオ"/>
-                        </a:rPr>
-                        <a:t>8/31まで</a:t>
-                      </a:r>
-                    </a:p>
-                  </a:txBody>
-                  <a:tcPr anchor="ctr">
-                    <a:solidFill>
-                      <a:srgbClr val="F0FAF8"/>
-                    </a:solidFill>
-                    <a:lnL w="6350" cap="flat" cmpd="sng" algn="ctr">
-                      <a:solidFill>
-                        <a:srgbClr val="CCCCCC"/>
-                      </a:solidFill>
-                      <a:prstDash val="solid"/>
-                    </a:lnL>
-                    <a:lnR w="6350" cap="flat" cmpd="sng" algn="ctr">
-                      <a:solidFill>
-                        <a:srgbClr val="CCCCCC"/>
-                      </a:solidFill>
-                      <a:prstDash val="solid"/>
-                    </a:lnR>
-                    <a:lnT w="6350" cap="flat" cmpd="sng" algn="ctr">
-                      <a:solidFill>
-                        <a:srgbClr val="CCCCCC"/>
-                      </a:solidFill>
-                      <a:prstDash val="solid"/>
-                    </a:lnT>
-                    <a:lnB w="6350" cap="flat" cmpd="sng" algn="ctr">
-                      <a:solidFill>
-                        <a:srgbClr val="CCCCCC"/>
-                      </a:solidFill>
-                      <a:prstDash val="solid"/>
-                    </a:lnB>
-                  </a:tcPr>
-                </a:tc>
-                <a:tc>
-                  <a:txBody>
-                    <a:bodyPr wrap="square"/>
-                    <a:lstStyle/>
-                    <a:p>
-                      <a:pPr algn="l"/>
-                      <a:r>
-                        <a:rPr sz="1000" b="1">
-                          <a:solidFill>
-                            <a:srgbClr val="C00000"/>
-                          </a:solidFill>
-                          <a:latin typeface="メイリオ"/>
-                          <a:ea typeface="メイリオ"/>
-                        </a:rPr>
-                        <a:t>在庫情報CSVのフォーマット及び項目定義</a:t>
-                      </a:r>
-                    </a:p>
-                  </a:txBody>
-                  <a:tcPr anchor="ctr">
-                    <a:solidFill>
-                      <a:srgbClr val="F0FAF8"/>
-                    </a:solidFill>
-                    <a:lnL w="6350" cap="flat" cmpd="sng" algn="ctr">
-                      <a:solidFill>
-                        <a:srgbClr val="CCCCCC"/>
-                      </a:solidFill>
-                      <a:prstDash val="solid"/>
-                    </a:lnL>
-                    <a:lnR w="6350" cap="flat" cmpd="sng" algn="ctr">
-                      <a:solidFill>
-                        <a:srgbClr val="CCCCCC"/>
-                      </a:solidFill>
-                      <a:prstDash val="solid"/>
-                    </a:lnR>
-                    <a:lnT w="6350" cap="flat" cmpd="sng" algn="ctr">
-                      <a:solidFill>
-                        <a:srgbClr val="CCCCCC"/>
-                      </a:solidFill>
-                      <a:prstDash val="solid"/>
-                    </a:lnT>
-                    <a:lnB w="6350" cap="flat" cmpd="sng" algn="ctr">
-                      <a:solidFill>
-                        <a:srgbClr val="CCCCCC"/>
-                      </a:solidFill>
-                      <a:prstDash val="solid"/>
-                    </a:lnB>
-                  </a:tcPr>
-                </a:tc>
-                <a:tc>
-                  <a:txBody>
-                    <a:bodyPr wrap="square"/>
-                    <a:lstStyle/>
-                    <a:p>
-                      <a:pPr algn="l"/>
-                      <a:r>
-                        <a:rPr sz="1000" b="0">
-                          <a:solidFill>
-                            <a:srgbClr val="333333"/>
-                          </a:solidFill>
-                          <a:latin typeface="メイリオ"/>
-                          <a:ea typeface="メイリオ"/>
-                        </a:rPr>
-                        <a:t>基幹連携前提・在庫／引当の整理</a:t>
-                      </a:r>
-                    </a:p>
-                  </a:txBody>
-                  <a:tcPr anchor="ctr">
-                    <a:solidFill>
-                      <a:srgbClr val="F0FAF8"/>
-                    </a:solidFill>
-                    <a:lnL w="6350" cap="flat" cmpd="sng" algn="ctr">
-                      <a:solidFill>
-                        <a:srgbClr val="CCCCCC"/>
-                      </a:solidFill>
-                      <a:prstDash val="solid"/>
-                    </a:lnL>
-                    <a:lnR w="6350" cap="flat" cmpd="sng" algn="ctr">
-                      <a:solidFill>
-                        <a:srgbClr val="CCCCCC"/>
-                      </a:solidFill>
-                      <a:prstDash val="solid"/>
-                    </a:lnR>
-                    <a:lnT w="6350" cap="flat" cmpd="sng" algn="ctr">
-                      <a:solidFill>
-                        <a:srgbClr val="CCCCCC"/>
-                      </a:solidFill>
-                      <a:prstDash val="solid"/>
-                    </a:lnT>
-                    <a:lnB w="6350" cap="flat" cmpd="sng" algn="ctr">
-                      <a:solidFill>
-                        <a:srgbClr val="CCCCCC"/>
-                      </a:solidFill>
-                      <a:prstDash val="solid"/>
-                    </a:lnB>
-                  </a:tcPr>
-                </a:tc>
-              </a:tr>
-              <a:tr h="633333">
-                <a:tc>
-                  <a:txBody>
-                    <a:bodyPr wrap="square"/>
-                    <a:lstStyle/>
-                    <a:p>
-                      <a:pPr algn="ctr"/>
-                      <a:r>
-                        <a:rPr sz="1000" b="0">
-                          <a:solidFill>
-                            <a:srgbClr val="333333"/>
-                          </a:solidFill>
-                          <a:latin typeface="メイリオ"/>
-                          <a:ea typeface="メイリオ"/>
-                        </a:rPr>
-                        <a:t>4</a:t>
-                      </a:r>
-                    </a:p>
-                  </a:txBody>
-                  <a:tcPr anchor="ctr">
-                    <a:solidFill>
-                      <a:srgbClr val="FFFFFF"/>
-                    </a:solidFill>
-                    <a:lnL w="6350" cap="flat" cmpd="sng" algn="ctr">
-                      <a:solidFill>
-                        <a:srgbClr val="CCCCCC"/>
-                      </a:solidFill>
-                      <a:prstDash val="solid"/>
-                    </a:lnL>
-                    <a:lnR w="6350" cap="flat" cmpd="sng" algn="ctr">
-                      <a:solidFill>
-                        <a:srgbClr val="CCCCCC"/>
-                      </a:solidFill>
-                      <a:prstDash val="solid"/>
-                    </a:lnR>
-                    <a:lnT w="6350" cap="flat" cmpd="sng" algn="ctr">
-                      <a:solidFill>
-                        <a:srgbClr val="CCCCCC"/>
-                      </a:solidFill>
-                      <a:prstDash val="solid"/>
-                    </a:lnT>
-                    <a:lnB w="6350" cap="flat" cmpd="sng" algn="ctr">
-                      <a:solidFill>
-                        <a:srgbClr val="CCCCCC"/>
-                      </a:solidFill>
-                      <a:prstDash val="solid"/>
-                    </a:lnB>
-                  </a:tcPr>
-                </a:tc>
-                <a:tc>
-                  <a:txBody>
-                    <a:bodyPr wrap="square"/>
-                    <a:lstStyle/>
-                    <a:p>
-                      <a:pPr algn="ctr"/>
-                      <a:r>
-                        <a:rPr sz="1000" b="0">
-                          <a:solidFill>
-                            <a:srgbClr val="333333"/>
-                          </a:solidFill>
-                          <a:latin typeface="メイリオ"/>
-                          <a:ea typeface="メイリオ"/>
-                        </a:rPr>
-                        <a:t>8/31まで</a:t>
+                        <a:t>8/26まで</a:t>
                       </a:r>
                     </a:p>
                   </a:txBody>
@@ -8474,7 +8270,7 @@
                           <a:latin typeface="メイリオ"/>
                           <a:ea typeface="メイリオ"/>
                         </a:rPr>
-                        <a:t>（取引先別確保在庫の把握用）</a:t>
+                        <a:t>（取引先別確保在庫）</a:t>
                       </a:r>
                     </a:p>
                   </a:txBody>
@@ -8522,7 +8318,7 @@
                           <a:latin typeface="メイリオ"/>
                           <a:ea typeface="メイリオ"/>
                         </a:rPr>
-                        <a:t>確保在庫の持ち方・業務ルール整理</a:t>
+                        <a:t>システム化する業務の整理</a:t>
                       </a:r>
                     </a:p>
                   </a:txBody>
@@ -8557,7 +8353,395 @@
                   </a:tcPr>
                 </a:tc>
               </a:tr>
-              <a:tr h="633335">
+              <a:tr h="600000">
+                <a:tc>
+                  <a:txBody>
+                    <a:bodyPr wrap="square"/>
+                    <a:lstStyle/>
+                    <a:p>
+                      <a:pPr algn="ctr"/>
+                      <a:r>
+                        <a:rPr sz="1000" b="0">
+                          <a:solidFill>
+                            <a:srgbClr val="333333"/>
+                          </a:solidFill>
+                          <a:latin typeface="メイリオ"/>
+                          <a:ea typeface="メイリオ"/>
+                        </a:rPr>
+                        <a:t>3</a:t>
+                      </a:r>
+                    </a:p>
+                  </a:txBody>
+                  <a:tcPr anchor="ctr">
+                    <a:solidFill>
+                      <a:srgbClr val="F0FAF8"/>
+                    </a:solidFill>
+                    <a:lnL w="6350" cap="flat" cmpd="sng" algn="ctr">
+                      <a:solidFill>
+                        <a:srgbClr val="CCCCCC"/>
+                      </a:solidFill>
+                      <a:prstDash val="solid"/>
+                    </a:lnL>
+                    <a:lnR w="6350" cap="flat" cmpd="sng" algn="ctr">
+                      <a:solidFill>
+                        <a:srgbClr val="CCCCCC"/>
+                      </a:solidFill>
+                      <a:prstDash val="solid"/>
+                    </a:lnR>
+                    <a:lnT w="6350" cap="flat" cmpd="sng" algn="ctr">
+                      <a:solidFill>
+                        <a:srgbClr val="CCCCCC"/>
+                      </a:solidFill>
+                      <a:prstDash val="solid"/>
+                    </a:lnT>
+                    <a:lnB w="6350" cap="flat" cmpd="sng" algn="ctr">
+                      <a:solidFill>
+                        <a:srgbClr val="CCCCCC"/>
+                      </a:solidFill>
+                      <a:prstDash val="solid"/>
+                    </a:lnB>
+                  </a:tcPr>
+                </a:tc>
+                <a:tc>
+                  <a:txBody>
+                    <a:bodyPr wrap="square"/>
+                    <a:lstStyle/>
+                    <a:p>
+                      <a:pPr algn="ctr"/>
+                      <a:r>
+                        <a:rPr sz="1000" b="0">
+                          <a:solidFill>
+                            <a:srgbClr val="333333"/>
+                          </a:solidFill>
+                          <a:latin typeface="メイリオ"/>
+                          <a:ea typeface="メイリオ"/>
+                        </a:rPr>
+                        <a:t>8/31まで</a:t>
+                      </a:r>
+                    </a:p>
+                  </a:txBody>
+                  <a:tcPr anchor="ctr">
+                    <a:solidFill>
+                      <a:srgbClr val="F0FAF8"/>
+                    </a:solidFill>
+                    <a:lnL w="6350" cap="flat" cmpd="sng" algn="ctr">
+                      <a:solidFill>
+                        <a:srgbClr val="CCCCCC"/>
+                      </a:solidFill>
+                      <a:prstDash val="solid"/>
+                    </a:lnL>
+                    <a:lnR w="6350" cap="flat" cmpd="sng" algn="ctr">
+                      <a:solidFill>
+                        <a:srgbClr val="CCCCCC"/>
+                      </a:solidFill>
+                      <a:prstDash val="solid"/>
+                    </a:lnR>
+                    <a:lnT w="6350" cap="flat" cmpd="sng" algn="ctr">
+                      <a:solidFill>
+                        <a:srgbClr val="CCCCCC"/>
+                      </a:solidFill>
+                      <a:prstDash val="solid"/>
+                    </a:lnT>
+                    <a:lnB w="6350" cap="flat" cmpd="sng" algn="ctr">
+                      <a:solidFill>
+                        <a:srgbClr val="CCCCCC"/>
+                      </a:solidFill>
+                      <a:prstDash val="solid"/>
+                    </a:lnB>
+                  </a:tcPr>
+                </a:tc>
+                <a:tc>
+                  <a:txBody>
+                    <a:bodyPr wrap="square"/>
+                    <a:lstStyle/>
+                    <a:p>
+                      <a:pPr algn="l"/>
+                      <a:r>
+                        <a:rPr sz="1000" b="1">
+                          <a:solidFill>
+                            <a:srgbClr val="C00000"/>
+                          </a:solidFill>
+                          <a:latin typeface="メイリオ"/>
+                          <a:ea typeface="メイリオ"/>
+                        </a:rPr>
+                        <a:t>商品情報CSVのフォーマット及び項目定義</a:t>
+                      </a:r>
+                    </a:p>
+                  </a:txBody>
+                  <a:tcPr anchor="ctr">
+                    <a:solidFill>
+                      <a:srgbClr val="F0FAF8"/>
+                    </a:solidFill>
+                    <a:lnL w="6350" cap="flat" cmpd="sng" algn="ctr">
+                      <a:solidFill>
+                        <a:srgbClr val="CCCCCC"/>
+                      </a:solidFill>
+                      <a:prstDash val="solid"/>
+                    </a:lnL>
+                    <a:lnR w="6350" cap="flat" cmpd="sng" algn="ctr">
+                      <a:solidFill>
+                        <a:srgbClr val="CCCCCC"/>
+                      </a:solidFill>
+                      <a:prstDash val="solid"/>
+                    </a:lnR>
+                    <a:lnT w="6350" cap="flat" cmpd="sng" algn="ctr">
+                      <a:solidFill>
+                        <a:srgbClr val="CCCCCC"/>
+                      </a:solidFill>
+                      <a:prstDash val="solid"/>
+                    </a:lnT>
+                    <a:lnB w="6350" cap="flat" cmpd="sng" algn="ctr">
+                      <a:solidFill>
+                        <a:srgbClr val="CCCCCC"/>
+                      </a:solidFill>
+                      <a:prstDash val="solid"/>
+                    </a:lnB>
+                  </a:tcPr>
+                </a:tc>
+                <a:tc>
+                  <a:txBody>
+                    <a:bodyPr wrap="square"/>
+                    <a:lstStyle/>
+                    <a:p>
+                      <a:pPr algn="l"/>
+                      <a:r>
+                        <a:rPr sz="1000" b="0">
+                          <a:solidFill>
+                            <a:srgbClr val="333333"/>
+                          </a:solidFill>
+                          <a:latin typeface="メイリオ"/>
+                          <a:ea typeface="メイリオ"/>
+                        </a:rPr>
+                        <a:t>基幹システムの仕様の整理</a:t>
+                      </a:r>
+                    </a:p>
+                  </a:txBody>
+                  <a:tcPr anchor="ctr">
+                    <a:solidFill>
+                      <a:srgbClr val="F0FAF8"/>
+                    </a:solidFill>
+                    <a:lnL w="6350" cap="flat" cmpd="sng" algn="ctr">
+                      <a:solidFill>
+                        <a:srgbClr val="CCCCCC"/>
+                      </a:solidFill>
+                      <a:prstDash val="solid"/>
+                    </a:lnL>
+                    <a:lnR w="6350" cap="flat" cmpd="sng" algn="ctr">
+                      <a:solidFill>
+                        <a:srgbClr val="CCCCCC"/>
+                      </a:solidFill>
+                      <a:prstDash val="solid"/>
+                    </a:lnR>
+                    <a:lnT w="6350" cap="flat" cmpd="sng" algn="ctr">
+                      <a:solidFill>
+                        <a:srgbClr val="CCCCCC"/>
+                      </a:solidFill>
+                      <a:prstDash val="solid"/>
+                    </a:lnT>
+                    <a:lnB w="6350" cap="flat" cmpd="sng" algn="ctr">
+                      <a:solidFill>
+                        <a:srgbClr val="CCCCCC"/>
+                      </a:solidFill>
+                      <a:prstDash val="solid"/>
+                    </a:lnB>
+                  </a:tcPr>
+                </a:tc>
+              </a:tr>
+              <a:tr h="600000">
+                <a:tc>
+                  <a:txBody>
+                    <a:bodyPr wrap="square"/>
+                    <a:lstStyle/>
+                    <a:p>
+                      <a:pPr algn="ctr"/>
+                      <a:r>
+                        <a:rPr sz="1000" b="0">
+                          <a:solidFill>
+                            <a:srgbClr val="333333"/>
+                          </a:solidFill>
+                          <a:latin typeface="メイリオ"/>
+                          <a:ea typeface="メイリオ"/>
+                        </a:rPr>
+                        <a:t>4</a:t>
+                      </a:r>
+                    </a:p>
+                  </a:txBody>
+                  <a:tcPr anchor="ctr">
+                    <a:solidFill>
+                      <a:srgbClr val="FFFFFF"/>
+                    </a:solidFill>
+                    <a:lnL w="6350" cap="flat" cmpd="sng" algn="ctr">
+                      <a:solidFill>
+                        <a:srgbClr val="CCCCCC"/>
+                      </a:solidFill>
+                      <a:prstDash val="solid"/>
+                    </a:lnL>
+                    <a:lnR w="6350" cap="flat" cmpd="sng" algn="ctr">
+                      <a:solidFill>
+                        <a:srgbClr val="CCCCCC"/>
+                      </a:solidFill>
+                      <a:prstDash val="solid"/>
+                    </a:lnR>
+                    <a:lnT w="6350" cap="flat" cmpd="sng" algn="ctr">
+                      <a:solidFill>
+                        <a:srgbClr val="CCCCCC"/>
+                      </a:solidFill>
+                      <a:prstDash val="solid"/>
+                    </a:lnT>
+                    <a:lnB w="6350" cap="flat" cmpd="sng" algn="ctr">
+                      <a:solidFill>
+                        <a:srgbClr val="CCCCCC"/>
+                      </a:solidFill>
+                      <a:prstDash val="solid"/>
+                    </a:lnB>
+                  </a:tcPr>
+                </a:tc>
+                <a:tc>
+                  <a:txBody>
+                    <a:bodyPr wrap="square"/>
+                    <a:lstStyle/>
+                    <a:p>
+                      <a:pPr algn="ctr"/>
+                      <a:r>
+                        <a:rPr sz="1000" b="0">
+                          <a:solidFill>
+                            <a:srgbClr val="333333"/>
+                          </a:solidFill>
+                          <a:latin typeface="メイリオ"/>
+                          <a:ea typeface="メイリオ"/>
+                        </a:rPr>
+                        <a:t>8/31まで</a:t>
+                      </a:r>
+                    </a:p>
+                  </a:txBody>
+                  <a:tcPr anchor="ctr">
+                    <a:solidFill>
+                      <a:srgbClr val="FFFFFF"/>
+                    </a:solidFill>
+                    <a:lnL w="6350" cap="flat" cmpd="sng" algn="ctr">
+                      <a:solidFill>
+                        <a:srgbClr val="CCCCCC"/>
+                      </a:solidFill>
+                      <a:prstDash val="solid"/>
+                    </a:lnL>
+                    <a:lnR w="6350" cap="flat" cmpd="sng" algn="ctr">
+                      <a:solidFill>
+                        <a:srgbClr val="CCCCCC"/>
+                      </a:solidFill>
+                      <a:prstDash val="solid"/>
+                    </a:lnR>
+                    <a:lnT w="6350" cap="flat" cmpd="sng" algn="ctr">
+                      <a:solidFill>
+                        <a:srgbClr val="CCCCCC"/>
+                      </a:solidFill>
+                      <a:prstDash val="solid"/>
+                    </a:lnT>
+                    <a:lnB w="6350" cap="flat" cmpd="sng" algn="ctr">
+                      <a:solidFill>
+                        <a:srgbClr val="CCCCCC"/>
+                      </a:solidFill>
+                      <a:prstDash val="solid"/>
+                    </a:lnB>
+                  </a:tcPr>
+                </a:tc>
+                <a:tc>
+                  <a:txBody>
+                    <a:bodyPr wrap="square"/>
+                    <a:lstStyle/>
+                    <a:p>
+                      <a:pPr algn="l"/>
+                      <a:r>
+                        <a:rPr sz="1000" b="1">
+                          <a:solidFill>
+                            <a:srgbClr val="C00000"/>
+                          </a:solidFill>
+                          <a:latin typeface="メイリオ"/>
+                          <a:ea typeface="メイリオ"/>
+                        </a:rPr>
+                        <a:t>在庫情報CSVのフォーマット及び項目定義</a:t>
+                      </a:r>
+                    </a:p>
+                  </a:txBody>
+                  <a:tcPr anchor="ctr">
+                    <a:solidFill>
+                      <a:srgbClr val="FFFFFF"/>
+                    </a:solidFill>
+                    <a:lnL w="6350" cap="flat" cmpd="sng" algn="ctr">
+                      <a:solidFill>
+                        <a:srgbClr val="CCCCCC"/>
+                      </a:solidFill>
+                      <a:prstDash val="solid"/>
+                    </a:lnL>
+                    <a:lnR w="6350" cap="flat" cmpd="sng" algn="ctr">
+                      <a:solidFill>
+                        <a:srgbClr val="CCCCCC"/>
+                      </a:solidFill>
+                      <a:prstDash val="solid"/>
+                    </a:lnR>
+                    <a:lnT w="6350" cap="flat" cmpd="sng" algn="ctr">
+                      <a:solidFill>
+                        <a:srgbClr val="CCCCCC"/>
+                      </a:solidFill>
+                      <a:prstDash val="solid"/>
+                    </a:lnT>
+                    <a:lnB w="6350" cap="flat" cmpd="sng" algn="ctr">
+                      <a:solidFill>
+                        <a:srgbClr val="CCCCCC"/>
+                      </a:solidFill>
+                      <a:prstDash val="solid"/>
+                    </a:lnB>
+                  </a:tcPr>
+                </a:tc>
+                <a:tc>
+                  <a:txBody>
+                    <a:bodyPr wrap="square"/>
+                    <a:lstStyle/>
+                    <a:p>
+                      <a:pPr algn="l"/>
+                      <a:r>
+                        <a:rPr sz="1000" b="0">
+                          <a:solidFill>
+                            <a:srgbClr val="333333"/>
+                          </a:solidFill>
+                          <a:latin typeface="メイリオ"/>
+                          <a:ea typeface="メイリオ"/>
+                        </a:rPr>
+                        <a:t>基幹システムの仕様の整理</a:t>
+                      </a:r>
+                    </a:p>
+                  </a:txBody>
+                  <a:tcPr anchor="ctr">
+                    <a:solidFill>
+                      <a:srgbClr val="FFFFFF"/>
+                    </a:solidFill>
+                    <a:lnL w="6350" cap="flat" cmpd="sng" algn="ctr">
+                      <a:solidFill>
+                        <a:srgbClr val="CCCCCC"/>
+                      </a:solidFill>
+                      <a:prstDash val="solid"/>
+                    </a:lnL>
+                    <a:lnR w="6350" cap="flat" cmpd="sng" algn="ctr">
+                      <a:solidFill>
+                        <a:srgbClr val="CCCCCC"/>
+                      </a:solidFill>
+                      <a:prstDash val="solid"/>
+                    </a:lnR>
+                    <a:lnT w="6350" cap="flat" cmpd="sng" algn="ctr">
+                      <a:solidFill>
+                        <a:srgbClr val="CCCCCC"/>
+                      </a:solidFill>
+                      <a:prstDash val="solid"/>
+                    </a:lnT>
+                    <a:lnB w="6350" cap="flat" cmpd="sng" algn="ctr">
+                      <a:solidFill>
+                        <a:srgbClr val="CCCCCC"/>
+                      </a:solidFill>
+                      <a:prstDash val="solid"/>
+                    </a:lnB>
+                  </a:tcPr>
+                </a:tc>
+              </a:tr>
+              <a:tr h="600000">
                 <a:tc>
                   <a:txBody>
                     <a:bodyPr wrap="square"/>
@@ -8729,7 +8913,7 @@
                           <a:latin typeface="メイリオ"/>
                           <a:ea typeface="メイリオ"/>
                         </a:rPr>
-                        <a:t>非機能（性能・運用）の定義</a:t>
+                        <a:t>非機能要件</a:t>
                       </a:r>
                     </a:p>
                   </a:txBody>
@@ -8776,7 +8960,7 @@
         </p:nvSpPr>
         <p:spPr>
           <a:xfrm>
-            <a:off x="300000" y="5000000"/>
+            <a:off x="300000" y="4800000"/>
             <a:ext cx="9300000" cy="420000"/>
           </a:xfrm>
           <a:prstGeom prst="rect">
@@ -8799,7 +8983,7 @@
                 <a:latin typeface="メイリオ"/>
                 <a:ea typeface="メイリオ"/>
               </a:rPr>
-              <a:t>・基幹ベンダー様との連携打合せは、仕様整理・外部仕様定義の過程で別途実施します。</a:t>
+              <a:t>・基幹ベンダー様との打合せは、基幹仕様整理・連携外部仕様の過程で別途実施します。</a:t>
             </a:r>
           </a:p>
         </p:txBody>
@@ -8812,7 +8996,7 @@
         </p:nvSpPr>
         <p:spPr>
           <a:xfrm>
-            <a:off x="300000" y="5450000"/>
+            <a:off x="300000" y="5250000"/>
             <a:ext cx="9300000" cy="420000"/>
           </a:xfrm>
           <a:prstGeom prst="rect">
@@ -8835,7 +9019,7 @@
                 <a:latin typeface="メイリオ"/>
                 <a:ea typeface="メイリオ"/>
               </a:rPr>
-              <a:t>・販売組織階層は現状概念がない想定のため、一覧依頼はせず、ECへの落とし込み案を弊社より提示します。</a:t>
+              <a:t>・販売組織階層は現状概念がない想定のため一覧依頼はせず、ECへの落とし込み案を弊社より提示します。</a:t>
             </a:r>
           </a:p>
         </p:txBody>
@@ -8848,7 +9032,7 @@
         </p:nvSpPr>
         <p:spPr>
           <a:xfrm>
-            <a:off x="300000" y="5900000"/>
+            <a:off x="300000" y="5700000"/>
             <a:ext cx="9300000" cy="420000"/>
           </a:xfrm>
           <a:prstGeom prst="rect">
